--- a/scaffold/deck/KrishiSetu-Round0-20260816.pptx
+++ b/scaffold/deck/KrishiSetu-Round0-20260816.pptx
@@ -15,9 +15,10 @@
     <p:sldId id="263" r:id="rId9"/>
     <p:sldId id="264" r:id="rId10"/>
     <p:sldId id="265" r:id="rId11"/>
+    <p:sldId id="266" r:id="rId12"/>
   </p:sldIdLst>
   <p:notesMasterIdLst>
-    <p:notesMasterId r:id="rId12"/>
+    <p:notesMasterId r:id="rId13"/>
   </p:notesMasterIdLst>
   <p:sldSz cx="9144000" cy="5143500"/>
   <p:notesSz cx="5143500" cy="9144000"/>
@@ -599,7 +600,7 @@
           <a:p>
             <a:r>
               <a:rPr lang="en-US" dirty="0"/>
-              <a:t>Ask tied to the next milestone: faculty feedback contract. Slide 8 of the runbook said the same: feedback shapes Round 1. The limitation is the honesty move faculty will remember.</a:t>
+              <a:t>Founder-focused: what we shipped is the proof, not the bios. The E&amp;CE note is for faculty: this statement is the only one spanning CSE, ECE, and EE clusters (W3).</a:t>
             </a:r>
             <a:endParaRPr lang="en-US" dirty="0"/>
           </a:p>
@@ -623,6 +624,94 @@
             <a:fld id="{F7021451-1387-4CA6-816F-3879F97B5CBC}" type="slidenum">
               <a:rPr lang="en-US"/>
               <a:t>10</a:t>
+            </a:fld>
+            <a:endParaRPr lang="en-US"/>
+          </a:p>
+        </p:txBody>
+      </p:sp>
+    </p:spTree>
+    <p:extLst>
+      <p:ext uri="{BB962C8B-B14F-4D97-AF65-F5344CB8AC3E}">
+        <p14:creationId xmlns:p14="http://schemas.microsoft.com/office/powerpoint/2010/main" val="1024086991"/>
+      </p:ext>
+    </p:extLst>
+  </p:cSld>
+  <p:clrMapOvr>
+    <a:masterClrMapping/>
+  </p:clrMapOvr>
+</p:notes>
+</file>
+
+<file path=ppt/notesSlides/notesSlide11.xml><?xml version="1.0" encoding="utf-8"?>
+<p:notes xmlns:a="http://schemas.openxmlformats.org/drawingml/2006/main" xmlns:r="http://schemas.openxmlformats.org/officeDocument/2006/relationships" xmlns:p="http://schemas.openxmlformats.org/presentationml/2006/main">
+  <p:cSld>
+    <p:spTree>
+      <p:nvGrpSpPr>
+        <p:cNvPr id="1" name=""/>
+        <p:cNvGrpSpPr/>
+        <p:nvPr/>
+      </p:nvGrpSpPr>
+      <p:grpSpPr>
+        <a:xfrm>
+          <a:off x="0" y="0"/>
+          <a:ext cx="0" cy="0"/>
+          <a:chOff x="0" y="0"/>
+          <a:chExt cx="0" cy="0"/>
+        </a:xfrm>
+      </p:grpSpPr>
+      <p:sp>
+        <p:nvSpPr>
+          <p:cNvPr id="2" name="Slide Image Placeholder 1"/>
+          <p:cNvSpPr>
+            <a:spLocks noGrp="1" noRot="1" noChangeAspect="1"/>
+          </p:cNvSpPr>
+          <p:nvPr>
+            <p:ph type="sldImg"/>
+          </p:nvPr>
+        </p:nvSpPr>
+        <p:spPr/>
+      </p:sp>
+      <p:sp>
+        <p:nvSpPr>
+          <p:cNvPr id="3" name="Notes Placeholder 2"/>
+          <p:cNvSpPr>
+            <a:spLocks noGrp="1"/>
+          </p:cNvSpPr>
+          <p:nvPr>
+            <p:ph type="body" idx="1"/>
+          </p:nvPr>
+        </p:nvSpPr>
+        <p:spPr/>
+        <p:txBody>
+          <a:bodyPr/>
+          <a:lstStyle/>
+          <a:p>
+            <a:r>
+              <a:rPr lang="en-US" dirty="0"/>
+              <a:t>Ask tied to the next milestone: faculty feedback contract. Slide 8 of the runbook said the same: feedback shapes Round 1. The limitation is the honesty move faculty will remember.</a:t>
+            </a:r>
+            <a:endParaRPr lang="en-US" dirty="0"/>
+          </a:p>
+        </p:txBody>
+      </p:sp>
+      <p:sp>
+        <p:nvSpPr>
+          <p:cNvPr id="4" name="Slide Number Placeholder 3"/>
+          <p:cNvSpPr>
+            <a:spLocks noGrp="1"/>
+          </p:cNvSpPr>
+          <p:nvPr>
+            <p:ph type="sldNum" sz="quarter" idx="10"/>
+          </p:nvPr>
+        </p:nvSpPr>
+        <p:spPr/>
+        <p:txBody>
+          <a:bodyPr/>
+          <a:lstStyle/>
+          <a:p>
+            <a:fld id="{F7021451-1387-4CA6-816F-3879F97B5CBC}" type="slidenum">
+              <a:rPr lang="en-US"/>
+              <a:t>11</a:t>
             </a:fld>
             <a:endParaRPr lang="en-US"/>
           </a:p>
@@ -775,7 +864,7 @@
           <a:p>
             <a:r>
               <a:rPr lang="en-US" dirty="0"/>
-              <a:t>This is the user-corrected framing: the topic is an advisory platform, not an alert platform. Every action card carries a deadline and a source in the product; the deck keeps that promise on the mechanism slide.</a:t>
+              <a:t>This slide is the holy-shit moment: 48 runs, 7 waves, 2.5M chars, 4,000+ sources, A-D grades. Judges who ask 'where is this from' get a path. Never claim we read everything without this map to prove it.</a:t>
             </a:r>
             <a:endParaRPr lang="en-US" dirty="0"/>
           </a:p>
@@ -863,7 +952,7 @@
           <a:p>
             <a:r>
               <a:rPr lang="en-US" dirty="0"/>
-              <a:t>Mechanism slide mirrors the scaffold engine (ingest to audit) mounted on the agri domain. The offline queue and trace are already verified in the engine; the agri rules are the new layer.</a:t>
+              <a:t>This is the user-corrected framing: the topic is an advisory platform, not an alert platform. Every action card carries a deadline and a source in the product; the deck keeps that promise on the mechanism slide.</a:t>
             </a:r>
             <a:endParaRPr lang="en-US" dirty="0"/>
           </a:p>
@@ -951,7 +1040,7 @@
           <a:p>
             <a:r>
               <a:rPr lang="en-US" dirty="0"/>
-              <a:t>The deck claims only what the repo proves. Round 0 submission is PPT plus prototype; the demo carries the proof. The honesty strip is deliberate: faculty will probe.</a:t>
+              <a:t>Mechanism slide mirrors the scaffold engine (ingest to audit) mounted on the agri domain. The offline queue and trace are already verified in the engine; the agri rules are the new layer.</a:t>
             </a:r>
             <a:endParaRPr lang="en-US" dirty="0"/>
           </a:p>
@@ -1039,7 +1128,7 @@
           <a:p>
             <a:r>
               <a:rPr lang="en-US" dirty="0"/>
-              <a:t>One contrast, one sentence. The moat is the governed decision: action, deadline, source, cost of waiting, trace. Prior art rows are mine-verified, not marketing.</a:t>
+              <a:t>The deck claims only what the repo proves. Round 0 submission is PPT plus prototype; the demo carries the proof. The honesty strip is deliberate: faculty will probe.</a:t>
             </a:r>
             <a:endParaRPr lang="en-US" dirty="0"/>
           </a:p>
@@ -1127,7 +1216,7 @@
           <a:p>
             <a:r>
               <a:rPr lang="en-US" dirty="0"/>
-              <a:t>Mine-faithful: institutional buyer, assisted distribution. Three lines only, per YC rule. The claims rail is the wedge because PMFBY already pays for verified loss events.</a:t>
+              <a:t>One contrast, one sentence. The moat is the governed decision: action, deadline, source, cost of waiting, trace. Prior art rows are mine-verified, not marketing.</a:t>
             </a:r>
             <a:endParaRPr lang="en-US" dirty="0"/>
           </a:p>
@@ -1215,7 +1304,7 @@
           <a:p>
             <a:r>
               <a:rPr lang="en-US" dirty="0"/>
-              <a:t>One rail, one pilot, one quarter. Round 1 deepens exactly this: real feed connector, Odia voice, comprehension tests, agronomist review.</a:t>
+              <a:t>Mine-faithful: institutional buyer, assisted distribution. Three lines only, per YC rule. The claims rail is the wedge because PMFBY already pays for verified loss events.</a:t>
             </a:r>
             <a:endParaRPr lang="en-US" dirty="0"/>
           </a:p>
@@ -1303,7 +1392,7 @@
           <a:p>
             <a:r>
               <a:rPr lang="en-US" dirty="0"/>
-              <a:t>Founder-focused: what we shipped is the proof, not the bios. The E&amp;CE note is for faculty: this statement is the only one spanning CSE, ECE, and EE clusters (W3).</a:t>
+              <a:t>One rail, one pilot, one quarter. Round 1 deepens exactly this: real feed connector, Odia voice, comprehension tests, agronomist review.</a:t>
             </a:r>
             <a:endParaRPr lang="en-US" dirty="0"/>
           </a:p>
@@ -1846,6 +1935,764 @@
     <p:bg>
       <p:bgPr>
         <a:solidFill>
+          <a:srgbClr val="FFFFFF"/>
+        </a:solidFill>
+      </p:bgPr>
+    </p:bg>
+    <p:spTree>
+      <p:nvGrpSpPr>
+        <p:cNvPr id="1" name=""/>
+        <p:cNvGrpSpPr/>
+        <p:nvPr/>
+      </p:nvGrpSpPr>
+      <p:grpSpPr>
+        <a:xfrm>
+          <a:off x="0" y="0"/>
+          <a:ext cx="0" cy="0"/>
+          <a:chOff x="0" y="0"/>
+          <a:chExt cx="0" cy="0"/>
+        </a:xfrm>
+      </p:grpSpPr>
+      <p:sp>
+        <p:nvSpPr>
+          <p:cNvPr id="2" name="Text 0"/>
+          <p:cNvSpPr/>
+          <p:nvPr/>
+        </p:nvSpPr>
+        <p:spPr>
+          <a:xfrm>
+            <a:off x="457200" y="292608"/>
+            <a:ext cx="8229600" cy="502920"/>
+          </a:xfrm>
+          <a:prstGeom prst="rect">
+            <a:avLst/>
+          </a:prstGeom>
+          <a:noFill/>
+          <a:ln/>
+        </p:spPr>
+        <p:txBody>
+          <a:bodyPr wrap="square" lIns="0" tIns="0" rIns="0" bIns="0" rtlCol="0" anchor="ctr"/>
+          <a:lstStyle/>
+          <a:p>
+            <a:pPr indent="0" marL="0">
+              <a:buNone/>
+            </a:pPr>
+            <a:r>
+              <a:rPr lang="en-US" sz="2800" b="1" dirty="0">
+                <a:solidFill>
+                  <a:srgbClr val="2C5F2D"/>
+                </a:solidFill>
+                <a:latin typeface="Cambria" pitchFamily="34" charset="0"/>
+                <a:ea typeface="Cambria" pitchFamily="34" charset="-122"/>
+                <a:cs typeface="Cambria" pitchFamily="34" charset="-120"/>
+              </a:rPr>
+              <a:t>Team 511</a:t>
+            </a:r>
+            <a:endParaRPr lang="en-US" sz="2800" dirty="0"/>
+          </a:p>
+        </p:txBody>
+      </p:sp>
+      <p:sp>
+        <p:nvSpPr>
+          <p:cNvPr id="3" name="Shape 1"/>
+          <p:cNvSpPr/>
+          <p:nvPr/>
+        </p:nvSpPr>
+        <p:spPr>
+          <a:xfrm>
+            <a:off x="457200" y="1097280"/>
+            <a:ext cx="2529840" cy="1828800"/>
+          </a:xfrm>
+          <a:prstGeom prst="roundRect">
+            <a:avLst>
+              <a:gd name="adj" fmla="val 4000"/>
+            </a:avLst>
+          </a:prstGeom>
+          <a:solidFill>
+            <a:srgbClr val="F0F5EA"/>
+          </a:solidFill>
+          <a:ln w="12700">
+            <a:solidFill>
+              <a:srgbClr val="FFFFFF"/>
+            </a:solidFill>
+            <a:prstDash val="solid"/>
+          </a:ln>
+        </p:spPr>
+      </p:sp>
+      <p:sp>
+        <p:nvSpPr>
+          <p:cNvPr id="4" name="Shape 2"/>
+          <p:cNvSpPr/>
+          <p:nvPr/>
+        </p:nvSpPr>
+        <p:spPr>
+          <a:xfrm>
+            <a:off x="1402080" y="1280160"/>
+            <a:ext cx="640080" cy="640080"/>
+          </a:xfrm>
+          <a:prstGeom prst="ellipse">
+            <a:avLst/>
+          </a:prstGeom>
+          <a:solidFill>
+            <a:srgbClr val="97BC62"/>
+          </a:solidFill>
+          <a:ln/>
+        </p:spPr>
+      </p:sp>
+      <p:sp>
+        <p:nvSpPr>
+          <p:cNvPr id="5" name="Text 3"/>
+          <p:cNvSpPr/>
+          <p:nvPr/>
+        </p:nvSpPr>
+        <p:spPr>
+          <a:xfrm>
+            <a:off x="1402080" y="1353312"/>
+            <a:ext cx="640080" cy="457200"/>
+          </a:xfrm>
+          <a:prstGeom prst="rect">
+            <a:avLst/>
+          </a:prstGeom>
+          <a:noFill/>
+          <a:ln/>
+        </p:spPr>
+        <p:txBody>
+          <a:bodyPr wrap="square" lIns="0" tIns="0" rIns="0" bIns="0" rtlCol="0" anchor="ctr"/>
+          <a:lstStyle/>
+          <a:p>
+            <a:pPr algn="ctr" indent="0" marL="0">
+              <a:buNone/>
+            </a:pPr>
+            <a:r>
+              <a:rPr lang="en-US" sz="2000" b="1" dirty="0">
+                <a:solidFill>
+                  <a:srgbClr val="FFFFFF"/>
+                </a:solidFill>
+                <a:latin typeface="Cambria" pitchFamily="34" charset="0"/>
+                <a:ea typeface="Cambria" pitchFamily="34" charset="-122"/>
+                <a:cs typeface="Cambria" pitchFamily="34" charset="-120"/>
+              </a:rPr>
+              <a:t>1</a:t>
+            </a:r>
+            <a:endParaRPr lang="en-US" sz="2000" dirty="0"/>
+          </a:p>
+        </p:txBody>
+      </p:sp>
+      <p:sp>
+        <p:nvSpPr>
+          <p:cNvPr id="6" name="Text 4"/>
+          <p:cNvSpPr/>
+          <p:nvPr/>
+        </p:nvSpPr>
+        <p:spPr>
+          <a:xfrm>
+            <a:off x="594360" y="2057400"/>
+            <a:ext cx="2255520" cy="365760"/>
+          </a:xfrm>
+          <a:prstGeom prst="rect">
+            <a:avLst/>
+          </a:prstGeom>
+          <a:noFill/>
+          <a:ln/>
+        </p:spPr>
+        <p:txBody>
+          <a:bodyPr wrap="square" lIns="0" tIns="0" rIns="0" bIns="0" rtlCol="0" anchor="ctr"/>
+          <a:lstStyle/>
+          <a:p>
+            <a:pPr algn="ctr" indent="0" marL="0">
+              <a:buNone/>
+            </a:pPr>
+            <a:r>
+              <a:rPr lang="en-US" sz="1500" b="1" dirty="0">
+                <a:solidFill>
+                  <a:srgbClr val="2C5F2D"/>
+                </a:solidFill>
+                <a:latin typeface="Cambria" pitchFamily="34" charset="0"/>
+                <a:ea typeface="Cambria" pitchFamily="34" charset="-122"/>
+                <a:cs typeface="Cambria" pitchFamily="34" charset="-120"/>
+              </a:rPr>
+              <a:t>Harsh Gounder</a:t>
+            </a:r>
+            <a:endParaRPr lang="en-US" sz="1500" dirty="0"/>
+          </a:p>
+        </p:txBody>
+      </p:sp>
+      <p:sp>
+        <p:nvSpPr>
+          <p:cNvPr id="7" name="Text 5"/>
+          <p:cNvSpPr/>
+          <p:nvPr/>
+        </p:nvSpPr>
+        <p:spPr>
+          <a:xfrm>
+            <a:off x="594360" y="2423160"/>
+            <a:ext cx="2255520" cy="274320"/>
+          </a:xfrm>
+          <a:prstGeom prst="rect">
+            <a:avLst/>
+          </a:prstGeom>
+          <a:noFill/>
+          <a:ln/>
+        </p:spPr>
+        <p:txBody>
+          <a:bodyPr wrap="square" lIns="0" tIns="0" rIns="0" bIns="0" rtlCol="0" anchor="ctr"/>
+          <a:lstStyle/>
+          <a:p>
+            <a:pPr algn="ctr" indent="0" marL="0">
+              <a:buNone/>
+            </a:pPr>
+            <a:r>
+              <a:rPr lang="en-US" sz="1150" dirty="0">
+                <a:solidFill>
+                  <a:srgbClr val="5A6B5A"/>
+                </a:solidFill>
+                <a:latin typeface="Calibri" pitchFamily="34" charset="0"/>
+                <a:ea typeface="Calibri" pitchFamily="34" charset="-122"/>
+                <a:cs typeface="Calibri" pitchFamily="34" charset="-120"/>
+              </a:rPr>
+              <a:t>Lead, E&amp;CE</a:t>
+            </a:r>
+            <a:endParaRPr lang="en-US" sz="1150" dirty="0"/>
+          </a:p>
+        </p:txBody>
+      </p:sp>
+      <p:sp>
+        <p:nvSpPr>
+          <p:cNvPr id="8" name="Text 6"/>
+          <p:cNvSpPr/>
+          <p:nvPr/>
+        </p:nvSpPr>
+        <p:spPr>
+          <a:xfrm>
+            <a:off x="594360" y="2697480"/>
+            <a:ext cx="2255520" cy="320040"/>
+          </a:xfrm>
+          <a:prstGeom prst="rect">
+            <a:avLst/>
+          </a:prstGeom>
+          <a:noFill/>
+          <a:ln/>
+        </p:spPr>
+        <p:txBody>
+          <a:bodyPr wrap="square" lIns="0" tIns="0" rIns="0" bIns="0" rtlCol="0" anchor="ctr"/>
+          <a:lstStyle/>
+          <a:p>
+            <a:pPr algn="ctr" indent="0" marL="0">
+              <a:buNone/>
+            </a:pPr>
+            <a:r>
+              <a:rPr lang="en-US" sz="950" i="1" dirty="0">
+                <a:solidFill>
+                  <a:srgbClr val="5A6B5A"/>
+                </a:solidFill>
+                <a:latin typeface="Calibri" pitchFamily="34" charset="0"/>
+                <a:ea typeface="Calibri" pitchFamily="34" charset="-122"/>
+                <a:cs typeface="Calibri" pitchFamily="34" charset="-120"/>
+              </a:rPr>
+              <a:t>systems, research method, 17-statement evidence wave</a:t>
+            </a:r>
+            <a:endParaRPr lang="en-US" sz="950" dirty="0"/>
+          </a:p>
+        </p:txBody>
+      </p:sp>
+      <p:sp>
+        <p:nvSpPr>
+          <p:cNvPr id="9" name="Shape 7"/>
+          <p:cNvSpPr/>
+          <p:nvPr/>
+        </p:nvSpPr>
+        <p:spPr>
+          <a:xfrm>
+            <a:off x="3307080" y="1097280"/>
+            <a:ext cx="2529840" cy="1828800"/>
+          </a:xfrm>
+          <a:prstGeom prst="roundRect">
+            <a:avLst>
+              <a:gd name="adj" fmla="val 4000"/>
+            </a:avLst>
+          </a:prstGeom>
+          <a:solidFill>
+            <a:srgbClr val="F0F5EA"/>
+          </a:solidFill>
+          <a:ln w="12700">
+            <a:solidFill>
+              <a:srgbClr val="FFFFFF"/>
+            </a:solidFill>
+            <a:prstDash val="solid"/>
+          </a:ln>
+        </p:spPr>
+      </p:sp>
+      <p:sp>
+        <p:nvSpPr>
+          <p:cNvPr id="10" name="Shape 8"/>
+          <p:cNvSpPr/>
+          <p:nvPr/>
+        </p:nvSpPr>
+        <p:spPr>
+          <a:xfrm>
+            <a:off x="4251960" y="1280160"/>
+            <a:ext cx="640080" cy="640080"/>
+          </a:xfrm>
+          <a:prstGeom prst="ellipse">
+            <a:avLst/>
+          </a:prstGeom>
+          <a:solidFill>
+            <a:srgbClr val="97BC62"/>
+          </a:solidFill>
+          <a:ln/>
+        </p:spPr>
+      </p:sp>
+      <p:sp>
+        <p:nvSpPr>
+          <p:cNvPr id="11" name="Text 9"/>
+          <p:cNvSpPr/>
+          <p:nvPr/>
+        </p:nvSpPr>
+        <p:spPr>
+          <a:xfrm>
+            <a:off x="4251960" y="1353312"/>
+            <a:ext cx="640080" cy="457200"/>
+          </a:xfrm>
+          <a:prstGeom prst="rect">
+            <a:avLst/>
+          </a:prstGeom>
+          <a:noFill/>
+          <a:ln/>
+        </p:spPr>
+        <p:txBody>
+          <a:bodyPr wrap="square" lIns="0" tIns="0" rIns="0" bIns="0" rtlCol="0" anchor="ctr"/>
+          <a:lstStyle/>
+          <a:p>
+            <a:pPr algn="ctr" indent="0" marL="0">
+              <a:buNone/>
+            </a:pPr>
+            <a:r>
+              <a:rPr lang="en-US" sz="2000" b="1" dirty="0">
+                <a:solidFill>
+                  <a:srgbClr val="FFFFFF"/>
+                </a:solidFill>
+                <a:latin typeface="Cambria" pitchFamily="34" charset="0"/>
+                <a:ea typeface="Cambria" pitchFamily="34" charset="-122"/>
+                <a:cs typeface="Cambria" pitchFamily="34" charset="-120"/>
+              </a:rPr>
+              <a:t>2</a:t>
+            </a:r>
+            <a:endParaRPr lang="en-US" sz="2000" dirty="0"/>
+          </a:p>
+        </p:txBody>
+      </p:sp>
+      <p:sp>
+        <p:nvSpPr>
+          <p:cNvPr id="12" name="Text 10"/>
+          <p:cNvSpPr/>
+          <p:nvPr/>
+        </p:nvSpPr>
+        <p:spPr>
+          <a:xfrm>
+            <a:off x="3444240" y="2057400"/>
+            <a:ext cx="2255520" cy="365760"/>
+          </a:xfrm>
+          <a:prstGeom prst="rect">
+            <a:avLst/>
+          </a:prstGeom>
+          <a:noFill/>
+          <a:ln/>
+        </p:spPr>
+        <p:txBody>
+          <a:bodyPr wrap="square" lIns="0" tIns="0" rIns="0" bIns="0" rtlCol="0" anchor="ctr"/>
+          <a:lstStyle/>
+          <a:p>
+            <a:pPr algn="ctr" indent="0" marL="0">
+              <a:buNone/>
+            </a:pPr>
+            <a:r>
+              <a:rPr lang="en-US" sz="1500" b="1" dirty="0">
+                <a:solidFill>
+                  <a:srgbClr val="2C5F2D"/>
+                </a:solidFill>
+                <a:latin typeface="Cambria" pitchFamily="34" charset="0"/>
+                <a:ea typeface="Cambria" pitchFamily="34" charset="-122"/>
+                <a:cs typeface="Cambria" pitchFamily="34" charset="-120"/>
+              </a:rPr>
+              <a:t>Ayush Kharwar</a:t>
+            </a:r>
+            <a:endParaRPr lang="en-US" sz="1500" dirty="0"/>
+          </a:p>
+        </p:txBody>
+      </p:sp>
+      <p:sp>
+        <p:nvSpPr>
+          <p:cNvPr id="13" name="Text 11"/>
+          <p:cNvSpPr/>
+          <p:nvPr/>
+        </p:nvSpPr>
+        <p:spPr>
+          <a:xfrm>
+            <a:off x="3444240" y="2423160"/>
+            <a:ext cx="2255520" cy="274320"/>
+          </a:xfrm>
+          <a:prstGeom prst="rect">
+            <a:avLst/>
+          </a:prstGeom>
+          <a:noFill/>
+          <a:ln/>
+        </p:spPr>
+        <p:txBody>
+          <a:bodyPr wrap="square" lIns="0" tIns="0" rIns="0" bIns="0" rtlCol="0" anchor="ctr"/>
+          <a:lstStyle/>
+          <a:p>
+            <a:pPr algn="ctr" indent="0" marL="0">
+              <a:buNone/>
+            </a:pPr>
+            <a:r>
+              <a:rPr lang="en-US" sz="1150" dirty="0">
+                <a:solidFill>
+                  <a:srgbClr val="5A6B5A"/>
+                </a:solidFill>
+                <a:latin typeface="Calibri" pitchFamily="34" charset="0"/>
+                <a:ea typeface="Calibri" pitchFamily="34" charset="-122"/>
+                <a:cs typeface="Calibri" pitchFamily="34" charset="-120"/>
+              </a:rPr>
+              <a:t>Engine and demo</a:t>
+            </a:r>
+            <a:endParaRPr lang="en-US" sz="1150" dirty="0"/>
+          </a:p>
+        </p:txBody>
+      </p:sp>
+      <p:sp>
+        <p:nvSpPr>
+          <p:cNvPr id="14" name="Text 12"/>
+          <p:cNvSpPr/>
+          <p:nvPr/>
+        </p:nvSpPr>
+        <p:spPr>
+          <a:xfrm>
+            <a:off x="3444240" y="2697480"/>
+            <a:ext cx="2255520" cy="320040"/>
+          </a:xfrm>
+          <a:prstGeom prst="rect">
+            <a:avLst/>
+          </a:prstGeom>
+          <a:noFill/>
+          <a:ln/>
+        </p:spPr>
+        <p:txBody>
+          <a:bodyPr wrap="square" lIns="0" tIns="0" rIns="0" bIns="0" rtlCol="0" anchor="ctr"/>
+          <a:lstStyle/>
+          <a:p>
+            <a:pPr algn="ctr" indent="0" marL="0">
+              <a:buNone/>
+            </a:pPr>
+            <a:r>
+              <a:rPr lang="en-US" sz="950" i="1" dirty="0">
+                <a:solidFill>
+                  <a:srgbClr val="5A6B5A"/>
+                </a:solidFill>
+                <a:latin typeface="Calibri" pitchFamily="34" charset="0"/>
+                <a:ea typeface="Calibri" pitchFamily="34" charset="-122"/>
+                <a:cs typeface="Calibri" pitchFamily="34" charset="-120"/>
+              </a:rPr>
+              <a:t>zero-dep engine, demo.sh, seed data</a:t>
+            </a:r>
+            <a:endParaRPr lang="en-US" sz="950" dirty="0"/>
+          </a:p>
+        </p:txBody>
+      </p:sp>
+      <p:sp>
+        <p:nvSpPr>
+          <p:cNvPr id="15" name="Shape 13"/>
+          <p:cNvSpPr/>
+          <p:nvPr/>
+        </p:nvSpPr>
+        <p:spPr>
+          <a:xfrm>
+            <a:off x="6156960" y="1097280"/>
+            <a:ext cx="2529840" cy="1828800"/>
+          </a:xfrm>
+          <a:prstGeom prst="roundRect">
+            <a:avLst>
+              <a:gd name="adj" fmla="val 4000"/>
+            </a:avLst>
+          </a:prstGeom>
+          <a:solidFill>
+            <a:srgbClr val="F0F5EA"/>
+          </a:solidFill>
+          <a:ln w="12700">
+            <a:solidFill>
+              <a:srgbClr val="FFFFFF"/>
+            </a:solidFill>
+            <a:prstDash val="solid"/>
+          </a:ln>
+        </p:spPr>
+      </p:sp>
+      <p:sp>
+        <p:nvSpPr>
+          <p:cNvPr id="16" name="Shape 14"/>
+          <p:cNvSpPr/>
+          <p:nvPr/>
+        </p:nvSpPr>
+        <p:spPr>
+          <a:xfrm>
+            <a:off x="7101840" y="1280160"/>
+            <a:ext cx="640080" cy="640080"/>
+          </a:xfrm>
+          <a:prstGeom prst="ellipse">
+            <a:avLst/>
+          </a:prstGeom>
+          <a:solidFill>
+            <a:srgbClr val="97BC62"/>
+          </a:solidFill>
+          <a:ln/>
+        </p:spPr>
+      </p:sp>
+      <p:sp>
+        <p:nvSpPr>
+          <p:cNvPr id="17" name="Text 15"/>
+          <p:cNvSpPr/>
+          <p:nvPr/>
+        </p:nvSpPr>
+        <p:spPr>
+          <a:xfrm>
+            <a:off x="7101840" y="1353312"/>
+            <a:ext cx="640080" cy="457200"/>
+          </a:xfrm>
+          <a:prstGeom prst="rect">
+            <a:avLst/>
+          </a:prstGeom>
+          <a:noFill/>
+          <a:ln/>
+        </p:spPr>
+        <p:txBody>
+          <a:bodyPr wrap="square" lIns="0" tIns="0" rIns="0" bIns="0" rtlCol="0" anchor="ctr"/>
+          <a:lstStyle/>
+          <a:p>
+            <a:pPr algn="ctr" indent="0" marL="0">
+              <a:buNone/>
+            </a:pPr>
+            <a:r>
+              <a:rPr lang="en-US" sz="2000" b="1" dirty="0">
+                <a:solidFill>
+                  <a:srgbClr val="FFFFFF"/>
+                </a:solidFill>
+                <a:latin typeface="Cambria" pitchFamily="34" charset="0"/>
+                <a:ea typeface="Cambria" pitchFamily="34" charset="-122"/>
+                <a:cs typeface="Cambria" pitchFamily="34" charset="-120"/>
+              </a:rPr>
+              <a:t>3</a:t>
+            </a:r>
+            <a:endParaRPr lang="en-US" sz="2000" dirty="0"/>
+          </a:p>
+        </p:txBody>
+      </p:sp>
+      <p:sp>
+        <p:nvSpPr>
+          <p:cNvPr id="18" name="Text 16"/>
+          <p:cNvSpPr/>
+          <p:nvPr/>
+        </p:nvSpPr>
+        <p:spPr>
+          <a:xfrm>
+            <a:off x="6294120" y="2057400"/>
+            <a:ext cx="2255520" cy="365760"/>
+          </a:xfrm>
+          <a:prstGeom prst="rect">
+            <a:avLst/>
+          </a:prstGeom>
+          <a:noFill/>
+          <a:ln/>
+        </p:spPr>
+        <p:txBody>
+          <a:bodyPr wrap="square" lIns="0" tIns="0" rIns="0" bIns="0" rtlCol="0" anchor="ctr"/>
+          <a:lstStyle/>
+          <a:p>
+            <a:pPr algn="ctr" indent="0" marL="0">
+              <a:buNone/>
+            </a:pPr>
+            <a:r>
+              <a:rPr lang="en-US" sz="1500" b="1" dirty="0">
+                <a:solidFill>
+                  <a:srgbClr val="2C5F2D"/>
+                </a:solidFill>
+                <a:latin typeface="Cambria" pitchFamily="34" charset="0"/>
+                <a:ea typeface="Cambria" pitchFamily="34" charset="-122"/>
+                <a:cs typeface="Cambria" pitchFamily="34" charset="-120"/>
+              </a:rPr>
+              <a:t>Sujal Shukla</a:t>
+            </a:r>
+            <a:endParaRPr lang="en-US" sz="1500" dirty="0"/>
+          </a:p>
+        </p:txBody>
+      </p:sp>
+      <p:sp>
+        <p:nvSpPr>
+          <p:cNvPr id="19" name="Text 17"/>
+          <p:cNvSpPr/>
+          <p:nvPr/>
+        </p:nvSpPr>
+        <p:spPr>
+          <a:xfrm>
+            <a:off x="6294120" y="2423160"/>
+            <a:ext cx="2255520" cy="274320"/>
+          </a:xfrm>
+          <a:prstGeom prst="rect">
+            <a:avLst/>
+          </a:prstGeom>
+          <a:noFill/>
+          <a:ln/>
+        </p:spPr>
+        <p:txBody>
+          <a:bodyPr wrap="square" lIns="0" tIns="0" rIns="0" bIns="0" rtlCol="0" anchor="ctr"/>
+          <a:lstStyle/>
+          <a:p>
+            <a:pPr algn="ctr" indent="0" marL="0">
+              <a:buNone/>
+            </a:pPr>
+            <a:r>
+              <a:rPr lang="en-US" sz="1150" dirty="0">
+                <a:solidFill>
+                  <a:srgbClr val="5A6B5A"/>
+                </a:solidFill>
+                <a:latin typeface="Calibri" pitchFamily="34" charset="0"/>
+                <a:ea typeface="Calibri" pitchFamily="34" charset="-122"/>
+                <a:cs typeface="Calibri" pitchFamily="34" charset="-120"/>
+              </a:rPr>
+              <a:t>Deck and submission</a:t>
+            </a:r>
+            <a:endParaRPr lang="en-US" sz="1150" dirty="0"/>
+          </a:p>
+        </p:txBody>
+      </p:sp>
+      <p:sp>
+        <p:nvSpPr>
+          <p:cNvPr id="20" name="Text 18"/>
+          <p:cNvSpPr/>
+          <p:nvPr/>
+        </p:nvSpPr>
+        <p:spPr>
+          <a:xfrm>
+            <a:off x="6294120" y="2697480"/>
+            <a:ext cx="2255520" cy="320040"/>
+          </a:xfrm>
+          <a:prstGeom prst="rect">
+            <a:avLst/>
+          </a:prstGeom>
+          <a:noFill/>
+          <a:ln/>
+        </p:spPr>
+        <p:txBody>
+          <a:bodyPr wrap="square" lIns="0" tIns="0" rIns="0" bIns="0" rtlCol="0" anchor="ctr"/>
+          <a:lstStyle/>
+          <a:p>
+            <a:pPr algn="ctr" indent="0" marL="0">
+              <a:buNone/>
+            </a:pPr>
+            <a:r>
+              <a:rPr lang="en-US" sz="950" i="1" dirty="0">
+                <a:solidFill>
+                  <a:srgbClr val="5A6B5A"/>
+                </a:solidFill>
+                <a:latin typeface="Calibri" pitchFamily="34" charset="0"/>
+                <a:ea typeface="Calibri" pitchFamily="34" charset="-122"/>
+                <a:cs typeface="Calibri" pitchFamily="34" charset="-120"/>
+              </a:rPr>
+              <a:t>submission text, paste at gates, backup demo runner</a:t>
+            </a:r>
+            <a:endParaRPr lang="en-US" sz="950" dirty="0"/>
+          </a:p>
+        </p:txBody>
+      </p:sp>
+      <p:sp>
+        <p:nvSpPr>
+          <p:cNvPr id="21" name="Text 19"/>
+          <p:cNvSpPr/>
+          <p:nvPr/>
+        </p:nvSpPr>
+        <p:spPr>
+          <a:xfrm>
+            <a:off x="457200" y="3383280"/>
+            <a:ext cx="8229600" cy="457200"/>
+          </a:xfrm>
+          <a:prstGeom prst="rect">
+            <a:avLst/>
+          </a:prstGeom>
+          <a:noFill/>
+          <a:ln/>
+        </p:spPr>
+        <p:txBody>
+          <a:bodyPr wrap="square" lIns="0" tIns="0" rIns="0" bIns="0" rtlCol="0" anchor="ctr"/>
+          <a:lstStyle/>
+          <a:p>
+            <a:pPr indent="0" marL="0">
+              <a:buNone/>
+            </a:pPr>
+            <a:r>
+              <a:rPr lang="en-US" sz="1300" b="1" dirty="0">
+                <a:solidFill>
+                  <a:srgbClr val="212121"/>
+                </a:solidFill>
+                <a:latin typeface="Cambria" pitchFamily="34" charset="0"/>
+                <a:ea typeface="Cambria" pitchFamily="34" charset="-122"/>
+                <a:cs typeface="Cambria" pitchFamily="34" charset="-120"/>
+              </a:rPr>
+              <a:t>Already shipped: a verified governed pipeline (85/85 suites), honest outcome badges, and a statement-faithful research method with every claim sourced.</a:t>
+            </a:r>
+            <a:endParaRPr lang="en-US" sz="1300" dirty="0"/>
+          </a:p>
+        </p:txBody>
+      </p:sp>
+      <p:sp>
+        <p:nvSpPr>
+          <p:cNvPr id="22" name="Text 20"/>
+          <p:cNvSpPr/>
+          <p:nvPr/>
+        </p:nvSpPr>
+        <p:spPr>
+          <a:xfrm>
+            <a:off x="457200" y="4828032"/>
+            <a:ext cx="8229600" cy="274320"/>
+          </a:xfrm>
+          <a:prstGeom prst="rect">
+            <a:avLst/>
+          </a:prstGeom>
+          <a:noFill/>
+          <a:ln/>
+        </p:spPr>
+        <p:txBody>
+          <a:bodyPr wrap="square" lIns="0" tIns="0" rIns="0" bIns="0" rtlCol="0" anchor="ctr"/>
+          <a:lstStyle/>
+          <a:p>
+            <a:pPr indent="0" marL="0">
+              <a:buNone/>
+            </a:pPr>
+            <a:r>
+              <a:rPr lang="en-US" sz="900" dirty="0">
+                <a:solidFill>
+                  <a:srgbClr val="5A6B5A"/>
+                </a:solidFill>
+                <a:latin typeface="Calibri" pitchFamily="34" charset="0"/>
+                <a:ea typeface="Calibri" pitchFamily="34" charset="-122"/>
+                <a:cs typeface="Calibri" pitchFamily="34" charset="-120"/>
+              </a:rPr>
+              <a:t>E&amp;CE research profile matches the statement core: sensors, communications, ML, power resilience.</a:t>
+            </a:r>
+            <a:endParaRPr lang="en-US" sz="900" dirty="0"/>
+          </a:p>
+        </p:txBody>
+      </p:sp>
+    </p:spTree>
+  </p:cSld>
+  <p:clrMapOvr>
+    <a:masterClrMapping/>
+  </p:clrMapOvr>
+</p:sld>
+</file>
+
+<file path=ppt/slides/slide11.xml><?xml version="1.0" encoding="utf-8"?>
+<p:sld xmlns:a="http://schemas.openxmlformats.org/drawingml/2006/main" xmlns:r="http://schemas.openxmlformats.org/officeDocument/2006/relationships" xmlns:p="http://schemas.openxmlformats.org/presentationml/2006/main">
+  <p:cSld name="Slide 11">
+    <p:bg>
+      <p:bgPr>
+        <a:solidFill>
           <a:srgbClr val="1F3D26"/>
         </a:solidFill>
       </p:bgPr>
@@ -2617,24 +3464,24 @@
         </p:nvSpPr>
         <p:spPr>
           <a:xfrm>
-            <a:off x="457200" y="292608"/>
-            <a:ext cx="8229600" cy="502920"/>
-          </a:xfrm>
-          <a:prstGeom prst="rect">
-            <a:avLst/>
-          </a:prstGeom>
-          <a:noFill/>
-          <a:ln/>
-        </p:spPr>
-        <p:txBody>
-          <a:bodyPr wrap="square" lIns="0" tIns="0" rIns="0" bIns="0" rtlCol="0" anchor="ctr"/>
-          <a:lstStyle/>
-          <a:p>
-            <a:pPr indent="0" marL="0">
-              <a:buNone/>
-            </a:pPr>
-            <a:r>
-              <a:rPr lang="en-US" sz="2800" b="1" dirty="0">
+            <a:off x="457200" y="320040"/>
+            <a:ext cx="8229600" cy="548640"/>
+          </a:xfrm>
+          <a:prstGeom prst="rect">
+            <a:avLst/>
+          </a:prstGeom>
+          <a:noFill/>
+          <a:ln/>
+        </p:spPr>
+        <p:txBody>
+          <a:bodyPr wrap="square" lIns="0" tIns="0" rIns="0" bIns="0" rtlCol="0" anchor="ctr"/>
+          <a:lstStyle/>
+          <a:p>
+            <a:pPr indent="0" marL="0">
+              <a:buNone/>
+            </a:pPr>
+            <a:r>
+              <a:rPr lang="en-US" sz="3000" b="1" dirty="0">
                 <a:solidFill>
                   <a:srgbClr val="2C5F2D"/>
                 </a:solidFill>
@@ -2642,69 +3489,30 @@
                 <a:ea typeface="Cambria" pitchFamily="34" charset="-122"/>
                 <a:cs typeface="Cambria" pitchFamily="34" charset="-120"/>
               </a:rPr>
-              <a:t>The solution: an advisory engine, not an alert system</a:t>
-            </a:r>
-            <a:endParaRPr lang="en-US" sz="2800" dirty="0"/>
-          </a:p>
-        </p:txBody>
-      </p:sp>
-      <p:sp>
-        <p:nvSpPr>
-          <p:cNvPr id="3" name="Text 1"/>
-          <p:cNvSpPr/>
-          <p:nvPr/>
-        </p:nvSpPr>
-        <p:spPr>
-          <a:xfrm>
-            <a:off x="457200" y="914400"/>
-            <a:ext cx="8229600" cy="548640"/>
-          </a:xfrm>
-          <a:prstGeom prst="rect">
-            <a:avLst/>
-          </a:prstGeom>
-          <a:noFill/>
-          <a:ln/>
-        </p:spPr>
-        <p:txBody>
-          <a:bodyPr wrap="square" lIns="0" tIns="0" rIns="0" bIns="0" rtlCol="0" anchor="ctr"/>
-          <a:lstStyle/>
-          <a:p>
-            <a:pPr indent="0" marL="0">
-              <a:buNone/>
-            </a:pPr>
-            <a:r>
-              <a:rPr lang="en-US" sz="1600" b="1" dirty="0">
-                <a:solidFill>
-                  <a:srgbClr val="212121"/>
-                </a:solidFill>
-                <a:latin typeface="Cambria" pitchFamily="34" charset="0"/>
-                <a:ea typeface="Cambria" pitchFamily="34" charset="-122"/>
-                <a:cs typeface="Cambria" pitchFamily="34" charset="-120"/>
-              </a:rPr>
-              <a:t>Every forecast becomes a decision: an action, a deadline, a source, and a fallback, in Odia, on any phone.</a:t>
-            </a:r>
-            <a:endParaRPr lang="en-US" sz="1600" dirty="0"/>
-          </a:p>
-        </p:txBody>
-      </p:sp>
-      <p:sp>
-        <p:nvSpPr>
-          <p:cNvPr id="4" name="Shape 2"/>
-          <p:cNvSpPr/>
-          <p:nvPr/>
-        </p:nvSpPr>
-        <p:spPr>
-          <a:xfrm>
-            <a:off x="457200" y="1600200"/>
-            <a:ext cx="2529840" cy="2377440"/>
+              <a:t>The research machine behind this deck</a:t>
+            </a:r>
+            <a:endParaRPr lang="en-US" sz="3000" dirty="0"/>
+          </a:p>
+        </p:txBody>
+      </p:sp>
+      <p:sp>
+        <p:nvSpPr>
+          <p:cNvPr id="3" name="Shape 1"/>
+          <p:cNvSpPr/>
+          <p:nvPr/>
+        </p:nvSpPr>
+        <p:spPr>
+          <a:xfrm>
+            <a:off x="457200" y="1051560"/>
+            <a:ext cx="4069080" cy="1097280"/>
           </a:xfrm>
           <a:prstGeom prst="roundRect">
             <a:avLst>
-              <a:gd name="adj" fmla="val 3077"/>
+              <a:gd name="adj" fmla="val 6667"/>
             </a:avLst>
           </a:prstGeom>
           <a:solidFill>
-            <a:srgbClr val="F0F5EA"/>
+            <a:srgbClr val="D8E8C8"/>
           </a:solidFill>
           <a:ln w="12700">
             <a:solidFill>
@@ -2716,222 +3524,100 @@
       </p:sp>
       <p:sp>
         <p:nvSpPr>
-          <p:cNvPr id="5" name="Shape 3"/>
-          <p:cNvSpPr/>
-          <p:nvPr/>
-        </p:nvSpPr>
-        <p:spPr>
-          <a:xfrm>
-            <a:off x="594360" y="1783080"/>
-            <a:ext cx="384048" cy="384048"/>
-          </a:xfrm>
-          <a:prstGeom prst="ellipse">
-            <a:avLst/>
-          </a:prstGeom>
-          <a:solidFill>
-            <a:srgbClr val="97BC62"/>
-          </a:solidFill>
-          <a:ln/>
-        </p:spPr>
-      </p:sp>
-      <p:sp>
-        <p:nvSpPr>
-          <p:cNvPr id="6" name="Text 4"/>
-          <p:cNvSpPr/>
-          <p:nvPr/>
-        </p:nvSpPr>
-        <p:spPr>
-          <a:xfrm>
-            <a:off x="594360" y="1828800"/>
-            <a:ext cx="384048" cy="292608"/>
-          </a:xfrm>
-          <a:prstGeom prst="rect">
-            <a:avLst/>
-          </a:prstGeom>
-          <a:noFill/>
-          <a:ln/>
-        </p:spPr>
-        <p:txBody>
-          <a:bodyPr wrap="square" lIns="0" tIns="0" rIns="0" bIns="0" rtlCol="0" anchor="ctr"/>
-          <a:lstStyle/>
-          <a:p>
-            <a:pPr algn="ctr" indent="0" marL="0">
-              <a:buNone/>
-            </a:pPr>
-            <a:r>
-              <a:rPr lang="en-US" sz="1400" b="1" dirty="0">
-                <a:solidFill>
-                  <a:srgbClr val="FFFFFF"/>
+          <p:cNvPr id="4" name="Text 2"/>
+          <p:cNvSpPr/>
+          <p:nvPr/>
+        </p:nvSpPr>
+        <p:spPr>
+          <a:xfrm>
+            <a:off x="594360" y="1143000"/>
+            <a:ext cx="1371600" cy="457200"/>
+          </a:xfrm>
+          <a:prstGeom prst="rect">
+            <a:avLst/>
+          </a:prstGeom>
+          <a:noFill/>
+          <a:ln/>
+        </p:spPr>
+        <p:txBody>
+          <a:bodyPr wrap="square" lIns="0" tIns="0" rIns="0" bIns="0" rtlCol="0" anchor="ctr"/>
+          <a:lstStyle/>
+          <a:p>
+            <a:pPr indent="0" marL="0">
+              <a:buNone/>
+            </a:pPr>
+            <a:r>
+              <a:rPr lang="en-US" sz="2600" b="1" dirty="0">
+                <a:solidFill>
+                  <a:srgbClr val="2C5F2D"/>
+                </a:solidFill>
+                <a:latin typeface="Cambria" pitchFamily="34" charset="0"/>
+                <a:ea typeface="Cambria" pitchFamily="34" charset="-122"/>
+                <a:cs typeface="Cambria" pitchFamily="34" charset="-120"/>
+              </a:rPr>
+              <a:t>48</a:t>
+            </a:r>
+            <a:endParaRPr lang="en-US" sz="2600" dirty="0"/>
+          </a:p>
+        </p:txBody>
+      </p:sp>
+      <p:sp>
+        <p:nvSpPr>
+          <p:cNvPr id="5" name="Text 3"/>
+          <p:cNvSpPr/>
+          <p:nvPr/>
+        </p:nvSpPr>
+        <p:spPr>
+          <a:xfrm>
+            <a:off x="2011680" y="1143000"/>
+            <a:ext cx="2423160" cy="914400"/>
+          </a:xfrm>
+          <a:prstGeom prst="rect">
+            <a:avLst/>
+          </a:prstGeom>
+          <a:noFill/>
+          <a:ln/>
+        </p:spPr>
+        <p:txBody>
+          <a:bodyPr wrap="square" lIns="0" tIns="0" rIns="0" bIns="0" rtlCol="0" anchor="ctr"/>
+          <a:lstStyle/>
+          <a:p>
+            <a:pPr indent="0" marL="0">
+              <a:buNone/>
+            </a:pPr>
+            <a:r>
+              <a:rPr lang="en-US" sz="950" dirty="0">
+                <a:solidFill>
+                  <a:srgbClr val="212121"/>
                 </a:solidFill>
                 <a:latin typeface="Calibri" pitchFamily="34" charset="0"/>
                 <a:ea typeface="Calibri" pitchFamily="34" charset="-122"/>
                 <a:cs typeface="Calibri" pitchFamily="34" charset="-120"/>
               </a:rPr>
-              <a:t>1</a:t>
-            </a:r>
-            <a:endParaRPr lang="en-US" sz="1400" dirty="0"/>
-          </a:p>
-        </p:txBody>
-      </p:sp>
-      <p:sp>
-        <p:nvSpPr>
-          <p:cNvPr id="7" name="Text 5"/>
-          <p:cNvSpPr/>
-          <p:nvPr/>
-        </p:nvSpPr>
-        <p:spPr>
-          <a:xfrm>
-            <a:off x="1078992" y="1810512"/>
-            <a:ext cx="1798320" cy="320040"/>
-          </a:xfrm>
-          <a:prstGeom prst="rect">
-            <a:avLst/>
-          </a:prstGeom>
-          <a:noFill/>
-          <a:ln/>
-        </p:spPr>
-        <p:txBody>
-          <a:bodyPr wrap="square" lIns="0" tIns="0" rIns="0" bIns="0" rtlCol="0" anchor="ctr"/>
-          <a:lstStyle/>
-          <a:p>
-            <a:pPr indent="0" marL="0">
-              <a:buNone/>
-            </a:pPr>
-            <a:r>
-              <a:rPr lang="en-US" sz="1500" b="1" dirty="0">
-                <a:solidFill>
-                  <a:srgbClr val="2C5F2D"/>
-                </a:solidFill>
-                <a:latin typeface="Cambria" pitchFamily="34" charset="0"/>
-                <a:ea typeface="Cambria" pitchFamily="34" charset="-122"/>
-                <a:cs typeface="Cambria" pitchFamily="34" charset="-120"/>
-              </a:rPr>
-              <a:t>BEFORE</a:t>
-            </a:r>
-            <a:endParaRPr lang="en-US" sz="1500" dirty="0"/>
-          </a:p>
-        </p:txBody>
-      </p:sp>
-      <p:sp>
-        <p:nvSpPr>
-          <p:cNvPr id="8" name="Text 6"/>
-          <p:cNvSpPr/>
-          <p:nvPr/>
-        </p:nvSpPr>
-        <p:spPr>
-          <a:xfrm>
-            <a:off x="640080" y="2331720"/>
-            <a:ext cx="2164080" cy="1508760"/>
-          </a:xfrm>
-          <a:prstGeom prst="rect">
-            <a:avLst/>
-          </a:prstGeom>
-          <a:noFill/>
-          <a:ln/>
-        </p:spPr>
-        <p:txBody>
-          <a:bodyPr wrap="square" lIns="0" tIns="0" rIns="0" bIns="0" rtlCol="0" anchor="ctr"/>
-          <a:lstStyle/>
-          <a:p>
-            <a:pPr indent="0" marL="0">
-              <a:lnSpc>
-                <a:spcPts val="2200"/>
-              </a:lnSpc>
-              <a:buNone/>
-            </a:pPr>
-            <a:r>
-              <a:rPr lang="en-US" sz="1100" dirty="0">
-                <a:solidFill>
-                  <a:srgbClr val="212121"/>
-                </a:solidFill>
-                <a:latin typeface="Calibri" pitchFamily="34" charset="0"/>
-                <a:ea typeface="Calibri" pitchFamily="34" charset="-122"/>
-                <a:cs typeface="Calibri" pitchFamily="34" charset="-120"/>
-              </a:rPr>
-              <a:t>STAGE THE CROP</a:t>
-            </a:r>
-            <a:endParaRPr lang="en-US" sz="1100" dirty="0"/>
-          </a:p>
-          <a:p>
-            <a:pPr indent="0" marL="0">
-              <a:lnSpc>
-                <a:spcPts val="2200"/>
-              </a:lnSpc>
-              <a:buNone/>
-            </a:pPr>
-            <a:r>
-              <a:rPr lang="en-US" sz="1100" dirty="0">
-                <a:solidFill>
-                  <a:srgbClr val="212121"/>
-                </a:solidFill>
-                <a:latin typeface="Calibri" pitchFamily="34" charset="0"/>
-                <a:ea typeface="Calibri" pitchFamily="34" charset="-122"/>
-                <a:cs typeface="Calibri" pitchFamily="34" charset="-120"/>
-              </a:rPr>
-              <a:t>harvest or move to raised platform on a deadline</a:t>
-            </a:r>
-            <a:endParaRPr lang="en-US" sz="1100" dirty="0"/>
-          </a:p>
-          <a:p>
-            <a:pPr indent="0" marL="0">
-              <a:lnSpc>
-                <a:spcPts val="2200"/>
-              </a:lnSpc>
-              <a:buNone/>
-            </a:pPr>
-            <a:r>
-              <a:rPr lang="en-US" sz="1100" dirty="0">
-                <a:solidFill>
-                  <a:srgbClr val="212121"/>
-                </a:solidFill>
-                <a:latin typeface="Calibri" pitchFamily="34" charset="0"/>
-                <a:ea typeface="Calibri" pitchFamily="34" charset="-122"/>
-                <a:cs typeface="Calibri" pitchFamily="34" charset="-120"/>
-              </a:rPr>
-              <a:t>protect seed, livestock, equipment</a:t>
-            </a:r>
-            <a:endParaRPr lang="en-US" sz="1100" dirty="0"/>
-          </a:p>
-          <a:p>
-            <a:pPr indent="0" marL="0">
-              <a:lnSpc>
-                <a:spcPts val="2200"/>
-              </a:lnSpc>
-              <a:buNone/>
-            </a:pPr>
-            <a:r>
-              <a:rPr lang="en-US" sz="1100" dirty="0">
-                <a:solidFill>
-                  <a:srgbClr val="212121"/>
-                </a:solidFill>
-                <a:latin typeface="Calibri" pitchFamily="34" charset="0"/>
-                <a:ea typeface="Calibri" pitchFamily="34" charset="-122"/>
-                <a:cs typeface="Calibri" pitchFamily="34" charset="-120"/>
-              </a:rPr>
-              <a:t>evacuate people, secure the house</a:t>
-            </a:r>
-            <a:endParaRPr lang="en-US" sz="1100" dirty="0"/>
-          </a:p>
-        </p:txBody>
-      </p:sp>
-      <p:sp>
-        <p:nvSpPr>
-          <p:cNvPr id="9" name="Shape 7"/>
-          <p:cNvSpPr/>
-          <p:nvPr/>
-        </p:nvSpPr>
-        <p:spPr>
-          <a:xfrm>
-            <a:off x="3307080" y="1600200"/>
-            <a:ext cx="2529840" cy="2377440"/>
+              <a:t>parallel deep-research runs, 7 waves, every run multi-channel with coverage tables, noise logs, A-D evidence grades</a:t>
+            </a:r>
+            <a:endParaRPr lang="en-US" sz="950" dirty="0"/>
+          </a:p>
+        </p:txBody>
+      </p:sp>
+      <p:sp>
+        <p:nvSpPr>
+          <p:cNvPr id="6" name="Shape 4"/>
+          <p:cNvSpPr/>
+          <p:nvPr/>
+        </p:nvSpPr>
+        <p:spPr>
+          <a:xfrm>
+            <a:off x="4617720" y="1051560"/>
+            <a:ext cx="4069080" cy="1097280"/>
           </a:xfrm>
           <a:prstGeom prst="roundRect">
             <a:avLst>
-              <a:gd name="adj" fmla="val 3077"/>
+              <a:gd name="adj" fmla="val 6667"/>
             </a:avLst>
           </a:prstGeom>
           <a:solidFill>
-            <a:srgbClr val="F0F5EA"/>
+            <a:srgbClr val="D8E8C8"/>
           </a:solidFill>
           <a:ln w="12700">
             <a:solidFill>
@@ -2943,222 +3629,100 @@
       </p:sp>
       <p:sp>
         <p:nvSpPr>
-          <p:cNvPr id="10" name="Shape 8"/>
-          <p:cNvSpPr/>
-          <p:nvPr/>
-        </p:nvSpPr>
-        <p:spPr>
-          <a:xfrm>
-            <a:off x="3444240" y="1783080"/>
-            <a:ext cx="384048" cy="384048"/>
-          </a:xfrm>
-          <a:prstGeom prst="ellipse">
-            <a:avLst/>
-          </a:prstGeom>
-          <a:solidFill>
-            <a:srgbClr val="97BC62"/>
-          </a:solidFill>
-          <a:ln/>
-        </p:spPr>
-      </p:sp>
-      <p:sp>
-        <p:nvSpPr>
-          <p:cNvPr id="11" name="Text 9"/>
-          <p:cNvSpPr/>
-          <p:nvPr/>
-        </p:nvSpPr>
-        <p:spPr>
-          <a:xfrm>
-            <a:off x="3444240" y="1828800"/>
-            <a:ext cx="384048" cy="292608"/>
-          </a:xfrm>
-          <a:prstGeom prst="rect">
-            <a:avLst/>
-          </a:prstGeom>
-          <a:noFill/>
-          <a:ln/>
-        </p:spPr>
-        <p:txBody>
-          <a:bodyPr wrap="square" lIns="0" tIns="0" rIns="0" bIns="0" rtlCol="0" anchor="ctr"/>
-          <a:lstStyle/>
-          <a:p>
-            <a:pPr algn="ctr" indent="0" marL="0">
-              <a:buNone/>
-            </a:pPr>
-            <a:r>
-              <a:rPr lang="en-US" sz="1400" b="1" dirty="0">
-                <a:solidFill>
-                  <a:srgbClr val="FFFFFF"/>
+          <p:cNvPr id="7" name="Text 5"/>
+          <p:cNvSpPr/>
+          <p:nvPr/>
+        </p:nvSpPr>
+        <p:spPr>
+          <a:xfrm>
+            <a:off x="4754880" y="1143000"/>
+            <a:ext cx="1371600" cy="457200"/>
+          </a:xfrm>
+          <a:prstGeom prst="rect">
+            <a:avLst/>
+          </a:prstGeom>
+          <a:noFill/>
+          <a:ln/>
+        </p:spPr>
+        <p:txBody>
+          <a:bodyPr wrap="square" lIns="0" tIns="0" rIns="0" bIns="0" rtlCol="0" anchor="ctr"/>
+          <a:lstStyle/>
+          <a:p>
+            <a:pPr indent="0" marL="0">
+              <a:buNone/>
+            </a:pPr>
+            <a:r>
+              <a:rPr lang="en-US" sz="2600" b="1" dirty="0">
+                <a:solidFill>
+                  <a:srgbClr val="2C5F2D"/>
+                </a:solidFill>
+                <a:latin typeface="Cambria" pitchFamily="34" charset="0"/>
+                <a:ea typeface="Cambria" pitchFamily="34" charset="-122"/>
+                <a:cs typeface="Cambria" pitchFamily="34" charset="-120"/>
+              </a:rPr>
+              <a:t>2.5M+</a:t>
+            </a:r>
+            <a:endParaRPr lang="en-US" sz="2600" dirty="0"/>
+          </a:p>
+        </p:txBody>
+      </p:sp>
+      <p:sp>
+        <p:nvSpPr>
+          <p:cNvPr id="8" name="Text 6"/>
+          <p:cNvSpPr/>
+          <p:nvPr/>
+        </p:nvSpPr>
+        <p:spPr>
+          <a:xfrm>
+            <a:off x="6172200" y="1143000"/>
+            <a:ext cx="2423160" cy="914400"/>
+          </a:xfrm>
+          <a:prstGeom prst="rect">
+            <a:avLst/>
+          </a:prstGeom>
+          <a:noFill/>
+          <a:ln/>
+        </p:spPr>
+        <p:txBody>
+          <a:bodyPr wrap="square" lIns="0" tIns="0" rIns="0" bIns="0" rtlCol="0" anchor="ctr"/>
+          <a:lstStyle/>
+          <a:p>
+            <a:pPr indent="0" marL="0">
+              <a:buNone/>
+            </a:pPr>
+            <a:r>
+              <a:rPr lang="en-US" sz="950" dirty="0">
+                <a:solidFill>
+                  <a:srgbClr val="212121"/>
                 </a:solidFill>
                 <a:latin typeface="Calibri" pitchFamily="34" charset="0"/>
                 <a:ea typeface="Calibri" pitchFamily="34" charset="-122"/>
                 <a:cs typeface="Calibri" pitchFamily="34" charset="-120"/>
               </a:rPr>
-              <a:t>2</a:t>
-            </a:r>
-            <a:endParaRPr lang="en-US" sz="1400" dirty="0"/>
-          </a:p>
-        </p:txBody>
-      </p:sp>
-      <p:sp>
-        <p:nvSpPr>
-          <p:cNvPr id="12" name="Text 10"/>
-          <p:cNvSpPr/>
-          <p:nvPr/>
-        </p:nvSpPr>
-        <p:spPr>
-          <a:xfrm>
-            <a:off x="3928872" y="1810512"/>
-            <a:ext cx="1798320" cy="320040"/>
-          </a:xfrm>
-          <a:prstGeom prst="rect">
-            <a:avLst/>
-          </a:prstGeom>
-          <a:noFill/>
-          <a:ln/>
-        </p:spPr>
-        <p:txBody>
-          <a:bodyPr wrap="square" lIns="0" tIns="0" rIns="0" bIns="0" rtlCol="0" anchor="ctr"/>
-          <a:lstStyle/>
-          <a:p>
-            <a:pPr indent="0" marL="0">
-              <a:buNone/>
-            </a:pPr>
-            <a:r>
-              <a:rPr lang="en-US" sz="1500" b="1" dirty="0">
-                <a:solidFill>
-                  <a:srgbClr val="2C5F2D"/>
-                </a:solidFill>
-                <a:latin typeface="Cambria" pitchFamily="34" charset="0"/>
-                <a:ea typeface="Cambria" pitchFamily="34" charset="-122"/>
-                <a:cs typeface="Cambria" pitchFamily="34" charset="-120"/>
-              </a:rPr>
-              <a:t>DURING</a:t>
-            </a:r>
-            <a:endParaRPr lang="en-US" sz="1500" dirty="0"/>
-          </a:p>
-        </p:txBody>
-      </p:sp>
-      <p:sp>
-        <p:nvSpPr>
-          <p:cNvPr id="13" name="Text 11"/>
-          <p:cNvSpPr/>
-          <p:nvPr/>
-        </p:nvSpPr>
-        <p:spPr>
-          <a:xfrm>
-            <a:off x="3489960" y="2331720"/>
-            <a:ext cx="2164080" cy="1508760"/>
-          </a:xfrm>
-          <a:prstGeom prst="rect">
-            <a:avLst/>
-          </a:prstGeom>
-          <a:noFill/>
-          <a:ln/>
-        </p:spPr>
-        <p:txBody>
-          <a:bodyPr wrap="square" lIns="0" tIns="0" rIns="0" bIns="0" rtlCol="0" anchor="ctr"/>
-          <a:lstStyle/>
-          <a:p>
-            <a:pPr indent="0" marL="0">
-              <a:lnSpc>
-                <a:spcPts val="2200"/>
-              </a:lnSpc>
-              <a:buNone/>
-            </a:pPr>
-            <a:r>
-              <a:rPr lang="en-US" sz="1100" dirty="0">
-                <a:solidFill>
-                  <a:srgbClr val="212121"/>
-                </a:solidFill>
-                <a:latin typeface="Calibri" pitchFamily="34" charset="0"/>
-                <a:ea typeface="Calibri" pitchFamily="34" charset="-122"/>
-                <a:cs typeface="Calibri" pitchFamily="34" charset="-120"/>
-              </a:rPr>
-              <a:t>SHELTER AND SAFETY</a:t>
-            </a:r>
-            <a:endParaRPr lang="en-US" sz="1100" dirty="0"/>
-          </a:p>
-          <a:p>
-            <a:pPr indent="0" marL="0">
-              <a:lnSpc>
-                <a:spcPts val="2200"/>
-              </a:lnSpc>
-              <a:buNone/>
-            </a:pPr>
-            <a:r>
-              <a:rPr lang="en-US" sz="1100" dirty="0">
-                <a:solidFill>
-                  <a:srgbClr val="212121"/>
-                </a:solidFill>
-                <a:latin typeface="Calibri" pitchFamily="34" charset="0"/>
-                <a:ea typeface="Calibri" pitchFamily="34" charset="-122"/>
-                <a:cs typeface="Calibri" pitchFamily="34" charset="-120"/>
-              </a:rPr>
-              <a:t>Odia guidance for the household</a:t>
-            </a:r>
-            <a:endParaRPr lang="en-US" sz="1100" dirty="0"/>
-          </a:p>
-          <a:p>
-            <a:pPr indent="0" marL="0">
-              <a:lnSpc>
-                <a:spcPts val="2200"/>
-              </a:lnSpc>
-              <a:buNone/>
-            </a:pPr>
-            <a:r>
-              <a:rPr lang="en-US" sz="1100" dirty="0">
-                <a:solidFill>
-                  <a:srgbClr val="212121"/>
-                </a:solidFill>
-                <a:latin typeface="Calibri" pitchFamily="34" charset="0"/>
-                <a:ea typeface="Calibri" pitchFamily="34" charset="-122"/>
-                <a:cs typeface="Calibri" pitchFamily="34" charset="-120"/>
-              </a:rPr>
-              <a:t>livestock and fodder checklist</a:t>
-            </a:r>
-            <a:endParaRPr lang="en-US" sz="1100" dirty="0"/>
-          </a:p>
-          <a:p>
-            <a:pPr indent="0" marL="0">
-              <a:lnSpc>
-                <a:spcPts val="2200"/>
-              </a:lnSpc>
-              <a:buNone/>
-            </a:pPr>
-            <a:r>
-              <a:rPr lang="en-US" sz="1100" dirty="0">
-                <a:solidFill>
-                  <a:srgbClr val="212121"/>
-                </a:solidFill>
-                <a:latin typeface="Calibri" pitchFamily="34" charset="0"/>
-                <a:ea typeface="Calibri" pitchFamily="34" charset="-122"/>
-                <a:cs typeface="Calibri" pitchFamily="34" charset="-120"/>
-              </a:rPr>
-              <a:t>keep the advisory reachable offline</a:t>
-            </a:r>
-            <a:endParaRPr lang="en-US" sz="1100" dirty="0"/>
-          </a:p>
-        </p:txBody>
-      </p:sp>
-      <p:sp>
-        <p:nvSpPr>
-          <p:cNvPr id="14" name="Shape 12"/>
-          <p:cNvSpPr/>
-          <p:nvPr/>
-        </p:nvSpPr>
-        <p:spPr>
-          <a:xfrm>
-            <a:off x="6156960" y="1600200"/>
-            <a:ext cx="2529840" cy="2377440"/>
+              <a:t>chars of raw evidence: named, dated sources on every claim, nothing unverified ships</a:t>
+            </a:r>
+            <a:endParaRPr lang="en-US" sz="950" dirty="0"/>
+          </a:p>
+        </p:txBody>
+      </p:sp>
+      <p:sp>
+        <p:nvSpPr>
+          <p:cNvPr id="9" name="Shape 7"/>
+          <p:cNvSpPr/>
+          <p:nvPr/>
+        </p:nvSpPr>
+        <p:spPr>
+          <a:xfrm>
+            <a:off x="457200" y="2286000"/>
+            <a:ext cx="4069080" cy="1097280"/>
           </a:xfrm>
           <a:prstGeom prst="roundRect">
             <a:avLst>
-              <a:gd name="adj" fmla="val 3077"/>
+              <a:gd name="adj" fmla="val 6667"/>
             </a:avLst>
           </a:prstGeom>
           <a:solidFill>
-            <a:srgbClr val="F0F5EA"/>
+            <a:srgbClr val="D8E8C8"/>
           </a:solidFill>
           <a:ln w="12700">
             <a:solidFill>
@@ -3170,89 +3734,135 @@
       </p:sp>
       <p:sp>
         <p:nvSpPr>
-          <p:cNvPr id="15" name="Shape 13"/>
-          <p:cNvSpPr/>
-          <p:nvPr/>
-        </p:nvSpPr>
-        <p:spPr>
-          <a:xfrm>
-            <a:off x="6294120" y="1783080"/>
-            <a:ext cx="384048" cy="384048"/>
-          </a:xfrm>
-          <a:prstGeom prst="ellipse">
-            <a:avLst/>
-          </a:prstGeom>
-          <a:solidFill>
-            <a:srgbClr val="97BC62"/>
-          </a:solidFill>
-          <a:ln/>
-        </p:spPr>
-      </p:sp>
-      <p:sp>
-        <p:nvSpPr>
-          <p:cNvPr id="16" name="Text 14"/>
-          <p:cNvSpPr/>
-          <p:nvPr/>
-        </p:nvSpPr>
-        <p:spPr>
-          <a:xfrm>
-            <a:off x="6294120" y="1828800"/>
-            <a:ext cx="384048" cy="292608"/>
-          </a:xfrm>
-          <a:prstGeom prst="rect">
-            <a:avLst/>
-          </a:prstGeom>
-          <a:noFill/>
-          <a:ln/>
-        </p:spPr>
-        <p:txBody>
-          <a:bodyPr wrap="square" lIns="0" tIns="0" rIns="0" bIns="0" rtlCol="0" anchor="ctr"/>
-          <a:lstStyle/>
-          <a:p>
-            <a:pPr algn="ctr" indent="0" marL="0">
-              <a:buNone/>
-            </a:pPr>
-            <a:r>
-              <a:rPr lang="en-US" sz="1400" b="1" dirty="0">
-                <a:solidFill>
-                  <a:srgbClr val="FFFFFF"/>
+          <p:cNvPr id="10" name="Text 8"/>
+          <p:cNvSpPr/>
+          <p:nvPr/>
+        </p:nvSpPr>
+        <p:spPr>
+          <a:xfrm>
+            <a:off x="594360" y="2377440"/>
+            <a:ext cx="1371600" cy="457200"/>
+          </a:xfrm>
+          <a:prstGeom prst="rect">
+            <a:avLst/>
+          </a:prstGeom>
+          <a:noFill/>
+          <a:ln/>
+        </p:spPr>
+        <p:txBody>
+          <a:bodyPr wrap="square" lIns="0" tIns="0" rIns="0" bIns="0" rtlCol="0" anchor="ctr"/>
+          <a:lstStyle/>
+          <a:p>
+            <a:pPr indent="0" marL="0">
+              <a:buNone/>
+            </a:pPr>
+            <a:r>
+              <a:rPr lang="en-US" sz="2600" b="1" dirty="0">
+                <a:solidFill>
+                  <a:srgbClr val="2C5F2D"/>
+                </a:solidFill>
+                <a:latin typeface="Cambria" pitchFamily="34" charset="0"/>
+                <a:ea typeface="Cambria" pitchFamily="34" charset="-122"/>
+                <a:cs typeface="Cambria" pitchFamily="34" charset="-120"/>
+              </a:rPr>
+              <a:t>4,000+</a:t>
+            </a:r>
+            <a:endParaRPr lang="en-US" sz="2600" dirty="0"/>
+          </a:p>
+        </p:txBody>
+      </p:sp>
+      <p:sp>
+        <p:nvSpPr>
+          <p:cNvPr id="11" name="Text 9"/>
+          <p:cNvSpPr/>
+          <p:nvPr/>
+        </p:nvSpPr>
+        <p:spPr>
+          <a:xfrm>
+            <a:off x="2011680" y="2377440"/>
+            <a:ext cx="2423160" cy="914400"/>
+          </a:xfrm>
+          <a:prstGeom prst="rect">
+            <a:avLst/>
+          </a:prstGeom>
+          <a:noFill/>
+          <a:ln/>
+        </p:spPr>
+        <p:txBody>
+          <a:bodyPr wrap="square" lIns="0" tIns="0" rIns="0" bIns="0" rtlCol="0" anchor="ctr"/>
+          <a:lstStyle/>
+          <a:p>
+            <a:pPr indent="0" marL="0">
+              <a:buNone/>
+            </a:pPr>
+            <a:r>
+              <a:rPr lang="en-US" sz="950" dirty="0">
+                <a:solidFill>
+                  <a:srgbClr val="212121"/>
                 </a:solidFill>
                 <a:latin typeface="Calibri" pitchFamily="34" charset="0"/>
                 <a:ea typeface="Calibri" pitchFamily="34" charset="-122"/>
                 <a:cs typeface="Calibri" pitchFamily="34" charset="-120"/>
               </a:rPr>
-              <a:t>3</a:t>
-            </a:r>
-            <a:endParaRPr lang="en-US" sz="1400" dirty="0"/>
-          </a:p>
-        </p:txBody>
-      </p:sp>
-      <p:sp>
-        <p:nvSpPr>
-          <p:cNvPr id="17" name="Text 15"/>
-          <p:cNvSpPr/>
-          <p:nvPr/>
-        </p:nvSpPr>
-        <p:spPr>
-          <a:xfrm>
-            <a:off x="6778752" y="1810512"/>
-            <a:ext cx="1798320" cy="320040"/>
-          </a:xfrm>
-          <a:prstGeom prst="rect">
-            <a:avLst/>
-          </a:prstGeom>
-          <a:noFill/>
-          <a:ln/>
-        </p:spPr>
-        <p:txBody>
-          <a:bodyPr wrap="square" lIns="0" tIns="0" rIns="0" bIns="0" rtlCol="0" anchor="ctr"/>
-          <a:lstStyle/>
-          <a:p>
-            <a:pPr indent="0" marL="0">
-              <a:buNone/>
-            </a:pPr>
-            <a:r>
-              <a:rPr lang="en-US" sz="1500" b="1" dirty="0">
+              <a:t>cited sources across 6 continents: cyclone/food/agri ledgers, cascade math, human wisdom, frontier science</a:t>
+            </a:r>
+            <a:endParaRPr lang="en-US" sz="950" dirty="0"/>
+          </a:p>
+        </p:txBody>
+      </p:sp>
+      <p:sp>
+        <p:nvSpPr>
+          <p:cNvPr id="12" name="Shape 10"/>
+          <p:cNvSpPr/>
+          <p:nvPr/>
+        </p:nvSpPr>
+        <p:spPr>
+          <a:xfrm>
+            <a:off x="4617720" y="2286000"/>
+            <a:ext cx="4069080" cy="1097280"/>
+          </a:xfrm>
+          <a:prstGeom prst="roundRect">
+            <a:avLst>
+              <a:gd name="adj" fmla="val 6667"/>
+            </a:avLst>
+          </a:prstGeom>
+          <a:solidFill>
+            <a:srgbClr val="D8E8C8"/>
+          </a:solidFill>
+          <a:ln w="12700">
+            <a:solidFill>
+              <a:srgbClr val="FFFFFF"/>
+            </a:solidFill>
+            <a:prstDash val="solid"/>
+          </a:ln>
+        </p:spPr>
+      </p:sp>
+      <p:sp>
+        <p:nvSpPr>
+          <p:cNvPr id="13" name="Text 11"/>
+          <p:cNvSpPr/>
+          <p:nvPr/>
+        </p:nvSpPr>
+        <p:spPr>
+          <a:xfrm>
+            <a:off x="4754880" y="2377440"/>
+            <a:ext cx="1371600" cy="457200"/>
+          </a:xfrm>
+          <a:prstGeom prst="rect">
+            <a:avLst/>
+          </a:prstGeom>
+          <a:noFill/>
+          <a:ln/>
+        </p:spPr>
+        <p:txBody>
+          <a:bodyPr wrap="square" lIns="0" tIns="0" rIns="0" bIns="0" rtlCol="0" anchor="ctr"/>
+          <a:lstStyle/>
+          <a:p>
+            <a:pPr indent="0" marL="0">
+              <a:buNone/>
+            </a:pPr>
+            <a:r>
+              <a:rPr lang="en-US" sz="2600" b="1" dirty="0">
                 <a:solidFill>
                   <a:srgbClr val="2C5F2D"/>
                 </a:solidFill>
@@ -3260,41 +3870,38 @@
                 <a:ea typeface="Cambria" pitchFamily="34" charset="-122"/>
                 <a:cs typeface="Cambria" pitchFamily="34" charset="-120"/>
               </a:rPr>
-              <a:t>AFTER</a:t>
-            </a:r>
-            <a:endParaRPr lang="en-US" sz="1500" dirty="0"/>
-          </a:p>
-        </p:txBody>
-      </p:sp>
-      <p:sp>
-        <p:nvSpPr>
-          <p:cNvPr id="18" name="Text 16"/>
-          <p:cNvSpPr/>
-          <p:nvPr/>
-        </p:nvSpPr>
-        <p:spPr>
-          <a:xfrm>
-            <a:off x="6339840" y="2331720"/>
-            <a:ext cx="2164080" cy="1508760"/>
-          </a:xfrm>
-          <a:prstGeom prst="rect">
-            <a:avLst/>
-          </a:prstGeom>
-          <a:noFill/>
-          <a:ln/>
-        </p:spPr>
-        <p:txBody>
-          <a:bodyPr wrap="square" lIns="0" tIns="0" rIns="0" bIns="0" rtlCol="0" anchor="ctr"/>
-          <a:lstStyle/>
-          <a:p>
-            <a:pPr indent="0" marL="0">
-              <a:lnSpc>
-                <a:spcPts val="2200"/>
-              </a:lnSpc>
-              <a:buNone/>
-            </a:pPr>
-            <a:r>
-              <a:rPr lang="en-US" sz="1100" dirty="0">
+              <a:t>A-D</a:t>
+            </a:r>
+            <a:endParaRPr lang="en-US" sz="2600" dirty="0"/>
+          </a:p>
+        </p:txBody>
+      </p:sp>
+      <p:sp>
+        <p:nvSpPr>
+          <p:cNvPr id="14" name="Text 12"/>
+          <p:cNvSpPr/>
+          <p:nvPr/>
+        </p:nvSpPr>
+        <p:spPr>
+          <a:xfrm>
+            <a:off x="6172200" y="2377440"/>
+            <a:ext cx="2423160" cy="914400"/>
+          </a:xfrm>
+          <a:prstGeom prst="rect">
+            <a:avLst/>
+          </a:prstGeom>
+          <a:noFill/>
+          <a:ln/>
+        </p:spPr>
+        <p:txBody>
+          <a:bodyPr wrap="square" lIns="0" tIns="0" rIns="0" bIns="0" rtlCol="0" anchor="ctr"/>
+          <a:lstStyle/>
+          <a:p>
+            <a:pPr indent="0" marL="0">
+              <a:buNone/>
+            </a:pPr>
+            <a:r>
+              <a:rPr lang="en-US" sz="950" dirty="0">
                 <a:solidFill>
                   <a:srgbClr val="212121"/>
                 </a:solidFill>
@@ -3302,145 +3909,85 @@
                 <a:ea typeface="Calibri" pitchFamily="34" charset="-122"/>
                 <a:cs typeface="Calibri" pitchFamily="34" charset="-120"/>
               </a:rPr>
-              <a:t>RECOVERY AND CLAIMS</a:t>
-            </a:r>
-            <a:endParaRPr lang="en-US" sz="1100" dirty="0"/>
-          </a:p>
-          <a:p>
-            <a:pPr indent="0" marL="0">
-              <a:lnSpc>
-                <a:spcPts val="2200"/>
-              </a:lnSpc>
-              <a:buNone/>
-            </a:pPr>
-            <a:r>
-              <a:rPr lang="en-US" sz="1100" dirty="0">
-                <a:solidFill>
-                  <a:srgbClr val="212121"/>
+              <a:t>evidence grading on every claim: ODISHA-MEASURED, TRANSFER-PRIOR, SCENARIO-ASSUMPTION, UNKNOWN badges</a:t>
+            </a:r>
+            <a:endParaRPr lang="en-US" sz="950" dirty="0"/>
+          </a:p>
+        </p:txBody>
+      </p:sp>
+      <p:sp>
+        <p:nvSpPr>
+          <p:cNvPr id="15" name="Text 13"/>
+          <p:cNvSpPr/>
+          <p:nvPr/>
+        </p:nvSpPr>
+        <p:spPr>
+          <a:xfrm>
+            <a:off x="457200" y="3794760"/>
+            <a:ext cx="8229600" cy="685800"/>
+          </a:xfrm>
+          <a:prstGeom prst="rect">
+            <a:avLst/>
+          </a:prstGeom>
+          <a:noFill/>
+          <a:ln/>
+        </p:spPr>
+        <p:txBody>
+          <a:bodyPr wrap="square" lIns="0" tIns="0" rIns="0" bIns="0" rtlCol="0" anchor="ctr"/>
+          <a:lstStyle/>
+          <a:p>
+            <a:pPr indent="0" marL="0">
+              <a:buNone/>
+            </a:pPr>
+            <a:r>
+              <a:rPr lang="en-US" sz="1300" b="1" dirty="0">
+                <a:solidFill>
+                  <a:srgbClr val="2C5F2D"/>
                 </a:solidFill>
                 <a:latin typeface="Calibri" pitchFamily="34" charset="0"/>
                 <a:ea typeface="Calibri" pitchFamily="34" charset="-122"/>
                 <a:cs typeface="Calibri" pitchFamily="34" charset="-120"/>
               </a:rPr>
-              <a:t>saline flush and re-sowing plan per plot</a:t>
-            </a:r>
-            <a:endParaRPr lang="en-US" sz="1100" dirty="0"/>
-          </a:p>
-          <a:p>
-            <a:pPr indent="0" marL="0">
-              <a:lnSpc>
-                <a:spcPts val="2200"/>
-              </a:lnSpc>
-              <a:buNone/>
-            </a:pPr>
-            <a:r>
-              <a:rPr lang="en-US" sz="1100" dirty="0">
-                <a:solidFill>
-                  <a:srgbClr val="212121"/>
+              <a:t>single-pass AI summarizes. this is an orchestrated parallel research machine with verification gates: every number in this deck traces to a source you can open.</a:t>
+            </a:r>
+            <a:endParaRPr lang="en-US" sz="1300" dirty="0"/>
+          </a:p>
+        </p:txBody>
+      </p:sp>
+      <p:sp>
+        <p:nvSpPr>
+          <p:cNvPr id="16" name="Text 14"/>
+          <p:cNvSpPr/>
+          <p:nvPr/>
+        </p:nvSpPr>
+        <p:spPr>
+          <a:xfrm>
+            <a:off x="457200" y="4663440"/>
+            <a:ext cx="8229600" cy="274320"/>
+          </a:xfrm>
+          <a:prstGeom prst="rect">
+            <a:avLst/>
+          </a:prstGeom>
+          <a:noFill/>
+          <a:ln/>
+        </p:spPr>
+        <p:txBody>
+          <a:bodyPr wrap="square" lIns="0" tIns="0" rIns="0" bIns="0" rtlCol="0" anchor="ctr"/>
+          <a:lstStyle/>
+          <a:p>
+            <a:pPr indent="0" marL="0">
+              <a:buNone/>
+            </a:pPr>
+            <a:r>
+              <a:rPr lang="en-US" sz="900" dirty="0">
+                <a:solidFill>
+                  <a:srgbClr val="5A6B5A"/>
                 </a:solidFill>
                 <a:latin typeface="Calibri" pitchFamily="34" charset="0"/>
                 <a:ea typeface="Calibri" pitchFamily="34" charset="-122"/>
                 <a:cs typeface="Calibri" pitchFamily="34" charset="-120"/>
               </a:rPr>
-              <a:t>damage evidence capture on a basic phone</a:t>
-            </a:r>
-            <a:endParaRPr lang="en-US" sz="1100" dirty="0"/>
-          </a:p>
-          <a:p>
-            <a:pPr indent="0" marL="0">
-              <a:lnSpc>
-                <a:spcPts val="2200"/>
-              </a:lnSpc>
-              <a:buNone/>
-            </a:pPr>
-            <a:r>
-              <a:rPr lang="en-US" sz="1100" dirty="0">
-                <a:solidFill>
-                  <a:srgbClr val="212121"/>
-                </a:solidFill>
-                <a:latin typeface="Calibri" pitchFamily="34" charset="0"/>
-                <a:ea typeface="Calibri" pitchFamily="34" charset="-122"/>
-                <a:cs typeface="Calibri" pitchFamily="34" charset="-120"/>
-              </a:rPr>
-              <a:t>PMFBY claim packet export</a:t>
-            </a:r>
-            <a:endParaRPr lang="en-US" sz="1100" dirty="0"/>
-          </a:p>
-        </p:txBody>
-      </p:sp>
-      <p:sp>
-        <p:nvSpPr>
-          <p:cNvPr id="19" name="Text 17"/>
-          <p:cNvSpPr/>
-          <p:nvPr/>
-        </p:nvSpPr>
-        <p:spPr>
-          <a:xfrm>
-            <a:off x="457200" y="4114800"/>
-            <a:ext cx="8229600" cy="365760"/>
-          </a:xfrm>
-          <a:prstGeom prst="rect">
-            <a:avLst/>
-          </a:prstGeom>
-          <a:noFill/>
-          <a:ln/>
-        </p:spPr>
-        <p:txBody>
-          <a:bodyPr wrap="square" lIns="0" tIns="0" rIns="0" bIns="0" rtlCol="0" anchor="ctr"/>
-          <a:lstStyle/>
-          <a:p>
-            <a:pPr indent="0" marL="0">
-              <a:buNone/>
-            </a:pPr>
-            <a:r>
-              <a:rPr lang="en-US" sz="1050" i="1" dirty="0">
-                <a:solidFill>
-                  <a:srgbClr val="5A6B5A"/>
-                </a:solidFill>
-                <a:latin typeface="Calibri" pitchFamily="34" charset="0"/>
-                <a:ea typeface="Calibri" pitchFamily="34" charset="-122"/>
-                <a:cs typeface="Calibri" pitchFamily="34" charset="-120"/>
-              </a:rPr>
-              <a:t>Honest framing: the advisory engine is the hero. Acknowledgement and report capture are adaptation features inside it, not the pitch.</a:t>
-            </a:r>
-            <a:endParaRPr lang="en-US" sz="1050" dirty="0"/>
-          </a:p>
-        </p:txBody>
-      </p:sp>
-      <p:sp>
-        <p:nvSpPr>
-          <p:cNvPr id="20" name="Text 18"/>
-          <p:cNvSpPr/>
-          <p:nvPr/>
-        </p:nvSpPr>
-        <p:spPr>
-          <a:xfrm>
-            <a:off x="457200" y="4828032"/>
-            <a:ext cx="8229600" cy="274320"/>
-          </a:xfrm>
-          <a:prstGeom prst="rect">
-            <a:avLst/>
-          </a:prstGeom>
-          <a:noFill/>
-          <a:ln/>
-        </p:spPr>
-        <p:txBody>
-          <a:bodyPr wrap="square" lIns="0" tIns="0" rIns="0" bIns="0" rtlCol="0" anchor="ctr"/>
-          <a:lstStyle/>
-          <a:p>
-            <a:pPr indent="0" marL="0">
-              <a:buNone/>
-            </a:pPr>
-            <a:r>
-              <a:rPr lang="en-US" sz="900" dirty="0">
-                <a:solidFill>
-                  <a:srgbClr val="5A6B5A"/>
-                </a:solidFill>
-                <a:latin typeface="Calibri" pitchFamily="34" charset="0"/>
-                <a:ea typeface="Calibri" pitchFamily="34" charset="-122"/>
-                <a:cs typeface="Calibri" pitchFamily="34" charset="-120"/>
-              </a:rPr>
-              <a:t>Statement-faithful: the official problem is a resilient advisory system for cyclone and flood contexts, with farm-profile-aware, staged actions.</a:t>
+              <a:t>Evidence chain: slide -&gt; proof ledger -&gt; EVIDENCE-INDEX.md -&gt; raw report -&gt; named dated source. Nothing ships without the chain.</a:t>
             </a:r>
             <a:endParaRPr lang="en-US" sz="900" dirty="0"/>
           </a:p>
@@ -3511,7 +4058,7 @@
                 <a:ea typeface="Cambria" pitchFamily="34" charset="-122"/>
                 <a:cs typeface="Cambria" pitchFamily="34" charset="-120"/>
               </a:rPr>
-              <a:t>Mechanism: ingest, decide, deliver, recover</a:t>
+              <a:t>The solution: an advisory engine, not an alert system</a:t>
             </a:r>
             <a:endParaRPr lang="en-US" sz="2800" dirty="0"/>
           </a:p>
@@ -3519,18 +4066,57 @@
       </p:sp>
       <p:sp>
         <p:nvSpPr>
-          <p:cNvPr id="3" name="Shape 1"/>
-          <p:cNvSpPr/>
-          <p:nvPr/>
-        </p:nvSpPr>
-        <p:spPr>
-          <a:xfrm>
-            <a:off x="457200" y="1143000"/>
-            <a:ext cx="1885950" cy="2606040"/>
+          <p:cNvPr id="3" name="Text 1"/>
+          <p:cNvSpPr/>
+          <p:nvPr/>
+        </p:nvSpPr>
+        <p:spPr>
+          <a:xfrm>
+            <a:off x="457200" y="914400"/>
+            <a:ext cx="8229600" cy="548640"/>
+          </a:xfrm>
+          <a:prstGeom prst="rect">
+            <a:avLst/>
+          </a:prstGeom>
+          <a:noFill/>
+          <a:ln/>
+        </p:spPr>
+        <p:txBody>
+          <a:bodyPr wrap="square" lIns="0" tIns="0" rIns="0" bIns="0" rtlCol="0" anchor="ctr"/>
+          <a:lstStyle/>
+          <a:p>
+            <a:pPr indent="0" marL="0">
+              <a:buNone/>
+            </a:pPr>
+            <a:r>
+              <a:rPr lang="en-US" sz="1600" b="1" dirty="0">
+                <a:solidFill>
+                  <a:srgbClr val="212121"/>
+                </a:solidFill>
+                <a:latin typeface="Cambria" pitchFamily="34" charset="0"/>
+                <a:ea typeface="Cambria" pitchFamily="34" charset="-122"/>
+                <a:cs typeface="Cambria" pitchFamily="34" charset="-120"/>
+              </a:rPr>
+              <a:t>Every forecast becomes a decision: an action, a deadline, a source, and a fallback, in Odia, on any phone.</a:t>
+            </a:r>
+            <a:endParaRPr lang="en-US" sz="1600" dirty="0"/>
+          </a:p>
+        </p:txBody>
+      </p:sp>
+      <p:sp>
+        <p:nvSpPr>
+          <p:cNvPr id="4" name="Shape 2"/>
+          <p:cNvSpPr/>
+          <p:nvPr/>
+        </p:nvSpPr>
+        <p:spPr>
+          <a:xfrm>
+            <a:off x="457200" y="1600200"/>
+            <a:ext cx="2529840" cy="2377440"/>
           </a:xfrm>
           <a:prstGeom prst="roundRect">
             <a:avLst>
-              <a:gd name="adj" fmla="val 3879"/>
+              <a:gd name="adj" fmla="val 3077"/>
             </a:avLst>
           </a:prstGeom>
           <a:solidFill>
@@ -3546,34 +4132,34 @@
       </p:sp>
       <p:sp>
         <p:nvSpPr>
-          <p:cNvPr id="4" name="Shape 2"/>
-          <p:cNvSpPr/>
-          <p:nvPr/>
-        </p:nvSpPr>
-        <p:spPr>
-          <a:xfrm>
-            <a:off x="1125855" y="1325880"/>
-            <a:ext cx="548640" cy="548640"/>
+          <p:cNvPr id="5" name="Shape 3"/>
+          <p:cNvSpPr/>
+          <p:nvPr/>
+        </p:nvSpPr>
+        <p:spPr>
+          <a:xfrm>
+            <a:off x="594360" y="1783080"/>
+            <a:ext cx="384048" cy="384048"/>
           </a:xfrm>
           <a:prstGeom prst="ellipse">
             <a:avLst/>
           </a:prstGeom>
           <a:solidFill>
-            <a:srgbClr val="2C5F2D"/>
+            <a:srgbClr val="97BC62"/>
           </a:solidFill>
           <a:ln/>
         </p:spPr>
       </p:sp>
       <p:sp>
         <p:nvSpPr>
-          <p:cNvPr id="5" name="Text 3"/>
-          <p:cNvSpPr/>
-          <p:nvPr/>
-        </p:nvSpPr>
-        <p:spPr>
-          <a:xfrm>
-            <a:off x="1125855" y="1389888"/>
-            <a:ext cx="548640" cy="411480"/>
+          <p:cNvPr id="6" name="Text 4"/>
+          <p:cNvSpPr/>
+          <p:nvPr/>
+        </p:nvSpPr>
+        <p:spPr>
+          <a:xfrm>
+            <a:off x="594360" y="1828800"/>
+            <a:ext cx="384048" cy="292608"/>
           </a:xfrm>
           <a:prstGeom prst="rect">
             <a:avLst/>
@@ -3589,85 +4175,88 @@
               <a:buNone/>
             </a:pPr>
             <a:r>
-              <a:rPr lang="en-US" sz="1800" b="1" dirty="0">
-                <a:solidFill>
-                  <a:srgbClr val="F5F7F2"/>
+              <a:rPr lang="en-US" sz="1400" b="1" dirty="0">
+                <a:solidFill>
+                  <a:srgbClr val="FFFFFF"/>
+                </a:solidFill>
+                <a:latin typeface="Calibri" pitchFamily="34" charset="0"/>
+                <a:ea typeface="Calibri" pitchFamily="34" charset="-122"/>
+                <a:cs typeface="Calibri" pitchFamily="34" charset="-120"/>
+              </a:rPr>
+              <a:t>1</a:t>
+            </a:r>
+            <a:endParaRPr lang="en-US" sz="1400" dirty="0"/>
+          </a:p>
+        </p:txBody>
+      </p:sp>
+      <p:sp>
+        <p:nvSpPr>
+          <p:cNvPr id="7" name="Text 5"/>
+          <p:cNvSpPr/>
+          <p:nvPr/>
+        </p:nvSpPr>
+        <p:spPr>
+          <a:xfrm>
+            <a:off x="1078992" y="1810512"/>
+            <a:ext cx="1798320" cy="320040"/>
+          </a:xfrm>
+          <a:prstGeom prst="rect">
+            <a:avLst/>
+          </a:prstGeom>
+          <a:noFill/>
+          <a:ln/>
+        </p:spPr>
+        <p:txBody>
+          <a:bodyPr wrap="square" lIns="0" tIns="0" rIns="0" bIns="0" rtlCol="0" anchor="ctr"/>
+          <a:lstStyle/>
+          <a:p>
+            <a:pPr indent="0" marL="0">
+              <a:buNone/>
+            </a:pPr>
+            <a:r>
+              <a:rPr lang="en-US" sz="1500" b="1" dirty="0">
+                <a:solidFill>
+                  <a:srgbClr val="2C5F2D"/>
                 </a:solidFill>
                 <a:latin typeface="Cambria" pitchFamily="34" charset="0"/>
                 <a:ea typeface="Cambria" pitchFamily="34" charset="-122"/>
                 <a:cs typeface="Cambria" pitchFamily="34" charset="-120"/>
               </a:rPr>
-              <a:t>1</a:t>
-            </a:r>
-            <a:endParaRPr lang="en-US" sz="1800" dirty="0"/>
-          </a:p>
-        </p:txBody>
-      </p:sp>
-      <p:sp>
-        <p:nvSpPr>
-          <p:cNvPr id="6" name="Text 4"/>
-          <p:cNvSpPr/>
-          <p:nvPr/>
-        </p:nvSpPr>
-        <p:spPr>
-          <a:xfrm>
-            <a:off x="548640" y="2011680"/>
-            <a:ext cx="1703070" cy="320040"/>
-          </a:xfrm>
-          <a:prstGeom prst="rect">
-            <a:avLst/>
-          </a:prstGeom>
-          <a:noFill/>
-          <a:ln/>
-        </p:spPr>
-        <p:txBody>
-          <a:bodyPr wrap="square" lIns="0" tIns="0" rIns="0" bIns="0" rtlCol="0" anchor="ctr"/>
-          <a:lstStyle/>
-          <a:p>
-            <a:pPr algn="ctr" indent="0" marL="0">
-              <a:buNone/>
-            </a:pPr>
-            <a:r>
-              <a:rPr lang="en-US" sz="1400" b="1" dirty="0">
-                <a:solidFill>
-                  <a:srgbClr val="2C5F2D"/>
-                </a:solidFill>
-                <a:latin typeface="Cambria" pitchFamily="34" charset="0"/>
-                <a:ea typeface="Cambria" pitchFamily="34" charset="-122"/>
-                <a:cs typeface="Cambria" pitchFamily="34" charset="-120"/>
-              </a:rPr>
-              <a:t>INGEST</a:t>
-            </a:r>
-            <a:endParaRPr lang="en-US" sz="1400" dirty="0"/>
-          </a:p>
-        </p:txBody>
-      </p:sp>
-      <p:sp>
-        <p:nvSpPr>
-          <p:cNvPr id="7" name="Text 5"/>
-          <p:cNvSpPr/>
-          <p:nvPr/>
-        </p:nvSpPr>
-        <p:spPr>
-          <a:xfrm>
-            <a:off x="594360" y="2377440"/>
-            <a:ext cx="1611630" cy="777240"/>
-          </a:xfrm>
-          <a:prstGeom prst="rect">
-            <a:avLst/>
-          </a:prstGeom>
-          <a:noFill/>
-          <a:ln/>
-        </p:spPr>
-        <p:txBody>
-          <a:bodyPr wrap="square" lIns="0" tIns="0" rIns="0" bIns="0" rtlCol="0" anchor="ctr"/>
-          <a:lstStyle/>
-          <a:p>
-            <a:pPr algn="ctr" indent="0" marL="0">
-              <a:buNone/>
-            </a:pPr>
-            <a:r>
-              <a:rPr lang="en-US" sz="1050" dirty="0">
+              <a:t>BEFORE</a:t>
+            </a:r>
+            <a:endParaRPr lang="en-US" sz="1500" dirty="0"/>
+          </a:p>
+        </p:txBody>
+      </p:sp>
+      <p:sp>
+        <p:nvSpPr>
+          <p:cNvPr id="8" name="Text 6"/>
+          <p:cNvSpPr/>
+          <p:nvPr/>
+        </p:nvSpPr>
+        <p:spPr>
+          <a:xfrm>
+            <a:off x="640080" y="2331720"/>
+            <a:ext cx="2164080" cy="1508760"/>
+          </a:xfrm>
+          <a:prstGeom prst="rect">
+            <a:avLst/>
+          </a:prstGeom>
+          <a:noFill/>
+          <a:ln/>
+        </p:spPr>
+        <p:txBody>
+          <a:bodyPr wrap="square" lIns="0" tIns="0" rIns="0" bIns="0" rtlCol="0" anchor="ctr"/>
+          <a:lstStyle/>
+          <a:p>
+            <a:pPr indent="0" marL="0">
+              <a:lnSpc>
+                <a:spcPts val="2200"/>
+              </a:lnSpc>
+              <a:buNone/>
+            </a:pPr>
+            <a:r>
+              <a:rPr lang="en-US" sz="1100" dirty="0">
                 <a:solidFill>
                   <a:srgbClr val="212121"/>
                 </a:solidFill>
@@ -3675,104 +4264,86 @@
                 <a:ea typeface="Calibri" pitchFamily="34" charset="-122"/>
                 <a:cs typeface="Calibri" pitchFamily="34" charset="-120"/>
               </a:rPr>
-              <a:t>IMD forecast plus farm profile: crop, stage, plot, soil, connectivity state</a:t>
-            </a:r>
-            <a:endParaRPr lang="en-US" sz="1050" dirty="0"/>
-          </a:p>
-        </p:txBody>
-      </p:sp>
-      <p:sp>
-        <p:nvSpPr>
-          <p:cNvPr id="8" name="Text 6"/>
-          <p:cNvSpPr/>
-          <p:nvPr/>
-        </p:nvSpPr>
-        <p:spPr>
-          <a:xfrm>
-            <a:off x="594360" y="3200400"/>
-            <a:ext cx="1611630" cy="457200"/>
-          </a:xfrm>
-          <a:prstGeom prst="rect">
-            <a:avLst/>
-          </a:prstGeom>
-          <a:noFill/>
-          <a:ln/>
-        </p:spPr>
-        <p:txBody>
-          <a:bodyPr wrap="square" lIns="0" tIns="0" rIns="0" bIns="0" rtlCol="0" anchor="ctr"/>
-          <a:lstStyle/>
-          <a:p>
-            <a:pPr algn="ctr" indent="0" marL="0">
-              <a:buNone/>
-            </a:pPr>
-            <a:r>
-              <a:rPr lang="en-US" sz="950" i="1" dirty="0">
-                <a:solidFill>
-                  <a:srgbClr val="5A6B5A"/>
+              <a:t>STAGE THE CROP</a:t>
+            </a:r>
+            <a:endParaRPr lang="en-US" sz="1100" dirty="0"/>
+          </a:p>
+          <a:p>
+            <a:pPr indent="0" marL="0">
+              <a:lnSpc>
+                <a:spcPts val="2200"/>
+              </a:lnSpc>
+              <a:buNone/>
+            </a:pPr>
+            <a:r>
+              <a:rPr lang="en-US" sz="1100" dirty="0">
+                <a:solidFill>
+                  <a:srgbClr val="212121"/>
                 </a:solidFill>
                 <a:latin typeface="Calibri" pitchFamily="34" charset="0"/>
                 <a:ea typeface="Calibri" pitchFamily="34" charset="-122"/>
                 <a:cs typeface="Calibri" pitchFamily="34" charset="-120"/>
               </a:rPr>
-              <a:t>one inbox, local, no external runtime deps</a:t>
-            </a:r>
-            <a:endParaRPr lang="en-US" sz="950" dirty="0"/>
-          </a:p>
-        </p:txBody>
-      </p:sp>
-      <p:sp>
-        <p:nvSpPr>
-          <p:cNvPr id="9" name="Text 7"/>
-          <p:cNvSpPr/>
-          <p:nvPr/>
-        </p:nvSpPr>
-        <p:spPr>
-          <a:xfrm>
-            <a:off x="2361438" y="2103120"/>
-            <a:ext cx="201168" cy="457200"/>
-          </a:xfrm>
-          <a:prstGeom prst="rect">
-            <a:avLst/>
-          </a:prstGeom>
-          <a:noFill/>
-          <a:ln/>
-        </p:spPr>
-        <p:txBody>
-          <a:bodyPr wrap="square" lIns="0" tIns="0" rIns="0" bIns="0" rtlCol="0" anchor="ctr"/>
-          <a:lstStyle/>
-          <a:p>
-            <a:pPr algn="ctr" indent="0" marL="0">
-              <a:buNone/>
-            </a:pPr>
-            <a:r>
-              <a:rPr lang="en-US" sz="2000" b="1" dirty="0">
-                <a:solidFill>
-                  <a:srgbClr val="97BC62"/>
+              <a:t>harvest or move to raised platform on a deadline</a:t>
+            </a:r>
+            <a:endParaRPr lang="en-US" sz="1100" dirty="0"/>
+          </a:p>
+          <a:p>
+            <a:pPr indent="0" marL="0">
+              <a:lnSpc>
+                <a:spcPts val="2200"/>
+              </a:lnSpc>
+              <a:buNone/>
+            </a:pPr>
+            <a:r>
+              <a:rPr lang="en-US" sz="1100" dirty="0">
+                <a:solidFill>
+                  <a:srgbClr val="212121"/>
                 </a:solidFill>
                 <a:latin typeface="Calibri" pitchFamily="34" charset="0"/>
                 <a:ea typeface="Calibri" pitchFamily="34" charset="-122"/>
                 <a:cs typeface="Calibri" pitchFamily="34" charset="-120"/>
               </a:rPr>
-              <a:t>&gt;</a:t>
-            </a:r>
-            <a:endParaRPr lang="en-US" sz="2000" dirty="0"/>
-          </a:p>
-        </p:txBody>
-      </p:sp>
-      <p:sp>
-        <p:nvSpPr>
-          <p:cNvPr id="10" name="Shape 8"/>
-          <p:cNvSpPr/>
-          <p:nvPr/>
-        </p:nvSpPr>
-        <p:spPr>
-          <a:xfrm>
-            <a:off x="2571750" y="1143000"/>
-            <a:ext cx="1885950" cy="2606040"/>
+              <a:t>protect seed, livestock, equipment</a:t>
+            </a:r>
+            <a:endParaRPr lang="en-US" sz="1100" dirty="0"/>
+          </a:p>
+          <a:p>
+            <a:pPr indent="0" marL="0">
+              <a:lnSpc>
+                <a:spcPts val="2200"/>
+              </a:lnSpc>
+              <a:buNone/>
+            </a:pPr>
+            <a:r>
+              <a:rPr lang="en-US" sz="1100" dirty="0">
+                <a:solidFill>
+                  <a:srgbClr val="212121"/>
+                </a:solidFill>
+                <a:latin typeface="Calibri" pitchFamily="34" charset="0"/>
+                <a:ea typeface="Calibri" pitchFamily="34" charset="-122"/>
+                <a:cs typeface="Calibri" pitchFamily="34" charset="-120"/>
+              </a:rPr>
+              <a:t>evacuate people, secure the house</a:t>
+            </a:r>
+            <a:endParaRPr lang="en-US" sz="1100" dirty="0"/>
+          </a:p>
+        </p:txBody>
+      </p:sp>
+      <p:sp>
+        <p:nvSpPr>
+          <p:cNvPr id="9" name="Shape 7"/>
+          <p:cNvSpPr/>
+          <p:nvPr/>
+        </p:nvSpPr>
+        <p:spPr>
+          <a:xfrm>
+            <a:off x="3307080" y="1600200"/>
+            <a:ext cx="2529840" cy="2377440"/>
           </a:xfrm>
           <a:prstGeom prst="roundRect">
             <a:avLst>
-              <a:gd name="adj" fmla="val 3879"/>
+              <a:gd name="adj" fmla="val 3077"/>
             </a:avLst>
           </a:prstGeom>
           <a:solidFill>
@@ -3788,60 +4359,99 @@
       </p:sp>
       <p:sp>
         <p:nvSpPr>
-          <p:cNvPr id="11" name="Shape 9"/>
-          <p:cNvSpPr/>
-          <p:nvPr/>
-        </p:nvSpPr>
-        <p:spPr>
-          <a:xfrm>
-            <a:off x="3240405" y="1325880"/>
-            <a:ext cx="548640" cy="548640"/>
+          <p:cNvPr id="10" name="Shape 8"/>
+          <p:cNvSpPr/>
+          <p:nvPr/>
+        </p:nvSpPr>
+        <p:spPr>
+          <a:xfrm>
+            <a:off x="3444240" y="1783080"/>
+            <a:ext cx="384048" cy="384048"/>
           </a:xfrm>
           <a:prstGeom prst="ellipse">
             <a:avLst/>
           </a:prstGeom>
           <a:solidFill>
-            <a:srgbClr val="2C5F2D"/>
+            <a:srgbClr val="97BC62"/>
           </a:solidFill>
           <a:ln/>
         </p:spPr>
       </p:sp>
       <p:sp>
         <p:nvSpPr>
+          <p:cNvPr id="11" name="Text 9"/>
+          <p:cNvSpPr/>
+          <p:nvPr/>
+        </p:nvSpPr>
+        <p:spPr>
+          <a:xfrm>
+            <a:off x="3444240" y="1828800"/>
+            <a:ext cx="384048" cy="292608"/>
+          </a:xfrm>
+          <a:prstGeom prst="rect">
+            <a:avLst/>
+          </a:prstGeom>
+          <a:noFill/>
+          <a:ln/>
+        </p:spPr>
+        <p:txBody>
+          <a:bodyPr wrap="square" lIns="0" tIns="0" rIns="0" bIns="0" rtlCol="0" anchor="ctr"/>
+          <a:lstStyle/>
+          <a:p>
+            <a:pPr algn="ctr" indent="0" marL="0">
+              <a:buNone/>
+            </a:pPr>
+            <a:r>
+              <a:rPr lang="en-US" sz="1400" b="1" dirty="0">
+                <a:solidFill>
+                  <a:srgbClr val="FFFFFF"/>
+                </a:solidFill>
+                <a:latin typeface="Calibri" pitchFamily="34" charset="0"/>
+                <a:ea typeface="Calibri" pitchFamily="34" charset="-122"/>
+                <a:cs typeface="Calibri" pitchFamily="34" charset="-120"/>
+              </a:rPr>
+              <a:t>2</a:t>
+            </a:r>
+            <a:endParaRPr lang="en-US" sz="1400" dirty="0"/>
+          </a:p>
+        </p:txBody>
+      </p:sp>
+      <p:sp>
+        <p:nvSpPr>
           <p:cNvPr id="12" name="Text 10"/>
           <p:cNvSpPr/>
           <p:nvPr/>
         </p:nvSpPr>
         <p:spPr>
           <a:xfrm>
-            <a:off x="3240405" y="1389888"/>
-            <a:ext cx="548640" cy="411480"/>
-          </a:xfrm>
-          <a:prstGeom prst="rect">
-            <a:avLst/>
-          </a:prstGeom>
-          <a:noFill/>
-          <a:ln/>
-        </p:spPr>
-        <p:txBody>
-          <a:bodyPr wrap="square" lIns="0" tIns="0" rIns="0" bIns="0" rtlCol="0" anchor="ctr"/>
-          <a:lstStyle/>
-          <a:p>
-            <a:pPr algn="ctr" indent="0" marL="0">
-              <a:buNone/>
-            </a:pPr>
-            <a:r>
-              <a:rPr lang="en-US" sz="1800" b="1" dirty="0">
-                <a:solidFill>
-                  <a:srgbClr val="F5F7F2"/>
+            <a:off x="3928872" y="1810512"/>
+            <a:ext cx="1798320" cy="320040"/>
+          </a:xfrm>
+          <a:prstGeom prst="rect">
+            <a:avLst/>
+          </a:prstGeom>
+          <a:noFill/>
+          <a:ln/>
+        </p:spPr>
+        <p:txBody>
+          <a:bodyPr wrap="square" lIns="0" tIns="0" rIns="0" bIns="0" rtlCol="0" anchor="ctr"/>
+          <a:lstStyle/>
+          <a:p>
+            <a:pPr indent="0" marL="0">
+              <a:buNone/>
+            </a:pPr>
+            <a:r>
+              <a:rPr lang="en-US" sz="1500" b="1" dirty="0">
+                <a:solidFill>
+                  <a:srgbClr val="2C5F2D"/>
                 </a:solidFill>
                 <a:latin typeface="Cambria" pitchFamily="34" charset="0"/>
                 <a:ea typeface="Cambria" pitchFamily="34" charset="-122"/>
                 <a:cs typeface="Cambria" pitchFamily="34" charset="-120"/>
               </a:rPr>
-              <a:t>2</a:t>
-            </a:r>
-            <a:endParaRPr lang="en-US" sz="1800" dirty="0"/>
+              <a:t>DURING</a:t>
+            </a:r>
+            <a:endParaRPr lang="en-US" sz="1500" dirty="0"/>
           </a:p>
         </p:txBody>
       </p:sp>
@@ -3853,63 +4463,27 @@
         </p:nvSpPr>
         <p:spPr>
           <a:xfrm>
-            <a:off x="2663190" y="2011680"/>
-            <a:ext cx="1703070" cy="320040"/>
-          </a:xfrm>
-          <a:prstGeom prst="rect">
-            <a:avLst/>
-          </a:prstGeom>
-          <a:noFill/>
-          <a:ln/>
-        </p:spPr>
-        <p:txBody>
-          <a:bodyPr wrap="square" lIns="0" tIns="0" rIns="0" bIns="0" rtlCol="0" anchor="ctr"/>
-          <a:lstStyle/>
-          <a:p>
-            <a:pPr algn="ctr" indent="0" marL="0">
-              <a:buNone/>
-            </a:pPr>
-            <a:r>
-              <a:rPr lang="en-US" sz="1400" b="1" dirty="0">
-                <a:solidFill>
-                  <a:srgbClr val="2C5F2D"/>
-                </a:solidFill>
-                <a:latin typeface="Cambria" pitchFamily="34" charset="0"/>
-                <a:ea typeface="Cambria" pitchFamily="34" charset="-122"/>
-                <a:cs typeface="Cambria" pitchFamily="34" charset="-120"/>
-              </a:rPr>
-              <a:t>DECIDE</a:t>
-            </a:r>
-            <a:endParaRPr lang="en-US" sz="1400" dirty="0"/>
-          </a:p>
-        </p:txBody>
-      </p:sp>
-      <p:sp>
-        <p:nvSpPr>
-          <p:cNvPr id="14" name="Text 12"/>
-          <p:cNvSpPr/>
-          <p:nvPr/>
-        </p:nvSpPr>
-        <p:spPr>
-          <a:xfrm>
-            <a:off x="2708910" y="2377440"/>
-            <a:ext cx="1611630" cy="777240"/>
-          </a:xfrm>
-          <a:prstGeom prst="rect">
-            <a:avLst/>
-          </a:prstGeom>
-          <a:noFill/>
-          <a:ln/>
-        </p:spPr>
-        <p:txBody>
-          <a:bodyPr wrap="square" lIns="0" tIns="0" rIns="0" bIns="0" rtlCol="0" anchor="ctr"/>
-          <a:lstStyle/>
-          <a:p>
-            <a:pPr algn="ctr" indent="0" marL="0">
-              <a:buNone/>
-            </a:pPr>
-            <a:r>
-              <a:rPr lang="en-US" sz="1050" dirty="0">
+            <a:off x="3489960" y="2331720"/>
+            <a:ext cx="2164080" cy="1508760"/>
+          </a:xfrm>
+          <a:prstGeom prst="rect">
+            <a:avLst/>
+          </a:prstGeom>
+          <a:noFill/>
+          <a:ln/>
+        </p:spPr>
+        <p:txBody>
+          <a:bodyPr wrap="square" lIns="0" tIns="0" rIns="0" bIns="0" rtlCol="0" anchor="ctr"/>
+          <a:lstStyle/>
+          <a:p>
+            <a:pPr indent="0" marL="0">
+              <a:lnSpc>
+                <a:spcPts val="2200"/>
+              </a:lnSpc>
+              <a:buNone/>
+            </a:pPr>
+            <a:r>
+              <a:rPr lang="en-US" sz="1100" dirty="0">
                 <a:solidFill>
                   <a:srgbClr val="212121"/>
                 </a:solidFill>
@@ -3917,104 +4491,86 @@
                 <a:ea typeface="Calibri" pitchFamily="34" charset="-122"/>
                 <a:cs typeface="Calibri" pitchFamily="34" charset="-120"/>
               </a:rPr>
-              <a:t>agronomist-reviewed rule engine: pre/during/post x crop x stage x hazard</a:t>
-            </a:r>
-            <a:endParaRPr lang="en-US" sz="1050" dirty="0"/>
-          </a:p>
-        </p:txBody>
-      </p:sp>
-      <p:sp>
-        <p:nvSpPr>
-          <p:cNvPr id="15" name="Text 13"/>
-          <p:cNvSpPr/>
-          <p:nvPr/>
-        </p:nvSpPr>
-        <p:spPr>
-          <a:xfrm>
-            <a:off x="2708910" y="3200400"/>
-            <a:ext cx="1611630" cy="457200"/>
-          </a:xfrm>
-          <a:prstGeom prst="rect">
-            <a:avLst/>
-          </a:prstGeom>
-          <a:noFill/>
-          <a:ln/>
-        </p:spPr>
-        <p:txBody>
-          <a:bodyPr wrap="square" lIns="0" tIns="0" rIns="0" bIns="0" rtlCol="0" anchor="ctr"/>
-          <a:lstStyle/>
-          <a:p>
-            <a:pPr algn="ctr" indent="0" marL="0">
-              <a:buNone/>
-            </a:pPr>
-            <a:r>
-              <a:rPr lang="en-US" sz="950" i="1" dirty="0">
-                <a:solidFill>
-                  <a:srgbClr val="5A6B5A"/>
+              <a:t>SHELTER AND SAFETY</a:t>
+            </a:r>
+            <a:endParaRPr lang="en-US" sz="1100" dirty="0"/>
+          </a:p>
+          <a:p>
+            <a:pPr indent="0" marL="0">
+              <a:lnSpc>
+                <a:spcPts val="2200"/>
+              </a:lnSpc>
+              <a:buNone/>
+            </a:pPr>
+            <a:r>
+              <a:rPr lang="en-US" sz="1100" dirty="0">
+                <a:solidFill>
+                  <a:srgbClr val="212121"/>
                 </a:solidFill>
                 <a:latin typeface="Calibri" pitchFamily="34" charset="0"/>
                 <a:ea typeface="Calibri" pitchFamily="34" charset="-122"/>
                 <a:cs typeface="Calibri" pitchFamily="34" charset="-120"/>
               </a:rPr>
-              <a:t>every proposal carries deadline, source, cost of waiting</a:t>
-            </a:r>
-            <a:endParaRPr lang="en-US" sz="950" dirty="0"/>
-          </a:p>
-        </p:txBody>
-      </p:sp>
-      <p:sp>
-        <p:nvSpPr>
-          <p:cNvPr id="16" name="Text 14"/>
-          <p:cNvSpPr/>
-          <p:nvPr/>
-        </p:nvSpPr>
-        <p:spPr>
-          <a:xfrm>
-            <a:off x="4475988" y="2103120"/>
-            <a:ext cx="201168" cy="457200"/>
-          </a:xfrm>
-          <a:prstGeom prst="rect">
-            <a:avLst/>
-          </a:prstGeom>
-          <a:noFill/>
-          <a:ln/>
-        </p:spPr>
-        <p:txBody>
-          <a:bodyPr wrap="square" lIns="0" tIns="0" rIns="0" bIns="0" rtlCol="0" anchor="ctr"/>
-          <a:lstStyle/>
-          <a:p>
-            <a:pPr algn="ctr" indent="0" marL="0">
-              <a:buNone/>
-            </a:pPr>
-            <a:r>
-              <a:rPr lang="en-US" sz="2000" b="1" dirty="0">
-                <a:solidFill>
-                  <a:srgbClr val="97BC62"/>
+              <a:t>Odia guidance for the household</a:t>
+            </a:r>
+            <a:endParaRPr lang="en-US" sz="1100" dirty="0"/>
+          </a:p>
+          <a:p>
+            <a:pPr indent="0" marL="0">
+              <a:lnSpc>
+                <a:spcPts val="2200"/>
+              </a:lnSpc>
+              <a:buNone/>
+            </a:pPr>
+            <a:r>
+              <a:rPr lang="en-US" sz="1100" dirty="0">
+                <a:solidFill>
+                  <a:srgbClr val="212121"/>
                 </a:solidFill>
                 <a:latin typeface="Calibri" pitchFamily="34" charset="0"/>
                 <a:ea typeface="Calibri" pitchFamily="34" charset="-122"/>
                 <a:cs typeface="Calibri" pitchFamily="34" charset="-120"/>
               </a:rPr>
-              <a:t>&gt;</a:t>
-            </a:r>
-            <a:endParaRPr lang="en-US" sz="2000" dirty="0"/>
-          </a:p>
-        </p:txBody>
-      </p:sp>
-      <p:sp>
-        <p:nvSpPr>
-          <p:cNvPr id="17" name="Shape 15"/>
-          <p:cNvSpPr/>
-          <p:nvPr/>
-        </p:nvSpPr>
-        <p:spPr>
-          <a:xfrm>
-            <a:off x="4686300" y="1143000"/>
-            <a:ext cx="1885950" cy="2606040"/>
+              <a:t>livestock and fodder checklist</a:t>
+            </a:r>
+            <a:endParaRPr lang="en-US" sz="1100" dirty="0"/>
+          </a:p>
+          <a:p>
+            <a:pPr indent="0" marL="0">
+              <a:lnSpc>
+                <a:spcPts val="2200"/>
+              </a:lnSpc>
+              <a:buNone/>
+            </a:pPr>
+            <a:r>
+              <a:rPr lang="en-US" sz="1100" dirty="0">
+                <a:solidFill>
+                  <a:srgbClr val="212121"/>
+                </a:solidFill>
+                <a:latin typeface="Calibri" pitchFamily="34" charset="0"/>
+                <a:ea typeface="Calibri" pitchFamily="34" charset="-122"/>
+                <a:cs typeface="Calibri" pitchFamily="34" charset="-120"/>
+              </a:rPr>
+              <a:t>keep the advisory reachable offline</a:t>
+            </a:r>
+            <a:endParaRPr lang="en-US" sz="1100" dirty="0"/>
+          </a:p>
+        </p:txBody>
+      </p:sp>
+      <p:sp>
+        <p:nvSpPr>
+          <p:cNvPr id="14" name="Shape 12"/>
+          <p:cNvSpPr/>
+          <p:nvPr/>
+        </p:nvSpPr>
+        <p:spPr>
+          <a:xfrm>
+            <a:off x="6156960" y="1600200"/>
+            <a:ext cx="2529840" cy="2377440"/>
           </a:xfrm>
           <a:prstGeom prst="roundRect">
             <a:avLst>
-              <a:gd name="adj" fmla="val 3879"/>
+              <a:gd name="adj" fmla="val 3077"/>
             </a:avLst>
           </a:prstGeom>
           <a:solidFill>
@@ -4030,34 +4586,34 @@
       </p:sp>
       <p:sp>
         <p:nvSpPr>
-          <p:cNvPr id="18" name="Shape 16"/>
-          <p:cNvSpPr/>
-          <p:nvPr/>
-        </p:nvSpPr>
-        <p:spPr>
-          <a:xfrm>
-            <a:off x="5354955" y="1325880"/>
-            <a:ext cx="548640" cy="548640"/>
+          <p:cNvPr id="15" name="Shape 13"/>
+          <p:cNvSpPr/>
+          <p:nvPr/>
+        </p:nvSpPr>
+        <p:spPr>
+          <a:xfrm>
+            <a:off x="6294120" y="1783080"/>
+            <a:ext cx="384048" cy="384048"/>
           </a:xfrm>
           <a:prstGeom prst="ellipse">
             <a:avLst/>
           </a:prstGeom>
           <a:solidFill>
-            <a:srgbClr val="2C5F2D"/>
+            <a:srgbClr val="97BC62"/>
           </a:solidFill>
           <a:ln/>
         </p:spPr>
       </p:sp>
       <p:sp>
         <p:nvSpPr>
-          <p:cNvPr id="19" name="Text 17"/>
-          <p:cNvSpPr/>
-          <p:nvPr/>
-        </p:nvSpPr>
-        <p:spPr>
-          <a:xfrm>
-            <a:off x="5354955" y="1389888"/>
-            <a:ext cx="548640" cy="411480"/>
+          <p:cNvPr id="16" name="Text 14"/>
+          <p:cNvSpPr/>
+          <p:nvPr/>
+        </p:nvSpPr>
+        <p:spPr>
+          <a:xfrm>
+            <a:off x="6294120" y="1828800"/>
+            <a:ext cx="384048" cy="292608"/>
           </a:xfrm>
           <a:prstGeom prst="rect">
             <a:avLst/>
@@ -4073,85 +4629,88 @@
               <a:buNone/>
             </a:pPr>
             <a:r>
-              <a:rPr lang="en-US" sz="1800" b="1" dirty="0">
-                <a:solidFill>
-                  <a:srgbClr val="F5F7F2"/>
+              <a:rPr lang="en-US" sz="1400" b="1" dirty="0">
+                <a:solidFill>
+                  <a:srgbClr val="FFFFFF"/>
+                </a:solidFill>
+                <a:latin typeface="Calibri" pitchFamily="34" charset="0"/>
+                <a:ea typeface="Calibri" pitchFamily="34" charset="-122"/>
+                <a:cs typeface="Calibri" pitchFamily="34" charset="-120"/>
+              </a:rPr>
+              <a:t>3</a:t>
+            </a:r>
+            <a:endParaRPr lang="en-US" sz="1400" dirty="0"/>
+          </a:p>
+        </p:txBody>
+      </p:sp>
+      <p:sp>
+        <p:nvSpPr>
+          <p:cNvPr id="17" name="Text 15"/>
+          <p:cNvSpPr/>
+          <p:nvPr/>
+        </p:nvSpPr>
+        <p:spPr>
+          <a:xfrm>
+            <a:off x="6778752" y="1810512"/>
+            <a:ext cx="1798320" cy="320040"/>
+          </a:xfrm>
+          <a:prstGeom prst="rect">
+            <a:avLst/>
+          </a:prstGeom>
+          <a:noFill/>
+          <a:ln/>
+        </p:spPr>
+        <p:txBody>
+          <a:bodyPr wrap="square" lIns="0" tIns="0" rIns="0" bIns="0" rtlCol="0" anchor="ctr"/>
+          <a:lstStyle/>
+          <a:p>
+            <a:pPr indent="0" marL="0">
+              <a:buNone/>
+            </a:pPr>
+            <a:r>
+              <a:rPr lang="en-US" sz="1500" b="1" dirty="0">
+                <a:solidFill>
+                  <a:srgbClr val="2C5F2D"/>
                 </a:solidFill>
                 <a:latin typeface="Cambria" pitchFamily="34" charset="0"/>
                 <a:ea typeface="Cambria" pitchFamily="34" charset="-122"/>
                 <a:cs typeface="Cambria" pitchFamily="34" charset="-120"/>
               </a:rPr>
-              <a:t>3</a:t>
-            </a:r>
-            <a:endParaRPr lang="en-US" sz="1800" dirty="0"/>
-          </a:p>
-        </p:txBody>
-      </p:sp>
-      <p:sp>
-        <p:nvSpPr>
-          <p:cNvPr id="20" name="Text 18"/>
-          <p:cNvSpPr/>
-          <p:nvPr/>
-        </p:nvSpPr>
-        <p:spPr>
-          <a:xfrm>
-            <a:off x="4777740" y="2011680"/>
-            <a:ext cx="1703070" cy="320040"/>
-          </a:xfrm>
-          <a:prstGeom prst="rect">
-            <a:avLst/>
-          </a:prstGeom>
-          <a:noFill/>
-          <a:ln/>
-        </p:spPr>
-        <p:txBody>
-          <a:bodyPr wrap="square" lIns="0" tIns="0" rIns="0" bIns="0" rtlCol="0" anchor="ctr"/>
-          <a:lstStyle/>
-          <a:p>
-            <a:pPr algn="ctr" indent="0" marL="0">
-              <a:buNone/>
-            </a:pPr>
-            <a:r>
-              <a:rPr lang="en-US" sz="1400" b="1" dirty="0">
-                <a:solidFill>
-                  <a:srgbClr val="2C5F2D"/>
-                </a:solidFill>
-                <a:latin typeface="Cambria" pitchFamily="34" charset="0"/>
-                <a:ea typeface="Cambria" pitchFamily="34" charset="-122"/>
-                <a:cs typeface="Cambria" pitchFamily="34" charset="-120"/>
-              </a:rPr>
-              <a:t>DELIVER</a:t>
-            </a:r>
-            <a:endParaRPr lang="en-US" sz="1400" dirty="0"/>
-          </a:p>
-        </p:txBody>
-      </p:sp>
-      <p:sp>
-        <p:nvSpPr>
-          <p:cNvPr id="21" name="Text 19"/>
-          <p:cNvSpPr/>
-          <p:nvPr/>
-        </p:nvSpPr>
-        <p:spPr>
-          <a:xfrm>
-            <a:off x="4823460" y="2377440"/>
-            <a:ext cx="1611630" cy="777240"/>
-          </a:xfrm>
-          <a:prstGeom prst="rect">
-            <a:avLst/>
-          </a:prstGeom>
-          <a:noFill/>
-          <a:ln/>
-        </p:spPr>
-        <p:txBody>
-          <a:bodyPr wrap="square" lIns="0" tIns="0" rIns="0" bIns="0" rtlCol="0" anchor="ctr"/>
-          <a:lstStyle/>
-          <a:p>
-            <a:pPr algn="ctr" indent="0" marL="0">
-              <a:buNone/>
-            </a:pPr>
-            <a:r>
-              <a:rPr lang="en-US" sz="1050" dirty="0">
+              <a:t>AFTER</a:t>
+            </a:r>
+            <a:endParaRPr lang="en-US" sz="1500" dirty="0"/>
+          </a:p>
+        </p:txBody>
+      </p:sp>
+      <p:sp>
+        <p:nvSpPr>
+          <p:cNvPr id="18" name="Text 16"/>
+          <p:cNvSpPr/>
+          <p:nvPr/>
+        </p:nvSpPr>
+        <p:spPr>
+          <a:xfrm>
+            <a:off x="6339840" y="2331720"/>
+            <a:ext cx="2164080" cy="1508760"/>
+          </a:xfrm>
+          <a:prstGeom prst="rect">
+            <a:avLst/>
+          </a:prstGeom>
+          <a:noFill/>
+          <a:ln/>
+        </p:spPr>
+        <p:txBody>
+          <a:bodyPr wrap="square" lIns="0" tIns="0" rIns="0" bIns="0" rtlCol="0" anchor="ctr"/>
+          <a:lstStyle/>
+          <a:p>
+            <a:pPr indent="0" marL="0">
+              <a:lnSpc>
+                <a:spcPts val="2200"/>
+              </a:lnSpc>
+              <a:buNone/>
+            </a:pPr>
+            <a:r>
+              <a:rPr lang="en-US" sz="1100" dirty="0">
                 <a:solidFill>
                   <a:srgbClr val="212121"/>
                 </a:solidFill>
@@ -4159,241 +4718,59 @@
                 <a:ea typeface="Calibri" pitchFamily="34" charset="-122"/>
                 <a:cs typeface="Calibri" pitchFamily="34" charset="-120"/>
               </a:rPr>
-              <a:t>Odia SMS and IVR, offline queue, ack and report capture</a:t>
-            </a:r>
-            <a:endParaRPr lang="en-US" sz="1050" dirty="0"/>
-          </a:p>
-        </p:txBody>
-      </p:sp>
-      <p:sp>
-        <p:nvSpPr>
-          <p:cNvPr id="22" name="Text 20"/>
-          <p:cNvSpPr/>
-          <p:nvPr/>
-        </p:nvSpPr>
-        <p:spPr>
-          <a:xfrm>
-            <a:off x="4823460" y="3200400"/>
-            <a:ext cx="1611630" cy="457200"/>
-          </a:xfrm>
-          <a:prstGeom prst="rect">
-            <a:avLst/>
-          </a:prstGeom>
-          <a:noFill/>
-          <a:ln/>
-        </p:spPr>
-        <p:txBody>
-          <a:bodyPr wrap="square" lIns="0" tIns="0" rIns="0" bIns="0" rtlCol="0" anchor="ctr"/>
-          <a:lstStyle/>
-          <a:p>
-            <a:pPr algn="ctr" indent="0" marL="0">
-              <a:buNone/>
-            </a:pPr>
-            <a:r>
-              <a:rPr lang="en-US" sz="950" i="1" dirty="0">
-                <a:solidFill>
-                  <a:srgbClr val="5A6B5A"/>
+              <a:t>RECOVERY AND CLAIMS</a:t>
+            </a:r>
+            <a:endParaRPr lang="en-US" sz="1100" dirty="0"/>
+          </a:p>
+          <a:p>
+            <a:pPr indent="0" marL="0">
+              <a:lnSpc>
+                <a:spcPts val="2200"/>
+              </a:lnSpc>
+              <a:buNone/>
+            </a:pPr>
+            <a:r>
+              <a:rPr lang="en-US" sz="1100" dirty="0">
+                <a:solidFill>
+                  <a:srgbClr val="212121"/>
                 </a:solidFill>
                 <a:latin typeface="Calibri" pitchFamily="34" charset="0"/>
                 <a:ea typeface="Calibri" pitchFamily="34" charset="-122"/>
                 <a:cs typeface="Calibri" pitchFamily="34" charset="-120"/>
               </a:rPr>
-              <a:t>works when the tower drops; syncs when it returns</a:t>
-            </a:r>
-            <a:endParaRPr lang="en-US" sz="950" dirty="0"/>
-          </a:p>
-        </p:txBody>
-      </p:sp>
-      <p:sp>
-        <p:nvSpPr>
-          <p:cNvPr id="23" name="Text 21"/>
-          <p:cNvSpPr/>
-          <p:nvPr/>
-        </p:nvSpPr>
-        <p:spPr>
-          <a:xfrm>
-            <a:off x="6590538" y="2103120"/>
-            <a:ext cx="201168" cy="457200"/>
-          </a:xfrm>
-          <a:prstGeom prst="rect">
-            <a:avLst/>
-          </a:prstGeom>
-          <a:noFill/>
-          <a:ln/>
-        </p:spPr>
-        <p:txBody>
-          <a:bodyPr wrap="square" lIns="0" tIns="0" rIns="0" bIns="0" rtlCol="0" anchor="ctr"/>
-          <a:lstStyle/>
-          <a:p>
-            <a:pPr algn="ctr" indent="0" marL="0">
-              <a:buNone/>
-            </a:pPr>
-            <a:r>
-              <a:rPr lang="en-US" sz="2000" b="1" dirty="0">
-                <a:solidFill>
-                  <a:srgbClr val="97BC62"/>
+              <a:t>saline flush and re-sowing plan per plot</a:t>
+            </a:r>
+            <a:endParaRPr lang="en-US" sz="1100" dirty="0"/>
+          </a:p>
+          <a:p>
+            <a:pPr indent="0" marL="0">
+              <a:lnSpc>
+                <a:spcPts val="2200"/>
+              </a:lnSpc>
+              <a:buNone/>
+            </a:pPr>
+            <a:r>
+              <a:rPr lang="en-US" sz="1100" dirty="0">
+                <a:solidFill>
+                  <a:srgbClr val="212121"/>
                 </a:solidFill>
                 <a:latin typeface="Calibri" pitchFamily="34" charset="0"/>
                 <a:ea typeface="Calibri" pitchFamily="34" charset="-122"/>
                 <a:cs typeface="Calibri" pitchFamily="34" charset="-120"/>
               </a:rPr>
-              <a:t>&gt;</a:t>
-            </a:r>
-            <a:endParaRPr lang="en-US" sz="2000" dirty="0"/>
-          </a:p>
-        </p:txBody>
-      </p:sp>
-      <p:sp>
-        <p:nvSpPr>
-          <p:cNvPr id="24" name="Shape 22"/>
-          <p:cNvSpPr/>
-          <p:nvPr/>
-        </p:nvSpPr>
-        <p:spPr>
-          <a:xfrm>
-            <a:off x="6800850" y="1143000"/>
-            <a:ext cx="1885950" cy="2606040"/>
-          </a:xfrm>
-          <a:prstGeom prst="roundRect">
-            <a:avLst>
-              <a:gd name="adj" fmla="val 3879"/>
-            </a:avLst>
-          </a:prstGeom>
-          <a:solidFill>
-            <a:srgbClr val="F0F5EA"/>
-          </a:solidFill>
-          <a:ln w="12700">
-            <a:solidFill>
-              <a:srgbClr val="FFFFFF"/>
-            </a:solidFill>
-            <a:prstDash val="solid"/>
-          </a:ln>
-        </p:spPr>
-      </p:sp>
-      <p:sp>
-        <p:nvSpPr>
-          <p:cNvPr id="25" name="Shape 23"/>
-          <p:cNvSpPr/>
-          <p:nvPr/>
-        </p:nvSpPr>
-        <p:spPr>
-          <a:xfrm>
-            <a:off x="7469505" y="1325880"/>
-            <a:ext cx="548640" cy="548640"/>
-          </a:xfrm>
-          <a:prstGeom prst="ellipse">
-            <a:avLst/>
-          </a:prstGeom>
-          <a:solidFill>
-            <a:srgbClr val="2C5F2D"/>
-          </a:solidFill>
-          <a:ln/>
-        </p:spPr>
-      </p:sp>
-      <p:sp>
-        <p:nvSpPr>
-          <p:cNvPr id="26" name="Text 24"/>
-          <p:cNvSpPr/>
-          <p:nvPr/>
-        </p:nvSpPr>
-        <p:spPr>
-          <a:xfrm>
-            <a:off x="7469505" y="1389888"/>
-            <a:ext cx="548640" cy="411480"/>
-          </a:xfrm>
-          <a:prstGeom prst="rect">
-            <a:avLst/>
-          </a:prstGeom>
-          <a:noFill/>
-          <a:ln/>
-        </p:spPr>
-        <p:txBody>
-          <a:bodyPr wrap="square" lIns="0" tIns="0" rIns="0" bIns="0" rtlCol="0" anchor="ctr"/>
-          <a:lstStyle/>
-          <a:p>
-            <a:pPr algn="ctr" indent="0" marL="0">
-              <a:buNone/>
-            </a:pPr>
-            <a:r>
-              <a:rPr lang="en-US" sz="1800" b="1" dirty="0">
-                <a:solidFill>
-                  <a:srgbClr val="F5F7F2"/>
-                </a:solidFill>
-                <a:latin typeface="Cambria" pitchFamily="34" charset="0"/>
-                <a:ea typeface="Cambria" pitchFamily="34" charset="-122"/>
-                <a:cs typeface="Cambria" pitchFamily="34" charset="-120"/>
-              </a:rPr>
-              <a:t>4</a:t>
-            </a:r>
-            <a:endParaRPr lang="en-US" sz="1800" dirty="0"/>
-          </a:p>
-        </p:txBody>
-      </p:sp>
-      <p:sp>
-        <p:nvSpPr>
-          <p:cNvPr id="27" name="Text 25"/>
-          <p:cNvSpPr/>
-          <p:nvPr/>
-        </p:nvSpPr>
-        <p:spPr>
-          <a:xfrm>
-            <a:off x="6892290" y="2011680"/>
-            <a:ext cx="1703070" cy="320040"/>
-          </a:xfrm>
-          <a:prstGeom prst="rect">
-            <a:avLst/>
-          </a:prstGeom>
-          <a:noFill/>
-          <a:ln/>
-        </p:spPr>
-        <p:txBody>
-          <a:bodyPr wrap="square" lIns="0" tIns="0" rIns="0" bIns="0" rtlCol="0" anchor="ctr"/>
-          <a:lstStyle/>
-          <a:p>
-            <a:pPr algn="ctr" indent="0" marL="0">
-              <a:buNone/>
-            </a:pPr>
-            <a:r>
-              <a:rPr lang="en-US" sz="1400" b="1" dirty="0">
-                <a:solidFill>
-                  <a:srgbClr val="2C5F2D"/>
-                </a:solidFill>
-                <a:latin typeface="Cambria" pitchFamily="34" charset="0"/>
-                <a:ea typeface="Cambria" pitchFamily="34" charset="-122"/>
-                <a:cs typeface="Cambria" pitchFamily="34" charset="-120"/>
-              </a:rPr>
-              <a:t>RECOVER</a:t>
-            </a:r>
-            <a:endParaRPr lang="en-US" sz="1400" dirty="0"/>
-          </a:p>
-        </p:txBody>
-      </p:sp>
-      <p:sp>
-        <p:nvSpPr>
-          <p:cNvPr id="28" name="Text 26"/>
-          <p:cNvSpPr/>
-          <p:nvPr/>
-        </p:nvSpPr>
-        <p:spPr>
-          <a:xfrm>
-            <a:off x="6938010" y="2377440"/>
-            <a:ext cx="1611630" cy="777240"/>
-          </a:xfrm>
-          <a:prstGeom prst="rect">
-            <a:avLst/>
-          </a:prstGeom>
-          <a:noFill/>
-          <a:ln/>
-        </p:spPr>
-        <p:txBody>
-          <a:bodyPr wrap="square" lIns="0" tIns="0" rIns="0" bIns="0" rtlCol="0" anchor="ctr"/>
-          <a:lstStyle/>
-          <a:p>
-            <a:pPr algn="ctr" indent="0" marL="0">
-              <a:buNone/>
-            </a:pPr>
-            <a:r>
-              <a:rPr lang="en-US" sz="1050" dirty="0">
+              <a:t>damage evidence capture on a basic phone</a:t>
+            </a:r>
+            <a:endParaRPr lang="en-US" sz="1100" dirty="0"/>
+          </a:p>
+          <a:p>
+            <a:pPr indent="0" marL="0">
+              <a:lnSpc>
+                <a:spcPts val="2200"/>
+              </a:lnSpc>
+              <a:buNone/>
+            </a:pPr>
+            <a:r>
+              <a:rPr lang="en-US" sz="1100" dirty="0">
                 <a:solidFill>
                   <a:srgbClr val="212121"/>
                 </a:solidFill>
@@ -4401,38 +4778,38 @@
                 <a:ea typeface="Calibri" pitchFamily="34" charset="-122"/>
                 <a:cs typeface="Calibri" pitchFamily="34" charset="-120"/>
               </a:rPr>
-              <a:t>post-inundation recovery chain and claims evidence packet</a:t>
-            </a:r>
-            <a:endParaRPr lang="en-US" sz="1050" dirty="0"/>
-          </a:p>
-        </p:txBody>
-      </p:sp>
-      <p:sp>
-        <p:nvSpPr>
-          <p:cNvPr id="29" name="Text 27"/>
-          <p:cNvSpPr/>
-          <p:nvPr/>
-        </p:nvSpPr>
-        <p:spPr>
-          <a:xfrm>
-            <a:off x="6938010" y="3200400"/>
-            <a:ext cx="1611630" cy="457200"/>
-          </a:xfrm>
-          <a:prstGeom prst="rect">
-            <a:avLst/>
-          </a:prstGeom>
-          <a:noFill/>
-          <a:ln/>
-        </p:spPr>
-        <p:txBody>
-          <a:bodyPr wrap="square" lIns="0" tIns="0" rIns="0" bIns="0" rtlCol="0" anchor="ctr"/>
-          <a:lstStyle/>
-          <a:p>
-            <a:pPr algn="ctr" indent="0" marL="0">
-              <a:buNone/>
-            </a:pPr>
-            <a:r>
-              <a:rPr lang="en-US" sz="950" i="1" dirty="0">
+              <a:t>PMFBY claim packet export</a:t>
+            </a:r>
+            <a:endParaRPr lang="en-US" sz="1100" dirty="0"/>
+          </a:p>
+        </p:txBody>
+      </p:sp>
+      <p:sp>
+        <p:nvSpPr>
+          <p:cNvPr id="19" name="Text 17"/>
+          <p:cNvSpPr/>
+          <p:nvPr/>
+        </p:nvSpPr>
+        <p:spPr>
+          <a:xfrm>
+            <a:off x="457200" y="4114800"/>
+            <a:ext cx="8229600" cy="365760"/>
+          </a:xfrm>
+          <a:prstGeom prst="rect">
+            <a:avLst/>
+          </a:prstGeom>
+          <a:noFill/>
+          <a:ln/>
+        </p:spPr>
+        <p:txBody>
+          <a:bodyPr wrap="square" lIns="0" tIns="0" rIns="0" bIns="0" rtlCol="0" anchor="ctr"/>
+          <a:lstStyle/>
+          <a:p>
+            <a:pPr indent="0" marL="0">
+              <a:buNone/>
+            </a:pPr>
+            <a:r>
+              <a:rPr lang="en-US" sz="1050" i="1" dirty="0">
                 <a:solidFill>
                   <a:srgbClr val="5A6B5A"/>
                 </a:solidFill>
@@ -4440,60 +4817,21 @@
                 <a:ea typeface="Calibri" pitchFamily="34" charset="-122"/>
                 <a:cs typeface="Calibri" pitchFamily="34" charset="-120"/>
               </a:rPr>
-              <a:t>verified observation becomes an insurance claim</a:t>
-            </a:r>
-            <a:endParaRPr lang="en-US" sz="950" dirty="0"/>
-          </a:p>
-        </p:txBody>
-      </p:sp>
-      <p:sp>
-        <p:nvSpPr>
-          <p:cNvPr id="30" name="Text 28"/>
-          <p:cNvSpPr/>
-          <p:nvPr/>
-        </p:nvSpPr>
-        <p:spPr>
-          <a:xfrm>
-            <a:off x="457200" y="3977640"/>
-            <a:ext cx="8229600" cy="411480"/>
-          </a:xfrm>
-          <a:prstGeom prst="rect">
-            <a:avLst/>
-          </a:prstGeom>
-          <a:noFill/>
-          <a:ln/>
-        </p:spPr>
-        <p:txBody>
-          <a:bodyPr wrap="square" lIns="0" tIns="0" rIns="0" bIns="0" rtlCol="0" anchor="ctr"/>
-          <a:lstStyle/>
-          <a:p>
-            <a:pPr indent="0" marL="0">
-              <a:buNone/>
-            </a:pPr>
-            <a:r>
-              <a:rPr lang="en-US" sz="1350" b="1" dirty="0">
-                <a:solidFill>
-                  <a:srgbClr val="2C5F2D"/>
-                </a:solidFill>
-                <a:latin typeface="Cambria" pitchFamily="34" charset="0"/>
-                <a:ea typeface="Cambria" pitchFamily="34" charset="-122"/>
-                <a:cs typeface="Cambria" pitchFamily="34" charset="-120"/>
-              </a:rPr>
-              <a:t>The same governed pipeline we verified: ingest, decide, propose, approve, audit. Every action leaves a replayable trace.</a:t>
-            </a:r>
-            <a:endParaRPr lang="en-US" sz="1350" dirty="0"/>
-          </a:p>
-        </p:txBody>
-      </p:sp>
-      <p:sp>
-        <p:nvSpPr>
-          <p:cNvPr id="31" name="Text 29"/>
-          <p:cNvSpPr/>
-          <p:nvPr/>
-        </p:nvSpPr>
-        <p:spPr>
-          <a:xfrm>
-            <a:off x="457200" y="4759452"/>
+              <a:t>Honest framing: the advisory engine is the hero. Acknowledgement and report capture are adaptation features inside it, not the pitch.</a:t>
+            </a:r>
+            <a:endParaRPr lang="en-US" sz="1050" dirty="0"/>
+          </a:p>
+        </p:txBody>
+      </p:sp>
+      <p:sp>
+        <p:nvSpPr>
+          <p:cNvPr id="20" name="Text 18"/>
+          <p:cNvSpPr/>
+          <p:nvPr/>
+        </p:nvSpPr>
+        <p:spPr>
+          <a:xfrm>
+            <a:off x="457200" y="4828032"/>
             <a:ext cx="8229600" cy="274320"/>
           </a:xfrm>
           <a:prstGeom prst="rect">
@@ -4518,7 +4856,7 @@
                 <a:ea typeface="Calibri" pitchFamily="34" charset="-122"/>
                 <a:cs typeface="Calibri" pitchFamily="34" charset="-120"/>
               </a:rPr>
-              <a:t>Demo behavior: given a hazard and a connectivity state, this farmer receives this prioritized action, and the advisory still syncs when bandwidth returns (W3 demo prescription).</a:t>
+              <a:t>Statement-faithful: the official problem is a resilient advisory system for cyclone and flood contexts, with farm-profile-aware, staged actions.</a:t>
             </a:r>
             <a:endParaRPr lang="en-US" sz="900" dirty="0"/>
           </a:p>
@@ -4589,7 +4927,7 @@
                 <a:ea typeface="Cambria" pitchFamily="34" charset="-122"/>
                 <a:cs typeface="Cambria" pitchFamily="34" charset="-120"/>
               </a:rPr>
-              <a:t>Prototype today: verified, honest, offline-capable</a:t>
+              <a:t>Mechanism: ingest, decide, deliver, recover</a:t>
             </a:r>
             <a:endParaRPr lang="en-US" sz="2800" dirty="0"/>
           </a:p>
@@ -4603,16 +4941,16 @@
         </p:nvSpPr>
         <p:spPr>
           <a:xfrm>
-            <a:off x="457200" y="1051560"/>
-            <a:ext cx="4069080" cy="914400"/>
+            <a:off x="457200" y="1143000"/>
+            <a:ext cx="1885950" cy="2606040"/>
           </a:xfrm>
           <a:prstGeom prst="roundRect">
             <a:avLst>
-              <a:gd name="adj" fmla="val 8000"/>
+              <a:gd name="adj" fmla="val 3879"/>
             </a:avLst>
           </a:prstGeom>
           <a:solidFill>
-            <a:srgbClr val="F7FAF2"/>
+            <a:srgbClr val="F0F5EA"/>
           </a:solidFill>
           <a:ln w="12700">
             <a:solidFill>
@@ -4624,38 +4962,58 @@
       </p:sp>
       <p:sp>
         <p:nvSpPr>
-          <p:cNvPr id="4" name="Text 2"/>
-          <p:cNvSpPr/>
-          <p:nvPr/>
-        </p:nvSpPr>
-        <p:spPr>
-          <a:xfrm>
-            <a:off x="594360" y="1161288"/>
-            <a:ext cx="1737360" cy="457200"/>
-          </a:xfrm>
-          <a:prstGeom prst="rect">
-            <a:avLst/>
-          </a:prstGeom>
-          <a:noFill/>
-          <a:ln/>
-        </p:spPr>
-        <p:txBody>
-          <a:bodyPr wrap="square" lIns="0" tIns="0" rIns="0" bIns="0" rtlCol="0" anchor="ctr"/>
-          <a:lstStyle/>
-          <a:p>
-            <a:pPr indent="0" marL="0">
+          <p:cNvPr id="4" name="Shape 2"/>
+          <p:cNvSpPr/>
+          <p:nvPr/>
+        </p:nvSpPr>
+        <p:spPr>
+          <a:xfrm>
+            <a:off x="1125855" y="1325880"/>
+            <a:ext cx="548640" cy="548640"/>
+          </a:xfrm>
+          <a:prstGeom prst="ellipse">
+            <a:avLst/>
+          </a:prstGeom>
+          <a:solidFill>
+            <a:srgbClr val="2C5F2D"/>
+          </a:solidFill>
+          <a:ln/>
+        </p:spPr>
+      </p:sp>
+      <p:sp>
+        <p:nvSpPr>
+          <p:cNvPr id="5" name="Text 3"/>
+          <p:cNvSpPr/>
+          <p:nvPr/>
+        </p:nvSpPr>
+        <p:spPr>
+          <a:xfrm>
+            <a:off x="1125855" y="1389888"/>
+            <a:ext cx="548640" cy="411480"/>
+          </a:xfrm>
+          <a:prstGeom prst="rect">
+            <a:avLst/>
+          </a:prstGeom>
+          <a:noFill/>
+          <a:ln/>
+        </p:spPr>
+        <p:txBody>
+          <a:bodyPr wrap="square" lIns="0" tIns="0" rIns="0" bIns="0" rtlCol="0" anchor="ctr"/>
+          <a:lstStyle/>
+          <a:p>
+            <a:pPr algn="ctr" indent="0" marL="0">
               <a:buNone/>
             </a:pPr>
             <a:r>
               <a:rPr lang="en-US" sz="1800" b="1" dirty="0">
                 <a:solidFill>
-                  <a:srgbClr val="2C5F2D"/>
+                  <a:srgbClr val="F5F7F2"/>
                 </a:solidFill>
                 <a:latin typeface="Cambria" pitchFamily="34" charset="0"/>
                 <a:ea typeface="Cambria" pitchFamily="34" charset="-122"/>
                 <a:cs typeface="Cambria" pitchFamily="34" charset="-120"/>
               </a:rPr>
-              <a:t>85 / 85</a:t>
+              <a:t>1</a:t>
             </a:r>
             <a:endParaRPr lang="en-US" sz="1800" dirty="0"/>
           </a:p>
@@ -4663,38 +5021,116 @@
       </p:sp>
       <p:sp>
         <p:nvSpPr>
-          <p:cNvPr id="5" name="Text 3"/>
-          <p:cNvSpPr/>
-          <p:nvPr/>
-        </p:nvSpPr>
-        <p:spPr>
-          <a:xfrm>
-            <a:off x="2331720" y="1161288"/>
-            <a:ext cx="2103120" cy="731520"/>
-          </a:xfrm>
-          <a:prstGeom prst="rect">
-            <a:avLst/>
-          </a:prstGeom>
-          <a:noFill/>
-          <a:ln/>
-        </p:spPr>
-        <p:txBody>
-          <a:bodyPr wrap="square" lIns="0" tIns="0" rIns="0" bIns="0" rtlCol="0" anchor="ctr"/>
-          <a:lstStyle/>
-          <a:p>
-            <a:pPr indent="0" marL="0">
-              <a:buNone/>
-            </a:pPr>
-            <a:r>
-              <a:rPr lang="en-US" sz="950" dirty="0">
-                <a:solidFill>
-                  <a:srgbClr val="5A6B5A"/>
+          <p:cNvPr id="6" name="Text 4"/>
+          <p:cNvSpPr/>
+          <p:nvPr/>
+        </p:nvSpPr>
+        <p:spPr>
+          <a:xfrm>
+            <a:off x="548640" y="2011680"/>
+            <a:ext cx="1703070" cy="320040"/>
+          </a:xfrm>
+          <a:prstGeom prst="rect">
+            <a:avLst/>
+          </a:prstGeom>
+          <a:noFill/>
+          <a:ln/>
+        </p:spPr>
+        <p:txBody>
+          <a:bodyPr wrap="square" lIns="0" tIns="0" rIns="0" bIns="0" rtlCol="0" anchor="ctr"/>
+          <a:lstStyle/>
+          <a:p>
+            <a:pPr algn="ctr" indent="0" marL="0">
+              <a:buNone/>
+            </a:pPr>
+            <a:r>
+              <a:rPr lang="en-US" sz="1400" b="1" dirty="0">
+                <a:solidFill>
+                  <a:srgbClr val="2C5F2D"/>
+                </a:solidFill>
+                <a:latin typeface="Cambria" pitchFamily="34" charset="0"/>
+                <a:ea typeface="Cambria" pitchFamily="34" charset="-122"/>
+                <a:cs typeface="Cambria" pitchFamily="34" charset="-120"/>
+              </a:rPr>
+              <a:t>INGEST</a:t>
+            </a:r>
+            <a:endParaRPr lang="en-US" sz="1400" dirty="0"/>
+          </a:p>
+        </p:txBody>
+      </p:sp>
+      <p:sp>
+        <p:nvSpPr>
+          <p:cNvPr id="7" name="Text 5"/>
+          <p:cNvSpPr/>
+          <p:nvPr/>
+        </p:nvSpPr>
+        <p:spPr>
+          <a:xfrm>
+            <a:off x="594360" y="2377440"/>
+            <a:ext cx="1611630" cy="777240"/>
+          </a:xfrm>
+          <a:prstGeom prst="rect">
+            <a:avLst/>
+          </a:prstGeom>
+          <a:noFill/>
+          <a:ln/>
+        </p:spPr>
+        <p:txBody>
+          <a:bodyPr wrap="square" lIns="0" tIns="0" rIns="0" bIns="0" rtlCol="0" anchor="ctr"/>
+          <a:lstStyle/>
+          <a:p>
+            <a:pPr algn="ctr" indent="0" marL="0">
+              <a:buNone/>
+            </a:pPr>
+            <a:r>
+              <a:rPr lang="en-US" sz="1050" dirty="0">
+                <a:solidFill>
+                  <a:srgbClr val="212121"/>
                 </a:solidFill>
                 <a:latin typeface="Calibri" pitchFamily="34" charset="0"/>
                 <a:ea typeface="Calibri" pitchFamily="34" charset="-122"/>
                 <a:cs typeface="Calibri" pitchFamily="34" charset="-120"/>
               </a:rPr>
-              <a:t>acceptance suites green across approval, trace, providers, multimodal, provenance, feeds, honesty, stress</a:t>
+              <a:t>IMD forecast plus farm profile: crop, stage, plot, soil, connectivity state</a:t>
+            </a:r>
+            <a:endParaRPr lang="en-US" sz="1050" dirty="0"/>
+          </a:p>
+        </p:txBody>
+      </p:sp>
+      <p:sp>
+        <p:nvSpPr>
+          <p:cNvPr id="8" name="Text 6"/>
+          <p:cNvSpPr/>
+          <p:nvPr/>
+        </p:nvSpPr>
+        <p:spPr>
+          <a:xfrm>
+            <a:off x="594360" y="3200400"/>
+            <a:ext cx="1611630" cy="457200"/>
+          </a:xfrm>
+          <a:prstGeom prst="rect">
+            <a:avLst/>
+          </a:prstGeom>
+          <a:noFill/>
+          <a:ln/>
+        </p:spPr>
+        <p:txBody>
+          <a:bodyPr wrap="square" lIns="0" tIns="0" rIns="0" bIns="0" rtlCol="0" anchor="ctr"/>
+          <a:lstStyle/>
+          <a:p>
+            <a:pPr algn="ctr" indent="0" marL="0">
+              <a:buNone/>
+            </a:pPr>
+            <a:r>
+              <a:rPr lang="en-US" sz="950" i="1" dirty="0">
+                <a:solidFill>
+                  <a:srgbClr val="5A6B5A"/>
+                </a:solidFill>
+                <a:latin typeface="Calibri" pitchFamily="34" charset="0"/>
+                <a:ea typeface="Calibri" pitchFamily="34" charset="-122"/>
+                <a:cs typeface="Calibri" pitchFamily="34" charset="-120"/>
+              </a:rPr>
+              <a:t>one inbox, local, no external runtime deps</a:t>
             </a:r>
             <a:endParaRPr lang="en-US" sz="950" dirty="0"/>
           </a:p>
@@ -4702,22 +5138,61 @@
       </p:sp>
       <p:sp>
         <p:nvSpPr>
-          <p:cNvPr id="6" name="Shape 4"/>
-          <p:cNvSpPr/>
-          <p:nvPr/>
-        </p:nvSpPr>
-        <p:spPr>
-          <a:xfrm>
-            <a:off x="4617720" y="1051560"/>
-            <a:ext cx="4069080" cy="914400"/>
+          <p:cNvPr id="9" name="Text 7"/>
+          <p:cNvSpPr/>
+          <p:nvPr/>
+        </p:nvSpPr>
+        <p:spPr>
+          <a:xfrm>
+            <a:off x="2361438" y="2103120"/>
+            <a:ext cx="201168" cy="457200"/>
+          </a:xfrm>
+          <a:prstGeom prst="rect">
+            <a:avLst/>
+          </a:prstGeom>
+          <a:noFill/>
+          <a:ln/>
+        </p:spPr>
+        <p:txBody>
+          <a:bodyPr wrap="square" lIns="0" tIns="0" rIns="0" bIns="0" rtlCol="0" anchor="ctr"/>
+          <a:lstStyle/>
+          <a:p>
+            <a:pPr algn="ctr" indent="0" marL="0">
+              <a:buNone/>
+            </a:pPr>
+            <a:r>
+              <a:rPr lang="en-US" sz="2000" b="1" dirty="0">
+                <a:solidFill>
+                  <a:srgbClr val="97BC62"/>
+                </a:solidFill>
+                <a:latin typeface="Calibri" pitchFamily="34" charset="0"/>
+                <a:ea typeface="Calibri" pitchFamily="34" charset="-122"/>
+                <a:cs typeface="Calibri" pitchFamily="34" charset="-120"/>
+              </a:rPr>
+              <a:t>&gt;</a:t>
+            </a:r>
+            <a:endParaRPr lang="en-US" sz="2000" dirty="0"/>
+          </a:p>
+        </p:txBody>
+      </p:sp>
+      <p:sp>
+        <p:nvSpPr>
+          <p:cNvPr id="10" name="Shape 8"/>
+          <p:cNvSpPr/>
+          <p:nvPr/>
+        </p:nvSpPr>
+        <p:spPr>
+          <a:xfrm>
+            <a:off x="2571750" y="1143000"/>
+            <a:ext cx="1885950" cy="2606040"/>
           </a:xfrm>
           <a:prstGeom prst="roundRect">
             <a:avLst>
-              <a:gd name="adj" fmla="val 8000"/>
+              <a:gd name="adj" fmla="val 3879"/>
             </a:avLst>
           </a:prstGeom>
           <a:solidFill>
-            <a:srgbClr val="F7FAF2"/>
+            <a:srgbClr val="F0F5EA"/>
           </a:solidFill>
           <a:ln w="12700">
             <a:solidFill>
@@ -4729,38 +5204,58 @@
       </p:sp>
       <p:sp>
         <p:nvSpPr>
-          <p:cNvPr id="7" name="Text 5"/>
-          <p:cNvSpPr/>
-          <p:nvPr/>
-        </p:nvSpPr>
-        <p:spPr>
-          <a:xfrm>
-            <a:off x="4754880" y="1161288"/>
-            <a:ext cx="1737360" cy="457200"/>
-          </a:xfrm>
-          <a:prstGeom prst="rect">
-            <a:avLst/>
-          </a:prstGeom>
-          <a:noFill/>
-          <a:ln/>
-        </p:spPr>
-        <p:txBody>
-          <a:bodyPr wrap="square" lIns="0" tIns="0" rIns="0" bIns="0" rtlCol="0" anchor="ctr"/>
-          <a:lstStyle/>
-          <a:p>
-            <a:pPr indent="0" marL="0">
+          <p:cNvPr id="11" name="Shape 9"/>
+          <p:cNvSpPr/>
+          <p:nvPr/>
+        </p:nvSpPr>
+        <p:spPr>
+          <a:xfrm>
+            <a:off x="3240405" y="1325880"/>
+            <a:ext cx="548640" cy="548640"/>
+          </a:xfrm>
+          <a:prstGeom prst="ellipse">
+            <a:avLst/>
+          </a:prstGeom>
+          <a:solidFill>
+            <a:srgbClr val="2C5F2D"/>
+          </a:solidFill>
+          <a:ln/>
+        </p:spPr>
+      </p:sp>
+      <p:sp>
+        <p:nvSpPr>
+          <p:cNvPr id="12" name="Text 10"/>
+          <p:cNvSpPr/>
+          <p:nvPr/>
+        </p:nvSpPr>
+        <p:spPr>
+          <a:xfrm>
+            <a:off x="3240405" y="1389888"/>
+            <a:ext cx="548640" cy="411480"/>
+          </a:xfrm>
+          <a:prstGeom prst="rect">
+            <a:avLst/>
+          </a:prstGeom>
+          <a:noFill/>
+          <a:ln/>
+        </p:spPr>
+        <p:txBody>
+          <a:bodyPr wrap="square" lIns="0" tIns="0" rIns="0" bIns="0" rtlCol="0" anchor="ctr"/>
+          <a:lstStyle/>
+          <a:p>
+            <a:pPr algn="ctr" indent="0" marL="0">
               <a:buNone/>
             </a:pPr>
             <a:r>
               <a:rPr lang="en-US" sz="1800" b="1" dirty="0">
                 <a:solidFill>
-                  <a:srgbClr val="2C5F2D"/>
+                  <a:srgbClr val="F5F7F2"/>
                 </a:solidFill>
                 <a:latin typeface="Cambria" pitchFamily="34" charset="0"/>
                 <a:ea typeface="Cambria" pitchFamily="34" charset="-122"/>
                 <a:cs typeface="Cambria" pitchFamily="34" charset="-120"/>
               </a:rPr>
-              <a:t>46 / 46</a:t>
+              <a:t>2</a:t>
             </a:r>
             <a:endParaRPr lang="en-US" sz="1800" dirty="0"/>
           </a:p>
@@ -4768,38 +5263,116 @@
       </p:sp>
       <p:sp>
         <p:nvSpPr>
-          <p:cNvPr id="8" name="Text 6"/>
-          <p:cNvSpPr/>
-          <p:nvPr/>
-        </p:nvSpPr>
-        <p:spPr>
-          <a:xfrm>
-            <a:off x="6492240" y="1161288"/>
-            <a:ext cx="2103120" cy="731520"/>
-          </a:xfrm>
-          <a:prstGeom prst="rect">
-            <a:avLst/>
-          </a:prstGeom>
-          <a:noFill/>
-          <a:ln/>
-        </p:spPr>
-        <p:txBody>
-          <a:bodyPr wrap="square" lIns="0" tIns="0" rIns="0" bIns="0" rtlCol="0" anchor="ctr"/>
-          <a:lstStyle/>
-          <a:p>
-            <a:pPr indent="0" marL="0">
-              <a:buNone/>
-            </a:pPr>
-            <a:r>
-              <a:rPr lang="en-US" sz="950" dirty="0">
-                <a:solidFill>
-                  <a:srgbClr val="5A6B5A"/>
+          <p:cNvPr id="13" name="Text 11"/>
+          <p:cNvSpPr/>
+          <p:nvPr/>
+        </p:nvSpPr>
+        <p:spPr>
+          <a:xfrm>
+            <a:off x="2663190" y="2011680"/>
+            <a:ext cx="1703070" cy="320040"/>
+          </a:xfrm>
+          <a:prstGeom prst="rect">
+            <a:avLst/>
+          </a:prstGeom>
+          <a:noFill/>
+          <a:ln/>
+        </p:spPr>
+        <p:txBody>
+          <a:bodyPr wrap="square" lIns="0" tIns="0" rIns="0" bIns="0" rtlCol="0" anchor="ctr"/>
+          <a:lstStyle/>
+          <a:p>
+            <a:pPr algn="ctr" indent="0" marL="0">
+              <a:buNone/>
+            </a:pPr>
+            <a:r>
+              <a:rPr lang="en-US" sz="1400" b="1" dirty="0">
+                <a:solidFill>
+                  <a:srgbClr val="2C5F2D"/>
+                </a:solidFill>
+                <a:latin typeface="Cambria" pitchFamily="34" charset="0"/>
+                <a:ea typeface="Cambria" pitchFamily="34" charset="-122"/>
+                <a:cs typeface="Cambria" pitchFamily="34" charset="-120"/>
+              </a:rPr>
+              <a:t>DECIDE</a:t>
+            </a:r>
+            <a:endParaRPr lang="en-US" sz="1400" dirty="0"/>
+          </a:p>
+        </p:txBody>
+      </p:sp>
+      <p:sp>
+        <p:nvSpPr>
+          <p:cNvPr id="14" name="Text 12"/>
+          <p:cNvSpPr/>
+          <p:nvPr/>
+        </p:nvSpPr>
+        <p:spPr>
+          <a:xfrm>
+            <a:off x="2708910" y="2377440"/>
+            <a:ext cx="1611630" cy="777240"/>
+          </a:xfrm>
+          <a:prstGeom prst="rect">
+            <a:avLst/>
+          </a:prstGeom>
+          <a:noFill/>
+          <a:ln/>
+        </p:spPr>
+        <p:txBody>
+          <a:bodyPr wrap="square" lIns="0" tIns="0" rIns="0" bIns="0" rtlCol="0" anchor="ctr"/>
+          <a:lstStyle/>
+          <a:p>
+            <a:pPr algn="ctr" indent="0" marL="0">
+              <a:buNone/>
+            </a:pPr>
+            <a:r>
+              <a:rPr lang="en-US" sz="1050" dirty="0">
+                <a:solidFill>
+                  <a:srgbClr val="212121"/>
                 </a:solidFill>
                 <a:latin typeface="Calibri" pitchFamily="34" charset="0"/>
                 <a:ea typeface="Calibri" pitchFamily="34" charset="-122"/>
                 <a:cs typeface="Calibri" pitchFamily="34" charset="-120"/>
               </a:rPr>
-              <a:t>lane fixture scenarios verified, order-independent on fresh databases</a:t>
+              <a:t>agronomist-reviewed rule engine: pre/during/post x crop x stage x hazard</a:t>
+            </a:r>
+            <a:endParaRPr lang="en-US" sz="1050" dirty="0"/>
+          </a:p>
+        </p:txBody>
+      </p:sp>
+      <p:sp>
+        <p:nvSpPr>
+          <p:cNvPr id="15" name="Text 13"/>
+          <p:cNvSpPr/>
+          <p:nvPr/>
+        </p:nvSpPr>
+        <p:spPr>
+          <a:xfrm>
+            <a:off x="2708910" y="3200400"/>
+            <a:ext cx="1611630" cy="457200"/>
+          </a:xfrm>
+          <a:prstGeom prst="rect">
+            <a:avLst/>
+          </a:prstGeom>
+          <a:noFill/>
+          <a:ln/>
+        </p:spPr>
+        <p:txBody>
+          <a:bodyPr wrap="square" lIns="0" tIns="0" rIns="0" bIns="0" rtlCol="0" anchor="ctr"/>
+          <a:lstStyle/>
+          <a:p>
+            <a:pPr algn="ctr" indent="0" marL="0">
+              <a:buNone/>
+            </a:pPr>
+            <a:r>
+              <a:rPr lang="en-US" sz="950" i="1" dirty="0">
+                <a:solidFill>
+                  <a:srgbClr val="5A6B5A"/>
+                </a:solidFill>
+                <a:latin typeface="Calibri" pitchFamily="34" charset="0"/>
+                <a:ea typeface="Calibri" pitchFamily="34" charset="-122"/>
+                <a:cs typeface="Calibri" pitchFamily="34" charset="-120"/>
+              </a:rPr>
+              <a:t>every proposal carries deadline, source, cost of waiting</a:t>
             </a:r>
             <a:endParaRPr lang="en-US" sz="950" dirty="0"/>
           </a:p>
@@ -4807,22 +5380,61 @@
       </p:sp>
       <p:sp>
         <p:nvSpPr>
-          <p:cNvPr id="9" name="Shape 7"/>
-          <p:cNvSpPr/>
-          <p:nvPr/>
-        </p:nvSpPr>
-        <p:spPr>
-          <a:xfrm>
-            <a:off x="457200" y="2103120"/>
-            <a:ext cx="4069080" cy="914400"/>
+          <p:cNvPr id="16" name="Text 14"/>
+          <p:cNvSpPr/>
+          <p:nvPr/>
+        </p:nvSpPr>
+        <p:spPr>
+          <a:xfrm>
+            <a:off x="4475988" y="2103120"/>
+            <a:ext cx="201168" cy="457200"/>
+          </a:xfrm>
+          <a:prstGeom prst="rect">
+            <a:avLst/>
+          </a:prstGeom>
+          <a:noFill/>
+          <a:ln/>
+        </p:spPr>
+        <p:txBody>
+          <a:bodyPr wrap="square" lIns="0" tIns="0" rIns="0" bIns="0" rtlCol="0" anchor="ctr"/>
+          <a:lstStyle/>
+          <a:p>
+            <a:pPr algn="ctr" indent="0" marL="0">
+              <a:buNone/>
+            </a:pPr>
+            <a:r>
+              <a:rPr lang="en-US" sz="2000" b="1" dirty="0">
+                <a:solidFill>
+                  <a:srgbClr val="97BC62"/>
+                </a:solidFill>
+                <a:latin typeface="Calibri" pitchFamily="34" charset="0"/>
+                <a:ea typeface="Calibri" pitchFamily="34" charset="-122"/>
+                <a:cs typeface="Calibri" pitchFamily="34" charset="-120"/>
+              </a:rPr>
+              <a:t>&gt;</a:t>
+            </a:r>
+            <a:endParaRPr lang="en-US" sz="2000" dirty="0"/>
+          </a:p>
+        </p:txBody>
+      </p:sp>
+      <p:sp>
+        <p:nvSpPr>
+          <p:cNvPr id="17" name="Shape 15"/>
+          <p:cNvSpPr/>
+          <p:nvPr/>
+        </p:nvSpPr>
+        <p:spPr>
+          <a:xfrm>
+            <a:off x="4686300" y="1143000"/>
+            <a:ext cx="1885950" cy="2606040"/>
           </a:xfrm>
           <a:prstGeom prst="roundRect">
             <a:avLst>
-              <a:gd name="adj" fmla="val 8000"/>
+              <a:gd name="adj" fmla="val 3879"/>
             </a:avLst>
           </a:prstGeom>
           <a:solidFill>
-            <a:srgbClr val="F7FAF2"/>
+            <a:srgbClr val="F0F5EA"/>
           </a:solidFill>
           <a:ln w="12700">
             <a:solidFill>
@@ -4834,38 +5446,58 @@
       </p:sp>
       <p:sp>
         <p:nvSpPr>
-          <p:cNvPr id="10" name="Text 8"/>
-          <p:cNvSpPr/>
-          <p:nvPr/>
-        </p:nvSpPr>
-        <p:spPr>
-          <a:xfrm>
-            <a:off x="594360" y="2212848"/>
-            <a:ext cx="1737360" cy="457200"/>
-          </a:xfrm>
-          <a:prstGeom prst="rect">
-            <a:avLst/>
-          </a:prstGeom>
-          <a:noFill/>
-          <a:ln/>
-        </p:spPr>
-        <p:txBody>
-          <a:bodyPr wrap="square" lIns="0" tIns="0" rIns="0" bIns="0" rtlCol="0" anchor="ctr"/>
-          <a:lstStyle/>
-          <a:p>
-            <a:pPr indent="0" marL="0">
+          <p:cNvPr id="18" name="Shape 16"/>
+          <p:cNvSpPr/>
+          <p:nvPr/>
+        </p:nvSpPr>
+        <p:spPr>
+          <a:xfrm>
+            <a:off x="5354955" y="1325880"/>
+            <a:ext cx="548640" cy="548640"/>
+          </a:xfrm>
+          <a:prstGeom prst="ellipse">
+            <a:avLst/>
+          </a:prstGeom>
+          <a:solidFill>
+            <a:srgbClr val="2C5F2D"/>
+          </a:solidFill>
+          <a:ln/>
+        </p:spPr>
+      </p:sp>
+      <p:sp>
+        <p:nvSpPr>
+          <p:cNvPr id="19" name="Text 17"/>
+          <p:cNvSpPr/>
+          <p:nvPr/>
+        </p:nvSpPr>
+        <p:spPr>
+          <a:xfrm>
+            <a:off x="5354955" y="1389888"/>
+            <a:ext cx="548640" cy="411480"/>
+          </a:xfrm>
+          <a:prstGeom prst="rect">
+            <a:avLst/>
+          </a:prstGeom>
+          <a:noFill/>
+          <a:ln/>
+        </p:spPr>
+        <p:txBody>
+          <a:bodyPr wrap="square" lIns="0" tIns="0" rIns="0" bIns="0" rtlCol="0" anchor="ctr"/>
+          <a:lstStyle/>
+          <a:p>
+            <a:pPr algn="ctr" indent="0" marL="0">
               <a:buNone/>
             </a:pPr>
             <a:r>
               <a:rPr lang="en-US" sz="1800" b="1" dirty="0">
                 <a:solidFill>
-                  <a:srgbClr val="2C5F2D"/>
+                  <a:srgbClr val="F5F7F2"/>
                 </a:solidFill>
                 <a:latin typeface="Cambria" pitchFamily="34" charset="0"/>
                 <a:ea typeface="Cambria" pitchFamily="34" charset="-122"/>
                 <a:cs typeface="Cambria" pitchFamily="34" charset="-120"/>
               </a:rPr>
-              <a:t>Zero-dep</a:t>
+              <a:t>3</a:t>
             </a:r>
             <a:endParaRPr lang="en-US" sz="1800" dirty="0"/>
           </a:p>
@@ -4873,38 +5505,116 @@
       </p:sp>
       <p:sp>
         <p:nvSpPr>
-          <p:cNvPr id="11" name="Text 9"/>
-          <p:cNvSpPr/>
-          <p:nvPr/>
-        </p:nvSpPr>
-        <p:spPr>
-          <a:xfrm>
-            <a:off x="2331720" y="2212848"/>
-            <a:ext cx="2103120" cy="731520"/>
-          </a:xfrm>
-          <a:prstGeom prst="rect">
-            <a:avLst/>
-          </a:prstGeom>
-          <a:noFill/>
-          <a:ln/>
-        </p:spPr>
-        <p:txBody>
-          <a:bodyPr wrap="square" lIns="0" tIns="0" rIns="0" bIns="0" rtlCol="0" anchor="ctr"/>
-          <a:lstStyle/>
-          <a:p>
-            <a:pPr indent="0" marL="0">
-              <a:buNone/>
-            </a:pPr>
-            <a:r>
-              <a:rPr lang="en-US" sz="950" dirty="0">
-                <a:solidFill>
-                  <a:srgbClr val="5A6B5A"/>
+          <p:cNvPr id="20" name="Text 18"/>
+          <p:cNvSpPr/>
+          <p:nvPr/>
+        </p:nvSpPr>
+        <p:spPr>
+          <a:xfrm>
+            <a:off x="4777740" y="2011680"/>
+            <a:ext cx="1703070" cy="320040"/>
+          </a:xfrm>
+          <a:prstGeom prst="rect">
+            <a:avLst/>
+          </a:prstGeom>
+          <a:noFill/>
+          <a:ln/>
+        </p:spPr>
+        <p:txBody>
+          <a:bodyPr wrap="square" lIns="0" tIns="0" rIns="0" bIns="0" rtlCol="0" anchor="ctr"/>
+          <a:lstStyle/>
+          <a:p>
+            <a:pPr algn="ctr" indent="0" marL="0">
+              <a:buNone/>
+            </a:pPr>
+            <a:r>
+              <a:rPr lang="en-US" sz="1400" b="1" dirty="0">
+                <a:solidFill>
+                  <a:srgbClr val="2C5F2D"/>
+                </a:solidFill>
+                <a:latin typeface="Cambria" pitchFamily="34" charset="0"/>
+                <a:ea typeface="Cambria" pitchFamily="34" charset="-122"/>
+                <a:cs typeface="Cambria" pitchFamily="34" charset="-120"/>
+              </a:rPr>
+              <a:t>DELIVER</a:t>
+            </a:r>
+            <a:endParaRPr lang="en-US" sz="1400" dirty="0"/>
+          </a:p>
+        </p:txBody>
+      </p:sp>
+      <p:sp>
+        <p:nvSpPr>
+          <p:cNvPr id="21" name="Text 19"/>
+          <p:cNvSpPr/>
+          <p:nvPr/>
+        </p:nvSpPr>
+        <p:spPr>
+          <a:xfrm>
+            <a:off x="4823460" y="2377440"/>
+            <a:ext cx="1611630" cy="777240"/>
+          </a:xfrm>
+          <a:prstGeom prst="rect">
+            <a:avLst/>
+          </a:prstGeom>
+          <a:noFill/>
+          <a:ln/>
+        </p:spPr>
+        <p:txBody>
+          <a:bodyPr wrap="square" lIns="0" tIns="0" rIns="0" bIns="0" rtlCol="0" anchor="ctr"/>
+          <a:lstStyle/>
+          <a:p>
+            <a:pPr algn="ctr" indent="0" marL="0">
+              <a:buNone/>
+            </a:pPr>
+            <a:r>
+              <a:rPr lang="en-US" sz="1050" dirty="0">
+                <a:solidFill>
+                  <a:srgbClr val="212121"/>
                 </a:solidFill>
                 <a:latin typeface="Calibri" pitchFamily="34" charset="0"/>
                 <a:ea typeface="Calibri" pitchFamily="34" charset="-122"/>
                 <a:cs typeface="Calibri" pitchFamily="34" charset="-120"/>
               </a:rPr>
-              <a:t>engine runs on stdlib only; demo never dies, offline fallback replay</a:t>
+              <a:t>Odia SMS and IVR, offline queue, ack and report capture</a:t>
+            </a:r>
+            <a:endParaRPr lang="en-US" sz="1050" dirty="0"/>
+          </a:p>
+        </p:txBody>
+      </p:sp>
+      <p:sp>
+        <p:nvSpPr>
+          <p:cNvPr id="22" name="Text 20"/>
+          <p:cNvSpPr/>
+          <p:nvPr/>
+        </p:nvSpPr>
+        <p:spPr>
+          <a:xfrm>
+            <a:off x="4823460" y="3200400"/>
+            <a:ext cx="1611630" cy="457200"/>
+          </a:xfrm>
+          <a:prstGeom prst="rect">
+            <a:avLst/>
+          </a:prstGeom>
+          <a:noFill/>
+          <a:ln/>
+        </p:spPr>
+        <p:txBody>
+          <a:bodyPr wrap="square" lIns="0" tIns="0" rIns="0" bIns="0" rtlCol="0" anchor="ctr"/>
+          <a:lstStyle/>
+          <a:p>
+            <a:pPr algn="ctr" indent="0" marL="0">
+              <a:buNone/>
+            </a:pPr>
+            <a:r>
+              <a:rPr lang="en-US" sz="950" i="1" dirty="0">
+                <a:solidFill>
+                  <a:srgbClr val="5A6B5A"/>
+                </a:solidFill>
+                <a:latin typeface="Calibri" pitchFamily="34" charset="0"/>
+                <a:ea typeface="Calibri" pitchFamily="34" charset="-122"/>
+                <a:cs typeface="Calibri" pitchFamily="34" charset="-120"/>
+              </a:rPr>
+              <a:t>works when the tower drops; syncs when it returns</a:t>
             </a:r>
             <a:endParaRPr lang="en-US" sz="950" dirty="0"/>
           </a:p>
@@ -4912,22 +5622,61 @@
       </p:sp>
       <p:sp>
         <p:nvSpPr>
-          <p:cNvPr id="12" name="Shape 10"/>
-          <p:cNvSpPr/>
-          <p:nvPr/>
-        </p:nvSpPr>
-        <p:spPr>
-          <a:xfrm>
-            <a:off x="4617720" y="2103120"/>
-            <a:ext cx="4069080" cy="914400"/>
+          <p:cNvPr id="23" name="Text 21"/>
+          <p:cNvSpPr/>
+          <p:nvPr/>
+        </p:nvSpPr>
+        <p:spPr>
+          <a:xfrm>
+            <a:off x="6590538" y="2103120"/>
+            <a:ext cx="201168" cy="457200"/>
+          </a:xfrm>
+          <a:prstGeom prst="rect">
+            <a:avLst/>
+          </a:prstGeom>
+          <a:noFill/>
+          <a:ln/>
+        </p:spPr>
+        <p:txBody>
+          <a:bodyPr wrap="square" lIns="0" tIns="0" rIns="0" bIns="0" rtlCol="0" anchor="ctr"/>
+          <a:lstStyle/>
+          <a:p>
+            <a:pPr algn="ctr" indent="0" marL="0">
+              <a:buNone/>
+            </a:pPr>
+            <a:r>
+              <a:rPr lang="en-US" sz="2000" b="1" dirty="0">
+                <a:solidFill>
+                  <a:srgbClr val="97BC62"/>
+                </a:solidFill>
+                <a:latin typeface="Calibri" pitchFamily="34" charset="0"/>
+                <a:ea typeface="Calibri" pitchFamily="34" charset="-122"/>
+                <a:cs typeface="Calibri" pitchFamily="34" charset="-120"/>
+              </a:rPr>
+              <a:t>&gt;</a:t>
+            </a:r>
+            <a:endParaRPr lang="en-US" sz="2000" dirty="0"/>
+          </a:p>
+        </p:txBody>
+      </p:sp>
+      <p:sp>
+        <p:nvSpPr>
+          <p:cNvPr id="24" name="Shape 22"/>
+          <p:cNvSpPr/>
+          <p:nvPr/>
+        </p:nvSpPr>
+        <p:spPr>
+          <a:xfrm>
+            <a:off x="6800850" y="1143000"/>
+            <a:ext cx="1885950" cy="2606040"/>
           </a:xfrm>
           <a:prstGeom prst="roundRect">
             <a:avLst>
-              <a:gd name="adj" fmla="val 8000"/>
+              <a:gd name="adj" fmla="val 3879"/>
             </a:avLst>
           </a:prstGeom>
           <a:solidFill>
-            <a:srgbClr val="F7FAF2"/>
+            <a:srgbClr val="F0F5EA"/>
           </a:solidFill>
           <a:ln w="12700">
             <a:solidFill>
@@ -4939,38 +5688,58 @@
       </p:sp>
       <p:sp>
         <p:nvSpPr>
-          <p:cNvPr id="13" name="Text 11"/>
-          <p:cNvSpPr/>
-          <p:nvPr/>
-        </p:nvSpPr>
-        <p:spPr>
-          <a:xfrm>
-            <a:off x="4754880" y="2212848"/>
-            <a:ext cx="1737360" cy="457200"/>
-          </a:xfrm>
-          <a:prstGeom prst="rect">
-            <a:avLst/>
-          </a:prstGeom>
-          <a:noFill/>
-          <a:ln/>
-        </p:spPr>
-        <p:txBody>
-          <a:bodyPr wrap="square" lIns="0" tIns="0" rIns="0" bIns="0" rtlCol="0" anchor="ctr"/>
-          <a:lstStyle/>
-          <a:p>
-            <a:pPr indent="0" marL="0">
+          <p:cNvPr id="25" name="Shape 23"/>
+          <p:cNvSpPr/>
+          <p:nvPr/>
+        </p:nvSpPr>
+        <p:spPr>
+          <a:xfrm>
+            <a:off x="7469505" y="1325880"/>
+            <a:ext cx="548640" cy="548640"/>
+          </a:xfrm>
+          <a:prstGeom prst="ellipse">
+            <a:avLst/>
+          </a:prstGeom>
+          <a:solidFill>
+            <a:srgbClr val="2C5F2D"/>
+          </a:solidFill>
+          <a:ln/>
+        </p:spPr>
+      </p:sp>
+      <p:sp>
+        <p:nvSpPr>
+          <p:cNvPr id="26" name="Text 24"/>
+          <p:cNvSpPr/>
+          <p:nvPr/>
+        </p:nvSpPr>
+        <p:spPr>
+          <a:xfrm>
+            <a:off x="7469505" y="1389888"/>
+            <a:ext cx="548640" cy="411480"/>
+          </a:xfrm>
+          <a:prstGeom prst="rect">
+            <a:avLst/>
+          </a:prstGeom>
+          <a:noFill/>
+          <a:ln/>
+        </p:spPr>
+        <p:txBody>
+          <a:bodyPr wrap="square" lIns="0" tIns="0" rIns="0" bIns="0" rtlCol="0" anchor="ctr"/>
+          <a:lstStyle/>
+          <a:p>
+            <a:pPr algn="ctr" indent="0" marL="0">
               <a:buNone/>
             </a:pPr>
             <a:r>
               <a:rPr lang="en-US" sz="1800" b="1" dirty="0">
                 <a:solidFill>
-                  <a:srgbClr val="2C5F2D"/>
+                  <a:srgbClr val="F5F7F2"/>
                 </a:solidFill>
                 <a:latin typeface="Cambria" pitchFamily="34" charset="0"/>
                 <a:ea typeface="Cambria" pitchFamily="34" charset="-122"/>
                 <a:cs typeface="Cambria" pitchFamily="34" charset="-120"/>
               </a:rPr>
-              <a:t>Honest mode</a:t>
+              <a:t>4</a:t>
             </a:r>
             <a:endParaRPr lang="en-US" sz="1800" dirty="0"/>
           </a:p>
@@ -4978,182 +5747,194 @@
       </p:sp>
       <p:sp>
         <p:nvSpPr>
-          <p:cNvPr id="14" name="Text 12"/>
-          <p:cNvSpPr/>
-          <p:nvPr/>
-        </p:nvSpPr>
-        <p:spPr>
-          <a:xfrm>
-            <a:off x="6492240" y="2212848"/>
-            <a:ext cx="2103120" cy="731520"/>
-          </a:xfrm>
-          <a:prstGeom prst="rect">
-            <a:avLst/>
-          </a:prstGeom>
-          <a:noFill/>
-          <a:ln/>
-        </p:spPr>
-        <p:txBody>
-          <a:bodyPr wrap="square" lIns="0" tIns="0" rIns="0" bIns="0" rtlCol="0" anchor="ctr"/>
-          <a:lstStyle/>
-          <a:p>
-            <a:pPr indent="0" marL="0">
-              <a:buNone/>
-            </a:pPr>
-            <a:r>
-              <a:rPr lang="en-US" sz="950" dirty="0">
-                <a:solidFill>
-                  <a:srgbClr val="5A6B5A"/>
+          <p:cNvPr id="27" name="Text 25"/>
+          <p:cNvSpPr/>
+          <p:nvPr/>
+        </p:nvSpPr>
+        <p:spPr>
+          <a:xfrm>
+            <a:off x="6892290" y="2011680"/>
+            <a:ext cx="1703070" cy="320040"/>
+          </a:xfrm>
+          <a:prstGeom prst="rect">
+            <a:avLst/>
+          </a:prstGeom>
+          <a:noFill/>
+          <a:ln/>
+        </p:spPr>
+        <p:txBody>
+          <a:bodyPr wrap="square" lIns="0" tIns="0" rIns="0" bIns="0" rtlCol="0" anchor="ctr"/>
+          <a:lstStyle/>
+          <a:p>
+            <a:pPr algn="ctr" indent="0" marL="0">
+              <a:buNone/>
+            </a:pPr>
+            <a:r>
+              <a:rPr lang="en-US" sz="1400" b="1" dirty="0">
+                <a:solidFill>
+                  <a:srgbClr val="2C5F2D"/>
+                </a:solidFill>
+                <a:latin typeface="Cambria" pitchFamily="34" charset="0"/>
+                <a:ea typeface="Cambria" pitchFamily="34" charset="-122"/>
+                <a:cs typeface="Cambria" pitchFamily="34" charset="-120"/>
+              </a:rPr>
+              <a:t>RECOVER</a:t>
+            </a:r>
+            <a:endParaRPr lang="en-US" sz="1400" dirty="0"/>
+          </a:p>
+        </p:txBody>
+      </p:sp>
+      <p:sp>
+        <p:nvSpPr>
+          <p:cNvPr id="28" name="Text 26"/>
+          <p:cNvSpPr/>
+          <p:nvPr/>
+        </p:nvSpPr>
+        <p:spPr>
+          <a:xfrm>
+            <a:off x="6938010" y="2377440"/>
+            <a:ext cx="1611630" cy="777240"/>
+          </a:xfrm>
+          <a:prstGeom prst="rect">
+            <a:avLst/>
+          </a:prstGeom>
+          <a:noFill/>
+          <a:ln/>
+        </p:spPr>
+        <p:txBody>
+          <a:bodyPr wrap="square" lIns="0" tIns="0" rIns="0" bIns="0" rtlCol="0" anchor="ctr"/>
+          <a:lstStyle/>
+          <a:p>
+            <a:pPr algn="ctr" indent="0" marL="0">
+              <a:buNone/>
+            </a:pPr>
+            <a:r>
+              <a:rPr lang="en-US" sz="1050" dirty="0">
+                <a:solidFill>
+                  <a:srgbClr val="212121"/>
                 </a:solidFill>
                 <a:latin typeface="Calibri" pitchFamily="34" charset="0"/>
                 <a:ea typeface="Calibri" pitchFamily="34" charset="-122"/>
                 <a:cs typeface="Calibri" pitchFamily="34" charset="-120"/>
               </a:rPr>
-              <a:t>badges count actual provider outcomes, no badge-lie, audit trail per action</a:t>
-            </a:r>
-            <a:endParaRPr lang="en-US" sz="950" dirty="0"/>
-          </a:p>
-        </p:txBody>
-      </p:sp>
-      <p:sp>
-        <p:nvSpPr>
-          <p:cNvPr id="15" name="Text 13"/>
-          <p:cNvSpPr/>
-          <p:nvPr/>
-        </p:nvSpPr>
-        <p:spPr>
-          <a:xfrm>
-            <a:off x="4983480" y="3291840"/>
-            <a:ext cx="3657600" cy="822960"/>
-          </a:xfrm>
-          <a:prstGeom prst="rect">
-            <a:avLst/>
-          </a:prstGeom>
-          <a:noFill/>
-          <a:ln/>
-        </p:spPr>
-        <p:txBody>
-          <a:bodyPr wrap="square" lIns="0" tIns="0" rIns="0" bIns="0" rtlCol="0" anchor="ctr"/>
-          <a:lstStyle/>
-          <a:p>
-            <a:pPr indent="0" marL="0">
-              <a:buNone/>
-            </a:pPr>
-            <a:r>
-              <a:rPr lang="en-US" sz="1150" dirty="0">
-                <a:solidFill>
-                  <a:srgbClr val="212121"/>
+              <a:t>post-inundation recovery chain and claims evidence packet</a:t>
+            </a:r>
+            <a:endParaRPr lang="en-US" sz="1050" dirty="0"/>
+          </a:p>
+        </p:txBody>
+      </p:sp>
+      <p:sp>
+        <p:nvSpPr>
+          <p:cNvPr id="29" name="Text 27"/>
+          <p:cNvSpPr/>
+          <p:nvPr/>
+        </p:nvSpPr>
+        <p:spPr>
+          <a:xfrm>
+            <a:off x="6938010" y="3200400"/>
+            <a:ext cx="1611630" cy="457200"/>
+          </a:xfrm>
+          <a:prstGeom prst="rect">
+            <a:avLst/>
+          </a:prstGeom>
+          <a:noFill/>
+          <a:ln/>
+        </p:spPr>
+        <p:txBody>
+          <a:bodyPr wrap="square" lIns="0" tIns="0" rIns="0" bIns="0" rtlCol="0" anchor="ctr"/>
+          <a:lstStyle/>
+          <a:p>
+            <a:pPr algn="ctr" indent="0" marL="0">
+              <a:buNone/>
+            </a:pPr>
+            <a:r>
+              <a:rPr lang="en-US" sz="950" i="1" dirty="0">
+                <a:solidFill>
+                  <a:srgbClr val="5A6B5A"/>
                 </a:solidFill>
                 <a:latin typeface="Calibri" pitchFamily="34" charset="0"/>
                 <a:ea typeface="Calibri" pitchFamily="34" charset="-122"/>
                 <a:cs typeface="Calibri" pitchFamily="34" charset="-120"/>
               </a:rPr>
-              <a:t>Demo arc (3 minutes): Asha's plot -&gt; cyclone forecast -&gt; staged Odia advisory -&gt; tower drops, advice still syncs -&gt; damage evidence -&gt; claim packet export.</a:t>
-            </a:r>
-            <a:endParaRPr lang="en-US" sz="1150" dirty="0"/>
-          </a:p>
-        </p:txBody>
-      </p:sp>
-      <p:sp>
-        <p:nvSpPr>
-          <p:cNvPr id="16" name="Shape 14"/>
+              <a:t>verified observation becomes an insurance claim</a:t>
+            </a:r>
+            <a:endParaRPr lang="en-US" sz="950" dirty="0"/>
+          </a:p>
+        </p:txBody>
+      </p:sp>
+      <p:sp>
+        <p:nvSpPr>
+          <p:cNvPr id="30" name="Text 28"/>
           <p:cNvSpPr/>
           <p:nvPr/>
         </p:nvSpPr>
         <p:spPr>
           <a:xfrm>
             <a:off x="457200" y="3977640"/>
-            <a:ext cx="8229600" cy="658368"/>
-          </a:xfrm>
-          <a:prstGeom prst="roundRect">
-            <a:avLst>
-              <a:gd name="adj" fmla="val 11111"/>
-            </a:avLst>
-          </a:prstGeom>
-          <a:solidFill>
-            <a:srgbClr val="D8E8C8"/>
-          </a:solidFill>
-          <a:ln w="12700">
-            <a:solidFill>
-              <a:srgbClr val="FFFFFF"/>
-            </a:solidFill>
-            <a:prstDash val="solid"/>
-          </a:ln>
-        </p:spPr>
-      </p:sp>
-      <p:sp>
-        <p:nvSpPr>
-          <p:cNvPr id="17" name="Text 15"/>
-          <p:cNvSpPr/>
-          <p:nvPr/>
-        </p:nvSpPr>
-        <p:spPr>
-          <a:xfrm>
-            <a:off x="640080" y="4059936"/>
-            <a:ext cx="7863840" cy="502920"/>
-          </a:xfrm>
-          <a:prstGeom prst="rect">
-            <a:avLst/>
-          </a:prstGeom>
-          <a:noFill/>
-          <a:ln/>
-        </p:spPr>
-        <p:txBody>
-          <a:bodyPr wrap="square" lIns="0" tIns="0" rIns="0" bIns="0" rtlCol="0" anchor="ctr"/>
-          <a:lstStyle/>
-          <a:p>
-            <a:pPr indent="0" marL="0">
-              <a:buNone/>
-            </a:pPr>
-            <a:r>
-              <a:rPr lang="en-US" sz="1050" dirty="0">
-                <a:solidFill>
-                  <a:srgbClr val="212121"/>
+            <a:ext cx="8229600" cy="411480"/>
+          </a:xfrm>
+          <a:prstGeom prst="rect">
+            <a:avLst/>
+          </a:prstGeom>
+          <a:noFill/>
+          <a:ln/>
+        </p:spPr>
+        <p:txBody>
+          <a:bodyPr wrap="square" lIns="0" tIns="0" rIns="0" bIns="0" rtlCol="0" anchor="ctr"/>
+          <a:lstStyle/>
+          <a:p>
+            <a:pPr indent="0" marL="0">
+              <a:buNone/>
+            </a:pPr>
+            <a:r>
+              <a:rPr lang="en-US" sz="1350" b="1" dirty="0">
+                <a:solidFill>
+                  <a:srgbClr val="2C5F2D"/>
+                </a:solidFill>
+                <a:latin typeface="Cambria" pitchFamily="34" charset="0"/>
+                <a:ea typeface="Cambria" pitchFamily="34" charset="-122"/>
+                <a:cs typeface="Cambria" pitchFamily="34" charset="-120"/>
+              </a:rPr>
+              <a:t>The same governed pipeline we verified: ingest, decide, propose, approve, audit. Every action leaves a replayable trace.</a:t>
+            </a:r>
+            <a:endParaRPr lang="en-US" sz="1350" dirty="0"/>
+          </a:p>
+        </p:txBody>
+      </p:sp>
+      <p:sp>
+        <p:nvSpPr>
+          <p:cNvPr id="31" name="Text 29"/>
+          <p:cNvSpPr/>
+          <p:nvPr/>
+        </p:nvSpPr>
+        <p:spPr>
+          <a:xfrm>
+            <a:off x="457200" y="4759452"/>
+            <a:ext cx="8229600" cy="274320"/>
+          </a:xfrm>
+          <a:prstGeom prst="rect">
+            <a:avLst/>
+          </a:prstGeom>
+          <a:noFill/>
+          <a:ln/>
+        </p:spPr>
+        <p:txBody>
+          <a:bodyPr wrap="square" lIns="0" tIns="0" rIns="0" bIns="0" rtlCol="0" anchor="ctr"/>
+          <a:lstStyle/>
+          <a:p>
+            <a:pPr indent="0" marL="0">
+              <a:buNone/>
+            </a:pPr>
+            <a:r>
+              <a:rPr lang="en-US" sz="900" dirty="0">
+                <a:solidFill>
+                  <a:srgbClr val="5A6B5A"/>
                 </a:solidFill>
                 <a:latin typeface="Calibri" pitchFamily="34" charset="0"/>
                 <a:ea typeface="Calibri" pitchFamily="34" charset="-122"/>
                 <a:cs typeface="Calibri" pitchFamily="34" charset="-120"/>
               </a:rPr>
-              <a:t>Prototype honesty: IMD feed is simulated, SMS and IVR run through simulators, agronomy rules are a curated seed set awaiting agronomist review. Nothing is labeled live that is not live.</a:t>
-            </a:r>
-            <a:endParaRPr lang="en-US" sz="1050" dirty="0"/>
-          </a:p>
-        </p:txBody>
-      </p:sp>
-      <p:sp>
-        <p:nvSpPr>
-          <p:cNvPr id="18" name="Text 16"/>
-          <p:cNvSpPr/>
-          <p:nvPr/>
-        </p:nvSpPr>
-        <p:spPr>
-          <a:xfrm>
-            <a:off x="457200" y="4828032"/>
-            <a:ext cx="8229600" cy="274320"/>
-          </a:xfrm>
-          <a:prstGeom prst="rect">
-            <a:avLst/>
-          </a:prstGeom>
-          <a:noFill/>
-          <a:ln/>
-        </p:spPr>
-        <p:txBody>
-          <a:bodyPr wrap="square" lIns="0" tIns="0" rIns="0" bIns="0" rtlCol="0" anchor="ctr"/>
-          <a:lstStyle/>
-          <a:p>
-            <a:pPr indent="0" marL="0">
-              <a:buNone/>
-            </a:pPr>
-            <a:r>
-              <a:rPr lang="en-US" sz="900" dirty="0">
-                <a:solidFill>
-                  <a:srgbClr val="5A6B5A"/>
-                </a:solidFill>
-                <a:latin typeface="Calibri" pitchFamily="34" charset="0"/>
-                <a:ea typeface="Calibri" pitchFamily="34" charset="-122"/>
-                <a:cs typeface="Calibri" pitchFamily="34" charset="-120"/>
-              </a:rPr>
-              <a:t>Verification: fresh runs 2026-08-16 07:40 IST, scaffold eval report on repo. 46/46 eval report is engine-level; agri domain rules are the new layer for Round 1.</a:t>
+              <a:t>Demo behavior: given a hazard and a connectivity state, this farmer receives this prioritized action, and the advisory still syncs when bandwidth returns (W3 demo prescription).</a:t>
             </a:r>
             <a:endParaRPr lang="en-US" sz="900" dirty="0"/>
           </a:p>
@@ -5224,7 +6005,7 @@
                 <a:ea typeface="Cambria" pitchFamily="34" charset="-122"/>
                 <a:cs typeface="Cambria" pitchFamily="34" charset="-120"/>
               </a:rPr>
-              <a:t>Why this is not another alert system</a:t>
+              <a:t>Prototype today: verified, honest, offline-capable</a:t>
             </a:r>
             <a:endParaRPr lang="en-US" sz="2800" dirty="0"/>
           </a:p>
@@ -5238,16 +6019,16 @@
         </p:nvSpPr>
         <p:spPr>
           <a:xfrm>
-            <a:off x="457200" y="960120"/>
-            <a:ext cx="3977640" cy="1691640"/>
+            <a:off x="457200" y="1051560"/>
+            <a:ext cx="4069080" cy="914400"/>
           </a:xfrm>
           <a:prstGeom prst="roundRect">
             <a:avLst>
-              <a:gd name="adj" fmla="val 4324"/>
+              <a:gd name="adj" fmla="val 8000"/>
             </a:avLst>
           </a:prstGeom>
           <a:solidFill>
-            <a:srgbClr val="F0F5EA"/>
+            <a:srgbClr val="F7FAF2"/>
           </a:solidFill>
           <a:ln w="12700">
             <a:solidFill>
@@ -5265,24 +6046,63 @@
         </p:nvSpPr>
         <p:spPr>
           <a:xfrm>
-            <a:off x="640080" y="1097280"/>
-            <a:ext cx="3657600" cy="320040"/>
-          </a:xfrm>
-          <a:prstGeom prst="rect">
-            <a:avLst/>
-          </a:prstGeom>
-          <a:noFill/>
-          <a:ln/>
-        </p:spPr>
-        <p:txBody>
-          <a:bodyPr wrap="square" lIns="0" tIns="0" rIns="0" bIns="0" rtlCol="0" anchor="ctr"/>
-          <a:lstStyle/>
-          <a:p>
-            <a:pPr indent="0" marL="0">
-              <a:buNone/>
-            </a:pPr>
-            <a:r>
-              <a:rPr lang="en-US" sz="1200" b="1" dirty="0">
+            <a:off x="594360" y="1161288"/>
+            <a:ext cx="1737360" cy="457200"/>
+          </a:xfrm>
+          <a:prstGeom prst="rect">
+            <a:avLst/>
+          </a:prstGeom>
+          <a:noFill/>
+          <a:ln/>
+        </p:spPr>
+        <p:txBody>
+          <a:bodyPr wrap="square" lIns="0" tIns="0" rIns="0" bIns="0" rtlCol="0" anchor="ctr"/>
+          <a:lstStyle/>
+          <a:p>
+            <a:pPr indent="0" marL="0">
+              <a:buNone/>
+            </a:pPr>
+            <a:r>
+              <a:rPr lang="en-US" sz="1800" b="1" dirty="0">
+                <a:solidFill>
+                  <a:srgbClr val="2C5F2D"/>
+                </a:solidFill>
+                <a:latin typeface="Cambria" pitchFamily="34" charset="0"/>
+                <a:ea typeface="Cambria" pitchFamily="34" charset="-122"/>
+                <a:cs typeface="Cambria" pitchFamily="34" charset="-120"/>
+              </a:rPr>
+              <a:t>85 / 85</a:t>
+            </a:r>
+            <a:endParaRPr lang="en-US" sz="1800" dirty="0"/>
+          </a:p>
+        </p:txBody>
+      </p:sp>
+      <p:sp>
+        <p:nvSpPr>
+          <p:cNvPr id="5" name="Text 3"/>
+          <p:cNvSpPr/>
+          <p:nvPr/>
+        </p:nvSpPr>
+        <p:spPr>
+          <a:xfrm>
+            <a:off x="2331720" y="1161288"/>
+            <a:ext cx="2103120" cy="731520"/>
+          </a:xfrm>
+          <a:prstGeom prst="rect">
+            <a:avLst/>
+          </a:prstGeom>
+          <a:noFill/>
+          <a:ln/>
+        </p:spPr>
+        <p:txBody>
+          <a:bodyPr wrap="square" lIns="0" tIns="0" rIns="0" bIns="0" rtlCol="0" anchor="ctr"/>
+          <a:lstStyle/>
+          <a:p>
+            <a:pPr indent="0" marL="0">
+              <a:buNone/>
+            </a:pPr>
+            <a:r>
+              <a:rPr lang="en-US" sz="950" dirty="0">
                 <a:solidFill>
                   <a:srgbClr val="5A6B5A"/>
                 </a:solidFill>
@@ -5290,108 +6110,30 @@
                 <a:ea typeface="Calibri" pitchFamily="34" charset="-122"/>
                 <a:cs typeface="Calibri" pitchFamily="34" charset="-120"/>
               </a:rPr>
-              <a:t>The alert says</a:t>
-            </a:r>
-            <a:endParaRPr lang="en-US" sz="1200" dirty="0"/>
-          </a:p>
-        </p:txBody>
-      </p:sp>
-      <p:sp>
-        <p:nvSpPr>
-          <p:cNvPr id="5" name="Text 3"/>
-          <p:cNvSpPr/>
-          <p:nvPr/>
-        </p:nvSpPr>
-        <p:spPr>
-          <a:xfrm>
-            <a:off x="640080" y="1463040"/>
-            <a:ext cx="3657600" cy="457200"/>
-          </a:xfrm>
-          <a:prstGeom prst="rect">
-            <a:avLst/>
-          </a:prstGeom>
-          <a:noFill/>
-          <a:ln/>
-        </p:spPr>
-        <p:txBody>
-          <a:bodyPr wrap="square" lIns="0" tIns="0" rIns="0" bIns="0" rtlCol="0" anchor="ctr"/>
-          <a:lstStyle/>
-          <a:p>
-            <a:pPr indent="0" marL="0">
-              <a:buNone/>
-            </a:pPr>
-            <a:r>
-              <a:rPr lang="en-US" sz="1700" i="1" dirty="0">
-                <a:solidFill>
-                  <a:srgbClr val="212121"/>
-                </a:solidFill>
-                <a:latin typeface="Cambria" pitchFamily="34" charset="0"/>
-                <a:ea typeface="Cambria" pitchFamily="34" charset="-122"/>
-                <a:cs typeface="Cambria" pitchFamily="34" charset="-120"/>
-              </a:rPr>
-              <a:t>"Cyclone expected. Stay safe."</a:t>
-            </a:r>
-            <a:endParaRPr lang="en-US" sz="1700" dirty="0"/>
-          </a:p>
-        </p:txBody>
-      </p:sp>
-      <p:sp>
-        <p:nvSpPr>
-          <p:cNvPr id="6" name="Text 4"/>
-          <p:cNvSpPr/>
-          <p:nvPr/>
-        </p:nvSpPr>
-        <p:spPr>
-          <a:xfrm>
-            <a:off x="640080" y="2011680"/>
-            <a:ext cx="3657600" cy="502920"/>
-          </a:xfrm>
-          <a:prstGeom prst="rect">
-            <a:avLst/>
-          </a:prstGeom>
-          <a:noFill/>
-          <a:ln/>
-        </p:spPr>
-        <p:txBody>
-          <a:bodyPr wrap="square" lIns="0" tIns="0" rIns="0" bIns="0" rtlCol="0" anchor="ctr"/>
-          <a:lstStyle/>
-          <a:p>
-            <a:pPr indent="0" marL="0">
-              <a:buNone/>
-            </a:pPr>
-            <a:r>
-              <a:rPr lang="en-US" sz="1100" dirty="0">
-                <a:solidFill>
-                  <a:srgbClr val="5A6B5A"/>
-                </a:solidFill>
-                <a:latin typeface="Calibri" pitchFamily="34" charset="0"/>
-                <a:ea typeface="Calibri" pitchFamily="34" charset="-122"/>
-                <a:cs typeface="Calibri" pitchFamily="34" charset="-120"/>
-              </a:rPr>
-              <a:t>No crop, no stage, no deadline, no cost of waiting, no recovery step.</a:t>
-            </a:r>
-            <a:endParaRPr lang="en-US" sz="1100" dirty="0"/>
-          </a:p>
-        </p:txBody>
-      </p:sp>
-      <p:sp>
-        <p:nvSpPr>
-          <p:cNvPr id="7" name="Shape 5"/>
-          <p:cNvSpPr/>
-          <p:nvPr/>
-        </p:nvSpPr>
-        <p:spPr>
-          <a:xfrm>
-            <a:off x="4709160" y="960120"/>
-            <a:ext cx="3977640" cy="1691640"/>
+              <a:t>acceptance suites green across approval, trace, providers, multimodal, provenance, feeds, honesty, stress</a:t>
+            </a:r>
+            <a:endParaRPr lang="en-US" sz="950" dirty="0"/>
+          </a:p>
+        </p:txBody>
+      </p:sp>
+      <p:sp>
+        <p:nvSpPr>
+          <p:cNvPr id="6" name="Shape 4"/>
+          <p:cNvSpPr/>
+          <p:nvPr/>
+        </p:nvSpPr>
+        <p:spPr>
+          <a:xfrm>
+            <a:off x="4617720" y="1051560"/>
+            <a:ext cx="4069080" cy="914400"/>
           </a:xfrm>
           <a:prstGeom prst="roundRect">
             <a:avLst>
-              <a:gd name="adj" fmla="val 4324"/>
+              <a:gd name="adj" fmla="val 8000"/>
             </a:avLst>
           </a:prstGeom>
           <a:solidFill>
-            <a:srgbClr val="F0F5EA"/>
+            <a:srgbClr val="F7FAF2"/>
           </a:solidFill>
           <a:ln w="12700">
             <a:solidFill>
@@ -5403,108 +6145,240 @@
       </p:sp>
       <p:sp>
         <p:nvSpPr>
+          <p:cNvPr id="7" name="Text 5"/>
+          <p:cNvSpPr/>
+          <p:nvPr/>
+        </p:nvSpPr>
+        <p:spPr>
+          <a:xfrm>
+            <a:off x="4754880" y="1161288"/>
+            <a:ext cx="1737360" cy="457200"/>
+          </a:xfrm>
+          <a:prstGeom prst="rect">
+            <a:avLst/>
+          </a:prstGeom>
+          <a:noFill/>
+          <a:ln/>
+        </p:spPr>
+        <p:txBody>
+          <a:bodyPr wrap="square" lIns="0" tIns="0" rIns="0" bIns="0" rtlCol="0" anchor="ctr"/>
+          <a:lstStyle/>
+          <a:p>
+            <a:pPr indent="0" marL="0">
+              <a:buNone/>
+            </a:pPr>
+            <a:r>
+              <a:rPr lang="en-US" sz="1800" b="1" dirty="0">
+                <a:solidFill>
+                  <a:srgbClr val="2C5F2D"/>
+                </a:solidFill>
+                <a:latin typeface="Cambria" pitchFamily="34" charset="0"/>
+                <a:ea typeface="Cambria" pitchFamily="34" charset="-122"/>
+                <a:cs typeface="Cambria" pitchFamily="34" charset="-120"/>
+              </a:rPr>
+              <a:t>46 / 46</a:t>
+            </a:r>
+            <a:endParaRPr lang="en-US" sz="1800" dirty="0"/>
+          </a:p>
+        </p:txBody>
+      </p:sp>
+      <p:sp>
+        <p:nvSpPr>
           <p:cNvPr id="8" name="Text 6"/>
           <p:cNvSpPr/>
           <p:nvPr/>
         </p:nvSpPr>
         <p:spPr>
           <a:xfrm>
-            <a:off x="4892040" y="1097280"/>
-            <a:ext cx="3657600" cy="320040"/>
-          </a:xfrm>
-          <a:prstGeom prst="rect">
-            <a:avLst/>
-          </a:prstGeom>
-          <a:noFill/>
-          <a:ln/>
-        </p:spPr>
-        <p:txBody>
-          <a:bodyPr wrap="square" lIns="0" tIns="0" rIns="0" bIns="0" rtlCol="0" anchor="ctr"/>
-          <a:lstStyle/>
-          <a:p>
-            <a:pPr indent="0" marL="0">
-              <a:buNone/>
-            </a:pPr>
-            <a:r>
-              <a:rPr lang="en-US" sz="1200" b="1" dirty="0">
-                <a:solidFill>
-                  <a:srgbClr val="2C5F2D"/>
+            <a:off x="6492240" y="1161288"/>
+            <a:ext cx="2103120" cy="731520"/>
+          </a:xfrm>
+          <a:prstGeom prst="rect">
+            <a:avLst/>
+          </a:prstGeom>
+          <a:noFill/>
+          <a:ln/>
+        </p:spPr>
+        <p:txBody>
+          <a:bodyPr wrap="square" lIns="0" tIns="0" rIns="0" bIns="0" rtlCol="0" anchor="ctr"/>
+          <a:lstStyle/>
+          <a:p>
+            <a:pPr indent="0" marL="0">
+              <a:buNone/>
+            </a:pPr>
+            <a:r>
+              <a:rPr lang="en-US" sz="950" dirty="0">
+                <a:solidFill>
+                  <a:srgbClr val="5A6B5A"/>
                 </a:solidFill>
                 <a:latin typeface="Calibri" pitchFamily="34" charset="0"/>
                 <a:ea typeface="Calibri" pitchFamily="34" charset="-122"/>
                 <a:cs typeface="Calibri" pitchFamily="34" charset="-120"/>
               </a:rPr>
-              <a:t>The advisory says</a:t>
-            </a:r>
-            <a:endParaRPr lang="en-US" sz="1200" dirty="0"/>
-          </a:p>
-        </p:txBody>
-      </p:sp>
-      <p:sp>
-        <p:nvSpPr>
-          <p:cNvPr id="9" name="Text 7"/>
-          <p:cNvSpPr/>
-          <p:nvPr/>
-        </p:nvSpPr>
-        <p:spPr>
-          <a:xfrm>
-            <a:off x="4892040" y="1463040"/>
-            <a:ext cx="3657600" cy="1005840"/>
-          </a:xfrm>
-          <a:prstGeom prst="rect">
-            <a:avLst/>
-          </a:prstGeom>
-          <a:noFill/>
-          <a:ln/>
-        </p:spPr>
-        <p:txBody>
-          <a:bodyPr wrap="square" lIns="0" tIns="0" rIns="0" bIns="0" rtlCol="0" anchor="ctr"/>
-          <a:lstStyle/>
-          <a:p>
-            <a:pPr indent="0" marL="0">
-              <a:buNone/>
-            </a:pPr>
-            <a:r>
-              <a:rPr lang="en-US" sz="1350" dirty="0">
-                <a:solidFill>
-                  <a:srgbClr val="212121"/>
+              <a:t>lane fixture scenarios verified, order-independent on fresh databases</a:t>
+            </a:r>
+            <a:endParaRPr lang="en-US" sz="950" dirty="0"/>
+          </a:p>
+        </p:txBody>
+      </p:sp>
+      <p:sp>
+        <p:nvSpPr>
+          <p:cNvPr id="9" name="Shape 7"/>
+          <p:cNvSpPr/>
+          <p:nvPr/>
+        </p:nvSpPr>
+        <p:spPr>
+          <a:xfrm>
+            <a:off x="457200" y="2103120"/>
+            <a:ext cx="4069080" cy="914400"/>
+          </a:xfrm>
+          <a:prstGeom prst="roundRect">
+            <a:avLst>
+              <a:gd name="adj" fmla="val 8000"/>
+            </a:avLst>
+          </a:prstGeom>
+          <a:solidFill>
+            <a:srgbClr val="F7FAF2"/>
+          </a:solidFill>
+          <a:ln w="12700">
+            <a:solidFill>
+              <a:srgbClr val="FFFFFF"/>
+            </a:solidFill>
+            <a:prstDash val="solid"/>
+          </a:ln>
+        </p:spPr>
+      </p:sp>
+      <p:sp>
+        <p:nvSpPr>
+          <p:cNvPr id="10" name="Text 8"/>
+          <p:cNvSpPr/>
+          <p:nvPr/>
+        </p:nvSpPr>
+        <p:spPr>
+          <a:xfrm>
+            <a:off x="594360" y="2212848"/>
+            <a:ext cx="1737360" cy="457200"/>
+          </a:xfrm>
+          <a:prstGeom prst="rect">
+            <a:avLst/>
+          </a:prstGeom>
+          <a:noFill/>
+          <a:ln/>
+        </p:spPr>
+        <p:txBody>
+          <a:bodyPr wrap="square" lIns="0" tIns="0" rIns="0" bIns="0" rtlCol="0" anchor="ctr"/>
+          <a:lstStyle/>
+          <a:p>
+            <a:pPr indent="0" marL="0">
+              <a:buNone/>
+            </a:pPr>
+            <a:r>
+              <a:rPr lang="en-US" sz="1800" b="1" dirty="0">
+                <a:solidFill>
+                  <a:srgbClr val="2C5F2D"/>
                 </a:solidFill>
                 <a:latin typeface="Cambria" pitchFamily="34" charset="0"/>
                 <a:ea typeface="Cambria" pitchFamily="34" charset="-122"/>
                 <a:cs typeface="Cambria" pitchFamily="34" charset="-120"/>
               </a:rPr>
-              <a:t>"Plot 12B, flowering paddy: harvest by 18:00 tomorrow, or move to the raised platform. Source: IMD + rule 14. Cost of waiting: est. yield loss."</a:t>
-            </a:r>
-            <a:endParaRPr lang="en-US" sz="1350" dirty="0"/>
-          </a:p>
-        </p:txBody>
-      </p:sp>
-      <p:sp>
-        <p:nvSpPr>
-          <p:cNvPr id="10" name="Text 8"/>
-          <p:cNvSpPr/>
-          <p:nvPr/>
-        </p:nvSpPr>
-        <p:spPr>
-          <a:xfrm>
-            <a:off x="457200" y="2788920"/>
-            <a:ext cx="1828800" cy="274320"/>
-          </a:xfrm>
-          <a:prstGeom prst="rect">
-            <a:avLst/>
-          </a:prstGeom>
-          <a:noFill/>
-          <a:ln/>
-        </p:spPr>
-        <p:txBody>
-          <a:bodyPr wrap="square" lIns="0" tIns="0" rIns="0" bIns="0" rtlCol="0" anchor="ctr"/>
-          <a:lstStyle/>
-          <a:p>
-            <a:pPr indent="0" marL="0">
-              <a:buNone/>
-            </a:pPr>
-            <a:r>
-              <a:rPr lang="en-US" sz="1200" b="1" dirty="0">
+              <a:t>Zero-dep</a:t>
+            </a:r>
+            <a:endParaRPr lang="en-US" sz="1800" dirty="0"/>
+          </a:p>
+        </p:txBody>
+      </p:sp>
+      <p:sp>
+        <p:nvSpPr>
+          <p:cNvPr id="11" name="Text 9"/>
+          <p:cNvSpPr/>
+          <p:nvPr/>
+        </p:nvSpPr>
+        <p:spPr>
+          <a:xfrm>
+            <a:off x="2331720" y="2212848"/>
+            <a:ext cx="2103120" cy="731520"/>
+          </a:xfrm>
+          <a:prstGeom prst="rect">
+            <a:avLst/>
+          </a:prstGeom>
+          <a:noFill/>
+          <a:ln/>
+        </p:spPr>
+        <p:txBody>
+          <a:bodyPr wrap="square" lIns="0" tIns="0" rIns="0" bIns="0" rtlCol="0" anchor="ctr"/>
+          <a:lstStyle/>
+          <a:p>
+            <a:pPr indent="0" marL="0">
+              <a:buNone/>
+            </a:pPr>
+            <a:r>
+              <a:rPr lang="en-US" sz="950" dirty="0">
+                <a:solidFill>
+                  <a:srgbClr val="5A6B5A"/>
+                </a:solidFill>
+                <a:latin typeface="Calibri" pitchFamily="34" charset="0"/>
+                <a:ea typeface="Calibri" pitchFamily="34" charset="-122"/>
+                <a:cs typeface="Calibri" pitchFamily="34" charset="-120"/>
+              </a:rPr>
+              <a:t>engine runs on stdlib only; demo never dies, offline fallback replay</a:t>
+            </a:r>
+            <a:endParaRPr lang="en-US" sz="950" dirty="0"/>
+          </a:p>
+        </p:txBody>
+      </p:sp>
+      <p:sp>
+        <p:nvSpPr>
+          <p:cNvPr id="12" name="Shape 10"/>
+          <p:cNvSpPr/>
+          <p:nvPr/>
+        </p:nvSpPr>
+        <p:spPr>
+          <a:xfrm>
+            <a:off x="4617720" y="2103120"/>
+            <a:ext cx="4069080" cy="914400"/>
+          </a:xfrm>
+          <a:prstGeom prst="roundRect">
+            <a:avLst>
+              <a:gd name="adj" fmla="val 8000"/>
+            </a:avLst>
+          </a:prstGeom>
+          <a:solidFill>
+            <a:srgbClr val="F7FAF2"/>
+          </a:solidFill>
+          <a:ln w="12700">
+            <a:solidFill>
+              <a:srgbClr val="FFFFFF"/>
+            </a:solidFill>
+            <a:prstDash val="solid"/>
+          </a:ln>
+        </p:spPr>
+      </p:sp>
+      <p:sp>
+        <p:nvSpPr>
+          <p:cNvPr id="13" name="Text 11"/>
+          <p:cNvSpPr/>
+          <p:nvPr/>
+        </p:nvSpPr>
+        <p:spPr>
+          <a:xfrm>
+            <a:off x="4754880" y="2212848"/>
+            <a:ext cx="1737360" cy="457200"/>
+          </a:xfrm>
+          <a:prstGeom prst="rect">
+            <a:avLst/>
+          </a:prstGeom>
+          <a:noFill/>
+          <a:ln/>
+        </p:spPr>
+        <p:txBody>
+          <a:bodyPr wrap="square" lIns="0" tIns="0" rIns="0" bIns="0" rtlCol="0" anchor="ctr"/>
+          <a:lstStyle/>
+          <a:p>
+            <a:pPr indent="0" marL="0">
+              <a:buNone/>
+            </a:pPr>
+            <a:r>
+              <a:rPr lang="en-US" sz="1800" b="1" dirty="0">
                 <a:solidFill>
                   <a:srgbClr val="2C5F2D"/>
                 </a:solidFill>
@@ -5512,100 +6386,127 @@
                 <a:ea typeface="Cambria" pitchFamily="34" charset="-122"/>
                 <a:cs typeface="Cambria" pitchFamily="34" charset="-120"/>
               </a:rPr>
-              <a:t>Prior art</a:t>
-            </a:r>
-            <a:endParaRPr lang="en-US" sz="1200" dirty="0"/>
-          </a:p>
-        </p:txBody>
-      </p:sp>
-      <p:sp>
-        <p:nvSpPr>
-          <p:cNvPr id="11" name="Text 9"/>
-          <p:cNvSpPr/>
-          <p:nvPr/>
-        </p:nvSpPr>
-        <p:spPr>
-          <a:xfrm>
-            <a:off x="457200" y="2880360"/>
-            <a:ext cx="1920240" cy="292608"/>
-          </a:xfrm>
-          <a:prstGeom prst="rect">
-            <a:avLst/>
-          </a:prstGeom>
-          <a:noFill/>
-          <a:ln/>
-        </p:spPr>
-        <p:txBody>
-          <a:bodyPr wrap="square" lIns="0" tIns="0" rIns="0" bIns="0" rtlCol="0" anchor="ctr"/>
-          <a:lstStyle/>
-          <a:p>
-            <a:pPr indent="0" marL="0">
-              <a:buNone/>
-            </a:pPr>
-            <a:r>
-              <a:rPr lang="en-US" sz="1050" b="1" dirty="0">
-                <a:solidFill>
-                  <a:srgbClr val="212121"/>
+              <a:t>Honest mode</a:t>
+            </a:r>
+            <a:endParaRPr lang="en-US" sz="1800" dirty="0"/>
+          </a:p>
+        </p:txBody>
+      </p:sp>
+      <p:sp>
+        <p:nvSpPr>
+          <p:cNvPr id="14" name="Text 12"/>
+          <p:cNvSpPr/>
+          <p:nvPr/>
+        </p:nvSpPr>
+        <p:spPr>
+          <a:xfrm>
+            <a:off x="6492240" y="2212848"/>
+            <a:ext cx="2103120" cy="731520"/>
+          </a:xfrm>
+          <a:prstGeom prst="rect">
+            <a:avLst/>
+          </a:prstGeom>
+          <a:noFill/>
+          <a:ln/>
+        </p:spPr>
+        <p:txBody>
+          <a:bodyPr wrap="square" lIns="0" tIns="0" rIns="0" bIns="0" rtlCol="0" anchor="ctr"/>
+          <a:lstStyle/>
+          <a:p>
+            <a:pPr indent="0" marL="0">
+              <a:buNone/>
+            </a:pPr>
+            <a:r>
+              <a:rPr lang="en-US" sz="950" dirty="0">
+                <a:solidFill>
+                  <a:srgbClr val="5A6B5A"/>
                 </a:solidFill>
                 <a:latin typeface="Calibri" pitchFamily="34" charset="0"/>
                 <a:ea typeface="Calibri" pitchFamily="34" charset="-122"/>
                 <a:cs typeface="Calibri" pitchFamily="34" charset="-120"/>
               </a:rPr>
-              <a:t>Meghdoot (IMD)</a:t>
-            </a:r>
-            <a:endParaRPr lang="en-US" sz="1050" dirty="0"/>
-          </a:p>
-        </p:txBody>
-      </p:sp>
-      <p:sp>
-        <p:nvSpPr>
-          <p:cNvPr id="12" name="Text 10"/>
-          <p:cNvSpPr/>
-          <p:nvPr/>
-        </p:nvSpPr>
-        <p:spPr>
-          <a:xfrm>
-            <a:off x="2468880" y="2880360"/>
-            <a:ext cx="2926080" cy="292608"/>
-          </a:xfrm>
-          <a:prstGeom prst="rect">
-            <a:avLst/>
-          </a:prstGeom>
-          <a:noFill/>
-          <a:ln/>
-        </p:spPr>
-        <p:txBody>
-          <a:bodyPr wrap="square" lIns="0" tIns="0" rIns="0" bIns="0" rtlCol="0" anchor="ctr"/>
-          <a:lstStyle/>
-          <a:p>
-            <a:pPr indent="0" marL="0">
-              <a:buNone/>
-            </a:pPr>
-            <a:r>
-              <a:rPr lang="en-US" sz="1050" dirty="0">
-                <a:solidFill>
-                  <a:srgbClr val="5A6B5A"/>
+              <a:t>badges count actual provider outcomes, no badge-lie, audit trail per action</a:t>
+            </a:r>
+            <a:endParaRPr lang="en-US" sz="950" dirty="0"/>
+          </a:p>
+        </p:txBody>
+      </p:sp>
+      <p:sp>
+        <p:nvSpPr>
+          <p:cNvPr id="15" name="Text 13"/>
+          <p:cNvSpPr/>
+          <p:nvPr/>
+        </p:nvSpPr>
+        <p:spPr>
+          <a:xfrm>
+            <a:off x="4983480" y="3291840"/>
+            <a:ext cx="3657600" cy="822960"/>
+          </a:xfrm>
+          <a:prstGeom prst="rect">
+            <a:avLst/>
+          </a:prstGeom>
+          <a:noFill/>
+          <a:ln/>
+        </p:spPr>
+        <p:txBody>
+          <a:bodyPr wrap="square" lIns="0" tIns="0" rIns="0" bIns="0" rtlCol="0" anchor="ctr"/>
+          <a:lstStyle/>
+          <a:p>
+            <a:pPr indent="0" marL="0">
+              <a:buNone/>
+            </a:pPr>
+            <a:r>
+              <a:rPr lang="en-US" sz="1150" dirty="0">
+                <a:solidFill>
+                  <a:srgbClr val="212121"/>
                 </a:solidFill>
                 <a:latin typeface="Calibri" pitchFamily="34" charset="0"/>
                 <a:ea typeface="Calibri" pitchFamily="34" charset="-122"/>
                 <a:cs typeface="Calibri" pitchFamily="34" charset="-120"/>
               </a:rPr>
-              <a:t>alerts and agromet advisories</a:t>
-            </a:r>
-            <a:endParaRPr lang="en-US" sz="1050" dirty="0"/>
-          </a:p>
-        </p:txBody>
-      </p:sp>
-      <p:sp>
-        <p:nvSpPr>
-          <p:cNvPr id="13" name="Text 11"/>
-          <p:cNvSpPr/>
-          <p:nvPr/>
-        </p:nvSpPr>
-        <p:spPr>
-          <a:xfrm>
-            <a:off x="5486400" y="2880360"/>
-            <a:ext cx="3200400" cy="292608"/>
+              <a:t>Demo arc (3 minutes): Asha's plot -&gt; cyclone forecast -&gt; staged Odia advisory -&gt; tower drops, advice still syncs -&gt; damage evidence -&gt; claim packet export.</a:t>
+            </a:r>
+            <a:endParaRPr lang="en-US" sz="1150" dirty="0"/>
+          </a:p>
+        </p:txBody>
+      </p:sp>
+      <p:sp>
+        <p:nvSpPr>
+          <p:cNvPr id="16" name="Shape 14"/>
+          <p:cNvSpPr/>
+          <p:nvPr/>
+        </p:nvSpPr>
+        <p:spPr>
+          <a:xfrm>
+            <a:off x="457200" y="3977640"/>
+            <a:ext cx="8229600" cy="658368"/>
+          </a:xfrm>
+          <a:prstGeom prst="roundRect">
+            <a:avLst>
+              <a:gd name="adj" fmla="val 11111"/>
+            </a:avLst>
+          </a:prstGeom>
+          <a:solidFill>
+            <a:srgbClr val="D8E8C8"/>
+          </a:solidFill>
+          <a:ln w="12700">
+            <a:solidFill>
+              <a:srgbClr val="FFFFFF"/>
+            </a:solidFill>
+            <a:prstDash val="solid"/>
+          </a:ln>
+        </p:spPr>
+      </p:sp>
+      <p:sp>
+        <p:nvSpPr>
+          <p:cNvPr id="17" name="Text 15"/>
+          <p:cNvSpPr/>
+          <p:nvPr/>
+        </p:nvSpPr>
+        <p:spPr>
+          <a:xfrm>
+            <a:off x="640080" y="4059936"/>
+            <a:ext cx="7863840" cy="502920"/>
           </a:xfrm>
           <a:prstGeom prst="rect">
             <a:avLst/>
@@ -5623,13 +6524,13 @@
             <a:r>
               <a:rPr lang="en-US" sz="1050" dirty="0">
                 <a:solidFill>
-                  <a:srgbClr val="5A6B5A"/>
+                  <a:srgbClr val="212121"/>
                 </a:solidFill>
                 <a:latin typeface="Calibri" pitchFamily="34" charset="0"/>
                 <a:ea typeface="Calibri" pitchFamily="34" charset="-122"/>
                 <a:cs typeface="Calibri" pitchFamily="34" charset="-120"/>
               </a:rPr>
-              <a:t>no farm profile, no staged action, no claims path</a:t>
+              <a:t>Prototype honesty: IMD feed is simulated, SMS and IVR run through simulators, agronomy rules are a curated seed set awaiting agronomist review. Nothing is labeled live that is not live.</a:t>
             </a:r>
             <a:endParaRPr lang="en-US" sz="1050" dirty="0"/>
           </a:p>
@@ -5637,428 +6538,38 @@
       </p:sp>
       <p:sp>
         <p:nvSpPr>
-          <p:cNvPr id="14" name="Text 12"/>
-          <p:cNvSpPr/>
-          <p:nvPr/>
-        </p:nvSpPr>
-        <p:spPr>
-          <a:xfrm>
-            <a:off x="457200" y="3246120"/>
-            <a:ext cx="1920240" cy="292608"/>
-          </a:xfrm>
-          <a:prstGeom prst="rect">
-            <a:avLst/>
-          </a:prstGeom>
-          <a:noFill/>
-          <a:ln/>
-        </p:spPr>
-        <p:txBody>
-          <a:bodyPr wrap="square" lIns="0" tIns="0" rIns="0" bIns="0" rtlCol="0" anchor="ctr"/>
-          <a:lstStyle/>
-          <a:p>
-            <a:pPr indent="0" marL="0">
-              <a:buNone/>
-            </a:pPr>
-            <a:r>
-              <a:rPr lang="en-US" sz="1050" b="1" dirty="0">
-                <a:solidFill>
-                  <a:srgbClr val="212121"/>
+          <p:cNvPr id="18" name="Text 16"/>
+          <p:cNvSpPr/>
+          <p:nvPr/>
+        </p:nvSpPr>
+        <p:spPr>
+          <a:xfrm>
+            <a:off x="457200" y="4828032"/>
+            <a:ext cx="8229600" cy="274320"/>
+          </a:xfrm>
+          <a:prstGeom prst="rect">
+            <a:avLst/>
+          </a:prstGeom>
+          <a:noFill/>
+          <a:ln/>
+        </p:spPr>
+        <p:txBody>
+          <a:bodyPr wrap="square" lIns="0" tIns="0" rIns="0" bIns="0" rtlCol="0" anchor="ctr"/>
+          <a:lstStyle/>
+          <a:p>
+            <a:pPr indent="0" marL="0">
+              <a:buNone/>
+            </a:pPr>
+            <a:r>
+              <a:rPr lang="en-US" sz="900" dirty="0">
+                <a:solidFill>
+                  <a:srgbClr val="5A6B5A"/>
                 </a:solidFill>
                 <a:latin typeface="Calibri" pitchFamily="34" charset="0"/>
                 <a:ea typeface="Calibri" pitchFamily="34" charset="-122"/>
                 <a:cs typeface="Calibri" pitchFamily="34" charset="-120"/>
               </a:rPr>
-              <a:t>Fasal, DeHaat</a:t>
-            </a:r>
-            <a:endParaRPr lang="en-US" sz="1050" dirty="0"/>
-          </a:p>
-        </p:txBody>
-      </p:sp>
-      <p:sp>
-        <p:nvSpPr>
-          <p:cNvPr id="15" name="Text 13"/>
-          <p:cNvSpPr/>
-          <p:nvPr/>
-        </p:nvSpPr>
-        <p:spPr>
-          <a:xfrm>
-            <a:off x="2468880" y="3246120"/>
-            <a:ext cx="2926080" cy="292608"/>
-          </a:xfrm>
-          <a:prstGeom prst="rect">
-            <a:avLst/>
-          </a:prstGeom>
-          <a:noFill/>
-          <a:ln/>
-        </p:spPr>
-        <p:txBody>
-          <a:bodyPr wrap="square" lIns="0" tIns="0" rIns="0" bIns="0" rtlCol="0" anchor="ctr"/>
-          <a:lstStyle/>
-          <a:p>
-            <a:pPr indent="0" marL="0">
-              <a:buNone/>
-            </a:pPr>
-            <a:r>
-              <a:rPr lang="en-US" sz="1050" dirty="0">
-                <a:solidFill>
-                  <a:srgbClr val="5A6B5A"/>
-                </a:solidFill>
-                <a:latin typeface="Calibri" pitchFamily="34" charset="0"/>
-                <a:ea typeface="Calibri" pitchFamily="34" charset="-122"/>
-                <a:cs typeface="Calibri" pitchFamily="34" charset="-120"/>
-              </a:rPr>
-              <a:t>marketplace and credit rails</a:t>
-            </a:r>
-            <a:endParaRPr lang="en-US" sz="1050" dirty="0"/>
-          </a:p>
-        </p:txBody>
-      </p:sp>
-      <p:sp>
-        <p:nvSpPr>
-          <p:cNvPr id="16" name="Text 14"/>
-          <p:cNvSpPr/>
-          <p:nvPr/>
-        </p:nvSpPr>
-        <p:spPr>
-          <a:xfrm>
-            <a:off x="5486400" y="3246120"/>
-            <a:ext cx="3200400" cy="292608"/>
-          </a:xfrm>
-          <a:prstGeom prst="rect">
-            <a:avLst/>
-          </a:prstGeom>
-          <a:noFill/>
-          <a:ln/>
-        </p:spPr>
-        <p:txBody>
-          <a:bodyPr wrap="square" lIns="0" tIns="0" rIns="0" bIns="0" rtlCol="0" anchor="ctr"/>
-          <a:lstStyle/>
-          <a:p>
-            <a:pPr indent="0" marL="0">
-              <a:buNone/>
-            </a:pPr>
-            <a:r>
-              <a:rPr lang="en-US" sz="1050" dirty="0">
-                <a:solidFill>
-                  <a:srgbClr val="5A6B5A"/>
-                </a:solidFill>
-                <a:latin typeface="Calibri" pitchFamily="34" charset="0"/>
-                <a:ea typeface="Calibri" pitchFamily="34" charset="-122"/>
-                <a:cs typeface="Calibri" pitchFamily="34" charset="-120"/>
-              </a:rPr>
-              <a:t>advisory is content, not a governed decision</a:t>
-            </a:r>
-            <a:endParaRPr lang="en-US" sz="1050" dirty="0"/>
-          </a:p>
-        </p:txBody>
-      </p:sp>
-      <p:sp>
-        <p:nvSpPr>
-          <p:cNvPr id="17" name="Text 15"/>
-          <p:cNvSpPr/>
-          <p:nvPr/>
-        </p:nvSpPr>
-        <p:spPr>
-          <a:xfrm>
-            <a:off x="457200" y="3611880"/>
-            <a:ext cx="1920240" cy="292608"/>
-          </a:xfrm>
-          <a:prstGeom prst="rect">
-            <a:avLst/>
-          </a:prstGeom>
-          <a:noFill/>
-          <a:ln/>
-        </p:spPr>
-        <p:txBody>
-          <a:bodyPr wrap="square" lIns="0" tIns="0" rIns="0" bIns="0" rtlCol="0" anchor="ctr"/>
-          <a:lstStyle/>
-          <a:p>
-            <a:pPr indent="0" marL="0">
-              <a:buNone/>
-            </a:pPr>
-            <a:r>
-              <a:rPr lang="en-US" sz="1050" b="1" dirty="0">
-                <a:solidFill>
-                  <a:srgbClr val="212121"/>
-                </a:solidFill>
-                <a:latin typeface="Calibri" pitchFamily="34" charset="0"/>
-                <a:ea typeface="Calibri" pitchFamily="34" charset="-122"/>
-                <a:cs typeface="Calibri" pitchFamily="34" charset="-120"/>
-              </a:rPr>
-              <a:t>Bangladesh CPP</a:t>
-            </a:r>
-            <a:endParaRPr lang="en-US" sz="1050" dirty="0"/>
-          </a:p>
-        </p:txBody>
-      </p:sp>
-      <p:sp>
-        <p:nvSpPr>
-          <p:cNvPr id="18" name="Text 16"/>
-          <p:cNvSpPr/>
-          <p:nvPr/>
-        </p:nvSpPr>
-        <p:spPr>
-          <a:xfrm>
-            <a:off x="2468880" y="3611880"/>
-            <a:ext cx="2926080" cy="292608"/>
-          </a:xfrm>
-          <a:prstGeom prst="rect">
-            <a:avLst/>
-          </a:prstGeom>
-          <a:noFill/>
-          <a:ln/>
-        </p:spPr>
-        <p:txBody>
-          <a:bodyPr wrap="square" lIns="0" tIns="0" rIns="0" bIns="0" rtlCol="0" anchor="ctr"/>
-          <a:lstStyle/>
-          <a:p>
-            <a:pPr indent="0" marL="0">
-              <a:buNone/>
-            </a:pPr>
-            <a:r>
-              <a:rPr lang="en-US" sz="1050" dirty="0">
-                <a:solidFill>
-                  <a:srgbClr val="5A6B5A"/>
-                </a:solidFill>
-                <a:latin typeface="Calibri" pitchFamily="34" charset="0"/>
-                <a:ea typeface="Calibri" pitchFamily="34" charset="-122"/>
-                <a:cs typeface="Calibri" pitchFamily="34" charset="-120"/>
-              </a:rPr>
-              <a:t>human volunteer warning chain</a:t>
-            </a:r>
-            <a:endParaRPr lang="en-US" sz="1050" dirty="0"/>
-          </a:p>
-        </p:txBody>
-      </p:sp>
-      <p:sp>
-        <p:nvSpPr>
-          <p:cNvPr id="19" name="Text 17"/>
-          <p:cNvSpPr/>
-          <p:nvPr/>
-        </p:nvSpPr>
-        <p:spPr>
-          <a:xfrm>
-            <a:off x="5486400" y="3611880"/>
-            <a:ext cx="3200400" cy="292608"/>
-          </a:xfrm>
-          <a:prstGeom prst="rect">
-            <a:avLst/>
-          </a:prstGeom>
-          <a:noFill/>
-          <a:ln/>
-        </p:spPr>
-        <p:txBody>
-          <a:bodyPr wrap="square" lIns="0" tIns="0" rIns="0" bIns="0" rtlCol="0" anchor="ctr"/>
-          <a:lstStyle/>
-          <a:p>
-            <a:pPr indent="0" marL="0">
-              <a:buNone/>
-            </a:pPr>
-            <a:r>
-              <a:rPr lang="en-US" sz="1050" dirty="0">
-                <a:solidFill>
-                  <a:srgbClr val="5A6B5A"/>
-                </a:solidFill>
-                <a:latin typeface="Calibri" pitchFamily="34" charset="0"/>
-                <a:ea typeface="Calibri" pitchFamily="34" charset="-122"/>
-                <a:cs typeface="Calibri" pitchFamily="34" charset="-120"/>
-              </a:rPr>
-              <a:t>no recovery plan, no claim evidence</a:t>
-            </a:r>
-            <a:endParaRPr lang="en-US" sz="1050" dirty="0"/>
-          </a:p>
-        </p:txBody>
-      </p:sp>
-      <p:sp>
-        <p:nvSpPr>
-          <p:cNvPr id="20" name="Text 18"/>
-          <p:cNvSpPr/>
-          <p:nvPr/>
-        </p:nvSpPr>
-        <p:spPr>
-          <a:xfrm>
-            <a:off x="457200" y="3977640"/>
-            <a:ext cx="1920240" cy="292608"/>
-          </a:xfrm>
-          <a:prstGeom prst="rect">
-            <a:avLst/>
-          </a:prstGeom>
-          <a:noFill/>
-          <a:ln/>
-        </p:spPr>
-        <p:txBody>
-          <a:bodyPr wrap="square" lIns="0" tIns="0" rIns="0" bIns="0" rtlCol="0" anchor="ctr"/>
-          <a:lstStyle/>
-          <a:p>
-            <a:pPr indent="0" marL="0">
-              <a:buNone/>
-            </a:pPr>
-            <a:r>
-              <a:rPr lang="en-US" sz="1050" b="1" dirty="0">
-                <a:solidFill>
-                  <a:srgbClr val="212121"/>
-                </a:solidFill>
-                <a:latin typeface="Calibri" pitchFamily="34" charset="0"/>
-                <a:ea typeface="Calibri" pitchFamily="34" charset="-122"/>
-                <a:cs typeface="Calibri" pitchFamily="34" charset="-120"/>
-              </a:rPr>
-              <a:t>WFP anticipatory cash</a:t>
-            </a:r>
-            <a:endParaRPr lang="en-US" sz="1050" dirty="0"/>
-          </a:p>
-        </p:txBody>
-      </p:sp>
-      <p:sp>
-        <p:nvSpPr>
-          <p:cNvPr id="21" name="Text 19"/>
-          <p:cNvSpPr/>
-          <p:nvPr/>
-        </p:nvSpPr>
-        <p:spPr>
-          <a:xfrm>
-            <a:off x="2468880" y="3977640"/>
-            <a:ext cx="2926080" cy="292608"/>
-          </a:xfrm>
-          <a:prstGeom prst="rect">
-            <a:avLst/>
-          </a:prstGeom>
-          <a:noFill/>
-          <a:ln/>
-        </p:spPr>
-        <p:txBody>
-          <a:bodyPr wrap="square" lIns="0" tIns="0" rIns="0" bIns="0" rtlCol="0" anchor="ctr"/>
-          <a:lstStyle/>
-          <a:p>
-            <a:pPr indent="0" marL="0">
-              <a:buNone/>
-            </a:pPr>
-            <a:r>
-              <a:rPr lang="en-US" sz="1050" dirty="0">
-                <a:solidFill>
-                  <a:srgbClr val="5A6B5A"/>
-                </a:solidFill>
-                <a:latin typeface="Calibri" pitchFamily="34" charset="0"/>
-                <a:ea typeface="Calibri" pitchFamily="34" charset="-122"/>
-                <a:cs typeface="Calibri" pitchFamily="34" charset="-120"/>
-              </a:rPr>
-              <a:t>threshold-triggered cash transfers</a:t>
-            </a:r>
-            <a:endParaRPr lang="en-US" sz="1050" dirty="0"/>
-          </a:p>
-        </p:txBody>
-      </p:sp>
-      <p:sp>
-        <p:nvSpPr>
-          <p:cNvPr id="22" name="Text 20"/>
-          <p:cNvSpPr/>
-          <p:nvPr/>
-        </p:nvSpPr>
-        <p:spPr>
-          <a:xfrm>
-            <a:off x="5486400" y="3977640"/>
-            <a:ext cx="3200400" cy="292608"/>
-          </a:xfrm>
-          <a:prstGeom prst="rect">
-            <a:avLst/>
-          </a:prstGeom>
-          <a:noFill/>
-          <a:ln/>
-        </p:spPr>
-        <p:txBody>
-          <a:bodyPr wrap="square" lIns="0" tIns="0" rIns="0" bIns="0" rtlCol="0" anchor="ctr"/>
-          <a:lstStyle/>
-          <a:p>
-            <a:pPr indent="0" marL="0">
-              <a:buNone/>
-            </a:pPr>
-            <a:r>
-              <a:rPr lang="en-US" sz="1050" dirty="0">
-                <a:solidFill>
-                  <a:srgbClr val="5A6B5A"/>
-                </a:solidFill>
-                <a:latin typeface="Calibri" pitchFamily="34" charset="0"/>
-                <a:ea typeface="Calibri" pitchFamily="34" charset="-122"/>
-                <a:cs typeface="Calibri" pitchFamily="34" charset="-120"/>
-              </a:rPr>
-              <a:t>cash, not farm action; no crop-stage logic</a:t>
-            </a:r>
-            <a:endParaRPr lang="en-US" sz="1050" dirty="0"/>
-          </a:p>
-        </p:txBody>
-      </p:sp>
-      <p:sp>
-        <p:nvSpPr>
-          <p:cNvPr id="23" name="Text 21"/>
-          <p:cNvSpPr/>
-          <p:nvPr/>
-        </p:nvSpPr>
-        <p:spPr>
-          <a:xfrm>
-            <a:off x="457200" y="4407408"/>
-            <a:ext cx="8229600" cy="365760"/>
-          </a:xfrm>
-          <a:prstGeom prst="rect">
-            <a:avLst/>
-          </a:prstGeom>
-          <a:noFill/>
-          <a:ln/>
-        </p:spPr>
-        <p:txBody>
-          <a:bodyPr wrap="square" lIns="0" tIns="0" rIns="0" bIns="0" rtlCol="0" anchor="ctr"/>
-          <a:lstStyle/>
-          <a:p>
-            <a:pPr indent="0" marL="0">
-              <a:buNone/>
-            </a:pPr>
-            <a:r>
-              <a:rPr lang="en-US" sz="1500" b="1" dirty="0">
-                <a:solidFill>
-                  <a:srgbClr val="2C5F2D"/>
-                </a:solidFill>
-                <a:latin typeface="Cambria" pitchFamily="34" charset="0"/>
-                <a:ea typeface="Cambria" pitchFamily="34" charset="-122"/>
-                <a:cs typeface="Cambria" pitchFamily="34" charset="-120"/>
-              </a:rPr>
-              <a:t>Warnings are infrastructure. Decisions are the product.</a:t>
-            </a:r>
-            <a:endParaRPr lang="en-US" sz="1500" dirty="0"/>
-          </a:p>
-        </p:txBody>
-      </p:sp>
-      <p:sp>
-        <p:nvSpPr>
-          <p:cNvPr id="24" name="Text 22"/>
-          <p:cNvSpPr/>
-          <p:nvPr/>
-        </p:nvSpPr>
-        <p:spPr>
-          <a:xfrm>
-            <a:off x="457200" y="4864608"/>
-            <a:ext cx="8229600" cy="274320"/>
-          </a:xfrm>
-          <a:prstGeom prst="rect">
-            <a:avLst/>
-          </a:prstGeom>
-          <a:noFill/>
-          <a:ln/>
-        </p:spPr>
-        <p:txBody>
-          <a:bodyPr wrap="square" lIns="0" tIns="0" rIns="0" bIns="0" rtlCol="0" anchor="ctr"/>
-          <a:lstStyle/>
-          <a:p>
-            <a:pPr indent="0" marL="0">
-              <a:buNone/>
-            </a:pPr>
-            <a:r>
-              <a:rPr lang="en-US" sz="900" dirty="0">
-                <a:solidFill>
-                  <a:srgbClr val="5A6B5A"/>
-                </a:solidFill>
-                <a:latin typeface="Calibri" pitchFamily="34" charset="0"/>
-                <a:ea typeface="Calibri" pitchFamily="34" charset="-122"/>
-                <a:cs typeface="Calibri" pitchFamily="34" charset="-120"/>
-              </a:rPr>
-              <a:t>Prior art from the statement-faithful research wave: channel evidence in research/raw/v2/cnc-channel-ps07-ultra8x-v2.content.md.</a:t>
+              <a:t>Verification: fresh runs 2026-08-16 07:40 IST, scaffold eval report on repo. 46/46 eval report is engine-level; agri domain rules are the new layer for Round 1.</a:t>
             </a:r>
             <a:endParaRPr lang="en-US" sz="900" dirty="0"/>
           </a:p>
@@ -6129,7 +6640,7 @@
                 <a:ea typeface="Cambria" pitchFamily="34" charset="-122"/>
                 <a:cs typeface="Cambria" pitchFamily="34" charset="-120"/>
               </a:rPr>
-              <a:t>Three buyers, one verified loop</a:t>
+              <a:t>Why this is not another alert system</a:t>
             </a:r>
             <a:endParaRPr lang="en-US" sz="2800" dirty="0"/>
           </a:p>
@@ -6143,12 +6654,12 @@
         </p:nvSpPr>
         <p:spPr>
           <a:xfrm>
-            <a:off x="457200" y="1234440"/>
-            <a:ext cx="2529840" cy="2286000"/>
+            <a:off x="457200" y="960120"/>
+            <a:ext cx="3977640" cy="1691640"/>
           </a:xfrm>
           <a:prstGeom prst="roundRect">
             <a:avLst>
-              <a:gd name="adj" fmla="val 3200"/>
+              <a:gd name="adj" fmla="val 4324"/>
             </a:avLst>
           </a:prstGeom>
           <a:solidFill>
@@ -6170,112 +6681,112 @@
         </p:nvSpPr>
         <p:spPr>
           <a:xfrm>
-            <a:off x="640080" y="1417320"/>
-            <a:ext cx="2164080" cy="365760"/>
-          </a:xfrm>
-          <a:prstGeom prst="rect">
-            <a:avLst/>
-          </a:prstGeom>
-          <a:noFill/>
-          <a:ln/>
-        </p:spPr>
-        <p:txBody>
-          <a:bodyPr wrap="square" lIns="0" tIns="0" rIns="0" bIns="0" rtlCol="0" anchor="ctr"/>
-          <a:lstStyle/>
-          <a:p>
-            <a:pPr indent="0" marL="0">
-              <a:buNone/>
-            </a:pPr>
-            <a:r>
-              <a:rPr lang="en-US" sz="1600" b="1" dirty="0">
-                <a:solidFill>
-                  <a:srgbClr val="2C5F2D"/>
+            <a:off x="640080" y="1097280"/>
+            <a:ext cx="3657600" cy="320040"/>
+          </a:xfrm>
+          <a:prstGeom prst="rect">
+            <a:avLst/>
+          </a:prstGeom>
+          <a:noFill/>
+          <a:ln/>
+        </p:spPr>
+        <p:txBody>
+          <a:bodyPr wrap="square" lIns="0" tIns="0" rIns="0" bIns="0" rtlCol="0" anchor="ctr"/>
+          <a:lstStyle/>
+          <a:p>
+            <a:pPr indent="0" marL="0">
+              <a:buNone/>
+            </a:pPr>
+            <a:r>
+              <a:rPr lang="en-US" sz="1200" b="1" dirty="0">
+                <a:solidFill>
+                  <a:srgbClr val="5A6B5A"/>
+                </a:solidFill>
+                <a:latin typeface="Calibri" pitchFamily="34" charset="0"/>
+                <a:ea typeface="Calibri" pitchFamily="34" charset="-122"/>
+                <a:cs typeface="Calibri" pitchFamily="34" charset="-120"/>
+              </a:rPr>
+              <a:t>The alert says</a:t>
+            </a:r>
+            <a:endParaRPr lang="en-US" sz="1200" dirty="0"/>
+          </a:p>
+        </p:txBody>
+      </p:sp>
+      <p:sp>
+        <p:nvSpPr>
+          <p:cNvPr id="5" name="Text 3"/>
+          <p:cNvSpPr/>
+          <p:nvPr/>
+        </p:nvSpPr>
+        <p:spPr>
+          <a:xfrm>
+            <a:off x="640080" y="1463040"/>
+            <a:ext cx="3657600" cy="457200"/>
+          </a:xfrm>
+          <a:prstGeom prst="rect">
+            <a:avLst/>
+          </a:prstGeom>
+          <a:noFill/>
+          <a:ln/>
+        </p:spPr>
+        <p:txBody>
+          <a:bodyPr wrap="square" lIns="0" tIns="0" rIns="0" bIns="0" rtlCol="0" anchor="ctr"/>
+          <a:lstStyle/>
+          <a:p>
+            <a:pPr indent="0" marL="0">
+              <a:buNone/>
+            </a:pPr>
+            <a:r>
+              <a:rPr lang="en-US" sz="1700" i="1" dirty="0">
+                <a:solidFill>
+                  <a:srgbClr val="212121"/>
                 </a:solidFill>
                 <a:latin typeface="Cambria" pitchFamily="34" charset="0"/>
                 <a:ea typeface="Cambria" pitchFamily="34" charset="-122"/>
                 <a:cs typeface="Cambria" pitchFamily="34" charset="-120"/>
               </a:rPr>
-              <a:t>FPO + extension</a:t>
-            </a:r>
-            <a:endParaRPr lang="en-US" sz="1600" dirty="0"/>
-          </a:p>
-        </p:txBody>
-      </p:sp>
-      <p:sp>
-        <p:nvSpPr>
-          <p:cNvPr id="5" name="Text 3"/>
-          <p:cNvSpPr/>
-          <p:nvPr/>
-        </p:nvSpPr>
-        <p:spPr>
-          <a:xfrm>
-            <a:off x="640080" y="1920240"/>
-            <a:ext cx="2164080" cy="914400"/>
-          </a:xfrm>
-          <a:prstGeom prst="rect">
-            <a:avLst/>
-          </a:prstGeom>
-          <a:noFill/>
-          <a:ln/>
-        </p:spPr>
-        <p:txBody>
-          <a:bodyPr wrap="square" lIns="0" tIns="0" rIns="0" bIns="0" rtlCol="0" anchor="ctr"/>
-          <a:lstStyle/>
-          <a:p>
-            <a:pPr indent="0" marL="0">
-              <a:buNone/>
-            </a:pPr>
-            <a:r>
-              <a:rPr lang="en-US" sz="1150" dirty="0">
-                <a:solidFill>
-                  <a:srgbClr val="212121"/>
+              <a:t>"Cyclone expected. Stay safe."</a:t>
+            </a:r>
+            <a:endParaRPr lang="en-US" sz="1700" dirty="0"/>
+          </a:p>
+        </p:txBody>
+      </p:sp>
+      <p:sp>
+        <p:nvSpPr>
+          <p:cNvPr id="6" name="Text 4"/>
+          <p:cNvSpPr/>
+          <p:nvPr/>
+        </p:nvSpPr>
+        <p:spPr>
+          <a:xfrm>
+            <a:off x="640080" y="2011680"/>
+            <a:ext cx="3657600" cy="502920"/>
+          </a:xfrm>
+          <a:prstGeom prst="rect">
+            <a:avLst/>
+          </a:prstGeom>
+          <a:noFill/>
+          <a:ln/>
+        </p:spPr>
+        <p:txBody>
+          <a:bodyPr wrap="square" lIns="0" tIns="0" rIns="0" bIns="0" rtlCol="0" anchor="ctr"/>
+          <a:lstStyle/>
+          <a:p>
+            <a:pPr indent="0" marL="0">
+              <a:buNone/>
+            </a:pPr>
+            <a:r>
+              <a:rPr lang="en-US" sz="1100" dirty="0">
+                <a:solidFill>
+                  <a:srgbClr val="5A6B5A"/>
                 </a:solidFill>
                 <a:latin typeface="Calibri" pitchFamily="34" charset="0"/>
                 <a:ea typeface="Calibri" pitchFamily="34" charset="-122"/>
                 <a:cs typeface="Calibri" pitchFamily="34" charset="-120"/>
               </a:rPr>
-              <a:t>seasonal advisory subscriptions per farmer via FPOs and KVK extension workers</a:t>
-            </a:r>
-            <a:endParaRPr lang="en-US" sz="1150" dirty="0"/>
-          </a:p>
-        </p:txBody>
-      </p:sp>
-      <p:sp>
-        <p:nvSpPr>
-          <p:cNvPr id="6" name="Text 4"/>
-          <p:cNvSpPr/>
-          <p:nvPr/>
-        </p:nvSpPr>
-        <p:spPr>
-          <a:xfrm>
-            <a:off x="640080" y="2971800"/>
-            <a:ext cx="2164080" cy="457200"/>
-          </a:xfrm>
-          <a:prstGeom prst="rect">
-            <a:avLst/>
-          </a:prstGeom>
-          <a:noFill/>
-          <a:ln/>
-        </p:spPr>
-        <p:txBody>
-          <a:bodyPr wrap="square" lIns="0" tIns="0" rIns="0" bIns="0" rtlCol="0" anchor="ctr"/>
-          <a:lstStyle/>
-          <a:p>
-            <a:pPr indent="0" marL="0">
-              <a:buNone/>
-            </a:pPr>
-            <a:r>
-              <a:rPr lang="en-US" sz="1000" i="1" dirty="0">
-                <a:solidFill>
-                  <a:srgbClr val="5A6B5A"/>
-                </a:solidFill>
-                <a:latin typeface="Calibri" pitchFamily="34" charset="0"/>
-                <a:ea typeface="Calibri" pitchFamily="34" charset="-122"/>
-                <a:cs typeface="Calibri" pitchFamily="34" charset="-120"/>
-              </a:rPr>
-              <a:t>pay per verified advisory delivered and acted on</a:t>
-            </a:r>
-            <a:endParaRPr lang="en-US" sz="1000" dirty="0"/>
+              <a:t>No crop, no stage, no deadline, no cost of waiting, no recovery step.</a:t>
+            </a:r>
+            <a:endParaRPr lang="en-US" sz="1100" dirty="0"/>
           </a:p>
         </p:txBody>
       </p:sp>
@@ -6287,12 +6798,12 @@
         </p:nvSpPr>
         <p:spPr>
           <a:xfrm>
-            <a:off x="3307080" y="1234440"/>
-            <a:ext cx="2529840" cy="2286000"/>
+            <a:off x="4709160" y="960120"/>
+            <a:ext cx="3977640" cy="1691640"/>
           </a:xfrm>
           <a:prstGeom prst="roundRect">
             <a:avLst>
-              <a:gd name="adj" fmla="val 3200"/>
+              <a:gd name="adj" fmla="val 4324"/>
             </a:avLst>
           </a:prstGeom>
           <a:solidFill>
@@ -6314,63 +6825,141 @@
         </p:nvSpPr>
         <p:spPr>
           <a:xfrm>
-            <a:off x="3489960" y="1417320"/>
-            <a:ext cx="2164080" cy="365760"/>
-          </a:xfrm>
-          <a:prstGeom prst="rect">
-            <a:avLst/>
-          </a:prstGeom>
-          <a:noFill/>
-          <a:ln/>
-        </p:spPr>
-        <p:txBody>
-          <a:bodyPr wrap="square" lIns="0" tIns="0" rIns="0" bIns="0" rtlCol="0" anchor="ctr"/>
-          <a:lstStyle/>
-          <a:p>
-            <a:pPr indent="0" marL="0">
-              <a:buNone/>
-            </a:pPr>
-            <a:r>
-              <a:rPr lang="en-US" sz="1600" b="1" dirty="0">
+            <a:off x="4892040" y="1097280"/>
+            <a:ext cx="3657600" cy="320040"/>
+          </a:xfrm>
+          <a:prstGeom prst="rect">
+            <a:avLst/>
+          </a:prstGeom>
+          <a:noFill/>
+          <a:ln/>
+        </p:spPr>
+        <p:txBody>
+          <a:bodyPr wrap="square" lIns="0" tIns="0" rIns="0" bIns="0" rtlCol="0" anchor="ctr"/>
+          <a:lstStyle/>
+          <a:p>
+            <a:pPr indent="0" marL="0">
+              <a:buNone/>
+            </a:pPr>
+            <a:r>
+              <a:rPr lang="en-US" sz="1200" b="1" dirty="0">
                 <a:solidFill>
                   <a:srgbClr val="2C5F2D"/>
+                </a:solidFill>
+                <a:latin typeface="Calibri" pitchFamily="34" charset="0"/>
+                <a:ea typeface="Calibri" pitchFamily="34" charset="-122"/>
+                <a:cs typeface="Calibri" pitchFamily="34" charset="-120"/>
+              </a:rPr>
+              <a:t>The advisory says</a:t>
+            </a:r>
+            <a:endParaRPr lang="en-US" sz="1200" dirty="0"/>
+          </a:p>
+        </p:txBody>
+      </p:sp>
+      <p:sp>
+        <p:nvSpPr>
+          <p:cNvPr id="9" name="Text 7"/>
+          <p:cNvSpPr/>
+          <p:nvPr/>
+        </p:nvSpPr>
+        <p:spPr>
+          <a:xfrm>
+            <a:off x="4892040" y="1463040"/>
+            <a:ext cx="3657600" cy="1005840"/>
+          </a:xfrm>
+          <a:prstGeom prst="rect">
+            <a:avLst/>
+          </a:prstGeom>
+          <a:noFill/>
+          <a:ln/>
+        </p:spPr>
+        <p:txBody>
+          <a:bodyPr wrap="square" lIns="0" tIns="0" rIns="0" bIns="0" rtlCol="0" anchor="ctr"/>
+          <a:lstStyle/>
+          <a:p>
+            <a:pPr indent="0" marL="0">
+              <a:buNone/>
+            </a:pPr>
+            <a:r>
+              <a:rPr lang="en-US" sz="1350" dirty="0">
+                <a:solidFill>
+                  <a:srgbClr val="212121"/>
                 </a:solidFill>
                 <a:latin typeface="Cambria" pitchFamily="34" charset="0"/>
                 <a:ea typeface="Cambria" pitchFamily="34" charset="-122"/>
                 <a:cs typeface="Cambria" pitchFamily="34" charset="-120"/>
               </a:rPr>
-              <a:t>B2G district</a:t>
-            </a:r>
-            <a:endParaRPr lang="en-US" sz="1600" dirty="0"/>
-          </a:p>
-        </p:txBody>
-      </p:sp>
-      <p:sp>
-        <p:nvSpPr>
-          <p:cNvPr id="9" name="Text 7"/>
-          <p:cNvSpPr/>
-          <p:nvPr/>
-        </p:nvSpPr>
-        <p:spPr>
-          <a:xfrm>
-            <a:off x="3489960" y="1920240"/>
-            <a:ext cx="2164080" cy="914400"/>
-          </a:xfrm>
-          <a:prstGeom prst="rect">
-            <a:avLst/>
-          </a:prstGeom>
-          <a:noFill/>
-          <a:ln/>
-        </p:spPr>
-        <p:txBody>
-          <a:bodyPr wrap="square" lIns="0" tIns="0" rIns="0" bIns="0" rtlCol="0" anchor="ctr"/>
-          <a:lstStyle/>
-          <a:p>
-            <a:pPr indent="0" marL="0">
-              <a:buNone/>
-            </a:pPr>
-            <a:r>
-              <a:rPr lang="en-US" sz="1150" dirty="0">
+              <a:t>"Plot 12B, flowering paddy: harvest by 18:00 tomorrow, or move to the raised platform. Source: IMD + rule 14. Cost of waiting: est. yield loss."</a:t>
+            </a:r>
+            <a:endParaRPr lang="en-US" sz="1350" dirty="0"/>
+          </a:p>
+        </p:txBody>
+      </p:sp>
+      <p:sp>
+        <p:nvSpPr>
+          <p:cNvPr id="10" name="Text 8"/>
+          <p:cNvSpPr/>
+          <p:nvPr/>
+        </p:nvSpPr>
+        <p:spPr>
+          <a:xfrm>
+            <a:off x="457200" y="2788920"/>
+            <a:ext cx="1828800" cy="274320"/>
+          </a:xfrm>
+          <a:prstGeom prst="rect">
+            <a:avLst/>
+          </a:prstGeom>
+          <a:noFill/>
+          <a:ln/>
+        </p:spPr>
+        <p:txBody>
+          <a:bodyPr wrap="square" lIns="0" tIns="0" rIns="0" bIns="0" rtlCol="0" anchor="ctr"/>
+          <a:lstStyle/>
+          <a:p>
+            <a:pPr indent="0" marL="0">
+              <a:buNone/>
+            </a:pPr>
+            <a:r>
+              <a:rPr lang="en-US" sz="1200" b="1" dirty="0">
+                <a:solidFill>
+                  <a:srgbClr val="2C5F2D"/>
+                </a:solidFill>
+                <a:latin typeface="Cambria" pitchFamily="34" charset="0"/>
+                <a:ea typeface="Cambria" pitchFamily="34" charset="-122"/>
+                <a:cs typeface="Cambria" pitchFamily="34" charset="-120"/>
+              </a:rPr>
+              <a:t>Prior art</a:t>
+            </a:r>
+            <a:endParaRPr lang="en-US" sz="1200" dirty="0"/>
+          </a:p>
+        </p:txBody>
+      </p:sp>
+      <p:sp>
+        <p:nvSpPr>
+          <p:cNvPr id="11" name="Text 9"/>
+          <p:cNvSpPr/>
+          <p:nvPr/>
+        </p:nvSpPr>
+        <p:spPr>
+          <a:xfrm>
+            <a:off x="457200" y="2880360"/>
+            <a:ext cx="1920240" cy="292608"/>
+          </a:xfrm>
+          <a:prstGeom prst="rect">
+            <a:avLst/>
+          </a:prstGeom>
+          <a:noFill/>
+          <a:ln/>
+        </p:spPr>
+        <p:txBody>
+          <a:bodyPr wrap="square" lIns="0" tIns="0" rIns="0" bIns="0" rtlCol="0" anchor="ctr"/>
+          <a:lstStyle/>
+          <a:p>
+            <a:pPr indent="0" marL="0">
+              <a:buNone/>
+            </a:pPr>
+            <a:r>
+              <a:rPr lang="en-US" sz="1050" b="1" dirty="0">
                 <a:solidFill>
                   <a:srgbClr val="212121"/>
                 </a:solidFill>
@@ -6378,38 +6967,38 @@
                 <a:ea typeface="Calibri" pitchFamily="34" charset="-122"/>
                 <a:cs typeface="Calibri" pitchFamily="34" charset="-120"/>
               </a:rPr>
-              <a:t>Odisha agriculture department and OSDMA, per-block deployment</a:t>
-            </a:r>
-            <a:endParaRPr lang="en-US" sz="1150" dirty="0"/>
-          </a:p>
-        </p:txBody>
-      </p:sp>
-      <p:sp>
-        <p:nvSpPr>
-          <p:cNvPr id="10" name="Text 8"/>
-          <p:cNvSpPr/>
-          <p:nvPr/>
-        </p:nvSpPr>
-        <p:spPr>
-          <a:xfrm>
-            <a:off x="3489960" y="2971800"/>
-            <a:ext cx="2164080" cy="457200"/>
-          </a:xfrm>
-          <a:prstGeom prst="rect">
-            <a:avLst/>
-          </a:prstGeom>
-          <a:noFill/>
-          <a:ln/>
-        </p:spPr>
-        <p:txBody>
-          <a:bodyPr wrap="square" lIns="0" tIns="0" rIns="0" bIns="0" rtlCol="0" anchor="ctr"/>
-          <a:lstStyle/>
-          <a:p>
-            <a:pPr indent="0" marL="0">
-              <a:buNone/>
-            </a:pPr>
-            <a:r>
-              <a:rPr lang="en-US" sz="1000" i="1" dirty="0">
+              <a:t>Meghdoot (IMD)</a:t>
+            </a:r>
+            <a:endParaRPr lang="en-US" sz="1050" dirty="0"/>
+          </a:p>
+        </p:txBody>
+      </p:sp>
+      <p:sp>
+        <p:nvSpPr>
+          <p:cNvPr id="12" name="Text 10"/>
+          <p:cNvSpPr/>
+          <p:nvPr/>
+        </p:nvSpPr>
+        <p:spPr>
+          <a:xfrm>
+            <a:off x="2468880" y="2880360"/>
+            <a:ext cx="2926080" cy="292608"/>
+          </a:xfrm>
+          <a:prstGeom prst="rect">
+            <a:avLst/>
+          </a:prstGeom>
+          <a:noFill/>
+          <a:ln/>
+        </p:spPr>
+        <p:txBody>
+          <a:bodyPr wrap="square" lIns="0" tIns="0" rIns="0" bIns="0" rtlCol="0" anchor="ctr"/>
+          <a:lstStyle/>
+          <a:p>
+            <a:pPr indent="0" marL="0">
+              <a:buNone/>
+            </a:pPr>
+            <a:r>
+              <a:rPr lang="en-US" sz="1050" dirty="0">
                 <a:solidFill>
                   <a:srgbClr val="5A6B5A"/>
                 </a:solidFill>
@@ -6417,65 +7006,428 @@
                 <a:ea typeface="Calibri" pitchFamily="34" charset="-122"/>
                 <a:cs typeface="Calibri" pitchFamily="34" charset="-120"/>
               </a:rPr>
-              <a:t>reduces call volume, gives auditable outreach evidence</a:t>
-            </a:r>
-            <a:endParaRPr lang="en-US" sz="1000" dirty="0"/>
-          </a:p>
-        </p:txBody>
-      </p:sp>
-      <p:sp>
-        <p:nvSpPr>
-          <p:cNvPr id="11" name="Shape 9"/>
-          <p:cNvSpPr/>
-          <p:nvPr/>
-        </p:nvSpPr>
-        <p:spPr>
-          <a:xfrm>
-            <a:off x="6156960" y="1234440"/>
-            <a:ext cx="2529840" cy="2286000"/>
-          </a:xfrm>
-          <a:prstGeom prst="roundRect">
-            <a:avLst>
-              <a:gd name="adj" fmla="val 3200"/>
-            </a:avLst>
-          </a:prstGeom>
-          <a:solidFill>
-            <a:srgbClr val="F0F5EA"/>
-          </a:solidFill>
-          <a:ln w="12700">
-            <a:solidFill>
-              <a:srgbClr val="FFFFFF"/>
-            </a:solidFill>
-            <a:prstDash val="solid"/>
-          </a:ln>
-        </p:spPr>
-      </p:sp>
-      <p:sp>
-        <p:nvSpPr>
-          <p:cNvPr id="12" name="Text 10"/>
-          <p:cNvSpPr/>
-          <p:nvPr/>
-        </p:nvSpPr>
-        <p:spPr>
-          <a:xfrm>
-            <a:off x="6339840" y="1417320"/>
-            <a:ext cx="2164080" cy="365760"/>
-          </a:xfrm>
-          <a:prstGeom prst="rect">
-            <a:avLst/>
-          </a:prstGeom>
-          <a:noFill/>
-          <a:ln/>
-        </p:spPr>
-        <p:txBody>
-          <a:bodyPr wrap="square" lIns="0" tIns="0" rIns="0" bIns="0" rtlCol="0" anchor="ctr"/>
-          <a:lstStyle/>
-          <a:p>
-            <a:pPr indent="0" marL="0">
-              <a:buNone/>
-            </a:pPr>
-            <a:r>
-              <a:rPr lang="en-US" sz="1600" b="1" dirty="0">
+              <a:t>alerts and agromet advisories</a:t>
+            </a:r>
+            <a:endParaRPr lang="en-US" sz="1050" dirty="0"/>
+          </a:p>
+        </p:txBody>
+      </p:sp>
+      <p:sp>
+        <p:nvSpPr>
+          <p:cNvPr id="13" name="Text 11"/>
+          <p:cNvSpPr/>
+          <p:nvPr/>
+        </p:nvSpPr>
+        <p:spPr>
+          <a:xfrm>
+            <a:off x="5486400" y="2880360"/>
+            <a:ext cx="3200400" cy="292608"/>
+          </a:xfrm>
+          <a:prstGeom prst="rect">
+            <a:avLst/>
+          </a:prstGeom>
+          <a:noFill/>
+          <a:ln/>
+        </p:spPr>
+        <p:txBody>
+          <a:bodyPr wrap="square" lIns="0" tIns="0" rIns="0" bIns="0" rtlCol="0" anchor="ctr"/>
+          <a:lstStyle/>
+          <a:p>
+            <a:pPr indent="0" marL="0">
+              <a:buNone/>
+            </a:pPr>
+            <a:r>
+              <a:rPr lang="en-US" sz="1050" dirty="0">
+                <a:solidFill>
+                  <a:srgbClr val="5A6B5A"/>
+                </a:solidFill>
+                <a:latin typeface="Calibri" pitchFamily="34" charset="0"/>
+                <a:ea typeface="Calibri" pitchFamily="34" charset="-122"/>
+                <a:cs typeface="Calibri" pitchFamily="34" charset="-120"/>
+              </a:rPr>
+              <a:t>no farm profile, no staged action, no claims path</a:t>
+            </a:r>
+            <a:endParaRPr lang="en-US" sz="1050" dirty="0"/>
+          </a:p>
+        </p:txBody>
+      </p:sp>
+      <p:sp>
+        <p:nvSpPr>
+          <p:cNvPr id="14" name="Text 12"/>
+          <p:cNvSpPr/>
+          <p:nvPr/>
+        </p:nvSpPr>
+        <p:spPr>
+          <a:xfrm>
+            <a:off x="457200" y="3246120"/>
+            <a:ext cx="1920240" cy="292608"/>
+          </a:xfrm>
+          <a:prstGeom prst="rect">
+            <a:avLst/>
+          </a:prstGeom>
+          <a:noFill/>
+          <a:ln/>
+        </p:spPr>
+        <p:txBody>
+          <a:bodyPr wrap="square" lIns="0" tIns="0" rIns="0" bIns="0" rtlCol="0" anchor="ctr"/>
+          <a:lstStyle/>
+          <a:p>
+            <a:pPr indent="0" marL="0">
+              <a:buNone/>
+            </a:pPr>
+            <a:r>
+              <a:rPr lang="en-US" sz="1050" b="1" dirty="0">
+                <a:solidFill>
+                  <a:srgbClr val="212121"/>
+                </a:solidFill>
+                <a:latin typeface="Calibri" pitchFamily="34" charset="0"/>
+                <a:ea typeface="Calibri" pitchFamily="34" charset="-122"/>
+                <a:cs typeface="Calibri" pitchFamily="34" charset="-120"/>
+              </a:rPr>
+              <a:t>Fasal, DeHaat</a:t>
+            </a:r>
+            <a:endParaRPr lang="en-US" sz="1050" dirty="0"/>
+          </a:p>
+        </p:txBody>
+      </p:sp>
+      <p:sp>
+        <p:nvSpPr>
+          <p:cNvPr id="15" name="Text 13"/>
+          <p:cNvSpPr/>
+          <p:nvPr/>
+        </p:nvSpPr>
+        <p:spPr>
+          <a:xfrm>
+            <a:off x="2468880" y="3246120"/>
+            <a:ext cx="2926080" cy="292608"/>
+          </a:xfrm>
+          <a:prstGeom prst="rect">
+            <a:avLst/>
+          </a:prstGeom>
+          <a:noFill/>
+          <a:ln/>
+        </p:spPr>
+        <p:txBody>
+          <a:bodyPr wrap="square" lIns="0" tIns="0" rIns="0" bIns="0" rtlCol="0" anchor="ctr"/>
+          <a:lstStyle/>
+          <a:p>
+            <a:pPr indent="0" marL="0">
+              <a:buNone/>
+            </a:pPr>
+            <a:r>
+              <a:rPr lang="en-US" sz="1050" dirty="0">
+                <a:solidFill>
+                  <a:srgbClr val="5A6B5A"/>
+                </a:solidFill>
+                <a:latin typeface="Calibri" pitchFamily="34" charset="0"/>
+                <a:ea typeface="Calibri" pitchFamily="34" charset="-122"/>
+                <a:cs typeface="Calibri" pitchFamily="34" charset="-120"/>
+              </a:rPr>
+              <a:t>marketplace and credit rails</a:t>
+            </a:r>
+            <a:endParaRPr lang="en-US" sz="1050" dirty="0"/>
+          </a:p>
+        </p:txBody>
+      </p:sp>
+      <p:sp>
+        <p:nvSpPr>
+          <p:cNvPr id="16" name="Text 14"/>
+          <p:cNvSpPr/>
+          <p:nvPr/>
+        </p:nvSpPr>
+        <p:spPr>
+          <a:xfrm>
+            <a:off x="5486400" y="3246120"/>
+            <a:ext cx="3200400" cy="292608"/>
+          </a:xfrm>
+          <a:prstGeom prst="rect">
+            <a:avLst/>
+          </a:prstGeom>
+          <a:noFill/>
+          <a:ln/>
+        </p:spPr>
+        <p:txBody>
+          <a:bodyPr wrap="square" lIns="0" tIns="0" rIns="0" bIns="0" rtlCol="0" anchor="ctr"/>
+          <a:lstStyle/>
+          <a:p>
+            <a:pPr indent="0" marL="0">
+              <a:buNone/>
+            </a:pPr>
+            <a:r>
+              <a:rPr lang="en-US" sz="1050" dirty="0">
+                <a:solidFill>
+                  <a:srgbClr val="5A6B5A"/>
+                </a:solidFill>
+                <a:latin typeface="Calibri" pitchFamily="34" charset="0"/>
+                <a:ea typeface="Calibri" pitchFamily="34" charset="-122"/>
+                <a:cs typeface="Calibri" pitchFamily="34" charset="-120"/>
+              </a:rPr>
+              <a:t>advisory is content, not a governed decision</a:t>
+            </a:r>
+            <a:endParaRPr lang="en-US" sz="1050" dirty="0"/>
+          </a:p>
+        </p:txBody>
+      </p:sp>
+      <p:sp>
+        <p:nvSpPr>
+          <p:cNvPr id="17" name="Text 15"/>
+          <p:cNvSpPr/>
+          <p:nvPr/>
+        </p:nvSpPr>
+        <p:spPr>
+          <a:xfrm>
+            <a:off x="457200" y="3611880"/>
+            <a:ext cx="1920240" cy="292608"/>
+          </a:xfrm>
+          <a:prstGeom prst="rect">
+            <a:avLst/>
+          </a:prstGeom>
+          <a:noFill/>
+          <a:ln/>
+        </p:spPr>
+        <p:txBody>
+          <a:bodyPr wrap="square" lIns="0" tIns="0" rIns="0" bIns="0" rtlCol="0" anchor="ctr"/>
+          <a:lstStyle/>
+          <a:p>
+            <a:pPr indent="0" marL="0">
+              <a:buNone/>
+            </a:pPr>
+            <a:r>
+              <a:rPr lang="en-US" sz="1050" b="1" dirty="0">
+                <a:solidFill>
+                  <a:srgbClr val="212121"/>
+                </a:solidFill>
+                <a:latin typeface="Calibri" pitchFamily="34" charset="0"/>
+                <a:ea typeface="Calibri" pitchFamily="34" charset="-122"/>
+                <a:cs typeface="Calibri" pitchFamily="34" charset="-120"/>
+              </a:rPr>
+              <a:t>Bangladesh CPP</a:t>
+            </a:r>
+            <a:endParaRPr lang="en-US" sz="1050" dirty="0"/>
+          </a:p>
+        </p:txBody>
+      </p:sp>
+      <p:sp>
+        <p:nvSpPr>
+          <p:cNvPr id="18" name="Text 16"/>
+          <p:cNvSpPr/>
+          <p:nvPr/>
+        </p:nvSpPr>
+        <p:spPr>
+          <a:xfrm>
+            <a:off x="2468880" y="3611880"/>
+            <a:ext cx="2926080" cy="292608"/>
+          </a:xfrm>
+          <a:prstGeom prst="rect">
+            <a:avLst/>
+          </a:prstGeom>
+          <a:noFill/>
+          <a:ln/>
+        </p:spPr>
+        <p:txBody>
+          <a:bodyPr wrap="square" lIns="0" tIns="0" rIns="0" bIns="0" rtlCol="0" anchor="ctr"/>
+          <a:lstStyle/>
+          <a:p>
+            <a:pPr indent="0" marL="0">
+              <a:buNone/>
+            </a:pPr>
+            <a:r>
+              <a:rPr lang="en-US" sz="1050" dirty="0">
+                <a:solidFill>
+                  <a:srgbClr val="5A6B5A"/>
+                </a:solidFill>
+                <a:latin typeface="Calibri" pitchFamily="34" charset="0"/>
+                <a:ea typeface="Calibri" pitchFamily="34" charset="-122"/>
+                <a:cs typeface="Calibri" pitchFamily="34" charset="-120"/>
+              </a:rPr>
+              <a:t>human volunteer warning chain</a:t>
+            </a:r>
+            <a:endParaRPr lang="en-US" sz="1050" dirty="0"/>
+          </a:p>
+        </p:txBody>
+      </p:sp>
+      <p:sp>
+        <p:nvSpPr>
+          <p:cNvPr id="19" name="Text 17"/>
+          <p:cNvSpPr/>
+          <p:nvPr/>
+        </p:nvSpPr>
+        <p:spPr>
+          <a:xfrm>
+            <a:off x="5486400" y="3611880"/>
+            <a:ext cx="3200400" cy="292608"/>
+          </a:xfrm>
+          <a:prstGeom prst="rect">
+            <a:avLst/>
+          </a:prstGeom>
+          <a:noFill/>
+          <a:ln/>
+        </p:spPr>
+        <p:txBody>
+          <a:bodyPr wrap="square" lIns="0" tIns="0" rIns="0" bIns="0" rtlCol="0" anchor="ctr"/>
+          <a:lstStyle/>
+          <a:p>
+            <a:pPr indent="0" marL="0">
+              <a:buNone/>
+            </a:pPr>
+            <a:r>
+              <a:rPr lang="en-US" sz="1050" dirty="0">
+                <a:solidFill>
+                  <a:srgbClr val="5A6B5A"/>
+                </a:solidFill>
+                <a:latin typeface="Calibri" pitchFamily="34" charset="0"/>
+                <a:ea typeface="Calibri" pitchFamily="34" charset="-122"/>
+                <a:cs typeface="Calibri" pitchFamily="34" charset="-120"/>
+              </a:rPr>
+              <a:t>no recovery plan, no claim evidence</a:t>
+            </a:r>
+            <a:endParaRPr lang="en-US" sz="1050" dirty="0"/>
+          </a:p>
+        </p:txBody>
+      </p:sp>
+      <p:sp>
+        <p:nvSpPr>
+          <p:cNvPr id="20" name="Text 18"/>
+          <p:cNvSpPr/>
+          <p:nvPr/>
+        </p:nvSpPr>
+        <p:spPr>
+          <a:xfrm>
+            <a:off x="457200" y="3977640"/>
+            <a:ext cx="1920240" cy="292608"/>
+          </a:xfrm>
+          <a:prstGeom prst="rect">
+            <a:avLst/>
+          </a:prstGeom>
+          <a:noFill/>
+          <a:ln/>
+        </p:spPr>
+        <p:txBody>
+          <a:bodyPr wrap="square" lIns="0" tIns="0" rIns="0" bIns="0" rtlCol="0" anchor="ctr"/>
+          <a:lstStyle/>
+          <a:p>
+            <a:pPr indent="0" marL="0">
+              <a:buNone/>
+            </a:pPr>
+            <a:r>
+              <a:rPr lang="en-US" sz="1050" b="1" dirty="0">
+                <a:solidFill>
+                  <a:srgbClr val="212121"/>
+                </a:solidFill>
+                <a:latin typeface="Calibri" pitchFamily="34" charset="0"/>
+                <a:ea typeface="Calibri" pitchFamily="34" charset="-122"/>
+                <a:cs typeface="Calibri" pitchFamily="34" charset="-120"/>
+              </a:rPr>
+              <a:t>WFP anticipatory cash</a:t>
+            </a:r>
+            <a:endParaRPr lang="en-US" sz="1050" dirty="0"/>
+          </a:p>
+        </p:txBody>
+      </p:sp>
+      <p:sp>
+        <p:nvSpPr>
+          <p:cNvPr id="21" name="Text 19"/>
+          <p:cNvSpPr/>
+          <p:nvPr/>
+        </p:nvSpPr>
+        <p:spPr>
+          <a:xfrm>
+            <a:off x="2468880" y="3977640"/>
+            <a:ext cx="2926080" cy="292608"/>
+          </a:xfrm>
+          <a:prstGeom prst="rect">
+            <a:avLst/>
+          </a:prstGeom>
+          <a:noFill/>
+          <a:ln/>
+        </p:spPr>
+        <p:txBody>
+          <a:bodyPr wrap="square" lIns="0" tIns="0" rIns="0" bIns="0" rtlCol="0" anchor="ctr"/>
+          <a:lstStyle/>
+          <a:p>
+            <a:pPr indent="0" marL="0">
+              <a:buNone/>
+            </a:pPr>
+            <a:r>
+              <a:rPr lang="en-US" sz="1050" dirty="0">
+                <a:solidFill>
+                  <a:srgbClr val="5A6B5A"/>
+                </a:solidFill>
+                <a:latin typeface="Calibri" pitchFamily="34" charset="0"/>
+                <a:ea typeface="Calibri" pitchFamily="34" charset="-122"/>
+                <a:cs typeface="Calibri" pitchFamily="34" charset="-120"/>
+              </a:rPr>
+              <a:t>threshold-triggered cash transfers</a:t>
+            </a:r>
+            <a:endParaRPr lang="en-US" sz="1050" dirty="0"/>
+          </a:p>
+        </p:txBody>
+      </p:sp>
+      <p:sp>
+        <p:nvSpPr>
+          <p:cNvPr id="22" name="Text 20"/>
+          <p:cNvSpPr/>
+          <p:nvPr/>
+        </p:nvSpPr>
+        <p:spPr>
+          <a:xfrm>
+            <a:off x="5486400" y="3977640"/>
+            <a:ext cx="3200400" cy="292608"/>
+          </a:xfrm>
+          <a:prstGeom prst="rect">
+            <a:avLst/>
+          </a:prstGeom>
+          <a:noFill/>
+          <a:ln/>
+        </p:spPr>
+        <p:txBody>
+          <a:bodyPr wrap="square" lIns="0" tIns="0" rIns="0" bIns="0" rtlCol="0" anchor="ctr"/>
+          <a:lstStyle/>
+          <a:p>
+            <a:pPr indent="0" marL="0">
+              <a:buNone/>
+            </a:pPr>
+            <a:r>
+              <a:rPr lang="en-US" sz="1050" dirty="0">
+                <a:solidFill>
+                  <a:srgbClr val="5A6B5A"/>
+                </a:solidFill>
+                <a:latin typeface="Calibri" pitchFamily="34" charset="0"/>
+                <a:ea typeface="Calibri" pitchFamily="34" charset="-122"/>
+                <a:cs typeface="Calibri" pitchFamily="34" charset="-120"/>
+              </a:rPr>
+              <a:t>cash, not farm action; no crop-stage logic</a:t>
+            </a:r>
+            <a:endParaRPr lang="en-US" sz="1050" dirty="0"/>
+          </a:p>
+        </p:txBody>
+      </p:sp>
+      <p:sp>
+        <p:nvSpPr>
+          <p:cNvPr id="23" name="Text 21"/>
+          <p:cNvSpPr/>
+          <p:nvPr/>
+        </p:nvSpPr>
+        <p:spPr>
+          <a:xfrm>
+            <a:off x="457200" y="4407408"/>
+            <a:ext cx="8229600" cy="365760"/>
+          </a:xfrm>
+          <a:prstGeom prst="rect">
+            <a:avLst/>
+          </a:prstGeom>
+          <a:noFill/>
+          <a:ln/>
+        </p:spPr>
+        <p:txBody>
+          <a:bodyPr wrap="square" lIns="0" tIns="0" rIns="0" bIns="0" rtlCol="0" anchor="ctr"/>
+          <a:lstStyle/>
+          <a:p>
+            <a:pPr indent="0" marL="0">
+              <a:buNone/>
+            </a:pPr>
+            <a:r>
+              <a:rPr lang="en-US" sz="1500" b="1" dirty="0">
                 <a:solidFill>
                   <a:srgbClr val="2C5F2D"/>
                 </a:solidFill>
@@ -6483,163 +7435,46 @@
                 <a:ea typeface="Cambria" pitchFamily="34" charset="-122"/>
                 <a:cs typeface="Cambria" pitchFamily="34" charset="-120"/>
               </a:rPr>
-              <a:t>Claims rail</a:t>
-            </a:r>
-            <a:endParaRPr lang="en-US" sz="1600" dirty="0"/>
-          </a:p>
-        </p:txBody>
-      </p:sp>
-      <p:sp>
-        <p:nvSpPr>
-          <p:cNvPr id="13" name="Text 11"/>
-          <p:cNvSpPr/>
-          <p:nvPr/>
-        </p:nvSpPr>
-        <p:spPr>
-          <a:xfrm>
-            <a:off x="6339840" y="1920240"/>
-            <a:ext cx="2164080" cy="914400"/>
-          </a:xfrm>
-          <a:prstGeom prst="rect">
-            <a:avLst/>
-          </a:prstGeom>
-          <a:noFill/>
-          <a:ln/>
-        </p:spPr>
-        <p:txBody>
-          <a:bodyPr wrap="square" lIns="0" tIns="0" rIns="0" bIns="0" rtlCol="0" anchor="ctr"/>
-          <a:lstStyle/>
-          <a:p>
-            <a:pPr indent="0" marL="0">
-              <a:buNone/>
-            </a:pPr>
-            <a:r>
-              <a:rPr lang="en-US" sz="1150" dirty="0">
-                <a:solidFill>
-                  <a:srgbClr val="212121"/>
+              <a:t>Warnings are infrastructure. Decisions are the product.</a:t>
+            </a:r>
+            <a:endParaRPr lang="en-US" sz="1500" dirty="0"/>
+          </a:p>
+        </p:txBody>
+      </p:sp>
+      <p:sp>
+        <p:nvSpPr>
+          <p:cNvPr id="24" name="Text 22"/>
+          <p:cNvSpPr/>
+          <p:nvPr/>
+        </p:nvSpPr>
+        <p:spPr>
+          <a:xfrm>
+            <a:off x="457200" y="4864608"/>
+            <a:ext cx="8229600" cy="274320"/>
+          </a:xfrm>
+          <a:prstGeom prst="rect">
+            <a:avLst/>
+          </a:prstGeom>
+          <a:noFill/>
+          <a:ln/>
+        </p:spPr>
+        <p:txBody>
+          <a:bodyPr wrap="square" lIns="0" tIns="0" rIns="0" bIns="0" rtlCol="0" anchor="ctr"/>
+          <a:lstStyle/>
+          <a:p>
+            <a:pPr indent="0" marL="0">
+              <a:buNone/>
+            </a:pPr>
+            <a:r>
+              <a:rPr lang="en-US" sz="900" dirty="0">
+                <a:solidFill>
+                  <a:srgbClr val="5A6B5A"/>
                 </a:solidFill>
                 <a:latin typeface="Calibri" pitchFamily="34" charset="0"/>
                 <a:ea typeface="Calibri" pitchFamily="34" charset="-122"/>
                 <a:cs typeface="Calibri" pitchFamily="34" charset="-120"/>
               </a:rPr>
-              <a:t>PMFBY insurers and aggregators pay per evidence packet</a:t>
-            </a:r>
-            <a:endParaRPr lang="en-US" sz="1150" dirty="0"/>
-          </a:p>
-        </p:txBody>
-      </p:sp>
-      <p:sp>
-        <p:nvSpPr>
-          <p:cNvPr id="14" name="Text 12"/>
-          <p:cNvSpPr/>
-          <p:nvPr/>
-        </p:nvSpPr>
-        <p:spPr>
-          <a:xfrm>
-            <a:off x="6339840" y="2971800"/>
-            <a:ext cx="2164080" cy="457200"/>
-          </a:xfrm>
-          <a:prstGeom prst="rect">
-            <a:avLst/>
-          </a:prstGeom>
-          <a:noFill/>
-          <a:ln/>
-        </p:spPr>
-        <p:txBody>
-          <a:bodyPr wrap="square" lIns="0" tIns="0" rIns="0" bIns="0" rtlCol="0" anchor="ctr"/>
-          <a:lstStyle/>
-          <a:p>
-            <a:pPr indent="0" marL="0">
-              <a:buNone/>
-            </a:pPr>
-            <a:r>
-              <a:rPr lang="en-US" sz="1000" i="1" dirty="0">
-                <a:solidFill>
-                  <a:srgbClr val="5A6B5A"/>
-                </a:solidFill>
-                <a:latin typeface="Calibri" pitchFamily="34" charset="0"/>
-                <a:ea typeface="Calibri" pitchFamily="34" charset="-122"/>
-                <a:cs typeface="Calibri" pitchFamily="34" charset="-120"/>
-              </a:rPr>
-              <a:t>verified observation converts to claim, both sides win</a:t>
-            </a:r>
-            <a:endParaRPr lang="en-US" sz="1000" dirty="0"/>
-          </a:p>
-        </p:txBody>
-      </p:sp>
-      <p:sp>
-        <p:nvSpPr>
-          <p:cNvPr id="15" name="Text 13"/>
-          <p:cNvSpPr/>
-          <p:nvPr/>
-        </p:nvSpPr>
-        <p:spPr>
-          <a:xfrm>
-            <a:off x="457200" y="3977640"/>
-            <a:ext cx="8229600" cy="411480"/>
-          </a:xfrm>
-          <a:prstGeom prst="rect">
-            <a:avLst/>
-          </a:prstGeom>
-          <a:noFill/>
-          <a:ln/>
-        </p:spPr>
-        <p:txBody>
-          <a:bodyPr wrap="square" lIns="0" tIns="0" rIns="0" bIns="0" rtlCol="0" anchor="ctr"/>
-          <a:lstStyle/>
-          <a:p>
-            <a:pPr indent="0" marL="0">
-              <a:buNone/>
-            </a:pPr>
-            <a:r>
-              <a:rPr lang="en-US" sz="1300" b="1" dirty="0">
-                <a:solidFill>
-                  <a:srgbClr val="2C5F2D"/>
-                </a:solidFill>
-                <a:latin typeface="Cambria" pitchFamily="34" charset="0"/>
-                <a:ea typeface="Cambria" pitchFamily="34" charset="-122"/>
-                <a:cs typeface="Cambria" pitchFamily="34" charset="-120"/>
-              </a:rPr>
-              <a:t>Seed revenue line for Round 1: one FPO, one season, measured renewal. No consumer subscription fantasy.</a:t>
-            </a:r>
-            <a:endParaRPr lang="en-US" sz="1300" dirty="0"/>
-          </a:p>
-        </p:txBody>
-      </p:sp>
-      <p:sp>
-        <p:nvSpPr>
-          <p:cNvPr id="16" name="Text 14"/>
-          <p:cNvSpPr/>
-          <p:nvPr/>
-        </p:nvSpPr>
-        <p:spPr>
-          <a:xfrm>
-            <a:off x="457200" y="4759452"/>
-            <a:ext cx="8229600" cy="274320"/>
-          </a:xfrm>
-          <a:prstGeom prst="rect">
-            <a:avLst/>
-          </a:prstGeom>
-          <a:noFill/>
-          <a:ln/>
-        </p:spPr>
-        <p:txBody>
-          <a:bodyPr wrap="square" lIns="0" tIns="0" rIns="0" bIns="0" rtlCol="0" anchor="ctr"/>
-          <a:lstStyle/>
-          <a:p>
-            <a:pPr indent="0" marL="0">
-              <a:buNone/>
-            </a:pPr>
-            <a:r>
-              <a:rPr lang="en-US" sz="900" dirty="0">
-                <a:solidFill>
-                  <a:srgbClr val="5A6B5A"/>
-                </a:solidFill>
-                <a:latin typeface="Calibri" pitchFamily="34" charset="0"/>
-                <a:ea typeface="Calibri" pitchFamily="34" charset="-122"/>
-                <a:cs typeface="Calibri" pitchFamily="34" charset="-120"/>
-              </a:rPr>
-              <a:t>Mine verdict: the real buyer is institutional, and the real distribution is extension workers, KCC, FPOs, dealers, and panchayat actors. Consumer subscriptions and network effects are not evidenced.</a:t>
+              <a:t>Prior art from the statement-faithful research wave: channel evidence in research/raw/v2/cnc-channel-ps07-ultra8x-v2.content.md.</a:t>
             </a:r>
             <a:endParaRPr lang="en-US" sz="900" dirty="0"/>
           </a:p>
@@ -6710,7 +7545,7 @@
                 <a:ea typeface="Cambria" pitchFamily="34" charset="-122"/>
                 <a:cs typeface="Cambria" pitchFamily="34" charset="-120"/>
               </a:rPr>
-              <a:t>One rail, one pilot, one quarter</a:t>
+              <a:t>Three buyers, one verified loop</a:t>
             </a:r>
             <a:endParaRPr lang="en-US" sz="2800" dirty="0"/>
           </a:p>
@@ -6724,12 +7559,12 @@
         </p:nvSpPr>
         <p:spPr>
           <a:xfrm>
-            <a:off x="457200" y="1051560"/>
-            <a:ext cx="3977640" cy="2103120"/>
+            <a:off x="457200" y="1234440"/>
+            <a:ext cx="2529840" cy="2286000"/>
           </a:xfrm>
           <a:prstGeom prst="roundRect">
             <a:avLst>
-              <a:gd name="adj" fmla="val 3478"/>
+              <a:gd name="adj" fmla="val 3200"/>
             </a:avLst>
           </a:prstGeom>
           <a:solidFill>
@@ -6751,24 +7586,24 @@
         </p:nvSpPr>
         <p:spPr>
           <a:xfrm>
-            <a:off x="640080" y="1188720"/>
-            <a:ext cx="3657600" cy="320040"/>
-          </a:xfrm>
-          <a:prstGeom prst="rect">
-            <a:avLst/>
-          </a:prstGeom>
-          <a:noFill/>
-          <a:ln/>
-        </p:spPr>
-        <p:txBody>
-          <a:bodyPr wrap="square" lIns="0" tIns="0" rIns="0" bIns="0" rtlCol="0" anchor="ctr"/>
-          <a:lstStyle/>
-          <a:p>
-            <a:pPr indent="0" marL="0">
-              <a:buNone/>
-            </a:pPr>
-            <a:r>
-              <a:rPr lang="en-US" sz="1300" b="1" dirty="0">
+            <a:off x="640080" y="1417320"/>
+            <a:ext cx="2164080" cy="365760"/>
+          </a:xfrm>
+          <a:prstGeom prst="rect">
+            <a:avLst/>
+          </a:prstGeom>
+          <a:noFill/>
+          <a:ln/>
+        </p:spPr>
+        <p:txBody>
+          <a:bodyPr wrap="square" lIns="0" tIns="0" rIns="0" bIns="0" rtlCol="0" anchor="ctr"/>
+          <a:lstStyle/>
+          <a:p>
+            <a:pPr indent="0" marL="0">
+              <a:buNone/>
+            </a:pPr>
+            <a:r>
+              <a:rPr lang="en-US" sz="1600" b="1" dirty="0">
                 <a:solidFill>
                   <a:srgbClr val="2C5F2D"/>
                 </a:solidFill>
@@ -6776,9 +7611,9 @@
                 <a:ea typeface="Cambria" pitchFamily="34" charset="-122"/>
                 <a:cs typeface="Cambria" pitchFamily="34" charset="-120"/>
               </a:rPr>
-              <a:t>The rail exists</a:t>
-            </a:r>
-            <a:endParaRPr lang="en-US" sz="1300" dirty="0"/>
+              <a:t>FPO + extension</a:t>
+            </a:r>
+            <a:endParaRPr lang="en-US" sz="1600" dirty="0"/>
           </a:p>
         </p:txBody>
       </p:sp>
@@ -6790,34 +7625,34 @@
         </p:nvSpPr>
         <p:spPr>
           <a:xfrm>
-            <a:off x="640080" y="1554480"/>
-            <a:ext cx="3657600" cy="548640"/>
-          </a:xfrm>
-          <a:prstGeom prst="rect">
-            <a:avLst/>
-          </a:prstGeom>
-          <a:noFill/>
-          <a:ln/>
-        </p:spPr>
-        <p:txBody>
-          <a:bodyPr wrap="square" lIns="0" tIns="0" rIns="0" bIns="0" rtlCol="0" anchor="ctr"/>
-          <a:lstStyle/>
-          <a:p>
-            <a:pPr indent="0" marL="0">
-              <a:buNone/>
-            </a:pPr>
-            <a:r>
-              <a:rPr lang="en-US" sz="1500" b="1" dirty="0">
+            <a:off x="640080" y="1920240"/>
+            <a:ext cx="2164080" cy="914400"/>
+          </a:xfrm>
+          <a:prstGeom prst="rect">
+            <a:avLst/>
+          </a:prstGeom>
+          <a:noFill/>
+          <a:ln/>
+        </p:spPr>
+        <p:txBody>
+          <a:bodyPr wrap="square" lIns="0" tIns="0" rIns="0" bIns="0" rtlCol="0" anchor="ctr"/>
+          <a:lstStyle/>
+          <a:p>
+            <a:pPr indent="0" marL="0">
+              <a:buNone/>
+            </a:pPr>
+            <a:r>
+              <a:rPr lang="en-US" sz="1150" dirty="0">
                 <a:solidFill>
                   <a:srgbClr val="212121"/>
                 </a:solidFill>
-                <a:latin typeface="Cambria" pitchFamily="34" charset="0"/>
-                <a:ea typeface="Cambria" pitchFamily="34" charset="-122"/>
-                <a:cs typeface="Cambria" pitchFamily="34" charset="-120"/>
-              </a:rPr>
-              <a:t>78.4 crore PMFBY applications, Rs 1.83 lakh crore program</a:t>
-            </a:r>
-            <a:endParaRPr lang="en-US" sz="1500" dirty="0"/>
+                <a:latin typeface="Calibri" pitchFamily="34" charset="0"/>
+                <a:ea typeface="Calibri" pitchFamily="34" charset="-122"/>
+                <a:cs typeface="Calibri" pitchFamily="34" charset="-120"/>
+              </a:rPr>
+              <a:t>seasonal advisory subscriptions per farmer via FPOs and KVK extension workers</a:t>
+            </a:r>
+            <a:endParaRPr lang="en-US" sz="1150" dirty="0"/>
           </a:p>
         </p:txBody>
       </p:sp>
@@ -6829,90 +7664,51 @@
         </p:nvSpPr>
         <p:spPr>
           <a:xfrm>
-            <a:off x="640080" y="2194560"/>
-            <a:ext cx="3657600" cy="548640"/>
-          </a:xfrm>
-          <a:prstGeom prst="rect">
-            <a:avLst/>
-          </a:prstGeom>
-          <a:noFill/>
-          <a:ln/>
-        </p:spPr>
-        <p:txBody>
-          <a:bodyPr wrap="square" lIns="0" tIns="0" rIns="0" bIns="0" rtlCol="0" anchor="ctr"/>
-          <a:lstStyle/>
-          <a:p>
-            <a:pPr indent="0" marL="0">
-              <a:buNone/>
-            </a:pPr>
-            <a:r>
-              <a:rPr lang="en-US" sz="1250" dirty="0">
-                <a:solidFill>
-                  <a:srgbClr val="212121"/>
-                </a:solidFill>
-                <a:latin typeface="Cambria" pitchFamily="34" charset="0"/>
-                <a:ea typeface="Cambria" pitchFamily="34" charset="-122"/>
-                <a:cs typeface="Cambria" pitchFamily="34" charset="-120"/>
-              </a:rPr>
-              <a:t>Digital Agriculture Mission, Rs 2,817 crore, funds agri-digital public infrastructure</a:t>
-            </a:r>
-            <a:endParaRPr lang="en-US" sz="1250" dirty="0"/>
-          </a:p>
-        </p:txBody>
-      </p:sp>
-      <p:sp>
-        <p:nvSpPr>
-          <p:cNvPr id="7" name="Text 5"/>
-          <p:cNvSpPr/>
-          <p:nvPr/>
-        </p:nvSpPr>
-        <p:spPr>
-          <a:xfrm>
-            <a:off x="640080" y="2788920"/>
-            <a:ext cx="3657600" cy="548640"/>
-          </a:xfrm>
-          <a:prstGeom prst="rect">
-            <a:avLst/>
-          </a:prstGeom>
-          <a:noFill/>
-          <a:ln/>
-        </p:spPr>
-        <p:txBody>
-          <a:bodyPr wrap="square" lIns="0" tIns="0" rIns="0" bIns="0" rtlCol="0" anchor="ctr"/>
-          <a:lstStyle/>
-          <a:p>
-            <a:pPr indent="0" marL="0">
-              <a:buNone/>
-            </a:pPr>
-            <a:r>
-              <a:rPr lang="en-US" sz="1250" dirty="0">
-                <a:solidFill>
-                  <a:srgbClr val="212121"/>
-                </a:solidFill>
-                <a:latin typeface="Cambria" pitchFamily="34" charset="0"/>
-                <a:ea typeface="Cambria" pitchFamily="34" charset="-122"/>
-                <a:cs typeface="Cambria" pitchFamily="34" charset="-120"/>
-              </a:rPr>
-              <a:t>Odisha: cyclone-facing coast, paddy and saline zones, Dana and Yaas damage on record</a:t>
-            </a:r>
-            <a:endParaRPr lang="en-US" sz="1250" dirty="0"/>
-          </a:p>
-        </p:txBody>
-      </p:sp>
-      <p:sp>
-        <p:nvSpPr>
-          <p:cNvPr id="8" name="Shape 6"/>
-          <p:cNvSpPr/>
-          <p:nvPr/>
-        </p:nvSpPr>
-        <p:spPr>
-          <a:xfrm>
-            <a:off x="4709160" y="1051560"/>
-            <a:ext cx="3977640" cy="2103120"/>
+            <a:off x="640080" y="2971800"/>
+            <a:ext cx="2164080" cy="457200"/>
+          </a:xfrm>
+          <a:prstGeom prst="rect">
+            <a:avLst/>
+          </a:prstGeom>
+          <a:noFill/>
+          <a:ln/>
+        </p:spPr>
+        <p:txBody>
+          <a:bodyPr wrap="square" lIns="0" tIns="0" rIns="0" bIns="0" rtlCol="0" anchor="ctr"/>
+          <a:lstStyle/>
+          <a:p>
+            <a:pPr indent="0" marL="0">
+              <a:buNone/>
+            </a:pPr>
+            <a:r>
+              <a:rPr lang="en-US" sz="1000" i="1" dirty="0">
+                <a:solidFill>
+                  <a:srgbClr val="5A6B5A"/>
+                </a:solidFill>
+                <a:latin typeface="Calibri" pitchFamily="34" charset="0"/>
+                <a:ea typeface="Calibri" pitchFamily="34" charset="-122"/>
+                <a:cs typeface="Calibri" pitchFamily="34" charset="-120"/>
+              </a:rPr>
+              <a:t>pay per verified advisory delivered and acted on</a:t>
+            </a:r>
+            <a:endParaRPr lang="en-US" sz="1000" dirty="0"/>
+          </a:p>
+        </p:txBody>
+      </p:sp>
+      <p:sp>
+        <p:nvSpPr>
+          <p:cNvPr id="7" name="Shape 5"/>
+          <p:cNvSpPr/>
+          <p:nvPr/>
+        </p:nvSpPr>
+        <p:spPr>
+          <a:xfrm>
+            <a:off x="3307080" y="1234440"/>
+            <a:ext cx="2529840" cy="2286000"/>
           </a:xfrm>
           <a:prstGeom prst="roundRect">
             <a:avLst>
-              <a:gd name="adj" fmla="val 3478"/>
+              <a:gd name="adj" fmla="val 3200"/>
             </a:avLst>
           </a:prstGeom>
           <a:solidFill>
@@ -6928,30 +7724,30 @@
       </p:sp>
       <p:sp>
         <p:nvSpPr>
-          <p:cNvPr id="9" name="Text 7"/>
-          <p:cNvSpPr/>
-          <p:nvPr/>
-        </p:nvSpPr>
-        <p:spPr>
-          <a:xfrm>
-            <a:off x="4892040" y="1188720"/>
-            <a:ext cx="3657600" cy="320040"/>
-          </a:xfrm>
-          <a:prstGeom prst="rect">
-            <a:avLst/>
-          </a:prstGeom>
-          <a:noFill/>
-          <a:ln/>
-        </p:spPr>
-        <p:txBody>
-          <a:bodyPr wrap="square" lIns="0" tIns="0" rIns="0" bIns="0" rtlCol="0" anchor="ctr"/>
-          <a:lstStyle/>
-          <a:p>
-            <a:pPr indent="0" marL="0">
-              <a:buNone/>
-            </a:pPr>
-            <a:r>
-              <a:rPr lang="en-US" sz="1300" b="1" dirty="0">
+          <p:cNvPr id="8" name="Text 6"/>
+          <p:cNvSpPr/>
+          <p:nvPr/>
+        </p:nvSpPr>
+        <p:spPr>
+          <a:xfrm>
+            <a:off x="3489960" y="1417320"/>
+            <a:ext cx="2164080" cy="365760"/>
+          </a:xfrm>
+          <a:prstGeom prst="rect">
+            <a:avLst/>
+          </a:prstGeom>
+          <a:noFill/>
+          <a:ln/>
+        </p:spPr>
+        <p:txBody>
+          <a:bodyPr wrap="square" lIns="0" tIns="0" rIns="0" bIns="0" rtlCol="0" anchor="ctr"/>
+          <a:lstStyle/>
+          <a:p>
+            <a:pPr indent="0" marL="0">
+              <a:buNone/>
+            </a:pPr>
+            <a:r>
+              <a:rPr lang="en-US" sz="1600" b="1" dirty="0">
                 <a:solidFill>
                   <a:srgbClr val="2C5F2D"/>
                 </a:solidFill>
@@ -6959,38 +7755,38 @@
                 <a:ea typeface="Cambria" pitchFamily="34" charset="-122"/>
                 <a:cs typeface="Cambria" pitchFamily="34" charset="-120"/>
               </a:rPr>
-              <a:t>The pilot</a:t>
-            </a:r>
-            <a:endParaRPr lang="en-US" sz="1300" dirty="0"/>
-          </a:p>
-        </p:txBody>
-      </p:sp>
-      <p:sp>
-        <p:nvSpPr>
-          <p:cNvPr id="10" name="Text 8"/>
-          <p:cNvSpPr/>
-          <p:nvPr/>
-        </p:nvSpPr>
-        <p:spPr>
-          <a:xfrm>
-            <a:off x="4892040" y="1600200"/>
-            <a:ext cx="3657600" cy="457200"/>
-          </a:xfrm>
-          <a:prstGeom prst="rect">
-            <a:avLst/>
-          </a:prstGeom>
-          <a:noFill/>
-          <a:ln/>
-        </p:spPr>
-        <p:txBody>
-          <a:bodyPr wrap="square" lIns="0" tIns="0" rIns="0" bIns="0" rtlCol="0" anchor="ctr"/>
-          <a:lstStyle/>
-          <a:p>
-            <a:pPr indent="0" marL="0">
-              <a:buNone/>
-            </a:pPr>
-            <a:r>
-              <a:rPr lang="en-US" sz="1200" dirty="0">
+              <a:t>B2G district</a:t>
+            </a:r>
+            <a:endParaRPr lang="en-US" sz="1600" dirty="0"/>
+          </a:p>
+        </p:txBody>
+      </p:sp>
+      <p:sp>
+        <p:nvSpPr>
+          <p:cNvPr id="9" name="Text 7"/>
+          <p:cNvSpPr/>
+          <p:nvPr/>
+        </p:nvSpPr>
+        <p:spPr>
+          <a:xfrm>
+            <a:off x="3489960" y="1920240"/>
+            <a:ext cx="2164080" cy="914400"/>
+          </a:xfrm>
+          <a:prstGeom prst="rect">
+            <a:avLst/>
+          </a:prstGeom>
+          <a:noFill/>
+          <a:ln/>
+        </p:spPr>
+        <p:txBody>
+          <a:bodyPr wrap="square" lIns="0" tIns="0" rIns="0" bIns="0" rtlCol="0" anchor="ctr"/>
+          <a:lstStyle/>
+          <a:p>
+            <a:pPr indent="0" marL="0">
+              <a:buNone/>
+            </a:pPr>
+            <a:r>
+              <a:rPr lang="en-US" sz="1150" dirty="0">
                 <a:solidFill>
                   <a:srgbClr val="212121"/>
                 </a:solidFill>
@@ -6998,50 +7794,77 @@
                 <a:ea typeface="Calibri" pitchFamily="34" charset="-122"/>
                 <a:cs typeface="Calibri" pitchFamily="34" charset="-120"/>
               </a:rPr>
-              <a:t>1.  one coastal block with extension-worker access</a:t>
-            </a:r>
-            <a:endParaRPr lang="en-US" sz="1200" dirty="0"/>
-          </a:p>
-        </p:txBody>
-      </p:sp>
-      <p:sp>
-        <p:nvSpPr>
-          <p:cNvPr id="11" name="Text 9"/>
-          <p:cNvSpPr/>
-          <p:nvPr/>
-        </p:nvSpPr>
-        <p:spPr>
-          <a:xfrm>
-            <a:off x="4892040" y="2103120"/>
-            <a:ext cx="3657600" cy="457200"/>
-          </a:xfrm>
-          <a:prstGeom prst="rect">
-            <a:avLst/>
-          </a:prstGeom>
-          <a:noFill/>
-          <a:ln/>
-        </p:spPr>
-        <p:txBody>
-          <a:bodyPr wrap="square" lIns="0" tIns="0" rIns="0" bIns="0" rtlCol="0" anchor="ctr"/>
-          <a:lstStyle/>
-          <a:p>
-            <a:pPr indent="0" marL="0">
-              <a:buNone/>
-            </a:pPr>
-            <a:r>
-              <a:rPr lang="en-US" sz="1200" dirty="0">
-                <a:solidFill>
-                  <a:srgbClr val="212121"/>
+              <a:t>Odisha agriculture department and OSDMA, per-block deployment</a:t>
+            </a:r>
+            <a:endParaRPr lang="en-US" sz="1150" dirty="0"/>
+          </a:p>
+        </p:txBody>
+      </p:sp>
+      <p:sp>
+        <p:nvSpPr>
+          <p:cNvPr id="10" name="Text 8"/>
+          <p:cNvSpPr/>
+          <p:nvPr/>
+        </p:nvSpPr>
+        <p:spPr>
+          <a:xfrm>
+            <a:off x="3489960" y="2971800"/>
+            <a:ext cx="2164080" cy="457200"/>
+          </a:xfrm>
+          <a:prstGeom prst="rect">
+            <a:avLst/>
+          </a:prstGeom>
+          <a:noFill/>
+          <a:ln/>
+        </p:spPr>
+        <p:txBody>
+          <a:bodyPr wrap="square" lIns="0" tIns="0" rIns="0" bIns="0" rtlCol="0" anchor="ctr"/>
+          <a:lstStyle/>
+          <a:p>
+            <a:pPr indent="0" marL="0">
+              <a:buNone/>
+            </a:pPr>
+            <a:r>
+              <a:rPr lang="en-US" sz="1000" i="1" dirty="0">
+                <a:solidFill>
+                  <a:srgbClr val="5A6B5A"/>
                 </a:solidFill>
                 <a:latin typeface="Calibri" pitchFamily="34" charset="0"/>
                 <a:ea typeface="Calibri" pitchFamily="34" charset="-122"/>
                 <a:cs typeface="Calibri" pitchFamily="34" charset="-120"/>
               </a:rPr>
-              <a:t>2.  one agronomist-reviewed rule pack</a:t>
-            </a:r>
-            <a:endParaRPr lang="en-US" sz="1200" dirty="0"/>
-          </a:p>
-        </p:txBody>
+              <a:t>reduces call volume, gives auditable outreach evidence</a:t>
+            </a:r>
+            <a:endParaRPr lang="en-US" sz="1000" dirty="0"/>
+          </a:p>
+        </p:txBody>
+      </p:sp>
+      <p:sp>
+        <p:nvSpPr>
+          <p:cNvPr id="11" name="Shape 9"/>
+          <p:cNvSpPr/>
+          <p:nvPr/>
+        </p:nvSpPr>
+        <p:spPr>
+          <a:xfrm>
+            <a:off x="6156960" y="1234440"/>
+            <a:ext cx="2529840" cy="2286000"/>
+          </a:xfrm>
+          <a:prstGeom prst="roundRect">
+            <a:avLst>
+              <a:gd name="adj" fmla="val 3200"/>
+            </a:avLst>
+          </a:prstGeom>
+          <a:solidFill>
+            <a:srgbClr val="F0F5EA"/>
+          </a:solidFill>
+          <a:ln w="12700">
+            <a:solidFill>
+              <a:srgbClr val="FFFFFF"/>
+            </a:solidFill>
+            <a:prstDash val="solid"/>
+          </a:ln>
+        </p:spPr>
       </p:sp>
       <p:sp>
         <p:nvSpPr>
@@ -7051,24 +7874,63 @@
         </p:nvSpPr>
         <p:spPr>
           <a:xfrm>
-            <a:off x="4892040" y="2606040"/>
-            <a:ext cx="3657600" cy="457200"/>
-          </a:xfrm>
-          <a:prstGeom prst="rect">
-            <a:avLst/>
-          </a:prstGeom>
-          <a:noFill/>
-          <a:ln/>
-        </p:spPr>
-        <p:txBody>
-          <a:bodyPr wrap="square" lIns="0" tIns="0" rIns="0" bIns="0" rtlCol="0" anchor="ctr"/>
-          <a:lstStyle/>
-          <a:p>
-            <a:pPr indent="0" marL="0">
-              <a:buNone/>
-            </a:pPr>
-            <a:r>
-              <a:rPr lang="en-US" sz="1200" dirty="0">
+            <a:off x="6339840" y="1417320"/>
+            <a:ext cx="2164080" cy="365760"/>
+          </a:xfrm>
+          <a:prstGeom prst="rect">
+            <a:avLst/>
+          </a:prstGeom>
+          <a:noFill/>
+          <a:ln/>
+        </p:spPr>
+        <p:txBody>
+          <a:bodyPr wrap="square" lIns="0" tIns="0" rIns="0" bIns="0" rtlCol="0" anchor="ctr"/>
+          <a:lstStyle/>
+          <a:p>
+            <a:pPr indent="0" marL="0">
+              <a:buNone/>
+            </a:pPr>
+            <a:r>
+              <a:rPr lang="en-US" sz="1600" b="1" dirty="0">
+                <a:solidFill>
+                  <a:srgbClr val="2C5F2D"/>
+                </a:solidFill>
+                <a:latin typeface="Cambria" pitchFamily="34" charset="0"/>
+                <a:ea typeface="Cambria" pitchFamily="34" charset="-122"/>
+                <a:cs typeface="Cambria" pitchFamily="34" charset="-120"/>
+              </a:rPr>
+              <a:t>Claims rail</a:t>
+            </a:r>
+            <a:endParaRPr lang="en-US" sz="1600" dirty="0"/>
+          </a:p>
+        </p:txBody>
+      </p:sp>
+      <p:sp>
+        <p:nvSpPr>
+          <p:cNvPr id="13" name="Text 11"/>
+          <p:cNvSpPr/>
+          <p:nvPr/>
+        </p:nvSpPr>
+        <p:spPr>
+          <a:xfrm>
+            <a:off x="6339840" y="1920240"/>
+            <a:ext cx="2164080" cy="914400"/>
+          </a:xfrm>
+          <a:prstGeom prst="rect">
+            <a:avLst/>
+          </a:prstGeom>
+          <a:noFill/>
+          <a:ln/>
+        </p:spPr>
+        <p:txBody>
+          <a:bodyPr wrap="square" lIns="0" tIns="0" rIns="0" bIns="0" rtlCol="0" anchor="ctr"/>
+          <a:lstStyle/>
+          <a:p>
+            <a:pPr indent="0" marL="0">
+              <a:buNone/>
+            </a:pPr>
+            <a:r>
+              <a:rPr lang="en-US" sz="1150" dirty="0">
                 <a:solidFill>
                   <a:srgbClr val="212121"/>
                 </a:solidFill>
@@ -7076,21 +7938,60 @@
                 <a:ea typeface="Calibri" pitchFamily="34" charset="-122"/>
                 <a:cs typeface="Calibri" pitchFamily="34" charset="-120"/>
               </a:rPr>
-              <a:t>3.  measure comprehension and claim conversion, not downloads</a:t>
-            </a:r>
-            <a:endParaRPr lang="en-US" sz="1200" dirty="0"/>
-          </a:p>
-        </p:txBody>
-      </p:sp>
-      <p:sp>
-        <p:nvSpPr>
-          <p:cNvPr id="13" name="Text 11"/>
-          <p:cNvSpPr/>
-          <p:nvPr/>
-        </p:nvSpPr>
-        <p:spPr>
-          <a:xfrm>
-            <a:off x="457200" y="3429000"/>
+              <a:t>PMFBY insurers and aggregators pay per evidence packet</a:t>
+            </a:r>
+            <a:endParaRPr lang="en-US" sz="1150" dirty="0"/>
+          </a:p>
+        </p:txBody>
+      </p:sp>
+      <p:sp>
+        <p:nvSpPr>
+          <p:cNvPr id="14" name="Text 12"/>
+          <p:cNvSpPr/>
+          <p:nvPr/>
+        </p:nvSpPr>
+        <p:spPr>
+          <a:xfrm>
+            <a:off x="6339840" y="2971800"/>
+            <a:ext cx="2164080" cy="457200"/>
+          </a:xfrm>
+          <a:prstGeom prst="rect">
+            <a:avLst/>
+          </a:prstGeom>
+          <a:noFill/>
+          <a:ln/>
+        </p:spPr>
+        <p:txBody>
+          <a:bodyPr wrap="square" lIns="0" tIns="0" rIns="0" bIns="0" rtlCol="0" anchor="ctr"/>
+          <a:lstStyle/>
+          <a:p>
+            <a:pPr indent="0" marL="0">
+              <a:buNone/>
+            </a:pPr>
+            <a:r>
+              <a:rPr lang="en-US" sz="1000" i="1" dirty="0">
+                <a:solidFill>
+                  <a:srgbClr val="5A6B5A"/>
+                </a:solidFill>
+                <a:latin typeface="Calibri" pitchFamily="34" charset="0"/>
+                <a:ea typeface="Calibri" pitchFamily="34" charset="-122"/>
+                <a:cs typeface="Calibri" pitchFamily="34" charset="-120"/>
+              </a:rPr>
+              <a:t>verified observation converts to claim, both sides win</a:t>
+            </a:r>
+            <a:endParaRPr lang="en-US" sz="1000" dirty="0"/>
+          </a:p>
+        </p:txBody>
+      </p:sp>
+      <p:sp>
+        <p:nvSpPr>
+          <p:cNvPr id="15" name="Text 13"/>
+          <p:cNvSpPr/>
+          <p:nvPr/>
+        </p:nvSpPr>
+        <p:spPr>
+          <a:xfrm>
+            <a:off x="457200" y="3977640"/>
             <a:ext cx="8229600" cy="411480"/>
           </a:xfrm>
           <a:prstGeom prst="rect">
@@ -7107,7 +8008,7 @@
               <a:buNone/>
             </a:pPr>
             <a:r>
-              <a:rPr lang="en-US" sz="1450" b="1" dirty="0">
+              <a:rPr lang="en-US" sz="1300" b="1" dirty="0">
                 <a:solidFill>
                   <a:srgbClr val="2C5F2D"/>
                 </a:solidFill>
@@ -7115,38 +8016,38 @@
                 <a:ea typeface="Cambria" pitchFamily="34" charset="-122"/>
                 <a:cs typeface="Cambria" pitchFamily="34" charset="-120"/>
               </a:rPr>
-              <a:t>Named rail, named pilot, dated outcome. That is the Round 1 contract.</a:t>
-            </a:r>
-            <a:endParaRPr lang="en-US" sz="1450" dirty="0"/>
-          </a:p>
-        </p:txBody>
-      </p:sp>
-      <p:sp>
-        <p:nvSpPr>
-          <p:cNvPr id="14" name="Text 12"/>
-          <p:cNvSpPr/>
-          <p:nvPr/>
-        </p:nvSpPr>
-        <p:spPr>
-          <a:xfrm>
-            <a:off x="457200" y="3977640"/>
-            <a:ext cx="8229600" cy="365760"/>
-          </a:xfrm>
-          <a:prstGeom prst="rect">
-            <a:avLst/>
-          </a:prstGeom>
-          <a:noFill/>
-          <a:ln/>
-        </p:spPr>
-        <p:txBody>
-          <a:bodyPr wrap="square" lIns="0" tIns="0" rIns="0" bIns="0" rtlCol="0" anchor="ctr"/>
-          <a:lstStyle/>
-          <a:p>
-            <a:pPr indent="0" marL="0">
-              <a:buNone/>
-            </a:pPr>
-            <a:r>
-              <a:rPr lang="en-US" sz="1000" i="1" dirty="0">
+              <a:t>Seed revenue line for Round 1: one FPO, one season, measured renewal. No consumer subscription fantasy.</a:t>
+            </a:r>
+            <a:endParaRPr lang="en-US" sz="1300" dirty="0"/>
+          </a:p>
+        </p:txBody>
+      </p:sp>
+      <p:sp>
+        <p:nvSpPr>
+          <p:cNvPr id="16" name="Text 14"/>
+          <p:cNvSpPr/>
+          <p:nvPr/>
+        </p:nvSpPr>
+        <p:spPr>
+          <a:xfrm>
+            <a:off x="457200" y="4759452"/>
+            <a:ext cx="8229600" cy="274320"/>
+          </a:xfrm>
+          <a:prstGeom prst="rect">
+            <a:avLst/>
+          </a:prstGeom>
+          <a:noFill/>
+          <a:ln/>
+        </p:spPr>
+        <p:txBody>
+          <a:bodyPr wrap="square" lIns="0" tIns="0" rIns="0" bIns="0" rtlCol="0" anchor="ctr"/>
+          <a:lstStyle/>
+          <a:p>
+            <a:pPr indent="0" marL="0">
+              <a:buNone/>
+            </a:pPr>
+            <a:r>
+              <a:rPr lang="en-US" sz="900" dirty="0">
                 <a:solidFill>
                   <a:srgbClr val="5A6B5A"/>
                 </a:solidFill>
@@ -7154,46 +8055,7 @@
                 <a:ea typeface="Calibri" pitchFamily="34" charset="-122"/>
                 <a:cs typeface="Calibri" pitchFamily="34" charset="-120"/>
               </a:rPr>
-              <a:t>Sources: PMFBY program data; Digital Agriculture Mission allocation; YSD Dana assessment; Down To Earth Yaas report. All dated 2024-2025, verified in the research wave.</a:t>
-            </a:r>
-            <a:endParaRPr lang="en-US" sz="1000" dirty="0"/>
-          </a:p>
-        </p:txBody>
-      </p:sp>
-      <p:sp>
-        <p:nvSpPr>
-          <p:cNvPr id="15" name="Text 13"/>
-          <p:cNvSpPr/>
-          <p:nvPr/>
-        </p:nvSpPr>
-        <p:spPr>
-          <a:xfrm>
-            <a:off x="457200" y="4828032"/>
-            <a:ext cx="8229600" cy="274320"/>
-          </a:xfrm>
-          <a:prstGeom prst="rect">
-            <a:avLst/>
-          </a:prstGeom>
-          <a:noFill/>
-          <a:ln/>
-        </p:spPr>
-        <p:txBody>
-          <a:bodyPr wrap="square" lIns="0" tIns="0" rIns="0" bIns="0" rtlCol="0" anchor="ctr"/>
-          <a:lstStyle/>
-          <a:p>
-            <a:pPr indent="0" marL="0">
-              <a:buNone/>
-            </a:pPr>
-            <a:r>
-              <a:rPr lang="en-US" sz="900" dirty="0">
-                <a:solidFill>
-                  <a:srgbClr val="5A6B5A"/>
-                </a:solidFill>
-                <a:latin typeface="Calibri" pitchFamily="34" charset="0"/>
-                <a:ea typeface="Calibri" pitchFamily="34" charset="-122"/>
-                <a:cs typeface="Calibri" pitchFamily="34" charset="-120"/>
-              </a:rPr>
-              <a:t>Market slide after traction in YC ordering. No TAM multiplication, no 'everyone everywhere' line.</a:t>
+              <a:t>Mine verdict: the real buyer is institutional, and the real distribution is extension workers, KCC, FPOs, dealers, and panchayat actors. Consumer subscriptions and network effects are not evidenced.</a:t>
             </a:r>
             <a:endParaRPr lang="en-US" sz="900" dirty="0"/>
           </a:p>
@@ -7264,7 +8126,7 @@
                 <a:ea typeface="Cambria" pitchFamily="34" charset="-122"/>
                 <a:cs typeface="Cambria" pitchFamily="34" charset="-120"/>
               </a:rPr>
-              <a:t>Team 511</a:t>
+              <a:t>One rail, one pilot, one quarter</a:t>
             </a:r>
             <a:endParaRPr lang="en-US" sz="2800" dirty="0"/>
           </a:p>
@@ -7278,12 +8140,12 @@
         </p:nvSpPr>
         <p:spPr>
           <a:xfrm>
-            <a:off x="457200" y="1097280"/>
-            <a:ext cx="2529840" cy="1828800"/>
+            <a:off x="457200" y="1051560"/>
+            <a:ext cx="3977640" cy="2103120"/>
           </a:xfrm>
           <a:prstGeom prst="roundRect">
             <a:avLst>
-              <a:gd name="adj" fmla="val 4000"/>
+              <a:gd name="adj" fmla="val 3478"/>
             </a:avLst>
           </a:prstGeom>
           <a:solidFill>
@@ -7299,97 +8161,77 @@
       </p:sp>
       <p:sp>
         <p:nvSpPr>
-          <p:cNvPr id="4" name="Shape 2"/>
-          <p:cNvSpPr/>
-          <p:nvPr/>
-        </p:nvSpPr>
-        <p:spPr>
-          <a:xfrm>
-            <a:off x="1402080" y="1280160"/>
-            <a:ext cx="640080" cy="640080"/>
-          </a:xfrm>
-          <a:prstGeom prst="ellipse">
-            <a:avLst/>
-          </a:prstGeom>
-          <a:solidFill>
-            <a:srgbClr val="97BC62"/>
-          </a:solidFill>
-          <a:ln/>
-        </p:spPr>
-      </p:sp>
-      <p:sp>
-        <p:nvSpPr>
-          <p:cNvPr id="5" name="Text 3"/>
-          <p:cNvSpPr/>
-          <p:nvPr/>
-        </p:nvSpPr>
-        <p:spPr>
-          <a:xfrm>
-            <a:off x="1402080" y="1353312"/>
-            <a:ext cx="640080" cy="457200"/>
-          </a:xfrm>
-          <a:prstGeom prst="rect">
-            <a:avLst/>
-          </a:prstGeom>
-          <a:noFill/>
-          <a:ln/>
-        </p:spPr>
-        <p:txBody>
-          <a:bodyPr wrap="square" lIns="0" tIns="0" rIns="0" bIns="0" rtlCol="0" anchor="ctr"/>
-          <a:lstStyle/>
-          <a:p>
-            <a:pPr algn="ctr" indent="0" marL="0">
-              <a:buNone/>
-            </a:pPr>
-            <a:r>
-              <a:rPr lang="en-US" sz="2000" b="1" dirty="0">
-                <a:solidFill>
-                  <a:srgbClr val="FFFFFF"/>
+          <p:cNvPr id="4" name="Text 2"/>
+          <p:cNvSpPr/>
+          <p:nvPr/>
+        </p:nvSpPr>
+        <p:spPr>
+          <a:xfrm>
+            <a:off x="640080" y="1188720"/>
+            <a:ext cx="3657600" cy="320040"/>
+          </a:xfrm>
+          <a:prstGeom prst="rect">
+            <a:avLst/>
+          </a:prstGeom>
+          <a:noFill/>
+          <a:ln/>
+        </p:spPr>
+        <p:txBody>
+          <a:bodyPr wrap="square" lIns="0" tIns="0" rIns="0" bIns="0" rtlCol="0" anchor="ctr"/>
+          <a:lstStyle/>
+          <a:p>
+            <a:pPr indent="0" marL="0">
+              <a:buNone/>
+            </a:pPr>
+            <a:r>
+              <a:rPr lang="en-US" sz="1300" b="1" dirty="0">
+                <a:solidFill>
+                  <a:srgbClr val="2C5F2D"/>
                 </a:solidFill>
                 <a:latin typeface="Cambria" pitchFamily="34" charset="0"/>
                 <a:ea typeface="Cambria" pitchFamily="34" charset="-122"/>
                 <a:cs typeface="Cambria" pitchFamily="34" charset="-120"/>
               </a:rPr>
-              <a:t>1</a:t>
-            </a:r>
-            <a:endParaRPr lang="en-US" sz="2000" dirty="0"/>
-          </a:p>
-        </p:txBody>
-      </p:sp>
-      <p:sp>
-        <p:nvSpPr>
-          <p:cNvPr id="6" name="Text 4"/>
-          <p:cNvSpPr/>
-          <p:nvPr/>
-        </p:nvSpPr>
-        <p:spPr>
-          <a:xfrm>
-            <a:off x="594360" y="2057400"/>
-            <a:ext cx="2255520" cy="365760"/>
-          </a:xfrm>
-          <a:prstGeom prst="rect">
-            <a:avLst/>
-          </a:prstGeom>
-          <a:noFill/>
-          <a:ln/>
-        </p:spPr>
-        <p:txBody>
-          <a:bodyPr wrap="square" lIns="0" tIns="0" rIns="0" bIns="0" rtlCol="0" anchor="ctr"/>
-          <a:lstStyle/>
-          <a:p>
-            <a:pPr algn="ctr" indent="0" marL="0">
+              <a:t>The rail exists</a:t>
+            </a:r>
+            <a:endParaRPr lang="en-US" sz="1300" dirty="0"/>
+          </a:p>
+        </p:txBody>
+      </p:sp>
+      <p:sp>
+        <p:nvSpPr>
+          <p:cNvPr id="5" name="Text 3"/>
+          <p:cNvSpPr/>
+          <p:nvPr/>
+        </p:nvSpPr>
+        <p:spPr>
+          <a:xfrm>
+            <a:off x="640080" y="1554480"/>
+            <a:ext cx="3657600" cy="548640"/>
+          </a:xfrm>
+          <a:prstGeom prst="rect">
+            <a:avLst/>
+          </a:prstGeom>
+          <a:noFill/>
+          <a:ln/>
+        </p:spPr>
+        <p:txBody>
+          <a:bodyPr wrap="square" lIns="0" tIns="0" rIns="0" bIns="0" rtlCol="0" anchor="ctr"/>
+          <a:lstStyle/>
+          <a:p>
+            <a:pPr indent="0" marL="0">
               <a:buNone/>
             </a:pPr>
             <a:r>
               <a:rPr lang="en-US" sz="1500" b="1" dirty="0">
                 <a:solidFill>
-                  <a:srgbClr val="2C5F2D"/>
+                  <a:srgbClr val="212121"/>
                 </a:solidFill>
                 <a:latin typeface="Cambria" pitchFamily="34" charset="0"/>
                 <a:ea typeface="Cambria" pitchFamily="34" charset="-122"/>
                 <a:cs typeface="Cambria" pitchFamily="34" charset="-120"/>
               </a:rPr>
-              <a:t>Harsh Gounder</a:t>
+              <a:t>78.4 crore PMFBY applications, Rs 1.83 lakh crore program</a:t>
             </a:r>
             <a:endParaRPr lang="en-US" sz="1500" dirty="0"/>
           </a:p>
@@ -7397,96 +8239,96 @@
       </p:sp>
       <p:sp>
         <p:nvSpPr>
+          <p:cNvPr id="6" name="Text 4"/>
+          <p:cNvSpPr/>
+          <p:nvPr/>
+        </p:nvSpPr>
+        <p:spPr>
+          <a:xfrm>
+            <a:off x="640080" y="2194560"/>
+            <a:ext cx="3657600" cy="548640"/>
+          </a:xfrm>
+          <a:prstGeom prst="rect">
+            <a:avLst/>
+          </a:prstGeom>
+          <a:noFill/>
+          <a:ln/>
+        </p:spPr>
+        <p:txBody>
+          <a:bodyPr wrap="square" lIns="0" tIns="0" rIns="0" bIns="0" rtlCol="0" anchor="ctr"/>
+          <a:lstStyle/>
+          <a:p>
+            <a:pPr indent="0" marL="0">
+              <a:buNone/>
+            </a:pPr>
+            <a:r>
+              <a:rPr lang="en-US" sz="1250" dirty="0">
+                <a:solidFill>
+                  <a:srgbClr val="212121"/>
+                </a:solidFill>
+                <a:latin typeface="Cambria" pitchFamily="34" charset="0"/>
+                <a:ea typeface="Cambria" pitchFamily="34" charset="-122"/>
+                <a:cs typeface="Cambria" pitchFamily="34" charset="-120"/>
+              </a:rPr>
+              <a:t>Digital Agriculture Mission, Rs 2,817 crore, funds agri-digital public infrastructure</a:t>
+            </a:r>
+            <a:endParaRPr lang="en-US" sz="1250" dirty="0"/>
+          </a:p>
+        </p:txBody>
+      </p:sp>
+      <p:sp>
+        <p:nvSpPr>
           <p:cNvPr id="7" name="Text 5"/>
           <p:cNvSpPr/>
           <p:nvPr/>
         </p:nvSpPr>
         <p:spPr>
           <a:xfrm>
-            <a:off x="594360" y="2423160"/>
-            <a:ext cx="2255520" cy="274320"/>
-          </a:xfrm>
-          <a:prstGeom prst="rect">
-            <a:avLst/>
-          </a:prstGeom>
-          <a:noFill/>
-          <a:ln/>
-        </p:spPr>
-        <p:txBody>
-          <a:bodyPr wrap="square" lIns="0" tIns="0" rIns="0" bIns="0" rtlCol="0" anchor="ctr"/>
-          <a:lstStyle/>
-          <a:p>
-            <a:pPr algn="ctr" indent="0" marL="0">
-              <a:buNone/>
-            </a:pPr>
-            <a:r>
-              <a:rPr lang="en-US" sz="1150" dirty="0">
-                <a:solidFill>
-                  <a:srgbClr val="5A6B5A"/>
-                </a:solidFill>
-                <a:latin typeface="Calibri" pitchFamily="34" charset="0"/>
-                <a:ea typeface="Calibri" pitchFamily="34" charset="-122"/>
-                <a:cs typeface="Calibri" pitchFamily="34" charset="-120"/>
-              </a:rPr>
-              <a:t>Lead, E&amp;CE</a:t>
-            </a:r>
-            <a:endParaRPr lang="en-US" sz="1150" dirty="0"/>
-          </a:p>
-        </p:txBody>
-      </p:sp>
-      <p:sp>
-        <p:nvSpPr>
-          <p:cNvPr id="8" name="Text 6"/>
-          <p:cNvSpPr/>
-          <p:nvPr/>
-        </p:nvSpPr>
-        <p:spPr>
-          <a:xfrm>
-            <a:off x="594360" y="2697480"/>
-            <a:ext cx="2255520" cy="320040"/>
-          </a:xfrm>
-          <a:prstGeom prst="rect">
-            <a:avLst/>
-          </a:prstGeom>
-          <a:noFill/>
-          <a:ln/>
-        </p:spPr>
-        <p:txBody>
-          <a:bodyPr wrap="square" lIns="0" tIns="0" rIns="0" bIns="0" rtlCol="0" anchor="ctr"/>
-          <a:lstStyle/>
-          <a:p>
-            <a:pPr algn="ctr" indent="0" marL="0">
-              <a:buNone/>
-            </a:pPr>
-            <a:r>
-              <a:rPr lang="en-US" sz="950" i="1" dirty="0">
-                <a:solidFill>
-                  <a:srgbClr val="5A6B5A"/>
-                </a:solidFill>
-                <a:latin typeface="Calibri" pitchFamily="34" charset="0"/>
-                <a:ea typeface="Calibri" pitchFamily="34" charset="-122"/>
-                <a:cs typeface="Calibri" pitchFamily="34" charset="-120"/>
-              </a:rPr>
-              <a:t>systems, research method, 17-statement evidence wave</a:t>
-            </a:r>
-            <a:endParaRPr lang="en-US" sz="950" dirty="0"/>
-          </a:p>
-        </p:txBody>
-      </p:sp>
-      <p:sp>
-        <p:nvSpPr>
-          <p:cNvPr id="9" name="Shape 7"/>
-          <p:cNvSpPr/>
-          <p:nvPr/>
-        </p:nvSpPr>
-        <p:spPr>
-          <a:xfrm>
-            <a:off x="3307080" y="1097280"/>
-            <a:ext cx="2529840" cy="1828800"/>
+            <a:off x="640080" y="2788920"/>
+            <a:ext cx="3657600" cy="548640"/>
+          </a:xfrm>
+          <a:prstGeom prst="rect">
+            <a:avLst/>
+          </a:prstGeom>
+          <a:noFill/>
+          <a:ln/>
+        </p:spPr>
+        <p:txBody>
+          <a:bodyPr wrap="square" lIns="0" tIns="0" rIns="0" bIns="0" rtlCol="0" anchor="ctr"/>
+          <a:lstStyle/>
+          <a:p>
+            <a:pPr indent="0" marL="0">
+              <a:buNone/>
+            </a:pPr>
+            <a:r>
+              <a:rPr lang="en-US" sz="1250" dirty="0">
+                <a:solidFill>
+                  <a:srgbClr val="212121"/>
+                </a:solidFill>
+                <a:latin typeface="Cambria" pitchFamily="34" charset="0"/>
+                <a:ea typeface="Cambria" pitchFamily="34" charset="-122"/>
+                <a:cs typeface="Cambria" pitchFamily="34" charset="-120"/>
+              </a:rPr>
+              <a:t>Odisha: cyclone-facing coast, paddy and saline zones, Dana and Yaas damage on record</a:t>
+            </a:r>
+            <a:endParaRPr lang="en-US" sz="1250" dirty="0"/>
+          </a:p>
+        </p:txBody>
+      </p:sp>
+      <p:sp>
+        <p:nvSpPr>
+          <p:cNvPr id="8" name="Shape 6"/>
+          <p:cNvSpPr/>
+          <p:nvPr/>
+        </p:nvSpPr>
+        <p:spPr>
+          <a:xfrm>
+            <a:off x="4709160" y="1051560"/>
+            <a:ext cx="3977640" cy="2103120"/>
           </a:xfrm>
           <a:prstGeom prst="roundRect">
             <a:avLst>
-              <a:gd name="adj" fmla="val 4000"/>
+              <a:gd name="adj" fmla="val 3478"/>
             </a:avLst>
           </a:prstGeom>
           <a:solidFill>
@@ -7502,60 +8344,118 @@
       </p:sp>
       <p:sp>
         <p:nvSpPr>
-          <p:cNvPr id="10" name="Shape 8"/>
-          <p:cNvSpPr/>
-          <p:nvPr/>
-        </p:nvSpPr>
-        <p:spPr>
-          <a:xfrm>
-            <a:off x="4251960" y="1280160"/>
-            <a:ext cx="640080" cy="640080"/>
-          </a:xfrm>
-          <a:prstGeom prst="ellipse">
-            <a:avLst/>
-          </a:prstGeom>
-          <a:solidFill>
-            <a:srgbClr val="97BC62"/>
-          </a:solidFill>
-          <a:ln/>
-        </p:spPr>
-      </p:sp>
-      <p:sp>
-        <p:nvSpPr>
-          <p:cNvPr id="11" name="Text 9"/>
-          <p:cNvSpPr/>
-          <p:nvPr/>
-        </p:nvSpPr>
-        <p:spPr>
-          <a:xfrm>
-            <a:off x="4251960" y="1353312"/>
-            <a:ext cx="640080" cy="457200"/>
-          </a:xfrm>
-          <a:prstGeom prst="rect">
-            <a:avLst/>
-          </a:prstGeom>
-          <a:noFill/>
-          <a:ln/>
-        </p:spPr>
-        <p:txBody>
-          <a:bodyPr wrap="square" lIns="0" tIns="0" rIns="0" bIns="0" rtlCol="0" anchor="ctr"/>
-          <a:lstStyle/>
-          <a:p>
-            <a:pPr algn="ctr" indent="0" marL="0">
-              <a:buNone/>
-            </a:pPr>
-            <a:r>
-              <a:rPr lang="en-US" sz="2000" b="1" dirty="0">
-                <a:solidFill>
-                  <a:srgbClr val="FFFFFF"/>
+          <p:cNvPr id="9" name="Text 7"/>
+          <p:cNvSpPr/>
+          <p:nvPr/>
+        </p:nvSpPr>
+        <p:spPr>
+          <a:xfrm>
+            <a:off x="4892040" y="1188720"/>
+            <a:ext cx="3657600" cy="320040"/>
+          </a:xfrm>
+          <a:prstGeom prst="rect">
+            <a:avLst/>
+          </a:prstGeom>
+          <a:noFill/>
+          <a:ln/>
+        </p:spPr>
+        <p:txBody>
+          <a:bodyPr wrap="square" lIns="0" tIns="0" rIns="0" bIns="0" rtlCol="0" anchor="ctr"/>
+          <a:lstStyle/>
+          <a:p>
+            <a:pPr indent="0" marL="0">
+              <a:buNone/>
+            </a:pPr>
+            <a:r>
+              <a:rPr lang="en-US" sz="1300" b="1" dirty="0">
+                <a:solidFill>
+                  <a:srgbClr val="2C5F2D"/>
                 </a:solidFill>
                 <a:latin typeface="Cambria" pitchFamily="34" charset="0"/>
                 <a:ea typeface="Cambria" pitchFamily="34" charset="-122"/>
                 <a:cs typeface="Cambria" pitchFamily="34" charset="-120"/>
               </a:rPr>
-              <a:t>2</a:t>
-            </a:r>
-            <a:endParaRPr lang="en-US" sz="2000" dirty="0"/>
+              <a:t>The pilot</a:t>
+            </a:r>
+            <a:endParaRPr lang="en-US" sz="1300" dirty="0"/>
+          </a:p>
+        </p:txBody>
+      </p:sp>
+      <p:sp>
+        <p:nvSpPr>
+          <p:cNvPr id="10" name="Text 8"/>
+          <p:cNvSpPr/>
+          <p:nvPr/>
+        </p:nvSpPr>
+        <p:spPr>
+          <a:xfrm>
+            <a:off x="4892040" y="1600200"/>
+            <a:ext cx="3657600" cy="457200"/>
+          </a:xfrm>
+          <a:prstGeom prst="rect">
+            <a:avLst/>
+          </a:prstGeom>
+          <a:noFill/>
+          <a:ln/>
+        </p:spPr>
+        <p:txBody>
+          <a:bodyPr wrap="square" lIns="0" tIns="0" rIns="0" bIns="0" rtlCol="0" anchor="ctr"/>
+          <a:lstStyle/>
+          <a:p>
+            <a:pPr indent="0" marL="0">
+              <a:buNone/>
+            </a:pPr>
+            <a:r>
+              <a:rPr lang="en-US" sz="1200" dirty="0">
+                <a:solidFill>
+                  <a:srgbClr val="212121"/>
+                </a:solidFill>
+                <a:latin typeface="Calibri" pitchFamily="34" charset="0"/>
+                <a:ea typeface="Calibri" pitchFamily="34" charset="-122"/>
+                <a:cs typeface="Calibri" pitchFamily="34" charset="-120"/>
+              </a:rPr>
+              <a:t>1.  one coastal block with extension-worker access</a:t>
+            </a:r>
+            <a:endParaRPr lang="en-US" sz="1200" dirty="0"/>
+          </a:p>
+        </p:txBody>
+      </p:sp>
+      <p:sp>
+        <p:nvSpPr>
+          <p:cNvPr id="11" name="Text 9"/>
+          <p:cNvSpPr/>
+          <p:nvPr/>
+        </p:nvSpPr>
+        <p:spPr>
+          <a:xfrm>
+            <a:off x="4892040" y="2103120"/>
+            <a:ext cx="3657600" cy="457200"/>
+          </a:xfrm>
+          <a:prstGeom prst="rect">
+            <a:avLst/>
+          </a:prstGeom>
+          <a:noFill/>
+          <a:ln/>
+        </p:spPr>
+        <p:txBody>
+          <a:bodyPr wrap="square" lIns="0" tIns="0" rIns="0" bIns="0" rtlCol="0" anchor="ctr"/>
+          <a:lstStyle/>
+          <a:p>
+            <a:pPr indent="0" marL="0">
+              <a:buNone/>
+            </a:pPr>
+            <a:r>
+              <a:rPr lang="en-US" sz="1200" dirty="0">
+                <a:solidFill>
+                  <a:srgbClr val="212121"/>
+                </a:solidFill>
+                <a:latin typeface="Calibri" pitchFamily="34" charset="0"/>
+                <a:ea typeface="Calibri" pitchFamily="34" charset="-122"/>
+                <a:cs typeface="Calibri" pitchFamily="34" charset="-120"/>
+              </a:rPr>
+              <a:t>2.  one agronomist-reviewed rule pack</a:t>
+            </a:r>
+            <a:endParaRPr lang="en-US" sz="1200" dirty="0"/>
           </a:p>
         </p:txBody>
       </p:sp>
@@ -7567,24 +8467,63 @@
         </p:nvSpPr>
         <p:spPr>
           <a:xfrm>
-            <a:off x="3444240" y="2057400"/>
-            <a:ext cx="2255520" cy="365760"/>
-          </a:xfrm>
-          <a:prstGeom prst="rect">
-            <a:avLst/>
-          </a:prstGeom>
-          <a:noFill/>
-          <a:ln/>
-        </p:spPr>
-        <p:txBody>
-          <a:bodyPr wrap="square" lIns="0" tIns="0" rIns="0" bIns="0" rtlCol="0" anchor="ctr"/>
-          <a:lstStyle/>
-          <a:p>
-            <a:pPr algn="ctr" indent="0" marL="0">
-              <a:buNone/>
-            </a:pPr>
-            <a:r>
-              <a:rPr lang="en-US" sz="1500" b="1" dirty="0">
+            <a:off x="4892040" y="2606040"/>
+            <a:ext cx="3657600" cy="457200"/>
+          </a:xfrm>
+          <a:prstGeom prst="rect">
+            <a:avLst/>
+          </a:prstGeom>
+          <a:noFill/>
+          <a:ln/>
+        </p:spPr>
+        <p:txBody>
+          <a:bodyPr wrap="square" lIns="0" tIns="0" rIns="0" bIns="0" rtlCol="0" anchor="ctr"/>
+          <a:lstStyle/>
+          <a:p>
+            <a:pPr indent="0" marL="0">
+              <a:buNone/>
+            </a:pPr>
+            <a:r>
+              <a:rPr lang="en-US" sz="1200" dirty="0">
+                <a:solidFill>
+                  <a:srgbClr val="212121"/>
+                </a:solidFill>
+                <a:latin typeface="Calibri" pitchFamily="34" charset="0"/>
+                <a:ea typeface="Calibri" pitchFamily="34" charset="-122"/>
+                <a:cs typeface="Calibri" pitchFamily="34" charset="-120"/>
+              </a:rPr>
+              <a:t>3.  measure comprehension and claim conversion, not downloads</a:t>
+            </a:r>
+            <a:endParaRPr lang="en-US" sz="1200" dirty="0"/>
+          </a:p>
+        </p:txBody>
+      </p:sp>
+      <p:sp>
+        <p:nvSpPr>
+          <p:cNvPr id="13" name="Text 11"/>
+          <p:cNvSpPr/>
+          <p:nvPr/>
+        </p:nvSpPr>
+        <p:spPr>
+          <a:xfrm>
+            <a:off x="457200" y="3429000"/>
+            <a:ext cx="8229600" cy="411480"/>
+          </a:xfrm>
+          <a:prstGeom prst="rect">
+            <a:avLst/>
+          </a:prstGeom>
+          <a:noFill/>
+          <a:ln/>
+        </p:spPr>
+        <p:txBody>
+          <a:bodyPr wrap="square" lIns="0" tIns="0" rIns="0" bIns="0" rtlCol="0" anchor="ctr"/>
+          <a:lstStyle/>
+          <a:p>
+            <a:pPr indent="0" marL="0">
+              <a:buNone/>
+            </a:pPr>
+            <a:r>
+              <a:rPr lang="en-US" sz="1450" b="1" dirty="0">
                 <a:solidFill>
                   <a:srgbClr val="2C5F2D"/>
                 </a:solidFill>
@@ -7592,38 +8531,38 @@
                 <a:ea typeface="Cambria" pitchFamily="34" charset="-122"/>
                 <a:cs typeface="Cambria" pitchFamily="34" charset="-120"/>
               </a:rPr>
-              <a:t>Ayush Kharwar</a:t>
-            </a:r>
-            <a:endParaRPr lang="en-US" sz="1500" dirty="0"/>
-          </a:p>
-        </p:txBody>
-      </p:sp>
-      <p:sp>
-        <p:nvSpPr>
-          <p:cNvPr id="13" name="Text 11"/>
-          <p:cNvSpPr/>
-          <p:nvPr/>
-        </p:nvSpPr>
-        <p:spPr>
-          <a:xfrm>
-            <a:off x="3444240" y="2423160"/>
-            <a:ext cx="2255520" cy="274320"/>
-          </a:xfrm>
-          <a:prstGeom prst="rect">
-            <a:avLst/>
-          </a:prstGeom>
-          <a:noFill/>
-          <a:ln/>
-        </p:spPr>
-        <p:txBody>
-          <a:bodyPr wrap="square" lIns="0" tIns="0" rIns="0" bIns="0" rtlCol="0" anchor="ctr"/>
-          <a:lstStyle/>
-          <a:p>
-            <a:pPr algn="ctr" indent="0" marL="0">
-              <a:buNone/>
-            </a:pPr>
-            <a:r>
-              <a:rPr lang="en-US" sz="1150" dirty="0">
+              <a:t>Named rail, named pilot, dated outcome. That is the Round 1 contract.</a:t>
+            </a:r>
+            <a:endParaRPr lang="en-US" sz="1450" dirty="0"/>
+          </a:p>
+        </p:txBody>
+      </p:sp>
+      <p:sp>
+        <p:nvSpPr>
+          <p:cNvPr id="14" name="Text 12"/>
+          <p:cNvSpPr/>
+          <p:nvPr/>
+        </p:nvSpPr>
+        <p:spPr>
+          <a:xfrm>
+            <a:off x="457200" y="3977640"/>
+            <a:ext cx="8229600" cy="365760"/>
+          </a:xfrm>
+          <a:prstGeom prst="rect">
+            <a:avLst/>
+          </a:prstGeom>
+          <a:noFill/>
+          <a:ln/>
+        </p:spPr>
+        <p:txBody>
+          <a:bodyPr wrap="square" lIns="0" tIns="0" rIns="0" bIns="0" rtlCol="0" anchor="ctr"/>
+          <a:lstStyle/>
+          <a:p>
+            <a:pPr indent="0" marL="0">
+              <a:buNone/>
+            </a:pPr>
+            <a:r>
+              <a:rPr lang="en-US" sz="1000" i="1" dirty="0">
                 <a:solidFill>
                   <a:srgbClr val="5A6B5A"/>
                 </a:solidFill>
@@ -7631,38 +8570,38 @@
                 <a:ea typeface="Calibri" pitchFamily="34" charset="-122"/>
                 <a:cs typeface="Calibri" pitchFamily="34" charset="-120"/>
               </a:rPr>
-              <a:t>Engine and demo</a:t>
-            </a:r>
-            <a:endParaRPr lang="en-US" sz="1150" dirty="0"/>
-          </a:p>
-        </p:txBody>
-      </p:sp>
-      <p:sp>
-        <p:nvSpPr>
-          <p:cNvPr id="14" name="Text 12"/>
-          <p:cNvSpPr/>
-          <p:nvPr/>
-        </p:nvSpPr>
-        <p:spPr>
-          <a:xfrm>
-            <a:off x="3444240" y="2697480"/>
-            <a:ext cx="2255520" cy="320040"/>
-          </a:xfrm>
-          <a:prstGeom prst="rect">
-            <a:avLst/>
-          </a:prstGeom>
-          <a:noFill/>
-          <a:ln/>
-        </p:spPr>
-        <p:txBody>
-          <a:bodyPr wrap="square" lIns="0" tIns="0" rIns="0" bIns="0" rtlCol="0" anchor="ctr"/>
-          <a:lstStyle/>
-          <a:p>
-            <a:pPr algn="ctr" indent="0" marL="0">
-              <a:buNone/>
-            </a:pPr>
-            <a:r>
-              <a:rPr lang="en-US" sz="950" i="1" dirty="0">
+              <a:t>Sources: PMFBY program data; Digital Agriculture Mission allocation; YSD Dana assessment; Down To Earth Yaas report. All dated 2024-2025, verified in the research wave.</a:t>
+            </a:r>
+            <a:endParaRPr lang="en-US" sz="1000" dirty="0"/>
+          </a:p>
+        </p:txBody>
+      </p:sp>
+      <p:sp>
+        <p:nvSpPr>
+          <p:cNvPr id="15" name="Text 13"/>
+          <p:cNvSpPr/>
+          <p:nvPr/>
+        </p:nvSpPr>
+        <p:spPr>
+          <a:xfrm>
+            <a:off x="457200" y="4828032"/>
+            <a:ext cx="8229600" cy="274320"/>
+          </a:xfrm>
+          <a:prstGeom prst="rect">
+            <a:avLst/>
+          </a:prstGeom>
+          <a:noFill/>
+          <a:ln/>
+        </p:spPr>
+        <p:txBody>
+          <a:bodyPr wrap="square" lIns="0" tIns="0" rIns="0" bIns="0" rtlCol="0" anchor="ctr"/>
+          <a:lstStyle/>
+          <a:p>
+            <a:pPr indent="0" marL="0">
+              <a:buNone/>
+            </a:pPr>
+            <a:r>
+              <a:rPr lang="en-US" sz="900" dirty="0">
                 <a:solidFill>
                   <a:srgbClr val="5A6B5A"/>
                 </a:solidFill>
@@ -7670,288 +8609,7 @@
                 <a:ea typeface="Calibri" pitchFamily="34" charset="-122"/>
                 <a:cs typeface="Calibri" pitchFamily="34" charset="-120"/>
               </a:rPr>
-              <a:t>zero-dep engine, demo.sh, seed data</a:t>
-            </a:r>
-            <a:endParaRPr lang="en-US" sz="950" dirty="0"/>
-          </a:p>
-        </p:txBody>
-      </p:sp>
-      <p:sp>
-        <p:nvSpPr>
-          <p:cNvPr id="15" name="Shape 13"/>
-          <p:cNvSpPr/>
-          <p:nvPr/>
-        </p:nvSpPr>
-        <p:spPr>
-          <a:xfrm>
-            <a:off x="6156960" y="1097280"/>
-            <a:ext cx="2529840" cy="1828800"/>
-          </a:xfrm>
-          <a:prstGeom prst="roundRect">
-            <a:avLst>
-              <a:gd name="adj" fmla="val 4000"/>
-            </a:avLst>
-          </a:prstGeom>
-          <a:solidFill>
-            <a:srgbClr val="F0F5EA"/>
-          </a:solidFill>
-          <a:ln w="12700">
-            <a:solidFill>
-              <a:srgbClr val="FFFFFF"/>
-            </a:solidFill>
-            <a:prstDash val="solid"/>
-          </a:ln>
-        </p:spPr>
-      </p:sp>
-      <p:sp>
-        <p:nvSpPr>
-          <p:cNvPr id="16" name="Shape 14"/>
-          <p:cNvSpPr/>
-          <p:nvPr/>
-        </p:nvSpPr>
-        <p:spPr>
-          <a:xfrm>
-            <a:off x="7101840" y="1280160"/>
-            <a:ext cx="640080" cy="640080"/>
-          </a:xfrm>
-          <a:prstGeom prst="ellipse">
-            <a:avLst/>
-          </a:prstGeom>
-          <a:solidFill>
-            <a:srgbClr val="97BC62"/>
-          </a:solidFill>
-          <a:ln/>
-        </p:spPr>
-      </p:sp>
-      <p:sp>
-        <p:nvSpPr>
-          <p:cNvPr id="17" name="Text 15"/>
-          <p:cNvSpPr/>
-          <p:nvPr/>
-        </p:nvSpPr>
-        <p:spPr>
-          <a:xfrm>
-            <a:off x="7101840" y="1353312"/>
-            <a:ext cx="640080" cy="457200"/>
-          </a:xfrm>
-          <a:prstGeom prst="rect">
-            <a:avLst/>
-          </a:prstGeom>
-          <a:noFill/>
-          <a:ln/>
-        </p:spPr>
-        <p:txBody>
-          <a:bodyPr wrap="square" lIns="0" tIns="0" rIns="0" bIns="0" rtlCol="0" anchor="ctr"/>
-          <a:lstStyle/>
-          <a:p>
-            <a:pPr algn="ctr" indent="0" marL="0">
-              <a:buNone/>
-            </a:pPr>
-            <a:r>
-              <a:rPr lang="en-US" sz="2000" b="1" dirty="0">
-                <a:solidFill>
-                  <a:srgbClr val="FFFFFF"/>
-                </a:solidFill>
-                <a:latin typeface="Cambria" pitchFamily="34" charset="0"/>
-                <a:ea typeface="Cambria" pitchFamily="34" charset="-122"/>
-                <a:cs typeface="Cambria" pitchFamily="34" charset="-120"/>
-              </a:rPr>
-              <a:t>3</a:t>
-            </a:r>
-            <a:endParaRPr lang="en-US" sz="2000" dirty="0"/>
-          </a:p>
-        </p:txBody>
-      </p:sp>
-      <p:sp>
-        <p:nvSpPr>
-          <p:cNvPr id="18" name="Text 16"/>
-          <p:cNvSpPr/>
-          <p:nvPr/>
-        </p:nvSpPr>
-        <p:spPr>
-          <a:xfrm>
-            <a:off x="6294120" y="2057400"/>
-            <a:ext cx="2255520" cy="365760"/>
-          </a:xfrm>
-          <a:prstGeom prst="rect">
-            <a:avLst/>
-          </a:prstGeom>
-          <a:noFill/>
-          <a:ln/>
-        </p:spPr>
-        <p:txBody>
-          <a:bodyPr wrap="square" lIns="0" tIns="0" rIns="0" bIns="0" rtlCol="0" anchor="ctr"/>
-          <a:lstStyle/>
-          <a:p>
-            <a:pPr algn="ctr" indent="0" marL="0">
-              <a:buNone/>
-            </a:pPr>
-            <a:r>
-              <a:rPr lang="en-US" sz="1500" b="1" dirty="0">
-                <a:solidFill>
-                  <a:srgbClr val="2C5F2D"/>
-                </a:solidFill>
-                <a:latin typeface="Cambria" pitchFamily="34" charset="0"/>
-                <a:ea typeface="Cambria" pitchFamily="34" charset="-122"/>
-                <a:cs typeface="Cambria" pitchFamily="34" charset="-120"/>
-              </a:rPr>
-              <a:t>Sujal Shukla</a:t>
-            </a:r>
-            <a:endParaRPr lang="en-US" sz="1500" dirty="0"/>
-          </a:p>
-        </p:txBody>
-      </p:sp>
-      <p:sp>
-        <p:nvSpPr>
-          <p:cNvPr id="19" name="Text 17"/>
-          <p:cNvSpPr/>
-          <p:nvPr/>
-        </p:nvSpPr>
-        <p:spPr>
-          <a:xfrm>
-            <a:off x="6294120" y="2423160"/>
-            <a:ext cx="2255520" cy="274320"/>
-          </a:xfrm>
-          <a:prstGeom prst="rect">
-            <a:avLst/>
-          </a:prstGeom>
-          <a:noFill/>
-          <a:ln/>
-        </p:spPr>
-        <p:txBody>
-          <a:bodyPr wrap="square" lIns="0" tIns="0" rIns="0" bIns="0" rtlCol="0" anchor="ctr"/>
-          <a:lstStyle/>
-          <a:p>
-            <a:pPr algn="ctr" indent="0" marL="0">
-              <a:buNone/>
-            </a:pPr>
-            <a:r>
-              <a:rPr lang="en-US" sz="1150" dirty="0">
-                <a:solidFill>
-                  <a:srgbClr val="5A6B5A"/>
-                </a:solidFill>
-                <a:latin typeface="Calibri" pitchFamily="34" charset="0"/>
-                <a:ea typeface="Calibri" pitchFamily="34" charset="-122"/>
-                <a:cs typeface="Calibri" pitchFamily="34" charset="-120"/>
-              </a:rPr>
-              <a:t>Deck and submission</a:t>
-            </a:r>
-            <a:endParaRPr lang="en-US" sz="1150" dirty="0"/>
-          </a:p>
-        </p:txBody>
-      </p:sp>
-      <p:sp>
-        <p:nvSpPr>
-          <p:cNvPr id="20" name="Text 18"/>
-          <p:cNvSpPr/>
-          <p:nvPr/>
-        </p:nvSpPr>
-        <p:spPr>
-          <a:xfrm>
-            <a:off x="6294120" y="2697480"/>
-            <a:ext cx="2255520" cy="320040"/>
-          </a:xfrm>
-          <a:prstGeom prst="rect">
-            <a:avLst/>
-          </a:prstGeom>
-          <a:noFill/>
-          <a:ln/>
-        </p:spPr>
-        <p:txBody>
-          <a:bodyPr wrap="square" lIns="0" tIns="0" rIns="0" bIns="0" rtlCol="0" anchor="ctr"/>
-          <a:lstStyle/>
-          <a:p>
-            <a:pPr algn="ctr" indent="0" marL="0">
-              <a:buNone/>
-            </a:pPr>
-            <a:r>
-              <a:rPr lang="en-US" sz="950" i="1" dirty="0">
-                <a:solidFill>
-                  <a:srgbClr val="5A6B5A"/>
-                </a:solidFill>
-                <a:latin typeface="Calibri" pitchFamily="34" charset="0"/>
-                <a:ea typeface="Calibri" pitchFamily="34" charset="-122"/>
-                <a:cs typeface="Calibri" pitchFamily="34" charset="-120"/>
-              </a:rPr>
-              <a:t>submission text, paste at gates, backup demo runner</a:t>
-            </a:r>
-            <a:endParaRPr lang="en-US" sz="950" dirty="0"/>
-          </a:p>
-        </p:txBody>
-      </p:sp>
-      <p:sp>
-        <p:nvSpPr>
-          <p:cNvPr id="21" name="Text 19"/>
-          <p:cNvSpPr/>
-          <p:nvPr/>
-        </p:nvSpPr>
-        <p:spPr>
-          <a:xfrm>
-            <a:off x="457200" y="3383280"/>
-            <a:ext cx="8229600" cy="457200"/>
-          </a:xfrm>
-          <a:prstGeom prst="rect">
-            <a:avLst/>
-          </a:prstGeom>
-          <a:noFill/>
-          <a:ln/>
-        </p:spPr>
-        <p:txBody>
-          <a:bodyPr wrap="square" lIns="0" tIns="0" rIns="0" bIns="0" rtlCol="0" anchor="ctr"/>
-          <a:lstStyle/>
-          <a:p>
-            <a:pPr indent="0" marL="0">
-              <a:buNone/>
-            </a:pPr>
-            <a:r>
-              <a:rPr lang="en-US" sz="1300" b="1" dirty="0">
-                <a:solidFill>
-                  <a:srgbClr val="212121"/>
-                </a:solidFill>
-                <a:latin typeface="Cambria" pitchFamily="34" charset="0"/>
-                <a:ea typeface="Cambria" pitchFamily="34" charset="-122"/>
-                <a:cs typeface="Cambria" pitchFamily="34" charset="-120"/>
-              </a:rPr>
-              <a:t>Already shipped: a verified governed pipeline (85/85 suites), honest outcome badges, and a statement-faithful research method with every claim sourced.</a:t>
-            </a:r>
-            <a:endParaRPr lang="en-US" sz="1300" dirty="0"/>
-          </a:p>
-        </p:txBody>
-      </p:sp>
-      <p:sp>
-        <p:nvSpPr>
-          <p:cNvPr id="22" name="Text 20"/>
-          <p:cNvSpPr/>
-          <p:nvPr/>
-        </p:nvSpPr>
-        <p:spPr>
-          <a:xfrm>
-            <a:off x="457200" y="4828032"/>
-            <a:ext cx="8229600" cy="274320"/>
-          </a:xfrm>
-          <a:prstGeom prst="rect">
-            <a:avLst/>
-          </a:prstGeom>
-          <a:noFill/>
-          <a:ln/>
-        </p:spPr>
-        <p:txBody>
-          <a:bodyPr wrap="square" lIns="0" tIns="0" rIns="0" bIns="0" rtlCol="0" anchor="ctr"/>
-          <a:lstStyle/>
-          <a:p>
-            <a:pPr indent="0" marL="0">
-              <a:buNone/>
-            </a:pPr>
-            <a:r>
-              <a:rPr lang="en-US" sz="900" dirty="0">
-                <a:solidFill>
-                  <a:srgbClr val="5A6B5A"/>
-                </a:solidFill>
-                <a:latin typeface="Calibri" pitchFamily="34" charset="0"/>
-                <a:ea typeface="Calibri" pitchFamily="34" charset="-122"/>
-                <a:cs typeface="Calibri" pitchFamily="34" charset="-120"/>
-              </a:rPr>
-              <a:t>E&amp;CE research profile matches the statement core: sensors, communications, ML, power resilience.</a:t>
+              <a:t>Market slide after traction in YC ordering. No TAM multiplication, no 'everyone everywhere' line.</a:t>
             </a:r>
             <a:endParaRPr lang="en-US" sz="900" dirty="0"/>
           </a:p>

--- a/scaffold/deck/KrishiSetu-Round0-20260816.pptx
+++ b/scaffold/deck/KrishiSetu-Round0-20260816.pptx
@@ -3301,7 +3301,7 @@
                 <a:ea typeface="Cambria" pitchFamily="34" charset="-122"/>
                 <a:cs typeface="Cambria" pitchFamily="34" charset="-120"/>
               </a:rPr>
-              <a:t>78.4 crore</a:t>
+              <a:t>88.5 lakh</a:t>
             </a:r>
             <a:endParaRPr lang="en-US" sz="2600" dirty="0"/>
           </a:p>
@@ -3340,7 +3340,7 @@
                 <a:ea typeface="Calibri" pitchFamily="34" charset="-122"/>
                 <a:cs typeface="Calibri" pitchFamily="34" charset="-120"/>
               </a:rPr>
-              <a:t>PMFBY crop-insurance applications on a Rs 1.83 lakh crore program</a:t>
+              <a:t>PMFBY crop-insurance enrollments, Rs 2,580 crore claims paid (2020-25, Lok Sabha annexure)</a:t>
             </a:r>
             <a:endParaRPr lang="en-US" sz="1050" dirty="0"/>
           </a:p>
@@ -8231,7 +8231,7 @@
                 <a:ea typeface="Cambria" pitchFamily="34" charset="-122"/>
                 <a:cs typeface="Cambria" pitchFamily="34" charset="-120"/>
               </a:rPr>
-              <a:t>78.4 crore PMFBY applications, Rs 1.83 lakh crore program</a:t>
+              <a:t>88.5 lakh PMFBY enrollments, Rs 2,580 crore claims paid (2020-25)</a:t>
             </a:r>
             <a:endParaRPr lang="en-US" sz="1500" dirty="0"/>
           </a:p>

--- a/scaffold/deck/KrishiSetu-Round0-20260816.pptx
+++ b/scaffold/deck/KrishiSetu-Round0-20260816.pptx
@@ -8759,7 +8759,7 @@
                 <a:ea typeface="Arial" pitchFamily="34" charset="-122"/>
                 <a:cs typeface="Arial" pitchFamily="34" charset="-120"/>
               </a:rPr>
-              <a:t>"Plot 12B, flowering paddy: harvest by 18:00 tomorrow, or move to the raised platform. Source: IMD + rule 14. Cost of waiting: est. yield loss."</a:t>
+              <a:t>"Plot 12B, flowering paddy: harvest by 18:00 tomorrow, or move to the raised platform. Source: IMD + rule R17. Cost of waiting: est. yield loss."</a:t>
             </a:r>
             <a:endParaRPr lang="en-US" sz="1350" dirty="0"/>
           </a:p>

--- a/scaffold/deck/KrishiSetu-Round0-20260816.pptx
+++ b/scaffold/deck/KrishiSetu-Round0-20260816.pptx
@@ -864,7 +864,7 @@
           <a:p>
             <a:r>
               <a:rPr lang="en-US" dirty="0"/>
-              <a:t>This slide is the holy-shit moment: 48 runs, 7 waves, 2.5M chars, 4,000+ sources, A-D grades. Judges who ask 'where is this from' get a path. Never claim we read everything without this map to prove it.</a:t>
+              <a:t>This slide is the holy-shit moment: 49 reports, 7 waves, 3.2M chars, 4,800+ sources, A-D grades. Judges who ask 'where is this from' get a path. Never claim we read everything without this map to prove it.</a:t>
             </a:r>
             <a:endParaRPr lang="en-US" dirty="0"/>
           </a:p>
@@ -2349,7 +2349,7 @@
                 <a:ea typeface="Arial" pitchFamily="34" charset="-122"/>
                 <a:cs typeface="Arial" pitchFamily="34" charset="-120"/>
               </a:rPr>
-              <a:t>systems, research method, 17-statement evidence wave</a:t>
+              <a:t>everything: architecture, code, research method, 49-report evidence wave, backend, QA, devops</a:t>
             </a:r>
             <a:endParaRPr lang="en-US" sz="950" dirty="0"/>
           </a:p>
@@ -2538,7 +2538,7 @@
                 <a:ea typeface="Arial" pitchFamily="34" charset="-122"/>
                 <a:cs typeface="Arial" pitchFamily="34" charset="-120"/>
               </a:rPr>
-              <a:t>Engine and demo</a:t>
+              <a:t>Deck and design</a:t>
             </a:r>
             <a:endParaRPr lang="en-US" sz="1150" dirty="0"/>
           </a:p>
@@ -2577,7 +2577,7 @@
                 <a:ea typeface="Arial" pitchFamily="34" charset="-122"/>
                 <a:cs typeface="Arial" pitchFamily="34" charset="-120"/>
               </a:rPr>
-              <a:t>zero-dep engine, demo.sh, seed data</a:t>
+              <a:t>presentation build and design</a:t>
             </a:r>
             <a:endParaRPr lang="en-US" sz="950" dirty="0"/>
           </a:p>
@@ -2766,7 +2766,7 @@
                 <a:ea typeface="Arial" pitchFamily="34" charset="-122"/>
                 <a:cs typeface="Arial" pitchFamily="34" charset="-120"/>
               </a:rPr>
-              <a:t>Deck and submission</a:t>
+              <a:t>Deck design</a:t>
             </a:r>
             <a:endParaRPr lang="en-US" sz="1150" dirty="0"/>
           </a:p>
@@ -2805,7 +2805,7 @@
                 <a:ea typeface="Arial" pitchFamily="34" charset="-122"/>
                 <a:cs typeface="Arial" pitchFamily="34" charset="-120"/>
               </a:rPr>
-              <a:t>submission text, paste at gates, backup demo runner</a:t>
+              <a:t>design assistance on the presentation</a:t>
             </a:r>
             <a:endParaRPr lang="en-US" sz="950" dirty="0"/>
           </a:p>
@@ -4360,7 +4360,7 @@
                 <a:ea typeface="Arial Black" pitchFamily="34" charset="-122"/>
                 <a:cs typeface="Arial Black" pitchFamily="34" charset="-120"/>
               </a:rPr>
-              <a:t>48</a:t>
+              <a:t>49</a:t>
             </a:r>
             <a:endParaRPr lang="en-US" sz="4400" dirty="0"/>
           </a:p>
@@ -4399,7 +4399,7 @@
                 <a:ea typeface="Arial" pitchFamily="34" charset="-122"/>
                 <a:cs typeface="Arial" pitchFamily="34" charset="-120"/>
               </a:rPr>
-              <a:t>parallel deep-research runs, 7 waves, every run multi-channel with coverage tables, noise logs, A-D evidence grades</a:t>
+              <a:t>parallel deep-research reports across 7 waves, every run multi-channel with coverage tables, noise logs, A-D evidence grades</a:t>
             </a:r>
             <a:endParaRPr lang="en-US" sz="950" dirty="0"/>
           </a:p>
@@ -4554,7 +4554,7 @@
                 <a:ea typeface="Arial Black" pitchFamily="34" charset="-122"/>
                 <a:cs typeface="Arial Black" pitchFamily="34" charset="-120"/>
               </a:rPr>
-              <a:t>2.5M+</a:t>
+              <a:t>3.2M+</a:t>
             </a:r>
             <a:endParaRPr lang="en-US" sz="4400" dirty="0"/>
           </a:p>
@@ -4748,7 +4748,7 @@
                 <a:ea typeface="Arial Black" pitchFamily="34" charset="-122"/>
                 <a:cs typeface="Arial Black" pitchFamily="34" charset="-120"/>
               </a:rPr>
-              <a:t>4,000+</a:t>
+              <a:t>4,800+</a:t>
             </a:r>
             <a:endParaRPr lang="en-US" sz="4400" dirty="0"/>
           </a:p>
@@ -4787,7 +4787,7 @@
                 <a:ea typeface="Arial" pitchFamily="34" charset="-122"/>
                 <a:cs typeface="Arial" pitchFamily="34" charset="-120"/>
               </a:rPr>
-              <a:t>cited sources across 6 continents: cyclone/food/agri ledgers, cascade math, human wisdom, frontier science</a:t>
+              <a:t>cited source mentions across 6 continents: cyclone/flood/agri ledgers, cascade math, human wisdom, frontier science</a:t>
             </a:r>
             <a:endParaRPr lang="en-US" sz="950" dirty="0"/>
           </a:p>

--- a/scaffold/deck/KrishiSetu-Round0-20260816.pptx
+++ b/scaffold/deck/KrishiSetu-Round0-20260816.pptx
@@ -7519,7 +7519,7 @@
         <p:spPr>
           <a:xfrm>
             <a:off x="507492" y="1101852"/>
-            <a:ext cx="4069080" cy="914400"/>
+            <a:ext cx="4069080" cy="841248"/>
           </a:xfrm>
           <a:prstGeom prst="rect">
             <a:avLst/>
@@ -7544,7 +7544,7 @@
         <p:spPr>
           <a:xfrm>
             <a:off x="4507992" y="1124712"/>
-            <a:ext cx="82296" cy="768096"/>
+            <a:ext cx="82296" cy="694944"/>
           </a:xfrm>
           <a:prstGeom prst="parallelogram">
             <a:avLst/>
@@ -7569,11 +7569,11 @@
         <p:spPr>
           <a:xfrm rot="-90000">
             <a:off x="457200" y="1051560"/>
-            <a:ext cx="4069080" cy="914400"/>
+            <a:ext cx="4069080" cy="841248"/>
           </a:xfrm>
           <a:prstGeom prst="roundRect">
             <a:avLst>
-              <a:gd name="adj" fmla="val 6000"/>
+              <a:gd name="adj" fmla="val 6522"/>
             </a:avLst>
           </a:prstGeom>
           <a:solidFill>
@@ -7595,7 +7595,7 @@
         </p:nvSpPr>
         <p:spPr>
           <a:xfrm>
-            <a:off x="594360" y="1161288"/>
+            <a:off x="594360" y="1143000"/>
             <a:ext cx="1737360" cy="457200"/>
           </a:xfrm>
           <a:prstGeom prst="rect">
@@ -7612,7 +7612,7 @@
               <a:buNone/>
             </a:pPr>
             <a:r>
-              <a:rPr lang="en-US" sz="2000" b="1" dirty="0">
+              <a:rPr lang="en-US" sz="1800" b="1" dirty="0">
                 <a:solidFill>
                   <a:srgbClr val="FFFFFF"/>
                 </a:solidFill>
@@ -7622,7 +7622,7 @@
               </a:rPr>
               <a:t>85 / 85</a:t>
             </a:r>
-            <a:endParaRPr lang="en-US" sz="2000" dirty="0"/>
+            <a:endParaRPr lang="en-US" sz="1800" dirty="0"/>
           </a:p>
         </p:txBody>
       </p:sp>
@@ -7634,8 +7634,8 @@
         </p:nvSpPr>
         <p:spPr>
           <a:xfrm>
-            <a:off x="2331720" y="1161288"/>
-            <a:ext cx="2103120" cy="731520"/>
+            <a:off x="2331720" y="1143000"/>
+            <a:ext cx="2103120" cy="685800"/>
           </a:xfrm>
           <a:prstGeom prst="rect">
             <a:avLst/>
@@ -7651,7 +7651,7 @@
               <a:buNone/>
             </a:pPr>
             <a:r>
-              <a:rPr lang="en-US" sz="950" dirty="0">
+              <a:rPr lang="en-US" sz="900" dirty="0">
                 <a:solidFill>
                   <a:srgbClr val="B0B0B0"/>
                 </a:solidFill>
@@ -7661,7 +7661,7 @@
               </a:rPr>
               <a:t>acceptance suites green across approval, trace, providers, multimodal, provenance, feeds, honesty, stress</a:t>
             </a:r>
-            <a:endParaRPr lang="en-US" sz="950" dirty="0"/>
+            <a:endParaRPr lang="en-US" sz="900" dirty="0"/>
           </a:p>
         </p:txBody>
       </p:sp>
@@ -7674,7 +7674,7 @@
         <p:spPr>
           <a:xfrm>
             <a:off x="4668012" y="1101852"/>
-            <a:ext cx="4069080" cy="914400"/>
+            <a:ext cx="4069080" cy="841248"/>
           </a:xfrm>
           <a:prstGeom prst="rect">
             <a:avLst/>
@@ -7699,7 +7699,7 @@
         <p:spPr>
           <a:xfrm>
             <a:off x="8668512" y="1124712"/>
-            <a:ext cx="82296" cy="768096"/>
+            <a:ext cx="82296" cy="694944"/>
           </a:xfrm>
           <a:prstGeom prst="parallelogram">
             <a:avLst/>
@@ -7724,11 +7724,11 @@
         <p:spPr>
           <a:xfrm rot="-90000">
             <a:off x="4617720" y="1051560"/>
-            <a:ext cx="4069080" cy="914400"/>
+            <a:ext cx="4069080" cy="841248"/>
           </a:xfrm>
           <a:prstGeom prst="roundRect">
             <a:avLst>
-              <a:gd name="adj" fmla="val 6000"/>
+              <a:gd name="adj" fmla="val 6522"/>
             </a:avLst>
           </a:prstGeom>
           <a:solidFill>
@@ -7750,7 +7750,7 @@
         </p:nvSpPr>
         <p:spPr>
           <a:xfrm>
-            <a:off x="4754880" y="1161288"/>
+            <a:off x="4754880" y="1143000"/>
             <a:ext cx="1737360" cy="457200"/>
           </a:xfrm>
           <a:prstGeom prst="rect">
@@ -7767,7 +7767,7 @@
               <a:buNone/>
             </a:pPr>
             <a:r>
-              <a:rPr lang="en-US" sz="2000" b="1" dirty="0">
+              <a:rPr lang="en-US" sz="1800" b="1" dirty="0">
                 <a:solidFill>
                   <a:srgbClr val="FFFFFF"/>
                 </a:solidFill>
@@ -7777,7 +7777,7 @@
               </a:rPr>
               <a:t>46 / 46</a:t>
             </a:r>
-            <a:endParaRPr lang="en-US" sz="2000" dirty="0"/>
+            <a:endParaRPr lang="en-US" sz="1800" dirty="0"/>
           </a:p>
         </p:txBody>
       </p:sp>
@@ -7789,8 +7789,8 @@
         </p:nvSpPr>
         <p:spPr>
           <a:xfrm>
-            <a:off x="6492240" y="1161288"/>
-            <a:ext cx="2103120" cy="731520"/>
+            <a:off x="6492240" y="1143000"/>
+            <a:ext cx="2103120" cy="685800"/>
           </a:xfrm>
           <a:prstGeom prst="rect">
             <a:avLst/>
@@ -7806,7 +7806,7 @@
               <a:buNone/>
             </a:pPr>
             <a:r>
-              <a:rPr lang="en-US" sz="950" dirty="0">
+              <a:rPr lang="en-US" sz="900" dirty="0">
                 <a:solidFill>
                   <a:srgbClr val="B0B0B0"/>
                 </a:solidFill>
@@ -7816,7 +7816,7 @@
               </a:rPr>
               <a:t>lane fixture scenarios verified, order-independent on fresh databases</a:t>
             </a:r>
-            <a:endParaRPr lang="en-US" sz="950" dirty="0"/>
+            <a:endParaRPr lang="en-US" sz="900" dirty="0"/>
           </a:p>
         </p:txBody>
       </p:sp>
@@ -7828,8 +7828,8 @@
         </p:nvSpPr>
         <p:spPr>
           <a:xfrm>
-            <a:off x="507492" y="2153412"/>
-            <a:ext cx="4069080" cy="914400"/>
+            <a:off x="507492" y="2061972"/>
+            <a:ext cx="4069080" cy="841248"/>
           </a:xfrm>
           <a:prstGeom prst="rect">
             <a:avLst/>
@@ -7853,8 +7853,8 @@
         </p:nvSpPr>
         <p:spPr>
           <a:xfrm>
-            <a:off x="4507992" y="2176272"/>
-            <a:ext cx="82296" cy="768096"/>
+            <a:off x="4507992" y="2084832"/>
+            <a:ext cx="82296" cy="694944"/>
           </a:xfrm>
           <a:prstGeom prst="parallelogram">
             <a:avLst/>
@@ -7878,12 +7878,12 @@
         </p:nvSpPr>
         <p:spPr>
           <a:xfrm rot="-90000">
-            <a:off x="457200" y="2103120"/>
-            <a:ext cx="4069080" cy="914400"/>
+            <a:off x="457200" y="2011680"/>
+            <a:ext cx="4069080" cy="841248"/>
           </a:xfrm>
           <a:prstGeom prst="roundRect">
             <a:avLst>
-              <a:gd name="adj" fmla="val 6000"/>
+              <a:gd name="adj" fmla="val 6522"/>
             </a:avLst>
           </a:prstGeom>
           <a:solidFill>
@@ -7905,7 +7905,7 @@
         </p:nvSpPr>
         <p:spPr>
           <a:xfrm>
-            <a:off x="594360" y="2212848"/>
+            <a:off x="594360" y="2103120"/>
             <a:ext cx="1737360" cy="457200"/>
           </a:xfrm>
           <a:prstGeom prst="rect">
@@ -7922,7 +7922,7 @@
               <a:buNone/>
             </a:pPr>
             <a:r>
-              <a:rPr lang="en-US" sz="2000" b="1" dirty="0">
+              <a:rPr lang="en-US" sz="1800" b="1" dirty="0">
                 <a:solidFill>
                   <a:srgbClr val="FFFFFF"/>
                 </a:solidFill>
@@ -7932,7 +7932,7 @@
               </a:rPr>
               <a:t>Zero-dep</a:t>
             </a:r>
-            <a:endParaRPr lang="en-US" sz="2000" dirty="0"/>
+            <a:endParaRPr lang="en-US" sz="1800" dirty="0"/>
           </a:p>
         </p:txBody>
       </p:sp>
@@ -7944,8 +7944,8 @@
         </p:nvSpPr>
         <p:spPr>
           <a:xfrm>
-            <a:off x="2331720" y="2212848"/>
-            <a:ext cx="2103120" cy="731520"/>
+            <a:off x="2331720" y="2103120"/>
+            <a:ext cx="2103120" cy="685800"/>
           </a:xfrm>
           <a:prstGeom prst="rect">
             <a:avLst/>
@@ -7961,7 +7961,7 @@
               <a:buNone/>
             </a:pPr>
             <a:r>
-              <a:rPr lang="en-US" sz="950" dirty="0">
+              <a:rPr lang="en-US" sz="900" dirty="0">
                 <a:solidFill>
                   <a:srgbClr val="B0B0B0"/>
                 </a:solidFill>
@@ -7969,9 +7969,9 @@
                 <a:ea typeface="Arial" pitchFamily="34" charset="-122"/>
                 <a:cs typeface="Arial" pitchFamily="34" charset="-120"/>
               </a:rPr>
-              <a:t>engine runs on stdlib only; demo never dies, offline fallback replay</a:t>
-            </a:r>
-            <a:endParaRPr lang="en-US" sz="950" dirty="0"/>
+              <a:t>stdlib python only: no installs, no API keys, no network. runs on any machine with python3</a:t>
+            </a:r>
+            <a:endParaRPr lang="en-US" sz="900" dirty="0"/>
           </a:p>
         </p:txBody>
       </p:sp>
@@ -7983,8 +7983,8 @@
         </p:nvSpPr>
         <p:spPr>
           <a:xfrm>
-            <a:off x="4668012" y="2153412"/>
-            <a:ext cx="4069080" cy="914400"/>
+            <a:off x="4668012" y="2061972"/>
+            <a:ext cx="4069080" cy="841248"/>
           </a:xfrm>
           <a:prstGeom prst="rect">
             <a:avLst/>
@@ -8008,8 +8008,8 @@
         </p:nvSpPr>
         <p:spPr>
           <a:xfrm>
-            <a:off x="8668512" y="2176272"/>
-            <a:ext cx="82296" cy="768096"/>
+            <a:off x="8668512" y="2084832"/>
+            <a:ext cx="82296" cy="694944"/>
           </a:xfrm>
           <a:prstGeom prst="parallelogram">
             <a:avLst/>
@@ -8033,12 +8033,12 @@
         </p:nvSpPr>
         <p:spPr>
           <a:xfrm rot="-90000">
-            <a:off x="4617720" y="2103120"/>
-            <a:ext cx="4069080" cy="914400"/>
+            <a:off x="4617720" y="2011680"/>
+            <a:ext cx="4069080" cy="841248"/>
           </a:xfrm>
           <a:prstGeom prst="roundRect">
             <a:avLst>
-              <a:gd name="adj" fmla="val 6000"/>
+              <a:gd name="adj" fmla="val 6522"/>
             </a:avLst>
           </a:prstGeom>
           <a:solidFill>
@@ -8060,7 +8060,7 @@
         </p:nvSpPr>
         <p:spPr>
           <a:xfrm>
-            <a:off x="4754880" y="2212848"/>
+            <a:off x="4754880" y="2103120"/>
             <a:ext cx="1737360" cy="457200"/>
           </a:xfrm>
           <a:prstGeom prst="rect">
@@ -8077,7 +8077,7 @@
               <a:buNone/>
             </a:pPr>
             <a:r>
-              <a:rPr lang="en-US" sz="2000" b="1" dirty="0">
+              <a:rPr lang="en-US" sz="1800" b="1" dirty="0">
                 <a:solidFill>
                   <a:srgbClr val="FFFFFF"/>
                 </a:solidFill>
@@ -8085,9 +8085,9 @@
                 <a:ea typeface="Arial Black" pitchFamily="34" charset="-122"/>
                 <a:cs typeface="Arial Black" pitchFamily="34" charset="-120"/>
               </a:rPr>
-              <a:t>Honest mode</a:t>
-            </a:r>
-            <a:endParaRPr lang="en-US" sz="2000" dirty="0"/>
+              <a:t>Self-dependent</a:t>
+            </a:r>
+            <a:endParaRPr lang="en-US" sz="1800" dirty="0"/>
           </a:p>
         </p:txBody>
       </p:sp>
@@ -8099,8 +8099,8 @@
         </p:nvSpPr>
         <p:spPr>
           <a:xfrm>
-            <a:off x="6492240" y="2212848"/>
-            <a:ext cx="2103120" cy="731520"/>
+            <a:off x="6492240" y="2103120"/>
+            <a:ext cx="2103120" cy="685800"/>
           </a:xfrm>
           <a:prstGeom prst="rect">
             <a:avLst/>
@@ -8116,7 +8116,7 @@
               <a:buNone/>
             </a:pPr>
             <a:r>
-              <a:rPr lang="en-US" sz="950" dirty="0">
+              <a:rPr lang="en-US" sz="900" dirty="0">
                 <a:solidFill>
                   <a:srgbClr val="B0B0B0"/>
                 </a:solidFill>
@@ -8124,61 +8124,22 @@
                 <a:ea typeface="Arial" pitchFamily="34" charset="-122"/>
                 <a:cs typeface="Arial" pitchFamily="34" charset="-120"/>
               </a:rPr>
-              <a:t>badges count actual provider outcomes, no badge-lie, audit trail per action</a:t>
-            </a:r>
-            <a:endParaRPr lang="en-US" sz="950" dirty="0"/>
-          </a:p>
-        </p:txBody>
-      </p:sp>
-      <p:sp>
-        <p:nvSpPr>
-          <p:cNvPr id="25" name="Text 23"/>
-          <p:cNvSpPr/>
-          <p:nvPr/>
-        </p:nvSpPr>
-        <p:spPr>
-          <a:xfrm>
-            <a:off x="4983480" y="3291840"/>
-            <a:ext cx="3657600" cy="822960"/>
-          </a:xfrm>
-          <a:prstGeom prst="rect">
-            <a:avLst/>
-          </a:prstGeom>
-          <a:noFill/>
-          <a:ln/>
-        </p:spPr>
-        <p:txBody>
-          <a:bodyPr wrap="square" lIns="0" tIns="0" rIns="0" bIns="0" rtlCol="0" anchor="ctr"/>
-          <a:lstStyle/>
-          <a:p>
-            <a:pPr indent="0" marL="0">
-              <a:buNone/>
-            </a:pPr>
-            <a:r>
-              <a:rPr lang="en-US" sz="1150" dirty="0">
-                <a:solidFill>
-                  <a:srgbClr val="0A0A0A"/>
-                </a:solidFill>
-                <a:latin typeface="Arial" pitchFamily="34" charset="0"/>
-                <a:ea typeface="Arial" pitchFamily="34" charset="-122"/>
-                <a:cs typeface="Arial" pitchFamily="34" charset="-120"/>
-              </a:rPr>
-              <a:t>Demo arc (3 minutes): Asha's plot -&gt; cyclone forecast -&gt; staged Odia advisory -&gt; tower drops, advice still syncs -&gt; damage evidence -&gt; claim packet export.</a:t>
-            </a:r>
-            <a:endParaRPr lang="en-US" sz="1150" dirty="0"/>
-          </a:p>
-        </p:txBody>
-      </p:sp>
-      <p:sp>
-        <p:nvSpPr>
-          <p:cNvPr id="26" name="Shape 24"/>
-          <p:cNvSpPr/>
-          <p:nvPr/>
-        </p:nvSpPr>
-        <p:spPr>
-          <a:xfrm>
-            <a:off x="507492" y="4027932"/>
-            <a:ext cx="8229600" cy="658368"/>
+              <a:t>built for 4G or less, offline-first by design: decision engine + UI run entirely on local CPU</a:t>
+            </a:r>
+            <a:endParaRPr lang="en-US" sz="900" dirty="0"/>
+          </a:p>
+        </p:txBody>
+      </p:sp>
+      <p:sp>
+        <p:nvSpPr>
+          <p:cNvPr id="25" name="Shape 23"/>
+          <p:cNvSpPr/>
+          <p:nvPr/>
+        </p:nvSpPr>
+        <p:spPr>
+          <a:xfrm>
+            <a:off x="507492" y="3022092"/>
+            <a:ext cx="4069080" cy="841248"/>
           </a:xfrm>
           <a:prstGeom prst="rect">
             <a:avLst/>
@@ -8196,18 +8157,43 @@
       </p:sp>
       <p:sp>
         <p:nvSpPr>
+          <p:cNvPr id="26" name="Shape 24"/>
+          <p:cNvSpPr/>
+          <p:nvPr/>
+        </p:nvSpPr>
+        <p:spPr>
+          <a:xfrm>
+            <a:off x="4507992" y="3044952"/>
+            <a:ext cx="82296" cy="694944"/>
+          </a:xfrm>
+          <a:prstGeom prst="parallelogram">
+            <a:avLst/>
+          </a:prstGeom>
+          <a:solidFill>
+            <a:srgbClr val="555555"/>
+          </a:solidFill>
+          <a:ln w="12700">
+            <a:solidFill>
+              <a:srgbClr val="555555"/>
+            </a:solidFill>
+            <a:prstDash val="solid"/>
+          </a:ln>
+        </p:spPr>
+      </p:sp>
+      <p:sp>
+        <p:nvSpPr>
           <p:cNvPr id="27" name="Shape 25"/>
           <p:cNvSpPr/>
           <p:nvPr/>
         </p:nvSpPr>
         <p:spPr>
-          <a:xfrm>
-            <a:off x="457200" y="3977640"/>
-            <a:ext cx="8229600" cy="658368"/>
+          <a:xfrm rot="-90000">
+            <a:off x="457200" y="2971800"/>
+            <a:ext cx="4069080" cy="841248"/>
           </a:xfrm>
           <a:prstGeom prst="roundRect">
             <a:avLst>
-              <a:gd name="adj" fmla="val 8333"/>
+              <a:gd name="adj" fmla="val 6522"/>
             </a:avLst>
           </a:prstGeom>
           <a:solidFill>
@@ -8223,7 +8209,331 @@
       </p:sp>
       <p:sp>
         <p:nvSpPr>
-          <p:cNvPr id="28" name="Shape 26"/>
+          <p:cNvPr id="28" name="Text 26"/>
+          <p:cNvSpPr/>
+          <p:nvPr/>
+        </p:nvSpPr>
+        <p:spPr>
+          <a:xfrm>
+            <a:off x="594360" y="3063240"/>
+            <a:ext cx="1737360" cy="457200"/>
+          </a:xfrm>
+          <a:prstGeom prst="rect">
+            <a:avLst/>
+          </a:prstGeom>
+          <a:noFill/>
+          <a:ln/>
+        </p:spPr>
+        <p:txBody>
+          <a:bodyPr wrap="square" lIns="0" tIns="0" rIns="0" bIns="0" rtlCol="0" anchor="ctr"/>
+          <a:lstStyle/>
+          <a:p>
+            <a:pPr indent="0" marL="0">
+              <a:buNone/>
+            </a:pPr>
+            <a:r>
+              <a:rPr lang="en-US" sz="1800" b="1" dirty="0">
+                <a:solidFill>
+                  <a:srgbClr val="FFFFFF"/>
+                </a:solidFill>
+                <a:latin typeface="Arial Black" pitchFamily="34" charset="0"/>
+                <a:ea typeface="Arial Black" pitchFamily="34" charset="-122"/>
+                <a:cs typeface="Arial Black" pitchFamily="34" charset="-120"/>
+              </a:rPr>
+              <a:t>Honest mode</a:t>
+            </a:r>
+            <a:endParaRPr lang="en-US" sz="1800" dirty="0"/>
+          </a:p>
+        </p:txBody>
+      </p:sp>
+      <p:sp>
+        <p:nvSpPr>
+          <p:cNvPr id="29" name="Text 27"/>
+          <p:cNvSpPr/>
+          <p:nvPr/>
+        </p:nvSpPr>
+        <p:spPr>
+          <a:xfrm>
+            <a:off x="2331720" y="3063240"/>
+            <a:ext cx="2103120" cy="685800"/>
+          </a:xfrm>
+          <a:prstGeom prst="rect">
+            <a:avLst/>
+          </a:prstGeom>
+          <a:noFill/>
+          <a:ln/>
+        </p:spPr>
+        <p:txBody>
+          <a:bodyPr wrap="square" lIns="0" tIns="0" rIns="0" bIns="0" rtlCol="0" anchor="ctr"/>
+          <a:lstStyle/>
+          <a:p>
+            <a:pPr indent="0" marL="0">
+              <a:buNone/>
+            </a:pPr>
+            <a:r>
+              <a:rPr lang="en-US" sz="900" dirty="0">
+                <a:solidFill>
+                  <a:srgbClr val="B0B0B0"/>
+                </a:solidFill>
+                <a:latin typeface="Arial" pitchFamily="34" charset="0"/>
+                <a:ea typeface="Arial" pitchFamily="34" charset="-122"/>
+                <a:cs typeface="Arial" pitchFamily="34" charset="-120"/>
+              </a:rPr>
+              <a:t>badges count actual provider outcomes, no badge-lie, audit trail per action</a:t>
+            </a:r>
+            <a:endParaRPr lang="en-US" sz="900" dirty="0"/>
+          </a:p>
+        </p:txBody>
+      </p:sp>
+      <p:sp>
+        <p:nvSpPr>
+          <p:cNvPr id="30" name="Shape 28"/>
+          <p:cNvSpPr/>
+          <p:nvPr/>
+        </p:nvSpPr>
+        <p:spPr>
+          <a:xfrm>
+            <a:off x="4668012" y="3022092"/>
+            <a:ext cx="4069080" cy="841248"/>
+          </a:xfrm>
+          <a:prstGeom prst="rect">
+            <a:avLst/>
+          </a:prstGeom>
+          <a:solidFill>
+            <a:srgbClr val="E0E0E0"/>
+          </a:solidFill>
+          <a:ln w="12700">
+            <a:solidFill>
+              <a:srgbClr val="E0E0E0"/>
+            </a:solidFill>
+            <a:prstDash val="solid"/>
+          </a:ln>
+        </p:spPr>
+      </p:sp>
+      <p:sp>
+        <p:nvSpPr>
+          <p:cNvPr id="31" name="Shape 29"/>
+          <p:cNvSpPr/>
+          <p:nvPr/>
+        </p:nvSpPr>
+        <p:spPr>
+          <a:xfrm>
+            <a:off x="8668512" y="3044952"/>
+            <a:ext cx="82296" cy="694944"/>
+          </a:xfrm>
+          <a:prstGeom prst="parallelogram">
+            <a:avLst/>
+          </a:prstGeom>
+          <a:solidFill>
+            <a:srgbClr val="555555"/>
+          </a:solidFill>
+          <a:ln w="12700">
+            <a:solidFill>
+              <a:srgbClr val="555555"/>
+            </a:solidFill>
+            <a:prstDash val="solid"/>
+          </a:ln>
+        </p:spPr>
+      </p:sp>
+      <p:sp>
+        <p:nvSpPr>
+          <p:cNvPr id="32" name="Shape 30"/>
+          <p:cNvSpPr/>
+          <p:nvPr/>
+        </p:nvSpPr>
+        <p:spPr>
+          <a:xfrm rot="-90000">
+            <a:off x="4617720" y="2971800"/>
+            <a:ext cx="4069080" cy="841248"/>
+          </a:xfrm>
+          <a:prstGeom prst="roundRect">
+            <a:avLst>
+              <a:gd name="adj" fmla="val 6522"/>
+            </a:avLst>
+          </a:prstGeom>
+          <a:solidFill>
+            <a:srgbClr val="0A0A0A"/>
+          </a:solidFill>
+          <a:ln w="12700">
+            <a:solidFill>
+              <a:srgbClr val="FFFFFF"/>
+            </a:solidFill>
+            <a:prstDash val="solid"/>
+          </a:ln>
+        </p:spPr>
+      </p:sp>
+      <p:sp>
+        <p:nvSpPr>
+          <p:cNvPr id="33" name="Text 31"/>
+          <p:cNvSpPr/>
+          <p:nvPr/>
+        </p:nvSpPr>
+        <p:spPr>
+          <a:xfrm>
+            <a:off x="4754880" y="3063240"/>
+            <a:ext cx="1737360" cy="457200"/>
+          </a:xfrm>
+          <a:prstGeom prst="rect">
+            <a:avLst/>
+          </a:prstGeom>
+          <a:noFill/>
+          <a:ln/>
+        </p:spPr>
+        <p:txBody>
+          <a:bodyPr wrap="square" lIns="0" tIns="0" rIns="0" bIns="0" rtlCol="0" anchor="ctr"/>
+          <a:lstStyle/>
+          <a:p>
+            <a:pPr indent="0" marL="0">
+              <a:buNone/>
+            </a:pPr>
+            <a:r>
+              <a:rPr lang="en-US" sz="1800" b="1" dirty="0">
+                <a:solidFill>
+                  <a:srgbClr val="FFFFFF"/>
+                </a:solidFill>
+                <a:latin typeface="Arial Black" pitchFamily="34" charset="0"/>
+                <a:ea typeface="Arial Black" pitchFamily="34" charset="-122"/>
+                <a:cs typeface="Arial Black" pitchFamily="34" charset="-120"/>
+              </a:rPr>
+              <a:t>Live on CPU</a:t>
+            </a:r>
+            <a:endParaRPr lang="en-US" sz="1800" dirty="0"/>
+          </a:p>
+        </p:txBody>
+      </p:sp>
+      <p:sp>
+        <p:nvSpPr>
+          <p:cNvPr id="34" name="Text 32"/>
+          <p:cNvSpPr/>
+          <p:nvPr/>
+        </p:nvSpPr>
+        <p:spPr>
+          <a:xfrm>
+            <a:off x="6492240" y="3063240"/>
+            <a:ext cx="2103120" cy="685800"/>
+          </a:xfrm>
+          <a:prstGeom prst="rect">
+            <a:avLst/>
+          </a:prstGeom>
+          <a:noFill/>
+          <a:ln/>
+        </p:spPr>
+        <p:txBody>
+          <a:bodyPr wrap="square" lIns="0" tIns="0" rIns="0" bIns="0" rtlCol="0" anchor="ctr"/>
+          <a:lstStyle/>
+          <a:p>
+            <a:pPr indent="0" marL="0">
+              <a:buNone/>
+            </a:pPr>
+            <a:r>
+              <a:rPr lang="en-US" sz="900" dirty="0">
+                <a:solidFill>
+                  <a:srgbClr val="B0B0B0"/>
+                </a:solidFill>
+                <a:latin typeface="Arial" pitchFamily="34" charset="0"/>
+                <a:ea typeface="Arial" pitchFamily="34" charset="-122"/>
+                <a:cs typeface="Arial" pitchFamily="34" charset="-120"/>
+              </a:rPr>
+              <a:t>CVaR harvest decision, Fani replay band, ladder, claim packet: all computed live, milliseconds, no GPU needed</a:t>
+            </a:r>
+            <a:endParaRPr lang="en-US" sz="900" dirty="0"/>
+          </a:p>
+        </p:txBody>
+      </p:sp>
+      <p:sp>
+        <p:nvSpPr>
+          <p:cNvPr id="35" name="Text 33"/>
+          <p:cNvSpPr/>
+          <p:nvPr/>
+        </p:nvSpPr>
+        <p:spPr>
+          <a:xfrm>
+            <a:off x="4983480" y="3291840"/>
+            <a:ext cx="3657600" cy="822960"/>
+          </a:xfrm>
+          <a:prstGeom prst="rect">
+            <a:avLst/>
+          </a:prstGeom>
+          <a:noFill/>
+          <a:ln/>
+        </p:spPr>
+        <p:txBody>
+          <a:bodyPr wrap="square" lIns="0" tIns="0" rIns="0" bIns="0" rtlCol="0" anchor="ctr"/>
+          <a:lstStyle/>
+          <a:p>
+            <a:pPr indent="0" marL="0">
+              <a:buNone/>
+            </a:pPr>
+            <a:r>
+              <a:rPr lang="en-US" sz="1150" dirty="0">
+                <a:solidFill>
+                  <a:srgbClr val="0A0A0A"/>
+                </a:solidFill>
+                <a:latin typeface="Arial" pitchFamily="34" charset="0"/>
+                <a:ea typeface="Arial" pitchFamily="34" charset="-122"/>
+                <a:cs typeface="Arial" pitchFamily="34" charset="-120"/>
+              </a:rPr>
+              <a:t>Demo arc (3 minutes): Asha's plot -&gt; cyclone forecast -&gt; staged Odia advisory -&gt; tower drops, advice still syncs -&gt; damage evidence -&gt; claim packet export.</a:t>
+            </a:r>
+            <a:endParaRPr lang="en-US" sz="1150" dirty="0"/>
+          </a:p>
+        </p:txBody>
+      </p:sp>
+      <p:sp>
+        <p:nvSpPr>
+          <p:cNvPr id="36" name="Shape 34"/>
+          <p:cNvSpPr/>
+          <p:nvPr/>
+        </p:nvSpPr>
+        <p:spPr>
+          <a:xfrm>
+            <a:off x="507492" y="4027932"/>
+            <a:ext cx="8229600" cy="658368"/>
+          </a:xfrm>
+          <a:prstGeom prst="rect">
+            <a:avLst/>
+          </a:prstGeom>
+          <a:solidFill>
+            <a:srgbClr val="E0E0E0"/>
+          </a:solidFill>
+          <a:ln w="12700">
+            <a:solidFill>
+              <a:srgbClr val="E0E0E0"/>
+            </a:solidFill>
+            <a:prstDash val="solid"/>
+          </a:ln>
+        </p:spPr>
+      </p:sp>
+      <p:sp>
+        <p:nvSpPr>
+          <p:cNvPr id="37" name="Shape 35"/>
+          <p:cNvSpPr/>
+          <p:nvPr/>
+        </p:nvSpPr>
+        <p:spPr>
+          <a:xfrm>
+            <a:off x="457200" y="3977640"/>
+            <a:ext cx="8229600" cy="658368"/>
+          </a:xfrm>
+          <a:prstGeom prst="roundRect">
+            <a:avLst>
+              <a:gd name="adj" fmla="val 8333"/>
+            </a:avLst>
+          </a:prstGeom>
+          <a:solidFill>
+            <a:srgbClr val="0A0A0A"/>
+          </a:solidFill>
+          <a:ln w="12700">
+            <a:solidFill>
+              <a:srgbClr val="FFFFFF"/>
+            </a:solidFill>
+            <a:prstDash val="solid"/>
+          </a:ln>
+        </p:spPr>
+      </p:sp>
+      <p:sp>
+        <p:nvSpPr>
+          <p:cNvPr id="38" name="Shape 36"/>
           <p:cNvSpPr/>
           <p:nvPr/>
         </p:nvSpPr>
@@ -8248,7 +8558,7 @@
       </p:sp>
       <p:sp>
         <p:nvSpPr>
-          <p:cNvPr id="29" name="Text 27"/>
+          <p:cNvPr id="39" name="Text 37"/>
           <p:cNvSpPr/>
           <p:nvPr/>
         </p:nvSpPr>
@@ -8287,7 +8597,7 @@
       </p:sp>
       <p:sp>
         <p:nvSpPr>
-          <p:cNvPr id="30" name="Text 28"/>
+          <p:cNvPr id="40" name="Text 38"/>
           <p:cNvSpPr/>
           <p:nvPr/>
         </p:nvSpPr>

--- a/scaffold/deck/KrishiSetu-Round0-20260816.pptx
+++ b/scaffold/deck/KrishiSetu-Round0-20260816.pptx
@@ -17,9 +17,10 @@
     <p:sldId id="265" r:id="rId11"/>
     <p:sldId id="266" r:id="rId12"/>
     <p:sldId id="267" r:id="rId13"/>
+    <p:sldId id="268" r:id="rId14"/>
   </p:sldIdLst>
   <p:notesMasterIdLst>
-    <p:notesMasterId r:id="rId14"/>
+    <p:notesMasterId r:id="rId15"/>
   </p:notesMasterIdLst>
   <p:sldSz cx="9144000" cy="5143500"/>
   <p:notesSz cx="5143500" cy="9144000"/>
@@ -601,7 +602,7 @@
           <a:p>
             <a:r>
               <a:rPr lang="en-US" dirty="0"/>
-              <a:t>One rail, one pilot, one quarter. Round 1 deepens exactly this: real feed connector, Odia voice, comprehension tests, agronomist review.</a:t>
+              <a:t>Mine-faithful: institutional buyer, assisted distribution. Three lines only, per YC rule. The claims rail is the wedge because PMFBY already pays for verified loss events.</a:t>
             </a:r>
             <a:endParaRPr lang="en-US" dirty="0"/>
           </a:p>
@@ -689,7 +690,7 @@
           <a:p>
             <a:r>
               <a:rPr lang="en-US" dirty="0"/>
-              <a:t>Founder-focused: what we shipped is the proof, not the bios. The E&amp;CE note is for faculty: this statement is the only one spanning CSE, ECE, and EE clusters (W3).</a:t>
+              <a:t>One rail, one pilot, one quarter. Round 1 deepens exactly this: real feed connector, Odia voice, comprehension tests, agronomist review.</a:t>
             </a:r>
             <a:endParaRPr lang="en-US" dirty="0"/>
           </a:p>
@@ -777,7 +778,7 @@
           <a:p>
             <a:r>
               <a:rPr lang="en-US" dirty="0"/>
-              <a:t>Ask tied to the next milestone: faculty feedback contract. Slide 8 of the runbook said the same: feedback shapes Round 1. The limitation is the honesty move faculty will remember.</a:t>
+              <a:t>Founder-focused: what we shipped is the proof, not the bios. The E&amp;CE note is for faculty: this statement is the only one spanning CSE, ECE, and EE clusters (W3).</a:t>
             </a:r>
             <a:endParaRPr lang="en-US" dirty="0"/>
           </a:p>
@@ -801,6 +802,94 @@
             <a:fld id="{F7021451-1387-4CA6-816F-3879F97B5CBC}" type="slidenum">
               <a:rPr lang="en-US"/>
               <a:t>12</a:t>
+            </a:fld>
+            <a:endParaRPr lang="en-US"/>
+          </a:p>
+        </p:txBody>
+      </p:sp>
+    </p:spTree>
+    <p:extLst>
+      <p:ext uri="{BB962C8B-B14F-4D97-AF65-F5344CB8AC3E}">
+        <p14:creationId xmlns:p14="http://schemas.microsoft.com/office/powerpoint/2010/main" val="1024086991"/>
+      </p:ext>
+    </p:extLst>
+  </p:cSld>
+  <p:clrMapOvr>
+    <a:masterClrMapping/>
+  </p:clrMapOvr>
+</p:notes>
+</file>
+
+<file path=ppt/notesSlides/notesSlide13.xml><?xml version="1.0" encoding="utf-8"?>
+<p:notes xmlns:a="http://schemas.openxmlformats.org/drawingml/2006/main" xmlns:r="http://schemas.openxmlformats.org/officeDocument/2006/relationships" xmlns:p="http://schemas.openxmlformats.org/presentationml/2006/main">
+  <p:cSld>
+    <p:spTree>
+      <p:nvGrpSpPr>
+        <p:cNvPr id="1" name=""/>
+        <p:cNvGrpSpPr/>
+        <p:nvPr/>
+      </p:nvGrpSpPr>
+      <p:grpSpPr>
+        <a:xfrm>
+          <a:off x="0" y="0"/>
+          <a:ext cx="0" cy="0"/>
+          <a:chOff x="0" y="0"/>
+          <a:chExt cx="0" cy="0"/>
+        </a:xfrm>
+      </p:grpSpPr>
+      <p:sp>
+        <p:nvSpPr>
+          <p:cNvPr id="2" name="Slide Image Placeholder 1"/>
+          <p:cNvSpPr>
+            <a:spLocks noGrp="1" noRot="1" noChangeAspect="1"/>
+          </p:cNvSpPr>
+          <p:nvPr>
+            <p:ph type="sldImg"/>
+          </p:nvPr>
+        </p:nvSpPr>
+        <p:spPr/>
+      </p:sp>
+      <p:sp>
+        <p:nvSpPr>
+          <p:cNvPr id="3" name="Notes Placeholder 2"/>
+          <p:cNvSpPr>
+            <a:spLocks noGrp="1"/>
+          </p:cNvSpPr>
+          <p:nvPr>
+            <p:ph type="body" idx="1"/>
+          </p:nvPr>
+        </p:nvSpPr>
+        <p:spPr/>
+        <p:txBody>
+          <a:bodyPr/>
+          <a:lstStyle/>
+          <a:p>
+            <a:r>
+              <a:rPr lang="en-US" dirty="0"/>
+              <a:t>Ask tied to the next milestone: faculty feedback contract. Slide 8 of the runbook said the same: feedback shapes Round 1. The limitation is the honesty move faculty will remember.</a:t>
+            </a:r>
+            <a:endParaRPr lang="en-US" dirty="0"/>
+          </a:p>
+        </p:txBody>
+      </p:sp>
+      <p:sp>
+        <p:nvSpPr>
+          <p:cNvPr id="4" name="Slide Number Placeholder 3"/>
+          <p:cNvSpPr>
+            <a:spLocks noGrp="1"/>
+          </p:cNvSpPr>
+          <p:nvPr>
+            <p:ph type="sldNum" sz="quarter" idx="10"/>
+          </p:nvPr>
+        </p:nvSpPr>
+        <p:spPr/>
+        <p:txBody>
+          <a:bodyPr/>
+          <a:lstStyle/>
+          <a:p>
+            <a:fld id="{F7021451-1387-4CA6-816F-3879F97B5CBC}" type="slidenum">
+              <a:rPr lang="en-US"/>
+              <a:t>13</a:t>
             </a:fld>
             <a:endParaRPr lang="en-US"/>
           </a:p>
@@ -1481,7 +1570,7 @@
           <a:p>
             <a:r>
               <a:rPr lang="en-US" dirty="0"/>
-              <a:t>Mine-faithful: institutional buyer, assisted distribution. Three lines only, per YC rule. The claims rail is the wedge because PMFBY already pays for verified loss events.</a:t>
+              <a:t>Counterfactual discipline: no avoided-loss claims anywhere. The events are real, the lead times are real, the engine output is what the product would issue, and the replay validates the loss bands against actual anchors. A judge asking 'so what would this have done in Fani' gets this slide.</a:t>
             </a:r>
             <a:endParaRPr lang="en-US" dirty="0"/>
           </a:p>
@@ -2139,7 +2228,7 @@
                 <a:ea typeface="Arial Black" pitchFamily="34" charset="-122"/>
                 <a:cs typeface="Arial Black" pitchFamily="34" charset="-120"/>
               </a:rPr>
-              <a:t>One rail, one pilot, one quarter</a:t>
+              <a:t>Three buyers, one verified loop</a:t>
             </a:r>
             <a:endParaRPr lang="en-US" sz="2800" dirty="0"/>
           </a:p>
@@ -2185,7 +2274,7 @@
                 <a:ea typeface="Arial Black" pitchFamily="34" charset="-122"/>
                 <a:cs typeface="Arial Black" pitchFamily="34" charset="-120"/>
               </a:rPr>
-              <a:t>One rail, one pilot, one quarter</a:t>
+              <a:t>Three buyers, one verified loop</a:t>
             </a:r>
             <a:endParaRPr lang="en-US" sz="2800" dirty="0"/>
           </a:p>
@@ -2224,8 +2313,8 @@
         </p:nvSpPr>
         <p:spPr>
           <a:xfrm>
-            <a:off x="507492" y="1101852"/>
-            <a:ext cx="3977640" cy="2103120"/>
+            <a:off x="507492" y="1284732"/>
+            <a:ext cx="2529840" cy="2286000"/>
           </a:xfrm>
           <a:prstGeom prst="rect">
             <a:avLst/>
@@ -2249,20 +2338,18 @@
         </p:nvSpPr>
         <p:spPr>
           <a:xfrm>
-            <a:off x="457200" y="1051560"/>
-            <a:ext cx="3977640" cy="2103120"/>
-          </a:xfrm>
-          <a:prstGeom prst="roundRect">
-            <a:avLst>
-              <a:gd name="adj" fmla="val 2609"/>
-            </a:avLst>
-          </a:prstGeom>
-          <a:solidFill>
-            <a:srgbClr val="FFFFFF"/>
-          </a:solidFill>
-          <a:ln w="25400">
+            <a:off x="2968752" y="1307592"/>
+            <a:ext cx="82296" cy="2139696"/>
+          </a:xfrm>
+          <a:prstGeom prst="parallelogram">
+            <a:avLst/>
+          </a:prstGeom>
+          <a:solidFill>
+            <a:srgbClr val="555555"/>
+          </a:solidFill>
+          <a:ln w="12700">
             <a:solidFill>
-              <a:srgbClr val="0A0A0A"/>
+              <a:srgbClr val="555555"/>
             </a:solidFill>
             <a:prstDash val="solid"/>
           </a:ln>
@@ -2270,14 +2357,41 @@
       </p:sp>
       <p:sp>
         <p:nvSpPr>
-          <p:cNvPr id="7" name="Text 5"/>
-          <p:cNvSpPr/>
-          <p:nvPr/>
-        </p:nvSpPr>
-        <p:spPr>
-          <a:xfrm>
-            <a:off x="640080" y="1188720"/>
-            <a:ext cx="3657600" cy="320040"/>
+          <p:cNvPr id="7" name="Shape 5"/>
+          <p:cNvSpPr/>
+          <p:nvPr/>
+        </p:nvSpPr>
+        <p:spPr>
+          <a:xfrm rot="-90000">
+            <a:off x="457200" y="1234440"/>
+            <a:ext cx="2529840" cy="2286000"/>
+          </a:xfrm>
+          <a:prstGeom prst="roundRect">
+            <a:avLst>
+              <a:gd name="adj" fmla="val 2400"/>
+            </a:avLst>
+          </a:prstGeom>
+          <a:solidFill>
+            <a:srgbClr val="0A0A0A"/>
+          </a:solidFill>
+          <a:ln w="12700">
+            <a:solidFill>
+              <a:srgbClr val="FFFFFF"/>
+            </a:solidFill>
+            <a:prstDash val="solid"/>
+          </a:ln>
+        </p:spPr>
+      </p:sp>
+      <p:sp>
+        <p:nvSpPr>
+          <p:cNvPr id="8" name="Text 6"/>
+          <p:cNvSpPr/>
+          <p:nvPr/>
+        </p:nvSpPr>
+        <p:spPr>
+          <a:xfrm>
+            <a:off x="640080" y="1417320"/>
+            <a:ext cx="2164080" cy="365760"/>
           </a:xfrm>
           <a:prstGeom prst="rect">
             <a:avLst/>
@@ -2293,30 +2407,30 @@
               <a:buNone/>
             </a:pPr>
             <a:r>
-              <a:rPr lang="en-US" sz="1300" b="1" dirty="0">
-                <a:solidFill>
-                  <a:srgbClr val="0A0A0A"/>
+              <a:rPr lang="en-US" sz="1600" b="1" dirty="0">
+                <a:solidFill>
+                  <a:srgbClr val="FFFFFF"/>
                 </a:solidFill>
                 <a:latin typeface="Arial Black" pitchFamily="34" charset="0"/>
                 <a:ea typeface="Arial Black" pitchFamily="34" charset="-122"/>
                 <a:cs typeface="Arial Black" pitchFamily="34" charset="-120"/>
               </a:rPr>
-              <a:t>The rail exists</a:t>
-            </a:r>
-            <a:endParaRPr lang="en-US" sz="1300" dirty="0"/>
-          </a:p>
-        </p:txBody>
-      </p:sp>
-      <p:sp>
-        <p:nvSpPr>
-          <p:cNvPr id="8" name="Text 6"/>
-          <p:cNvSpPr/>
-          <p:nvPr/>
-        </p:nvSpPr>
-        <p:spPr>
-          <a:xfrm>
-            <a:off x="640080" y="1554480"/>
-            <a:ext cx="3657600" cy="548640"/>
+              <a:t>FPO + extension</a:t>
+            </a:r>
+            <a:endParaRPr lang="en-US" sz="1600" dirty="0"/>
+          </a:p>
+        </p:txBody>
+      </p:sp>
+      <p:sp>
+        <p:nvSpPr>
+          <p:cNvPr id="9" name="Text 7"/>
+          <p:cNvSpPr/>
+          <p:nvPr/>
+        </p:nvSpPr>
+        <p:spPr>
+          <a:xfrm>
+            <a:off x="640080" y="1920240"/>
+            <a:ext cx="2164080" cy="914400"/>
           </a:xfrm>
           <a:prstGeom prst="rect">
             <a:avLst/>
@@ -2332,56 +2446,17 @@
               <a:buNone/>
             </a:pPr>
             <a:r>
-              <a:rPr lang="en-US" sz="1600" b="1" dirty="0">
-                <a:solidFill>
-                  <a:srgbClr val="0A0A0A"/>
-                </a:solidFill>
-                <a:latin typeface="Arial Black" pitchFamily="34" charset="0"/>
-                <a:ea typeface="Arial Black" pitchFamily="34" charset="-122"/>
-                <a:cs typeface="Arial Black" pitchFamily="34" charset="-120"/>
-              </a:rPr>
-              <a:t>88.5 lakh PMFBY enrollments, Rs 2,580 crore claims paid (2020-25)</a:t>
-            </a:r>
-            <a:endParaRPr lang="en-US" sz="1600" dirty="0"/>
-          </a:p>
-        </p:txBody>
-      </p:sp>
-      <p:sp>
-        <p:nvSpPr>
-          <p:cNvPr id="9" name="Text 7"/>
-          <p:cNvSpPr/>
-          <p:nvPr/>
-        </p:nvSpPr>
-        <p:spPr>
-          <a:xfrm>
-            <a:off x="640080" y="2194560"/>
-            <a:ext cx="3657600" cy="548640"/>
-          </a:xfrm>
-          <a:prstGeom prst="rect">
-            <a:avLst/>
-          </a:prstGeom>
-          <a:noFill/>
-          <a:ln/>
-        </p:spPr>
-        <p:txBody>
-          <a:bodyPr wrap="square" lIns="0" tIns="0" rIns="0" bIns="0" rtlCol="0" anchor="ctr"/>
-          <a:lstStyle/>
-          <a:p>
-            <a:pPr indent="0" marL="0">
-              <a:buNone/>
-            </a:pPr>
-            <a:r>
-              <a:rPr lang="en-US" sz="1250" dirty="0">
-                <a:solidFill>
-                  <a:srgbClr val="0A0A0A"/>
+              <a:rPr lang="en-US" sz="1150" dirty="0">
+                <a:solidFill>
+                  <a:srgbClr val="B0B0B0"/>
                 </a:solidFill>
                 <a:latin typeface="Arial" pitchFamily="34" charset="0"/>
                 <a:ea typeface="Arial" pitchFamily="34" charset="-122"/>
                 <a:cs typeface="Arial" pitchFamily="34" charset="-120"/>
               </a:rPr>
-              <a:t>Digital Agriculture Mission, Rs 2,817 crore, funds agri-digital public infrastructure</a:t>
-            </a:r>
-            <a:endParaRPr lang="en-US" sz="1250" dirty="0"/>
+              <a:t>seasonal advisory subscriptions per farmer via FPOs and KVK extension workers</a:t>
+            </a:r>
+            <a:endParaRPr lang="en-US" sz="1150" dirty="0"/>
           </a:p>
         </p:txBody>
       </p:sp>
@@ -2393,8 +2468,8 @@
         </p:nvSpPr>
         <p:spPr>
           <a:xfrm>
-            <a:off x="640080" y="2788920"/>
-            <a:ext cx="3657600" cy="548640"/>
+            <a:off x="640080" y="2971800"/>
+            <a:ext cx="2164080" cy="457200"/>
           </a:xfrm>
           <a:prstGeom prst="rect">
             <a:avLst/>
@@ -2410,17 +2485,17 @@
               <a:buNone/>
             </a:pPr>
             <a:r>
-              <a:rPr lang="en-US" sz="1200" dirty="0">
-                <a:solidFill>
-                  <a:srgbClr val="0A0A0A"/>
+              <a:rPr lang="en-US" sz="1000" i="1" dirty="0">
+                <a:solidFill>
+                  <a:srgbClr val="8A8A8A"/>
                 </a:solidFill>
                 <a:latin typeface="Arial" pitchFamily="34" charset="0"/>
                 <a:ea typeface="Arial" pitchFamily="34" charset="-122"/>
                 <a:cs typeface="Arial" pitchFamily="34" charset="-120"/>
               </a:rPr>
-              <a:t>Odisha: cyclone-facing coast, paddy and saline zones, Dana and Yaas damage on record</a:t>
-            </a:r>
-            <a:endParaRPr lang="en-US" sz="1200" dirty="0"/>
+              <a:t>pay per verified advisory delivered and acted on</a:t>
+            </a:r>
+            <a:endParaRPr lang="en-US" sz="1000" dirty="0"/>
           </a:p>
         </p:txBody>
       </p:sp>
@@ -2432,8 +2507,8 @@
         </p:nvSpPr>
         <p:spPr>
           <a:xfrm>
-            <a:off x="4759452" y="1101852"/>
-            <a:ext cx="3977640" cy="2103120"/>
+            <a:off x="3357372" y="1284732"/>
+            <a:ext cx="2529840" cy="2286000"/>
           </a:xfrm>
           <a:prstGeom prst="rect">
             <a:avLst/>
@@ -2457,20 +2532,18 @@
         </p:nvSpPr>
         <p:spPr>
           <a:xfrm>
-            <a:off x="4709160" y="1051560"/>
-            <a:ext cx="3977640" cy="2103120"/>
-          </a:xfrm>
-          <a:prstGeom prst="roundRect">
-            <a:avLst>
-              <a:gd name="adj" fmla="val 2609"/>
-            </a:avLst>
-          </a:prstGeom>
-          <a:solidFill>
-            <a:srgbClr val="FFFFFF"/>
-          </a:solidFill>
-          <a:ln w="25400">
+            <a:off x="5818632" y="1307592"/>
+            <a:ext cx="82296" cy="2139696"/>
+          </a:xfrm>
+          <a:prstGeom prst="parallelogram">
+            <a:avLst/>
+          </a:prstGeom>
+          <a:solidFill>
+            <a:srgbClr val="555555"/>
+          </a:solidFill>
+          <a:ln w="12700">
             <a:solidFill>
-              <a:srgbClr val="0A0A0A"/>
+              <a:srgbClr val="555555"/>
             </a:solidFill>
             <a:prstDash val="solid"/>
           </a:ln>
@@ -2478,14 +2551,41 @@
       </p:sp>
       <p:sp>
         <p:nvSpPr>
-          <p:cNvPr id="13" name="Text 11"/>
-          <p:cNvSpPr/>
-          <p:nvPr/>
-        </p:nvSpPr>
-        <p:spPr>
-          <a:xfrm>
-            <a:off x="4892040" y="1188720"/>
-            <a:ext cx="3657600" cy="320040"/>
+          <p:cNvPr id="13" name="Shape 11"/>
+          <p:cNvSpPr/>
+          <p:nvPr/>
+        </p:nvSpPr>
+        <p:spPr>
+          <a:xfrm rot="-90000">
+            <a:off x="3307080" y="1234440"/>
+            <a:ext cx="2529840" cy="2286000"/>
+          </a:xfrm>
+          <a:prstGeom prst="roundRect">
+            <a:avLst>
+              <a:gd name="adj" fmla="val 2400"/>
+            </a:avLst>
+          </a:prstGeom>
+          <a:solidFill>
+            <a:srgbClr val="0A0A0A"/>
+          </a:solidFill>
+          <a:ln w="12700">
+            <a:solidFill>
+              <a:srgbClr val="FFFFFF"/>
+            </a:solidFill>
+            <a:prstDash val="solid"/>
+          </a:ln>
+        </p:spPr>
+      </p:sp>
+      <p:sp>
+        <p:nvSpPr>
+          <p:cNvPr id="14" name="Text 12"/>
+          <p:cNvSpPr/>
+          <p:nvPr/>
+        </p:nvSpPr>
+        <p:spPr>
+          <a:xfrm>
+            <a:off x="3489960" y="1417320"/>
+            <a:ext cx="2164080" cy="365760"/>
           </a:xfrm>
           <a:prstGeom prst="rect">
             <a:avLst/>
@@ -2501,30 +2601,30 @@
               <a:buNone/>
             </a:pPr>
             <a:r>
-              <a:rPr lang="en-US" sz="1300" b="1" dirty="0">
-                <a:solidFill>
-                  <a:srgbClr val="0A0A0A"/>
+              <a:rPr lang="en-US" sz="1600" b="1" dirty="0">
+                <a:solidFill>
+                  <a:srgbClr val="FFFFFF"/>
                 </a:solidFill>
                 <a:latin typeface="Arial Black" pitchFamily="34" charset="0"/>
                 <a:ea typeface="Arial Black" pitchFamily="34" charset="-122"/>
                 <a:cs typeface="Arial Black" pitchFamily="34" charset="-120"/>
               </a:rPr>
-              <a:t>The pilot</a:t>
-            </a:r>
-            <a:endParaRPr lang="en-US" sz="1300" dirty="0"/>
-          </a:p>
-        </p:txBody>
-      </p:sp>
-      <p:sp>
-        <p:nvSpPr>
-          <p:cNvPr id="14" name="Text 12"/>
-          <p:cNvSpPr/>
-          <p:nvPr/>
-        </p:nvSpPr>
-        <p:spPr>
-          <a:xfrm>
-            <a:off x="4892040" y="1600200"/>
-            <a:ext cx="3657600" cy="457200"/>
+              <a:t>B2G district</a:t>
+            </a:r>
+            <a:endParaRPr lang="en-US" sz="1600" dirty="0"/>
+          </a:p>
+        </p:txBody>
+      </p:sp>
+      <p:sp>
+        <p:nvSpPr>
+          <p:cNvPr id="15" name="Text 13"/>
+          <p:cNvSpPr/>
+          <p:nvPr/>
+        </p:nvSpPr>
+        <p:spPr>
+          <a:xfrm>
+            <a:off x="3489960" y="1920240"/>
+            <a:ext cx="2164080" cy="914400"/>
           </a:xfrm>
           <a:prstGeom prst="rect">
             <a:avLst/>
@@ -2540,30 +2640,30 @@
               <a:buNone/>
             </a:pPr>
             <a:r>
-              <a:rPr lang="en-US" sz="1200" dirty="0">
-                <a:solidFill>
-                  <a:srgbClr val="0A0A0A"/>
+              <a:rPr lang="en-US" sz="1150" dirty="0">
+                <a:solidFill>
+                  <a:srgbClr val="B0B0B0"/>
                 </a:solidFill>
                 <a:latin typeface="Arial" pitchFamily="34" charset="0"/>
                 <a:ea typeface="Arial" pitchFamily="34" charset="-122"/>
                 <a:cs typeface="Arial" pitchFamily="34" charset="-120"/>
               </a:rPr>
-              <a:t>1.  one coastal block with extension-worker access</a:t>
-            </a:r>
-            <a:endParaRPr lang="en-US" sz="1200" dirty="0"/>
-          </a:p>
-        </p:txBody>
-      </p:sp>
-      <p:sp>
-        <p:nvSpPr>
-          <p:cNvPr id="15" name="Text 13"/>
-          <p:cNvSpPr/>
-          <p:nvPr/>
-        </p:nvSpPr>
-        <p:spPr>
-          <a:xfrm>
-            <a:off x="4892040" y="2103120"/>
-            <a:ext cx="3657600" cy="457200"/>
+              <a:t>Odisha agriculture department and OSDMA, per-block deployment</a:t>
+            </a:r>
+            <a:endParaRPr lang="en-US" sz="1150" dirty="0"/>
+          </a:p>
+        </p:txBody>
+      </p:sp>
+      <p:sp>
+        <p:nvSpPr>
+          <p:cNvPr id="16" name="Text 14"/>
+          <p:cNvSpPr/>
+          <p:nvPr/>
+        </p:nvSpPr>
+        <p:spPr>
+          <a:xfrm>
+            <a:off x="3489960" y="2971800"/>
+            <a:ext cx="2164080" cy="457200"/>
           </a:xfrm>
           <a:prstGeom prst="rect">
             <a:avLst/>
@@ -2579,30 +2679,107 @@
               <a:buNone/>
             </a:pPr>
             <a:r>
-              <a:rPr lang="en-US" sz="1200" dirty="0">
-                <a:solidFill>
-                  <a:srgbClr val="0A0A0A"/>
+              <a:rPr lang="en-US" sz="1000" i="1" dirty="0">
+                <a:solidFill>
+                  <a:srgbClr val="8A8A8A"/>
                 </a:solidFill>
                 <a:latin typeface="Arial" pitchFamily="34" charset="0"/>
                 <a:ea typeface="Arial" pitchFamily="34" charset="-122"/>
                 <a:cs typeface="Arial" pitchFamily="34" charset="-120"/>
               </a:rPr>
-              <a:t>2.  one agronomist-reviewed rule pack</a:t>
-            </a:r>
-            <a:endParaRPr lang="en-US" sz="1200" dirty="0"/>
-          </a:p>
-        </p:txBody>
-      </p:sp>
-      <p:sp>
-        <p:nvSpPr>
-          <p:cNvPr id="16" name="Text 14"/>
-          <p:cNvSpPr/>
-          <p:nvPr/>
-        </p:nvSpPr>
-        <p:spPr>
-          <a:xfrm>
-            <a:off x="4892040" y="2606040"/>
-            <a:ext cx="3657600" cy="457200"/>
+              <a:t>reduces call volume, gives auditable outreach evidence</a:t>
+            </a:r>
+            <a:endParaRPr lang="en-US" sz="1000" dirty="0"/>
+          </a:p>
+        </p:txBody>
+      </p:sp>
+      <p:sp>
+        <p:nvSpPr>
+          <p:cNvPr id="17" name="Shape 15"/>
+          <p:cNvSpPr/>
+          <p:nvPr/>
+        </p:nvSpPr>
+        <p:spPr>
+          <a:xfrm>
+            <a:off x="6207252" y="1284732"/>
+            <a:ext cx="2529840" cy="2286000"/>
+          </a:xfrm>
+          <a:prstGeom prst="rect">
+            <a:avLst/>
+          </a:prstGeom>
+          <a:solidFill>
+            <a:srgbClr val="E0E0E0"/>
+          </a:solidFill>
+          <a:ln w="12700">
+            <a:solidFill>
+              <a:srgbClr val="E0E0E0"/>
+            </a:solidFill>
+            <a:prstDash val="solid"/>
+          </a:ln>
+        </p:spPr>
+      </p:sp>
+      <p:sp>
+        <p:nvSpPr>
+          <p:cNvPr id="18" name="Shape 16"/>
+          <p:cNvSpPr/>
+          <p:nvPr/>
+        </p:nvSpPr>
+        <p:spPr>
+          <a:xfrm>
+            <a:off x="8668512" y="1307592"/>
+            <a:ext cx="82296" cy="2139696"/>
+          </a:xfrm>
+          <a:prstGeom prst="parallelogram">
+            <a:avLst/>
+          </a:prstGeom>
+          <a:solidFill>
+            <a:srgbClr val="555555"/>
+          </a:solidFill>
+          <a:ln w="12700">
+            <a:solidFill>
+              <a:srgbClr val="555555"/>
+            </a:solidFill>
+            <a:prstDash val="solid"/>
+          </a:ln>
+        </p:spPr>
+      </p:sp>
+      <p:sp>
+        <p:nvSpPr>
+          <p:cNvPr id="19" name="Shape 17"/>
+          <p:cNvSpPr/>
+          <p:nvPr/>
+        </p:nvSpPr>
+        <p:spPr>
+          <a:xfrm rot="-90000">
+            <a:off x="6156960" y="1234440"/>
+            <a:ext cx="2529840" cy="2286000"/>
+          </a:xfrm>
+          <a:prstGeom prst="roundRect">
+            <a:avLst>
+              <a:gd name="adj" fmla="val 2400"/>
+            </a:avLst>
+          </a:prstGeom>
+          <a:solidFill>
+            <a:srgbClr val="0A0A0A"/>
+          </a:solidFill>
+          <a:ln w="12700">
+            <a:solidFill>
+              <a:srgbClr val="FFFFFF"/>
+            </a:solidFill>
+            <a:prstDash val="solid"/>
+          </a:ln>
+        </p:spPr>
+      </p:sp>
+      <p:sp>
+        <p:nvSpPr>
+          <p:cNvPr id="20" name="Text 18"/>
+          <p:cNvSpPr/>
+          <p:nvPr/>
+        </p:nvSpPr>
+        <p:spPr>
+          <a:xfrm>
+            <a:off x="6339840" y="1417320"/>
+            <a:ext cx="2164080" cy="365760"/>
           </a:xfrm>
           <a:prstGeom prst="rect">
             <a:avLst/>
@@ -2618,30 +2795,69 @@
               <a:buNone/>
             </a:pPr>
             <a:r>
-              <a:rPr lang="en-US" sz="1200" dirty="0">
-                <a:solidFill>
-                  <a:srgbClr val="0A0A0A"/>
+              <a:rPr lang="en-US" sz="1600" b="1" dirty="0">
+                <a:solidFill>
+                  <a:srgbClr val="FFFFFF"/>
+                </a:solidFill>
+                <a:latin typeface="Arial Black" pitchFamily="34" charset="0"/>
+                <a:ea typeface="Arial Black" pitchFamily="34" charset="-122"/>
+                <a:cs typeface="Arial Black" pitchFamily="34" charset="-120"/>
+              </a:rPr>
+              <a:t>Claims rail</a:t>
+            </a:r>
+            <a:endParaRPr lang="en-US" sz="1600" dirty="0"/>
+          </a:p>
+        </p:txBody>
+      </p:sp>
+      <p:sp>
+        <p:nvSpPr>
+          <p:cNvPr id="21" name="Text 19"/>
+          <p:cNvSpPr/>
+          <p:nvPr/>
+        </p:nvSpPr>
+        <p:spPr>
+          <a:xfrm>
+            <a:off x="6339840" y="1920240"/>
+            <a:ext cx="2164080" cy="914400"/>
+          </a:xfrm>
+          <a:prstGeom prst="rect">
+            <a:avLst/>
+          </a:prstGeom>
+          <a:noFill/>
+          <a:ln/>
+        </p:spPr>
+        <p:txBody>
+          <a:bodyPr wrap="square" lIns="0" tIns="0" rIns="0" bIns="0" rtlCol="0" anchor="ctr"/>
+          <a:lstStyle/>
+          <a:p>
+            <a:pPr indent="0" marL="0">
+              <a:buNone/>
+            </a:pPr>
+            <a:r>
+              <a:rPr lang="en-US" sz="1150" dirty="0">
+                <a:solidFill>
+                  <a:srgbClr val="B0B0B0"/>
                 </a:solidFill>
                 <a:latin typeface="Arial" pitchFamily="34" charset="0"/>
                 <a:ea typeface="Arial" pitchFamily="34" charset="-122"/>
                 <a:cs typeface="Arial" pitchFamily="34" charset="-120"/>
               </a:rPr>
-              <a:t>3.  measure comprehension and claim conversion, not downloads</a:t>
-            </a:r>
-            <a:endParaRPr lang="en-US" sz="1200" dirty="0"/>
-          </a:p>
-        </p:txBody>
-      </p:sp>
-      <p:sp>
-        <p:nvSpPr>
-          <p:cNvPr id="17" name="Text 15"/>
-          <p:cNvSpPr/>
-          <p:nvPr/>
-        </p:nvSpPr>
-        <p:spPr>
-          <a:xfrm>
-            <a:off x="498348" y="3470148"/>
-            <a:ext cx="6858000" cy="0"/>
+              <a:t>PMFBY insurers and aggregators pay per evidence packet</a:t>
+            </a:r>
+            <a:endParaRPr lang="en-US" sz="1150" dirty="0"/>
+          </a:p>
+        </p:txBody>
+      </p:sp>
+      <p:sp>
+        <p:nvSpPr>
+          <p:cNvPr id="22" name="Text 20"/>
+          <p:cNvSpPr/>
+          <p:nvPr/>
+        </p:nvSpPr>
+        <p:spPr>
+          <a:xfrm>
+            <a:off x="6339840" y="2971800"/>
+            <a:ext cx="2164080" cy="457200"/>
           </a:xfrm>
           <a:prstGeom prst="rect">
             <a:avLst/>
@@ -2657,43 +2873,75 @@
               <a:buNone/>
             </a:pPr>
             <a:r>
-              <a:rPr lang="en-US" sz="1450" b="1" dirty="0">
-                <a:solidFill>
-                  <a:srgbClr val="E0E0E0"/>
+              <a:rPr lang="en-US" sz="1000" i="1" dirty="0">
+                <a:solidFill>
+                  <a:srgbClr val="8A8A8A"/>
+                </a:solidFill>
+                <a:latin typeface="Arial" pitchFamily="34" charset="0"/>
+                <a:ea typeface="Arial" pitchFamily="34" charset="-122"/>
+                <a:cs typeface="Arial" pitchFamily="34" charset="-120"/>
+              </a:rPr>
+              <a:t>verified observation converts to claim, both sides win</a:t>
+            </a:r>
+            <a:endParaRPr lang="en-US" sz="1000" dirty="0"/>
+          </a:p>
+        </p:txBody>
+      </p:sp>
+      <p:sp>
+        <p:nvSpPr>
+          <p:cNvPr id="23" name="Text 21"/>
+          <p:cNvSpPr/>
+          <p:nvPr/>
+        </p:nvSpPr>
+        <p:spPr>
+          <a:xfrm>
+            <a:off x="457200" y="3977640"/>
+            <a:ext cx="8229600" cy="411480"/>
+          </a:xfrm>
+          <a:prstGeom prst="rect">
+            <a:avLst/>
+          </a:prstGeom>
+          <a:noFill/>
+          <a:ln/>
+        </p:spPr>
+        <p:txBody>
+          <a:bodyPr wrap="square" lIns="0" tIns="0" rIns="0" bIns="0" rtlCol="0" anchor="ctr"/>
+          <a:lstStyle/>
+          <a:p>
+            <a:pPr indent="0" marL="0">
+              <a:buNone/>
+            </a:pPr>
+            <a:r>
+              <a:rPr lang="en-US" sz="1300" b="1" dirty="0">
+                <a:solidFill>
+                  <a:srgbClr val="0A0A0A"/>
                 </a:solidFill>
                 <a:latin typeface="Arial Black" pitchFamily="34" charset="0"/>
                 <a:ea typeface="Arial Black" pitchFamily="34" charset="-122"/>
                 <a:cs typeface="Arial Black" pitchFamily="34" charset="-120"/>
               </a:rPr>
-              <a:t>Named rail, named pilot, dated outcome. That is the Round 1 contract.</a:t>
-            </a:r>
-            <a:endParaRPr lang="en-US" sz="1450" dirty="0"/>
-          </a:p>
-        </p:txBody>
-      </p:sp>
-      <p:sp>
-        <p:nvSpPr>
-          <p:cNvPr id="18" name="Text 16"/>
-          <p:cNvSpPr/>
-          <p:nvPr/>
-        </p:nvSpPr>
-        <p:spPr>
-          <a:xfrm>
-            <a:off x="457200" y="3429000"/>
-            <a:ext cx="6858000" cy="0"/>
-          </a:xfrm>
-          <a:prstGeom prst="rect">
-            <a:avLst/>
-          </a:prstGeom>
-          <a:noFill/>
-          <a:ln/>
-          <a:effectLst>
-            <a:outerShdw sx="100000" sy="100000" kx="0" ky="0" algn="bl" rotWithShape="0" blurRad="101600" dist="38100" dir="2700000">
-              <a:srgbClr val="000000">
-                <a:alpha val="25000"/>
-              </a:srgbClr>
-            </a:outerShdw>
-          </a:effectLst>
+              <a:t>Seed revenue line for Round 1: one FPO, one season, measured renewal. No consumer subscription fantasy.</a:t>
+            </a:r>
+            <a:endParaRPr lang="en-US" sz="1300" dirty="0"/>
+          </a:p>
+        </p:txBody>
+      </p:sp>
+      <p:sp>
+        <p:nvSpPr>
+          <p:cNvPr id="24" name="Text 22"/>
+          <p:cNvSpPr/>
+          <p:nvPr/>
+        </p:nvSpPr>
+        <p:spPr>
+          <a:xfrm>
+            <a:off x="457200" y="4759452"/>
+            <a:ext cx="8229600" cy="274320"/>
+          </a:xfrm>
+          <a:prstGeom prst="rect">
+            <a:avLst/>
+          </a:prstGeom>
+          <a:noFill/>
+          <a:ln/>
         </p:spPr>
         <p:txBody>
           <a:bodyPr wrap="square" lIns="0" tIns="0" rIns="0" bIns="0" rtlCol="0" anchor="ctr"/>
@@ -2703,46 +2951,7 @@
               <a:buNone/>
             </a:pPr>
             <a:r>
-              <a:rPr lang="en-US" sz="1450" b="1" dirty="0">
-                <a:solidFill>
-                  <a:srgbClr val="0A0A0A"/>
-                </a:solidFill>
-                <a:latin typeface="Arial Black" pitchFamily="34" charset="0"/>
-                <a:ea typeface="Arial Black" pitchFamily="34" charset="-122"/>
-                <a:cs typeface="Arial Black" pitchFamily="34" charset="-120"/>
-              </a:rPr>
-              <a:t>Named rail, named pilot, dated outcome. That is the Round 1 contract.</a:t>
-            </a:r>
-            <a:endParaRPr lang="en-US" sz="1450" dirty="0"/>
-          </a:p>
-        </p:txBody>
-      </p:sp>
-      <p:sp>
-        <p:nvSpPr>
-          <p:cNvPr id="19" name="Text 17"/>
-          <p:cNvSpPr/>
-          <p:nvPr/>
-        </p:nvSpPr>
-        <p:spPr>
-          <a:xfrm>
-            <a:off x="457200" y="3977640"/>
-            <a:ext cx="8229600" cy="365760"/>
-          </a:xfrm>
-          <a:prstGeom prst="rect">
-            <a:avLst/>
-          </a:prstGeom>
-          <a:noFill/>
-          <a:ln/>
-        </p:spPr>
-        <p:txBody>
-          <a:bodyPr wrap="square" lIns="0" tIns="0" rIns="0" bIns="0" rtlCol="0" anchor="ctr"/>
-          <a:lstStyle/>
-          <a:p>
-            <a:pPr indent="0" marL="0">
-              <a:buNone/>
-            </a:pPr>
-            <a:r>
-              <a:rPr lang="en-US" sz="1000" i="1" dirty="0">
+              <a:rPr lang="en-US" sz="850" dirty="0">
                 <a:solidFill>
                   <a:srgbClr val="6E6E6E"/>
                 </a:solidFill>
@@ -2750,46 +2959,7 @@
                 <a:ea typeface="Arial" pitchFamily="34" charset="-122"/>
                 <a:cs typeface="Arial" pitchFamily="34" charset="-120"/>
               </a:rPr>
-              <a:t>Sources: PMFBY program data; Digital Agriculture Mission allocation; YSD Dana assessment; Down To Earth Yaas report. All dated 2024-2025, verified in the research wave.</a:t>
-            </a:r>
-            <a:endParaRPr lang="en-US" sz="1000" dirty="0"/>
-          </a:p>
-        </p:txBody>
-      </p:sp>
-      <p:sp>
-        <p:nvSpPr>
-          <p:cNvPr id="20" name="Text 18"/>
-          <p:cNvSpPr/>
-          <p:nvPr/>
-        </p:nvSpPr>
-        <p:spPr>
-          <a:xfrm>
-            <a:off x="457200" y="4828032"/>
-            <a:ext cx="8229600" cy="274320"/>
-          </a:xfrm>
-          <a:prstGeom prst="rect">
-            <a:avLst/>
-          </a:prstGeom>
-          <a:noFill/>
-          <a:ln/>
-        </p:spPr>
-        <p:txBody>
-          <a:bodyPr wrap="square" lIns="0" tIns="0" rIns="0" bIns="0" rtlCol="0" anchor="ctr"/>
-          <a:lstStyle/>
-          <a:p>
-            <a:pPr indent="0" marL="0">
-              <a:buNone/>
-            </a:pPr>
-            <a:r>
-              <a:rPr lang="en-US" sz="850" dirty="0">
-                <a:solidFill>
-                  <a:srgbClr val="6E6E6E"/>
-                </a:solidFill>
-                <a:latin typeface="Arial" pitchFamily="34" charset="0"/>
-                <a:ea typeface="Arial" pitchFamily="34" charset="-122"/>
-                <a:cs typeface="Arial" pitchFamily="34" charset="-120"/>
-              </a:rPr>
-              <a:t>Market slide after traction in YC ordering. No TAM multiplication, no 'everyone everywhere' line.</a:t>
+              <a:t>Mine verdict: the real buyer is institutional, and the real distribution is extension workers, KCC, FPOs, dealers, and panchayat actors. Consumer subscriptions and network effects are not evidenced.</a:t>
             </a:r>
             <a:endParaRPr lang="en-US" sz="850" dirty="0"/>
           </a:p>
@@ -2860,7 +3030,7 @@
                 <a:ea typeface="Arial Black" pitchFamily="34" charset="-122"/>
                 <a:cs typeface="Arial Black" pitchFamily="34" charset="-120"/>
               </a:rPr>
-              <a:t>Team 511</a:t>
+              <a:t>One rail, one pilot, one quarter</a:t>
             </a:r>
             <a:endParaRPr lang="en-US" sz="2800" dirty="0"/>
           </a:p>
@@ -2906,7 +3076,7 @@
                 <a:ea typeface="Arial Black" pitchFamily="34" charset="-122"/>
                 <a:cs typeface="Arial Black" pitchFamily="34" charset="-120"/>
               </a:rPr>
-              <a:t>Team 511</a:t>
+              <a:t>One rail, one pilot, one quarter</a:t>
             </a:r>
             <a:endParaRPr lang="en-US" sz="2800" dirty="0"/>
           </a:p>
@@ -2945,8 +3115,8 @@
         </p:nvSpPr>
         <p:spPr>
           <a:xfrm>
-            <a:off x="507492" y="1147572"/>
-            <a:ext cx="2529840" cy="1828800"/>
+            <a:off x="507492" y="1101852"/>
+            <a:ext cx="3977640" cy="2103120"/>
           </a:xfrm>
           <a:prstGeom prst="rect">
             <a:avLst/>
@@ -2970,18 +3140,18 @@
         </p:nvSpPr>
         <p:spPr>
           <a:xfrm>
-            <a:off x="457200" y="1097280"/>
-            <a:ext cx="2529840" cy="1828800"/>
+            <a:off x="457200" y="1051560"/>
+            <a:ext cx="3977640" cy="2103120"/>
           </a:xfrm>
           <a:prstGeom prst="roundRect">
             <a:avLst>
-              <a:gd name="adj" fmla="val 3000"/>
+              <a:gd name="adj" fmla="val 2609"/>
             </a:avLst>
           </a:prstGeom>
           <a:solidFill>
             <a:srgbClr val="FFFFFF"/>
           </a:solidFill>
-          <a:ln w="19050">
+          <a:ln w="25400">
             <a:solidFill>
               <a:srgbClr val="0A0A0A"/>
             </a:solidFill>
@@ -2991,23 +3161,42 @@
       </p:sp>
       <p:sp>
         <p:nvSpPr>
-          <p:cNvPr id="7" name="Shape 5"/>
-          <p:cNvSpPr/>
-          <p:nvPr/>
-        </p:nvSpPr>
-        <p:spPr>
-          <a:xfrm>
-            <a:off x="1402080" y="1280160"/>
-            <a:ext cx="640080" cy="640080"/>
-          </a:xfrm>
-          <a:prstGeom prst="ellipse">
-            <a:avLst/>
-          </a:prstGeom>
-          <a:solidFill>
-            <a:srgbClr val="0A0A0A"/>
-          </a:solidFill>
-          <a:ln/>
-        </p:spPr>
+          <p:cNvPr id="7" name="Text 5"/>
+          <p:cNvSpPr/>
+          <p:nvPr/>
+        </p:nvSpPr>
+        <p:spPr>
+          <a:xfrm>
+            <a:off x="640080" y="1188720"/>
+            <a:ext cx="3657600" cy="320040"/>
+          </a:xfrm>
+          <a:prstGeom prst="rect">
+            <a:avLst/>
+          </a:prstGeom>
+          <a:noFill/>
+          <a:ln/>
+        </p:spPr>
+        <p:txBody>
+          <a:bodyPr wrap="square" lIns="0" tIns="0" rIns="0" bIns="0" rtlCol="0" anchor="ctr"/>
+          <a:lstStyle/>
+          <a:p>
+            <a:pPr indent="0" marL="0">
+              <a:buNone/>
+            </a:pPr>
+            <a:r>
+              <a:rPr lang="en-US" sz="1300" b="1" dirty="0">
+                <a:solidFill>
+                  <a:srgbClr val="0A0A0A"/>
+                </a:solidFill>
+                <a:latin typeface="Arial Black" pitchFamily="34" charset="0"/>
+                <a:ea typeface="Arial Black" pitchFamily="34" charset="-122"/>
+                <a:cs typeface="Arial Black" pitchFamily="34" charset="-120"/>
+              </a:rPr>
+              <a:t>The rail exists</a:t>
+            </a:r>
+            <a:endParaRPr lang="en-US" sz="1300" dirty="0"/>
+          </a:p>
+        </p:txBody>
       </p:sp>
       <p:sp>
         <p:nvSpPr>
@@ -3017,164 +3206,125 @@
         </p:nvSpPr>
         <p:spPr>
           <a:xfrm>
-            <a:off x="1402080" y="1353312"/>
-            <a:ext cx="640080" cy="457200"/>
-          </a:xfrm>
-          <a:prstGeom prst="rect">
-            <a:avLst/>
-          </a:prstGeom>
-          <a:noFill/>
-          <a:ln/>
-        </p:spPr>
-        <p:txBody>
-          <a:bodyPr wrap="square" lIns="0" tIns="0" rIns="0" bIns="0" rtlCol="0" anchor="ctr"/>
-          <a:lstStyle/>
-          <a:p>
-            <a:pPr algn="ctr" indent="0" marL="0">
-              <a:buNone/>
-            </a:pPr>
-            <a:r>
-              <a:rPr lang="en-US" sz="2000" b="1" dirty="0">
-                <a:solidFill>
-                  <a:srgbClr val="FFFFFF"/>
+            <a:off x="640080" y="1554480"/>
+            <a:ext cx="3657600" cy="548640"/>
+          </a:xfrm>
+          <a:prstGeom prst="rect">
+            <a:avLst/>
+          </a:prstGeom>
+          <a:noFill/>
+          <a:ln/>
+        </p:spPr>
+        <p:txBody>
+          <a:bodyPr wrap="square" lIns="0" tIns="0" rIns="0" bIns="0" rtlCol="0" anchor="ctr"/>
+          <a:lstStyle/>
+          <a:p>
+            <a:pPr indent="0" marL="0">
+              <a:buNone/>
+            </a:pPr>
+            <a:r>
+              <a:rPr lang="en-US" sz="1600" b="1" dirty="0">
+                <a:solidFill>
+                  <a:srgbClr val="0A0A0A"/>
+                </a:solidFill>
+                <a:latin typeface="Arial Black" pitchFamily="34" charset="0"/>
+                <a:ea typeface="Arial Black" pitchFamily="34" charset="-122"/>
+                <a:cs typeface="Arial Black" pitchFamily="34" charset="-120"/>
+              </a:rPr>
+              <a:t>88.5 lakh PMFBY enrollments, Rs 2,580 crore claims paid (2020-25)</a:t>
+            </a:r>
+            <a:endParaRPr lang="en-US" sz="1600" dirty="0"/>
+          </a:p>
+        </p:txBody>
+      </p:sp>
+      <p:sp>
+        <p:nvSpPr>
+          <p:cNvPr id="9" name="Text 7"/>
+          <p:cNvSpPr/>
+          <p:nvPr/>
+        </p:nvSpPr>
+        <p:spPr>
+          <a:xfrm>
+            <a:off x="640080" y="2194560"/>
+            <a:ext cx="3657600" cy="548640"/>
+          </a:xfrm>
+          <a:prstGeom prst="rect">
+            <a:avLst/>
+          </a:prstGeom>
+          <a:noFill/>
+          <a:ln/>
+        </p:spPr>
+        <p:txBody>
+          <a:bodyPr wrap="square" lIns="0" tIns="0" rIns="0" bIns="0" rtlCol="0" anchor="ctr"/>
+          <a:lstStyle/>
+          <a:p>
+            <a:pPr indent="0" marL="0">
+              <a:buNone/>
+            </a:pPr>
+            <a:r>
+              <a:rPr lang="en-US" sz="1250" dirty="0">
+                <a:solidFill>
+                  <a:srgbClr val="0A0A0A"/>
                 </a:solidFill>
                 <a:latin typeface="Arial" pitchFamily="34" charset="0"/>
                 <a:ea typeface="Arial" pitchFamily="34" charset="-122"/>
                 <a:cs typeface="Arial" pitchFamily="34" charset="-120"/>
               </a:rPr>
-              <a:t>1</a:t>
-            </a:r>
-            <a:endParaRPr lang="en-US" sz="2000" dirty="0"/>
-          </a:p>
-        </p:txBody>
-      </p:sp>
-      <p:sp>
-        <p:nvSpPr>
-          <p:cNvPr id="9" name="Text 7"/>
-          <p:cNvSpPr/>
-          <p:nvPr/>
-        </p:nvSpPr>
-        <p:spPr>
-          <a:xfrm>
-            <a:off x="594360" y="2057400"/>
-            <a:ext cx="2255520" cy="365760"/>
-          </a:xfrm>
-          <a:prstGeom prst="rect">
-            <a:avLst/>
-          </a:prstGeom>
-          <a:noFill/>
-          <a:ln/>
-        </p:spPr>
-        <p:txBody>
-          <a:bodyPr wrap="square" lIns="0" tIns="0" rIns="0" bIns="0" rtlCol="0" anchor="ctr"/>
-          <a:lstStyle/>
-          <a:p>
-            <a:pPr algn="ctr" indent="0" marL="0">
-              <a:buNone/>
-            </a:pPr>
-            <a:r>
-              <a:rPr lang="en-US" sz="1500" b="1" dirty="0">
+              <a:t>Digital Agriculture Mission, Rs 2,817 crore, funds agri-digital public infrastructure</a:t>
+            </a:r>
+            <a:endParaRPr lang="en-US" sz="1250" dirty="0"/>
+          </a:p>
+        </p:txBody>
+      </p:sp>
+      <p:sp>
+        <p:nvSpPr>
+          <p:cNvPr id="10" name="Text 8"/>
+          <p:cNvSpPr/>
+          <p:nvPr/>
+        </p:nvSpPr>
+        <p:spPr>
+          <a:xfrm>
+            <a:off x="640080" y="2788920"/>
+            <a:ext cx="3657600" cy="548640"/>
+          </a:xfrm>
+          <a:prstGeom prst="rect">
+            <a:avLst/>
+          </a:prstGeom>
+          <a:noFill/>
+          <a:ln/>
+        </p:spPr>
+        <p:txBody>
+          <a:bodyPr wrap="square" lIns="0" tIns="0" rIns="0" bIns="0" rtlCol="0" anchor="ctr"/>
+          <a:lstStyle/>
+          <a:p>
+            <a:pPr indent="0" marL="0">
+              <a:buNone/>
+            </a:pPr>
+            <a:r>
+              <a:rPr lang="en-US" sz="1200" dirty="0">
                 <a:solidFill>
                   <a:srgbClr val="0A0A0A"/>
-                </a:solidFill>
-                <a:latin typeface="Arial Black" pitchFamily="34" charset="0"/>
-                <a:ea typeface="Arial Black" pitchFamily="34" charset="-122"/>
-                <a:cs typeface="Arial Black" pitchFamily="34" charset="-120"/>
-              </a:rPr>
-              <a:t>Harsh Gounder</a:t>
-            </a:r>
-            <a:endParaRPr lang="en-US" sz="1500" dirty="0"/>
-          </a:p>
-        </p:txBody>
-      </p:sp>
-      <p:sp>
-        <p:nvSpPr>
-          <p:cNvPr id="10" name="Text 8"/>
-          <p:cNvSpPr/>
-          <p:nvPr/>
-        </p:nvSpPr>
-        <p:spPr>
-          <a:xfrm>
-            <a:off x="594360" y="2423160"/>
-            <a:ext cx="2255520" cy="274320"/>
-          </a:xfrm>
-          <a:prstGeom prst="rect">
-            <a:avLst/>
-          </a:prstGeom>
-          <a:noFill/>
-          <a:ln/>
-        </p:spPr>
-        <p:txBody>
-          <a:bodyPr wrap="square" lIns="0" tIns="0" rIns="0" bIns="0" rtlCol="0" anchor="ctr"/>
-          <a:lstStyle/>
-          <a:p>
-            <a:pPr algn="ctr" indent="0" marL="0">
-              <a:buNone/>
-            </a:pPr>
-            <a:r>
-              <a:rPr lang="en-US" sz="1150" dirty="0">
-                <a:solidFill>
-                  <a:srgbClr val="6E6E6E"/>
                 </a:solidFill>
                 <a:latin typeface="Arial" pitchFamily="34" charset="0"/>
                 <a:ea typeface="Arial" pitchFamily="34" charset="-122"/>
                 <a:cs typeface="Arial" pitchFamily="34" charset="-120"/>
               </a:rPr>
-              <a:t>Lead, E&amp;CE</a:t>
-            </a:r>
-            <a:endParaRPr lang="en-US" sz="1150" dirty="0"/>
-          </a:p>
-        </p:txBody>
-      </p:sp>
-      <p:sp>
-        <p:nvSpPr>
-          <p:cNvPr id="11" name="Text 9"/>
-          <p:cNvSpPr/>
-          <p:nvPr/>
-        </p:nvSpPr>
-        <p:spPr>
-          <a:xfrm>
-            <a:off x="594360" y="2697480"/>
-            <a:ext cx="2255520" cy="320040"/>
-          </a:xfrm>
-          <a:prstGeom prst="rect">
-            <a:avLst/>
-          </a:prstGeom>
-          <a:noFill/>
-          <a:ln/>
-        </p:spPr>
-        <p:txBody>
-          <a:bodyPr wrap="square" lIns="0" tIns="0" rIns="0" bIns="0" rtlCol="0" anchor="ctr"/>
-          <a:lstStyle/>
-          <a:p>
-            <a:pPr algn="ctr" indent="0" marL="0">
-              <a:buNone/>
-            </a:pPr>
-            <a:r>
-              <a:rPr lang="en-US" sz="950" i="1" dirty="0">
-                <a:solidFill>
-                  <a:srgbClr val="6E6E6E"/>
-                </a:solidFill>
-                <a:latin typeface="Arial" pitchFamily="34" charset="0"/>
-                <a:ea typeface="Arial" pitchFamily="34" charset="-122"/>
-                <a:cs typeface="Arial" pitchFamily="34" charset="-120"/>
-              </a:rPr>
-              <a:t>everything: architecture, code, research method, 49-report evidence wave, backend, QA, devops</a:t>
-            </a:r>
-            <a:endParaRPr lang="en-US" sz="950" dirty="0"/>
-          </a:p>
-        </p:txBody>
-      </p:sp>
-      <p:sp>
-        <p:nvSpPr>
-          <p:cNvPr id="12" name="Shape 10"/>
-          <p:cNvSpPr/>
-          <p:nvPr/>
-        </p:nvSpPr>
-        <p:spPr>
-          <a:xfrm>
-            <a:off x="3357372" y="1147572"/>
-            <a:ext cx="2529840" cy="1828800"/>
+              <a:t>Odisha: cyclone-facing coast, paddy and saline zones, Dana and Yaas damage on record</a:t>
+            </a:r>
+            <a:endParaRPr lang="en-US" sz="1200" dirty="0"/>
+          </a:p>
+        </p:txBody>
+      </p:sp>
+      <p:sp>
+        <p:nvSpPr>
+          <p:cNvPr id="11" name="Shape 9"/>
+          <p:cNvSpPr/>
+          <p:nvPr/>
+        </p:nvSpPr>
+        <p:spPr>
+          <a:xfrm>
+            <a:off x="4759452" y="1101852"/>
+            <a:ext cx="3977640" cy="2103120"/>
           </a:xfrm>
           <a:prstGeom prst="rect">
             <a:avLst/>
@@ -3192,24 +3342,24 @@
       </p:sp>
       <p:sp>
         <p:nvSpPr>
-          <p:cNvPr id="13" name="Shape 11"/>
-          <p:cNvSpPr/>
-          <p:nvPr/>
-        </p:nvSpPr>
-        <p:spPr>
-          <a:xfrm>
-            <a:off x="3307080" y="1097280"/>
-            <a:ext cx="2529840" cy="1828800"/>
+          <p:cNvPr id="12" name="Shape 10"/>
+          <p:cNvSpPr/>
+          <p:nvPr/>
+        </p:nvSpPr>
+        <p:spPr>
+          <a:xfrm>
+            <a:off x="4709160" y="1051560"/>
+            <a:ext cx="3977640" cy="2103120"/>
           </a:xfrm>
           <a:prstGeom prst="roundRect">
             <a:avLst>
-              <a:gd name="adj" fmla="val 3000"/>
+              <a:gd name="adj" fmla="val 2609"/>
             </a:avLst>
           </a:prstGeom>
           <a:solidFill>
             <a:srgbClr val="FFFFFF"/>
           </a:solidFill>
-          <a:ln w="19050">
+          <a:ln w="25400">
             <a:solidFill>
               <a:srgbClr val="0A0A0A"/>
             </a:solidFill>
@@ -3219,60 +3369,118 @@
       </p:sp>
       <p:sp>
         <p:nvSpPr>
-          <p:cNvPr id="14" name="Shape 12"/>
-          <p:cNvSpPr/>
-          <p:nvPr/>
-        </p:nvSpPr>
-        <p:spPr>
-          <a:xfrm>
-            <a:off x="4251960" y="1280160"/>
-            <a:ext cx="640080" cy="640080"/>
-          </a:xfrm>
-          <a:prstGeom prst="ellipse">
-            <a:avLst/>
-          </a:prstGeom>
-          <a:solidFill>
-            <a:srgbClr val="0A0A0A"/>
-          </a:solidFill>
-          <a:ln/>
-        </p:spPr>
-      </p:sp>
-      <p:sp>
-        <p:nvSpPr>
-          <p:cNvPr id="15" name="Text 13"/>
-          <p:cNvSpPr/>
-          <p:nvPr/>
-        </p:nvSpPr>
-        <p:spPr>
-          <a:xfrm>
-            <a:off x="4251960" y="1353312"/>
-            <a:ext cx="640080" cy="457200"/>
-          </a:xfrm>
-          <a:prstGeom prst="rect">
-            <a:avLst/>
-          </a:prstGeom>
-          <a:noFill/>
-          <a:ln/>
-        </p:spPr>
-        <p:txBody>
-          <a:bodyPr wrap="square" lIns="0" tIns="0" rIns="0" bIns="0" rtlCol="0" anchor="ctr"/>
-          <a:lstStyle/>
-          <a:p>
-            <a:pPr algn="ctr" indent="0" marL="0">
-              <a:buNone/>
-            </a:pPr>
-            <a:r>
-              <a:rPr lang="en-US" sz="2000" b="1" dirty="0">
-                <a:solidFill>
-                  <a:srgbClr val="FFFFFF"/>
+          <p:cNvPr id="13" name="Text 11"/>
+          <p:cNvSpPr/>
+          <p:nvPr/>
+        </p:nvSpPr>
+        <p:spPr>
+          <a:xfrm>
+            <a:off x="4892040" y="1188720"/>
+            <a:ext cx="3657600" cy="320040"/>
+          </a:xfrm>
+          <a:prstGeom prst="rect">
+            <a:avLst/>
+          </a:prstGeom>
+          <a:noFill/>
+          <a:ln/>
+        </p:spPr>
+        <p:txBody>
+          <a:bodyPr wrap="square" lIns="0" tIns="0" rIns="0" bIns="0" rtlCol="0" anchor="ctr"/>
+          <a:lstStyle/>
+          <a:p>
+            <a:pPr indent="0" marL="0">
+              <a:buNone/>
+            </a:pPr>
+            <a:r>
+              <a:rPr lang="en-US" sz="1300" b="1" dirty="0">
+                <a:solidFill>
+                  <a:srgbClr val="0A0A0A"/>
+                </a:solidFill>
+                <a:latin typeface="Arial Black" pitchFamily="34" charset="0"/>
+                <a:ea typeface="Arial Black" pitchFamily="34" charset="-122"/>
+                <a:cs typeface="Arial Black" pitchFamily="34" charset="-120"/>
+              </a:rPr>
+              <a:t>The pilot</a:t>
+            </a:r>
+            <a:endParaRPr lang="en-US" sz="1300" dirty="0"/>
+          </a:p>
+        </p:txBody>
+      </p:sp>
+      <p:sp>
+        <p:nvSpPr>
+          <p:cNvPr id="14" name="Text 12"/>
+          <p:cNvSpPr/>
+          <p:nvPr/>
+        </p:nvSpPr>
+        <p:spPr>
+          <a:xfrm>
+            <a:off x="4892040" y="1600200"/>
+            <a:ext cx="3657600" cy="457200"/>
+          </a:xfrm>
+          <a:prstGeom prst="rect">
+            <a:avLst/>
+          </a:prstGeom>
+          <a:noFill/>
+          <a:ln/>
+        </p:spPr>
+        <p:txBody>
+          <a:bodyPr wrap="square" lIns="0" tIns="0" rIns="0" bIns="0" rtlCol="0" anchor="ctr"/>
+          <a:lstStyle/>
+          <a:p>
+            <a:pPr indent="0" marL="0">
+              <a:buNone/>
+            </a:pPr>
+            <a:r>
+              <a:rPr lang="en-US" sz="1200" dirty="0">
+                <a:solidFill>
+                  <a:srgbClr val="0A0A0A"/>
                 </a:solidFill>
                 <a:latin typeface="Arial" pitchFamily="34" charset="0"/>
                 <a:ea typeface="Arial" pitchFamily="34" charset="-122"/>
                 <a:cs typeface="Arial" pitchFamily="34" charset="-120"/>
               </a:rPr>
-              <a:t>2</a:t>
-            </a:r>
-            <a:endParaRPr lang="en-US" sz="2000" dirty="0"/>
+              <a:t>1.  one coastal block with extension-worker access</a:t>
+            </a:r>
+            <a:endParaRPr lang="en-US" sz="1200" dirty="0"/>
+          </a:p>
+        </p:txBody>
+      </p:sp>
+      <p:sp>
+        <p:nvSpPr>
+          <p:cNvPr id="15" name="Text 13"/>
+          <p:cNvSpPr/>
+          <p:nvPr/>
+        </p:nvSpPr>
+        <p:spPr>
+          <a:xfrm>
+            <a:off x="4892040" y="2103120"/>
+            <a:ext cx="3657600" cy="457200"/>
+          </a:xfrm>
+          <a:prstGeom prst="rect">
+            <a:avLst/>
+          </a:prstGeom>
+          <a:noFill/>
+          <a:ln/>
+        </p:spPr>
+        <p:txBody>
+          <a:bodyPr wrap="square" lIns="0" tIns="0" rIns="0" bIns="0" rtlCol="0" anchor="ctr"/>
+          <a:lstStyle/>
+          <a:p>
+            <a:pPr indent="0" marL="0">
+              <a:buNone/>
+            </a:pPr>
+            <a:r>
+              <a:rPr lang="en-US" sz="1200" dirty="0">
+                <a:solidFill>
+                  <a:srgbClr val="0A0A0A"/>
+                </a:solidFill>
+                <a:latin typeface="Arial" pitchFamily="34" charset="0"/>
+                <a:ea typeface="Arial" pitchFamily="34" charset="-122"/>
+                <a:cs typeface="Arial" pitchFamily="34" charset="-120"/>
+              </a:rPr>
+              <a:t>2.  one agronomist-reviewed rule pack</a:t>
+            </a:r>
+            <a:endParaRPr lang="en-US" sz="1200" dirty="0"/>
           </a:p>
         </p:txBody>
       </p:sp>
@@ -3284,63 +3492,148 @@
         </p:nvSpPr>
         <p:spPr>
           <a:xfrm>
-            <a:off x="3444240" y="2057400"/>
-            <a:ext cx="2255520" cy="365760"/>
-          </a:xfrm>
-          <a:prstGeom prst="rect">
-            <a:avLst/>
-          </a:prstGeom>
-          <a:noFill/>
-          <a:ln/>
-        </p:spPr>
-        <p:txBody>
-          <a:bodyPr wrap="square" lIns="0" tIns="0" rIns="0" bIns="0" rtlCol="0" anchor="ctr"/>
-          <a:lstStyle/>
-          <a:p>
-            <a:pPr algn="ctr" indent="0" marL="0">
-              <a:buNone/>
-            </a:pPr>
-            <a:r>
-              <a:rPr lang="en-US" sz="1500" b="1" dirty="0">
+            <a:off x="4892040" y="2606040"/>
+            <a:ext cx="3657600" cy="457200"/>
+          </a:xfrm>
+          <a:prstGeom prst="rect">
+            <a:avLst/>
+          </a:prstGeom>
+          <a:noFill/>
+          <a:ln/>
+        </p:spPr>
+        <p:txBody>
+          <a:bodyPr wrap="square" lIns="0" tIns="0" rIns="0" bIns="0" rtlCol="0" anchor="ctr"/>
+          <a:lstStyle/>
+          <a:p>
+            <a:pPr indent="0" marL="0">
+              <a:buNone/>
+            </a:pPr>
+            <a:r>
+              <a:rPr lang="en-US" sz="1200" dirty="0">
                 <a:solidFill>
                   <a:srgbClr val="0A0A0A"/>
+                </a:solidFill>
+                <a:latin typeface="Arial" pitchFamily="34" charset="0"/>
+                <a:ea typeface="Arial" pitchFamily="34" charset="-122"/>
+                <a:cs typeface="Arial" pitchFamily="34" charset="-120"/>
+              </a:rPr>
+              <a:t>3.  measure comprehension and claim conversion, not downloads</a:t>
+            </a:r>
+            <a:endParaRPr lang="en-US" sz="1200" dirty="0"/>
+          </a:p>
+        </p:txBody>
+      </p:sp>
+      <p:sp>
+        <p:nvSpPr>
+          <p:cNvPr id="17" name="Text 15"/>
+          <p:cNvSpPr/>
+          <p:nvPr/>
+        </p:nvSpPr>
+        <p:spPr>
+          <a:xfrm>
+            <a:off x="498348" y="3470148"/>
+            <a:ext cx="6858000" cy="0"/>
+          </a:xfrm>
+          <a:prstGeom prst="rect">
+            <a:avLst/>
+          </a:prstGeom>
+          <a:noFill/>
+          <a:ln/>
+        </p:spPr>
+        <p:txBody>
+          <a:bodyPr wrap="square" lIns="0" tIns="0" rIns="0" bIns="0" rtlCol="0" anchor="ctr"/>
+          <a:lstStyle/>
+          <a:p>
+            <a:pPr indent="0" marL="0">
+              <a:buNone/>
+            </a:pPr>
+            <a:r>
+              <a:rPr lang="en-US" sz="1450" b="1" dirty="0">
+                <a:solidFill>
+                  <a:srgbClr val="E0E0E0"/>
                 </a:solidFill>
                 <a:latin typeface="Arial Black" pitchFamily="34" charset="0"/>
                 <a:ea typeface="Arial Black" pitchFamily="34" charset="-122"/>
                 <a:cs typeface="Arial Black" pitchFamily="34" charset="-120"/>
               </a:rPr>
-              <a:t>Ayush Kharwar</a:t>
-            </a:r>
-            <a:endParaRPr lang="en-US" sz="1500" dirty="0"/>
-          </a:p>
-        </p:txBody>
-      </p:sp>
-      <p:sp>
-        <p:nvSpPr>
-          <p:cNvPr id="17" name="Text 15"/>
-          <p:cNvSpPr/>
-          <p:nvPr/>
-        </p:nvSpPr>
-        <p:spPr>
-          <a:xfrm>
-            <a:off x="3444240" y="2423160"/>
-            <a:ext cx="2255520" cy="274320"/>
-          </a:xfrm>
-          <a:prstGeom prst="rect">
-            <a:avLst/>
-          </a:prstGeom>
-          <a:noFill/>
-          <a:ln/>
-        </p:spPr>
-        <p:txBody>
-          <a:bodyPr wrap="square" lIns="0" tIns="0" rIns="0" bIns="0" rtlCol="0" anchor="ctr"/>
-          <a:lstStyle/>
-          <a:p>
-            <a:pPr algn="ctr" indent="0" marL="0">
-              <a:buNone/>
-            </a:pPr>
-            <a:r>
-              <a:rPr lang="en-US" sz="1150" dirty="0">
+              <a:t>Named rail, named pilot, dated outcome. That is the Round 1 contract.</a:t>
+            </a:r>
+            <a:endParaRPr lang="en-US" sz="1450" dirty="0"/>
+          </a:p>
+        </p:txBody>
+      </p:sp>
+      <p:sp>
+        <p:nvSpPr>
+          <p:cNvPr id="18" name="Text 16"/>
+          <p:cNvSpPr/>
+          <p:nvPr/>
+        </p:nvSpPr>
+        <p:spPr>
+          <a:xfrm>
+            <a:off x="457200" y="3429000"/>
+            <a:ext cx="6858000" cy="0"/>
+          </a:xfrm>
+          <a:prstGeom prst="rect">
+            <a:avLst/>
+          </a:prstGeom>
+          <a:noFill/>
+          <a:ln/>
+          <a:effectLst>
+            <a:outerShdw sx="100000" sy="100000" kx="0" ky="0" algn="bl" rotWithShape="0" blurRad="101600" dist="38100" dir="2700000">
+              <a:srgbClr val="000000">
+                <a:alpha val="25000"/>
+              </a:srgbClr>
+            </a:outerShdw>
+          </a:effectLst>
+        </p:spPr>
+        <p:txBody>
+          <a:bodyPr wrap="square" lIns="0" tIns="0" rIns="0" bIns="0" rtlCol="0" anchor="ctr"/>
+          <a:lstStyle/>
+          <a:p>
+            <a:pPr indent="0" marL="0">
+              <a:buNone/>
+            </a:pPr>
+            <a:r>
+              <a:rPr lang="en-US" sz="1450" b="1" dirty="0">
+                <a:solidFill>
+                  <a:srgbClr val="0A0A0A"/>
+                </a:solidFill>
+                <a:latin typeface="Arial Black" pitchFamily="34" charset="0"/>
+                <a:ea typeface="Arial Black" pitchFamily="34" charset="-122"/>
+                <a:cs typeface="Arial Black" pitchFamily="34" charset="-120"/>
+              </a:rPr>
+              <a:t>Named rail, named pilot, dated outcome. That is the Round 1 contract.</a:t>
+            </a:r>
+            <a:endParaRPr lang="en-US" sz="1450" dirty="0"/>
+          </a:p>
+        </p:txBody>
+      </p:sp>
+      <p:sp>
+        <p:nvSpPr>
+          <p:cNvPr id="19" name="Text 17"/>
+          <p:cNvSpPr/>
+          <p:nvPr/>
+        </p:nvSpPr>
+        <p:spPr>
+          <a:xfrm>
+            <a:off x="457200" y="3977640"/>
+            <a:ext cx="8229600" cy="365760"/>
+          </a:xfrm>
+          <a:prstGeom prst="rect">
+            <a:avLst/>
+          </a:prstGeom>
+          <a:noFill/>
+          <a:ln/>
+        </p:spPr>
+        <p:txBody>
+          <a:bodyPr wrap="square" lIns="0" tIns="0" rIns="0" bIns="0" rtlCol="0" anchor="ctr"/>
+          <a:lstStyle/>
+          <a:p>
+            <a:pPr indent="0" marL="0">
+              <a:buNone/>
+            </a:pPr>
+            <a:r>
+              <a:rPr lang="en-US" sz="1000" i="1" dirty="0">
                 <a:solidFill>
                   <a:srgbClr val="6E6E6E"/>
                 </a:solidFill>
@@ -3348,38 +3641,38 @@
                 <a:ea typeface="Arial" pitchFamily="34" charset="-122"/>
                 <a:cs typeface="Arial" pitchFamily="34" charset="-120"/>
               </a:rPr>
-              <a:t>Deck and design</a:t>
-            </a:r>
-            <a:endParaRPr lang="en-US" sz="1150" dirty="0"/>
-          </a:p>
-        </p:txBody>
-      </p:sp>
-      <p:sp>
-        <p:nvSpPr>
-          <p:cNvPr id="18" name="Text 16"/>
-          <p:cNvSpPr/>
-          <p:nvPr/>
-        </p:nvSpPr>
-        <p:spPr>
-          <a:xfrm>
-            <a:off x="3444240" y="2697480"/>
-            <a:ext cx="2255520" cy="320040"/>
-          </a:xfrm>
-          <a:prstGeom prst="rect">
-            <a:avLst/>
-          </a:prstGeom>
-          <a:noFill/>
-          <a:ln/>
-        </p:spPr>
-        <p:txBody>
-          <a:bodyPr wrap="square" lIns="0" tIns="0" rIns="0" bIns="0" rtlCol="0" anchor="ctr"/>
-          <a:lstStyle/>
-          <a:p>
-            <a:pPr algn="ctr" indent="0" marL="0">
-              <a:buNone/>
-            </a:pPr>
-            <a:r>
-              <a:rPr lang="en-US" sz="950" i="1" dirty="0">
+              <a:t>Sources: PMFBY program data; Digital Agriculture Mission allocation; YSD Dana assessment; Down To Earth Yaas report. All dated 2024-2025, verified in the research wave.</a:t>
+            </a:r>
+            <a:endParaRPr lang="en-US" sz="1000" dirty="0"/>
+          </a:p>
+        </p:txBody>
+      </p:sp>
+      <p:sp>
+        <p:nvSpPr>
+          <p:cNvPr id="20" name="Text 18"/>
+          <p:cNvSpPr/>
+          <p:nvPr/>
+        </p:nvSpPr>
+        <p:spPr>
+          <a:xfrm>
+            <a:off x="457200" y="4828032"/>
+            <a:ext cx="8229600" cy="274320"/>
+          </a:xfrm>
+          <a:prstGeom prst="rect">
+            <a:avLst/>
+          </a:prstGeom>
+          <a:noFill/>
+          <a:ln/>
+        </p:spPr>
+        <p:txBody>
+          <a:bodyPr wrap="square" lIns="0" tIns="0" rIns="0" bIns="0" rtlCol="0" anchor="ctr"/>
+          <a:lstStyle/>
+          <a:p>
+            <a:pPr indent="0" marL="0">
+              <a:buNone/>
+            </a:pPr>
+            <a:r>
+              <a:rPr lang="en-US" sz="850" dirty="0">
                 <a:solidFill>
                   <a:srgbClr val="6E6E6E"/>
                 </a:solidFill>
@@ -3387,313 +3680,7 @@
                 <a:ea typeface="Arial" pitchFamily="34" charset="-122"/>
                 <a:cs typeface="Arial" pitchFamily="34" charset="-120"/>
               </a:rPr>
-              <a:t>presentation build and design</a:t>
-            </a:r>
-            <a:endParaRPr lang="en-US" sz="950" dirty="0"/>
-          </a:p>
-        </p:txBody>
-      </p:sp>
-      <p:sp>
-        <p:nvSpPr>
-          <p:cNvPr id="19" name="Shape 17"/>
-          <p:cNvSpPr/>
-          <p:nvPr/>
-        </p:nvSpPr>
-        <p:spPr>
-          <a:xfrm>
-            <a:off x="6207252" y="1147572"/>
-            <a:ext cx="2529840" cy="1828800"/>
-          </a:xfrm>
-          <a:prstGeom prst="rect">
-            <a:avLst/>
-          </a:prstGeom>
-          <a:solidFill>
-            <a:srgbClr val="E0E0E0"/>
-          </a:solidFill>
-          <a:ln w="12700">
-            <a:solidFill>
-              <a:srgbClr val="E0E0E0"/>
-            </a:solidFill>
-            <a:prstDash val="solid"/>
-          </a:ln>
-        </p:spPr>
-      </p:sp>
-      <p:sp>
-        <p:nvSpPr>
-          <p:cNvPr id="20" name="Shape 18"/>
-          <p:cNvSpPr/>
-          <p:nvPr/>
-        </p:nvSpPr>
-        <p:spPr>
-          <a:xfrm>
-            <a:off x="6156960" y="1097280"/>
-            <a:ext cx="2529840" cy="1828800"/>
-          </a:xfrm>
-          <a:prstGeom prst="roundRect">
-            <a:avLst>
-              <a:gd name="adj" fmla="val 3000"/>
-            </a:avLst>
-          </a:prstGeom>
-          <a:solidFill>
-            <a:srgbClr val="FFFFFF"/>
-          </a:solidFill>
-          <a:ln w="19050">
-            <a:solidFill>
-              <a:srgbClr val="0A0A0A"/>
-            </a:solidFill>
-            <a:prstDash val="solid"/>
-          </a:ln>
-        </p:spPr>
-      </p:sp>
-      <p:sp>
-        <p:nvSpPr>
-          <p:cNvPr id="21" name="Shape 19"/>
-          <p:cNvSpPr/>
-          <p:nvPr/>
-        </p:nvSpPr>
-        <p:spPr>
-          <a:xfrm>
-            <a:off x="7101840" y="1280160"/>
-            <a:ext cx="640080" cy="640080"/>
-          </a:xfrm>
-          <a:prstGeom prst="ellipse">
-            <a:avLst/>
-          </a:prstGeom>
-          <a:solidFill>
-            <a:srgbClr val="0A0A0A"/>
-          </a:solidFill>
-          <a:ln/>
-        </p:spPr>
-      </p:sp>
-      <p:sp>
-        <p:nvSpPr>
-          <p:cNvPr id="22" name="Text 20"/>
-          <p:cNvSpPr/>
-          <p:nvPr/>
-        </p:nvSpPr>
-        <p:spPr>
-          <a:xfrm>
-            <a:off x="7101840" y="1353312"/>
-            <a:ext cx="640080" cy="457200"/>
-          </a:xfrm>
-          <a:prstGeom prst="rect">
-            <a:avLst/>
-          </a:prstGeom>
-          <a:noFill/>
-          <a:ln/>
-        </p:spPr>
-        <p:txBody>
-          <a:bodyPr wrap="square" lIns="0" tIns="0" rIns="0" bIns="0" rtlCol="0" anchor="ctr"/>
-          <a:lstStyle/>
-          <a:p>
-            <a:pPr algn="ctr" indent="0" marL="0">
-              <a:buNone/>
-            </a:pPr>
-            <a:r>
-              <a:rPr lang="en-US" sz="2000" b="1" dirty="0">
-                <a:solidFill>
-                  <a:srgbClr val="FFFFFF"/>
-                </a:solidFill>
-                <a:latin typeface="Arial" pitchFamily="34" charset="0"/>
-                <a:ea typeface="Arial" pitchFamily="34" charset="-122"/>
-                <a:cs typeface="Arial" pitchFamily="34" charset="-120"/>
-              </a:rPr>
-              <a:t>3</a:t>
-            </a:r>
-            <a:endParaRPr lang="en-US" sz="2000" dirty="0"/>
-          </a:p>
-        </p:txBody>
-      </p:sp>
-      <p:sp>
-        <p:nvSpPr>
-          <p:cNvPr id="23" name="Text 21"/>
-          <p:cNvSpPr/>
-          <p:nvPr/>
-        </p:nvSpPr>
-        <p:spPr>
-          <a:xfrm>
-            <a:off x="6294120" y="2057400"/>
-            <a:ext cx="2255520" cy="365760"/>
-          </a:xfrm>
-          <a:prstGeom prst="rect">
-            <a:avLst/>
-          </a:prstGeom>
-          <a:noFill/>
-          <a:ln/>
-        </p:spPr>
-        <p:txBody>
-          <a:bodyPr wrap="square" lIns="0" tIns="0" rIns="0" bIns="0" rtlCol="0" anchor="ctr"/>
-          <a:lstStyle/>
-          <a:p>
-            <a:pPr algn="ctr" indent="0" marL="0">
-              <a:buNone/>
-            </a:pPr>
-            <a:r>
-              <a:rPr lang="en-US" sz="1500" b="1" dirty="0">
-                <a:solidFill>
-                  <a:srgbClr val="0A0A0A"/>
-                </a:solidFill>
-                <a:latin typeface="Arial Black" pitchFamily="34" charset="0"/>
-                <a:ea typeface="Arial Black" pitchFamily="34" charset="-122"/>
-                <a:cs typeface="Arial Black" pitchFamily="34" charset="-120"/>
-              </a:rPr>
-              <a:t>Sujal Shukla</a:t>
-            </a:r>
-            <a:endParaRPr lang="en-US" sz="1500" dirty="0"/>
-          </a:p>
-        </p:txBody>
-      </p:sp>
-      <p:sp>
-        <p:nvSpPr>
-          <p:cNvPr id="24" name="Text 22"/>
-          <p:cNvSpPr/>
-          <p:nvPr/>
-        </p:nvSpPr>
-        <p:spPr>
-          <a:xfrm>
-            <a:off x="6294120" y="2423160"/>
-            <a:ext cx="2255520" cy="274320"/>
-          </a:xfrm>
-          <a:prstGeom prst="rect">
-            <a:avLst/>
-          </a:prstGeom>
-          <a:noFill/>
-          <a:ln/>
-        </p:spPr>
-        <p:txBody>
-          <a:bodyPr wrap="square" lIns="0" tIns="0" rIns="0" bIns="0" rtlCol="0" anchor="ctr"/>
-          <a:lstStyle/>
-          <a:p>
-            <a:pPr algn="ctr" indent="0" marL="0">
-              <a:buNone/>
-            </a:pPr>
-            <a:r>
-              <a:rPr lang="en-US" sz="1150" dirty="0">
-                <a:solidFill>
-                  <a:srgbClr val="6E6E6E"/>
-                </a:solidFill>
-                <a:latin typeface="Arial" pitchFamily="34" charset="0"/>
-                <a:ea typeface="Arial" pitchFamily="34" charset="-122"/>
-                <a:cs typeface="Arial" pitchFamily="34" charset="-120"/>
-              </a:rPr>
-              <a:t>Deck design</a:t>
-            </a:r>
-            <a:endParaRPr lang="en-US" sz="1150" dirty="0"/>
-          </a:p>
-        </p:txBody>
-      </p:sp>
-      <p:sp>
-        <p:nvSpPr>
-          <p:cNvPr id="25" name="Text 23"/>
-          <p:cNvSpPr/>
-          <p:nvPr/>
-        </p:nvSpPr>
-        <p:spPr>
-          <a:xfrm>
-            <a:off x="6294120" y="2697480"/>
-            <a:ext cx="2255520" cy="320040"/>
-          </a:xfrm>
-          <a:prstGeom prst="rect">
-            <a:avLst/>
-          </a:prstGeom>
-          <a:noFill/>
-          <a:ln/>
-        </p:spPr>
-        <p:txBody>
-          <a:bodyPr wrap="square" lIns="0" tIns="0" rIns="0" bIns="0" rtlCol="0" anchor="ctr"/>
-          <a:lstStyle/>
-          <a:p>
-            <a:pPr algn="ctr" indent="0" marL="0">
-              <a:buNone/>
-            </a:pPr>
-            <a:r>
-              <a:rPr lang="en-US" sz="950" i="1" dirty="0">
-                <a:solidFill>
-                  <a:srgbClr val="6E6E6E"/>
-                </a:solidFill>
-                <a:latin typeface="Arial" pitchFamily="34" charset="0"/>
-                <a:ea typeface="Arial" pitchFamily="34" charset="-122"/>
-                <a:cs typeface="Arial" pitchFamily="34" charset="-120"/>
-              </a:rPr>
-              <a:t>design assistance on the presentation</a:t>
-            </a:r>
-            <a:endParaRPr lang="en-US" sz="950" dirty="0"/>
-          </a:p>
-        </p:txBody>
-      </p:sp>
-      <p:sp>
-        <p:nvSpPr>
-          <p:cNvPr id="26" name="Text 24"/>
-          <p:cNvSpPr/>
-          <p:nvPr/>
-        </p:nvSpPr>
-        <p:spPr>
-          <a:xfrm>
-            <a:off x="457200" y="3383280"/>
-            <a:ext cx="8229600" cy="457200"/>
-          </a:xfrm>
-          <a:prstGeom prst="rect">
-            <a:avLst/>
-          </a:prstGeom>
-          <a:noFill/>
-          <a:ln/>
-        </p:spPr>
-        <p:txBody>
-          <a:bodyPr wrap="square" lIns="0" tIns="0" rIns="0" bIns="0" rtlCol="0" anchor="ctr"/>
-          <a:lstStyle/>
-          <a:p>
-            <a:pPr indent="0" marL="0">
-              <a:buNone/>
-            </a:pPr>
-            <a:r>
-              <a:rPr lang="en-US" sz="1300" b="1" dirty="0">
-                <a:solidFill>
-                  <a:srgbClr val="0A0A0A"/>
-                </a:solidFill>
-                <a:latin typeface="Arial Black" pitchFamily="34" charset="0"/>
-                <a:ea typeface="Arial Black" pitchFamily="34" charset="-122"/>
-                <a:cs typeface="Arial Black" pitchFamily="34" charset="-120"/>
-              </a:rPr>
-              <a:t>Already shipped: a verified governed pipeline (85/85 suites), honest outcome badges, and a statement-faithful research method with every claim sourced.</a:t>
-            </a:r>
-            <a:endParaRPr lang="en-US" sz="1300" dirty="0"/>
-          </a:p>
-        </p:txBody>
-      </p:sp>
-      <p:sp>
-        <p:nvSpPr>
-          <p:cNvPr id="27" name="Text 25"/>
-          <p:cNvSpPr/>
-          <p:nvPr/>
-        </p:nvSpPr>
-        <p:spPr>
-          <a:xfrm>
-            <a:off x="457200" y="4828032"/>
-            <a:ext cx="8229600" cy="274320"/>
-          </a:xfrm>
-          <a:prstGeom prst="rect">
-            <a:avLst/>
-          </a:prstGeom>
-          <a:noFill/>
-          <a:ln/>
-        </p:spPr>
-        <p:txBody>
-          <a:bodyPr wrap="square" lIns="0" tIns="0" rIns="0" bIns="0" rtlCol="0" anchor="ctr"/>
-          <a:lstStyle/>
-          <a:p>
-            <a:pPr indent="0" marL="0">
-              <a:buNone/>
-            </a:pPr>
-            <a:r>
-              <a:rPr lang="en-US" sz="850" dirty="0">
-                <a:solidFill>
-                  <a:srgbClr val="6E6E6E"/>
-                </a:solidFill>
-                <a:latin typeface="Arial" pitchFamily="34" charset="0"/>
-                <a:ea typeface="Arial" pitchFamily="34" charset="-122"/>
-                <a:cs typeface="Arial" pitchFamily="34" charset="-120"/>
-              </a:rPr>
-              <a:t>E&amp;CE research profile matches the statement core: sensors, communications, ML, power resilience.</a:t>
+              <a:t>Market slide after traction in YC ordering. No TAM multiplication, no 'everyone everywhere' line.</a:t>
             </a:r>
             <a:endParaRPr lang="en-US" sz="850" dirty="0"/>
           </a:p>
@@ -3710,6 +3697,910 @@
 <file path=ppt/slides/slide12.xml><?xml version="1.0" encoding="utf-8"?>
 <p:sld xmlns:a="http://schemas.openxmlformats.org/drawingml/2006/main" xmlns:r="http://schemas.openxmlformats.org/officeDocument/2006/relationships" xmlns:p="http://schemas.openxmlformats.org/presentationml/2006/main">
   <p:cSld name="Slide 12">
+    <p:bg>
+      <p:bgPr>
+        <a:solidFill>
+          <a:srgbClr val="FFFFFF"/>
+        </a:solidFill>
+      </p:bgPr>
+    </p:bg>
+    <p:spTree>
+      <p:nvGrpSpPr>
+        <p:cNvPr id="1" name=""/>
+        <p:cNvGrpSpPr/>
+        <p:nvPr/>
+      </p:nvGrpSpPr>
+      <p:grpSpPr>
+        <a:xfrm>
+          <a:off x="0" y="0"/>
+          <a:ext cx="0" cy="0"/>
+          <a:chOff x="0" y="0"/>
+          <a:chExt cx="0" cy="0"/>
+        </a:xfrm>
+      </p:grpSpPr>
+      <p:sp>
+        <p:nvSpPr>
+          <p:cNvPr id="2" name="Text 0"/>
+          <p:cNvSpPr/>
+          <p:nvPr/>
+        </p:nvSpPr>
+        <p:spPr>
+          <a:xfrm>
+            <a:off x="498348" y="333756"/>
+            <a:ext cx="6858000" cy="0"/>
+          </a:xfrm>
+          <a:prstGeom prst="rect">
+            <a:avLst/>
+          </a:prstGeom>
+          <a:noFill/>
+          <a:ln/>
+        </p:spPr>
+        <p:txBody>
+          <a:bodyPr wrap="square" lIns="0" tIns="0" rIns="0" bIns="0" rtlCol="0" anchor="ctr"/>
+          <a:lstStyle/>
+          <a:p>
+            <a:pPr indent="0" marL="0">
+              <a:buNone/>
+            </a:pPr>
+            <a:r>
+              <a:rPr lang="en-US" sz="2800" b="1" dirty="0">
+                <a:solidFill>
+                  <a:srgbClr val="E0E0E0"/>
+                </a:solidFill>
+                <a:latin typeface="Arial Black" pitchFamily="34" charset="0"/>
+                <a:ea typeface="Arial Black" pitchFamily="34" charset="-122"/>
+                <a:cs typeface="Arial Black" pitchFamily="34" charset="-120"/>
+              </a:rPr>
+              <a:t>Team 511</a:t>
+            </a:r>
+            <a:endParaRPr lang="en-US" sz="2800" dirty="0"/>
+          </a:p>
+        </p:txBody>
+      </p:sp>
+      <p:sp>
+        <p:nvSpPr>
+          <p:cNvPr id="3" name="Text 1"/>
+          <p:cNvSpPr/>
+          <p:nvPr/>
+        </p:nvSpPr>
+        <p:spPr>
+          <a:xfrm>
+            <a:off x="457200" y="292608"/>
+            <a:ext cx="6858000" cy="0"/>
+          </a:xfrm>
+          <a:prstGeom prst="rect">
+            <a:avLst/>
+          </a:prstGeom>
+          <a:noFill/>
+          <a:ln/>
+          <a:effectLst>
+            <a:outerShdw sx="100000" sy="100000" kx="0" ky="0" algn="bl" rotWithShape="0" blurRad="101600" dist="38100" dir="2700000">
+              <a:srgbClr val="000000">
+                <a:alpha val="25000"/>
+              </a:srgbClr>
+            </a:outerShdw>
+          </a:effectLst>
+        </p:spPr>
+        <p:txBody>
+          <a:bodyPr wrap="square" lIns="0" tIns="0" rIns="0" bIns="0" rtlCol="0" anchor="ctr"/>
+          <a:lstStyle/>
+          <a:p>
+            <a:pPr indent="0" marL="0">
+              <a:buNone/>
+            </a:pPr>
+            <a:r>
+              <a:rPr lang="en-US" sz="2800" b="1" dirty="0">
+                <a:solidFill>
+                  <a:srgbClr val="0A0A0A"/>
+                </a:solidFill>
+                <a:latin typeface="Arial Black" pitchFamily="34" charset="0"/>
+                <a:ea typeface="Arial Black" pitchFamily="34" charset="-122"/>
+                <a:cs typeface="Arial Black" pitchFamily="34" charset="-120"/>
+              </a:rPr>
+              <a:t>Team 511</a:t>
+            </a:r>
+            <a:endParaRPr lang="en-US" sz="2800" dirty="0"/>
+          </a:p>
+        </p:txBody>
+      </p:sp>
+      <p:sp>
+        <p:nvSpPr>
+          <p:cNvPr id="4" name="Shape 2"/>
+          <p:cNvSpPr/>
+          <p:nvPr/>
+        </p:nvSpPr>
+        <p:spPr>
+          <a:xfrm>
+            <a:off x="457200" y="841248"/>
+            <a:ext cx="1280160" cy="54864"/>
+          </a:xfrm>
+          <a:prstGeom prst="rect">
+            <a:avLst/>
+          </a:prstGeom>
+          <a:solidFill>
+            <a:srgbClr val="0A0A0A"/>
+          </a:solidFill>
+          <a:ln w="12700">
+            <a:solidFill>
+              <a:srgbClr val="0A0A0A"/>
+            </a:solidFill>
+            <a:prstDash val="solid"/>
+          </a:ln>
+        </p:spPr>
+      </p:sp>
+      <p:sp>
+        <p:nvSpPr>
+          <p:cNvPr id="5" name="Shape 3"/>
+          <p:cNvSpPr/>
+          <p:nvPr/>
+        </p:nvSpPr>
+        <p:spPr>
+          <a:xfrm>
+            <a:off x="507492" y="1147572"/>
+            <a:ext cx="2529840" cy="1828800"/>
+          </a:xfrm>
+          <a:prstGeom prst="rect">
+            <a:avLst/>
+          </a:prstGeom>
+          <a:solidFill>
+            <a:srgbClr val="E0E0E0"/>
+          </a:solidFill>
+          <a:ln w="12700">
+            <a:solidFill>
+              <a:srgbClr val="E0E0E0"/>
+            </a:solidFill>
+            <a:prstDash val="solid"/>
+          </a:ln>
+        </p:spPr>
+      </p:sp>
+      <p:sp>
+        <p:nvSpPr>
+          <p:cNvPr id="6" name="Shape 4"/>
+          <p:cNvSpPr/>
+          <p:nvPr/>
+        </p:nvSpPr>
+        <p:spPr>
+          <a:xfrm>
+            <a:off x="457200" y="1097280"/>
+            <a:ext cx="2529840" cy="1828800"/>
+          </a:xfrm>
+          <a:prstGeom prst="roundRect">
+            <a:avLst>
+              <a:gd name="adj" fmla="val 3000"/>
+            </a:avLst>
+          </a:prstGeom>
+          <a:solidFill>
+            <a:srgbClr val="FFFFFF"/>
+          </a:solidFill>
+          <a:ln w="19050">
+            <a:solidFill>
+              <a:srgbClr val="0A0A0A"/>
+            </a:solidFill>
+            <a:prstDash val="solid"/>
+          </a:ln>
+        </p:spPr>
+      </p:sp>
+      <p:sp>
+        <p:nvSpPr>
+          <p:cNvPr id="7" name="Shape 5"/>
+          <p:cNvSpPr/>
+          <p:nvPr/>
+        </p:nvSpPr>
+        <p:spPr>
+          <a:xfrm>
+            <a:off x="1402080" y="1280160"/>
+            <a:ext cx="640080" cy="640080"/>
+          </a:xfrm>
+          <a:prstGeom prst="ellipse">
+            <a:avLst/>
+          </a:prstGeom>
+          <a:solidFill>
+            <a:srgbClr val="0A0A0A"/>
+          </a:solidFill>
+          <a:ln/>
+        </p:spPr>
+      </p:sp>
+      <p:sp>
+        <p:nvSpPr>
+          <p:cNvPr id="8" name="Text 6"/>
+          <p:cNvSpPr/>
+          <p:nvPr/>
+        </p:nvSpPr>
+        <p:spPr>
+          <a:xfrm>
+            <a:off x="1402080" y="1353312"/>
+            <a:ext cx="640080" cy="457200"/>
+          </a:xfrm>
+          <a:prstGeom prst="rect">
+            <a:avLst/>
+          </a:prstGeom>
+          <a:noFill/>
+          <a:ln/>
+        </p:spPr>
+        <p:txBody>
+          <a:bodyPr wrap="square" lIns="0" tIns="0" rIns="0" bIns="0" rtlCol="0" anchor="ctr"/>
+          <a:lstStyle/>
+          <a:p>
+            <a:pPr algn="ctr" indent="0" marL="0">
+              <a:buNone/>
+            </a:pPr>
+            <a:r>
+              <a:rPr lang="en-US" sz="2000" b="1" dirty="0">
+                <a:solidFill>
+                  <a:srgbClr val="FFFFFF"/>
+                </a:solidFill>
+                <a:latin typeface="Arial" pitchFamily="34" charset="0"/>
+                <a:ea typeface="Arial" pitchFamily="34" charset="-122"/>
+                <a:cs typeface="Arial" pitchFamily="34" charset="-120"/>
+              </a:rPr>
+              <a:t>1</a:t>
+            </a:r>
+            <a:endParaRPr lang="en-US" sz="2000" dirty="0"/>
+          </a:p>
+        </p:txBody>
+      </p:sp>
+      <p:sp>
+        <p:nvSpPr>
+          <p:cNvPr id="9" name="Text 7"/>
+          <p:cNvSpPr/>
+          <p:nvPr/>
+        </p:nvSpPr>
+        <p:spPr>
+          <a:xfrm>
+            <a:off x="594360" y="2057400"/>
+            <a:ext cx="2255520" cy="365760"/>
+          </a:xfrm>
+          <a:prstGeom prst="rect">
+            <a:avLst/>
+          </a:prstGeom>
+          <a:noFill/>
+          <a:ln/>
+        </p:spPr>
+        <p:txBody>
+          <a:bodyPr wrap="square" lIns="0" tIns="0" rIns="0" bIns="0" rtlCol="0" anchor="ctr"/>
+          <a:lstStyle/>
+          <a:p>
+            <a:pPr algn="ctr" indent="0" marL="0">
+              <a:buNone/>
+            </a:pPr>
+            <a:r>
+              <a:rPr lang="en-US" sz="1500" b="1" dirty="0">
+                <a:solidFill>
+                  <a:srgbClr val="0A0A0A"/>
+                </a:solidFill>
+                <a:latin typeface="Arial Black" pitchFamily="34" charset="0"/>
+                <a:ea typeface="Arial Black" pitchFamily="34" charset="-122"/>
+                <a:cs typeface="Arial Black" pitchFamily="34" charset="-120"/>
+              </a:rPr>
+              <a:t>Harsh Gounder</a:t>
+            </a:r>
+            <a:endParaRPr lang="en-US" sz="1500" dirty="0"/>
+          </a:p>
+        </p:txBody>
+      </p:sp>
+      <p:sp>
+        <p:nvSpPr>
+          <p:cNvPr id="10" name="Text 8"/>
+          <p:cNvSpPr/>
+          <p:nvPr/>
+        </p:nvSpPr>
+        <p:spPr>
+          <a:xfrm>
+            <a:off x="594360" y="2423160"/>
+            <a:ext cx="2255520" cy="274320"/>
+          </a:xfrm>
+          <a:prstGeom prst="rect">
+            <a:avLst/>
+          </a:prstGeom>
+          <a:noFill/>
+          <a:ln/>
+        </p:spPr>
+        <p:txBody>
+          <a:bodyPr wrap="square" lIns="0" tIns="0" rIns="0" bIns="0" rtlCol="0" anchor="ctr"/>
+          <a:lstStyle/>
+          <a:p>
+            <a:pPr algn="ctr" indent="0" marL="0">
+              <a:buNone/>
+            </a:pPr>
+            <a:r>
+              <a:rPr lang="en-US" sz="1150" dirty="0">
+                <a:solidFill>
+                  <a:srgbClr val="6E6E6E"/>
+                </a:solidFill>
+                <a:latin typeface="Arial" pitchFamily="34" charset="0"/>
+                <a:ea typeface="Arial" pitchFamily="34" charset="-122"/>
+                <a:cs typeface="Arial" pitchFamily="34" charset="-120"/>
+              </a:rPr>
+              <a:t>Lead, E&amp;CE</a:t>
+            </a:r>
+            <a:endParaRPr lang="en-US" sz="1150" dirty="0"/>
+          </a:p>
+        </p:txBody>
+      </p:sp>
+      <p:sp>
+        <p:nvSpPr>
+          <p:cNvPr id="11" name="Text 9"/>
+          <p:cNvSpPr/>
+          <p:nvPr/>
+        </p:nvSpPr>
+        <p:spPr>
+          <a:xfrm>
+            <a:off x="594360" y="2697480"/>
+            <a:ext cx="2255520" cy="320040"/>
+          </a:xfrm>
+          <a:prstGeom prst="rect">
+            <a:avLst/>
+          </a:prstGeom>
+          <a:noFill/>
+          <a:ln/>
+        </p:spPr>
+        <p:txBody>
+          <a:bodyPr wrap="square" lIns="0" tIns="0" rIns="0" bIns="0" rtlCol="0" anchor="ctr"/>
+          <a:lstStyle/>
+          <a:p>
+            <a:pPr algn="ctr" indent="0" marL="0">
+              <a:buNone/>
+            </a:pPr>
+            <a:r>
+              <a:rPr lang="en-US" sz="950" i="1" dirty="0">
+                <a:solidFill>
+                  <a:srgbClr val="6E6E6E"/>
+                </a:solidFill>
+                <a:latin typeface="Arial" pitchFamily="34" charset="0"/>
+                <a:ea typeface="Arial" pitchFamily="34" charset="-122"/>
+                <a:cs typeface="Arial" pitchFamily="34" charset="-120"/>
+              </a:rPr>
+              <a:t>everything: architecture, code, research method, 49-report evidence wave, backend, QA, devops</a:t>
+            </a:r>
+            <a:endParaRPr lang="en-US" sz="950" dirty="0"/>
+          </a:p>
+        </p:txBody>
+      </p:sp>
+      <p:sp>
+        <p:nvSpPr>
+          <p:cNvPr id="12" name="Shape 10"/>
+          <p:cNvSpPr/>
+          <p:nvPr/>
+        </p:nvSpPr>
+        <p:spPr>
+          <a:xfrm>
+            <a:off x="3357372" y="1147572"/>
+            <a:ext cx="2529840" cy="1828800"/>
+          </a:xfrm>
+          <a:prstGeom prst="rect">
+            <a:avLst/>
+          </a:prstGeom>
+          <a:solidFill>
+            <a:srgbClr val="E0E0E0"/>
+          </a:solidFill>
+          <a:ln w="12700">
+            <a:solidFill>
+              <a:srgbClr val="E0E0E0"/>
+            </a:solidFill>
+            <a:prstDash val="solid"/>
+          </a:ln>
+        </p:spPr>
+      </p:sp>
+      <p:sp>
+        <p:nvSpPr>
+          <p:cNvPr id="13" name="Shape 11"/>
+          <p:cNvSpPr/>
+          <p:nvPr/>
+        </p:nvSpPr>
+        <p:spPr>
+          <a:xfrm>
+            <a:off x="3307080" y="1097280"/>
+            <a:ext cx="2529840" cy="1828800"/>
+          </a:xfrm>
+          <a:prstGeom prst="roundRect">
+            <a:avLst>
+              <a:gd name="adj" fmla="val 3000"/>
+            </a:avLst>
+          </a:prstGeom>
+          <a:solidFill>
+            <a:srgbClr val="FFFFFF"/>
+          </a:solidFill>
+          <a:ln w="19050">
+            <a:solidFill>
+              <a:srgbClr val="0A0A0A"/>
+            </a:solidFill>
+            <a:prstDash val="solid"/>
+          </a:ln>
+        </p:spPr>
+      </p:sp>
+      <p:sp>
+        <p:nvSpPr>
+          <p:cNvPr id="14" name="Shape 12"/>
+          <p:cNvSpPr/>
+          <p:nvPr/>
+        </p:nvSpPr>
+        <p:spPr>
+          <a:xfrm>
+            <a:off x="4251960" y="1280160"/>
+            <a:ext cx="640080" cy="640080"/>
+          </a:xfrm>
+          <a:prstGeom prst="ellipse">
+            <a:avLst/>
+          </a:prstGeom>
+          <a:solidFill>
+            <a:srgbClr val="0A0A0A"/>
+          </a:solidFill>
+          <a:ln/>
+        </p:spPr>
+      </p:sp>
+      <p:sp>
+        <p:nvSpPr>
+          <p:cNvPr id="15" name="Text 13"/>
+          <p:cNvSpPr/>
+          <p:nvPr/>
+        </p:nvSpPr>
+        <p:spPr>
+          <a:xfrm>
+            <a:off x="4251960" y="1353312"/>
+            <a:ext cx="640080" cy="457200"/>
+          </a:xfrm>
+          <a:prstGeom prst="rect">
+            <a:avLst/>
+          </a:prstGeom>
+          <a:noFill/>
+          <a:ln/>
+        </p:spPr>
+        <p:txBody>
+          <a:bodyPr wrap="square" lIns="0" tIns="0" rIns="0" bIns="0" rtlCol="0" anchor="ctr"/>
+          <a:lstStyle/>
+          <a:p>
+            <a:pPr algn="ctr" indent="0" marL="0">
+              <a:buNone/>
+            </a:pPr>
+            <a:r>
+              <a:rPr lang="en-US" sz="2000" b="1" dirty="0">
+                <a:solidFill>
+                  <a:srgbClr val="FFFFFF"/>
+                </a:solidFill>
+                <a:latin typeface="Arial" pitchFamily="34" charset="0"/>
+                <a:ea typeface="Arial" pitchFamily="34" charset="-122"/>
+                <a:cs typeface="Arial" pitchFamily="34" charset="-120"/>
+              </a:rPr>
+              <a:t>2</a:t>
+            </a:r>
+            <a:endParaRPr lang="en-US" sz="2000" dirty="0"/>
+          </a:p>
+        </p:txBody>
+      </p:sp>
+      <p:sp>
+        <p:nvSpPr>
+          <p:cNvPr id="16" name="Text 14"/>
+          <p:cNvSpPr/>
+          <p:nvPr/>
+        </p:nvSpPr>
+        <p:spPr>
+          <a:xfrm>
+            <a:off x="3444240" y="2057400"/>
+            <a:ext cx="2255520" cy="365760"/>
+          </a:xfrm>
+          <a:prstGeom prst="rect">
+            <a:avLst/>
+          </a:prstGeom>
+          <a:noFill/>
+          <a:ln/>
+        </p:spPr>
+        <p:txBody>
+          <a:bodyPr wrap="square" lIns="0" tIns="0" rIns="0" bIns="0" rtlCol="0" anchor="ctr"/>
+          <a:lstStyle/>
+          <a:p>
+            <a:pPr algn="ctr" indent="0" marL="0">
+              <a:buNone/>
+            </a:pPr>
+            <a:r>
+              <a:rPr lang="en-US" sz="1500" b="1" dirty="0">
+                <a:solidFill>
+                  <a:srgbClr val="0A0A0A"/>
+                </a:solidFill>
+                <a:latin typeface="Arial Black" pitchFamily="34" charset="0"/>
+                <a:ea typeface="Arial Black" pitchFamily="34" charset="-122"/>
+                <a:cs typeface="Arial Black" pitchFamily="34" charset="-120"/>
+              </a:rPr>
+              <a:t>Ayush Kharwar</a:t>
+            </a:r>
+            <a:endParaRPr lang="en-US" sz="1500" dirty="0"/>
+          </a:p>
+        </p:txBody>
+      </p:sp>
+      <p:sp>
+        <p:nvSpPr>
+          <p:cNvPr id="17" name="Text 15"/>
+          <p:cNvSpPr/>
+          <p:nvPr/>
+        </p:nvSpPr>
+        <p:spPr>
+          <a:xfrm>
+            <a:off x="3444240" y="2423160"/>
+            <a:ext cx="2255520" cy="274320"/>
+          </a:xfrm>
+          <a:prstGeom prst="rect">
+            <a:avLst/>
+          </a:prstGeom>
+          <a:noFill/>
+          <a:ln/>
+        </p:spPr>
+        <p:txBody>
+          <a:bodyPr wrap="square" lIns="0" tIns="0" rIns="0" bIns="0" rtlCol="0" anchor="ctr"/>
+          <a:lstStyle/>
+          <a:p>
+            <a:pPr algn="ctr" indent="0" marL="0">
+              <a:buNone/>
+            </a:pPr>
+            <a:r>
+              <a:rPr lang="en-US" sz="1150" dirty="0">
+                <a:solidFill>
+                  <a:srgbClr val="6E6E6E"/>
+                </a:solidFill>
+                <a:latin typeface="Arial" pitchFamily="34" charset="0"/>
+                <a:ea typeface="Arial" pitchFamily="34" charset="-122"/>
+                <a:cs typeface="Arial" pitchFamily="34" charset="-120"/>
+              </a:rPr>
+              <a:t>Deck and design</a:t>
+            </a:r>
+            <a:endParaRPr lang="en-US" sz="1150" dirty="0"/>
+          </a:p>
+        </p:txBody>
+      </p:sp>
+      <p:sp>
+        <p:nvSpPr>
+          <p:cNvPr id="18" name="Text 16"/>
+          <p:cNvSpPr/>
+          <p:nvPr/>
+        </p:nvSpPr>
+        <p:spPr>
+          <a:xfrm>
+            <a:off x="3444240" y="2697480"/>
+            <a:ext cx="2255520" cy="320040"/>
+          </a:xfrm>
+          <a:prstGeom prst="rect">
+            <a:avLst/>
+          </a:prstGeom>
+          <a:noFill/>
+          <a:ln/>
+        </p:spPr>
+        <p:txBody>
+          <a:bodyPr wrap="square" lIns="0" tIns="0" rIns="0" bIns="0" rtlCol="0" anchor="ctr"/>
+          <a:lstStyle/>
+          <a:p>
+            <a:pPr algn="ctr" indent="0" marL="0">
+              <a:buNone/>
+            </a:pPr>
+            <a:r>
+              <a:rPr lang="en-US" sz="950" i="1" dirty="0">
+                <a:solidFill>
+                  <a:srgbClr val="6E6E6E"/>
+                </a:solidFill>
+                <a:latin typeface="Arial" pitchFamily="34" charset="0"/>
+                <a:ea typeface="Arial" pitchFamily="34" charset="-122"/>
+                <a:cs typeface="Arial" pitchFamily="34" charset="-120"/>
+              </a:rPr>
+              <a:t>presentation build and design</a:t>
+            </a:r>
+            <a:endParaRPr lang="en-US" sz="950" dirty="0"/>
+          </a:p>
+        </p:txBody>
+      </p:sp>
+      <p:sp>
+        <p:nvSpPr>
+          <p:cNvPr id="19" name="Shape 17"/>
+          <p:cNvSpPr/>
+          <p:nvPr/>
+        </p:nvSpPr>
+        <p:spPr>
+          <a:xfrm>
+            <a:off x="6207252" y="1147572"/>
+            <a:ext cx="2529840" cy="1828800"/>
+          </a:xfrm>
+          <a:prstGeom prst="rect">
+            <a:avLst/>
+          </a:prstGeom>
+          <a:solidFill>
+            <a:srgbClr val="E0E0E0"/>
+          </a:solidFill>
+          <a:ln w="12700">
+            <a:solidFill>
+              <a:srgbClr val="E0E0E0"/>
+            </a:solidFill>
+            <a:prstDash val="solid"/>
+          </a:ln>
+        </p:spPr>
+      </p:sp>
+      <p:sp>
+        <p:nvSpPr>
+          <p:cNvPr id="20" name="Shape 18"/>
+          <p:cNvSpPr/>
+          <p:nvPr/>
+        </p:nvSpPr>
+        <p:spPr>
+          <a:xfrm>
+            <a:off x="6156960" y="1097280"/>
+            <a:ext cx="2529840" cy="1828800"/>
+          </a:xfrm>
+          <a:prstGeom prst="roundRect">
+            <a:avLst>
+              <a:gd name="adj" fmla="val 3000"/>
+            </a:avLst>
+          </a:prstGeom>
+          <a:solidFill>
+            <a:srgbClr val="FFFFFF"/>
+          </a:solidFill>
+          <a:ln w="19050">
+            <a:solidFill>
+              <a:srgbClr val="0A0A0A"/>
+            </a:solidFill>
+            <a:prstDash val="solid"/>
+          </a:ln>
+        </p:spPr>
+      </p:sp>
+      <p:sp>
+        <p:nvSpPr>
+          <p:cNvPr id="21" name="Shape 19"/>
+          <p:cNvSpPr/>
+          <p:nvPr/>
+        </p:nvSpPr>
+        <p:spPr>
+          <a:xfrm>
+            <a:off x="7101840" y="1280160"/>
+            <a:ext cx="640080" cy="640080"/>
+          </a:xfrm>
+          <a:prstGeom prst="ellipse">
+            <a:avLst/>
+          </a:prstGeom>
+          <a:solidFill>
+            <a:srgbClr val="0A0A0A"/>
+          </a:solidFill>
+          <a:ln/>
+        </p:spPr>
+      </p:sp>
+      <p:sp>
+        <p:nvSpPr>
+          <p:cNvPr id="22" name="Text 20"/>
+          <p:cNvSpPr/>
+          <p:nvPr/>
+        </p:nvSpPr>
+        <p:spPr>
+          <a:xfrm>
+            <a:off x="7101840" y="1353312"/>
+            <a:ext cx="640080" cy="457200"/>
+          </a:xfrm>
+          <a:prstGeom prst="rect">
+            <a:avLst/>
+          </a:prstGeom>
+          <a:noFill/>
+          <a:ln/>
+        </p:spPr>
+        <p:txBody>
+          <a:bodyPr wrap="square" lIns="0" tIns="0" rIns="0" bIns="0" rtlCol="0" anchor="ctr"/>
+          <a:lstStyle/>
+          <a:p>
+            <a:pPr algn="ctr" indent="0" marL="0">
+              <a:buNone/>
+            </a:pPr>
+            <a:r>
+              <a:rPr lang="en-US" sz="2000" b="1" dirty="0">
+                <a:solidFill>
+                  <a:srgbClr val="FFFFFF"/>
+                </a:solidFill>
+                <a:latin typeface="Arial" pitchFamily="34" charset="0"/>
+                <a:ea typeface="Arial" pitchFamily="34" charset="-122"/>
+                <a:cs typeface="Arial" pitchFamily="34" charset="-120"/>
+              </a:rPr>
+              <a:t>3</a:t>
+            </a:r>
+            <a:endParaRPr lang="en-US" sz="2000" dirty="0"/>
+          </a:p>
+        </p:txBody>
+      </p:sp>
+      <p:sp>
+        <p:nvSpPr>
+          <p:cNvPr id="23" name="Text 21"/>
+          <p:cNvSpPr/>
+          <p:nvPr/>
+        </p:nvSpPr>
+        <p:spPr>
+          <a:xfrm>
+            <a:off x="6294120" y="2057400"/>
+            <a:ext cx="2255520" cy="365760"/>
+          </a:xfrm>
+          <a:prstGeom prst="rect">
+            <a:avLst/>
+          </a:prstGeom>
+          <a:noFill/>
+          <a:ln/>
+        </p:spPr>
+        <p:txBody>
+          <a:bodyPr wrap="square" lIns="0" tIns="0" rIns="0" bIns="0" rtlCol="0" anchor="ctr"/>
+          <a:lstStyle/>
+          <a:p>
+            <a:pPr algn="ctr" indent="0" marL="0">
+              <a:buNone/>
+            </a:pPr>
+            <a:r>
+              <a:rPr lang="en-US" sz="1500" b="1" dirty="0">
+                <a:solidFill>
+                  <a:srgbClr val="0A0A0A"/>
+                </a:solidFill>
+                <a:latin typeface="Arial Black" pitchFamily="34" charset="0"/>
+                <a:ea typeface="Arial Black" pitchFamily="34" charset="-122"/>
+                <a:cs typeface="Arial Black" pitchFamily="34" charset="-120"/>
+              </a:rPr>
+              <a:t>Sujal Shukla</a:t>
+            </a:r>
+            <a:endParaRPr lang="en-US" sz="1500" dirty="0"/>
+          </a:p>
+        </p:txBody>
+      </p:sp>
+      <p:sp>
+        <p:nvSpPr>
+          <p:cNvPr id="24" name="Text 22"/>
+          <p:cNvSpPr/>
+          <p:nvPr/>
+        </p:nvSpPr>
+        <p:spPr>
+          <a:xfrm>
+            <a:off x="6294120" y="2423160"/>
+            <a:ext cx="2255520" cy="274320"/>
+          </a:xfrm>
+          <a:prstGeom prst="rect">
+            <a:avLst/>
+          </a:prstGeom>
+          <a:noFill/>
+          <a:ln/>
+        </p:spPr>
+        <p:txBody>
+          <a:bodyPr wrap="square" lIns="0" tIns="0" rIns="0" bIns="0" rtlCol="0" anchor="ctr"/>
+          <a:lstStyle/>
+          <a:p>
+            <a:pPr algn="ctr" indent="0" marL="0">
+              <a:buNone/>
+            </a:pPr>
+            <a:r>
+              <a:rPr lang="en-US" sz="1150" dirty="0">
+                <a:solidFill>
+                  <a:srgbClr val="6E6E6E"/>
+                </a:solidFill>
+                <a:latin typeface="Arial" pitchFamily="34" charset="0"/>
+                <a:ea typeface="Arial" pitchFamily="34" charset="-122"/>
+                <a:cs typeface="Arial" pitchFamily="34" charset="-120"/>
+              </a:rPr>
+              <a:t>Deck design</a:t>
+            </a:r>
+            <a:endParaRPr lang="en-US" sz="1150" dirty="0"/>
+          </a:p>
+        </p:txBody>
+      </p:sp>
+      <p:sp>
+        <p:nvSpPr>
+          <p:cNvPr id="25" name="Text 23"/>
+          <p:cNvSpPr/>
+          <p:nvPr/>
+        </p:nvSpPr>
+        <p:spPr>
+          <a:xfrm>
+            <a:off x="6294120" y="2697480"/>
+            <a:ext cx="2255520" cy="320040"/>
+          </a:xfrm>
+          <a:prstGeom prst="rect">
+            <a:avLst/>
+          </a:prstGeom>
+          <a:noFill/>
+          <a:ln/>
+        </p:spPr>
+        <p:txBody>
+          <a:bodyPr wrap="square" lIns="0" tIns="0" rIns="0" bIns="0" rtlCol="0" anchor="ctr"/>
+          <a:lstStyle/>
+          <a:p>
+            <a:pPr algn="ctr" indent="0" marL="0">
+              <a:buNone/>
+            </a:pPr>
+            <a:r>
+              <a:rPr lang="en-US" sz="950" i="1" dirty="0">
+                <a:solidFill>
+                  <a:srgbClr val="6E6E6E"/>
+                </a:solidFill>
+                <a:latin typeface="Arial" pitchFamily="34" charset="0"/>
+                <a:ea typeface="Arial" pitchFamily="34" charset="-122"/>
+                <a:cs typeface="Arial" pitchFamily="34" charset="-120"/>
+              </a:rPr>
+              <a:t>design assistance on the presentation</a:t>
+            </a:r>
+            <a:endParaRPr lang="en-US" sz="950" dirty="0"/>
+          </a:p>
+        </p:txBody>
+      </p:sp>
+      <p:sp>
+        <p:nvSpPr>
+          <p:cNvPr id="26" name="Text 24"/>
+          <p:cNvSpPr/>
+          <p:nvPr/>
+        </p:nvSpPr>
+        <p:spPr>
+          <a:xfrm>
+            <a:off x="457200" y="3383280"/>
+            <a:ext cx="8229600" cy="457200"/>
+          </a:xfrm>
+          <a:prstGeom prst="rect">
+            <a:avLst/>
+          </a:prstGeom>
+          <a:noFill/>
+          <a:ln/>
+        </p:spPr>
+        <p:txBody>
+          <a:bodyPr wrap="square" lIns="0" tIns="0" rIns="0" bIns="0" rtlCol="0" anchor="ctr"/>
+          <a:lstStyle/>
+          <a:p>
+            <a:pPr indent="0" marL="0">
+              <a:buNone/>
+            </a:pPr>
+            <a:r>
+              <a:rPr lang="en-US" sz="1300" b="1" dirty="0">
+                <a:solidFill>
+                  <a:srgbClr val="0A0A0A"/>
+                </a:solidFill>
+                <a:latin typeface="Arial Black" pitchFamily="34" charset="0"/>
+                <a:ea typeface="Arial Black" pitchFamily="34" charset="-122"/>
+                <a:cs typeface="Arial Black" pitchFamily="34" charset="-120"/>
+              </a:rPr>
+              <a:t>Already shipped: a verified governed pipeline (85/85 suites), honest outcome badges, and a statement-faithful research method with every claim sourced.</a:t>
+            </a:r>
+            <a:endParaRPr lang="en-US" sz="1300" dirty="0"/>
+          </a:p>
+        </p:txBody>
+      </p:sp>
+      <p:sp>
+        <p:nvSpPr>
+          <p:cNvPr id="27" name="Text 25"/>
+          <p:cNvSpPr/>
+          <p:nvPr/>
+        </p:nvSpPr>
+        <p:spPr>
+          <a:xfrm>
+            <a:off x="457200" y="4828032"/>
+            <a:ext cx="8229600" cy="274320"/>
+          </a:xfrm>
+          <a:prstGeom prst="rect">
+            <a:avLst/>
+          </a:prstGeom>
+          <a:noFill/>
+          <a:ln/>
+        </p:spPr>
+        <p:txBody>
+          <a:bodyPr wrap="square" lIns="0" tIns="0" rIns="0" bIns="0" rtlCol="0" anchor="ctr"/>
+          <a:lstStyle/>
+          <a:p>
+            <a:pPr indent="0" marL="0">
+              <a:buNone/>
+            </a:pPr>
+            <a:r>
+              <a:rPr lang="en-US" sz="850" dirty="0">
+                <a:solidFill>
+                  <a:srgbClr val="6E6E6E"/>
+                </a:solidFill>
+                <a:latin typeface="Arial" pitchFamily="34" charset="0"/>
+                <a:ea typeface="Arial" pitchFamily="34" charset="-122"/>
+                <a:cs typeface="Arial" pitchFamily="34" charset="-120"/>
+              </a:rPr>
+              <a:t>E&amp;CE research profile matches the statement core: sensors, communications, ML, power resilience.</a:t>
+            </a:r>
+            <a:endParaRPr lang="en-US" sz="850" dirty="0"/>
+          </a:p>
+        </p:txBody>
+      </p:sp>
+    </p:spTree>
+  </p:cSld>
+  <p:clrMapOvr>
+    <a:masterClrMapping/>
+  </p:clrMapOvr>
+</p:sld>
+</file>
+
+<file path=ppt/slides/slide13.xml><?xml version="1.0" encoding="utf-8"?>
+<p:sld xmlns:a="http://schemas.openxmlformats.org/drawingml/2006/main" xmlns:r="http://schemas.openxmlformats.org/officeDocument/2006/relationships" xmlns:p="http://schemas.openxmlformats.org/presentationml/2006/main">
+  <p:cSld name="Slide 13">
     <p:bg>
       <p:bgPr>
         <a:solidFill>
@@ -11787,7 +12678,7 @@
     <p:bg>
       <p:bgPr>
         <a:solidFill>
-          <a:srgbClr val="FFFFFF"/>
+          <a:srgbClr val="0A0A0A"/>
         </a:solidFill>
       </p:bgPr>
     </p:bg>
@@ -11832,13 +12723,13 @@
             <a:r>
               <a:rPr lang="en-US" sz="2800" b="1" dirty="0">
                 <a:solidFill>
-                  <a:srgbClr val="E0E0E0"/>
+                  <a:srgbClr val="2A2A2A"/>
                 </a:solidFill>
                 <a:latin typeface="Arial Black" pitchFamily="34" charset="0"/>
                 <a:ea typeface="Arial Black" pitchFamily="34" charset="-122"/>
                 <a:cs typeface="Arial Black" pitchFamily="34" charset="-120"/>
               </a:rPr>
-              <a:t>Three buyers, one verified loop</a:t>
+              <a:t>The counterfactual: what this changes in a real event</a:t>
             </a:r>
             <a:endParaRPr lang="en-US" sz="2800" dirty="0"/>
           </a:p>
@@ -11860,13 +12751,6 @@
           </a:prstGeom>
           <a:noFill/>
           <a:ln/>
-          <a:effectLst>
-            <a:outerShdw sx="100000" sy="100000" kx="0" ky="0" algn="bl" rotWithShape="0" blurRad="101600" dist="38100" dir="2700000">
-              <a:srgbClr val="000000">
-                <a:alpha val="25000"/>
-              </a:srgbClr>
-            </a:outerShdw>
-          </a:effectLst>
         </p:spPr>
         <p:txBody>
           <a:bodyPr wrap="square" lIns="0" tIns="0" rIns="0" bIns="0" rtlCol="0" anchor="ctr"/>
@@ -11878,13 +12762,13 @@
             <a:r>
               <a:rPr lang="en-US" sz="2800" b="1" dirty="0">
                 <a:solidFill>
-                  <a:srgbClr val="0A0A0A"/>
+                  <a:srgbClr val="FFFFFF"/>
                 </a:solidFill>
                 <a:latin typeface="Arial Black" pitchFamily="34" charset="0"/>
                 <a:ea typeface="Arial Black" pitchFamily="34" charset="-122"/>
                 <a:cs typeface="Arial Black" pitchFamily="34" charset="-120"/>
               </a:rPr>
-              <a:t>Three buyers, one verified loop</a:t>
+              <a:t>The counterfactual: what this changes in a real event</a:t>
             </a:r>
             <a:endParaRPr lang="en-US" sz="2800" dirty="0"/>
           </a:p>
@@ -11898,18 +12782,18 @@
         </p:nvSpPr>
         <p:spPr>
           <a:xfrm>
-            <a:off x="457200" y="841248"/>
+            <a:off x="457200" y="896112"/>
             <a:ext cx="1280160" cy="54864"/>
           </a:xfrm>
           <a:prstGeom prst="rect">
             <a:avLst/>
           </a:prstGeom>
           <a:solidFill>
-            <a:srgbClr val="0A0A0A"/>
+            <a:srgbClr val="FF5A1F"/>
           </a:solidFill>
           <a:ln w="12700">
             <a:solidFill>
-              <a:srgbClr val="0A0A0A"/>
+              <a:srgbClr val="FF5A1F"/>
             </a:solidFill>
             <a:prstDash val="solid"/>
           </a:ln>
@@ -11917,24 +12801,63 @@
       </p:sp>
       <p:sp>
         <p:nvSpPr>
-          <p:cNvPr id="5" name="Shape 3"/>
-          <p:cNvSpPr/>
-          <p:nvPr/>
-        </p:nvSpPr>
-        <p:spPr>
-          <a:xfrm>
-            <a:off x="507492" y="1284732"/>
-            <a:ext cx="2529840" cy="2286000"/>
-          </a:xfrm>
-          <a:prstGeom prst="rect">
-            <a:avLst/>
-          </a:prstGeom>
-          <a:solidFill>
-            <a:srgbClr val="E0E0E0"/>
+          <p:cNvPr id="5" name="Text 3"/>
+          <p:cNvSpPr/>
+          <p:nvPr/>
+        </p:nvSpPr>
+        <p:spPr>
+          <a:xfrm>
+            <a:off x="457200" y="960120"/>
+            <a:ext cx="8229600" cy="548640"/>
+          </a:xfrm>
+          <a:prstGeom prst="rect">
+            <a:avLst/>
+          </a:prstGeom>
+          <a:noFill/>
+          <a:ln/>
+        </p:spPr>
+        <p:txBody>
+          <a:bodyPr wrap="square" lIns="0" tIns="0" rIns="0" bIns="0" rtlCol="0" anchor="ctr"/>
+          <a:lstStyle/>
+          <a:p>
+            <a:pPr indent="0" marL="0">
+              <a:buNone/>
+            </a:pPr>
+            <a:r>
+              <a:rPr lang="en-US" sz="1150" dirty="0">
+                <a:solidFill>
+                  <a:srgbClr val="B0B0B0"/>
+                </a:solidFill>
+                <a:latin typeface="Arial" pitchFamily="34" charset="0"/>
+                <a:ea typeface="Arial" pitchFamily="34" charset="-122"/>
+                <a:cs typeface="Arial" pitchFamily="34" charset="-120"/>
+              </a:rPr>
+              <a:t>We took the real incidents from the ledgers, ran the engine backward over their actual timelines, and compared the decision output to what the ground truth records. No prevented-loss claim is made: the numbers are the events as they happened.</a:t>
+            </a:r>
+            <a:endParaRPr lang="en-US" sz="1150" dirty="0"/>
+          </a:p>
+        </p:txBody>
+      </p:sp>
+      <p:sp>
+        <p:nvSpPr>
+          <p:cNvPr id="6" name="Shape 4"/>
+          <p:cNvSpPr/>
+          <p:nvPr/>
+        </p:nvSpPr>
+        <p:spPr>
+          <a:xfrm>
+            <a:off x="507492" y="1696212"/>
+            <a:ext cx="4069080" cy="1280160"/>
+          </a:xfrm>
+          <a:prstGeom prst="rect">
+            <a:avLst/>
+          </a:prstGeom>
+          <a:solidFill>
+            <a:srgbClr val="2A2A2A"/>
           </a:solidFill>
           <a:ln w="12700">
             <a:solidFill>
-              <a:srgbClr val="E0E0E0"/>
+              <a:srgbClr val="2A2A2A"/>
             </a:solidFill>
             <a:prstDash val="solid"/>
           </a:ln>
@@ -11942,14 +12865,14 @@
       </p:sp>
       <p:sp>
         <p:nvSpPr>
-          <p:cNvPr id="6" name="Shape 4"/>
-          <p:cNvSpPr/>
-          <p:nvPr/>
-        </p:nvSpPr>
-        <p:spPr>
-          <a:xfrm>
-            <a:off x="2968752" y="1307592"/>
-            <a:ext cx="82296" cy="2139696"/>
+          <p:cNvPr id="7" name="Shape 5"/>
+          <p:cNvSpPr/>
+          <p:nvPr/>
+        </p:nvSpPr>
+        <p:spPr>
+          <a:xfrm>
+            <a:off x="4507992" y="1719072"/>
+            <a:ext cx="82296" cy="1133856"/>
           </a:xfrm>
           <a:prstGeom prst="parallelogram">
             <a:avLst/>
@@ -11967,26 +12890,26 @@
       </p:sp>
       <p:sp>
         <p:nvSpPr>
-          <p:cNvPr id="7" name="Shape 5"/>
+          <p:cNvPr id="8" name="Shape 6"/>
           <p:cNvSpPr/>
           <p:nvPr/>
         </p:nvSpPr>
         <p:spPr>
           <a:xfrm rot="-90000">
-            <a:off x="457200" y="1234440"/>
-            <a:ext cx="2529840" cy="2286000"/>
+            <a:off x="457200" y="1645920"/>
+            <a:ext cx="4069080" cy="1280160"/>
           </a:xfrm>
           <a:prstGeom prst="roundRect">
             <a:avLst>
-              <a:gd name="adj" fmla="val 2400"/>
+              <a:gd name="adj" fmla="val 4286"/>
             </a:avLst>
           </a:prstGeom>
           <a:solidFill>
-            <a:srgbClr val="0A0A0A"/>
+            <a:srgbClr val="161616"/>
           </a:solidFill>
           <a:ln w="12700">
             <a:solidFill>
-              <a:srgbClr val="FFFFFF"/>
+              <a:srgbClr val="2A2A2A"/>
             </a:solidFill>
             <a:prstDash val="solid"/>
           </a:ln>
@@ -11994,14 +12917,14 @@
       </p:sp>
       <p:sp>
         <p:nvSpPr>
-          <p:cNvPr id="8" name="Text 6"/>
-          <p:cNvSpPr/>
-          <p:nvPr/>
-        </p:nvSpPr>
-        <p:spPr>
-          <a:xfrm>
-            <a:off x="640080" y="1417320"/>
-            <a:ext cx="2164080" cy="365760"/>
+          <p:cNvPr id="9" name="Text 7"/>
+          <p:cNvSpPr/>
+          <p:nvPr/>
+        </p:nvSpPr>
+        <p:spPr>
+          <a:xfrm>
+            <a:off x="640080" y="1737360"/>
+            <a:ext cx="3703320" cy="320040"/>
           </a:xfrm>
           <a:prstGeom prst="rect">
             <a:avLst/>
@@ -12017,7 +12940,7 @@
               <a:buNone/>
             </a:pPr>
             <a:r>
-              <a:rPr lang="en-US" sz="1600" b="1" dirty="0">
+              <a:rPr lang="en-US" sz="1500" b="1" dirty="0">
                 <a:solidFill>
                   <a:srgbClr val="FFFFFF"/>
                 </a:solidFill>
@@ -12025,22 +12948,22 @@
                 <a:ea typeface="Arial Black" pitchFamily="34" charset="-122"/>
                 <a:cs typeface="Arial Black" pitchFamily="34" charset="-120"/>
               </a:rPr>
-              <a:t>FPO + extension</a:t>
-            </a:r>
-            <a:endParaRPr lang="en-US" sz="1600" dirty="0"/>
-          </a:p>
-        </p:txBody>
-      </p:sp>
-      <p:sp>
-        <p:nvSpPr>
-          <p:cNvPr id="9" name="Text 7"/>
-          <p:cNvSpPr/>
-          <p:nvPr/>
-        </p:nvSpPr>
-        <p:spPr>
-          <a:xfrm>
-            <a:off x="640080" y="1920240"/>
-            <a:ext cx="2164080" cy="914400"/>
+              <a:t>FANI 2019</a:t>
+            </a:r>
+            <a:endParaRPr lang="en-US" sz="1500" dirty="0"/>
+          </a:p>
+        </p:txBody>
+      </p:sp>
+      <p:sp>
+        <p:nvSpPr>
+          <p:cNvPr id="10" name="Text 8"/>
+          <p:cNvSpPr/>
+          <p:nvPr/>
+        </p:nvSpPr>
+        <p:spPr>
+          <a:xfrm>
+            <a:off x="640080" y="2084832"/>
+            <a:ext cx="3703320" cy="777240"/>
           </a:xfrm>
           <a:prstGeom prst="rect">
             <a:avLst/>
@@ -12056,7 +12979,7 @@
               <a:buNone/>
             </a:pPr>
             <a:r>
-              <a:rPr lang="en-US" sz="1150" dirty="0">
+              <a:rPr lang="en-US" sz="800" dirty="0">
                 <a:solidFill>
                   <a:srgbClr val="B0B0B0"/>
                 </a:solidFill>
@@ -12064,22 +12987,22 @@
                 <a:ea typeface="Arial" pitchFamily="34" charset="-122"/>
                 <a:cs typeface="Arial" pitchFamily="34" charset="-120"/>
               </a:rPr>
-              <a:t>seasonal advisory subscriptions per farmer via FPOs and KVK extension workers</a:t>
-            </a:r>
-            <a:endParaRPr lang="en-US" sz="1150" dirty="0"/>
-          </a:p>
-        </p:txBody>
-      </p:sp>
-      <p:sp>
-        <p:nvSpPr>
-          <p:cNvPr id="10" name="Text 8"/>
-          <p:cNvSpPr/>
-          <p:nvPr/>
-        </p:nvSpPr>
-        <p:spPr>
-          <a:xfrm>
-            <a:off x="640080" y="2971800"/>
-            <a:ext cx="2164080" cy="457200"/>
+              <a:t>108,220 ha crop loss, Rs 1,304.58 cr (OSDMA DLNA). Official lead: watch 90h, alert 66h, warning 36h. The engine at T-24 issues a stage-specific action with deadline and cost of waiting for every notified plot. The replay posterior band contains the real anchor.</a:t>
+            </a:r>
+            <a:endParaRPr lang="en-US" sz="800" dirty="0"/>
+          </a:p>
+        </p:txBody>
+      </p:sp>
+      <p:sp>
+        <p:nvSpPr>
+          <p:cNvPr id="11" name="Text 9"/>
+          <p:cNvSpPr/>
+          <p:nvPr/>
+        </p:nvSpPr>
+        <p:spPr>
+          <a:xfrm>
+            <a:off x="640080" y="2761488"/>
+            <a:ext cx="3703320" cy="137160"/>
           </a:xfrm>
           <a:prstGeom prst="rect">
             <a:avLst/>
@@ -12095,7 +13018,7 @@
               <a:buNone/>
             </a:pPr>
             <a:r>
-              <a:rPr lang="en-US" sz="1000" i="1" dirty="0">
+              <a:rPr lang="en-US" sz="650" dirty="0">
                 <a:solidFill>
                   <a:srgbClr val="8A8A8A"/>
                 </a:solidFill>
@@ -12103,32 +13026,32 @@
                 <a:ea typeface="Arial" pitchFamily="34" charset="-122"/>
                 <a:cs typeface="Arial" pitchFamily="34" charset="-120"/>
               </a:rPr>
-              <a:t>pay per verified advisory delivered and acted on</a:t>
-            </a:r>
-            <a:endParaRPr lang="en-US" sz="1000" dirty="0"/>
-          </a:p>
-        </p:txBody>
-      </p:sp>
-      <p:sp>
-        <p:nvSpPr>
-          <p:cNvPr id="11" name="Shape 9"/>
-          <p:cNvSpPr/>
-          <p:nvPr/>
-        </p:nvSpPr>
-        <p:spPr>
-          <a:xfrm>
-            <a:off x="3357372" y="1284732"/>
-            <a:ext cx="2529840" cy="2286000"/>
-          </a:xfrm>
-          <a:prstGeom prst="rect">
-            <a:avLst/>
-          </a:prstGeom>
-          <a:solidFill>
-            <a:srgbClr val="E0E0E0"/>
+              <a:t>sources: d21, d47, d12</a:t>
+            </a:r>
+            <a:endParaRPr lang="en-US" sz="650" dirty="0"/>
+          </a:p>
+        </p:txBody>
+      </p:sp>
+      <p:sp>
+        <p:nvSpPr>
+          <p:cNvPr id="12" name="Shape 10"/>
+          <p:cNvSpPr/>
+          <p:nvPr/>
+        </p:nvSpPr>
+        <p:spPr>
+          <a:xfrm>
+            <a:off x="4668012" y="1696212"/>
+            <a:ext cx="4069080" cy="1280160"/>
+          </a:xfrm>
+          <a:prstGeom prst="rect">
+            <a:avLst/>
+          </a:prstGeom>
+          <a:solidFill>
+            <a:srgbClr val="2A2A2A"/>
           </a:solidFill>
           <a:ln w="12700">
             <a:solidFill>
-              <a:srgbClr val="E0E0E0"/>
+              <a:srgbClr val="2A2A2A"/>
             </a:solidFill>
             <a:prstDash val="solid"/>
           </a:ln>
@@ -12136,14 +13059,14 @@
       </p:sp>
       <p:sp>
         <p:nvSpPr>
-          <p:cNvPr id="12" name="Shape 10"/>
-          <p:cNvSpPr/>
-          <p:nvPr/>
-        </p:nvSpPr>
-        <p:spPr>
-          <a:xfrm>
-            <a:off x="5818632" y="1307592"/>
-            <a:ext cx="82296" cy="2139696"/>
+          <p:cNvPr id="13" name="Shape 11"/>
+          <p:cNvSpPr/>
+          <p:nvPr/>
+        </p:nvSpPr>
+        <p:spPr>
+          <a:xfrm>
+            <a:off x="8668512" y="1719072"/>
+            <a:ext cx="82296" cy="1133856"/>
           </a:xfrm>
           <a:prstGeom prst="parallelogram">
             <a:avLst/>
@@ -12161,26 +13084,26 @@
       </p:sp>
       <p:sp>
         <p:nvSpPr>
-          <p:cNvPr id="13" name="Shape 11"/>
+          <p:cNvPr id="14" name="Shape 12"/>
           <p:cNvSpPr/>
           <p:nvPr/>
         </p:nvSpPr>
         <p:spPr>
           <a:xfrm rot="-90000">
-            <a:off x="3307080" y="1234440"/>
-            <a:ext cx="2529840" cy="2286000"/>
+            <a:off x="4617720" y="1645920"/>
+            <a:ext cx="4069080" cy="1280160"/>
           </a:xfrm>
           <a:prstGeom prst="roundRect">
             <a:avLst>
-              <a:gd name="adj" fmla="val 2400"/>
+              <a:gd name="adj" fmla="val 4286"/>
             </a:avLst>
           </a:prstGeom>
           <a:solidFill>
-            <a:srgbClr val="0A0A0A"/>
+            <a:srgbClr val="161616"/>
           </a:solidFill>
           <a:ln w="12700">
             <a:solidFill>
-              <a:srgbClr val="FFFFFF"/>
+              <a:srgbClr val="2A2A2A"/>
             </a:solidFill>
             <a:prstDash val="solid"/>
           </a:ln>
@@ -12188,14 +13111,14 @@
       </p:sp>
       <p:sp>
         <p:nvSpPr>
-          <p:cNvPr id="14" name="Text 12"/>
-          <p:cNvSpPr/>
-          <p:nvPr/>
-        </p:nvSpPr>
-        <p:spPr>
-          <a:xfrm>
-            <a:off x="3489960" y="1417320"/>
-            <a:ext cx="2164080" cy="365760"/>
+          <p:cNvPr id="15" name="Text 13"/>
+          <p:cNvSpPr/>
+          <p:nvPr/>
+        </p:nvSpPr>
+        <p:spPr>
+          <a:xfrm>
+            <a:off x="4800600" y="1737360"/>
+            <a:ext cx="3703320" cy="320040"/>
           </a:xfrm>
           <a:prstGeom prst="rect">
             <a:avLst/>
@@ -12211,7 +13134,7 @@
               <a:buNone/>
             </a:pPr>
             <a:r>
-              <a:rPr lang="en-US" sz="1600" b="1" dirty="0">
+              <a:rPr lang="en-US" sz="1500" b="1" dirty="0">
                 <a:solidFill>
                   <a:srgbClr val="FFFFFF"/>
                 </a:solidFill>
@@ -12219,22 +13142,22 @@
                 <a:ea typeface="Arial Black" pitchFamily="34" charset="-122"/>
                 <a:cs typeface="Arial Black" pitchFamily="34" charset="-120"/>
               </a:rPr>
-              <a:t>B2G district</a:t>
-            </a:r>
-            <a:endParaRPr lang="en-US" sz="1600" dirty="0"/>
-          </a:p>
-        </p:txBody>
-      </p:sp>
-      <p:sp>
-        <p:nvSpPr>
-          <p:cNvPr id="15" name="Text 13"/>
-          <p:cNvSpPr/>
-          <p:nvPr/>
-        </p:nvSpPr>
-        <p:spPr>
-          <a:xfrm>
-            <a:off x="3489960" y="1920240"/>
-            <a:ext cx="2164080" cy="914400"/>
+              <a:t>YAAS 2021</a:t>
+            </a:r>
+            <a:endParaRPr lang="en-US" sz="1500" dirty="0"/>
+          </a:p>
+        </p:txBody>
+      </p:sp>
+      <p:sp>
+        <p:nvSpPr>
+          <p:cNvPr id="16" name="Text 14"/>
+          <p:cNvSpPr/>
+          <p:nvPr/>
+        </p:nvSpPr>
+        <p:spPr>
+          <a:xfrm>
+            <a:off x="4800600" y="2084832"/>
+            <a:ext cx="3703320" cy="777240"/>
           </a:xfrm>
           <a:prstGeom prst="rect">
             <a:avLst/>
@@ -12250,7 +13173,7 @@
               <a:buNone/>
             </a:pPr>
             <a:r>
-              <a:rPr lang="en-US" sz="1150" dirty="0">
+              <a:rPr lang="en-US" sz="800" dirty="0">
                 <a:solidFill>
                   <a:srgbClr val="B0B0B0"/>
                 </a:solidFill>
@@ -12258,22 +13181,22 @@
                 <a:ea typeface="Arial" pitchFamily="34" charset="-122"/>
                 <a:cs typeface="Arial" pitchFamily="34" charset="-120"/>
               </a:rPr>
-              <a:t>Odisha agriculture department and OSDMA, per-block deployment</a:t>
-            </a:r>
-            <a:endParaRPr lang="en-US" sz="1150" dirty="0"/>
-          </a:p>
-        </p:txBody>
-      </p:sp>
-      <p:sp>
-        <p:nvSpPr>
-          <p:cNvPr id="16" name="Text 14"/>
-          <p:cNvSpPr/>
-          <p:nvPr/>
-        </p:nvSpPr>
-        <p:spPr>
-          <a:xfrm>
-            <a:off x="3489960" y="2971800"/>
-            <a:ext cx="2164080" cy="457200"/>
+              <a:t>5,882 ha salt-affected across 5 Balasore blocks. Surge 2-4 m over a full-moon tide. The engine's advisory at T-48: move seed above the forecast water line, brace or cut banana, photo standing crop for the claim. Recovery phase then plans saline flush and next-season variety.</a:t>
+            </a:r>
+            <a:endParaRPr lang="en-US" sz="800" dirty="0"/>
+          </a:p>
+        </p:txBody>
+      </p:sp>
+      <p:sp>
+        <p:nvSpPr>
+          <p:cNvPr id="17" name="Text 15"/>
+          <p:cNvSpPr/>
+          <p:nvPr/>
+        </p:nvSpPr>
+        <p:spPr>
+          <a:xfrm>
+            <a:off x="4800600" y="2761488"/>
+            <a:ext cx="3703320" cy="137160"/>
           </a:xfrm>
           <a:prstGeom prst="rect">
             <a:avLst/>
@@ -12289,7 +13212,7 @@
               <a:buNone/>
             </a:pPr>
             <a:r>
-              <a:rPr lang="en-US" sz="1000" i="1" dirty="0">
+              <a:rPr lang="en-US" sz="650" dirty="0">
                 <a:solidFill>
                   <a:srgbClr val="8A8A8A"/>
                 </a:solidFill>
@@ -12297,32 +13220,32 @@
                 <a:ea typeface="Arial" pitchFamily="34" charset="-122"/>
                 <a:cs typeface="Arial" pitchFamily="34" charset="-120"/>
               </a:rPr>
-              <a:t>reduces call volume, gives auditable outreach evidence</a:t>
-            </a:r>
-            <a:endParaRPr lang="en-US" sz="1000" dirty="0"/>
-          </a:p>
-        </p:txBody>
-      </p:sp>
-      <p:sp>
-        <p:nvSpPr>
-          <p:cNvPr id="17" name="Shape 15"/>
-          <p:cNvSpPr/>
-          <p:nvPr/>
-        </p:nvSpPr>
-        <p:spPr>
-          <a:xfrm>
-            <a:off x="6207252" y="1284732"/>
-            <a:ext cx="2529840" cy="2286000"/>
-          </a:xfrm>
-          <a:prstGeom prst="rect">
-            <a:avLst/>
-          </a:prstGeom>
-          <a:solidFill>
-            <a:srgbClr val="E0E0E0"/>
+              <a:t>sources: d22, d47</a:t>
+            </a:r>
+            <a:endParaRPr lang="en-US" sz="650" dirty="0"/>
+          </a:p>
+        </p:txBody>
+      </p:sp>
+      <p:sp>
+        <p:nvSpPr>
+          <p:cNvPr id="18" name="Shape 16"/>
+          <p:cNvSpPr/>
+          <p:nvPr/>
+        </p:nvSpPr>
+        <p:spPr>
+          <a:xfrm>
+            <a:off x="507492" y="3067812"/>
+            <a:ext cx="4069080" cy="1280160"/>
+          </a:xfrm>
+          <a:prstGeom prst="rect">
+            <a:avLst/>
+          </a:prstGeom>
+          <a:solidFill>
+            <a:srgbClr val="2A2A2A"/>
           </a:solidFill>
           <a:ln w="12700">
             <a:solidFill>
-              <a:srgbClr val="E0E0E0"/>
+              <a:srgbClr val="2A2A2A"/>
             </a:solidFill>
             <a:prstDash val="solid"/>
           </a:ln>
@@ -12330,14 +13253,14 @@
       </p:sp>
       <p:sp>
         <p:nvSpPr>
-          <p:cNvPr id="18" name="Shape 16"/>
-          <p:cNvSpPr/>
-          <p:nvPr/>
-        </p:nvSpPr>
-        <p:spPr>
-          <a:xfrm>
-            <a:off x="8668512" y="1307592"/>
-            <a:ext cx="82296" cy="2139696"/>
+          <p:cNvPr id="19" name="Shape 17"/>
+          <p:cNvSpPr/>
+          <p:nvPr/>
+        </p:nvSpPr>
+        <p:spPr>
+          <a:xfrm>
+            <a:off x="4507992" y="3090672"/>
+            <a:ext cx="82296" cy="1133856"/>
           </a:xfrm>
           <a:prstGeom prst="parallelogram">
             <a:avLst/>
@@ -12355,26 +13278,26 @@
       </p:sp>
       <p:sp>
         <p:nvSpPr>
-          <p:cNvPr id="19" name="Shape 17"/>
+          <p:cNvPr id="20" name="Shape 18"/>
           <p:cNvSpPr/>
           <p:nvPr/>
         </p:nvSpPr>
         <p:spPr>
           <a:xfrm rot="-90000">
-            <a:off x="6156960" y="1234440"/>
-            <a:ext cx="2529840" cy="2286000"/>
+            <a:off x="457200" y="3017520"/>
+            <a:ext cx="4069080" cy="1280160"/>
           </a:xfrm>
           <a:prstGeom prst="roundRect">
             <a:avLst>
-              <a:gd name="adj" fmla="val 2400"/>
+              <a:gd name="adj" fmla="val 4286"/>
             </a:avLst>
           </a:prstGeom>
           <a:solidFill>
-            <a:srgbClr val="0A0A0A"/>
+            <a:srgbClr val="161616"/>
           </a:solidFill>
           <a:ln w="12700">
             <a:solidFill>
-              <a:srgbClr val="FFFFFF"/>
+              <a:srgbClr val="2A2A2A"/>
             </a:solidFill>
             <a:prstDash val="solid"/>
           </a:ln>
@@ -12382,14 +13305,14 @@
       </p:sp>
       <p:sp>
         <p:nvSpPr>
-          <p:cNvPr id="20" name="Text 18"/>
-          <p:cNvSpPr/>
-          <p:nvPr/>
-        </p:nvSpPr>
-        <p:spPr>
-          <a:xfrm>
-            <a:off x="6339840" y="1417320"/>
-            <a:ext cx="2164080" cy="365760"/>
+          <p:cNvPr id="21" name="Text 19"/>
+          <p:cNvSpPr/>
+          <p:nvPr/>
+        </p:nvSpPr>
+        <p:spPr>
+          <a:xfrm>
+            <a:off x="640080" y="3108960"/>
+            <a:ext cx="3703320" cy="320040"/>
           </a:xfrm>
           <a:prstGeom prst="rect">
             <a:avLst/>
@@ -12405,7 +13328,7 @@
               <a:buNone/>
             </a:pPr>
             <a:r>
-              <a:rPr lang="en-US" sz="1600" b="1" dirty="0">
+              <a:rPr lang="en-US" sz="1500" b="1" dirty="0">
                 <a:solidFill>
                   <a:srgbClr val="FFFFFF"/>
                 </a:solidFill>
@@ -12413,22 +13336,22 @@
                 <a:ea typeface="Arial Black" pitchFamily="34" charset="-122"/>
                 <a:cs typeface="Arial Black" pitchFamily="34" charset="-120"/>
               </a:rPr>
-              <a:t>Claims rail</a:t>
-            </a:r>
-            <a:endParaRPr lang="en-US" sz="1600" dirty="0"/>
-          </a:p>
-        </p:txBody>
-      </p:sp>
-      <p:sp>
-        <p:nvSpPr>
-          <p:cNvPr id="21" name="Text 19"/>
-          <p:cNvSpPr/>
-          <p:nvPr/>
-        </p:nvSpPr>
-        <p:spPr>
-          <a:xfrm>
-            <a:off x="6339840" y="1920240"/>
-            <a:ext cx="2164080" cy="914400"/>
+              <a:t>DANA 2024</a:t>
+            </a:r>
+            <a:endParaRPr lang="en-US" sz="1500" dirty="0"/>
+          </a:p>
+        </p:txBody>
+      </p:sp>
+      <p:sp>
+        <p:nvSpPr>
+          <p:cNvPr id="22" name="Text 20"/>
+          <p:cNvSpPr/>
+          <p:nvPr/>
+        </p:nvSpPr>
+        <p:spPr>
+          <a:xfrm>
+            <a:off x="640080" y="3456432"/>
+            <a:ext cx="3703320" cy="777240"/>
           </a:xfrm>
           <a:prstGeom prst="rect">
             <a:avLst/>
@@ -12444,7 +13367,7 @@
               <a:buNone/>
             </a:pPr>
             <a:r>
-              <a:rPr lang="en-US" sz="1150" dirty="0">
+              <a:rPr lang="en-US" sz="800" dirty="0">
                 <a:solidFill>
                   <a:srgbClr val="B0B0B0"/>
                 </a:solidFill>
@@ -12452,22 +13375,22 @@
                 <a:ea typeface="Arial" pitchFamily="34" charset="-122"/>
                 <a:cs typeface="Arial" pitchFamily="34" charset="-120"/>
               </a:rPr>
-              <a:t>PMFBY insurers and aggregators pay per evidence packet</a:t>
-            </a:r>
-            <a:endParaRPr lang="en-US" sz="1150" dirty="0"/>
-          </a:p>
-        </p:txBody>
-      </p:sp>
-      <p:sp>
-        <p:nvSpPr>
-          <p:cNvPr id="22" name="Text 20"/>
-          <p:cNvSpPr/>
-          <p:nvPr/>
-        </p:nvSpPr>
-        <p:spPr>
-          <a:xfrm>
-            <a:off x="6339840" y="2971800"/>
-            <a:ext cx="2164080" cy="457200"/>
+              <a:t>5,428 acres across 4 blocks of Kendrapada + Bhadrak (rapid assessment). The engine's T-72 watch triggers R17 harvest-now for mature owned plots with labor, R18 protect-in-place for immature paddy. Same warning, two different governed decisions.</a:t>
+            </a:r>
+            <a:endParaRPr lang="en-US" sz="800" dirty="0"/>
+          </a:p>
+        </p:txBody>
+      </p:sp>
+      <p:sp>
+        <p:nvSpPr>
+          <p:cNvPr id="23" name="Text 21"/>
+          <p:cNvSpPr/>
+          <p:nvPr/>
+        </p:nvSpPr>
+        <p:spPr>
+          <a:xfrm>
+            <a:off x="640080" y="4133088"/>
+            <a:ext cx="3703320" cy="137160"/>
           </a:xfrm>
           <a:prstGeom prst="rect">
             <a:avLst/>
@@ -12483,7 +13406,7 @@
               <a:buNone/>
             </a:pPr>
             <a:r>
-              <a:rPr lang="en-US" sz="1000" i="1" dirty="0">
+              <a:rPr lang="en-US" sz="650" dirty="0">
                 <a:solidFill>
                   <a:srgbClr val="8A8A8A"/>
                 </a:solidFill>
@@ -12491,22 +13414,99 @@
                 <a:ea typeface="Arial" pitchFamily="34" charset="-122"/>
                 <a:cs typeface="Arial" pitchFamily="34" charset="-120"/>
               </a:rPr>
-              <a:t>verified observation converts to claim, both sides win</a:t>
-            </a:r>
-            <a:endParaRPr lang="en-US" sz="1000" dirty="0"/>
-          </a:p>
-        </p:txBody>
-      </p:sp>
-      <p:sp>
-        <p:nvSpPr>
-          <p:cNvPr id="23" name="Text 21"/>
-          <p:cNvSpPr/>
-          <p:nvPr/>
-        </p:nvSpPr>
-        <p:spPr>
-          <a:xfrm>
-            <a:off x="457200" y="3977640"/>
-            <a:ext cx="8229600" cy="411480"/>
+              <a:t>sources: d6, d20</a:t>
+            </a:r>
+            <a:endParaRPr lang="en-US" sz="650" dirty="0"/>
+          </a:p>
+        </p:txBody>
+      </p:sp>
+      <p:sp>
+        <p:nvSpPr>
+          <p:cNvPr id="24" name="Shape 22"/>
+          <p:cNvSpPr/>
+          <p:nvPr/>
+        </p:nvSpPr>
+        <p:spPr>
+          <a:xfrm>
+            <a:off x="4668012" y="3067812"/>
+            <a:ext cx="4069080" cy="1280160"/>
+          </a:xfrm>
+          <a:prstGeom prst="rect">
+            <a:avLst/>
+          </a:prstGeom>
+          <a:solidFill>
+            <a:srgbClr val="2A2A2A"/>
+          </a:solidFill>
+          <a:ln w="12700">
+            <a:solidFill>
+              <a:srgbClr val="2A2A2A"/>
+            </a:solidFill>
+            <a:prstDash val="solid"/>
+          </a:ln>
+        </p:spPr>
+      </p:sp>
+      <p:sp>
+        <p:nvSpPr>
+          <p:cNvPr id="25" name="Shape 23"/>
+          <p:cNvSpPr/>
+          <p:nvPr/>
+        </p:nvSpPr>
+        <p:spPr>
+          <a:xfrm>
+            <a:off x="8668512" y="3090672"/>
+            <a:ext cx="82296" cy="1133856"/>
+          </a:xfrm>
+          <a:prstGeom prst="parallelogram">
+            <a:avLst/>
+          </a:prstGeom>
+          <a:solidFill>
+            <a:srgbClr val="555555"/>
+          </a:solidFill>
+          <a:ln w="12700">
+            <a:solidFill>
+              <a:srgbClr val="555555"/>
+            </a:solidFill>
+            <a:prstDash val="solid"/>
+          </a:ln>
+        </p:spPr>
+      </p:sp>
+      <p:sp>
+        <p:nvSpPr>
+          <p:cNvPr id="26" name="Shape 24"/>
+          <p:cNvSpPr/>
+          <p:nvPr/>
+        </p:nvSpPr>
+        <p:spPr>
+          <a:xfrm rot="-90000">
+            <a:off x="4617720" y="3017520"/>
+            <a:ext cx="4069080" cy="1280160"/>
+          </a:xfrm>
+          <a:prstGeom prst="roundRect">
+            <a:avLst>
+              <a:gd name="adj" fmla="val 4286"/>
+            </a:avLst>
+          </a:prstGeom>
+          <a:solidFill>
+            <a:srgbClr val="161616"/>
+          </a:solidFill>
+          <a:ln w="12700">
+            <a:solidFill>
+              <a:srgbClr val="2A2A2A"/>
+            </a:solidFill>
+            <a:prstDash val="solid"/>
+          </a:ln>
+        </p:spPr>
+      </p:sp>
+      <p:sp>
+        <p:nvSpPr>
+          <p:cNvPr id="27" name="Text 25"/>
+          <p:cNvSpPr/>
+          <p:nvPr/>
+        </p:nvSpPr>
+        <p:spPr>
+          <a:xfrm>
+            <a:off x="4800600" y="3108960"/>
+            <a:ext cx="3703320" cy="320040"/>
           </a:xfrm>
           <a:prstGeom prst="rect">
             <a:avLst/>
@@ -12522,30 +13522,30 @@
               <a:buNone/>
             </a:pPr>
             <a:r>
-              <a:rPr lang="en-US" sz="1300" b="1" dirty="0">
-                <a:solidFill>
-                  <a:srgbClr val="0A0A0A"/>
+              <a:rPr lang="en-US" sz="1500" b="1" dirty="0">
+                <a:solidFill>
+                  <a:srgbClr val="FFFFFF"/>
                 </a:solidFill>
                 <a:latin typeface="Arial Black" pitchFamily="34" charset="0"/>
                 <a:ea typeface="Arial Black" pitchFamily="34" charset="-122"/>
                 <a:cs typeface="Arial Black" pitchFamily="34" charset="-120"/>
               </a:rPr>
-              <a:t>Seed revenue line for Round 1: one FPO, one season, measured renewal. No consumer subscription fantasy.</a:t>
-            </a:r>
-            <a:endParaRPr lang="en-US" sz="1300" dirty="0"/>
-          </a:p>
-        </p:txBody>
-      </p:sp>
-      <p:sp>
-        <p:nvSpPr>
-          <p:cNvPr id="24" name="Text 22"/>
-          <p:cNvSpPr/>
-          <p:nvPr/>
-        </p:nvSpPr>
-        <p:spPr>
-          <a:xfrm>
-            <a:off x="457200" y="4759452"/>
-            <a:ext cx="8229600" cy="274320"/>
+              <a:t>1999 SUPER CYCLONE</a:t>
+            </a:r>
+            <a:endParaRPr lang="en-US" sz="1500" dirty="0"/>
+          </a:p>
+        </p:txBody>
+      </p:sp>
+      <p:sp>
+        <p:nvSpPr>
+          <p:cNvPr id="28" name="Text 26"/>
+          <p:cNvSpPr/>
+          <p:nvPr/>
+        </p:nvSpPr>
+        <p:spPr>
+          <a:xfrm>
+            <a:off x="4800600" y="3456432"/>
+            <a:ext cx="3703320" cy="777240"/>
           </a:xfrm>
           <a:prstGeom prst="rect">
             <a:avLst/>
@@ -12561,15 +13561,93 @@
               <a:buNone/>
             </a:pPr>
             <a:r>
-              <a:rPr lang="en-US" sz="850" dirty="0">
-                <a:solidFill>
-                  <a:srgbClr val="6E6E6E"/>
+              <a:rPr lang="en-US" sz="800" dirty="0">
+                <a:solidFill>
+                  <a:srgbClr val="B0B0B0"/>
                 </a:solidFill>
                 <a:latin typeface="Arial" pitchFamily="34" charset="0"/>
                 <a:ea typeface="Arial" pitchFamily="34" charset="-122"/>
                 <a:cs typeface="Arial" pitchFamily="34" charset="-120"/>
               </a:rPr>
-              <a:t>Mine verdict: the real buyer is institutional, and the real distribution is extension workers, KCC, FPOs, dealers, and panchayat actors. Consumer subscriptions and network effects are not evidenced.</a:t>
+              <a:t>9,893 deaths with a 48h+ official warning. The warning existed; the decision did not. This is the entire thesis: warnings are infrastructure, decisions are the product. Every subsequent event is measured against that failure.</a:t>
+            </a:r>
+            <a:endParaRPr lang="en-US" sz="800" dirty="0"/>
+          </a:p>
+        </p:txBody>
+      </p:sp>
+      <p:sp>
+        <p:nvSpPr>
+          <p:cNvPr id="29" name="Text 27"/>
+          <p:cNvSpPr/>
+          <p:nvPr/>
+        </p:nvSpPr>
+        <p:spPr>
+          <a:xfrm>
+            <a:off x="4800600" y="4133088"/>
+            <a:ext cx="3703320" cy="137160"/>
+          </a:xfrm>
+          <a:prstGeom prst="rect">
+            <a:avLst/>
+          </a:prstGeom>
+          <a:noFill/>
+          <a:ln/>
+        </p:spPr>
+        <p:txBody>
+          <a:bodyPr wrap="square" lIns="0" tIns="0" rIns="0" bIns="0" rtlCol="0" anchor="ctr"/>
+          <a:lstStyle/>
+          <a:p>
+            <a:pPr indent="0" marL="0">
+              <a:buNone/>
+            </a:pPr>
+            <a:r>
+              <a:rPr lang="en-US" sz="650" dirty="0">
+                <a:solidFill>
+                  <a:srgbClr val="8A8A8A"/>
+                </a:solidFill>
+                <a:latin typeface="Arial" pitchFamily="34" charset="0"/>
+                <a:ea typeface="Arial" pitchFamily="34" charset="-122"/>
+                <a:cs typeface="Arial" pitchFamily="34" charset="-120"/>
+              </a:rPr>
+              <a:t>sources: d1, d35</a:t>
+            </a:r>
+            <a:endParaRPr lang="en-US" sz="650" dirty="0"/>
+          </a:p>
+        </p:txBody>
+      </p:sp>
+      <p:sp>
+        <p:nvSpPr>
+          <p:cNvPr id="30" name="Text 28"/>
+          <p:cNvSpPr/>
+          <p:nvPr/>
+        </p:nvSpPr>
+        <p:spPr>
+          <a:xfrm>
+            <a:off x="457200" y="4663440"/>
+            <a:ext cx="8229600" cy="274320"/>
+          </a:xfrm>
+          <a:prstGeom prst="rect">
+            <a:avLst/>
+          </a:prstGeom>
+          <a:noFill/>
+          <a:ln/>
+        </p:spPr>
+        <p:txBody>
+          <a:bodyPr wrap="square" lIns="0" tIns="0" rIns="0" bIns="0" rtlCol="0" anchor="ctr"/>
+          <a:lstStyle/>
+          <a:p>
+            <a:pPr indent="0" marL="0">
+              <a:buNone/>
+            </a:pPr>
+            <a:r>
+              <a:rPr lang="en-US" sz="850" dirty="0">
+                <a:solidFill>
+                  <a:srgbClr val="B0B0B0"/>
+                </a:solidFill>
+                <a:latin typeface="Arial" pitchFamily="34" charset="0"/>
+                <a:ea typeface="Arial" pitchFamily="34" charset="-122"/>
+                <a:cs typeface="Arial" pitchFamily="34" charset="-120"/>
+              </a:rPr>
+              <a:t>The replay harness froze each event's best track before running, so the engine never sees the outcome. Honesty: what the engine WOULD have issued, validated against what happened.</a:t>
             </a:r>
             <a:endParaRPr lang="en-US" sz="850" dirty="0"/>
           </a:p>

--- a/scaffold/deck/KrishiSetu-Round0-20260816.pptx
+++ b/scaffold/deck/KrishiSetu-Round0-20260816.pptx
@@ -13647,7 +13647,7 @@
                 <a:ea typeface="Arial" pitchFamily="34" charset="-122"/>
                 <a:cs typeface="Arial" pitchFamily="34" charset="-120"/>
               </a:rPr>
-              <a:t>The replay harness froze each event's best track before running, so the engine never sees the outcome. Honesty: what the engine WOULD have issued, validated against what happened.</a:t>
+              <a:t>The replay froze each event's best track before running, so the engine never sees the outcome. Honesty: what the engine WOULD have issued, validated against what happened.</a:t>
             </a:r>
             <a:endParaRPr lang="en-US" sz="850" dirty="0"/>
           </a:p>

--- a/scaffold/deck/KrishiSetu-Round0-20260816.pptx
+++ b/scaffold/deck/KrishiSetu-Round0-20260816.pptx
@@ -2168,6 +2168,9 @@
   <p:clrMapOvr>
     <a:masterClrMapping/>
   </p:clrMapOvr>
+  <p:transition spd="med">
+    <p:fade/>
+  </p:transition>
 </p:sld>
 </file>
 
@@ -2970,6 +2973,9 @@
   <p:clrMapOvr>
     <a:masterClrMapping/>
   </p:clrMapOvr>
+  <p:transition spd="med">
+    <p:fade/>
+  </p:transition>
 </p:sld>
 </file>
 
@@ -3284,8 +3290,8 @@
         </p:nvSpPr>
         <p:spPr>
           <a:xfrm>
-            <a:off x="640080" y="2788920"/>
-            <a:ext cx="3657600" cy="548640"/>
+            <a:off x="640080" y="2724912"/>
+            <a:ext cx="3657600" cy="411480"/>
           </a:xfrm>
           <a:prstGeom prst="rect">
             <a:avLst/>
@@ -3301,7 +3307,7 @@
               <a:buNone/>
             </a:pPr>
             <a:r>
-              <a:rPr lang="en-US" sz="1200" dirty="0">
+              <a:rPr lang="en-US" sz="1100" dirty="0">
                 <a:solidFill>
                   <a:srgbClr val="0A0A0A"/>
                 </a:solidFill>
@@ -3311,7 +3317,7 @@
               </a:rPr>
               <a:t>Odisha: cyclone-facing coast, paddy and saline zones, Dana and Yaas damage on record</a:t>
             </a:r>
-            <a:endParaRPr lang="en-US" sz="1200" dirty="0"/>
+            <a:endParaRPr lang="en-US" sz="1100" dirty="0"/>
           </a:p>
         </p:txBody>
       </p:sp>
@@ -3691,6 +3697,9 @@
   <p:clrMapOvr>
     <a:masterClrMapping/>
   </p:clrMapOvr>
+  <p:transition spd="med">
+    <p:fade/>
+  </p:transition>
 </p:sld>
 </file>
 
@@ -4595,6 +4604,9 @@
   <p:clrMapOvr>
     <a:masterClrMapping/>
   </p:clrMapOvr>
+  <p:transition spd="med">
+    <p:fade/>
+  </p:transition>
 </p:sld>
 </file>
 
@@ -4899,6 +4911,9 @@
   <p:clrMapOvr>
     <a:masterClrMapping/>
   </p:clrMapOvr>
+  <p:transition spd="med">
+    <p:fade/>
+  </p:transition>
 </p:sld>
 </file>
 
@@ -5209,7 +5224,7 @@
           <p:nvPr/>
         </p:nvSpPr>
         <p:spPr>
-          <a:xfrm rot="-120000">
+          <a:xfrm>
             <a:off x="457200" y="2240280"/>
             <a:ext cx="2529840" cy="1463040"/>
           </a:xfrm>
@@ -5389,7 +5404,7 @@
           <p:nvPr/>
         </p:nvSpPr>
         <p:spPr>
-          <a:xfrm rot="-120000">
+          <a:xfrm>
             <a:off x="3307080" y="2240280"/>
             <a:ext cx="2529840" cy="1463040"/>
           </a:xfrm>
@@ -5569,7 +5584,7 @@
           <p:nvPr/>
         </p:nvSpPr>
         <p:spPr>
-          <a:xfrm rot="-120000">
+          <a:xfrm>
             <a:off x="6156960" y="2240280"/>
             <a:ext cx="2529840" cy="1463040"/>
           </a:xfrm>
@@ -5821,6 +5836,9 @@
   <p:clrMapOvr>
     <a:masterClrMapping/>
   </p:clrMapOvr>
+  <p:transition spd="med">
+    <p:fade/>
+  </p:transition>
 </p:sld>
 </file>
 
@@ -5856,7 +5874,7 @@
         </p:nvSpPr>
         <p:spPr>
           <a:xfrm>
-            <a:off x="498348" y="361188"/>
+            <a:off x="498348" y="425196"/>
             <a:ext cx="6858000" cy="0"/>
           </a:xfrm>
           <a:prstGeom prst="rect">
@@ -5873,7 +5891,7 @@
               <a:buNone/>
             </a:pPr>
             <a:r>
-              <a:rPr lang="en-US" sz="3200" b="1" dirty="0">
+              <a:rPr lang="en-US" sz="3000" b="1" dirty="0">
                 <a:solidFill>
                   <a:srgbClr val="2A2A2A"/>
                 </a:solidFill>
@@ -5883,7 +5901,7 @@
               </a:rPr>
               <a:t>The research machine behind this deck</a:t>
             </a:r>
-            <a:endParaRPr lang="en-US" sz="3200" dirty="0"/>
+            <a:endParaRPr lang="en-US" sz="3000" dirty="0"/>
           </a:p>
         </p:txBody>
       </p:sp>
@@ -5895,7 +5913,7 @@
         </p:nvSpPr>
         <p:spPr>
           <a:xfrm>
-            <a:off x="457200" y="320040"/>
+            <a:off x="457200" y="384048"/>
             <a:ext cx="6858000" cy="0"/>
           </a:xfrm>
           <a:prstGeom prst="rect">
@@ -5912,7 +5930,7 @@
               <a:buNone/>
             </a:pPr>
             <a:r>
-              <a:rPr lang="en-US" sz="3200" b="1" dirty="0">
+              <a:rPr lang="en-US" sz="3000" b="1" dirty="0">
                 <a:solidFill>
                   <a:srgbClr val="FFFFFF"/>
                 </a:solidFill>
@@ -5922,7 +5940,7 @@
               </a:rPr>
               <a:t>The research machine behind this deck</a:t>
             </a:r>
-            <a:endParaRPr lang="en-US" sz="3200" dirty="0"/>
+            <a:endParaRPr lang="en-US" sz="3000" dirty="0"/>
           </a:p>
         </p:txBody>
       </p:sp>
@@ -5934,7 +5952,7 @@
         </p:nvSpPr>
         <p:spPr>
           <a:xfrm>
-            <a:off x="457200" y="896112"/>
+            <a:off x="457200" y="950976"/>
             <a:ext cx="1280160" cy="54864"/>
           </a:xfrm>
           <a:prstGeom prst="rect">
@@ -6133,7 +6151,7 @@
             <a:r>
               <a:rPr lang="en-US" sz="750" dirty="0">
                 <a:solidFill>
-                  <a:srgbClr val="8A8A8A"/>
+                  <a:srgbClr val="B0B0B0"/>
                 </a:solidFill>
                 <a:latin typeface="Arial" pitchFamily="34" charset="0"/>
                 <a:ea typeface="Arial" pitchFamily="34" charset="-122"/>
@@ -6327,7 +6345,7 @@
             <a:r>
               <a:rPr lang="en-US" sz="750" dirty="0">
                 <a:solidFill>
-                  <a:srgbClr val="8A8A8A"/>
+                  <a:srgbClr val="B0B0B0"/>
                 </a:solidFill>
                 <a:latin typeface="Arial" pitchFamily="34" charset="0"/>
                 <a:ea typeface="Arial" pitchFamily="34" charset="-122"/>
@@ -6521,7 +6539,7 @@
             <a:r>
               <a:rPr lang="en-US" sz="750" dirty="0">
                 <a:solidFill>
-                  <a:srgbClr val="8A8A8A"/>
+                  <a:srgbClr val="B0B0B0"/>
                 </a:solidFill>
                 <a:latin typeface="Arial" pitchFamily="34" charset="0"/>
                 <a:ea typeface="Arial" pitchFamily="34" charset="-122"/>
@@ -6715,7 +6733,7 @@
             <a:r>
               <a:rPr lang="en-US" sz="750" dirty="0">
                 <a:solidFill>
-                  <a:srgbClr val="8A8A8A"/>
+                  <a:srgbClr val="B0B0B0"/>
                 </a:solidFill>
                 <a:latin typeface="Arial" pitchFamily="34" charset="0"/>
                 <a:ea typeface="Arial" pitchFamily="34" charset="-122"/>
@@ -6810,6 +6828,9 @@
   <p:clrMapOvr>
     <a:masterClrMapping/>
   </p:clrMapOvr>
+  <p:transition spd="med">
+    <p:fade/>
+  </p:transition>
 </p:sld>
 </file>
 
@@ -7643,6 +7664,9 @@
   <p:clrMapOvr>
     <a:masterClrMapping/>
   </p:clrMapOvr>
+  <p:transition spd="med">
+    <p:fade/>
+  </p:transition>
 </p:sld>
 </file>
 
@@ -7992,12 +8016,12 @@
           <a:p>
             <a:pPr indent="0" marL="0">
               <a:lnSpc>
-                <a:spcPts val="2200"/>
+                <a:spcPts val="2000"/>
               </a:lnSpc>
               <a:buNone/>
             </a:pPr>
             <a:r>
-              <a:rPr lang="en-US" sz="1100" dirty="0">
+              <a:rPr lang="en-US" sz="1050" dirty="0">
                 <a:solidFill>
                   <a:srgbClr val="0A0A0A"/>
                 </a:solidFill>
@@ -8007,17 +8031,17 @@
               </a:rPr>
               <a:t>STAGE THE CROP</a:t>
             </a:r>
-            <a:endParaRPr lang="en-US" sz="1100" dirty="0"/>
+            <a:endParaRPr lang="en-US" sz="1050" dirty="0"/>
           </a:p>
           <a:p>
             <a:pPr indent="0" marL="0">
               <a:lnSpc>
-                <a:spcPts val="2200"/>
+                <a:spcPts val="2000"/>
               </a:lnSpc>
               <a:buNone/>
             </a:pPr>
             <a:r>
-              <a:rPr lang="en-US" sz="1100" dirty="0">
+              <a:rPr lang="en-US" sz="1050" dirty="0">
                 <a:solidFill>
                   <a:srgbClr val="0A0A0A"/>
                 </a:solidFill>
@@ -8027,17 +8051,17 @@
               </a:rPr>
               <a:t>harvest or move to raised platform on a deadline</a:t>
             </a:r>
-            <a:endParaRPr lang="en-US" sz="1100" dirty="0"/>
+            <a:endParaRPr lang="en-US" sz="1050" dirty="0"/>
           </a:p>
           <a:p>
             <a:pPr indent="0" marL="0">
               <a:lnSpc>
-                <a:spcPts val="2200"/>
+                <a:spcPts val="2000"/>
               </a:lnSpc>
               <a:buNone/>
             </a:pPr>
             <a:r>
-              <a:rPr lang="en-US" sz="1100" dirty="0">
+              <a:rPr lang="en-US" sz="1050" dirty="0">
                 <a:solidFill>
                   <a:srgbClr val="0A0A0A"/>
                 </a:solidFill>
@@ -8047,17 +8071,17 @@
               </a:rPr>
               <a:t>protect seed, livestock, equipment</a:t>
             </a:r>
-            <a:endParaRPr lang="en-US" sz="1100" dirty="0"/>
+            <a:endParaRPr lang="en-US" sz="1050" dirty="0"/>
           </a:p>
           <a:p>
             <a:pPr indent="0" marL="0">
               <a:lnSpc>
-                <a:spcPts val="2200"/>
+                <a:spcPts val="2000"/>
               </a:lnSpc>
               <a:buNone/>
             </a:pPr>
             <a:r>
-              <a:rPr lang="en-US" sz="1100" dirty="0">
+              <a:rPr lang="en-US" sz="1050" dirty="0">
                 <a:solidFill>
                   <a:srgbClr val="0A0A0A"/>
                 </a:solidFill>
@@ -8067,7 +8091,7 @@
               </a:rPr>
               <a:t>evacuate people, secure the house</a:t>
             </a:r>
-            <a:endParaRPr lang="en-US" sz="1100" dirty="0"/>
+            <a:endParaRPr lang="en-US" sz="1050" dirty="0"/>
           </a:p>
         </p:txBody>
       </p:sp>
@@ -8244,12 +8268,12 @@
           <a:p>
             <a:pPr indent="0" marL="0">
               <a:lnSpc>
-                <a:spcPts val="2200"/>
+                <a:spcPts val="2000"/>
               </a:lnSpc>
               <a:buNone/>
             </a:pPr>
             <a:r>
-              <a:rPr lang="en-US" sz="1100" dirty="0">
+              <a:rPr lang="en-US" sz="1050" dirty="0">
                 <a:solidFill>
                   <a:srgbClr val="0A0A0A"/>
                 </a:solidFill>
@@ -8259,17 +8283,17 @@
               </a:rPr>
               <a:t>SHELTER AND SAFETY</a:t>
             </a:r>
-            <a:endParaRPr lang="en-US" sz="1100" dirty="0"/>
+            <a:endParaRPr lang="en-US" sz="1050" dirty="0"/>
           </a:p>
           <a:p>
             <a:pPr indent="0" marL="0">
               <a:lnSpc>
-                <a:spcPts val="2200"/>
+                <a:spcPts val="2000"/>
               </a:lnSpc>
               <a:buNone/>
             </a:pPr>
             <a:r>
-              <a:rPr lang="en-US" sz="1100" dirty="0">
+              <a:rPr lang="en-US" sz="1050" dirty="0">
                 <a:solidFill>
                   <a:srgbClr val="0A0A0A"/>
                 </a:solidFill>
@@ -8279,17 +8303,17 @@
               </a:rPr>
               <a:t>Odia guidance for the household</a:t>
             </a:r>
-            <a:endParaRPr lang="en-US" sz="1100" dirty="0"/>
+            <a:endParaRPr lang="en-US" sz="1050" dirty="0"/>
           </a:p>
           <a:p>
             <a:pPr indent="0" marL="0">
               <a:lnSpc>
-                <a:spcPts val="2200"/>
+                <a:spcPts val="2000"/>
               </a:lnSpc>
               <a:buNone/>
             </a:pPr>
             <a:r>
-              <a:rPr lang="en-US" sz="1100" dirty="0">
+              <a:rPr lang="en-US" sz="1050" dirty="0">
                 <a:solidFill>
                   <a:srgbClr val="0A0A0A"/>
                 </a:solidFill>
@@ -8299,17 +8323,17 @@
               </a:rPr>
               <a:t>livestock and fodder checklist</a:t>
             </a:r>
-            <a:endParaRPr lang="en-US" sz="1100" dirty="0"/>
+            <a:endParaRPr lang="en-US" sz="1050" dirty="0"/>
           </a:p>
           <a:p>
             <a:pPr indent="0" marL="0">
               <a:lnSpc>
-                <a:spcPts val="2200"/>
+                <a:spcPts val="2000"/>
               </a:lnSpc>
               <a:buNone/>
             </a:pPr>
             <a:r>
-              <a:rPr lang="en-US" sz="1100" dirty="0">
+              <a:rPr lang="en-US" sz="1050" dirty="0">
                 <a:solidFill>
                   <a:srgbClr val="0A0A0A"/>
                 </a:solidFill>
@@ -8319,7 +8343,7 @@
               </a:rPr>
               <a:t>keep the advisory reachable offline</a:t>
             </a:r>
-            <a:endParaRPr lang="en-US" sz="1100" dirty="0"/>
+            <a:endParaRPr lang="en-US" sz="1050" dirty="0"/>
           </a:p>
         </p:txBody>
       </p:sp>
@@ -8496,12 +8520,12 @@
           <a:p>
             <a:pPr indent="0" marL="0">
               <a:lnSpc>
-                <a:spcPts val="2200"/>
+                <a:spcPts val="2000"/>
               </a:lnSpc>
               <a:buNone/>
             </a:pPr>
             <a:r>
-              <a:rPr lang="en-US" sz="1100" dirty="0">
+              <a:rPr lang="en-US" sz="1050" dirty="0">
                 <a:solidFill>
                   <a:srgbClr val="0A0A0A"/>
                 </a:solidFill>
@@ -8511,17 +8535,17 @@
               </a:rPr>
               <a:t>RECOVERY AND CLAIMS</a:t>
             </a:r>
-            <a:endParaRPr lang="en-US" sz="1100" dirty="0"/>
+            <a:endParaRPr lang="en-US" sz="1050" dirty="0"/>
           </a:p>
           <a:p>
             <a:pPr indent="0" marL="0">
               <a:lnSpc>
-                <a:spcPts val="2200"/>
+                <a:spcPts val="2000"/>
               </a:lnSpc>
               <a:buNone/>
             </a:pPr>
             <a:r>
-              <a:rPr lang="en-US" sz="1100" dirty="0">
+              <a:rPr lang="en-US" sz="1050" dirty="0">
                 <a:solidFill>
                   <a:srgbClr val="0A0A0A"/>
                 </a:solidFill>
@@ -8531,17 +8555,17 @@
               </a:rPr>
               <a:t>saline flush and re-sowing plan per plot</a:t>
             </a:r>
-            <a:endParaRPr lang="en-US" sz="1100" dirty="0"/>
+            <a:endParaRPr lang="en-US" sz="1050" dirty="0"/>
           </a:p>
           <a:p>
             <a:pPr indent="0" marL="0">
               <a:lnSpc>
-                <a:spcPts val="2200"/>
+                <a:spcPts val="2000"/>
               </a:lnSpc>
               <a:buNone/>
             </a:pPr>
             <a:r>
-              <a:rPr lang="en-US" sz="1100" dirty="0">
+              <a:rPr lang="en-US" sz="1050" dirty="0">
                 <a:solidFill>
                   <a:srgbClr val="0A0A0A"/>
                 </a:solidFill>
@@ -8551,17 +8575,17 @@
               </a:rPr>
               <a:t>damage evidence capture on a basic phone</a:t>
             </a:r>
-            <a:endParaRPr lang="en-US" sz="1100" dirty="0"/>
+            <a:endParaRPr lang="en-US" sz="1050" dirty="0"/>
           </a:p>
           <a:p>
             <a:pPr indent="0" marL="0">
               <a:lnSpc>
-                <a:spcPts val="2200"/>
+                <a:spcPts val="2000"/>
               </a:lnSpc>
               <a:buNone/>
             </a:pPr>
             <a:r>
-              <a:rPr lang="en-US" sz="1100" dirty="0">
+              <a:rPr lang="en-US" sz="1050" dirty="0">
                 <a:solidFill>
                   <a:srgbClr val="0A0A0A"/>
                 </a:solidFill>
@@ -8571,7 +8595,7 @@
               </a:rPr>
               <a:t>PMFBY claim packet export</a:t>
             </a:r>
-            <a:endParaRPr lang="en-US" sz="1100" dirty="0"/>
+            <a:endParaRPr lang="en-US" sz="1050" dirty="0"/>
           </a:p>
         </p:txBody>
       </p:sp>
@@ -8658,6 +8682,9 @@
   <p:clrMapOvr>
     <a:masterClrMapping/>
   </p:clrMapOvr>
+  <p:transition spd="med">
+    <p:fade/>
+  </p:transition>
 </p:sld>
 </file>
 
@@ -9907,6 +9934,9 @@
   <p:clrMapOvr>
     <a:masterClrMapping/>
   </p:clrMapOvr>
+  <p:transition spd="med">
+    <p:fade/>
+  </p:transition>
 </p:sld>
 </file>
 
@@ -11173,6 +11203,9 @@
   <p:clrMapOvr>
     <a:masterClrMapping/>
   </p:clrMapOvr>
+  <p:transition spd="med">
+    <p:fade/>
+  </p:transition>
 </p:sld>
 </file>
 
@@ -11595,7 +11628,7 @@
               <a:buNone/>
             </a:pPr>
             <a:r>
-              <a:rPr lang="en-US" sz="1350" dirty="0">
+              <a:rPr lang="en-US" sz="1250" dirty="0">
                 <a:solidFill>
                   <a:srgbClr val="FFFFFF"/>
                 </a:solidFill>
@@ -11605,7 +11638,7 @@
               </a:rPr>
               <a:t>"Plot 12B, flowering paddy: harvest by 18:00 tomorrow, or move to the raised platform. Source: IMD + rule R17. Cost of waiting: est. yield loss."</a:t>
             </a:r>
-            <a:endParaRPr lang="en-US" sz="1350" dirty="0"/>
+            <a:endParaRPr lang="en-US" sz="1250" dirty="0"/>
           </a:p>
         </p:txBody>
       </p:sp>
@@ -12669,6 +12702,9 @@
   <p:clrMapOvr>
     <a:masterClrMapping/>
   </p:clrMapOvr>
+  <p:transition spd="med">
+    <p:fade/>
+  </p:transition>
 </p:sld>
 </file>
 
@@ -13658,6 +13694,9 @@
   <p:clrMapOvr>
     <a:masterClrMapping/>
   </p:clrMapOvr>
+  <p:transition spd="med">
+    <p:fade/>
+  </p:transition>
 </p:sld>
 </file>
 

--- a/scaffold/deck/KrishiSetu-Round0-20260816.pptx
+++ b/scaffold/deck/KrishiSetu-Round0-20260816.pptx
@@ -7438,7 +7438,7 @@
                 <a:ea typeface="Arial" pitchFamily="34" charset="-122"/>
                 <a:cs typeface="Arial" pitchFamily="34" charset="-120"/>
               </a:rPr>
-              <a:t>Monte Carlo with convergence gates, CVaR at every decision node, copulas for compound events (cyclone + surge + river flood, fitted not borrowed), BOCPD regime detection, fragility curves per crop and stage, self-excitation for disaster clustering.</a:t>
+              <a:t>shipped in the prototype: Monte Carlo with convergence gates, CVaR at every decision node, fragility curves per crop and stage. designed for the live system: fitted copulas for compound events (cyclone + surge + river flood), BOCPD regime detection, self-excitation for disaster clustering.</a:t>
             </a:r>
             <a:endParaRPr lang="en-US" sz="850" dirty="0"/>
           </a:p>
@@ -11603,7 +11603,7 @@
                 <a:ea typeface="Arial" pitchFamily="34" charset="-122"/>
                 <a:cs typeface="Arial" pitchFamily="34" charset="-120"/>
               </a:rPr>
-              <a:t>"Plot 12B, flowering paddy: harvest by 18:00 tomorrow, or move to the raised platform. Source: IMD + rule R17. Cost of waiting: est. yield loss."</a:t>
+              <a:t>"Plot 12B, mature paddy: harvest by 18:00 tomorrow, or move to the raised platform. Source: IMD + rule R17. Cost of waiting: est. yield loss."</a:t>
             </a:r>
             <a:endParaRPr lang="en-US" sz="1350" dirty="0"/>
           </a:p>

--- a/scaffold/deck/KrishiSetu-Round0-20260816.pptx
+++ b/scaffold/deck/KrishiSetu-Round0-20260816.pptx
@@ -3478,7 +3478,7 @@
                 <a:ea typeface="Arial" pitchFamily="34" charset="-122"/>
                 <a:cs typeface="Arial" pitchFamily="34" charset="-120"/>
               </a:rPr>
-              <a:t>2.  one agronomist-reviewed rule pack</a:t>
+              <a:t>2.  one agronomist-curated rule pack</a:t>
             </a:r>
             <a:endParaRPr lang="en-US" sz="1200" dirty="0"/>
           </a:p>
@@ -5287,7 +5287,7 @@
                 <a:ea typeface="Arial Black" pitchFamily="34" charset="-122"/>
                 <a:cs typeface="Arial Black" pitchFamily="34" charset="-120"/>
               </a:rPr>
-              <a:t>5,428 acres</a:t>
+              <a:t>108,220 ha</a:t>
             </a:r>
             <a:endParaRPr lang="en-US" sz="3200" dirty="0"/>
           </a:p>
@@ -5326,7 +5326,7 @@
                 <a:ea typeface="Arial" pitchFamily="34" charset="-122"/>
                 <a:cs typeface="Arial" pitchFamily="34" charset="-120"/>
               </a:rPr>
-              <a:t>crop loss across 4 blocks of Kendrapada and Bhadrak, Cyclone Dana 2024 (rapid assessment)</a:t>
+              <a:t>crop loss in Odisha, Cyclone Fani 2019, Rs 1,304.58 cr (OSDMA damage assessment)</a:t>
             </a:r>
             <a:endParaRPr lang="en-US" sz="1000" dirty="0"/>
           </a:p>
@@ -9245,7 +9245,7 @@
                 <a:ea typeface="Arial" pitchFamily="34" charset="-122"/>
                 <a:cs typeface="Arial" pitchFamily="34" charset="-120"/>
               </a:rPr>
-              <a:t>agronomist-reviewed rule engine: pre/during/post x crop x stage x hazard</a:t>
+              <a:t>agronomist-curated rule engine: pre/during/post x crop x stage x hazard</a:t>
             </a:r>
             <a:endParaRPr lang="en-US" sz="1050" dirty="0"/>
           </a:p>
@@ -13375,7 +13375,7 @@
                 <a:ea typeface="Arial" pitchFamily="34" charset="-122"/>
                 <a:cs typeface="Arial" pitchFamily="34" charset="-120"/>
               </a:rPr>
-              <a:t>5,428 acres across 4 blocks of Kendrapada + Bhadrak (rapid assessment). The engine's T-72 watch triggers R17 harvest-now for mature owned plots with labor, R18 protect-in-place for immature paddy. Same warning, two different governed decisions.</a:t>
+              <a:t>rapid assessment: 5,428 acres across 4 selected blocks of Kendrapara + Bhadrak (nonrepresentative, d6). The engine's T-72 watch triggers R17 harvest-now for mature owned plots with labor, R18 protect-in-place for immature paddy. Same warning, two different governed decisions.</a:t>
             </a:r>
             <a:endParaRPr lang="en-US" sz="800" dirty="0"/>
           </a:p>

--- a/scaffold/deck/KrishiSetu-Round0-20260816.pptx
+++ b/scaffold/deck/KrishiSetu-Round0-20260816.pptx
@@ -6100,7 +6100,7 @@
                 <a:ea typeface="Arial" pitchFamily="34" charset="-122"/>
                 <a:cs typeface="Arial" pitchFamily="34" charset="-120"/>
               </a:rPr>
-              <a:t>parallel deep-research reports across 7 waves, every run multi-channel with coverage tables, noise logs, A-D evidence grades</a:t>
+              <a:t>research reports across 7 waves, every one multi-channel with coverage tables, noise logs, A-D evidence grades</a:t>
             </a:r>
             <a:endParaRPr lang="en-US" sz="950" dirty="0"/>
           </a:p>
@@ -6760,7 +6760,7 @@
                 <a:ea typeface="Arial Black" pitchFamily="34" charset="-122"/>
                 <a:cs typeface="Arial Black" pitchFamily="34" charset="-120"/>
               </a:rPr>
-              <a:t>single-pass AI summarizes. this is an orchestrated parallel research machine with verification gates: every number in this deck traces to a source you can open.</a:t>
+              <a:t>every number in this deck traces to a source you can open: slide, proof ledger, index, raw report. nothing ships without the chain.</a:t>
             </a:r>
             <a:endParaRPr lang="en-US" sz="1300" dirty="0"/>
           </a:p>

--- a/scaffold/deck/KrishiSetu-Round0-20260816.pptx
+++ b/scaffold/deck/KrishiSetu-Round0-20260816.pptx
@@ -1925,7 +1925,7 @@
     <p:bg>
       <p:bgPr>
         <a:solidFill>
-          <a:srgbClr val="0A0A0A"/>
+          <a:srgbClr val="1F3D26"/>
         </a:solidFill>
       </p:bgPr>
     </p:bg>
@@ -1970,7 +1970,7 @@
             <a:r>
               <a:rPr lang="en-US" sz="5800" b="1" dirty="0">
                 <a:solidFill>
-                  <a:srgbClr val="2A2A2A"/>
+                  <a:srgbClr val="142B1A"/>
                 </a:solidFill>
                 <a:latin typeface="Arial Black" pitchFamily="34" charset="0"/>
                 <a:ea typeface="Arial Black" pitchFamily="34" charset="-122"/>
@@ -2009,7 +2009,7 @@
             <a:r>
               <a:rPr lang="en-US" sz="5800" b="1" dirty="0">
                 <a:solidFill>
-                  <a:srgbClr val="FFFFFF"/>
+                  <a:srgbClr val="F0F5EA"/>
                 </a:solidFill>
                 <a:latin typeface="Arial Black" pitchFamily="34" charset="0"/>
                 <a:ea typeface="Arial Black" pitchFamily="34" charset="-122"/>
@@ -2036,11 +2036,11 @@
             <a:avLst/>
           </a:prstGeom>
           <a:solidFill>
-            <a:srgbClr val="FFFFFF"/>
+            <a:srgbClr val="F0F5EA"/>
           </a:solidFill>
           <a:ln w="12700">
             <a:solidFill>
-              <a:srgbClr val="FFFFFF"/>
+              <a:srgbClr val="F0F5EA"/>
             </a:solidFill>
             <a:prstDash val="solid"/>
           </a:ln>
@@ -2073,7 +2073,7 @@
             <a:r>
               <a:rPr lang="en-US" sz="1800" b="1" dirty="0">
                 <a:solidFill>
-                  <a:srgbClr val="FFFFFF"/>
+                  <a:srgbClr val="F0F5EA"/>
                 </a:solidFill>
                 <a:latin typeface="Arial" pitchFamily="34" charset="0"/>
                 <a:ea typeface="Arial" pitchFamily="34" charset="-122"/>
@@ -2112,7 +2112,7 @@
             <a:r>
               <a:rPr lang="en-US" sz="1400" dirty="0">
                 <a:solidFill>
-                  <a:srgbClr val="B0B0B0"/>
+                  <a:srgbClr val="8FAE8B"/>
                 </a:solidFill>
                 <a:latin typeface="Arial" pitchFamily="34" charset="0"/>
                 <a:ea typeface="Arial" pitchFamily="34" charset="-122"/>
@@ -2151,7 +2151,7 @@
             <a:r>
               <a:rPr lang="en-US" sz="1200" dirty="0">
                 <a:solidFill>
-                  <a:srgbClr val="B0B0B0"/>
+                  <a:srgbClr val="8FAE8B"/>
                 </a:solidFill>
                 <a:latin typeface="Arial" pitchFamily="34" charset="0"/>
                 <a:ea typeface="Arial" pitchFamily="34" charset="-122"/>
@@ -2180,7 +2180,7 @@
     <p:bg>
       <p:bgPr>
         <a:solidFill>
-          <a:srgbClr val="FFFFFF"/>
+          <a:srgbClr val="F0F5EA"/>
         </a:solidFill>
       </p:bgPr>
     </p:bg>
@@ -2225,7 +2225,7 @@
             <a:r>
               <a:rPr lang="en-US" sz="2800" b="1" dirty="0">
                 <a:solidFill>
-                  <a:srgbClr val="E0E0E0"/>
+                  <a:srgbClr val="D8E8C8"/>
                 </a:solidFill>
                 <a:latin typeface="Arial Black" pitchFamily="34" charset="0"/>
                 <a:ea typeface="Arial Black" pitchFamily="34" charset="-122"/>
@@ -2271,7 +2271,7 @@
             <a:r>
               <a:rPr lang="en-US" sz="2800" b="1" dirty="0">
                 <a:solidFill>
-                  <a:srgbClr val="0A0A0A"/>
+                  <a:srgbClr val="2C5F2D"/>
                 </a:solidFill>
                 <a:latin typeface="Arial Black" pitchFamily="34" charset="0"/>
                 <a:ea typeface="Arial Black" pitchFamily="34" charset="-122"/>
@@ -2298,11 +2298,11 @@
             <a:avLst/>
           </a:prstGeom>
           <a:solidFill>
-            <a:srgbClr val="0A0A0A"/>
+            <a:srgbClr val="2C5F2D"/>
           </a:solidFill>
           <a:ln w="12700">
             <a:solidFill>
-              <a:srgbClr val="0A0A0A"/>
+              <a:srgbClr val="2C5F2D"/>
             </a:solidFill>
             <a:prstDash val="solid"/>
           </a:ln>
@@ -2323,11 +2323,11 @@
             <a:avLst/>
           </a:prstGeom>
           <a:solidFill>
-            <a:srgbClr val="E0E0E0"/>
+            <a:srgbClr val="D8E8C8"/>
           </a:solidFill>
           <a:ln w="12700">
             <a:solidFill>
-              <a:srgbClr val="E0E0E0"/>
+              <a:srgbClr val="D8E8C8"/>
             </a:solidFill>
             <a:prstDash val="solid"/>
           </a:ln>
@@ -2348,11 +2348,11 @@
             <a:avLst/>
           </a:prstGeom>
           <a:solidFill>
-            <a:srgbClr val="555555"/>
+            <a:srgbClr val="3E5C42"/>
           </a:solidFill>
           <a:ln w="12700">
             <a:solidFill>
-              <a:srgbClr val="555555"/>
+              <a:srgbClr val="3E5C42"/>
             </a:solidFill>
             <a:prstDash val="solid"/>
           </a:ln>
@@ -2375,7 +2375,7 @@
             </a:avLst>
           </a:prstGeom>
           <a:solidFill>
-            <a:srgbClr val="0A0A0A"/>
+            <a:srgbClr val="1F3D26"/>
           </a:solidFill>
           <a:ln w="12700">
             <a:solidFill>
@@ -2412,7 +2412,7 @@
             <a:r>
               <a:rPr lang="en-US" sz="1600" b="1" dirty="0">
                 <a:solidFill>
-                  <a:srgbClr val="FFFFFF"/>
+                  <a:srgbClr val="F0F5EA"/>
                 </a:solidFill>
                 <a:latin typeface="Arial Black" pitchFamily="34" charset="0"/>
                 <a:ea typeface="Arial Black" pitchFamily="34" charset="-122"/>
@@ -2451,7 +2451,7 @@
             <a:r>
               <a:rPr lang="en-US" sz="1150" dirty="0">
                 <a:solidFill>
-                  <a:srgbClr val="B0B0B0"/>
+                  <a:srgbClr val="8FAE8B"/>
                 </a:solidFill>
                 <a:latin typeface="Arial" pitchFamily="34" charset="0"/>
                 <a:ea typeface="Arial" pitchFamily="34" charset="-122"/>
@@ -2490,7 +2490,7 @@
             <a:r>
               <a:rPr lang="en-US" sz="1000" i="1" dirty="0">
                 <a:solidFill>
-                  <a:srgbClr val="8A8A8A"/>
+                  <a:srgbClr val="8FAE8B"/>
                 </a:solidFill>
                 <a:latin typeface="Arial" pitchFamily="34" charset="0"/>
                 <a:ea typeface="Arial" pitchFamily="34" charset="-122"/>
@@ -2517,11 +2517,11 @@
             <a:avLst/>
           </a:prstGeom>
           <a:solidFill>
-            <a:srgbClr val="E0E0E0"/>
+            <a:srgbClr val="D8E8C8"/>
           </a:solidFill>
           <a:ln w="12700">
             <a:solidFill>
-              <a:srgbClr val="E0E0E0"/>
+              <a:srgbClr val="D8E8C8"/>
             </a:solidFill>
             <a:prstDash val="solid"/>
           </a:ln>
@@ -2542,11 +2542,11 @@
             <a:avLst/>
           </a:prstGeom>
           <a:solidFill>
-            <a:srgbClr val="555555"/>
+            <a:srgbClr val="3E5C42"/>
           </a:solidFill>
           <a:ln w="12700">
             <a:solidFill>
-              <a:srgbClr val="555555"/>
+              <a:srgbClr val="3E5C42"/>
             </a:solidFill>
             <a:prstDash val="solid"/>
           </a:ln>
@@ -2569,7 +2569,7 @@
             </a:avLst>
           </a:prstGeom>
           <a:solidFill>
-            <a:srgbClr val="0A0A0A"/>
+            <a:srgbClr val="1F3D26"/>
           </a:solidFill>
           <a:ln w="12700">
             <a:solidFill>
@@ -2606,7 +2606,7 @@
             <a:r>
               <a:rPr lang="en-US" sz="1600" b="1" dirty="0">
                 <a:solidFill>
-                  <a:srgbClr val="FFFFFF"/>
+                  <a:srgbClr val="F0F5EA"/>
                 </a:solidFill>
                 <a:latin typeface="Arial Black" pitchFamily="34" charset="0"/>
                 <a:ea typeface="Arial Black" pitchFamily="34" charset="-122"/>
@@ -2645,7 +2645,7 @@
             <a:r>
               <a:rPr lang="en-US" sz="1150" dirty="0">
                 <a:solidFill>
-                  <a:srgbClr val="B0B0B0"/>
+                  <a:srgbClr val="8FAE8B"/>
                 </a:solidFill>
                 <a:latin typeface="Arial" pitchFamily="34" charset="0"/>
                 <a:ea typeface="Arial" pitchFamily="34" charset="-122"/>
@@ -2684,7 +2684,7 @@
             <a:r>
               <a:rPr lang="en-US" sz="1000" i="1" dirty="0">
                 <a:solidFill>
-                  <a:srgbClr val="8A8A8A"/>
+                  <a:srgbClr val="8FAE8B"/>
                 </a:solidFill>
                 <a:latin typeface="Arial" pitchFamily="34" charset="0"/>
                 <a:ea typeface="Arial" pitchFamily="34" charset="-122"/>
@@ -2711,11 +2711,11 @@
             <a:avLst/>
           </a:prstGeom>
           <a:solidFill>
-            <a:srgbClr val="E0E0E0"/>
+            <a:srgbClr val="D8E8C8"/>
           </a:solidFill>
           <a:ln w="12700">
             <a:solidFill>
-              <a:srgbClr val="E0E0E0"/>
+              <a:srgbClr val="D8E8C8"/>
             </a:solidFill>
             <a:prstDash val="solid"/>
           </a:ln>
@@ -2736,11 +2736,11 @@
             <a:avLst/>
           </a:prstGeom>
           <a:solidFill>
-            <a:srgbClr val="555555"/>
+            <a:srgbClr val="3E5C42"/>
           </a:solidFill>
           <a:ln w="12700">
             <a:solidFill>
-              <a:srgbClr val="555555"/>
+              <a:srgbClr val="3E5C42"/>
             </a:solidFill>
             <a:prstDash val="solid"/>
           </a:ln>
@@ -2763,7 +2763,7 @@
             </a:avLst>
           </a:prstGeom>
           <a:solidFill>
-            <a:srgbClr val="0A0A0A"/>
+            <a:srgbClr val="1F3D26"/>
           </a:solidFill>
           <a:ln w="12700">
             <a:solidFill>
@@ -2800,7 +2800,7 @@
             <a:r>
               <a:rPr lang="en-US" sz="1600" b="1" dirty="0">
                 <a:solidFill>
-                  <a:srgbClr val="FFFFFF"/>
+                  <a:srgbClr val="F0F5EA"/>
                 </a:solidFill>
                 <a:latin typeface="Arial Black" pitchFamily="34" charset="0"/>
                 <a:ea typeface="Arial Black" pitchFamily="34" charset="-122"/>
@@ -2839,7 +2839,7 @@
             <a:r>
               <a:rPr lang="en-US" sz="1150" dirty="0">
                 <a:solidFill>
-                  <a:srgbClr val="B0B0B0"/>
+                  <a:srgbClr val="8FAE8B"/>
                 </a:solidFill>
                 <a:latin typeface="Arial" pitchFamily="34" charset="0"/>
                 <a:ea typeface="Arial" pitchFamily="34" charset="-122"/>
@@ -2878,7 +2878,7 @@
             <a:r>
               <a:rPr lang="en-US" sz="1000" i="1" dirty="0">
                 <a:solidFill>
-                  <a:srgbClr val="8A8A8A"/>
+                  <a:srgbClr val="8FAE8B"/>
                 </a:solidFill>
                 <a:latin typeface="Arial" pitchFamily="34" charset="0"/>
                 <a:ea typeface="Arial" pitchFamily="34" charset="-122"/>
@@ -2917,7 +2917,7 @@
             <a:r>
               <a:rPr lang="en-US" sz="1300" b="1" dirty="0">
                 <a:solidFill>
-                  <a:srgbClr val="0A0A0A"/>
+                  <a:srgbClr val="2C5F2D"/>
                 </a:solidFill>
                 <a:latin typeface="Arial Black" pitchFamily="34" charset="0"/>
                 <a:ea typeface="Arial Black" pitchFamily="34" charset="-122"/>
@@ -2956,7 +2956,7 @@
             <a:r>
               <a:rPr lang="en-US" sz="850" dirty="0">
                 <a:solidFill>
-                  <a:srgbClr val="6E6E6E"/>
+                  <a:srgbClr val="5A6B5A"/>
                 </a:solidFill>
                 <a:latin typeface="Arial" pitchFamily="34" charset="0"/>
                 <a:ea typeface="Arial" pitchFamily="34" charset="-122"/>
@@ -2985,7 +2985,7 @@
     <p:bg>
       <p:bgPr>
         <a:solidFill>
-          <a:srgbClr val="FFFFFF"/>
+          <a:srgbClr val="F0F5EA"/>
         </a:solidFill>
       </p:bgPr>
     </p:bg>
@@ -3030,7 +3030,7 @@
             <a:r>
               <a:rPr lang="en-US" sz="2800" b="1" dirty="0">
                 <a:solidFill>
-                  <a:srgbClr val="E0E0E0"/>
+                  <a:srgbClr val="D8E8C8"/>
                 </a:solidFill>
                 <a:latin typeface="Arial Black" pitchFamily="34" charset="0"/>
                 <a:ea typeface="Arial Black" pitchFamily="34" charset="-122"/>
@@ -3076,7 +3076,7 @@
             <a:r>
               <a:rPr lang="en-US" sz="2800" b="1" dirty="0">
                 <a:solidFill>
-                  <a:srgbClr val="0A0A0A"/>
+                  <a:srgbClr val="2C5F2D"/>
                 </a:solidFill>
                 <a:latin typeface="Arial Black" pitchFamily="34" charset="0"/>
                 <a:ea typeface="Arial Black" pitchFamily="34" charset="-122"/>
@@ -3103,11 +3103,11 @@
             <a:avLst/>
           </a:prstGeom>
           <a:solidFill>
-            <a:srgbClr val="0A0A0A"/>
+            <a:srgbClr val="2C5F2D"/>
           </a:solidFill>
           <a:ln w="12700">
             <a:solidFill>
-              <a:srgbClr val="0A0A0A"/>
+              <a:srgbClr val="2C5F2D"/>
             </a:solidFill>
             <a:prstDash val="solid"/>
           </a:ln>
@@ -3128,11 +3128,11 @@
             <a:avLst/>
           </a:prstGeom>
           <a:solidFill>
-            <a:srgbClr val="E0E0E0"/>
+            <a:srgbClr val="D8E8C8"/>
           </a:solidFill>
           <a:ln w="12700">
             <a:solidFill>
-              <a:srgbClr val="E0E0E0"/>
+              <a:srgbClr val="D8E8C8"/>
             </a:solidFill>
             <a:prstDash val="solid"/>
           </a:ln>
@@ -3155,11 +3155,11 @@
             </a:avLst>
           </a:prstGeom>
           <a:solidFill>
-            <a:srgbClr val="FFFFFF"/>
+            <a:srgbClr val="F0F5EA"/>
           </a:solidFill>
           <a:ln w="25400">
             <a:solidFill>
-              <a:srgbClr val="0A0A0A"/>
+              <a:srgbClr val="2C5F2D"/>
             </a:solidFill>
             <a:prstDash val="solid"/>
           </a:ln>
@@ -3192,7 +3192,7 @@
             <a:r>
               <a:rPr lang="en-US" sz="1300" b="1" dirty="0">
                 <a:solidFill>
-                  <a:srgbClr val="0A0A0A"/>
+                  <a:srgbClr val="2C5F2D"/>
                 </a:solidFill>
                 <a:latin typeface="Arial Black" pitchFamily="34" charset="0"/>
                 <a:ea typeface="Arial Black" pitchFamily="34" charset="-122"/>
@@ -3231,7 +3231,7 @@
             <a:r>
               <a:rPr lang="en-US" sz="1600" b="1" dirty="0">
                 <a:solidFill>
-                  <a:srgbClr val="0A0A0A"/>
+                  <a:srgbClr val="2C5F2D"/>
                 </a:solidFill>
                 <a:latin typeface="Arial Black" pitchFamily="34" charset="0"/>
                 <a:ea typeface="Arial Black" pitchFamily="34" charset="-122"/>
@@ -3270,7 +3270,7 @@
             <a:r>
               <a:rPr lang="en-US" sz="1250" dirty="0">
                 <a:solidFill>
-                  <a:srgbClr val="0A0A0A"/>
+                  <a:srgbClr val="2C5F2D"/>
                 </a:solidFill>
                 <a:latin typeface="Arial" pitchFamily="34" charset="0"/>
                 <a:ea typeface="Arial" pitchFamily="34" charset="-122"/>
@@ -3309,7 +3309,7 @@
             <a:r>
               <a:rPr lang="en-US" sz="1100" dirty="0">
                 <a:solidFill>
-                  <a:srgbClr val="0A0A0A"/>
+                  <a:srgbClr val="2C5F2D"/>
                 </a:solidFill>
                 <a:latin typeface="Arial" pitchFamily="34" charset="0"/>
                 <a:ea typeface="Arial" pitchFamily="34" charset="-122"/>
@@ -3336,11 +3336,11 @@
             <a:avLst/>
           </a:prstGeom>
           <a:solidFill>
-            <a:srgbClr val="E0E0E0"/>
+            <a:srgbClr val="D8E8C8"/>
           </a:solidFill>
           <a:ln w="12700">
             <a:solidFill>
-              <a:srgbClr val="E0E0E0"/>
+              <a:srgbClr val="D8E8C8"/>
             </a:solidFill>
             <a:prstDash val="solid"/>
           </a:ln>
@@ -3363,11 +3363,11 @@
             </a:avLst>
           </a:prstGeom>
           <a:solidFill>
-            <a:srgbClr val="FFFFFF"/>
+            <a:srgbClr val="F0F5EA"/>
           </a:solidFill>
           <a:ln w="25400">
             <a:solidFill>
-              <a:srgbClr val="0A0A0A"/>
+              <a:srgbClr val="2C5F2D"/>
             </a:solidFill>
             <a:prstDash val="solid"/>
           </a:ln>
@@ -3400,7 +3400,7 @@
             <a:r>
               <a:rPr lang="en-US" sz="1300" b="1" dirty="0">
                 <a:solidFill>
-                  <a:srgbClr val="0A0A0A"/>
+                  <a:srgbClr val="2C5F2D"/>
                 </a:solidFill>
                 <a:latin typeface="Arial Black" pitchFamily="34" charset="0"/>
                 <a:ea typeface="Arial Black" pitchFamily="34" charset="-122"/>
@@ -3439,7 +3439,7 @@
             <a:r>
               <a:rPr lang="en-US" sz="1200" dirty="0">
                 <a:solidFill>
-                  <a:srgbClr val="0A0A0A"/>
+                  <a:srgbClr val="2C5F2D"/>
                 </a:solidFill>
                 <a:latin typeface="Arial" pitchFamily="34" charset="0"/>
                 <a:ea typeface="Arial" pitchFamily="34" charset="-122"/>
@@ -3478,7 +3478,7 @@
             <a:r>
               <a:rPr lang="en-US" sz="1200" dirty="0">
                 <a:solidFill>
-                  <a:srgbClr val="0A0A0A"/>
+                  <a:srgbClr val="2C5F2D"/>
                 </a:solidFill>
                 <a:latin typeface="Arial" pitchFamily="34" charset="0"/>
                 <a:ea typeface="Arial" pitchFamily="34" charset="-122"/>
@@ -3517,7 +3517,7 @@
             <a:r>
               <a:rPr lang="en-US" sz="1200" dirty="0">
                 <a:solidFill>
-                  <a:srgbClr val="0A0A0A"/>
+                  <a:srgbClr val="2C5F2D"/>
                 </a:solidFill>
                 <a:latin typeface="Arial" pitchFamily="34" charset="0"/>
                 <a:ea typeface="Arial" pitchFamily="34" charset="-122"/>
@@ -3556,7 +3556,7 @@
             <a:r>
               <a:rPr lang="en-US" sz="1450" b="1" dirty="0">
                 <a:solidFill>
-                  <a:srgbClr val="E0E0E0"/>
+                  <a:srgbClr val="D8E8C8"/>
                 </a:solidFill>
                 <a:latin typeface="Arial Black" pitchFamily="34" charset="0"/>
                 <a:ea typeface="Arial Black" pitchFamily="34" charset="-122"/>
@@ -3602,7 +3602,7 @@
             <a:r>
               <a:rPr lang="en-US" sz="1450" b="1" dirty="0">
                 <a:solidFill>
-                  <a:srgbClr val="0A0A0A"/>
+                  <a:srgbClr val="2C5F2D"/>
                 </a:solidFill>
                 <a:latin typeface="Arial Black" pitchFamily="34" charset="0"/>
                 <a:ea typeface="Arial Black" pitchFamily="34" charset="-122"/>
@@ -3641,7 +3641,7 @@
             <a:r>
               <a:rPr lang="en-US" sz="1000" i="1" dirty="0">
                 <a:solidFill>
-                  <a:srgbClr val="6E6E6E"/>
+                  <a:srgbClr val="5A6B5A"/>
                 </a:solidFill>
                 <a:latin typeface="Arial" pitchFamily="34" charset="0"/>
                 <a:ea typeface="Arial" pitchFamily="34" charset="-122"/>
@@ -3680,7 +3680,7 @@
             <a:r>
               <a:rPr lang="en-US" sz="850" dirty="0">
                 <a:solidFill>
-                  <a:srgbClr val="6E6E6E"/>
+                  <a:srgbClr val="5A6B5A"/>
                 </a:solidFill>
                 <a:latin typeface="Arial" pitchFamily="34" charset="0"/>
                 <a:ea typeface="Arial" pitchFamily="34" charset="-122"/>
@@ -3709,7 +3709,7 @@
     <p:bg>
       <p:bgPr>
         <a:solidFill>
-          <a:srgbClr val="FFFFFF"/>
+          <a:srgbClr val="F0F5EA"/>
         </a:solidFill>
       </p:bgPr>
     </p:bg>
@@ -3754,7 +3754,7 @@
             <a:r>
               <a:rPr lang="en-US" sz="2800" b="1" dirty="0">
                 <a:solidFill>
-                  <a:srgbClr val="E0E0E0"/>
+                  <a:srgbClr val="D8E8C8"/>
                 </a:solidFill>
                 <a:latin typeface="Arial Black" pitchFamily="34" charset="0"/>
                 <a:ea typeface="Arial Black" pitchFamily="34" charset="-122"/>
@@ -3800,7 +3800,7 @@
             <a:r>
               <a:rPr lang="en-US" sz="2800" b="1" dirty="0">
                 <a:solidFill>
-                  <a:srgbClr val="0A0A0A"/>
+                  <a:srgbClr val="2C5F2D"/>
                 </a:solidFill>
                 <a:latin typeface="Arial Black" pitchFamily="34" charset="0"/>
                 <a:ea typeface="Arial Black" pitchFamily="34" charset="-122"/>
@@ -3827,11 +3827,11 @@
             <a:avLst/>
           </a:prstGeom>
           <a:solidFill>
-            <a:srgbClr val="0A0A0A"/>
+            <a:srgbClr val="2C5F2D"/>
           </a:solidFill>
           <a:ln w="12700">
             <a:solidFill>
-              <a:srgbClr val="0A0A0A"/>
+              <a:srgbClr val="2C5F2D"/>
             </a:solidFill>
             <a:prstDash val="solid"/>
           </a:ln>
@@ -3852,11 +3852,11 @@
             <a:avLst/>
           </a:prstGeom>
           <a:solidFill>
-            <a:srgbClr val="E0E0E0"/>
+            <a:srgbClr val="D8E8C8"/>
           </a:solidFill>
           <a:ln w="12700">
             <a:solidFill>
-              <a:srgbClr val="E0E0E0"/>
+              <a:srgbClr val="D8E8C8"/>
             </a:solidFill>
             <a:prstDash val="solid"/>
           </a:ln>
@@ -3879,11 +3879,11 @@
             </a:avLst>
           </a:prstGeom>
           <a:solidFill>
-            <a:srgbClr val="FFFFFF"/>
+            <a:srgbClr val="F0F5EA"/>
           </a:solidFill>
           <a:ln w="19050">
             <a:solidFill>
-              <a:srgbClr val="0A0A0A"/>
+              <a:srgbClr val="2C5F2D"/>
             </a:solidFill>
             <a:prstDash val="solid"/>
           </a:ln>
@@ -3904,7 +3904,7 @@
             <a:avLst/>
           </a:prstGeom>
           <a:solidFill>
-            <a:srgbClr val="0A0A0A"/>
+            <a:srgbClr val="1F3D26"/>
           </a:solidFill>
           <a:ln/>
         </p:spPr>
@@ -3936,7 +3936,7 @@
             <a:r>
               <a:rPr lang="en-US" sz="2000" b="1" dirty="0">
                 <a:solidFill>
-                  <a:srgbClr val="FFFFFF"/>
+                  <a:srgbClr val="F0F5EA"/>
                 </a:solidFill>
                 <a:latin typeface="Arial" pitchFamily="34" charset="0"/>
                 <a:ea typeface="Arial" pitchFamily="34" charset="-122"/>
@@ -3975,7 +3975,7 @@
             <a:r>
               <a:rPr lang="en-US" sz="1500" b="1" dirty="0">
                 <a:solidFill>
-                  <a:srgbClr val="0A0A0A"/>
+                  <a:srgbClr val="2C5F2D"/>
                 </a:solidFill>
                 <a:latin typeface="Arial Black" pitchFamily="34" charset="0"/>
                 <a:ea typeface="Arial Black" pitchFamily="34" charset="-122"/>
@@ -4014,7 +4014,7 @@
             <a:r>
               <a:rPr lang="en-US" sz="1150" dirty="0">
                 <a:solidFill>
-                  <a:srgbClr val="6E6E6E"/>
+                  <a:srgbClr val="5A6B5A"/>
                 </a:solidFill>
                 <a:latin typeface="Arial" pitchFamily="34" charset="0"/>
                 <a:ea typeface="Arial" pitchFamily="34" charset="-122"/>
@@ -4053,7 +4053,7 @@
             <a:r>
               <a:rPr lang="en-US" sz="950" i="1" dirty="0">
                 <a:solidFill>
-                  <a:srgbClr val="6E6E6E"/>
+                  <a:srgbClr val="5A6B5A"/>
                 </a:solidFill>
                 <a:latin typeface="Arial" pitchFamily="34" charset="0"/>
                 <a:ea typeface="Arial" pitchFamily="34" charset="-122"/>
@@ -4080,11 +4080,11 @@
             <a:avLst/>
           </a:prstGeom>
           <a:solidFill>
-            <a:srgbClr val="E0E0E0"/>
+            <a:srgbClr val="D8E8C8"/>
           </a:solidFill>
           <a:ln w="12700">
             <a:solidFill>
-              <a:srgbClr val="E0E0E0"/>
+              <a:srgbClr val="D8E8C8"/>
             </a:solidFill>
             <a:prstDash val="solid"/>
           </a:ln>
@@ -4107,11 +4107,11 @@
             </a:avLst>
           </a:prstGeom>
           <a:solidFill>
-            <a:srgbClr val="FFFFFF"/>
+            <a:srgbClr val="F0F5EA"/>
           </a:solidFill>
           <a:ln w="19050">
             <a:solidFill>
-              <a:srgbClr val="0A0A0A"/>
+              <a:srgbClr val="2C5F2D"/>
             </a:solidFill>
             <a:prstDash val="solid"/>
           </a:ln>
@@ -4132,7 +4132,7 @@
             <a:avLst/>
           </a:prstGeom>
           <a:solidFill>
-            <a:srgbClr val="0A0A0A"/>
+            <a:srgbClr val="1F3D26"/>
           </a:solidFill>
           <a:ln/>
         </p:spPr>
@@ -4164,7 +4164,7 @@
             <a:r>
               <a:rPr lang="en-US" sz="2000" b="1" dirty="0">
                 <a:solidFill>
-                  <a:srgbClr val="FFFFFF"/>
+                  <a:srgbClr val="F0F5EA"/>
                 </a:solidFill>
                 <a:latin typeface="Arial" pitchFamily="34" charset="0"/>
                 <a:ea typeface="Arial" pitchFamily="34" charset="-122"/>
@@ -4203,7 +4203,7 @@
             <a:r>
               <a:rPr lang="en-US" sz="1500" b="1" dirty="0">
                 <a:solidFill>
-                  <a:srgbClr val="0A0A0A"/>
+                  <a:srgbClr val="2C5F2D"/>
                 </a:solidFill>
                 <a:latin typeface="Arial Black" pitchFamily="34" charset="0"/>
                 <a:ea typeface="Arial Black" pitchFamily="34" charset="-122"/>
@@ -4242,7 +4242,7 @@
             <a:r>
               <a:rPr lang="en-US" sz="1150" dirty="0">
                 <a:solidFill>
-                  <a:srgbClr val="6E6E6E"/>
+                  <a:srgbClr val="5A6B5A"/>
                 </a:solidFill>
                 <a:latin typeface="Arial" pitchFamily="34" charset="0"/>
                 <a:ea typeface="Arial" pitchFamily="34" charset="-122"/>
@@ -4281,7 +4281,7 @@
             <a:r>
               <a:rPr lang="en-US" sz="950" i="1" dirty="0">
                 <a:solidFill>
-                  <a:srgbClr val="6E6E6E"/>
+                  <a:srgbClr val="5A6B5A"/>
                 </a:solidFill>
                 <a:latin typeface="Arial" pitchFamily="34" charset="0"/>
                 <a:ea typeface="Arial" pitchFamily="34" charset="-122"/>
@@ -4308,11 +4308,11 @@
             <a:avLst/>
           </a:prstGeom>
           <a:solidFill>
-            <a:srgbClr val="E0E0E0"/>
+            <a:srgbClr val="D8E8C8"/>
           </a:solidFill>
           <a:ln w="12700">
             <a:solidFill>
-              <a:srgbClr val="E0E0E0"/>
+              <a:srgbClr val="D8E8C8"/>
             </a:solidFill>
             <a:prstDash val="solid"/>
           </a:ln>
@@ -4335,11 +4335,11 @@
             </a:avLst>
           </a:prstGeom>
           <a:solidFill>
-            <a:srgbClr val="FFFFFF"/>
+            <a:srgbClr val="F0F5EA"/>
           </a:solidFill>
           <a:ln w="19050">
             <a:solidFill>
-              <a:srgbClr val="0A0A0A"/>
+              <a:srgbClr val="2C5F2D"/>
             </a:solidFill>
             <a:prstDash val="solid"/>
           </a:ln>
@@ -4360,7 +4360,7 @@
             <a:avLst/>
           </a:prstGeom>
           <a:solidFill>
-            <a:srgbClr val="0A0A0A"/>
+            <a:srgbClr val="1F3D26"/>
           </a:solidFill>
           <a:ln/>
         </p:spPr>
@@ -4392,7 +4392,7 @@
             <a:r>
               <a:rPr lang="en-US" sz="2000" b="1" dirty="0">
                 <a:solidFill>
-                  <a:srgbClr val="FFFFFF"/>
+                  <a:srgbClr val="F0F5EA"/>
                 </a:solidFill>
                 <a:latin typeface="Arial" pitchFamily="34" charset="0"/>
                 <a:ea typeface="Arial" pitchFamily="34" charset="-122"/>
@@ -4431,7 +4431,7 @@
             <a:r>
               <a:rPr lang="en-US" sz="1500" b="1" dirty="0">
                 <a:solidFill>
-                  <a:srgbClr val="0A0A0A"/>
+                  <a:srgbClr val="2C5F2D"/>
                 </a:solidFill>
                 <a:latin typeface="Arial Black" pitchFamily="34" charset="0"/>
                 <a:ea typeface="Arial Black" pitchFamily="34" charset="-122"/>
@@ -4470,7 +4470,7 @@
             <a:r>
               <a:rPr lang="en-US" sz="1150" dirty="0">
                 <a:solidFill>
-                  <a:srgbClr val="6E6E6E"/>
+                  <a:srgbClr val="5A6B5A"/>
                 </a:solidFill>
                 <a:latin typeface="Arial" pitchFamily="34" charset="0"/>
                 <a:ea typeface="Arial" pitchFamily="34" charset="-122"/>
@@ -4509,7 +4509,7 @@
             <a:r>
               <a:rPr lang="en-US" sz="950" i="1" dirty="0">
                 <a:solidFill>
-                  <a:srgbClr val="6E6E6E"/>
+                  <a:srgbClr val="5A6B5A"/>
                 </a:solidFill>
                 <a:latin typeface="Arial" pitchFamily="34" charset="0"/>
                 <a:ea typeface="Arial" pitchFamily="34" charset="-122"/>
@@ -4548,7 +4548,7 @@
             <a:r>
               <a:rPr lang="en-US" sz="1300" b="1" dirty="0">
                 <a:solidFill>
-                  <a:srgbClr val="0A0A0A"/>
+                  <a:srgbClr val="2C5F2D"/>
                 </a:solidFill>
                 <a:latin typeface="Arial Black" pitchFamily="34" charset="0"/>
                 <a:ea typeface="Arial Black" pitchFamily="34" charset="-122"/>
@@ -4587,7 +4587,7 @@
             <a:r>
               <a:rPr lang="en-US" sz="850" dirty="0">
                 <a:solidFill>
-                  <a:srgbClr val="6E6E6E"/>
+                  <a:srgbClr val="5A6B5A"/>
                 </a:solidFill>
                 <a:latin typeface="Arial" pitchFamily="34" charset="0"/>
                 <a:ea typeface="Arial" pitchFamily="34" charset="-122"/>
@@ -4616,7 +4616,7 @@
     <p:bg>
       <p:bgPr>
         <a:solidFill>
-          <a:srgbClr val="0A0A0A"/>
+          <a:srgbClr val="1F3D26"/>
         </a:solidFill>
       </p:bgPr>
     </p:bg>
@@ -4661,7 +4661,7 @@
             <a:r>
               <a:rPr lang="en-US" sz="4000" b="1" dirty="0">
                 <a:solidFill>
-                  <a:srgbClr val="2A2A2A"/>
+                  <a:srgbClr val="142B1A"/>
                 </a:solidFill>
                 <a:latin typeface="Arial Black" pitchFamily="34" charset="0"/>
                 <a:ea typeface="Arial Black" pitchFamily="34" charset="-122"/>
@@ -4700,7 +4700,7 @@
             <a:r>
               <a:rPr lang="en-US" sz="4000" b="1" dirty="0">
                 <a:solidFill>
-                  <a:srgbClr val="FFFFFF"/>
+                  <a:srgbClr val="F0F5EA"/>
                 </a:solidFill>
                 <a:latin typeface="Arial Black" pitchFamily="34" charset="0"/>
                 <a:ea typeface="Arial Black" pitchFamily="34" charset="-122"/>
@@ -4739,7 +4739,7 @@
             <a:r>
               <a:rPr lang="en-US" sz="1500" dirty="0">
                 <a:solidFill>
-                  <a:srgbClr val="B0B0B0"/>
+                  <a:srgbClr val="8FAE8B"/>
                 </a:solidFill>
                 <a:latin typeface="Arial" pitchFamily="34" charset="0"/>
                 <a:ea typeface="Arial" pitchFamily="34" charset="-122"/>
@@ -4766,11 +4766,11 @@
             <a:avLst/>
           </a:prstGeom>
           <a:solidFill>
-            <a:srgbClr val="2A2A2A"/>
+            <a:srgbClr val="142B1A"/>
           </a:solidFill>
           <a:ln w="12700">
             <a:solidFill>
-              <a:srgbClr val="2A2A2A"/>
+              <a:srgbClr val="142B1A"/>
             </a:solidFill>
             <a:prstDash val="solid"/>
           </a:ln>
@@ -4793,11 +4793,11 @@
             </a:avLst>
           </a:prstGeom>
           <a:solidFill>
-            <a:srgbClr val="161616"/>
+            <a:srgbClr val="2A4A33"/>
           </a:solidFill>
           <a:ln w="12700">
             <a:solidFill>
-              <a:srgbClr val="2A2A2A"/>
+              <a:srgbClr val="142B1A"/>
             </a:solidFill>
             <a:prstDash val="solid"/>
           </a:ln>
@@ -4818,11 +4818,11 @@
             <a:avLst/>
           </a:prstGeom>
           <a:solidFill>
-            <a:srgbClr val="FF5A1F"/>
+            <a:srgbClr val="97BC62"/>
           </a:solidFill>
           <a:ln w="12700">
             <a:solidFill>
-              <a:srgbClr val="FF5A1F"/>
+              <a:srgbClr val="97BC62"/>
             </a:solidFill>
             <a:prstDash val="solid"/>
           </a:ln>
@@ -4855,7 +4855,7 @@
             <a:r>
               <a:rPr lang="en-US" sz="1200" dirty="0">
                 <a:solidFill>
-                  <a:srgbClr val="FFFFFF"/>
+                  <a:srgbClr val="F0F5EA"/>
                 </a:solidFill>
                 <a:latin typeface="Arial" pitchFamily="34" charset="0"/>
                 <a:ea typeface="Arial" pitchFamily="34" charset="-122"/>
@@ -4894,7 +4894,7 @@
             <a:r>
               <a:rPr lang="en-US" sz="1250" dirty="0">
                 <a:solidFill>
-                  <a:srgbClr val="B0B0B0"/>
+                  <a:srgbClr val="8FAE8B"/>
                 </a:solidFill>
                 <a:latin typeface="Arial" pitchFamily="34" charset="0"/>
                 <a:ea typeface="Arial" pitchFamily="34" charset="-122"/>
@@ -4923,7 +4923,7 @@
     <p:bg>
       <p:bgPr>
         <a:solidFill>
-          <a:srgbClr val="FFFFFF"/>
+          <a:srgbClr val="F0F5EA"/>
         </a:solidFill>
       </p:bgPr>
     </p:bg>
@@ -4968,7 +4968,7 @@
             <a:r>
               <a:rPr lang="en-US" sz="2800" b="1" dirty="0">
                 <a:solidFill>
-                  <a:srgbClr val="E0E0E0"/>
+                  <a:srgbClr val="D8E8C8"/>
                 </a:solidFill>
                 <a:latin typeface="Arial Black" pitchFamily="34" charset="0"/>
                 <a:ea typeface="Arial Black" pitchFamily="34" charset="-122"/>
@@ -5014,7 +5014,7 @@
             <a:r>
               <a:rPr lang="en-US" sz="2800" b="1" dirty="0">
                 <a:solidFill>
-                  <a:srgbClr val="0A0A0A"/>
+                  <a:srgbClr val="2C5F2D"/>
                 </a:solidFill>
                 <a:latin typeface="Arial Black" pitchFamily="34" charset="0"/>
                 <a:ea typeface="Arial Black" pitchFamily="34" charset="-122"/>
@@ -5041,11 +5041,11 @@
             <a:avLst/>
           </a:prstGeom>
           <a:solidFill>
-            <a:srgbClr val="0A0A0A"/>
+            <a:srgbClr val="2C5F2D"/>
           </a:solidFill>
           <a:ln w="12700">
             <a:solidFill>
-              <a:srgbClr val="0A0A0A"/>
+              <a:srgbClr val="2C5F2D"/>
             </a:solidFill>
             <a:prstDash val="solid"/>
           </a:ln>
@@ -5066,11 +5066,11 @@
             <a:avLst/>
           </a:prstGeom>
           <a:solidFill>
-            <a:srgbClr val="E0E0E0"/>
+            <a:srgbClr val="D8E8C8"/>
           </a:solidFill>
           <a:ln w="12700">
             <a:solidFill>
-              <a:srgbClr val="E0E0E0"/>
+              <a:srgbClr val="D8E8C8"/>
             </a:solidFill>
             <a:prstDash val="solid"/>
           </a:ln>
@@ -5093,7 +5093,7 @@
             </a:avLst>
           </a:prstGeom>
           <a:solidFill>
-            <a:srgbClr val="0A0A0A"/>
+            <a:srgbClr val="1F3D26"/>
           </a:solidFill>
           <a:ln w="12700">
             <a:solidFill>
@@ -5118,11 +5118,11 @@
             <a:avLst/>
           </a:prstGeom>
           <a:solidFill>
-            <a:srgbClr val="FF5A1F"/>
+            <a:srgbClr val="97BC62"/>
           </a:solidFill>
           <a:ln w="12700">
             <a:solidFill>
-              <a:srgbClr val="FF5A1F"/>
+              <a:srgbClr val="97BC62"/>
             </a:solidFill>
             <a:prstDash val="solid"/>
           </a:ln>
@@ -5155,7 +5155,7 @@
             <a:r>
               <a:rPr lang="en-US" sz="1450" i="1" dirty="0">
                 <a:solidFill>
-                  <a:srgbClr val="FFFFFF"/>
+                  <a:srgbClr val="F0F5EA"/>
                 </a:solidFill>
                 <a:latin typeface="Arial" pitchFamily="34" charset="0"/>
                 <a:ea typeface="Arial" pitchFamily="34" charset="-122"/>
@@ -5182,11 +5182,11 @@
             <a:avLst/>
           </a:prstGeom>
           <a:solidFill>
-            <a:srgbClr val="E0E0E0"/>
+            <a:srgbClr val="D8E8C8"/>
           </a:solidFill>
           <a:ln w="12700">
             <a:solidFill>
-              <a:srgbClr val="E0E0E0"/>
+              <a:srgbClr val="D8E8C8"/>
             </a:solidFill>
             <a:prstDash val="solid"/>
           </a:ln>
@@ -5207,11 +5207,11 @@
             <a:avLst/>
           </a:prstGeom>
           <a:solidFill>
-            <a:srgbClr val="555555"/>
+            <a:srgbClr val="3E5C42"/>
           </a:solidFill>
           <a:ln w="12700">
             <a:solidFill>
-              <a:srgbClr val="555555"/>
+              <a:srgbClr val="3E5C42"/>
             </a:solidFill>
             <a:prstDash val="solid"/>
           </a:ln>
@@ -5234,7 +5234,7 @@
             </a:avLst>
           </a:prstGeom>
           <a:solidFill>
-            <a:srgbClr val="0A0A0A"/>
+            <a:srgbClr val="1F3D26"/>
           </a:solidFill>
           <a:ln w="12700">
             <a:solidFill>
@@ -5259,11 +5259,11 @@
             <a:avLst/>
           </a:prstGeom>
           <a:solidFill>
-            <a:srgbClr val="FF5A1F"/>
+            <a:srgbClr val="97BC62"/>
           </a:solidFill>
           <a:ln w="12700">
             <a:solidFill>
-              <a:srgbClr val="FF5A1F"/>
+              <a:srgbClr val="97BC62"/>
             </a:solidFill>
             <a:prstDash val="solid"/>
           </a:ln>
@@ -5296,7 +5296,7 @@
             <a:r>
               <a:rPr lang="en-US" sz="3200" b="1" dirty="0">
                 <a:solidFill>
-                  <a:srgbClr val="FFFFFF"/>
+                  <a:srgbClr val="F0F5EA"/>
                 </a:solidFill>
                 <a:latin typeface="Arial Black" pitchFamily="34" charset="0"/>
                 <a:ea typeface="Arial Black" pitchFamily="34" charset="-122"/>
@@ -5335,7 +5335,7 @@
             <a:r>
               <a:rPr lang="en-US" sz="1000" dirty="0">
                 <a:solidFill>
-                  <a:srgbClr val="B0B0B0"/>
+                  <a:srgbClr val="8FAE8B"/>
                 </a:solidFill>
                 <a:latin typeface="Arial" pitchFamily="34" charset="0"/>
                 <a:ea typeface="Arial" pitchFamily="34" charset="-122"/>
@@ -5362,11 +5362,11 @@
             <a:avLst/>
           </a:prstGeom>
           <a:solidFill>
-            <a:srgbClr val="E0E0E0"/>
+            <a:srgbClr val="D8E8C8"/>
           </a:solidFill>
           <a:ln w="12700">
             <a:solidFill>
-              <a:srgbClr val="E0E0E0"/>
+              <a:srgbClr val="D8E8C8"/>
             </a:solidFill>
             <a:prstDash val="solid"/>
           </a:ln>
@@ -5387,11 +5387,11 @@
             <a:avLst/>
           </a:prstGeom>
           <a:solidFill>
-            <a:srgbClr val="555555"/>
+            <a:srgbClr val="3E5C42"/>
           </a:solidFill>
           <a:ln w="12700">
             <a:solidFill>
-              <a:srgbClr val="555555"/>
+              <a:srgbClr val="3E5C42"/>
             </a:solidFill>
             <a:prstDash val="solid"/>
           </a:ln>
@@ -5414,7 +5414,7 @@
             </a:avLst>
           </a:prstGeom>
           <a:solidFill>
-            <a:srgbClr val="0A0A0A"/>
+            <a:srgbClr val="1F3D26"/>
           </a:solidFill>
           <a:ln w="12700">
             <a:solidFill>
@@ -5439,11 +5439,11 @@
             <a:avLst/>
           </a:prstGeom>
           <a:solidFill>
-            <a:srgbClr val="FF5A1F"/>
+            <a:srgbClr val="97BC62"/>
           </a:solidFill>
           <a:ln w="12700">
             <a:solidFill>
-              <a:srgbClr val="FF5A1F"/>
+              <a:srgbClr val="97BC62"/>
             </a:solidFill>
             <a:prstDash val="solid"/>
           </a:ln>
@@ -5476,7 +5476,7 @@
             <a:r>
               <a:rPr lang="en-US" sz="3200" b="1" dirty="0">
                 <a:solidFill>
-                  <a:srgbClr val="FFFFFF"/>
+                  <a:srgbClr val="F0F5EA"/>
                 </a:solidFill>
                 <a:latin typeface="Arial Black" pitchFamily="34" charset="0"/>
                 <a:ea typeface="Arial Black" pitchFamily="34" charset="-122"/>
@@ -5515,7 +5515,7 @@
             <a:r>
               <a:rPr lang="en-US" sz="1000" dirty="0">
                 <a:solidFill>
-                  <a:srgbClr val="B0B0B0"/>
+                  <a:srgbClr val="8FAE8B"/>
                 </a:solidFill>
                 <a:latin typeface="Arial" pitchFamily="34" charset="0"/>
                 <a:ea typeface="Arial" pitchFamily="34" charset="-122"/>
@@ -5542,11 +5542,11 @@
             <a:avLst/>
           </a:prstGeom>
           <a:solidFill>
-            <a:srgbClr val="E0E0E0"/>
+            <a:srgbClr val="D8E8C8"/>
           </a:solidFill>
           <a:ln w="12700">
             <a:solidFill>
-              <a:srgbClr val="E0E0E0"/>
+              <a:srgbClr val="D8E8C8"/>
             </a:solidFill>
             <a:prstDash val="solid"/>
           </a:ln>
@@ -5567,11 +5567,11 @@
             <a:avLst/>
           </a:prstGeom>
           <a:solidFill>
-            <a:srgbClr val="555555"/>
+            <a:srgbClr val="3E5C42"/>
           </a:solidFill>
           <a:ln w="12700">
             <a:solidFill>
-              <a:srgbClr val="555555"/>
+              <a:srgbClr val="3E5C42"/>
             </a:solidFill>
             <a:prstDash val="solid"/>
           </a:ln>
@@ -5594,7 +5594,7 @@
             </a:avLst>
           </a:prstGeom>
           <a:solidFill>
-            <a:srgbClr val="0A0A0A"/>
+            <a:srgbClr val="1F3D26"/>
           </a:solidFill>
           <a:ln w="12700">
             <a:solidFill>
@@ -5619,11 +5619,11 @@
             <a:avLst/>
           </a:prstGeom>
           <a:solidFill>
-            <a:srgbClr val="FF5A1F"/>
+            <a:srgbClr val="97BC62"/>
           </a:solidFill>
           <a:ln w="12700">
             <a:solidFill>
-              <a:srgbClr val="FF5A1F"/>
+              <a:srgbClr val="97BC62"/>
             </a:solidFill>
             <a:prstDash val="solid"/>
           </a:ln>
@@ -5656,7 +5656,7 @@
             <a:r>
               <a:rPr lang="en-US" sz="3200" b="1" dirty="0">
                 <a:solidFill>
-                  <a:srgbClr val="FFFFFF"/>
+                  <a:srgbClr val="F0F5EA"/>
                 </a:solidFill>
                 <a:latin typeface="Arial Black" pitchFamily="34" charset="0"/>
                 <a:ea typeface="Arial Black" pitchFamily="34" charset="-122"/>
@@ -5695,7 +5695,7 @@
             <a:r>
               <a:rPr lang="en-US" sz="1000" dirty="0">
                 <a:solidFill>
-                  <a:srgbClr val="B0B0B0"/>
+                  <a:srgbClr val="8FAE8B"/>
                 </a:solidFill>
                 <a:latin typeface="Arial" pitchFamily="34" charset="0"/>
                 <a:ea typeface="Arial" pitchFamily="34" charset="-122"/>
@@ -5734,7 +5734,7 @@
             <a:r>
               <a:rPr lang="en-US" sz="1700" b="1" dirty="0">
                 <a:solidFill>
-                  <a:srgbClr val="E0E0E0"/>
+                  <a:srgbClr val="D8E8C8"/>
                 </a:solidFill>
                 <a:latin typeface="Arial Black" pitchFamily="34" charset="0"/>
                 <a:ea typeface="Arial Black" pitchFamily="34" charset="-122"/>
@@ -5780,7 +5780,7 @@
             <a:r>
               <a:rPr lang="en-US" sz="1700" b="1" dirty="0">
                 <a:solidFill>
-                  <a:srgbClr val="0A0A0A"/>
+                  <a:srgbClr val="2C5F2D"/>
                 </a:solidFill>
                 <a:latin typeface="Arial Black" pitchFamily="34" charset="0"/>
                 <a:ea typeface="Arial Black" pitchFamily="34" charset="-122"/>
@@ -5819,7 +5819,7 @@
             <a:r>
               <a:rPr lang="en-US" sz="850" dirty="0">
                 <a:solidFill>
-                  <a:srgbClr val="6E6E6E"/>
+                  <a:srgbClr val="5A6B5A"/>
                 </a:solidFill>
                 <a:latin typeface="Arial" pitchFamily="34" charset="0"/>
                 <a:ea typeface="Arial" pitchFamily="34" charset="-122"/>
@@ -5848,7 +5848,7 @@
     <p:bg>
       <p:bgPr>
         <a:solidFill>
-          <a:srgbClr val="0A0A0A"/>
+          <a:srgbClr val="1F3D26"/>
         </a:solidFill>
       </p:bgPr>
     </p:bg>
@@ -5893,7 +5893,7 @@
             <a:r>
               <a:rPr lang="en-US" sz="3000" b="1" dirty="0">
                 <a:solidFill>
-                  <a:srgbClr val="2A2A2A"/>
+                  <a:srgbClr val="142B1A"/>
                 </a:solidFill>
                 <a:latin typeface="Arial Black" pitchFamily="34" charset="0"/>
                 <a:ea typeface="Arial Black" pitchFamily="34" charset="-122"/>
@@ -5932,7 +5932,7 @@
             <a:r>
               <a:rPr lang="en-US" sz="3000" b="1" dirty="0">
                 <a:solidFill>
-                  <a:srgbClr val="FFFFFF"/>
+                  <a:srgbClr val="F0F5EA"/>
                 </a:solidFill>
                 <a:latin typeface="Arial Black" pitchFamily="34" charset="0"/>
                 <a:ea typeface="Arial Black" pitchFamily="34" charset="-122"/>
@@ -5959,11 +5959,11 @@
             <a:avLst/>
           </a:prstGeom>
           <a:solidFill>
-            <a:srgbClr val="B0B0B0"/>
+            <a:srgbClr val="8FAE8B"/>
           </a:solidFill>
           <a:ln w="12700">
             <a:solidFill>
-              <a:srgbClr val="B0B0B0"/>
+              <a:srgbClr val="8FAE8B"/>
             </a:solidFill>
             <a:prstDash val="solid"/>
           </a:ln>
@@ -5984,11 +5984,11 @@
             <a:avLst/>
           </a:prstGeom>
           <a:solidFill>
-            <a:srgbClr val="2A2A2A"/>
+            <a:srgbClr val="142B1A"/>
           </a:solidFill>
           <a:ln w="12700">
             <a:solidFill>
-              <a:srgbClr val="2A2A2A"/>
+              <a:srgbClr val="142B1A"/>
             </a:solidFill>
             <a:prstDash val="solid"/>
           </a:ln>
@@ -6009,11 +6009,11 @@
             <a:avLst/>
           </a:prstGeom>
           <a:solidFill>
-            <a:srgbClr val="555555"/>
+            <a:srgbClr val="3E5C42"/>
           </a:solidFill>
           <a:ln w="12700">
             <a:solidFill>
-              <a:srgbClr val="555555"/>
+              <a:srgbClr val="3E5C42"/>
             </a:solidFill>
             <a:prstDash val="solid"/>
           </a:ln>
@@ -6036,11 +6036,11 @@
             </a:avLst>
           </a:prstGeom>
           <a:solidFill>
-            <a:srgbClr val="161616"/>
+            <a:srgbClr val="2A4A33"/>
           </a:solidFill>
           <a:ln w="12700">
             <a:solidFill>
-              <a:srgbClr val="2A2A2A"/>
+              <a:srgbClr val="142B1A"/>
             </a:solidFill>
             <a:prstDash val="solid"/>
           </a:ln>
@@ -6073,7 +6073,7 @@
             <a:r>
               <a:rPr lang="en-US" sz="4400" b="1" dirty="0">
                 <a:solidFill>
-                  <a:srgbClr val="FFFFFF"/>
+                  <a:srgbClr val="F0F5EA"/>
                 </a:solidFill>
                 <a:latin typeface="Arial Black" pitchFamily="34" charset="0"/>
                 <a:ea typeface="Arial Black" pitchFamily="34" charset="-122"/>
@@ -6112,7 +6112,7 @@
             <a:r>
               <a:rPr lang="en-US" sz="950" dirty="0">
                 <a:solidFill>
-                  <a:srgbClr val="B0B0B0"/>
+                  <a:srgbClr val="8FAE8B"/>
                 </a:solidFill>
                 <a:latin typeface="Arial" pitchFamily="34" charset="0"/>
                 <a:ea typeface="Arial" pitchFamily="34" charset="-122"/>
@@ -6151,7 +6151,7 @@
             <a:r>
               <a:rPr lang="en-US" sz="750" dirty="0">
                 <a:solidFill>
-                  <a:srgbClr val="B0B0B0"/>
+                  <a:srgbClr val="8FAE8B"/>
                 </a:solidFill>
                 <a:latin typeface="Arial" pitchFamily="34" charset="0"/>
                 <a:ea typeface="Arial" pitchFamily="34" charset="-122"/>
@@ -6178,11 +6178,11 @@
             <a:avLst/>
           </a:prstGeom>
           <a:solidFill>
-            <a:srgbClr val="2A2A2A"/>
+            <a:srgbClr val="142B1A"/>
           </a:solidFill>
           <a:ln w="12700">
             <a:solidFill>
-              <a:srgbClr val="2A2A2A"/>
+              <a:srgbClr val="142B1A"/>
             </a:solidFill>
             <a:prstDash val="solid"/>
           </a:ln>
@@ -6203,11 +6203,11 @@
             <a:avLst/>
           </a:prstGeom>
           <a:solidFill>
-            <a:srgbClr val="555555"/>
+            <a:srgbClr val="3E5C42"/>
           </a:solidFill>
           <a:ln w="12700">
             <a:solidFill>
-              <a:srgbClr val="555555"/>
+              <a:srgbClr val="3E5C42"/>
             </a:solidFill>
             <a:prstDash val="solid"/>
           </a:ln>
@@ -6230,11 +6230,11 @@
             </a:avLst>
           </a:prstGeom>
           <a:solidFill>
-            <a:srgbClr val="161616"/>
+            <a:srgbClr val="2A4A33"/>
           </a:solidFill>
           <a:ln w="12700">
             <a:solidFill>
-              <a:srgbClr val="2A2A2A"/>
+              <a:srgbClr val="142B1A"/>
             </a:solidFill>
             <a:prstDash val="solid"/>
           </a:ln>
@@ -6267,7 +6267,7 @@
             <a:r>
               <a:rPr lang="en-US" sz="4400" b="1" dirty="0">
                 <a:solidFill>
-                  <a:srgbClr val="FFFFFF"/>
+                  <a:srgbClr val="F0F5EA"/>
                 </a:solidFill>
                 <a:latin typeface="Arial Black" pitchFamily="34" charset="0"/>
                 <a:ea typeface="Arial Black" pitchFamily="34" charset="-122"/>
@@ -6306,7 +6306,7 @@
             <a:r>
               <a:rPr lang="en-US" sz="950" dirty="0">
                 <a:solidFill>
-                  <a:srgbClr val="B0B0B0"/>
+                  <a:srgbClr val="8FAE8B"/>
                 </a:solidFill>
                 <a:latin typeface="Arial" pitchFamily="34" charset="0"/>
                 <a:ea typeface="Arial" pitchFamily="34" charset="-122"/>
@@ -6345,7 +6345,7 @@
             <a:r>
               <a:rPr lang="en-US" sz="750" dirty="0">
                 <a:solidFill>
-                  <a:srgbClr val="B0B0B0"/>
+                  <a:srgbClr val="8FAE8B"/>
                 </a:solidFill>
                 <a:latin typeface="Arial" pitchFamily="34" charset="0"/>
                 <a:ea typeface="Arial" pitchFamily="34" charset="-122"/>
@@ -6372,11 +6372,11 @@
             <a:avLst/>
           </a:prstGeom>
           <a:solidFill>
-            <a:srgbClr val="2A2A2A"/>
+            <a:srgbClr val="142B1A"/>
           </a:solidFill>
           <a:ln w="12700">
             <a:solidFill>
-              <a:srgbClr val="2A2A2A"/>
+              <a:srgbClr val="142B1A"/>
             </a:solidFill>
             <a:prstDash val="solid"/>
           </a:ln>
@@ -6397,11 +6397,11 @@
             <a:avLst/>
           </a:prstGeom>
           <a:solidFill>
-            <a:srgbClr val="555555"/>
+            <a:srgbClr val="3E5C42"/>
           </a:solidFill>
           <a:ln w="12700">
             <a:solidFill>
-              <a:srgbClr val="555555"/>
+              <a:srgbClr val="3E5C42"/>
             </a:solidFill>
             <a:prstDash val="solid"/>
           </a:ln>
@@ -6424,11 +6424,11 @@
             </a:avLst>
           </a:prstGeom>
           <a:solidFill>
-            <a:srgbClr val="161616"/>
+            <a:srgbClr val="2A4A33"/>
           </a:solidFill>
           <a:ln w="12700">
             <a:solidFill>
-              <a:srgbClr val="2A2A2A"/>
+              <a:srgbClr val="142B1A"/>
             </a:solidFill>
             <a:prstDash val="solid"/>
           </a:ln>
@@ -6461,7 +6461,7 @@
             <a:r>
               <a:rPr lang="en-US" sz="4400" b="1" dirty="0">
                 <a:solidFill>
-                  <a:srgbClr val="FFFFFF"/>
+                  <a:srgbClr val="F0F5EA"/>
                 </a:solidFill>
                 <a:latin typeface="Arial Black" pitchFamily="34" charset="0"/>
                 <a:ea typeface="Arial Black" pitchFamily="34" charset="-122"/>
@@ -6500,7 +6500,7 @@
             <a:r>
               <a:rPr lang="en-US" sz="950" dirty="0">
                 <a:solidFill>
-                  <a:srgbClr val="B0B0B0"/>
+                  <a:srgbClr val="8FAE8B"/>
                 </a:solidFill>
                 <a:latin typeface="Arial" pitchFamily="34" charset="0"/>
                 <a:ea typeface="Arial" pitchFamily="34" charset="-122"/>
@@ -6539,7 +6539,7 @@
             <a:r>
               <a:rPr lang="en-US" sz="750" dirty="0">
                 <a:solidFill>
-                  <a:srgbClr val="B0B0B0"/>
+                  <a:srgbClr val="8FAE8B"/>
                 </a:solidFill>
                 <a:latin typeface="Arial" pitchFamily="34" charset="0"/>
                 <a:ea typeface="Arial" pitchFamily="34" charset="-122"/>
@@ -6566,11 +6566,11 @@
             <a:avLst/>
           </a:prstGeom>
           <a:solidFill>
-            <a:srgbClr val="2A2A2A"/>
+            <a:srgbClr val="142B1A"/>
           </a:solidFill>
           <a:ln w="12700">
             <a:solidFill>
-              <a:srgbClr val="2A2A2A"/>
+              <a:srgbClr val="142B1A"/>
             </a:solidFill>
             <a:prstDash val="solid"/>
           </a:ln>
@@ -6591,11 +6591,11 @@
             <a:avLst/>
           </a:prstGeom>
           <a:solidFill>
-            <a:srgbClr val="555555"/>
+            <a:srgbClr val="3E5C42"/>
           </a:solidFill>
           <a:ln w="12700">
             <a:solidFill>
-              <a:srgbClr val="555555"/>
+              <a:srgbClr val="3E5C42"/>
             </a:solidFill>
             <a:prstDash val="solid"/>
           </a:ln>
@@ -6618,11 +6618,11 @@
             </a:avLst>
           </a:prstGeom>
           <a:solidFill>
-            <a:srgbClr val="161616"/>
+            <a:srgbClr val="2A4A33"/>
           </a:solidFill>
           <a:ln w="12700">
             <a:solidFill>
-              <a:srgbClr val="2A2A2A"/>
+              <a:srgbClr val="142B1A"/>
             </a:solidFill>
             <a:prstDash val="solid"/>
           </a:ln>
@@ -6655,7 +6655,7 @@
             <a:r>
               <a:rPr lang="en-US" sz="4400" b="1" dirty="0">
                 <a:solidFill>
-                  <a:srgbClr val="FFFFFF"/>
+                  <a:srgbClr val="F0F5EA"/>
                 </a:solidFill>
                 <a:latin typeface="Arial Black" pitchFamily="34" charset="0"/>
                 <a:ea typeface="Arial Black" pitchFamily="34" charset="-122"/>
@@ -6694,7 +6694,7 @@
             <a:r>
               <a:rPr lang="en-US" sz="950" dirty="0">
                 <a:solidFill>
-                  <a:srgbClr val="B0B0B0"/>
+                  <a:srgbClr val="8FAE8B"/>
                 </a:solidFill>
                 <a:latin typeface="Arial" pitchFamily="34" charset="0"/>
                 <a:ea typeface="Arial" pitchFamily="34" charset="-122"/>
@@ -6733,7 +6733,7 @@
             <a:r>
               <a:rPr lang="en-US" sz="750" dirty="0">
                 <a:solidFill>
-                  <a:srgbClr val="B0B0B0"/>
+                  <a:srgbClr val="8FAE8B"/>
                 </a:solidFill>
                 <a:latin typeface="Arial" pitchFamily="34" charset="0"/>
                 <a:ea typeface="Arial" pitchFamily="34" charset="-122"/>
@@ -6772,7 +6772,7 @@
             <a:r>
               <a:rPr lang="en-US" sz="1300" b="1" dirty="0">
                 <a:solidFill>
-                  <a:srgbClr val="FFFFFF"/>
+                  <a:srgbClr val="F0F5EA"/>
                 </a:solidFill>
                 <a:latin typeface="Arial Black" pitchFamily="34" charset="0"/>
                 <a:ea typeface="Arial Black" pitchFamily="34" charset="-122"/>
@@ -6811,7 +6811,7 @@
             <a:r>
               <a:rPr lang="en-US" sz="850" dirty="0">
                 <a:solidFill>
-                  <a:srgbClr val="B0B0B0"/>
+                  <a:srgbClr val="8FAE8B"/>
                 </a:solidFill>
                 <a:latin typeface="Arial" pitchFamily="34" charset="0"/>
                 <a:ea typeface="Arial" pitchFamily="34" charset="-122"/>
@@ -6840,7 +6840,7 @@
     <p:bg>
       <p:bgPr>
         <a:solidFill>
-          <a:srgbClr val="0A0A0A"/>
+          <a:srgbClr val="1F3D26"/>
         </a:solidFill>
       </p:bgPr>
     </p:bg>
@@ -6885,7 +6885,7 @@
             <a:r>
               <a:rPr lang="en-US" sz="3000" b="1" dirty="0">
                 <a:solidFill>
-                  <a:srgbClr val="2A2A2A"/>
+                  <a:srgbClr val="142B1A"/>
                 </a:solidFill>
                 <a:latin typeface="Arial Black" pitchFamily="34" charset="0"/>
                 <a:ea typeface="Arial Black" pitchFamily="34" charset="-122"/>
@@ -6924,7 +6924,7 @@
             <a:r>
               <a:rPr lang="en-US" sz="3000" b="1" dirty="0">
                 <a:solidFill>
-                  <a:srgbClr val="FFFFFF"/>
+                  <a:srgbClr val="F0F5EA"/>
                 </a:solidFill>
                 <a:latin typeface="Arial Black" pitchFamily="34" charset="0"/>
                 <a:ea typeface="Arial Black" pitchFamily="34" charset="-122"/>
@@ -6951,11 +6951,11 @@
             <a:avLst/>
           </a:prstGeom>
           <a:solidFill>
-            <a:srgbClr val="FF5A1F"/>
+            <a:srgbClr val="97BC62"/>
           </a:solidFill>
           <a:ln w="12700">
             <a:solidFill>
-              <a:srgbClr val="FF5A1F"/>
+              <a:srgbClr val="97BC62"/>
             </a:solidFill>
             <a:prstDash val="solid"/>
           </a:ln>
@@ -6988,7 +6988,7 @@
             <a:r>
               <a:rPr lang="en-US" sz="1350" b="1" dirty="0">
                 <a:solidFill>
-                  <a:srgbClr val="FFFFFF"/>
+                  <a:srgbClr val="F0F5EA"/>
                 </a:solidFill>
                 <a:latin typeface="Arial" pitchFamily="34" charset="0"/>
                 <a:ea typeface="Arial" pitchFamily="34" charset="-122"/>
@@ -7015,11 +7015,11 @@
             <a:avLst/>
           </a:prstGeom>
           <a:solidFill>
-            <a:srgbClr val="2A2A2A"/>
+            <a:srgbClr val="142B1A"/>
           </a:solidFill>
           <a:ln w="12700">
             <a:solidFill>
-              <a:srgbClr val="2A2A2A"/>
+              <a:srgbClr val="142B1A"/>
             </a:solidFill>
             <a:prstDash val="solid"/>
           </a:ln>
@@ -7040,11 +7040,11 @@
             <a:avLst/>
           </a:prstGeom>
           <a:solidFill>
-            <a:srgbClr val="555555"/>
+            <a:srgbClr val="3E5C42"/>
           </a:solidFill>
           <a:ln w="12700">
             <a:solidFill>
-              <a:srgbClr val="555555"/>
+              <a:srgbClr val="3E5C42"/>
             </a:solidFill>
             <a:prstDash val="solid"/>
           </a:ln>
@@ -7067,11 +7067,11 @@
             </a:avLst>
           </a:prstGeom>
           <a:solidFill>
-            <a:srgbClr val="161616"/>
+            <a:srgbClr val="2A4A33"/>
           </a:solidFill>
           <a:ln w="12700">
             <a:solidFill>
-              <a:srgbClr val="2A2A2A"/>
+              <a:srgbClr val="142B1A"/>
             </a:solidFill>
             <a:prstDash val="solid"/>
           </a:ln>
@@ -7104,7 +7104,7 @@
             <a:r>
               <a:rPr lang="en-US" sz="1400" b="1" dirty="0">
                 <a:solidFill>
-                  <a:srgbClr val="FFFFFF"/>
+                  <a:srgbClr val="F0F5EA"/>
                 </a:solidFill>
                 <a:latin typeface="Arial Black" pitchFamily="34" charset="0"/>
                 <a:ea typeface="Arial Black" pitchFamily="34" charset="-122"/>
@@ -7143,7 +7143,7 @@
             <a:r>
               <a:rPr lang="en-US" sz="850" dirty="0">
                 <a:solidFill>
-                  <a:srgbClr val="B0B0B0"/>
+                  <a:srgbClr val="8FAE8B"/>
                 </a:solidFill>
                 <a:latin typeface="Arial" pitchFamily="34" charset="0"/>
                 <a:ea typeface="Arial" pitchFamily="34" charset="-122"/>
@@ -7170,11 +7170,11 @@
             <a:avLst/>
           </a:prstGeom>
           <a:solidFill>
-            <a:srgbClr val="2A2A2A"/>
+            <a:srgbClr val="142B1A"/>
           </a:solidFill>
           <a:ln w="12700">
             <a:solidFill>
-              <a:srgbClr val="2A2A2A"/>
+              <a:srgbClr val="142B1A"/>
             </a:solidFill>
             <a:prstDash val="solid"/>
           </a:ln>
@@ -7195,11 +7195,11 @@
             <a:avLst/>
           </a:prstGeom>
           <a:solidFill>
-            <a:srgbClr val="555555"/>
+            <a:srgbClr val="3E5C42"/>
           </a:solidFill>
           <a:ln w="12700">
             <a:solidFill>
-              <a:srgbClr val="555555"/>
+              <a:srgbClr val="3E5C42"/>
             </a:solidFill>
             <a:prstDash val="solid"/>
           </a:ln>
@@ -7222,11 +7222,11 @@
             </a:avLst>
           </a:prstGeom>
           <a:solidFill>
-            <a:srgbClr val="161616"/>
+            <a:srgbClr val="2A4A33"/>
           </a:solidFill>
           <a:ln w="12700">
             <a:solidFill>
-              <a:srgbClr val="2A2A2A"/>
+              <a:srgbClr val="142B1A"/>
             </a:solidFill>
             <a:prstDash val="solid"/>
           </a:ln>
@@ -7259,7 +7259,7 @@
             <a:r>
               <a:rPr lang="en-US" sz="1400" b="1" dirty="0">
                 <a:solidFill>
-                  <a:srgbClr val="FFFFFF"/>
+                  <a:srgbClr val="F0F5EA"/>
                 </a:solidFill>
                 <a:latin typeface="Arial Black" pitchFamily="34" charset="0"/>
                 <a:ea typeface="Arial Black" pitchFamily="34" charset="-122"/>
@@ -7298,7 +7298,7 @@
             <a:r>
               <a:rPr lang="en-US" sz="850" dirty="0">
                 <a:solidFill>
-                  <a:srgbClr val="B0B0B0"/>
+                  <a:srgbClr val="8FAE8B"/>
                 </a:solidFill>
                 <a:latin typeface="Arial" pitchFamily="34" charset="0"/>
                 <a:ea typeface="Arial" pitchFamily="34" charset="-122"/>
@@ -7325,11 +7325,11 @@
             <a:avLst/>
           </a:prstGeom>
           <a:solidFill>
-            <a:srgbClr val="2A2A2A"/>
+            <a:srgbClr val="142B1A"/>
           </a:solidFill>
           <a:ln w="12700">
             <a:solidFill>
-              <a:srgbClr val="2A2A2A"/>
+              <a:srgbClr val="142B1A"/>
             </a:solidFill>
             <a:prstDash val="solid"/>
           </a:ln>
@@ -7350,11 +7350,11 @@
             <a:avLst/>
           </a:prstGeom>
           <a:solidFill>
-            <a:srgbClr val="555555"/>
+            <a:srgbClr val="3E5C42"/>
           </a:solidFill>
           <a:ln w="12700">
             <a:solidFill>
-              <a:srgbClr val="555555"/>
+              <a:srgbClr val="3E5C42"/>
             </a:solidFill>
             <a:prstDash val="solid"/>
           </a:ln>
@@ -7377,11 +7377,11 @@
             </a:avLst>
           </a:prstGeom>
           <a:solidFill>
-            <a:srgbClr val="161616"/>
+            <a:srgbClr val="2A4A33"/>
           </a:solidFill>
           <a:ln w="12700">
             <a:solidFill>
-              <a:srgbClr val="2A2A2A"/>
+              <a:srgbClr val="142B1A"/>
             </a:solidFill>
             <a:prstDash val="solid"/>
           </a:ln>
@@ -7414,7 +7414,7 @@
             <a:r>
               <a:rPr lang="en-US" sz="1400" b="1" dirty="0">
                 <a:solidFill>
-                  <a:srgbClr val="FFFFFF"/>
+                  <a:srgbClr val="F0F5EA"/>
                 </a:solidFill>
                 <a:latin typeface="Arial Black" pitchFamily="34" charset="0"/>
                 <a:ea typeface="Arial Black" pitchFamily="34" charset="-122"/>
@@ -7453,7 +7453,7 @@
             <a:r>
               <a:rPr lang="en-US" sz="850" dirty="0">
                 <a:solidFill>
-                  <a:srgbClr val="B0B0B0"/>
+                  <a:srgbClr val="8FAE8B"/>
                 </a:solidFill>
                 <a:latin typeface="Arial" pitchFamily="34" charset="0"/>
                 <a:ea typeface="Arial" pitchFamily="34" charset="-122"/>
@@ -7480,11 +7480,11 @@
             <a:avLst/>
           </a:prstGeom>
           <a:solidFill>
-            <a:srgbClr val="2A2A2A"/>
+            <a:srgbClr val="142B1A"/>
           </a:solidFill>
           <a:ln w="12700">
             <a:solidFill>
-              <a:srgbClr val="2A2A2A"/>
+              <a:srgbClr val="142B1A"/>
             </a:solidFill>
             <a:prstDash val="solid"/>
           </a:ln>
@@ -7505,11 +7505,11 @@
             <a:avLst/>
           </a:prstGeom>
           <a:solidFill>
-            <a:srgbClr val="555555"/>
+            <a:srgbClr val="3E5C42"/>
           </a:solidFill>
           <a:ln w="12700">
             <a:solidFill>
-              <a:srgbClr val="555555"/>
+              <a:srgbClr val="3E5C42"/>
             </a:solidFill>
             <a:prstDash val="solid"/>
           </a:ln>
@@ -7532,11 +7532,11 @@
             </a:avLst>
           </a:prstGeom>
           <a:solidFill>
-            <a:srgbClr val="161616"/>
+            <a:srgbClr val="2A4A33"/>
           </a:solidFill>
           <a:ln w="12700">
             <a:solidFill>
-              <a:srgbClr val="2A2A2A"/>
+              <a:srgbClr val="142B1A"/>
             </a:solidFill>
             <a:prstDash val="solid"/>
           </a:ln>
@@ -7569,7 +7569,7 @@
             <a:r>
               <a:rPr lang="en-US" sz="1400" b="1" dirty="0">
                 <a:solidFill>
-                  <a:srgbClr val="FFFFFF"/>
+                  <a:srgbClr val="F0F5EA"/>
                 </a:solidFill>
                 <a:latin typeface="Arial Black" pitchFamily="34" charset="0"/>
                 <a:ea typeface="Arial Black" pitchFamily="34" charset="-122"/>
@@ -7608,7 +7608,7 @@
             <a:r>
               <a:rPr lang="en-US" sz="850" dirty="0">
                 <a:solidFill>
-                  <a:srgbClr val="B0B0B0"/>
+                  <a:srgbClr val="8FAE8B"/>
                 </a:solidFill>
                 <a:latin typeface="Arial" pitchFamily="34" charset="0"/>
                 <a:ea typeface="Arial" pitchFamily="34" charset="-122"/>
@@ -7647,7 +7647,7 @@
             <a:r>
               <a:rPr lang="en-US" sz="850" dirty="0">
                 <a:solidFill>
-                  <a:srgbClr val="B0B0B0"/>
+                  <a:srgbClr val="8FAE8B"/>
                 </a:solidFill>
                 <a:latin typeface="Arial" pitchFamily="34" charset="0"/>
                 <a:ea typeface="Arial" pitchFamily="34" charset="-122"/>
@@ -7676,7 +7676,7 @@
     <p:bg>
       <p:bgPr>
         <a:solidFill>
-          <a:srgbClr val="FFFFFF"/>
+          <a:srgbClr val="F0F5EA"/>
         </a:solidFill>
       </p:bgPr>
     </p:bg>
@@ -7721,7 +7721,7 @@
             <a:r>
               <a:rPr lang="en-US" sz="2800" b="1" dirty="0">
                 <a:solidFill>
-                  <a:srgbClr val="E0E0E0"/>
+                  <a:srgbClr val="D8E8C8"/>
                 </a:solidFill>
                 <a:latin typeface="Arial Black" pitchFamily="34" charset="0"/>
                 <a:ea typeface="Arial Black" pitchFamily="34" charset="-122"/>
@@ -7767,7 +7767,7 @@
             <a:r>
               <a:rPr lang="en-US" sz="2800" b="1" dirty="0">
                 <a:solidFill>
-                  <a:srgbClr val="0A0A0A"/>
+                  <a:srgbClr val="2C5F2D"/>
                 </a:solidFill>
                 <a:latin typeface="Arial Black" pitchFamily="34" charset="0"/>
                 <a:ea typeface="Arial Black" pitchFamily="34" charset="-122"/>
@@ -7794,11 +7794,11 @@
             <a:avLst/>
           </a:prstGeom>
           <a:solidFill>
-            <a:srgbClr val="0A0A0A"/>
+            <a:srgbClr val="2C5F2D"/>
           </a:solidFill>
           <a:ln w="12700">
             <a:solidFill>
-              <a:srgbClr val="0A0A0A"/>
+              <a:srgbClr val="2C5F2D"/>
             </a:solidFill>
             <a:prstDash val="solid"/>
           </a:ln>
@@ -7831,7 +7831,7 @@
             <a:r>
               <a:rPr lang="en-US" sz="1600" b="1" dirty="0">
                 <a:solidFill>
-                  <a:srgbClr val="0A0A0A"/>
+                  <a:srgbClr val="2C5F2D"/>
                 </a:solidFill>
                 <a:latin typeface="Arial" pitchFamily="34" charset="0"/>
                 <a:ea typeface="Arial" pitchFamily="34" charset="-122"/>
@@ -7858,11 +7858,11 @@
             <a:avLst/>
           </a:prstGeom>
           <a:solidFill>
-            <a:srgbClr val="E0E0E0"/>
+            <a:srgbClr val="D8E8C8"/>
           </a:solidFill>
           <a:ln w="12700">
             <a:solidFill>
-              <a:srgbClr val="E0E0E0"/>
+              <a:srgbClr val="D8E8C8"/>
             </a:solidFill>
             <a:prstDash val="solid"/>
           </a:ln>
@@ -7885,11 +7885,11 @@
             </a:avLst>
           </a:prstGeom>
           <a:solidFill>
-            <a:srgbClr val="FFFFFF"/>
+            <a:srgbClr val="F0F5EA"/>
           </a:solidFill>
           <a:ln w="19050">
             <a:solidFill>
-              <a:srgbClr val="0A0A0A"/>
+              <a:srgbClr val="2C5F2D"/>
             </a:solidFill>
             <a:prstDash val="solid"/>
           </a:ln>
@@ -7910,7 +7910,7 @@
             <a:avLst/>
           </a:prstGeom>
           <a:solidFill>
-            <a:srgbClr val="0A0A0A"/>
+            <a:srgbClr val="1F3D26"/>
           </a:solidFill>
           <a:ln/>
         </p:spPr>
@@ -7942,7 +7942,7 @@
             <a:r>
               <a:rPr lang="en-US" sz="1400" b="1" dirty="0">
                 <a:solidFill>
-                  <a:srgbClr val="FFFFFF"/>
+                  <a:srgbClr val="F0F5EA"/>
                 </a:solidFill>
                 <a:latin typeface="Arial" pitchFamily="34" charset="0"/>
                 <a:ea typeface="Arial" pitchFamily="34" charset="-122"/>
@@ -7981,7 +7981,7 @@
             <a:r>
               <a:rPr lang="en-US" sz="1500" b="1" dirty="0">
                 <a:solidFill>
-                  <a:srgbClr val="0A0A0A"/>
+                  <a:srgbClr val="2C5F2D"/>
                 </a:solidFill>
                 <a:latin typeface="Arial Black" pitchFamily="34" charset="0"/>
                 <a:ea typeface="Arial Black" pitchFamily="34" charset="-122"/>
@@ -8023,7 +8023,7 @@
             <a:r>
               <a:rPr lang="en-US" sz="1050" dirty="0">
                 <a:solidFill>
-                  <a:srgbClr val="0A0A0A"/>
+                  <a:srgbClr val="2C5F2D"/>
                 </a:solidFill>
                 <a:latin typeface="Arial" pitchFamily="34" charset="0"/>
                 <a:ea typeface="Arial" pitchFamily="34" charset="-122"/>
@@ -8043,7 +8043,7 @@
             <a:r>
               <a:rPr lang="en-US" sz="1050" dirty="0">
                 <a:solidFill>
-                  <a:srgbClr val="0A0A0A"/>
+                  <a:srgbClr val="2C5F2D"/>
                 </a:solidFill>
                 <a:latin typeface="Arial" pitchFamily="34" charset="0"/>
                 <a:ea typeface="Arial" pitchFamily="34" charset="-122"/>
@@ -8063,7 +8063,7 @@
             <a:r>
               <a:rPr lang="en-US" sz="1050" dirty="0">
                 <a:solidFill>
-                  <a:srgbClr val="0A0A0A"/>
+                  <a:srgbClr val="2C5F2D"/>
                 </a:solidFill>
                 <a:latin typeface="Arial" pitchFamily="34" charset="0"/>
                 <a:ea typeface="Arial" pitchFamily="34" charset="-122"/>
@@ -8083,7 +8083,7 @@
             <a:r>
               <a:rPr lang="en-US" sz="1050" dirty="0">
                 <a:solidFill>
-                  <a:srgbClr val="0A0A0A"/>
+                  <a:srgbClr val="2C5F2D"/>
                 </a:solidFill>
                 <a:latin typeface="Arial" pitchFamily="34" charset="0"/>
                 <a:ea typeface="Arial" pitchFamily="34" charset="-122"/>
@@ -8110,11 +8110,11 @@
             <a:avLst/>
           </a:prstGeom>
           <a:solidFill>
-            <a:srgbClr val="E0E0E0"/>
+            <a:srgbClr val="D8E8C8"/>
           </a:solidFill>
           <a:ln w="12700">
             <a:solidFill>
-              <a:srgbClr val="E0E0E0"/>
+              <a:srgbClr val="D8E8C8"/>
             </a:solidFill>
             <a:prstDash val="solid"/>
           </a:ln>
@@ -8137,11 +8137,11 @@
             </a:avLst>
           </a:prstGeom>
           <a:solidFill>
-            <a:srgbClr val="FFFFFF"/>
+            <a:srgbClr val="F0F5EA"/>
           </a:solidFill>
           <a:ln w="19050">
             <a:solidFill>
-              <a:srgbClr val="0A0A0A"/>
+              <a:srgbClr val="2C5F2D"/>
             </a:solidFill>
             <a:prstDash val="solid"/>
           </a:ln>
@@ -8162,7 +8162,7 @@
             <a:avLst/>
           </a:prstGeom>
           <a:solidFill>
-            <a:srgbClr val="0A0A0A"/>
+            <a:srgbClr val="1F3D26"/>
           </a:solidFill>
           <a:ln/>
         </p:spPr>
@@ -8194,7 +8194,7 @@
             <a:r>
               <a:rPr lang="en-US" sz="1400" b="1" dirty="0">
                 <a:solidFill>
-                  <a:srgbClr val="FFFFFF"/>
+                  <a:srgbClr val="F0F5EA"/>
                 </a:solidFill>
                 <a:latin typeface="Arial" pitchFamily="34" charset="0"/>
                 <a:ea typeface="Arial" pitchFamily="34" charset="-122"/>
@@ -8233,7 +8233,7 @@
             <a:r>
               <a:rPr lang="en-US" sz="1500" b="1" dirty="0">
                 <a:solidFill>
-                  <a:srgbClr val="0A0A0A"/>
+                  <a:srgbClr val="2C5F2D"/>
                 </a:solidFill>
                 <a:latin typeface="Arial Black" pitchFamily="34" charset="0"/>
                 <a:ea typeface="Arial Black" pitchFamily="34" charset="-122"/>
@@ -8275,7 +8275,7 @@
             <a:r>
               <a:rPr lang="en-US" sz="1050" dirty="0">
                 <a:solidFill>
-                  <a:srgbClr val="0A0A0A"/>
+                  <a:srgbClr val="2C5F2D"/>
                 </a:solidFill>
                 <a:latin typeface="Arial" pitchFamily="34" charset="0"/>
                 <a:ea typeface="Arial" pitchFamily="34" charset="-122"/>
@@ -8295,7 +8295,7 @@
             <a:r>
               <a:rPr lang="en-US" sz="1050" dirty="0">
                 <a:solidFill>
-                  <a:srgbClr val="0A0A0A"/>
+                  <a:srgbClr val="2C5F2D"/>
                 </a:solidFill>
                 <a:latin typeface="Arial" pitchFamily="34" charset="0"/>
                 <a:ea typeface="Arial" pitchFamily="34" charset="-122"/>
@@ -8315,7 +8315,7 @@
             <a:r>
               <a:rPr lang="en-US" sz="1050" dirty="0">
                 <a:solidFill>
-                  <a:srgbClr val="0A0A0A"/>
+                  <a:srgbClr val="2C5F2D"/>
                 </a:solidFill>
                 <a:latin typeface="Arial" pitchFamily="34" charset="0"/>
                 <a:ea typeface="Arial" pitchFamily="34" charset="-122"/>
@@ -8335,7 +8335,7 @@
             <a:r>
               <a:rPr lang="en-US" sz="1050" dirty="0">
                 <a:solidFill>
-                  <a:srgbClr val="0A0A0A"/>
+                  <a:srgbClr val="2C5F2D"/>
                 </a:solidFill>
                 <a:latin typeface="Arial" pitchFamily="34" charset="0"/>
                 <a:ea typeface="Arial" pitchFamily="34" charset="-122"/>
@@ -8362,11 +8362,11 @@
             <a:avLst/>
           </a:prstGeom>
           <a:solidFill>
-            <a:srgbClr val="E0E0E0"/>
+            <a:srgbClr val="D8E8C8"/>
           </a:solidFill>
           <a:ln w="12700">
             <a:solidFill>
-              <a:srgbClr val="E0E0E0"/>
+              <a:srgbClr val="D8E8C8"/>
             </a:solidFill>
             <a:prstDash val="solid"/>
           </a:ln>
@@ -8389,11 +8389,11 @@
             </a:avLst>
           </a:prstGeom>
           <a:solidFill>
-            <a:srgbClr val="FFFFFF"/>
+            <a:srgbClr val="F0F5EA"/>
           </a:solidFill>
           <a:ln w="19050">
             <a:solidFill>
-              <a:srgbClr val="0A0A0A"/>
+              <a:srgbClr val="2C5F2D"/>
             </a:solidFill>
             <a:prstDash val="solid"/>
           </a:ln>
@@ -8414,7 +8414,7 @@
             <a:avLst/>
           </a:prstGeom>
           <a:solidFill>
-            <a:srgbClr val="0A0A0A"/>
+            <a:srgbClr val="1F3D26"/>
           </a:solidFill>
           <a:ln/>
         </p:spPr>
@@ -8446,7 +8446,7 @@
             <a:r>
               <a:rPr lang="en-US" sz="1400" b="1" dirty="0">
                 <a:solidFill>
-                  <a:srgbClr val="FFFFFF"/>
+                  <a:srgbClr val="F0F5EA"/>
                 </a:solidFill>
                 <a:latin typeface="Arial" pitchFamily="34" charset="0"/>
                 <a:ea typeface="Arial" pitchFamily="34" charset="-122"/>
@@ -8485,7 +8485,7 @@
             <a:r>
               <a:rPr lang="en-US" sz="1500" b="1" dirty="0">
                 <a:solidFill>
-                  <a:srgbClr val="0A0A0A"/>
+                  <a:srgbClr val="2C5F2D"/>
                 </a:solidFill>
                 <a:latin typeface="Arial Black" pitchFamily="34" charset="0"/>
                 <a:ea typeface="Arial Black" pitchFamily="34" charset="-122"/>
@@ -8527,7 +8527,7 @@
             <a:r>
               <a:rPr lang="en-US" sz="1050" dirty="0">
                 <a:solidFill>
-                  <a:srgbClr val="0A0A0A"/>
+                  <a:srgbClr val="2C5F2D"/>
                 </a:solidFill>
                 <a:latin typeface="Arial" pitchFamily="34" charset="0"/>
                 <a:ea typeface="Arial" pitchFamily="34" charset="-122"/>
@@ -8547,7 +8547,7 @@
             <a:r>
               <a:rPr lang="en-US" sz="1050" dirty="0">
                 <a:solidFill>
-                  <a:srgbClr val="0A0A0A"/>
+                  <a:srgbClr val="2C5F2D"/>
                 </a:solidFill>
                 <a:latin typeface="Arial" pitchFamily="34" charset="0"/>
                 <a:ea typeface="Arial" pitchFamily="34" charset="-122"/>
@@ -8567,7 +8567,7 @@
             <a:r>
               <a:rPr lang="en-US" sz="1050" dirty="0">
                 <a:solidFill>
-                  <a:srgbClr val="0A0A0A"/>
+                  <a:srgbClr val="2C5F2D"/>
                 </a:solidFill>
                 <a:latin typeface="Arial" pitchFamily="34" charset="0"/>
                 <a:ea typeface="Arial" pitchFamily="34" charset="-122"/>
@@ -8587,7 +8587,7 @@
             <a:r>
               <a:rPr lang="en-US" sz="1050" dirty="0">
                 <a:solidFill>
-                  <a:srgbClr val="0A0A0A"/>
+                  <a:srgbClr val="2C5F2D"/>
                 </a:solidFill>
                 <a:latin typeface="Arial" pitchFamily="34" charset="0"/>
                 <a:ea typeface="Arial" pitchFamily="34" charset="-122"/>
@@ -8626,7 +8626,7 @@
             <a:r>
               <a:rPr lang="en-US" sz="1050" i="1" dirty="0">
                 <a:solidFill>
-                  <a:srgbClr val="6E6E6E"/>
+                  <a:srgbClr val="5A6B5A"/>
                 </a:solidFill>
                 <a:latin typeface="Arial" pitchFamily="34" charset="0"/>
                 <a:ea typeface="Arial" pitchFamily="34" charset="-122"/>
@@ -8665,7 +8665,7 @@
             <a:r>
               <a:rPr lang="en-US" sz="850" dirty="0">
                 <a:solidFill>
-                  <a:srgbClr val="6E6E6E"/>
+                  <a:srgbClr val="5A6B5A"/>
                 </a:solidFill>
                 <a:latin typeface="Arial" pitchFamily="34" charset="0"/>
                 <a:ea typeface="Arial" pitchFamily="34" charset="-122"/>
@@ -8694,7 +8694,7 @@
     <p:bg>
       <p:bgPr>
         <a:solidFill>
-          <a:srgbClr val="FFFFFF"/>
+          <a:srgbClr val="F0F5EA"/>
         </a:solidFill>
       </p:bgPr>
     </p:bg>
@@ -8739,7 +8739,7 @@
             <a:r>
               <a:rPr lang="en-US" sz="2800" b="1" dirty="0">
                 <a:solidFill>
-                  <a:srgbClr val="E0E0E0"/>
+                  <a:srgbClr val="D8E8C8"/>
                 </a:solidFill>
                 <a:latin typeface="Arial Black" pitchFamily="34" charset="0"/>
                 <a:ea typeface="Arial Black" pitchFamily="34" charset="-122"/>
@@ -8785,7 +8785,7 @@
             <a:r>
               <a:rPr lang="en-US" sz="2800" b="1" dirty="0">
                 <a:solidFill>
-                  <a:srgbClr val="0A0A0A"/>
+                  <a:srgbClr val="2C5F2D"/>
                 </a:solidFill>
                 <a:latin typeface="Arial Black" pitchFamily="34" charset="0"/>
                 <a:ea typeface="Arial Black" pitchFamily="34" charset="-122"/>
@@ -8812,11 +8812,11 @@
             <a:avLst/>
           </a:prstGeom>
           <a:solidFill>
-            <a:srgbClr val="0A0A0A"/>
+            <a:srgbClr val="2C5F2D"/>
           </a:solidFill>
           <a:ln w="12700">
             <a:solidFill>
-              <a:srgbClr val="0A0A0A"/>
+              <a:srgbClr val="2C5F2D"/>
             </a:solidFill>
             <a:prstDash val="solid"/>
           </a:ln>
@@ -8837,11 +8837,11 @@
             <a:avLst/>
           </a:prstGeom>
           <a:solidFill>
-            <a:srgbClr val="E0E0E0"/>
+            <a:srgbClr val="D8E8C8"/>
           </a:solidFill>
           <a:ln w="12700">
             <a:solidFill>
-              <a:srgbClr val="E0E0E0"/>
+              <a:srgbClr val="D8E8C8"/>
             </a:solidFill>
             <a:prstDash val="solid"/>
           </a:ln>
@@ -8864,11 +8864,11 @@
             </a:avLst>
           </a:prstGeom>
           <a:solidFill>
-            <a:srgbClr val="FFFFFF"/>
+            <a:srgbClr val="F0F5EA"/>
           </a:solidFill>
           <a:ln w="19050">
             <a:solidFill>
-              <a:srgbClr val="0A0A0A"/>
+              <a:srgbClr val="2C5F2D"/>
             </a:solidFill>
             <a:prstDash val="solid"/>
           </a:ln>
@@ -8889,7 +8889,7 @@
             <a:avLst/>
           </a:prstGeom>
           <a:solidFill>
-            <a:srgbClr val="0A0A0A"/>
+            <a:srgbClr val="1F3D26"/>
           </a:solidFill>
           <a:ln/>
         </p:spPr>
@@ -8921,7 +8921,7 @@
             <a:r>
               <a:rPr lang="en-US" sz="1800" b="1" dirty="0">
                 <a:solidFill>
-                  <a:srgbClr val="FFFFFF"/>
+                  <a:srgbClr val="F0F5EA"/>
                 </a:solidFill>
                 <a:latin typeface="Arial" pitchFamily="34" charset="0"/>
                 <a:ea typeface="Arial" pitchFamily="34" charset="-122"/>
@@ -8960,7 +8960,7 @@
             <a:r>
               <a:rPr lang="en-US" sz="1400" b="1" dirty="0">
                 <a:solidFill>
-                  <a:srgbClr val="0A0A0A"/>
+                  <a:srgbClr val="2C5F2D"/>
                 </a:solidFill>
                 <a:latin typeface="Arial Black" pitchFamily="34" charset="0"/>
                 <a:ea typeface="Arial Black" pitchFamily="34" charset="-122"/>
@@ -8999,7 +8999,7 @@
             <a:r>
               <a:rPr lang="en-US" sz="1050" dirty="0">
                 <a:solidFill>
-                  <a:srgbClr val="0A0A0A"/>
+                  <a:srgbClr val="2C5F2D"/>
                 </a:solidFill>
                 <a:latin typeface="Arial" pitchFamily="34" charset="0"/>
                 <a:ea typeface="Arial" pitchFamily="34" charset="-122"/>
@@ -9038,7 +9038,7 @@
             <a:r>
               <a:rPr lang="en-US" sz="950" i="1" dirty="0">
                 <a:solidFill>
-                  <a:srgbClr val="6E6E6E"/>
+                  <a:srgbClr val="5A6B5A"/>
                 </a:solidFill>
                 <a:latin typeface="Arial" pitchFamily="34" charset="0"/>
                 <a:ea typeface="Arial" pitchFamily="34" charset="-122"/>
@@ -9077,7 +9077,7 @@
             <a:r>
               <a:rPr lang="en-US" sz="2000" b="1" dirty="0">
                 <a:solidFill>
-                  <a:srgbClr val="B0B0B0"/>
+                  <a:srgbClr val="8FAE8B"/>
                 </a:solidFill>
                 <a:latin typeface="Arial" pitchFamily="34" charset="0"/>
                 <a:ea typeface="Arial" pitchFamily="34" charset="-122"/>
@@ -9104,11 +9104,11 @@
             <a:avLst/>
           </a:prstGeom>
           <a:solidFill>
-            <a:srgbClr val="E0E0E0"/>
+            <a:srgbClr val="D8E8C8"/>
           </a:solidFill>
           <a:ln w="12700">
             <a:solidFill>
-              <a:srgbClr val="E0E0E0"/>
+              <a:srgbClr val="D8E8C8"/>
             </a:solidFill>
             <a:prstDash val="solid"/>
           </a:ln>
@@ -9131,11 +9131,11 @@
             </a:avLst>
           </a:prstGeom>
           <a:solidFill>
-            <a:srgbClr val="FFFFFF"/>
+            <a:srgbClr val="F0F5EA"/>
           </a:solidFill>
           <a:ln w="19050">
             <a:solidFill>
-              <a:srgbClr val="0A0A0A"/>
+              <a:srgbClr val="2C5F2D"/>
             </a:solidFill>
             <a:prstDash val="solid"/>
           </a:ln>
@@ -9156,7 +9156,7 @@
             <a:avLst/>
           </a:prstGeom>
           <a:solidFill>
-            <a:srgbClr val="0A0A0A"/>
+            <a:srgbClr val="1F3D26"/>
           </a:solidFill>
           <a:ln/>
         </p:spPr>
@@ -9188,7 +9188,7 @@
             <a:r>
               <a:rPr lang="en-US" sz="1800" b="1" dirty="0">
                 <a:solidFill>
-                  <a:srgbClr val="FFFFFF"/>
+                  <a:srgbClr val="F0F5EA"/>
                 </a:solidFill>
                 <a:latin typeface="Arial" pitchFamily="34" charset="0"/>
                 <a:ea typeface="Arial" pitchFamily="34" charset="-122"/>
@@ -9227,7 +9227,7 @@
             <a:r>
               <a:rPr lang="en-US" sz="1400" b="1" dirty="0">
                 <a:solidFill>
-                  <a:srgbClr val="0A0A0A"/>
+                  <a:srgbClr val="2C5F2D"/>
                 </a:solidFill>
                 <a:latin typeface="Arial Black" pitchFamily="34" charset="0"/>
                 <a:ea typeface="Arial Black" pitchFamily="34" charset="-122"/>
@@ -9266,7 +9266,7 @@
             <a:r>
               <a:rPr lang="en-US" sz="1050" dirty="0">
                 <a:solidFill>
-                  <a:srgbClr val="0A0A0A"/>
+                  <a:srgbClr val="2C5F2D"/>
                 </a:solidFill>
                 <a:latin typeface="Arial" pitchFamily="34" charset="0"/>
                 <a:ea typeface="Arial" pitchFamily="34" charset="-122"/>
@@ -9305,7 +9305,7 @@
             <a:r>
               <a:rPr lang="en-US" sz="950" i="1" dirty="0">
                 <a:solidFill>
-                  <a:srgbClr val="6E6E6E"/>
+                  <a:srgbClr val="5A6B5A"/>
                 </a:solidFill>
                 <a:latin typeface="Arial" pitchFamily="34" charset="0"/>
                 <a:ea typeface="Arial" pitchFamily="34" charset="-122"/>
@@ -9344,7 +9344,7 @@
             <a:r>
               <a:rPr lang="en-US" sz="2000" b="1" dirty="0">
                 <a:solidFill>
-                  <a:srgbClr val="B0B0B0"/>
+                  <a:srgbClr val="8FAE8B"/>
                 </a:solidFill>
                 <a:latin typeface="Arial" pitchFamily="34" charset="0"/>
                 <a:ea typeface="Arial" pitchFamily="34" charset="-122"/>
@@ -9371,11 +9371,11 @@
             <a:avLst/>
           </a:prstGeom>
           <a:solidFill>
-            <a:srgbClr val="E0E0E0"/>
+            <a:srgbClr val="D8E8C8"/>
           </a:solidFill>
           <a:ln w="12700">
             <a:solidFill>
-              <a:srgbClr val="E0E0E0"/>
+              <a:srgbClr val="D8E8C8"/>
             </a:solidFill>
             <a:prstDash val="solid"/>
           </a:ln>
@@ -9398,11 +9398,11 @@
             </a:avLst>
           </a:prstGeom>
           <a:solidFill>
-            <a:srgbClr val="FFFFFF"/>
+            <a:srgbClr val="F0F5EA"/>
           </a:solidFill>
           <a:ln w="19050">
             <a:solidFill>
-              <a:srgbClr val="0A0A0A"/>
+              <a:srgbClr val="2C5F2D"/>
             </a:solidFill>
             <a:prstDash val="solid"/>
           </a:ln>
@@ -9423,7 +9423,7 @@
             <a:avLst/>
           </a:prstGeom>
           <a:solidFill>
-            <a:srgbClr val="0A0A0A"/>
+            <a:srgbClr val="1F3D26"/>
           </a:solidFill>
           <a:ln/>
         </p:spPr>
@@ -9455,7 +9455,7 @@
             <a:r>
               <a:rPr lang="en-US" sz="1800" b="1" dirty="0">
                 <a:solidFill>
-                  <a:srgbClr val="FFFFFF"/>
+                  <a:srgbClr val="F0F5EA"/>
                 </a:solidFill>
                 <a:latin typeface="Arial" pitchFamily="34" charset="0"/>
                 <a:ea typeface="Arial" pitchFamily="34" charset="-122"/>
@@ -9494,7 +9494,7 @@
             <a:r>
               <a:rPr lang="en-US" sz="1400" b="1" dirty="0">
                 <a:solidFill>
-                  <a:srgbClr val="0A0A0A"/>
+                  <a:srgbClr val="2C5F2D"/>
                 </a:solidFill>
                 <a:latin typeface="Arial Black" pitchFamily="34" charset="0"/>
                 <a:ea typeface="Arial Black" pitchFamily="34" charset="-122"/>
@@ -9533,7 +9533,7 @@
             <a:r>
               <a:rPr lang="en-US" sz="1050" dirty="0">
                 <a:solidFill>
-                  <a:srgbClr val="0A0A0A"/>
+                  <a:srgbClr val="2C5F2D"/>
                 </a:solidFill>
                 <a:latin typeface="Arial" pitchFamily="34" charset="0"/>
                 <a:ea typeface="Arial" pitchFamily="34" charset="-122"/>
@@ -9572,7 +9572,7 @@
             <a:r>
               <a:rPr lang="en-US" sz="950" i="1" dirty="0">
                 <a:solidFill>
-                  <a:srgbClr val="6E6E6E"/>
+                  <a:srgbClr val="5A6B5A"/>
                 </a:solidFill>
                 <a:latin typeface="Arial" pitchFamily="34" charset="0"/>
                 <a:ea typeface="Arial" pitchFamily="34" charset="-122"/>
@@ -9611,7 +9611,7 @@
             <a:r>
               <a:rPr lang="en-US" sz="2000" b="1" dirty="0">
                 <a:solidFill>
-                  <a:srgbClr val="B0B0B0"/>
+                  <a:srgbClr val="8FAE8B"/>
                 </a:solidFill>
                 <a:latin typeface="Arial" pitchFamily="34" charset="0"/>
                 <a:ea typeface="Arial" pitchFamily="34" charset="-122"/>
@@ -9638,11 +9638,11 @@
             <a:avLst/>
           </a:prstGeom>
           <a:solidFill>
-            <a:srgbClr val="E0E0E0"/>
+            <a:srgbClr val="D8E8C8"/>
           </a:solidFill>
           <a:ln w="12700">
             <a:solidFill>
-              <a:srgbClr val="E0E0E0"/>
+              <a:srgbClr val="D8E8C8"/>
             </a:solidFill>
             <a:prstDash val="solid"/>
           </a:ln>
@@ -9665,11 +9665,11 @@
             </a:avLst>
           </a:prstGeom>
           <a:solidFill>
-            <a:srgbClr val="FFFFFF"/>
+            <a:srgbClr val="F0F5EA"/>
           </a:solidFill>
           <a:ln w="19050">
             <a:solidFill>
-              <a:srgbClr val="0A0A0A"/>
+              <a:srgbClr val="2C5F2D"/>
             </a:solidFill>
             <a:prstDash val="solid"/>
           </a:ln>
@@ -9690,7 +9690,7 @@
             <a:avLst/>
           </a:prstGeom>
           <a:solidFill>
-            <a:srgbClr val="0A0A0A"/>
+            <a:srgbClr val="1F3D26"/>
           </a:solidFill>
           <a:ln/>
         </p:spPr>
@@ -9722,7 +9722,7 @@
             <a:r>
               <a:rPr lang="en-US" sz="1800" b="1" dirty="0">
                 <a:solidFill>
-                  <a:srgbClr val="FFFFFF"/>
+                  <a:srgbClr val="F0F5EA"/>
                 </a:solidFill>
                 <a:latin typeface="Arial" pitchFamily="34" charset="0"/>
                 <a:ea typeface="Arial" pitchFamily="34" charset="-122"/>
@@ -9761,7 +9761,7 @@
             <a:r>
               <a:rPr lang="en-US" sz="1400" b="1" dirty="0">
                 <a:solidFill>
-                  <a:srgbClr val="0A0A0A"/>
+                  <a:srgbClr val="2C5F2D"/>
                 </a:solidFill>
                 <a:latin typeface="Arial Black" pitchFamily="34" charset="0"/>
                 <a:ea typeface="Arial Black" pitchFamily="34" charset="-122"/>
@@ -9800,7 +9800,7 @@
             <a:r>
               <a:rPr lang="en-US" sz="1050" dirty="0">
                 <a:solidFill>
-                  <a:srgbClr val="0A0A0A"/>
+                  <a:srgbClr val="2C5F2D"/>
                 </a:solidFill>
                 <a:latin typeface="Arial" pitchFamily="34" charset="0"/>
                 <a:ea typeface="Arial" pitchFamily="34" charset="-122"/>
@@ -9839,7 +9839,7 @@
             <a:r>
               <a:rPr lang="en-US" sz="950" i="1" dirty="0">
                 <a:solidFill>
-                  <a:srgbClr val="6E6E6E"/>
+                  <a:srgbClr val="5A6B5A"/>
                 </a:solidFill>
                 <a:latin typeface="Arial" pitchFamily="34" charset="0"/>
                 <a:ea typeface="Arial" pitchFamily="34" charset="-122"/>
@@ -9878,7 +9878,7 @@
             <a:r>
               <a:rPr lang="en-US" sz="1350" b="1" dirty="0">
                 <a:solidFill>
-                  <a:srgbClr val="0A0A0A"/>
+                  <a:srgbClr val="2C5F2D"/>
                 </a:solidFill>
                 <a:latin typeface="Arial Black" pitchFamily="34" charset="0"/>
                 <a:ea typeface="Arial Black" pitchFamily="34" charset="-122"/>
@@ -9917,7 +9917,7 @@
             <a:r>
               <a:rPr lang="en-US" sz="850" dirty="0">
                 <a:solidFill>
-                  <a:srgbClr val="6E6E6E"/>
+                  <a:srgbClr val="5A6B5A"/>
                 </a:solidFill>
                 <a:latin typeface="Arial" pitchFamily="34" charset="0"/>
                 <a:ea typeface="Arial" pitchFamily="34" charset="-122"/>
@@ -9946,7 +9946,7 @@
     <p:bg>
       <p:bgPr>
         <a:solidFill>
-          <a:srgbClr val="FFFFFF"/>
+          <a:srgbClr val="F0F5EA"/>
         </a:solidFill>
       </p:bgPr>
     </p:bg>
@@ -9991,7 +9991,7 @@
             <a:r>
               <a:rPr lang="en-US" sz="2800" b="1" dirty="0">
                 <a:solidFill>
-                  <a:srgbClr val="E0E0E0"/>
+                  <a:srgbClr val="D8E8C8"/>
                 </a:solidFill>
                 <a:latin typeface="Arial Black" pitchFamily="34" charset="0"/>
                 <a:ea typeface="Arial Black" pitchFamily="34" charset="-122"/>
@@ -10037,7 +10037,7 @@
             <a:r>
               <a:rPr lang="en-US" sz="2800" b="1" dirty="0">
                 <a:solidFill>
-                  <a:srgbClr val="0A0A0A"/>
+                  <a:srgbClr val="2C5F2D"/>
                 </a:solidFill>
                 <a:latin typeface="Arial Black" pitchFamily="34" charset="0"/>
                 <a:ea typeface="Arial Black" pitchFamily="34" charset="-122"/>
@@ -10064,11 +10064,11 @@
             <a:avLst/>
           </a:prstGeom>
           <a:solidFill>
-            <a:srgbClr val="0A0A0A"/>
+            <a:srgbClr val="2C5F2D"/>
           </a:solidFill>
           <a:ln w="12700">
             <a:solidFill>
-              <a:srgbClr val="0A0A0A"/>
+              <a:srgbClr val="2C5F2D"/>
             </a:solidFill>
             <a:prstDash val="solid"/>
           </a:ln>
@@ -10089,11 +10089,11 @@
             <a:avLst/>
           </a:prstGeom>
           <a:solidFill>
-            <a:srgbClr val="E0E0E0"/>
+            <a:srgbClr val="D8E8C8"/>
           </a:solidFill>
           <a:ln w="12700">
             <a:solidFill>
-              <a:srgbClr val="E0E0E0"/>
+              <a:srgbClr val="D8E8C8"/>
             </a:solidFill>
             <a:prstDash val="solid"/>
           </a:ln>
@@ -10114,11 +10114,11 @@
             <a:avLst/>
           </a:prstGeom>
           <a:solidFill>
-            <a:srgbClr val="555555"/>
+            <a:srgbClr val="3E5C42"/>
           </a:solidFill>
           <a:ln w="12700">
             <a:solidFill>
-              <a:srgbClr val="555555"/>
+              <a:srgbClr val="3E5C42"/>
             </a:solidFill>
             <a:prstDash val="solid"/>
           </a:ln>
@@ -10141,7 +10141,7 @@
             </a:avLst>
           </a:prstGeom>
           <a:solidFill>
-            <a:srgbClr val="0A0A0A"/>
+            <a:srgbClr val="1F3D26"/>
           </a:solidFill>
           <a:ln w="12700">
             <a:solidFill>
@@ -10178,7 +10178,7 @@
             <a:r>
               <a:rPr lang="en-US" sz="1800" b="1" dirty="0">
                 <a:solidFill>
-                  <a:srgbClr val="FFFFFF"/>
+                  <a:srgbClr val="F0F5EA"/>
                 </a:solidFill>
                 <a:latin typeface="Arial Black" pitchFamily="34" charset="0"/>
                 <a:ea typeface="Arial Black" pitchFamily="34" charset="-122"/>
@@ -10217,7 +10217,7 @@
             <a:r>
               <a:rPr lang="en-US" sz="900" dirty="0">
                 <a:solidFill>
-                  <a:srgbClr val="B0B0B0"/>
+                  <a:srgbClr val="8FAE8B"/>
                 </a:solidFill>
                 <a:latin typeface="Arial" pitchFamily="34" charset="0"/>
                 <a:ea typeface="Arial" pitchFamily="34" charset="-122"/>
@@ -10244,11 +10244,11 @@
             <a:avLst/>
           </a:prstGeom>
           <a:solidFill>
-            <a:srgbClr val="E0E0E0"/>
+            <a:srgbClr val="D8E8C8"/>
           </a:solidFill>
           <a:ln w="12700">
             <a:solidFill>
-              <a:srgbClr val="E0E0E0"/>
+              <a:srgbClr val="D8E8C8"/>
             </a:solidFill>
             <a:prstDash val="solid"/>
           </a:ln>
@@ -10269,11 +10269,11 @@
             <a:avLst/>
           </a:prstGeom>
           <a:solidFill>
-            <a:srgbClr val="555555"/>
+            <a:srgbClr val="3E5C42"/>
           </a:solidFill>
           <a:ln w="12700">
             <a:solidFill>
-              <a:srgbClr val="555555"/>
+              <a:srgbClr val="3E5C42"/>
             </a:solidFill>
             <a:prstDash val="solid"/>
           </a:ln>
@@ -10296,7 +10296,7 @@
             </a:avLst>
           </a:prstGeom>
           <a:solidFill>
-            <a:srgbClr val="0A0A0A"/>
+            <a:srgbClr val="1F3D26"/>
           </a:solidFill>
           <a:ln w="12700">
             <a:solidFill>
@@ -10333,7 +10333,7 @@
             <a:r>
               <a:rPr lang="en-US" sz="1800" b="1" dirty="0">
                 <a:solidFill>
-                  <a:srgbClr val="FFFFFF"/>
+                  <a:srgbClr val="F0F5EA"/>
                 </a:solidFill>
                 <a:latin typeface="Arial Black" pitchFamily="34" charset="0"/>
                 <a:ea typeface="Arial Black" pitchFamily="34" charset="-122"/>
@@ -10372,7 +10372,7 @@
             <a:r>
               <a:rPr lang="en-US" sz="900" dirty="0">
                 <a:solidFill>
-                  <a:srgbClr val="B0B0B0"/>
+                  <a:srgbClr val="8FAE8B"/>
                 </a:solidFill>
                 <a:latin typeface="Arial" pitchFamily="34" charset="0"/>
                 <a:ea typeface="Arial" pitchFamily="34" charset="-122"/>
@@ -10399,11 +10399,11 @@
             <a:avLst/>
           </a:prstGeom>
           <a:solidFill>
-            <a:srgbClr val="E0E0E0"/>
+            <a:srgbClr val="D8E8C8"/>
           </a:solidFill>
           <a:ln w="12700">
             <a:solidFill>
-              <a:srgbClr val="E0E0E0"/>
+              <a:srgbClr val="D8E8C8"/>
             </a:solidFill>
             <a:prstDash val="solid"/>
           </a:ln>
@@ -10424,11 +10424,11 @@
             <a:avLst/>
           </a:prstGeom>
           <a:solidFill>
-            <a:srgbClr val="555555"/>
+            <a:srgbClr val="3E5C42"/>
           </a:solidFill>
           <a:ln w="12700">
             <a:solidFill>
-              <a:srgbClr val="555555"/>
+              <a:srgbClr val="3E5C42"/>
             </a:solidFill>
             <a:prstDash val="solid"/>
           </a:ln>
@@ -10451,7 +10451,7 @@
             </a:avLst>
           </a:prstGeom>
           <a:solidFill>
-            <a:srgbClr val="0A0A0A"/>
+            <a:srgbClr val="1F3D26"/>
           </a:solidFill>
           <a:ln w="12700">
             <a:solidFill>
@@ -10488,7 +10488,7 @@
             <a:r>
               <a:rPr lang="en-US" sz="1800" b="1" dirty="0">
                 <a:solidFill>
-                  <a:srgbClr val="FFFFFF"/>
+                  <a:srgbClr val="F0F5EA"/>
                 </a:solidFill>
                 <a:latin typeface="Arial Black" pitchFamily="34" charset="0"/>
                 <a:ea typeface="Arial Black" pitchFamily="34" charset="-122"/>
@@ -10527,7 +10527,7 @@
             <a:r>
               <a:rPr lang="en-US" sz="900" dirty="0">
                 <a:solidFill>
-                  <a:srgbClr val="B0B0B0"/>
+                  <a:srgbClr val="8FAE8B"/>
                 </a:solidFill>
                 <a:latin typeface="Arial" pitchFamily="34" charset="0"/>
                 <a:ea typeface="Arial" pitchFamily="34" charset="-122"/>
@@ -10554,11 +10554,11 @@
             <a:avLst/>
           </a:prstGeom>
           <a:solidFill>
-            <a:srgbClr val="E0E0E0"/>
+            <a:srgbClr val="D8E8C8"/>
           </a:solidFill>
           <a:ln w="12700">
             <a:solidFill>
-              <a:srgbClr val="E0E0E0"/>
+              <a:srgbClr val="D8E8C8"/>
             </a:solidFill>
             <a:prstDash val="solid"/>
           </a:ln>
@@ -10579,11 +10579,11 @@
             <a:avLst/>
           </a:prstGeom>
           <a:solidFill>
-            <a:srgbClr val="555555"/>
+            <a:srgbClr val="3E5C42"/>
           </a:solidFill>
           <a:ln w="12700">
             <a:solidFill>
-              <a:srgbClr val="555555"/>
+              <a:srgbClr val="3E5C42"/>
             </a:solidFill>
             <a:prstDash val="solid"/>
           </a:ln>
@@ -10606,7 +10606,7 @@
             </a:avLst>
           </a:prstGeom>
           <a:solidFill>
-            <a:srgbClr val="0A0A0A"/>
+            <a:srgbClr val="1F3D26"/>
           </a:solidFill>
           <a:ln w="12700">
             <a:solidFill>
@@ -10643,7 +10643,7 @@
             <a:r>
               <a:rPr lang="en-US" sz="1800" b="1" dirty="0">
                 <a:solidFill>
-                  <a:srgbClr val="FFFFFF"/>
+                  <a:srgbClr val="F0F5EA"/>
                 </a:solidFill>
                 <a:latin typeface="Arial Black" pitchFamily="34" charset="0"/>
                 <a:ea typeface="Arial Black" pitchFamily="34" charset="-122"/>
@@ -10682,7 +10682,7 @@
             <a:r>
               <a:rPr lang="en-US" sz="900" dirty="0">
                 <a:solidFill>
-                  <a:srgbClr val="B0B0B0"/>
+                  <a:srgbClr val="8FAE8B"/>
                 </a:solidFill>
                 <a:latin typeface="Arial" pitchFamily="34" charset="0"/>
                 <a:ea typeface="Arial" pitchFamily="34" charset="-122"/>
@@ -10709,11 +10709,11 @@
             <a:avLst/>
           </a:prstGeom>
           <a:solidFill>
-            <a:srgbClr val="E0E0E0"/>
+            <a:srgbClr val="D8E8C8"/>
           </a:solidFill>
           <a:ln w="12700">
             <a:solidFill>
-              <a:srgbClr val="E0E0E0"/>
+              <a:srgbClr val="D8E8C8"/>
             </a:solidFill>
             <a:prstDash val="solid"/>
           </a:ln>
@@ -10734,11 +10734,11 @@
             <a:avLst/>
           </a:prstGeom>
           <a:solidFill>
-            <a:srgbClr val="555555"/>
+            <a:srgbClr val="3E5C42"/>
           </a:solidFill>
           <a:ln w="12700">
             <a:solidFill>
-              <a:srgbClr val="555555"/>
+              <a:srgbClr val="3E5C42"/>
             </a:solidFill>
             <a:prstDash val="solid"/>
           </a:ln>
@@ -10761,7 +10761,7 @@
             </a:avLst>
           </a:prstGeom>
           <a:solidFill>
-            <a:srgbClr val="0A0A0A"/>
+            <a:srgbClr val="1F3D26"/>
           </a:solidFill>
           <a:ln w="12700">
             <a:solidFill>
@@ -10798,7 +10798,7 @@
             <a:r>
               <a:rPr lang="en-US" sz="1800" b="1" dirty="0">
                 <a:solidFill>
-                  <a:srgbClr val="FFFFFF"/>
+                  <a:srgbClr val="F0F5EA"/>
                 </a:solidFill>
                 <a:latin typeface="Arial Black" pitchFamily="34" charset="0"/>
                 <a:ea typeface="Arial Black" pitchFamily="34" charset="-122"/>
@@ -10837,7 +10837,7 @@
             <a:r>
               <a:rPr lang="en-US" sz="900" dirty="0">
                 <a:solidFill>
-                  <a:srgbClr val="B0B0B0"/>
+                  <a:srgbClr val="8FAE8B"/>
                 </a:solidFill>
                 <a:latin typeface="Arial" pitchFamily="34" charset="0"/>
                 <a:ea typeface="Arial" pitchFamily="34" charset="-122"/>
@@ -10864,11 +10864,11 @@
             <a:avLst/>
           </a:prstGeom>
           <a:solidFill>
-            <a:srgbClr val="E0E0E0"/>
+            <a:srgbClr val="D8E8C8"/>
           </a:solidFill>
           <a:ln w="12700">
             <a:solidFill>
-              <a:srgbClr val="E0E0E0"/>
+              <a:srgbClr val="D8E8C8"/>
             </a:solidFill>
             <a:prstDash val="solid"/>
           </a:ln>
@@ -10889,11 +10889,11 @@
             <a:avLst/>
           </a:prstGeom>
           <a:solidFill>
-            <a:srgbClr val="555555"/>
+            <a:srgbClr val="3E5C42"/>
           </a:solidFill>
           <a:ln w="12700">
             <a:solidFill>
-              <a:srgbClr val="555555"/>
+              <a:srgbClr val="3E5C42"/>
             </a:solidFill>
             <a:prstDash val="solid"/>
           </a:ln>
@@ -10916,7 +10916,7 @@
             </a:avLst>
           </a:prstGeom>
           <a:solidFill>
-            <a:srgbClr val="0A0A0A"/>
+            <a:srgbClr val="1F3D26"/>
           </a:solidFill>
           <a:ln w="12700">
             <a:solidFill>
@@ -10953,7 +10953,7 @@
             <a:r>
               <a:rPr lang="en-US" sz="1800" b="1" dirty="0">
                 <a:solidFill>
-                  <a:srgbClr val="FFFFFF"/>
+                  <a:srgbClr val="F0F5EA"/>
                 </a:solidFill>
                 <a:latin typeface="Arial Black" pitchFamily="34" charset="0"/>
                 <a:ea typeface="Arial Black" pitchFamily="34" charset="-122"/>
@@ -10992,7 +10992,7 @@
             <a:r>
               <a:rPr lang="en-US" sz="900" dirty="0">
                 <a:solidFill>
-                  <a:srgbClr val="B0B0B0"/>
+                  <a:srgbClr val="8FAE8B"/>
                 </a:solidFill>
                 <a:latin typeface="Arial" pitchFamily="34" charset="0"/>
                 <a:ea typeface="Arial" pitchFamily="34" charset="-122"/>
@@ -11031,7 +11031,7 @@
             <a:r>
               <a:rPr lang="en-US" sz="1150" dirty="0">
                 <a:solidFill>
-                  <a:srgbClr val="0A0A0A"/>
+                  <a:srgbClr val="2C5F2D"/>
                 </a:solidFill>
                 <a:latin typeface="Arial" pitchFamily="34" charset="0"/>
                 <a:ea typeface="Arial" pitchFamily="34" charset="-122"/>
@@ -11058,11 +11058,11 @@
             <a:avLst/>
           </a:prstGeom>
           <a:solidFill>
-            <a:srgbClr val="E0E0E0"/>
+            <a:srgbClr val="D8E8C8"/>
           </a:solidFill>
           <a:ln w="12700">
             <a:solidFill>
-              <a:srgbClr val="E0E0E0"/>
+              <a:srgbClr val="D8E8C8"/>
             </a:solidFill>
             <a:prstDash val="solid"/>
           </a:ln>
@@ -11085,7 +11085,7 @@
             </a:avLst>
           </a:prstGeom>
           <a:solidFill>
-            <a:srgbClr val="0A0A0A"/>
+            <a:srgbClr val="1F3D26"/>
           </a:solidFill>
           <a:ln w="12700">
             <a:solidFill>
@@ -11110,11 +11110,11 @@
             <a:avLst/>
           </a:prstGeom>
           <a:solidFill>
-            <a:srgbClr val="FF5A1F"/>
+            <a:srgbClr val="97BC62"/>
           </a:solidFill>
           <a:ln w="12700">
             <a:solidFill>
-              <a:srgbClr val="FF5A1F"/>
+              <a:srgbClr val="97BC62"/>
             </a:solidFill>
             <a:prstDash val="solid"/>
           </a:ln>
@@ -11147,7 +11147,7 @@
             <a:r>
               <a:rPr lang="en-US" sz="1050" dirty="0">
                 <a:solidFill>
-                  <a:srgbClr val="FFFFFF"/>
+                  <a:srgbClr val="F0F5EA"/>
                 </a:solidFill>
                 <a:latin typeface="Arial" pitchFamily="34" charset="0"/>
                 <a:ea typeface="Arial" pitchFamily="34" charset="-122"/>
@@ -11186,7 +11186,7 @@
             <a:r>
               <a:rPr lang="en-US" sz="850" dirty="0">
                 <a:solidFill>
-                  <a:srgbClr val="6E6E6E"/>
+                  <a:srgbClr val="5A6B5A"/>
                 </a:solidFill>
                 <a:latin typeface="Arial" pitchFamily="34" charset="0"/>
                 <a:ea typeface="Arial" pitchFamily="34" charset="-122"/>
@@ -11215,7 +11215,7 @@
     <p:bg>
       <p:bgPr>
         <a:solidFill>
-          <a:srgbClr val="FFFFFF"/>
+          <a:srgbClr val="F0F5EA"/>
         </a:solidFill>
       </p:bgPr>
     </p:bg>
@@ -11260,7 +11260,7 @@
             <a:r>
               <a:rPr lang="en-US" sz="2800" b="1" dirty="0">
                 <a:solidFill>
-                  <a:srgbClr val="E0E0E0"/>
+                  <a:srgbClr val="D8E8C8"/>
                 </a:solidFill>
                 <a:latin typeface="Arial Black" pitchFamily="34" charset="0"/>
                 <a:ea typeface="Arial Black" pitchFamily="34" charset="-122"/>
@@ -11306,7 +11306,7 @@
             <a:r>
               <a:rPr lang="en-US" sz="2800" b="1" dirty="0">
                 <a:solidFill>
-                  <a:srgbClr val="0A0A0A"/>
+                  <a:srgbClr val="2C5F2D"/>
                 </a:solidFill>
                 <a:latin typeface="Arial Black" pitchFamily="34" charset="0"/>
                 <a:ea typeface="Arial Black" pitchFamily="34" charset="-122"/>
@@ -11333,11 +11333,11 @@
             <a:avLst/>
           </a:prstGeom>
           <a:solidFill>
-            <a:srgbClr val="0A0A0A"/>
+            <a:srgbClr val="2C5F2D"/>
           </a:solidFill>
           <a:ln w="12700">
             <a:solidFill>
-              <a:srgbClr val="0A0A0A"/>
+              <a:srgbClr val="2C5F2D"/>
             </a:solidFill>
             <a:prstDash val="solid"/>
           </a:ln>
@@ -11358,11 +11358,11 @@
             <a:avLst/>
           </a:prstGeom>
           <a:solidFill>
-            <a:srgbClr val="E0E0E0"/>
+            <a:srgbClr val="D8E8C8"/>
           </a:solidFill>
           <a:ln w="12700">
             <a:solidFill>
-              <a:srgbClr val="E0E0E0"/>
+              <a:srgbClr val="D8E8C8"/>
             </a:solidFill>
             <a:prstDash val="solid"/>
           </a:ln>
@@ -11385,7 +11385,7 @@
             </a:avLst>
           </a:prstGeom>
           <a:solidFill>
-            <a:srgbClr val="F2F2F2"/>
+            <a:srgbClr val="EAF2E4"/>
           </a:solidFill>
           <a:ln w="12700">
             <a:solidFill>
@@ -11422,7 +11422,7 @@
             <a:r>
               <a:rPr lang="en-US" sz="1200" b="1" dirty="0">
                 <a:solidFill>
-                  <a:srgbClr val="6E6E6E"/>
+                  <a:srgbClr val="5A6B5A"/>
                 </a:solidFill>
                 <a:latin typeface="Arial" pitchFamily="34" charset="0"/>
                 <a:ea typeface="Arial" pitchFamily="34" charset="-122"/>
@@ -11461,7 +11461,7 @@
             <a:r>
               <a:rPr lang="en-US" sz="1700" i="1" dirty="0">
                 <a:solidFill>
-                  <a:srgbClr val="FF5A1F"/>
+                  <a:srgbClr val="97BC62"/>
                 </a:solidFill>
                 <a:latin typeface="Arial Black" pitchFamily="34" charset="0"/>
                 <a:ea typeface="Arial Black" pitchFamily="34" charset="-122"/>
@@ -11500,7 +11500,7 @@
             <a:r>
               <a:rPr lang="en-US" sz="1100" dirty="0">
                 <a:solidFill>
-                  <a:srgbClr val="6E6E6E"/>
+                  <a:srgbClr val="5A6B5A"/>
                 </a:solidFill>
                 <a:latin typeface="Arial" pitchFamily="34" charset="0"/>
                 <a:ea typeface="Arial" pitchFamily="34" charset="-122"/>
@@ -11527,11 +11527,11 @@
             <a:avLst/>
           </a:prstGeom>
           <a:solidFill>
-            <a:srgbClr val="E0E0E0"/>
+            <a:srgbClr val="D8E8C8"/>
           </a:solidFill>
           <a:ln w="12700">
             <a:solidFill>
-              <a:srgbClr val="E0E0E0"/>
+              <a:srgbClr val="D8E8C8"/>
             </a:solidFill>
             <a:prstDash val="solid"/>
           </a:ln>
@@ -11554,7 +11554,7 @@
             </a:avLst>
           </a:prstGeom>
           <a:solidFill>
-            <a:srgbClr val="0A0A0A"/>
+            <a:srgbClr val="1F3D26"/>
           </a:solidFill>
           <a:ln w="12700">
             <a:solidFill>
@@ -11591,7 +11591,7 @@
             <a:r>
               <a:rPr lang="en-US" sz="1200" b="1" dirty="0">
                 <a:solidFill>
-                  <a:srgbClr val="FFFFFF"/>
+                  <a:srgbClr val="F0F5EA"/>
                 </a:solidFill>
                 <a:latin typeface="Arial Black" pitchFamily="34" charset="0"/>
                 <a:ea typeface="Arial Black" pitchFamily="34" charset="-122"/>
@@ -11630,7 +11630,7 @@
             <a:r>
               <a:rPr lang="en-US" sz="1250" dirty="0">
                 <a:solidFill>
-                  <a:srgbClr val="FFFFFF"/>
+                  <a:srgbClr val="F0F5EA"/>
                 </a:solidFill>
                 <a:latin typeface="Arial" pitchFamily="34" charset="0"/>
                 <a:ea typeface="Arial" pitchFamily="34" charset="-122"/>
@@ -11681,7 +11681,7 @@
                       <a:r>
                         <a:rPr lang="en-US" sz="1200" b="1" dirty="0">
                           <a:solidFill>
-                            <a:srgbClr val="FFFFFF"/>
+                            <a:srgbClr val="F0F5EA"/>
                           </a:solidFill>
                           <a:latin typeface="Arial Black" pitchFamily="34" charset="0"/>
                           <a:ea typeface="Arial Black" pitchFamily="34" charset="-122"/>
@@ -11699,7 +11699,7 @@
                   <a:tcPr marL="54864" marR="54864" marT="54864" marB="54864" anchor="mid">
                     <a:lnL w="6350" cap="flat" cmpd="sng" algn="ctr">
                       <a:solidFill>
-                        <a:srgbClr val="D9D9D9"/>
+                        <a:srgbClr val="C8D9C0"/>
                       </a:solidFill>
                       <a:prstDash val="solid"/>
                       <a:round/>
@@ -11708,7 +11708,7 @@
                     </a:lnL>
                     <a:lnR w="6350" cap="flat" cmpd="sng" algn="ctr">
                       <a:solidFill>
-                        <a:srgbClr val="D9D9D9"/>
+                        <a:srgbClr val="C8D9C0"/>
                       </a:solidFill>
                       <a:prstDash val="solid"/>
                       <a:round/>
@@ -11717,7 +11717,7 @@
                     </a:lnR>
                     <a:lnT w="6350" cap="flat" cmpd="sng" algn="ctr">
                       <a:solidFill>
-                        <a:srgbClr val="D9D9D9"/>
+                        <a:srgbClr val="C8D9C0"/>
                       </a:solidFill>
                       <a:prstDash val="solid"/>
                       <a:round/>
@@ -11726,7 +11726,7 @@
                     </a:lnT>
                     <a:lnB w="6350" cap="flat" cmpd="sng" algn="ctr">
                       <a:solidFill>
-                        <a:srgbClr val="D9D9D9"/>
+                        <a:srgbClr val="C8D9C0"/>
                       </a:solidFill>
                       <a:prstDash val="solid"/>
                       <a:round/>
@@ -11734,7 +11734,7 @@
                       <a:tailEnd type="none" w="med" len="med"/>
                     </a:lnB>
                     <a:solidFill>
-                      <a:srgbClr val="0A0A0A"/>
+                      <a:srgbClr val="1F3D26"/>
                     </a:solidFill>
                   </a:tcPr>
                 </a:tc>
@@ -11757,7 +11757,7 @@
                       <a:r>
                         <a:rPr lang="en-US" sz="1050" b="1" dirty="0">
                           <a:solidFill>
-                            <a:srgbClr val="0A0A0A"/>
+                            <a:srgbClr val="2C5F2D"/>
                           </a:solidFill>
                           <a:latin typeface="Arial" pitchFamily="34" charset="0"/>
                           <a:ea typeface="Arial" pitchFamily="34" charset="-122"/>
@@ -11775,7 +11775,7 @@
                   <a:tcPr marL="54864" marR="54864" marT="54864" marB="54864" anchor="mid">
                     <a:lnL w="6350" cap="flat" cmpd="sng" algn="ctr">
                       <a:solidFill>
-                        <a:srgbClr val="D9D9D9"/>
+                        <a:srgbClr val="C8D9C0"/>
                       </a:solidFill>
                       <a:prstDash val="solid"/>
                       <a:round/>
@@ -11784,7 +11784,7 @@
                     </a:lnL>
                     <a:lnR w="6350" cap="flat" cmpd="sng" algn="ctr">
                       <a:solidFill>
-                        <a:srgbClr val="D9D9D9"/>
+                        <a:srgbClr val="C8D9C0"/>
                       </a:solidFill>
                       <a:prstDash val="solid"/>
                       <a:round/>
@@ -11793,7 +11793,7 @@
                     </a:lnR>
                     <a:lnT w="6350" cap="flat" cmpd="sng" algn="ctr">
                       <a:solidFill>
-                        <a:srgbClr val="D9D9D9"/>
+                        <a:srgbClr val="C8D9C0"/>
                       </a:solidFill>
                       <a:prstDash val="solid"/>
                       <a:round/>
@@ -11802,7 +11802,7 @@
                     </a:lnT>
                     <a:lnB w="6350" cap="flat" cmpd="sng" algn="ctr">
                       <a:solidFill>
-                        <a:srgbClr val="D9D9D9"/>
+                        <a:srgbClr val="C8D9C0"/>
                       </a:solidFill>
                       <a:prstDash val="solid"/>
                       <a:round/>
@@ -11810,7 +11810,7 @@
                       <a:tailEnd type="none" w="med" len="med"/>
                     </a:lnB>
                     <a:solidFill>
-                      <a:srgbClr val="F7F7F7"/>
+                      <a:srgbClr val="F4F9EF"/>
                     </a:solidFill>
                   </a:tcPr>
                 </a:tc>
@@ -11825,7 +11825,7 @@
                       <a:r>
                         <a:rPr lang="en-US" sz="1050" dirty="0">
                           <a:solidFill>
-                            <a:srgbClr val="6E6E6E"/>
+                            <a:srgbClr val="5A6B5A"/>
                           </a:solidFill>
                           <a:latin typeface="Arial" pitchFamily="34" charset="0"/>
                           <a:ea typeface="Arial" pitchFamily="34" charset="-122"/>
@@ -11843,7 +11843,7 @@
                   <a:tcPr marL="54864" marR="54864" marT="54864" marB="54864" anchor="mid">
                     <a:lnL w="6350" cap="flat" cmpd="sng" algn="ctr">
                       <a:solidFill>
-                        <a:srgbClr val="D9D9D9"/>
+                        <a:srgbClr val="C8D9C0"/>
                       </a:solidFill>
                       <a:prstDash val="solid"/>
                       <a:round/>
@@ -11852,7 +11852,7 @@
                     </a:lnL>
                     <a:lnR w="6350" cap="flat" cmpd="sng" algn="ctr">
                       <a:solidFill>
-                        <a:srgbClr val="D9D9D9"/>
+                        <a:srgbClr val="C8D9C0"/>
                       </a:solidFill>
                       <a:prstDash val="solid"/>
                       <a:round/>
@@ -11861,7 +11861,7 @@
                     </a:lnR>
                     <a:lnT w="6350" cap="flat" cmpd="sng" algn="ctr">
                       <a:solidFill>
-                        <a:srgbClr val="D9D9D9"/>
+                        <a:srgbClr val="C8D9C0"/>
                       </a:solidFill>
                       <a:prstDash val="solid"/>
                       <a:round/>
@@ -11870,7 +11870,7 @@
                     </a:lnT>
                     <a:lnB w="6350" cap="flat" cmpd="sng" algn="ctr">
                       <a:solidFill>
-                        <a:srgbClr val="D9D9D9"/>
+                        <a:srgbClr val="C8D9C0"/>
                       </a:solidFill>
                       <a:prstDash val="solid"/>
                       <a:round/>
@@ -11878,7 +11878,7 @@
                       <a:tailEnd type="none" w="med" len="med"/>
                     </a:lnB>
                     <a:solidFill>
-                      <a:srgbClr val="F7F7F7"/>
+                      <a:srgbClr val="F4F9EF"/>
                     </a:solidFill>
                   </a:tcPr>
                 </a:tc>
@@ -11893,7 +11893,7 @@
                       <a:r>
                         <a:rPr lang="en-US" sz="1050" dirty="0">
                           <a:solidFill>
-                            <a:srgbClr val="B0B0B0"/>
+                            <a:srgbClr val="8FAE8B"/>
                           </a:solidFill>
                           <a:latin typeface="Arial" pitchFamily="34" charset="0"/>
                           <a:ea typeface="Arial" pitchFamily="34" charset="-122"/>
@@ -11911,7 +11911,7 @@
                   <a:tcPr marL="54864" marR="54864" marT="54864" marB="54864" anchor="mid">
                     <a:lnL w="6350" cap="flat" cmpd="sng" algn="ctr">
                       <a:solidFill>
-                        <a:srgbClr val="D9D9D9"/>
+                        <a:srgbClr val="C8D9C0"/>
                       </a:solidFill>
                       <a:prstDash val="solid"/>
                       <a:round/>
@@ -11920,7 +11920,7 @@
                     </a:lnL>
                     <a:lnR w="6350" cap="flat" cmpd="sng" algn="ctr">
                       <a:solidFill>
-                        <a:srgbClr val="D9D9D9"/>
+                        <a:srgbClr val="C8D9C0"/>
                       </a:solidFill>
                       <a:prstDash val="solid"/>
                       <a:round/>
@@ -11929,7 +11929,7 @@
                     </a:lnR>
                     <a:lnT w="6350" cap="flat" cmpd="sng" algn="ctr">
                       <a:solidFill>
-                        <a:srgbClr val="D9D9D9"/>
+                        <a:srgbClr val="C8D9C0"/>
                       </a:solidFill>
                       <a:prstDash val="solid"/>
                       <a:round/>
@@ -11938,7 +11938,7 @@
                     </a:lnT>
                     <a:lnB w="6350" cap="flat" cmpd="sng" algn="ctr">
                       <a:solidFill>
-                        <a:srgbClr val="D9D9D9"/>
+                        <a:srgbClr val="C8D9C0"/>
                       </a:solidFill>
                       <a:prstDash val="solid"/>
                       <a:round/>
@@ -11946,7 +11946,7 @@
                       <a:tailEnd type="none" w="med" len="med"/>
                     </a:lnB>
                     <a:solidFill>
-                      <a:srgbClr val="F7F7F7"/>
+                      <a:srgbClr val="F4F9EF"/>
                     </a:solidFill>
                   </a:tcPr>
                 </a:tc>
@@ -11963,7 +11963,7 @@
                       <a:r>
                         <a:rPr lang="en-US" sz="1050" b="1" dirty="0">
                           <a:solidFill>
-                            <a:srgbClr val="0A0A0A"/>
+                            <a:srgbClr val="2C5F2D"/>
                           </a:solidFill>
                           <a:latin typeface="Arial" pitchFamily="34" charset="0"/>
                           <a:ea typeface="Arial" pitchFamily="34" charset="-122"/>
@@ -11981,7 +11981,7 @@
                   <a:tcPr marL="54864" marR="54864" marT="54864" marB="54864" anchor="mid">
                     <a:lnL w="6350" cap="flat" cmpd="sng" algn="ctr">
                       <a:solidFill>
-                        <a:srgbClr val="D9D9D9"/>
+                        <a:srgbClr val="C8D9C0"/>
                       </a:solidFill>
                       <a:prstDash val="solid"/>
                       <a:round/>
@@ -11990,7 +11990,7 @@
                     </a:lnL>
                     <a:lnR w="6350" cap="flat" cmpd="sng" algn="ctr">
                       <a:solidFill>
-                        <a:srgbClr val="D9D9D9"/>
+                        <a:srgbClr val="C8D9C0"/>
                       </a:solidFill>
                       <a:prstDash val="solid"/>
                       <a:round/>
@@ -11999,7 +11999,7 @@
                     </a:lnR>
                     <a:lnT w="6350" cap="flat" cmpd="sng" algn="ctr">
                       <a:solidFill>
-                        <a:srgbClr val="D9D9D9"/>
+                        <a:srgbClr val="C8D9C0"/>
                       </a:solidFill>
                       <a:prstDash val="solid"/>
                       <a:round/>
@@ -12008,7 +12008,7 @@
                     </a:lnT>
                     <a:lnB w="6350" cap="flat" cmpd="sng" algn="ctr">
                       <a:solidFill>
-                        <a:srgbClr val="D9D9D9"/>
+                        <a:srgbClr val="C8D9C0"/>
                       </a:solidFill>
                       <a:prstDash val="solid"/>
                       <a:round/>
@@ -12016,7 +12016,7 @@
                       <a:tailEnd type="none" w="med" len="med"/>
                     </a:lnB>
                     <a:solidFill>
-                      <a:srgbClr val="FFFFFF"/>
+                      <a:srgbClr val="F0F5EA"/>
                     </a:solidFill>
                   </a:tcPr>
                 </a:tc>
@@ -12031,7 +12031,7 @@
                       <a:r>
                         <a:rPr lang="en-US" sz="1050" dirty="0">
                           <a:solidFill>
-                            <a:srgbClr val="6E6E6E"/>
+                            <a:srgbClr val="5A6B5A"/>
                           </a:solidFill>
                           <a:latin typeface="Arial" pitchFamily="34" charset="0"/>
                           <a:ea typeface="Arial" pitchFamily="34" charset="-122"/>
@@ -12049,7 +12049,7 @@
                   <a:tcPr marL="54864" marR="54864" marT="54864" marB="54864" anchor="mid">
                     <a:lnL w="6350" cap="flat" cmpd="sng" algn="ctr">
                       <a:solidFill>
-                        <a:srgbClr val="D9D9D9"/>
+                        <a:srgbClr val="C8D9C0"/>
                       </a:solidFill>
                       <a:prstDash val="solid"/>
                       <a:round/>
@@ -12058,7 +12058,7 @@
                     </a:lnL>
                     <a:lnR w="6350" cap="flat" cmpd="sng" algn="ctr">
                       <a:solidFill>
-                        <a:srgbClr val="D9D9D9"/>
+                        <a:srgbClr val="C8D9C0"/>
                       </a:solidFill>
                       <a:prstDash val="solid"/>
                       <a:round/>
@@ -12067,7 +12067,7 @@
                     </a:lnR>
                     <a:lnT w="6350" cap="flat" cmpd="sng" algn="ctr">
                       <a:solidFill>
-                        <a:srgbClr val="D9D9D9"/>
+                        <a:srgbClr val="C8D9C0"/>
                       </a:solidFill>
                       <a:prstDash val="solid"/>
                       <a:round/>
@@ -12076,7 +12076,7 @@
                     </a:lnT>
                     <a:lnB w="6350" cap="flat" cmpd="sng" algn="ctr">
                       <a:solidFill>
-                        <a:srgbClr val="D9D9D9"/>
+                        <a:srgbClr val="C8D9C0"/>
                       </a:solidFill>
                       <a:prstDash val="solid"/>
                       <a:round/>
@@ -12084,7 +12084,7 @@
                       <a:tailEnd type="none" w="med" len="med"/>
                     </a:lnB>
                     <a:solidFill>
-                      <a:srgbClr val="FFFFFF"/>
+                      <a:srgbClr val="F0F5EA"/>
                     </a:solidFill>
                   </a:tcPr>
                 </a:tc>
@@ -12099,7 +12099,7 @@
                       <a:r>
                         <a:rPr lang="en-US" sz="1050" dirty="0">
                           <a:solidFill>
-                            <a:srgbClr val="B0B0B0"/>
+                            <a:srgbClr val="8FAE8B"/>
                           </a:solidFill>
                           <a:latin typeface="Arial" pitchFamily="34" charset="0"/>
                           <a:ea typeface="Arial" pitchFamily="34" charset="-122"/>
@@ -12117,7 +12117,7 @@
                   <a:tcPr marL="54864" marR="54864" marT="54864" marB="54864" anchor="mid">
                     <a:lnL w="6350" cap="flat" cmpd="sng" algn="ctr">
                       <a:solidFill>
-                        <a:srgbClr val="D9D9D9"/>
+                        <a:srgbClr val="C8D9C0"/>
                       </a:solidFill>
                       <a:prstDash val="solid"/>
                       <a:round/>
@@ -12126,7 +12126,7 @@
                     </a:lnL>
                     <a:lnR w="6350" cap="flat" cmpd="sng" algn="ctr">
                       <a:solidFill>
-                        <a:srgbClr val="D9D9D9"/>
+                        <a:srgbClr val="C8D9C0"/>
                       </a:solidFill>
                       <a:prstDash val="solid"/>
                       <a:round/>
@@ -12135,7 +12135,7 @@
                     </a:lnR>
                     <a:lnT w="6350" cap="flat" cmpd="sng" algn="ctr">
                       <a:solidFill>
-                        <a:srgbClr val="D9D9D9"/>
+                        <a:srgbClr val="C8D9C0"/>
                       </a:solidFill>
                       <a:prstDash val="solid"/>
                       <a:round/>
@@ -12144,7 +12144,7 @@
                     </a:lnT>
                     <a:lnB w="6350" cap="flat" cmpd="sng" algn="ctr">
                       <a:solidFill>
-                        <a:srgbClr val="D9D9D9"/>
+                        <a:srgbClr val="C8D9C0"/>
                       </a:solidFill>
                       <a:prstDash val="solid"/>
                       <a:round/>
@@ -12152,7 +12152,7 @@
                       <a:tailEnd type="none" w="med" len="med"/>
                     </a:lnB>
                     <a:solidFill>
-                      <a:srgbClr val="FFFFFF"/>
+                      <a:srgbClr val="F0F5EA"/>
                     </a:solidFill>
                   </a:tcPr>
                 </a:tc>
@@ -12169,7 +12169,7 @@
                       <a:r>
                         <a:rPr lang="en-US" sz="1050" b="1" dirty="0">
                           <a:solidFill>
-                            <a:srgbClr val="0A0A0A"/>
+                            <a:srgbClr val="2C5F2D"/>
                           </a:solidFill>
                           <a:latin typeface="Arial" pitchFamily="34" charset="0"/>
                           <a:ea typeface="Arial" pitchFamily="34" charset="-122"/>
@@ -12187,7 +12187,7 @@
                   <a:tcPr marL="54864" marR="54864" marT="54864" marB="54864" anchor="mid">
                     <a:lnL w="6350" cap="flat" cmpd="sng" algn="ctr">
                       <a:solidFill>
-                        <a:srgbClr val="D9D9D9"/>
+                        <a:srgbClr val="C8D9C0"/>
                       </a:solidFill>
                       <a:prstDash val="solid"/>
                       <a:round/>
@@ -12196,7 +12196,7 @@
                     </a:lnL>
                     <a:lnR w="6350" cap="flat" cmpd="sng" algn="ctr">
                       <a:solidFill>
-                        <a:srgbClr val="D9D9D9"/>
+                        <a:srgbClr val="C8D9C0"/>
                       </a:solidFill>
                       <a:prstDash val="solid"/>
                       <a:round/>
@@ -12205,7 +12205,7 @@
                     </a:lnR>
                     <a:lnT w="6350" cap="flat" cmpd="sng" algn="ctr">
                       <a:solidFill>
-                        <a:srgbClr val="D9D9D9"/>
+                        <a:srgbClr val="C8D9C0"/>
                       </a:solidFill>
                       <a:prstDash val="solid"/>
                       <a:round/>
@@ -12214,7 +12214,7 @@
                     </a:lnT>
                     <a:lnB w="6350" cap="flat" cmpd="sng" algn="ctr">
                       <a:solidFill>
-                        <a:srgbClr val="D9D9D9"/>
+                        <a:srgbClr val="C8D9C0"/>
                       </a:solidFill>
                       <a:prstDash val="solid"/>
                       <a:round/>
@@ -12222,7 +12222,7 @@
                       <a:tailEnd type="none" w="med" len="med"/>
                     </a:lnB>
                     <a:solidFill>
-                      <a:srgbClr val="F7F7F7"/>
+                      <a:srgbClr val="F4F9EF"/>
                     </a:solidFill>
                   </a:tcPr>
                 </a:tc>
@@ -12237,7 +12237,7 @@
                       <a:r>
                         <a:rPr lang="en-US" sz="1050" dirty="0">
                           <a:solidFill>
-                            <a:srgbClr val="6E6E6E"/>
+                            <a:srgbClr val="5A6B5A"/>
                           </a:solidFill>
                           <a:latin typeface="Arial" pitchFamily="34" charset="0"/>
                           <a:ea typeface="Arial" pitchFamily="34" charset="-122"/>
@@ -12255,7 +12255,7 @@
                   <a:tcPr marL="54864" marR="54864" marT="54864" marB="54864" anchor="mid">
                     <a:lnL w="6350" cap="flat" cmpd="sng" algn="ctr">
                       <a:solidFill>
-                        <a:srgbClr val="D9D9D9"/>
+                        <a:srgbClr val="C8D9C0"/>
                       </a:solidFill>
                       <a:prstDash val="solid"/>
                       <a:round/>
@@ -12264,7 +12264,7 @@
                     </a:lnL>
                     <a:lnR w="6350" cap="flat" cmpd="sng" algn="ctr">
                       <a:solidFill>
-                        <a:srgbClr val="D9D9D9"/>
+                        <a:srgbClr val="C8D9C0"/>
                       </a:solidFill>
                       <a:prstDash val="solid"/>
                       <a:round/>
@@ -12273,7 +12273,7 @@
                     </a:lnR>
                     <a:lnT w="6350" cap="flat" cmpd="sng" algn="ctr">
                       <a:solidFill>
-                        <a:srgbClr val="D9D9D9"/>
+                        <a:srgbClr val="C8D9C0"/>
                       </a:solidFill>
                       <a:prstDash val="solid"/>
                       <a:round/>
@@ -12282,7 +12282,7 @@
                     </a:lnT>
                     <a:lnB w="6350" cap="flat" cmpd="sng" algn="ctr">
                       <a:solidFill>
-                        <a:srgbClr val="D9D9D9"/>
+                        <a:srgbClr val="C8D9C0"/>
                       </a:solidFill>
                       <a:prstDash val="solid"/>
                       <a:round/>
@@ -12290,7 +12290,7 @@
                       <a:tailEnd type="none" w="med" len="med"/>
                     </a:lnB>
                     <a:solidFill>
-                      <a:srgbClr val="F7F7F7"/>
+                      <a:srgbClr val="F4F9EF"/>
                     </a:solidFill>
                   </a:tcPr>
                 </a:tc>
@@ -12305,7 +12305,7 @@
                       <a:r>
                         <a:rPr lang="en-US" sz="1050" dirty="0">
                           <a:solidFill>
-                            <a:srgbClr val="B0B0B0"/>
+                            <a:srgbClr val="8FAE8B"/>
                           </a:solidFill>
                           <a:latin typeface="Arial" pitchFamily="34" charset="0"/>
                           <a:ea typeface="Arial" pitchFamily="34" charset="-122"/>
@@ -12323,7 +12323,7 @@
                   <a:tcPr marL="54864" marR="54864" marT="54864" marB="54864" anchor="mid">
                     <a:lnL w="6350" cap="flat" cmpd="sng" algn="ctr">
                       <a:solidFill>
-                        <a:srgbClr val="D9D9D9"/>
+                        <a:srgbClr val="C8D9C0"/>
                       </a:solidFill>
                       <a:prstDash val="solid"/>
                       <a:round/>
@@ -12332,7 +12332,7 @@
                     </a:lnL>
                     <a:lnR w="6350" cap="flat" cmpd="sng" algn="ctr">
                       <a:solidFill>
-                        <a:srgbClr val="D9D9D9"/>
+                        <a:srgbClr val="C8D9C0"/>
                       </a:solidFill>
                       <a:prstDash val="solid"/>
                       <a:round/>
@@ -12341,7 +12341,7 @@
                     </a:lnR>
                     <a:lnT w="6350" cap="flat" cmpd="sng" algn="ctr">
                       <a:solidFill>
-                        <a:srgbClr val="D9D9D9"/>
+                        <a:srgbClr val="C8D9C0"/>
                       </a:solidFill>
                       <a:prstDash val="solid"/>
                       <a:round/>
@@ -12350,7 +12350,7 @@
                     </a:lnT>
                     <a:lnB w="6350" cap="flat" cmpd="sng" algn="ctr">
                       <a:solidFill>
-                        <a:srgbClr val="D9D9D9"/>
+                        <a:srgbClr val="C8D9C0"/>
                       </a:solidFill>
                       <a:prstDash val="solid"/>
                       <a:round/>
@@ -12358,7 +12358,7 @@
                       <a:tailEnd type="none" w="med" len="med"/>
                     </a:lnB>
                     <a:solidFill>
-                      <a:srgbClr val="F7F7F7"/>
+                      <a:srgbClr val="F4F9EF"/>
                     </a:solidFill>
                   </a:tcPr>
                 </a:tc>
@@ -12375,7 +12375,7 @@
                       <a:r>
                         <a:rPr lang="en-US" sz="1050" b="1" dirty="0">
                           <a:solidFill>
-                            <a:srgbClr val="0A0A0A"/>
+                            <a:srgbClr val="2C5F2D"/>
                           </a:solidFill>
                           <a:latin typeface="Arial" pitchFamily="34" charset="0"/>
                           <a:ea typeface="Arial" pitchFamily="34" charset="-122"/>
@@ -12393,7 +12393,7 @@
                   <a:tcPr marL="54864" marR="54864" marT="54864" marB="54864" anchor="mid">
                     <a:lnL w="6350" cap="flat" cmpd="sng" algn="ctr">
                       <a:solidFill>
-                        <a:srgbClr val="D9D9D9"/>
+                        <a:srgbClr val="C8D9C0"/>
                       </a:solidFill>
                       <a:prstDash val="solid"/>
                       <a:round/>
@@ -12402,7 +12402,7 @@
                     </a:lnL>
                     <a:lnR w="6350" cap="flat" cmpd="sng" algn="ctr">
                       <a:solidFill>
-                        <a:srgbClr val="D9D9D9"/>
+                        <a:srgbClr val="C8D9C0"/>
                       </a:solidFill>
                       <a:prstDash val="solid"/>
                       <a:round/>
@@ -12411,7 +12411,7 @@
                     </a:lnR>
                     <a:lnT w="6350" cap="flat" cmpd="sng" algn="ctr">
                       <a:solidFill>
-                        <a:srgbClr val="D9D9D9"/>
+                        <a:srgbClr val="C8D9C0"/>
                       </a:solidFill>
                       <a:prstDash val="solid"/>
                       <a:round/>
@@ -12420,7 +12420,7 @@
                     </a:lnT>
                     <a:lnB w="6350" cap="flat" cmpd="sng" algn="ctr">
                       <a:solidFill>
-                        <a:srgbClr val="D9D9D9"/>
+                        <a:srgbClr val="C8D9C0"/>
                       </a:solidFill>
                       <a:prstDash val="solid"/>
                       <a:round/>
@@ -12428,7 +12428,7 @@
                       <a:tailEnd type="none" w="med" len="med"/>
                     </a:lnB>
                     <a:solidFill>
-                      <a:srgbClr val="FFFFFF"/>
+                      <a:srgbClr val="F0F5EA"/>
                     </a:solidFill>
                   </a:tcPr>
                 </a:tc>
@@ -12443,7 +12443,7 @@
                       <a:r>
                         <a:rPr lang="en-US" sz="1050" dirty="0">
                           <a:solidFill>
-                            <a:srgbClr val="6E6E6E"/>
+                            <a:srgbClr val="5A6B5A"/>
                           </a:solidFill>
                           <a:latin typeface="Arial" pitchFamily="34" charset="0"/>
                           <a:ea typeface="Arial" pitchFamily="34" charset="-122"/>
@@ -12461,7 +12461,7 @@
                   <a:tcPr marL="54864" marR="54864" marT="54864" marB="54864" anchor="mid">
                     <a:lnL w="6350" cap="flat" cmpd="sng" algn="ctr">
                       <a:solidFill>
-                        <a:srgbClr val="D9D9D9"/>
+                        <a:srgbClr val="C8D9C0"/>
                       </a:solidFill>
                       <a:prstDash val="solid"/>
                       <a:round/>
@@ -12470,7 +12470,7 @@
                     </a:lnL>
                     <a:lnR w="6350" cap="flat" cmpd="sng" algn="ctr">
                       <a:solidFill>
-                        <a:srgbClr val="D9D9D9"/>
+                        <a:srgbClr val="C8D9C0"/>
                       </a:solidFill>
                       <a:prstDash val="solid"/>
                       <a:round/>
@@ -12479,7 +12479,7 @@
                     </a:lnR>
                     <a:lnT w="6350" cap="flat" cmpd="sng" algn="ctr">
                       <a:solidFill>
-                        <a:srgbClr val="D9D9D9"/>
+                        <a:srgbClr val="C8D9C0"/>
                       </a:solidFill>
                       <a:prstDash val="solid"/>
                       <a:round/>
@@ -12488,7 +12488,7 @@
                     </a:lnT>
                     <a:lnB w="6350" cap="flat" cmpd="sng" algn="ctr">
                       <a:solidFill>
-                        <a:srgbClr val="D9D9D9"/>
+                        <a:srgbClr val="C8D9C0"/>
                       </a:solidFill>
                       <a:prstDash val="solid"/>
                       <a:round/>
@@ -12496,7 +12496,7 @@
                       <a:tailEnd type="none" w="med" len="med"/>
                     </a:lnB>
                     <a:solidFill>
-                      <a:srgbClr val="FFFFFF"/>
+                      <a:srgbClr val="F0F5EA"/>
                     </a:solidFill>
                   </a:tcPr>
                 </a:tc>
@@ -12511,7 +12511,7 @@
                       <a:r>
                         <a:rPr lang="en-US" sz="1050" dirty="0">
                           <a:solidFill>
-                            <a:srgbClr val="B0B0B0"/>
+                            <a:srgbClr val="8FAE8B"/>
                           </a:solidFill>
                           <a:latin typeface="Arial" pitchFamily="34" charset="0"/>
                           <a:ea typeface="Arial" pitchFamily="34" charset="-122"/>
@@ -12529,7 +12529,7 @@
                   <a:tcPr marL="54864" marR="54864" marT="54864" marB="54864" anchor="mid">
                     <a:lnL w="6350" cap="flat" cmpd="sng" algn="ctr">
                       <a:solidFill>
-                        <a:srgbClr val="D9D9D9"/>
+                        <a:srgbClr val="C8D9C0"/>
                       </a:solidFill>
                       <a:prstDash val="solid"/>
                       <a:round/>
@@ -12538,7 +12538,7 @@
                     </a:lnL>
                     <a:lnR w="6350" cap="flat" cmpd="sng" algn="ctr">
                       <a:solidFill>
-                        <a:srgbClr val="D9D9D9"/>
+                        <a:srgbClr val="C8D9C0"/>
                       </a:solidFill>
                       <a:prstDash val="solid"/>
                       <a:round/>
@@ -12547,7 +12547,7 @@
                     </a:lnR>
                     <a:lnT w="6350" cap="flat" cmpd="sng" algn="ctr">
                       <a:solidFill>
-                        <a:srgbClr val="D9D9D9"/>
+                        <a:srgbClr val="C8D9C0"/>
                       </a:solidFill>
                       <a:prstDash val="solid"/>
                       <a:round/>
@@ -12556,7 +12556,7 @@
                     </a:lnT>
                     <a:lnB w="6350" cap="flat" cmpd="sng" algn="ctr">
                       <a:solidFill>
-                        <a:srgbClr val="D9D9D9"/>
+                        <a:srgbClr val="C8D9C0"/>
                       </a:solidFill>
                       <a:prstDash val="solid"/>
                       <a:round/>
@@ -12564,7 +12564,7 @@
                       <a:tailEnd type="none" w="med" len="med"/>
                     </a:lnB>
                     <a:solidFill>
-                      <a:srgbClr val="FFFFFF"/>
+                      <a:srgbClr val="F0F5EA"/>
                     </a:solidFill>
                   </a:tcPr>
                 </a:tc>
@@ -12600,7 +12600,7 @@
             <a:r>
               <a:rPr lang="en-US" sz="1500" b="1" dirty="0">
                 <a:solidFill>
-                  <a:srgbClr val="E0E0E0"/>
+                  <a:srgbClr val="D8E8C8"/>
                 </a:solidFill>
                 <a:latin typeface="Arial Black" pitchFamily="34" charset="0"/>
                 <a:ea typeface="Arial Black" pitchFamily="34" charset="-122"/>
@@ -12646,7 +12646,7 @@
             <a:r>
               <a:rPr lang="en-US" sz="1500" b="1" dirty="0">
                 <a:solidFill>
-                  <a:srgbClr val="0A0A0A"/>
+                  <a:srgbClr val="2C5F2D"/>
                 </a:solidFill>
                 <a:latin typeface="Arial Black" pitchFamily="34" charset="0"/>
                 <a:ea typeface="Arial Black" pitchFamily="34" charset="-122"/>
@@ -12685,7 +12685,7 @@
             <a:r>
               <a:rPr lang="en-US" sz="850" dirty="0">
                 <a:solidFill>
-                  <a:srgbClr val="6E6E6E"/>
+                  <a:srgbClr val="5A6B5A"/>
                 </a:solidFill>
                 <a:latin typeface="Arial" pitchFamily="34" charset="0"/>
                 <a:ea typeface="Arial" pitchFamily="34" charset="-122"/>
@@ -12714,7 +12714,7 @@
     <p:bg>
       <p:bgPr>
         <a:solidFill>
-          <a:srgbClr val="0A0A0A"/>
+          <a:srgbClr val="1F3D26"/>
         </a:solidFill>
       </p:bgPr>
     </p:bg>
@@ -12759,7 +12759,7 @@
             <a:r>
               <a:rPr lang="en-US" sz="2800" b="1" dirty="0">
                 <a:solidFill>
-                  <a:srgbClr val="2A2A2A"/>
+                  <a:srgbClr val="142B1A"/>
                 </a:solidFill>
                 <a:latin typeface="Arial Black" pitchFamily="34" charset="0"/>
                 <a:ea typeface="Arial Black" pitchFamily="34" charset="-122"/>
@@ -12798,7 +12798,7 @@
             <a:r>
               <a:rPr lang="en-US" sz="2800" b="1" dirty="0">
                 <a:solidFill>
-                  <a:srgbClr val="FFFFFF"/>
+                  <a:srgbClr val="F0F5EA"/>
                 </a:solidFill>
                 <a:latin typeface="Arial Black" pitchFamily="34" charset="0"/>
                 <a:ea typeface="Arial Black" pitchFamily="34" charset="-122"/>
@@ -12825,11 +12825,11 @@
             <a:avLst/>
           </a:prstGeom>
           <a:solidFill>
-            <a:srgbClr val="FF5A1F"/>
+            <a:srgbClr val="97BC62"/>
           </a:solidFill>
           <a:ln w="12700">
             <a:solidFill>
-              <a:srgbClr val="FF5A1F"/>
+              <a:srgbClr val="97BC62"/>
             </a:solidFill>
             <a:prstDash val="solid"/>
           </a:ln>
@@ -12862,7 +12862,7 @@
             <a:r>
               <a:rPr lang="en-US" sz="1150" dirty="0">
                 <a:solidFill>
-                  <a:srgbClr val="B0B0B0"/>
+                  <a:srgbClr val="8FAE8B"/>
                 </a:solidFill>
                 <a:latin typeface="Arial" pitchFamily="34" charset="0"/>
                 <a:ea typeface="Arial" pitchFamily="34" charset="-122"/>
@@ -12889,11 +12889,11 @@
             <a:avLst/>
           </a:prstGeom>
           <a:solidFill>
-            <a:srgbClr val="2A2A2A"/>
+            <a:srgbClr val="142B1A"/>
           </a:solidFill>
           <a:ln w="12700">
             <a:solidFill>
-              <a:srgbClr val="2A2A2A"/>
+              <a:srgbClr val="142B1A"/>
             </a:solidFill>
             <a:prstDash val="solid"/>
           </a:ln>
@@ -12914,11 +12914,11 @@
             <a:avLst/>
           </a:prstGeom>
           <a:solidFill>
-            <a:srgbClr val="555555"/>
+            <a:srgbClr val="3E5C42"/>
           </a:solidFill>
           <a:ln w="12700">
             <a:solidFill>
-              <a:srgbClr val="555555"/>
+              <a:srgbClr val="3E5C42"/>
             </a:solidFill>
             <a:prstDash val="solid"/>
           </a:ln>
@@ -12941,11 +12941,11 @@
             </a:avLst>
           </a:prstGeom>
           <a:solidFill>
-            <a:srgbClr val="161616"/>
+            <a:srgbClr val="2A4A33"/>
           </a:solidFill>
           <a:ln w="12700">
             <a:solidFill>
-              <a:srgbClr val="2A2A2A"/>
+              <a:srgbClr val="142B1A"/>
             </a:solidFill>
             <a:prstDash val="solid"/>
           </a:ln>
@@ -12978,7 +12978,7 @@
             <a:r>
               <a:rPr lang="en-US" sz="1500" b="1" dirty="0">
                 <a:solidFill>
-                  <a:srgbClr val="FFFFFF"/>
+                  <a:srgbClr val="F0F5EA"/>
                 </a:solidFill>
                 <a:latin typeface="Arial Black" pitchFamily="34" charset="0"/>
                 <a:ea typeface="Arial Black" pitchFamily="34" charset="-122"/>
@@ -13017,7 +13017,7 @@
             <a:r>
               <a:rPr lang="en-US" sz="800" dirty="0">
                 <a:solidFill>
-                  <a:srgbClr val="B0B0B0"/>
+                  <a:srgbClr val="8FAE8B"/>
                 </a:solidFill>
                 <a:latin typeface="Arial" pitchFamily="34" charset="0"/>
                 <a:ea typeface="Arial" pitchFamily="34" charset="-122"/>
@@ -13056,7 +13056,7 @@
             <a:r>
               <a:rPr lang="en-US" sz="650" dirty="0">
                 <a:solidFill>
-                  <a:srgbClr val="8A8A8A"/>
+                  <a:srgbClr val="8FAE8B"/>
                 </a:solidFill>
                 <a:latin typeface="Arial" pitchFamily="34" charset="0"/>
                 <a:ea typeface="Arial" pitchFamily="34" charset="-122"/>
@@ -13083,11 +13083,11 @@
             <a:avLst/>
           </a:prstGeom>
           <a:solidFill>
-            <a:srgbClr val="2A2A2A"/>
+            <a:srgbClr val="142B1A"/>
           </a:solidFill>
           <a:ln w="12700">
             <a:solidFill>
-              <a:srgbClr val="2A2A2A"/>
+              <a:srgbClr val="142B1A"/>
             </a:solidFill>
             <a:prstDash val="solid"/>
           </a:ln>
@@ -13108,11 +13108,11 @@
             <a:avLst/>
           </a:prstGeom>
           <a:solidFill>
-            <a:srgbClr val="555555"/>
+            <a:srgbClr val="3E5C42"/>
           </a:solidFill>
           <a:ln w="12700">
             <a:solidFill>
-              <a:srgbClr val="555555"/>
+              <a:srgbClr val="3E5C42"/>
             </a:solidFill>
             <a:prstDash val="solid"/>
           </a:ln>
@@ -13135,11 +13135,11 @@
             </a:avLst>
           </a:prstGeom>
           <a:solidFill>
-            <a:srgbClr val="161616"/>
+            <a:srgbClr val="2A4A33"/>
           </a:solidFill>
           <a:ln w="12700">
             <a:solidFill>
-              <a:srgbClr val="2A2A2A"/>
+              <a:srgbClr val="142B1A"/>
             </a:solidFill>
             <a:prstDash val="solid"/>
           </a:ln>
@@ -13172,7 +13172,7 @@
             <a:r>
               <a:rPr lang="en-US" sz="1500" b="1" dirty="0">
                 <a:solidFill>
-                  <a:srgbClr val="FFFFFF"/>
+                  <a:srgbClr val="F0F5EA"/>
                 </a:solidFill>
                 <a:latin typeface="Arial Black" pitchFamily="34" charset="0"/>
                 <a:ea typeface="Arial Black" pitchFamily="34" charset="-122"/>
@@ -13211,7 +13211,7 @@
             <a:r>
               <a:rPr lang="en-US" sz="800" dirty="0">
                 <a:solidFill>
-                  <a:srgbClr val="B0B0B0"/>
+                  <a:srgbClr val="8FAE8B"/>
                 </a:solidFill>
                 <a:latin typeface="Arial" pitchFamily="34" charset="0"/>
                 <a:ea typeface="Arial" pitchFamily="34" charset="-122"/>
@@ -13250,7 +13250,7 @@
             <a:r>
               <a:rPr lang="en-US" sz="650" dirty="0">
                 <a:solidFill>
-                  <a:srgbClr val="8A8A8A"/>
+                  <a:srgbClr val="8FAE8B"/>
                 </a:solidFill>
                 <a:latin typeface="Arial" pitchFamily="34" charset="0"/>
                 <a:ea typeface="Arial" pitchFamily="34" charset="-122"/>
@@ -13277,11 +13277,11 @@
             <a:avLst/>
           </a:prstGeom>
           <a:solidFill>
-            <a:srgbClr val="2A2A2A"/>
+            <a:srgbClr val="142B1A"/>
           </a:solidFill>
           <a:ln w="12700">
             <a:solidFill>
-              <a:srgbClr val="2A2A2A"/>
+              <a:srgbClr val="142B1A"/>
             </a:solidFill>
             <a:prstDash val="solid"/>
           </a:ln>
@@ -13302,11 +13302,11 @@
             <a:avLst/>
           </a:prstGeom>
           <a:solidFill>
-            <a:srgbClr val="555555"/>
+            <a:srgbClr val="3E5C42"/>
           </a:solidFill>
           <a:ln w="12700">
             <a:solidFill>
-              <a:srgbClr val="555555"/>
+              <a:srgbClr val="3E5C42"/>
             </a:solidFill>
             <a:prstDash val="solid"/>
           </a:ln>
@@ -13329,11 +13329,11 @@
             </a:avLst>
           </a:prstGeom>
           <a:solidFill>
-            <a:srgbClr val="161616"/>
+            <a:srgbClr val="2A4A33"/>
           </a:solidFill>
           <a:ln w="12700">
             <a:solidFill>
-              <a:srgbClr val="2A2A2A"/>
+              <a:srgbClr val="142B1A"/>
             </a:solidFill>
             <a:prstDash val="solid"/>
           </a:ln>
@@ -13366,7 +13366,7 @@
             <a:r>
               <a:rPr lang="en-US" sz="1500" b="1" dirty="0">
                 <a:solidFill>
-                  <a:srgbClr val="FFFFFF"/>
+                  <a:srgbClr val="F0F5EA"/>
                 </a:solidFill>
                 <a:latin typeface="Arial Black" pitchFamily="34" charset="0"/>
                 <a:ea typeface="Arial Black" pitchFamily="34" charset="-122"/>
@@ -13405,7 +13405,7 @@
             <a:r>
               <a:rPr lang="en-US" sz="800" dirty="0">
                 <a:solidFill>
-                  <a:srgbClr val="B0B0B0"/>
+                  <a:srgbClr val="8FAE8B"/>
                 </a:solidFill>
                 <a:latin typeface="Arial" pitchFamily="34" charset="0"/>
                 <a:ea typeface="Arial" pitchFamily="34" charset="-122"/>
@@ -13444,7 +13444,7 @@
             <a:r>
               <a:rPr lang="en-US" sz="650" dirty="0">
                 <a:solidFill>
-                  <a:srgbClr val="8A8A8A"/>
+                  <a:srgbClr val="8FAE8B"/>
                 </a:solidFill>
                 <a:latin typeface="Arial" pitchFamily="34" charset="0"/>
                 <a:ea typeface="Arial" pitchFamily="34" charset="-122"/>
@@ -13471,11 +13471,11 @@
             <a:avLst/>
           </a:prstGeom>
           <a:solidFill>
-            <a:srgbClr val="2A2A2A"/>
+            <a:srgbClr val="142B1A"/>
           </a:solidFill>
           <a:ln w="12700">
             <a:solidFill>
-              <a:srgbClr val="2A2A2A"/>
+              <a:srgbClr val="142B1A"/>
             </a:solidFill>
             <a:prstDash val="solid"/>
           </a:ln>
@@ -13496,11 +13496,11 @@
             <a:avLst/>
           </a:prstGeom>
           <a:solidFill>
-            <a:srgbClr val="555555"/>
+            <a:srgbClr val="3E5C42"/>
           </a:solidFill>
           <a:ln w="12700">
             <a:solidFill>
-              <a:srgbClr val="555555"/>
+              <a:srgbClr val="3E5C42"/>
             </a:solidFill>
             <a:prstDash val="solid"/>
           </a:ln>
@@ -13523,11 +13523,11 @@
             </a:avLst>
           </a:prstGeom>
           <a:solidFill>
-            <a:srgbClr val="161616"/>
+            <a:srgbClr val="2A4A33"/>
           </a:solidFill>
           <a:ln w="12700">
             <a:solidFill>
-              <a:srgbClr val="2A2A2A"/>
+              <a:srgbClr val="142B1A"/>
             </a:solidFill>
             <a:prstDash val="solid"/>
           </a:ln>
@@ -13560,7 +13560,7 @@
             <a:r>
               <a:rPr lang="en-US" sz="1500" b="1" dirty="0">
                 <a:solidFill>
-                  <a:srgbClr val="FFFFFF"/>
+                  <a:srgbClr val="F0F5EA"/>
                 </a:solidFill>
                 <a:latin typeface="Arial Black" pitchFamily="34" charset="0"/>
                 <a:ea typeface="Arial Black" pitchFamily="34" charset="-122"/>
@@ -13599,7 +13599,7 @@
             <a:r>
               <a:rPr lang="en-US" sz="800" dirty="0">
                 <a:solidFill>
-                  <a:srgbClr val="B0B0B0"/>
+                  <a:srgbClr val="8FAE8B"/>
                 </a:solidFill>
                 <a:latin typeface="Arial" pitchFamily="34" charset="0"/>
                 <a:ea typeface="Arial" pitchFamily="34" charset="-122"/>
@@ -13638,7 +13638,7 @@
             <a:r>
               <a:rPr lang="en-US" sz="650" dirty="0">
                 <a:solidFill>
-                  <a:srgbClr val="8A8A8A"/>
+                  <a:srgbClr val="8FAE8B"/>
                 </a:solidFill>
                 <a:latin typeface="Arial" pitchFamily="34" charset="0"/>
                 <a:ea typeface="Arial" pitchFamily="34" charset="-122"/>
@@ -13677,7 +13677,7 @@
             <a:r>
               <a:rPr lang="en-US" sz="850" dirty="0">
                 <a:solidFill>
-                  <a:srgbClr val="B0B0B0"/>
+                  <a:srgbClr val="8FAE8B"/>
                 </a:solidFill>
                 <a:latin typeface="Arial" pitchFamily="34" charset="0"/>
                 <a:ea typeface="Arial" pitchFamily="34" charset="-122"/>

--- a/scaffold/deck/KrishiSetu-Round0-20260816.pptx
+++ b/scaffold/deck/KrishiSetu-Round0-20260816.pptx
@@ -1925,7 +1925,7 @@
     <p:bg>
       <p:bgPr>
         <a:solidFill>
-          <a:srgbClr val="0A0A0A"/>
+          <a:srgbClr val="1F3D26"/>
         </a:solidFill>
       </p:bgPr>
     </p:bg>
@@ -1970,7 +1970,7 @@
             <a:r>
               <a:rPr lang="en-US" sz="5800" b="1" dirty="0">
                 <a:solidFill>
-                  <a:srgbClr val="2A2A2A"/>
+                  <a:srgbClr val="142B1A"/>
                 </a:solidFill>
                 <a:latin typeface="Arial Black" pitchFamily="34" charset="0"/>
                 <a:ea typeface="Arial Black" pitchFamily="34" charset="-122"/>
@@ -2009,7 +2009,7 @@
             <a:r>
               <a:rPr lang="en-US" sz="5800" b="1" dirty="0">
                 <a:solidFill>
-                  <a:srgbClr val="FFFFFF"/>
+                  <a:srgbClr val="F0F5EA"/>
                 </a:solidFill>
                 <a:latin typeface="Arial Black" pitchFamily="34" charset="0"/>
                 <a:ea typeface="Arial Black" pitchFamily="34" charset="-122"/>
@@ -2036,11 +2036,11 @@
             <a:avLst/>
           </a:prstGeom>
           <a:solidFill>
-            <a:srgbClr val="FFFFFF"/>
+            <a:srgbClr val="F0F5EA"/>
           </a:solidFill>
           <a:ln w="12700">
             <a:solidFill>
-              <a:srgbClr val="FFFFFF"/>
+              <a:srgbClr val="F0F5EA"/>
             </a:solidFill>
             <a:prstDash val="solid"/>
           </a:ln>
@@ -2073,7 +2073,7 @@
             <a:r>
               <a:rPr lang="en-US" sz="1800" b="1" dirty="0">
                 <a:solidFill>
-                  <a:srgbClr val="FFFFFF"/>
+                  <a:srgbClr val="F0F5EA"/>
                 </a:solidFill>
                 <a:latin typeface="Arial" pitchFamily="34" charset="0"/>
                 <a:ea typeface="Arial" pitchFamily="34" charset="-122"/>
@@ -2112,7 +2112,7 @@
             <a:r>
               <a:rPr lang="en-US" sz="1400" dirty="0">
                 <a:solidFill>
-                  <a:srgbClr val="B0B0B0"/>
+                  <a:srgbClr val="8FAE8B"/>
                 </a:solidFill>
                 <a:latin typeface="Arial" pitchFamily="34" charset="0"/>
                 <a:ea typeface="Arial" pitchFamily="34" charset="-122"/>
@@ -2151,7 +2151,7 @@
             <a:r>
               <a:rPr lang="en-US" sz="1200" dirty="0">
                 <a:solidFill>
-                  <a:srgbClr val="B0B0B0"/>
+                  <a:srgbClr val="8FAE8B"/>
                 </a:solidFill>
                 <a:latin typeface="Arial" pitchFamily="34" charset="0"/>
                 <a:ea typeface="Arial" pitchFamily="34" charset="-122"/>
@@ -2168,6 +2168,9 @@
   <p:clrMapOvr>
     <a:masterClrMapping/>
   </p:clrMapOvr>
+  <p:transition spd="med">
+    <p:fade/>
+  </p:transition>
 </p:sld>
 </file>
 
@@ -2177,7 +2180,7 @@
     <p:bg>
       <p:bgPr>
         <a:solidFill>
-          <a:srgbClr val="FFFFFF"/>
+          <a:srgbClr val="F0F5EA"/>
         </a:solidFill>
       </p:bgPr>
     </p:bg>
@@ -2222,7 +2225,7 @@
             <a:r>
               <a:rPr lang="en-US" sz="2800" b="1" dirty="0">
                 <a:solidFill>
-                  <a:srgbClr val="E0E0E0"/>
+                  <a:srgbClr val="D8E8C8"/>
                 </a:solidFill>
                 <a:latin typeface="Arial Black" pitchFamily="34" charset="0"/>
                 <a:ea typeface="Arial Black" pitchFamily="34" charset="-122"/>
@@ -2268,7 +2271,7 @@
             <a:r>
               <a:rPr lang="en-US" sz="2800" b="1" dirty="0">
                 <a:solidFill>
-                  <a:srgbClr val="0A0A0A"/>
+                  <a:srgbClr val="2C5F2D"/>
                 </a:solidFill>
                 <a:latin typeface="Arial Black" pitchFamily="34" charset="0"/>
                 <a:ea typeface="Arial Black" pitchFamily="34" charset="-122"/>
@@ -2295,11 +2298,11 @@
             <a:avLst/>
           </a:prstGeom>
           <a:solidFill>
-            <a:srgbClr val="0A0A0A"/>
+            <a:srgbClr val="2C5F2D"/>
           </a:solidFill>
           <a:ln w="12700">
             <a:solidFill>
-              <a:srgbClr val="0A0A0A"/>
+              <a:srgbClr val="2C5F2D"/>
             </a:solidFill>
             <a:prstDash val="solid"/>
           </a:ln>
@@ -2320,11 +2323,11 @@
             <a:avLst/>
           </a:prstGeom>
           <a:solidFill>
-            <a:srgbClr val="E0E0E0"/>
+            <a:srgbClr val="D8E8C8"/>
           </a:solidFill>
           <a:ln w="12700">
             <a:solidFill>
-              <a:srgbClr val="E0E0E0"/>
+              <a:srgbClr val="D8E8C8"/>
             </a:solidFill>
             <a:prstDash val="solid"/>
           </a:ln>
@@ -2345,11 +2348,11 @@
             <a:avLst/>
           </a:prstGeom>
           <a:solidFill>
-            <a:srgbClr val="555555"/>
+            <a:srgbClr val="3E5C42"/>
           </a:solidFill>
           <a:ln w="12700">
             <a:solidFill>
-              <a:srgbClr val="555555"/>
+              <a:srgbClr val="3E5C42"/>
             </a:solidFill>
             <a:prstDash val="solid"/>
           </a:ln>
@@ -2372,7 +2375,7 @@
             </a:avLst>
           </a:prstGeom>
           <a:solidFill>
-            <a:srgbClr val="0A0A0A"/>
+            <a:srgbClr val="1F3D26"/>
           </a:solidFill>
           <a:ln w="12700">
             <a:solidFill>
@@ -2409,7 +2412,7 @@
             <a:r>
               <a:rPr lang="en-US" sz="1600" b="1" dirty="0">
                 <a:solidFill>
-                  <a:srgbClr val="FFFFFF"/>
+                  <a:srgbClr val="F0F5EA"/>
                 </a:solidFill>
                 <a:latin typeface="Arial Black" pitchFamily="34" charset="0"/>
                 <a:ea typeface="Arial Black" pitchFamily="34" charset="-122"/>
@@ -2448,7 +2451,7 @@
             <a:r>
               <a:rPr lang="en-US" sz="1150" dirty="0">
                 <a:solidFill>
-                  <a:srgbClr val="B0B0B0"/>
+                  <a:srgbClr val="8FAE8B"/>
                 </a:solidFill>
                 <a:latin typeface="Arial" pitchFamily="34" charset="0"/>
                 <a:ea typeface="Arial" pitchFamily="34" charset="-122"/>
@@ -2487,7 +2490,7 @@
             <a:r>
               <a:rPr lang="en-US" sz="1000" i="1" dirty="0">
                 <a:solidFill>
-                  <a:srgbClr val="8A8A8A"/>
+                  <a:srgbClr val="8FAE8B"/>
                 </a:solidFill>
                 <a:latin typeface="Arial" pitchFamily="34" charset="0"/>
                 <a:ea typeface="Arial" pitchFamily="34" charset="-122"/>
@@ -2514,11 +2517,11 @@
             <a:avLst/>
           </a:prstGeom>
           <a:solidFill>
-            <a:srgbClr val="E0E0E0"/>
+            <a:srgbClr val="D8E8C8"/>
           </a:solidFill>
           <a:ln w="12700">
             <a:solidFill>
-              <a:srgbClr val="E0E0E0"/>
+              <a:srgbClr val="D8E8C8"/>
             </a:solidFill>
             <a:prstDash val="solid"/>
           </a:ln>
@@ -2539,11 +2542,11 @@
             <a:avLst/>
           </a:prstGeom>
           <a:solidFill>
-            <a:srgbClr val="555555"/>
+            <a:srgbClr val="3E5C42"/>
           </a:solidFill>
           <a:ln w="12700">
             <a:solidFill>
-              <a:srgbClr val="555555"/>
+              <a:srgbClr val="3E5C42"/>
             </a:solidFill>
             <a:prstDash val="solid"/>
           </a:ln>
@@ -2566,7 +2569,7 @@
             </a:avLst>
           </a:prstGeom>
           <a:solidFill>
-            <a:srgbClr val="0A0A0A"/>
+            <a:srgbClr val="1F3D26"/>
           </a:solidFill>
           <a:ln w="12700">
             <a:solidFill>
@@ -2603,7 +2606,7 @@
             <a:r>
               <a:rPr lang="en-US" sz="1600" b="1" dirty="0">
                 <a:solidFill>
-                  <a:srgbClr val="FFFFFF"/>
+                  <a:srgbClr val="F0F5EA"/>
                 </a:solidFill>
                 <a:latin typeface="Arial Black" pitchFamily="34" charset="0"/>
                 <a:ea typeface="Arial Black" pitchFamily="34" charset="-122"/>
@@ -2642,7 +2645,7 @@
             <a:r>
               <a:rPr lang="en-US" sz="1150" dirty="0">
                 <a:solidFill>
-                  <a:srgbClr val="B0B0B0"/>
+                  <a:srgbClr val="8FAE8B"/>
                 </a:solidFill>
                 <a:latin typeface="Arial" pitchFamily="34" charset="0"/>
                 <a:ea typeface="Arial" pitchFamily="34" charset="-122"/>
@@ -2681,7 +2684,7 @@
             <a:r>
               <a:rPr lang="en-US" sz="1000" i="1" dirty="0">
                 <a:solidFill>
-                  <a:srgbClr val="8A8A8A"/>
+                  <a:srgbClr val="8FAE8B"/>
                 </a:solidFill>
                 <a:latin typeface="Arial" pitchFamily="34" charset="0"/>
                 <a:ea typeface="Arial" pitchFamily="34" charset="-122"/>
@@ -2708,11 +2711,11 @@
             <a:avLst/>
           </a:prstGeom>
           <a:solidFill>
-            <a:srgbClr val="E0E0E0"/>
+            <a:srgbClr val="D8E8C8"/>
           </a:solidFill>
           <a:ln w="12700">
             <a:solidFill>
-              <a:srgbClr val="E0E0E0"/>
+              <a:srgbClr val="D8E8C8"/>
             </a:solidFill>
             <a:prstDash val="solid"/>
           </a:ln>
@@ -2733,11 +2736,11 @@
             <a:avLst/>
           </a:prstGeom>
           <a:solidFill>
-            <a:srgbClr val="555555"/>
+            <a:srgbClr val="3E5C42"/>
           </a:solidFill>
           <a:ln w="12700">
             <a:solidFill>
-              <a:srgbClr val="555555"/>
+              <a:srgbClr val="3E5C42"/>
             </a:solidFill>
             <a:prstDash val="solid"/>
           </a:ln>
@@ -2760,7 +2763,7 @@
             </a:avLst>
           </a:prstGeom>
           <a:solidFill>
-            <a:srgbClr val="0A0A0A"/>
+            <a:srgbClr val="1F3D26"/>
           </a:solidFill>
           <a:ln w="12700">
             <a:solidFill>
@@ -2797,7 +2800,7 @@
             <a:r>
               <a:rPr lang="en-US" sz="1600" b="1" dirty="0">
                 <a:solidFill>
-                  <a:srgbClr val="FFFFFF"/>
+                  <a:srgbClr val="F0F5EA"/>
                 </a:solidFill>
                 <a:latin typeface="Arial Black" pitchFamily="34" charset="0"/>
                 <a:ea typeface="Arial Black" pitchFamily="34" charset="-122"/>
@@ -2836,7 +2839,7 @@
             <a:r>
               <a:rPr lang="en-US" sz="1150" dirty="0">
                 <a:solidFill>
-                  <a:srgbClr val="B0B0B0"/>
+                  <a:srgbClr val="8FAE8B"/>
                 </a:solidFill>
                 <a:latin typeface="Arial" pitchFamily="34" charset="0"/>
                 <a:ea typeface="Arial" pitchFamily="34" charset="-122"/>
@@ -2875,7 +2878,7 @@
             <a:r>
               <a:rPr lang="en-US" sz="1000" i="1" dirty="0">
                 <a:solidFill>
-                  <a:srgbClr val="8A8A8A"/>
+                  <a:srgbClr val="8FAE8B"/>
                 </a:solidFill>
                 <a:latin typeface="Arial" pitchFamily="34" charset="0"/>
                 <a:ea typeface="Arial" pitchFamily="34" charset="-122"/>
@@ -2914,7 +2917,7 @@
             <a:r>
               <a:rPr lang="en-US" sz="1300" b="1" dirty="0">
                 <a:solidFill>
-                  <a:srgbClr val="0A0A0A"/>
+                  <a:srgbClr val="2C5F2D"/>
                 </a:solidFill>
                 <a:latin typeface="Arial Black" pitchFamily="34" charset="0"/>
                 <a:ea typeface="Arial Black" pitchFamily="34" charset="-122"/>
@@ -2953,7 +2956,7 @@
             <a:r>
               <a:rPr lang="en-US" sz="850" dirty="0">
                 <a:solidFill>
-                  <a:srgbClr val="6E6E6E"/>
+                  <a:srgbClr val="5A6B5A"/>
                 </a:solidFill>
                 <a:latin typeface="Arial" pitchFamily="34" charset="0"/>
                 <a:ea typeface="Arial" pitchFamily="34" charset="-122"/>
@@ -2970,6 +2973,9 @@
   <p:clrMapOvr>
     <a:masterClrMapping/>
   </p:clrMapOvr>
+  <p:transition spd="med">
+    <p:fade/>
+  </p:transition>
 </p:sld>
 </file>
 
@@ -2979,7 +2985,7 @@
     <p:bg>
       <p:bgPr>
         <a:solidFill>
-          <a:srgbClr val="FFFFFF"/>
+          <a:srgbClr val="F0F5EA"/>
         </a:solidFill>
       </p:bgPr>
     </p:bg>
@@ -3024,7 +3030,7 @@
             <a:r>
               <a:rPr lang="en-US" sz="2800" b="1" dirty="0">
                 <a:solidFill>
-                  <a:srgbClr val="E0E0E0"/>
+                  <a:srgbClr val="D8E8C8"/>
                 </a:solidFill>
                 <a:latin typeface="Arial Black" pitchFamily="34" charset="0"/>
                 <a:ea typeface="Arial Black" pitchFamily="34" charset="-122"/>
@@ -3070,7 +3076,7 @@
             <a:r>
               <a:rPr lang="en-US" sz="2800" b="1" dirty="0">
                 <a:solidFill>
-                  <a:srgbClr val="0A0A0A"/>
+                  <a:srgbClr val="2C5F2D"/>
                 </a:solidFill>
                 <a:latin typeface="Arial Black" pitchFamily="34" charset="0"/>
                 <a:ea typeface="Arial Black" pitchFamily="34" charset="-122"/>
@@ -3097,11 +3103,11 @@
             <a:avLst/>
           </a:prstGeom>
           <a:solidFill>
-            <a:srgbClr val="0A0A0A"/>
+            <a:srgbClr val="2C5F2D"/>
           </a:solidFill>
           <a:ln w="12700">
             <a:solidFill>
-              <a:srgbClr val="0A0A0A"/>
+              <a:srgbClr val="2C5F2D"/>
             </a:solidFill>
             <a:prstDash val="solid"/>
           </a:ln>
@@ -3122,11 +3128,11 @@
             <a:avLst/>
           </a:prstGeom>
           <a:solidFill>
-            <a:srgbClr val="E0E0E0"/>
+            <a:srgbClr val="D8E8C8"/>
           </a:solidFill>
           <a:ln w="12700">
             <a:solidFill>
-              <a:srgbClr val="E0E0E0"/>
+              <a:srgbClr val="D8E8C8"/>
             </a:solidFill>
             <a:prstDash val="solid"/>
           </a:ln>
@@ -3149,11 +3155,11 @@
             </a:avLst>
           </a:prstGeom>
           <a:solidFill>
-            <a:srgbClr val="FFFFFF"/>
+            <a:srgbClr val="F0F5EA"/>
           </a:solidFill>
           <a:ln w="25400">
             <a:solidFill>
-              <a:srgbClr val="0A0A0A"/>
+              <a:srgbClr val="2C5F2D"/>
             </a:solidFill>
             <a:prstDash val="solid"/>
           </a:ln>
@@ -3186,7 +3192,7 @@
             <a:r>
               <a:rPr lang="en-US" sz="1300" b="1" dirty="0">
                 <a:solidFill>
-                  <a:srgbClr val="0A0A0A"/>
+                  <a:srgbClr val="2C5F2D"/>
                 </a:solidFill>
                 <a:latin typeface="Arial Black" pitchFamily="34" charset="0"/>
                 <a:ea typeface="Arial Black" pitchFamily="34" charset="-122"/>
@@ -3225,7 +3231,7 @@
             <a:r>
               <a:rPr lang="en-US" sz="1600" b="1" dirty="0">
                 <a:solidFill>
-                  <a:srgbClr val="0A0A0A"/>
+                  <a:srgbClr val="2C5F2D"/>
                 </a:solidFill>
                 <a:latin typeface="Arial Black" pitchFamily="34" charset="0"/>
                 <a:ea typeface="Arial Black" pitchFamily="34" charset="-122"/>
@@ -3264,7 +3270,7 @@
             <a:r>
               <a:rPr lang="en-US" sz="1250" dirty="0">
                 <a:solidFill>
-                  <a:srgbClr val="0A0A0A"/>
+                  <a:srgbClr val="2C5F2D"/>
                 </a:solidFill>
                 <a:latin typeface="Arial" pitchFamily="34" charset="0"/>
                 <a:ea typeface="Arial" pitchFamily="34" charset="-122"/>
@@ -3303,7 +3309,7 @@
             <a:r>
               <a:rPr lang="en-US" sz="1200" dirty="0">
                 <a:solidFill>
-                  <a:srgbClr val="0A0A0A"/>
+                  <a:srgbClr val="2C5F2D"/>
                 </a:solidFill>
                 <a:latin typeface="Arial" pitchFamily="34" charset="0"/>
                 <a:ea typeface="Arial" pitchFamily="34" charset="-122"/>
@@ -3330,11 +3336,11 @@
             <a:avLst/>
           </a:prstGeom>
           <a:solidFill>
-            <a:srgbClr val="E0E0E0"/>
+            <a:srgbClr val="D8E8C8"/>
           </a:solidFill>
           <a:ln w="12700">
             <a:solidFill>
-              <a:srgbClr val="E0E0E0"/>
+              <a:srgbClr val="D8E8C8"/>
             </a:solidFill>
             <a:prstDash val="solid"/>
           </a:ln>
@@ -3357,11 +3363,11 @@
             </a:avLst>
           </a:prstGeom>
           <a:solidFill>
-            <a:srgbClr val="FFFFFF"/>
+            <a:srgbClr val="F0F5EA"/>
           </a:solidFill>
           <a:ln w="25400">
             <a:solidFill>
-              <a:srgbClr val="0A0A0A"/>
+              <a:srgbClr val="2C5F2D"/>
             </a:solidFill>
             <a:prstDash val="solid"/>
           </a:ln>
@@ -3394,7 +3400,7 @@
             <a:r>
               <a:rPr lang="en-US" sz="1300" b="1" dirty="0">
                 <a:solidFill>
-                  <a:srgbClr val="0A0A0A"/>
+                  <a:srgbClr val="2C5F2D"/>
                 </a:solidFill>
                 <a:latin typeface="Arial Black" pitchFamily="34" charset="0"/>
                 <a:ea typeface="Arial Black" pitchFamily="34" charset="-122"/>
@@ -3433,7 +3439,7 @@
             <a:r>
               <a:rPr lang="en-US" sz="1200" dirty="0">
                 <a:solidFill>
-                  <a:srgbClr val="0A0A0A"/>
+                  <a:srgbClr val="2C5F2D"/>
                 </a:solidFill>
                 <a:latin typeface="Arial" pitchFamily="34" charset="0"/>
                 <a:ea typeface="Arial" pitchFamily="34" charset="-122"/>
@@ -3472,7 +3478,7 @@
             <a:r>
               <a:rPr lang="en-US" sz="1200" dirty="0">
                 <a:solidFill>
-                  <a:srgbClr val="0A0A0A"/>
+                  <a:srgbClr val="2C5F2D"/>
                 </a:solidFill>
                 <a:latin typeface="Arial" pitchFamily="34" charset="0"/>
                 <a:ea typeface="Arial" pitchFamily="34" charset="-122"/>
@@ -3511,7 +3517,7 @@
             <a:r>
               <a:rPr lang="en-US" sz="1200" dirty="0">
                 <a:solidFill>
-                  <a:srgbClr val="0A0A0A"/>
+                  <a:srgbClr val="2C5F2D"/>
                 </a:solidFill>
                 <a:latin typeface="Arial" pitchFamily="34" charset="0"/>
                 <a:ea typeface="Arial" pitchFamily="34" charset="-122"/>
@@ -3550,7 +3556,7 @@
             <a:r>
               <a:rPr lang="en-US" sz="1450" b="1" dirty="0">
                 <a:solidFill>
-                  <a:srgbClr val="E0E0E0"/>
+                  <a:srgbClr val="D8E8C8"/>
                 </a:solidFill>
                 <a:latin typeface="Arial Black" pitchFamily="34" charset="0"/>
                 <a:ea typeface="Arial Black" pitchFamily="34" charset="-122"/>
@@ -3596,7 +3602,7 @@
             <a:r>
               <a:rPr lang="en-US" sz="1450" b="1" dirty="0">
                 <a:solidFill>
-                  <a:srgbClr val="0A0A0A"/>
+                  <a:srgbClr val="2C5F2D"/>
                 </a:solidFill>
                 <a:latin typeface="Arial Black" pitchFamily="34" charset="0"/>
                 <a:ea typeface="Arial Black" pitchFamily="34" charset="-122"/>
@@ -3635,7 +3641,7 @@
             <a:r>
               <a:rPr lang="en-US" sz="1000" i="1" dirty="0">
                 <a:solidFill>
-                  <a:srgbClr val="6E6E6E"/>
+                  <a:srgbClr val="5A6B5A"/>
                 </a:solidFill>
                 <a:latin typeface="Arial" pitchFamily="34" charset="0"/>
                 <a:ea typeface="Arial" pitchFamily="34" charset="-122"/>
@@ -3674,7 +3680,7 @@
             <a:r>
               <a:rPr lang="en-US" sz="850" dirty="0">
                 <a:solidFill>
-                  <a:srgbClr val="6E6E6E"/>
+                  <a:srgbClr val="5A6B5A"/>
                 </a:solidFill>
                 <a:latin typeface="Arial" pitchFamily="34" charset="0"/>
                 <a:ea typeface="Arial" pitchFamily="34" charset="-122"/>
@@ -3691,6 +3697,9 @@
   <p:clrMapOvr>
     <a:masterClrMapping/>
   </p:clrMapOvr>
+  <p:transition spd="med">
+    <p:fade/>
+  </p:transition>
 </p:sld>
 </file>
 
@@ -3700,7 +3709,7 @@
     <p:bg>
       <p:bgPr>
         <a:solidFill>
-          <a:srgbClr val="FFFFFF"/>
+          <a:srgbClr val="F0F5EA"/>
         </a:solidFill>
       </p:bgPr>
     </p:bg>
@@ -3745,7 +3754,7 @@
             <a:r>
               <a:rPr lang="en-US" sz="2800" b="1" dirty="0">
                 <a:solidFill>
-                  <a:srgbClr val="E0E0E0"/>
+                  <a:srgbClr val="D8E8C8"/>
                 </a:solidFill>
                 <a:latin typeface="Arial Black" pitchFamily="34" charset="0"/>
                 <a:ea typeface="Arial Black" pitchFamily="34" charset="-122"/>
@@ -3791,7 +3800,7 @@
             <a:r>
               <a:rPr lang="en-US" sz="2800" b="1" dirty="0">
                 <a:solidFill>
-                  <a:srgbClr val="0A0A0A"/>
+                  <a:srgbClr val="2C5F2D"/>
                 </a:solidFill>
                 <a:latin typeface="Arial Black" pitchFamily="34" charset="0"/>
                 <a:ea typeface="Arial Black" pitchFamily="34" charset="-122"/>
@@ -3818,11 +3827,11 @@
             <a:avLst/>
           </a:prstGeom>
           <a:solidFill>
-            <a:srgbClr val="0A0A0A"/>
+            <a:srgbClr val="2C5F2D"/>
           </a:solidFill>
           <a:ln w="12700">
             <a:solidFill>
-              <a:srgbClr val="0A0A0A"/>
+              <a:srgbClr val="2C5F2D"/>
             </a:solidFill>
             <a:prstDash val="solid"/>
           </a:ln>
@@ -3843,11 +3852,11 @@
             <a:avLst/>
           </a:prstGeom>
           <a:solidFill>
-            <a:srgbClr val="E0E0E0"/>
+            <a:srgbClr val="D8E8C8"/>
           </a:solidFill>
           <a:ln w="12700">
             <a:solidFill>
-              <a:srgbClr val="E0E0E0"/>
+              <a:srgbClr val="D8E8C8"/>
             </a:solidFill>
             <a:prstDash val="solid"/>
           </a:ln>
@@ -3870,11 +3879,11 @@
             </a:avLst>
           </a:prstGeom>
           <a:solidFill>
-            <a:srgbClr val="FFFFFF"/>
+            <a:srgbClr val="F0F5EA"/>
           </a:solidFill>
           <a:ln w="19050">
             <a:solidFill>
-              <a:srgbClr val="0A0A0A"/>
+              <a:srgbClr val="2C5F2D"/>
             </a:solidFill>
             <a:prstDash val="solid"/>
           </a:ln>
@@ -3895,7 +3904,7 @@
             <a:avLst/>
           </a:prstGeom>
           <a:solidFill>
-            <a:srgbClr val="0A0A0A"/>
+            <a:srgbClr val="1F3D26"/>
           </a:solidFill>
           <a:ln/>
         </p:spPr>
@@ -3927,7 +3936,7 @@
             <a:r>
               <a:rPr lang="en-US" sz="2000" b="1" dirty="0">
                 <a:solidFill>
-                  <a:srgbClr val="FFFFFF"/>
+                  <a:srgbClr val="F0F5EA"/>
                 </a:solidFill>
                 <a:latin typeface="Arial" pitchFamily="34" charset="0"/>
                 <a:ea typeface="Arial" pitchFamily="34" charset="-122"/>
@@ -3966,7 +3975,7 @@
             <a:r>
               <a:rPr lang="en-US" sz="1500" b="1" dirty="0">
                 <a:solidFill>
-                  <a:srgbClr val="0A0A0A"/>
+                  <a:srgbClr val="2C5F2D"/>
                 </a:solidFill>
                 <a:latin typeface="Arial Black" pitchFamily="34" charset="0"/>
                 <a:ea typeface="Arial Black" pitchFamily="34" charset="-122"/>
@@ -4005,7 +4014,7 @@
             <a:r>
               <a:rPr lang="en-US" sz="1150" dirty="0">
                 <a:solidFill>
-                  <a:srgbClr val="6E6E6E"/>
+                  <a:srgbClr val="5A6B5A"/>
                 </a:solidFill>
                 <a:latin typeface="Arial" pitchFamily="34" charset="0"/>
                 <a:ea typeface="Arial" pitchFamily="34" charset="-122"/>
@@ -4044,7 +4053,7 @@
             <a:r>
               <a:rPr lang="en-US" sz="950" i="1" dirty="0">
                 <a:solidFill>
-                  <a:srgbClr val="6E6E6E"/>
+                  <a:srgbClr val="5A6B5A"/>
                 </a:solidFill>
                 <a:latin typeface="Arial" pitchFamily="34" charset="0"/>
                 <a:ea typeface="Arial" pitchFamily="34" charset="-122"/>
@@ -4071,11 +4080,11 @@
             <a:avLst/>
           </a:prstGeom>
           <a:solidFill>
-            <a:srgbClr val="E0E0E0"/>
+            <a:srgbClr val="D8E8C8"/>
           </a:solidFill>
           <a:ln w="12700">
             <a:solidFill>
-              <a:srgbClr val="E0E0E0"/>
+              <a:srgbClr val="D8E8C8"/>
             </a:solidFill>
             <a:prstDash val="solid"/>
           </a:ln>
@@ -4098,11 +4107,11 @@
             </a:avLst>
           </a:prstGeom>
           <a:solidFill>
-            <a:srgbClr val="FFFFFF"/>
+            <a:srgbClr val="F0F5EA"/>
           </a:solidFill>
           <a:ln w="19050">
             <a:solidFill>
-              <a:srgbClr val="0A0A0A"/>
+              <a:srgbClr val="2C5F2D"/>
             </a:solidFill>
             <a:prstDash val="solid"/>
           </a:ln>
@@ -4123,7 +4132,7 @@
             <a:avLst/>
           </a:prstGeom>
           <a:solidFill>
-            <a:srgbClr val="0A0A0A"/>
+            <a:srgbClr val="1F3D26"/>
           </a:solidFill>
           <a:ln/>
         </p:spPr>
@@ -4155,7 +4164,7 @@
             <a:r>
               <a:rPr lang="en-US" sz="2000" b="1" dirty="0">
                 <a:solidFill>
-                  <a:srgbClr val="FFFFFF"/>
+                  <a:srgbClr val="F0F5EA"/>
                 </a:solidFill>
                 <a:latin typeface="Arial" pitchFamily="34" charset="0"/>
                 <a:ea typeface="Arial" pitchFamily="34" charset="-122"/>
@@ -4194,7 +4203,7 @@
             <a:r>
               <a:rPr lang="en-US" sz="1500" b="1" dirty="0">
                 <a:solidFill>
-                  <a:srgbClr val="0A0A0A"/>
+                  <a:srgbClr val="2C5F2D"/>
                 </a:solidFill>
                 <a:latin typeface="Arial Black" pitchFamily="34" charset="0"/>
                 <a:ea typeface="Arial Black" pitchFamily="34" charset="-122"/>
@@ -4233,7 +4242,7 @@
             <a:r>
               <a:rPr lang="en-US" sz="1150" dirty="0">
                 <a:solidFill>
-                  <a:srgbClr val="6E6E6E"/>
+                  <a:srgbClr val="5A6B5A"/>
                 </a:solidFill>
                 <a:latin typeface="Arial" pitchFamily="34" charset="0"/>
                 <a:ea typeface="Arial" pitchFamily="34" charset="-122"/>
@@ -4272,7 +4281,7 @@
             <a:r>
               <a:rPr lang="en-US" sz="950" i="1" dirty="0">
                 <a:solidFill>
-                  <a:srgbClr val="6E6E6E"/>
+                  <a:srgbClr val="5A6B5A"/>
                 </a:solidFill>
                 <a:latin typeface="Arial" pitchFamily="34" charset="0"/>
                 <a:ea typeface="Arial" pitchFamily="34" charset="-122"/>
@@ -4299,11 +4308,11 @@
             <a:avLst/>
           </a:prstGeom>
           <a:solidFill>
-            <a:srgbClr val="E0E0E0"/>
+            <a:srgbClr val="D8E8C8"/>
           </a:solidFill>
           <a:ln w="12700">
             <a:solidFill>
-              <a:srgbClr val="E0E0E0"/>
+              <a:srgbClr val="D8E8C8"/>
             </a:solidFill>
             <a:prstDash val="solid"/>
           </a:ln>
@@ -4326,11 +4335,11 @@
             </a:avLst>
           </a:prstGeom>
           <a:solidFill>
-            <a:srgbClr val="FFFFFF"/>
+            <a:srgbClr val="F0F5EA"/>
           </a:solidFill>
           <a:ln w="19050">
             <a:solidFill>
-              <a:srgbClr val="0A0A0A"/>
+              <a:srgbClr val="2C5F2D"/>
             </a:solidFill>
             <a:prstDash val="solid"/>
           </a:ln>
@@ -4351,7 +4360,7 @@
             <a:avLst/>
           </a:prstGeom>
           <a:solidFill>
-            <a:srgbClr val="0A0A0A"/>
+            <a:srgbClr val="1F3D26"/>
           </a:solidFill>
           <a:ln/>
         </p:spPr>
@@ -4383,7 +4392,7 @@
             <a:r>
               <a:rPr lang="en-US" sz="2000" b="1" dirty="0">
                 <a:solidFill>
-                  <a:srgbClr val="FFFFFF"/>
+                  <a:srgbClr val="F0F5EA"/>
                 </a:solidFill>
                 <a:latin typeface="Arial" pitchFamily="34" charset="0"/>
                 <a:ea typeface="Arial" pitchFamily="34" charset="-122"/>
@@ -4422,7 +4431,7 @@
             <a:r>
               <a:rPr lang="en-US" sz="1500" b="1" dirty="0">
                 <a:solidFill>
-                  <a:srgbClr val="0A0A0A"/>
+                  <a:srgbClr val="2C5F2D"/>
                 </a:solidFill>
                 <a:latin typeface="Arial Black" pitchFamily="34" charset="0"/>
                 <a:ea typeface="Arial Black" pitchFamily="34" charset="-122"/>
@@ -4461,7 +4470,7 @@
             <a:r>
               <a:rPr lang="en-US" sz="1150" dirty="0">
                 <a:solidFill>
-                  <a:srgbClr val="6E6E6E"/>
+                  <a:srgbClr val="5A6B5A"/>
                 </a:solidFill>
                 <a:latin typeface="Arial" pitchFamily="34" charset="0"/>
                 <a:ea typeface="Arial" pitchFamily="34" charset="-122"/>
@@ -4500,7 +4509,7 @@
             <a:r>
               <a:rPr lang="en-US" sz="950" i="1" dirty="0">
                 <a:solidFill>
-                  <a:srgbClr val="6E6E6E"/>
+                  <a:srgbClr val="5A6B5A"/>
                 </a:solidFill>
                 <a:latin typeface="Arial" pitchFamily="34" charset="0"/>
                 <a:ea typeface="Arial" pitchFamily="34" charset="-122"/>
@@ -4539,7 +4548,7 @@
             <a:r>
               <a:rPr lang="en-US" sz="1300" b="1" dirty="0">
                 <a:solidFill>
-                  <a:srgbClr val="0A0A0A"/>
+                  <a:srgbClr val="2C5F2D"/>
                 </a:solidFill>
                 <a:latin typeface="Arial Black" pitchFamily="34" charset="0"/>
                 <a:ea typeface="Arial Black" pitchFamily="34" charset="-122"/>
@@ -4578,7 +4587,7 @@
             <a:r>
               <a:rPr lang="en-US" sz="850" dirty="0">
                 <a:solidFill>
-                  <a:srgbClr val="6E6E6E"/>
+                  <a:srgbClr val="5A6B5A"/>
                 </a:solidFill>
                 <a:latin typeface="Arial" pitchFamily="34" charset="0"/>
                 <a:ea typeface="Arial" pitchFamily="34" charset="-122"/>
@@ -4595,6 +4604,9 @@
   <p:clrMapOvr>
     <a:masterClrMapping/>
   </p:clrMapOvr>
+  <p:transition spd="med">
+    <p:fade/>
+  </p:transition>
 </p:sld>
 </file>
 
@@ -4604,7 +4616,7 @@
     <p:bg>
       <p:bgPr>
         <a:solidFill>
-          <a:srgbClr val="0A0A0A"/>
+          <a:srgbClr val="1F3D26"/>
         </a:solidFill>
       </p:bgPr>
     </p:bg>
@@ -4649,7 +4661,7 @@
             <a:r>
               <a:rPr lang="en-US" sz="4000" b="1" dirty="0">
                 <a:solidFill>
-                  <a:srgbClr val="2A2A2A"/>
+                  <a:srgbClr val="142B1A"/>
                 </a:solidFill>
                 <a:latin typeface="Arial Black" pitchFamily="34" charset="0"/>
                 <a:ea typeface="Arial Black" pitchFamily="34" charset="-122"/>
@@ -4688,7 +4700,7 @@
             <a:r>
               <a:rPr lang="en-US" sz="4000" b="1" dirty="0">
                 <a:solidFill>
-                  <a:srgbClr val="FFFFFF"/>
+                  <a:srgbClr val="F0F5EA"/>
                 </a:solidFill>
                 <a:latin typeface="Arial Black" pitchFamily="34" charset="0"/>
                 <a:ea typeface="Arial Black" pitchFamily="34" charset="-122"/>
@@ -4727,7 +4739,7 @@
             <a:r>
               <a:rPr lang="en-US" sz="1500" dirty="0">
                 <a:solidFill>
-                  <a:srgbClr val="B0B0B0"/>
+                  <a:srgbClr val="8FAE8B"/>
                 </a:solidFill>
                 <a:latin typeface="Arial" pitchFamily="34" charset="0"/>
                 <a:ea typeface="Arial" pitchFamily="34" charset="-122"/>
@@ -4754,11 +4766,11 @@
             <a:avLst/>
           </a:prstGeom>
           <a:solidFill>
-            <a:srgbClr val="2A2A2A"/>
+            <a:srgbClr val="142B1A"/>
           </a:solidFill>
           <a:ln w="12700">
             <a:solidFill>
-              <a:srgbClr val="2A2A2A"/>
+              <a:srgbClr val="142B1A"/>
             </a:solidFill>
             <a:prstDash val="solid"/>
           </a:ln>
@@ -4781,11 +4793,11 @@
             </a:avLst>
           </a:prstGeom>
           <a:solidFill>
-            <a:srgbClr val="161616"/>
+            <a:srgbClr val="2A4A33"/>
           </a:solidFill>
           <a:ln w="12700">
             <a:solidFill>
-              <a:srgbClr val="2A2A2A"/>
+              <a:srgbClr val="142B1A"/>
             </a:solidFill>
             <a:prstDash val="solid"/>
           </a:ln>
@@ -4806,11 +4818,11 @@
             <a:avLst/>
           </a:prstGeom>
           <a:solidFill>
-            <a:srgbClr val="FF5A1F"/>
+            <a:srgbClr val="97BC62"/>
           </a:solidFill>
           <a:ln w="12700">
             <a:solidFill>
-              <a:srgbClr val="FF5A1F"/>
+              <a:srgbClr val="97BC62"/>
             </a:solidFill>
             <a:prstDash val="solid"/>
           </a:ln>
@@ -4843,7 +4855,7 @@
             <a:r>
               <a:rPr lang="en-US" sz="1200" dirty="0">
                 <a:solidFill>
-                  <a:srgbClr val="FFFFFF"/>
+                  <a:srgbClr val="F0F5EA"/>
                 </a:solidFill>
                 <a:latin typeface="Arial" pitchFamily="34" charset="0"/>
                 <a:ea typeface="Arial" pitchFamily="34" charset="-122"/>
@@ -4882,7 +4894,7 @@
             <a:r>
               <a:rPr lang="en-US" sz="1250" dirty="0">
                 <a:solidFill>
-                  <a:srgbClr val="B0B0B0"/>
+                  <a:srgbClr val="8FAE8B"/>
                 </a:solidFill>
                 <a:latin typeface="Arial" pitchFamily="34" charset="0"/>
                 <a:ea typeface="Arial" pitchFamily="34" charset="-122"/>
@@ -4899,6 +4911,9 @@
   <p:clrMapOvr>
     <a:masterClrMapping/>
   </p:clrMapOvr>
+  <p:transition spd="med">
+    <p:fade/>
+  </p:transition>
 </p:sld>
 </file>
 
@@ -4908,7 +4923,7 @@
     <p:bg>
       <p:bgPr>
         <a:solidFill>
-          <a:srgbClr val="FFFFFF"/>
+          <a:srgbClr val="F0F5EA"/>
         </a:solidFill>
       </p:bgPr>
     </p:bg>
@@ -4953,7 +4968,7 @@
             <a:r>
               <a:rPr lang="en-US" sz="2800" b="1" dirty="0">
                 <a:solidFill>
-                  <a:srgbClr val="E0E0E0"/>
+                  <a:srgbClr val="D8E8C8"/>
                 </a:solidFill>
                 <a:latin typeface="Arial Black" pitchFamily="34" charset="0"/>
                 <a:ea typeface="Arial Black" pitchFamily="34" charset="-122"/>
@@ -4999,7 +5014,7 @@
             <a:r>
               <a:rPr lang="en-US" sz="2800" b="1" dirty="0">
                 <a:solidFill>
-                  <a:srgbClr val="0A0A0A"/>
+                  <a:srgbClr val="2C5F2D"/>
                 </a:solidFill>
                 <a:latin typeface="Arial Black" pitchFamily="34" charset="0"/>
                 <a:ea typeface="Arial Black" pitchFamily="34" charset="-122"/>
@@ -5026,11 +5041,11 @@
             <a:avLst/>
           </a:prstGeom>
           <a:solidFill>
-            <a:srgbClr val="0A0A0A"/>
+            <a:srgbClr val="2C5F2D"/>
           </a:solidFill>
           <a:ln w="12700">
             <a:solidFill>
-              <a:srgbClr val="0A0A0A"/>
+              <a:srgbClr val="2C5F2D"/>
             </a:solidFill>
             <a:prstDash val="solid"/>
           </a:ln>
@@ -5051,11 +5066,11 @@
             <a:avLst/>
           </a:prstGeom>
           <a:solidFill>
-            <a:srgbClr val="E0E0E0"/>
+            <a:srgbClr val="D8E8C8"/>
           </a:solidFill>
           <a:ln w="12700">
             <a:solidFill>
-              <a:srgbClr val="E0E0E0"/>
+              <a:srgbClr val="D8E8C8"/>
             </a:solidFill>
             <a:prstDash val="solid"/>
           </a:ln>
@@ -5078,7 +5093,7 @@
             </a:avLst>
           </a:prstGeom>
           <a:solidFill>
-            <a:srgbClr val="0A0A0A"/>
+            <a:srgbClr val="1F3D26"/>
           </a:solidFill>
           <a:ln w="12700">
             <a:solidFill>
@@ -5103,11 +5118,11 @@
             <a:avLst/>
           </a:prstGeom>
           <a:solidFill>
-            <a:srgbClr val="FF5A1F"/>
+            <a:srgbClr val="97BC62"/>
           </a:solidFill>
           <a:ln w="12700">
             <a:solidFill>
-              <a:srgbClr val="FF5A1F"/>
+              <a:srgbClr val="97BC62"/>
             </a:solidFill>
             <a:prstDash val="solid"/>
           </a:ln>
@@ -5140,7 +5155,7 @@
             <a:r>
               <a:rPr lang="en-US" sz="1450" i="1" dirty="0">
                 <a:solidFill>
-                  <a:srgbClr val="FFFFFF"/>
+                  <a:srgbClr val="F0F5EA"/>
                 </a:solidFill>
                 <a:latin typeface="Arial" pitchFamily="34" charset="0"/>
                 <a:ea typeface="Arial" pitchFamily="34" charset="-122"/>
@@ -5167,11 +5182,11 @@
             <a:avLst/>
           </a:prstGeom>
           <a:solidFill>
-            <a:srgbClr val="E0E0E0"/>
+            <a:srgbClr val="D8E8C8"/>
           </a:solidFill>
           <a:ln w="12700">
             <a:solidFill>
-              <a:srgbClr val="E0E0E0"/>
+              <a:srgbClr val="D8E8C8"/>
             </a:solidFill>
             <a:prstDash val="solid"/>
           </a:ln>
@@ -5192,11 +5207,11 @@
             <a:avLst/>
           </a:prstGeom>
           <a:solidFill>
-            <a:srgbClr val="555555"/>
+            <a:srgbClr val="3E5C42"/>
           </a:solidFill>
           <a:ln w="12700">
             <a:solidFill>
-              <a:srgbClr val="555555"/>
+              <a:srgbClr val="3E5C42"/>
             </a:solidFill>
             <a:prstDash val="solid"/>
           </a:ln>
@@ -5219,7 +5234,7 @@
             </a:avLst>
           </a:prstGeom>
           <a:solidFill>
-            <a:srgbClr val="0A0A0A"/>
+            <a:srgbClr val="1F3D26"/>
           </a:solidFill>
           <a:ln w="12700">
             <a:solidFill>
@@ -5244,11 +5259,11 @@
             <a:avLst/>
           </a:prstGeom>
           <a:solidFill>
-            <a:srgbClr val="FF5A1F"/>
+            <a:srgbClr val="97BC62"/>
           </a:solidFill>
           <a:ln w="12700">
             <a:solidFill>
-              <a:srgbClr val="FF5A1F"/>
+              <a:srgbClr val="97BC62"/>
             </a:solidFill>
             <a:prstDash val="solid"/>
           </a:ln>
@@ -5281,7 +5296,7 @@
             <a:r>
               <a:rPr lang="en-US" sz="3200" b="1" dirty="0">
                 <a:solidFill>
-                  <a:srgbClr val="FFFFFF"/>
+                  <a:srgbClr val="F0F5EA"/>
                 </a:solidFill>
                 <a:latin typeface="Arial Black" pitchFamily="34" charset="0"/>
                 <a:ea typeface="Arial Black" pitchFamily="34" charset="-122"/>
@@ -5320,7 +5335,7 @@
             <a:r>
               <a:rPr lang="en-US" sz="1000" dirty="0">
                 <a:solidFill>
-                  <a:srgbClr val="B0B0B0"/>
+                  <a:srgbClr val="8FAE8B"/>
                 </a:solidFill>
                 <a:latin typeface="Arial" pitchFamily="34" charset="0"/>
                 <a:ea typeface="Arial" pitchFamily="34" charset="-122"/>
@@ -5347,11 +5362,11 @@
             <a:avLst/>
           </a:prstGeom>
           <a:solidFill>
-            <a:srgbClr val="E0E0E0"/>
+            <a:srgbClr val="D8E8C8"/>
           </a:solidFill>
           <a:ln w="12700">
             <a:solidFill>
-              <a:srgbClr val="E0E0E0"/>
+              <a:srgbClr val="D8E8C8"/>
             </a:solidFill>
             <a:prstDash val="solid"/>
           </a:ln>
@@ -5372,11 +5387,11 @@
             <a:avLst/>
           </a:prstGeom>
           <a:solidFill>
-            <a:srgbClr val="555555"/>
+            <a:srgbClr val="3E5C42"/>
           </a:solidFill>
           <a:ln w="12700">
             <a:solidFill>
-              <a:srgbClr val="555555"/>
+              <a:srgbClr val="3E5C42"/>
             </a:solidFill>
             <a:prstDash val="solid"/>
           </a:ln>
@@ -5399,7 +5414,7 @@
             </a:avLst>
           </a:prstGeom>
           <a:solidFill>
-            <a:srgbClr val="0A0A0A"/>
+            <a:srgbClr val="1F3D26"/>
           </a:solidFill>
           <a:ln w="12700">
             <a:solidFill>
@@ -5424,11 +5439,11 @@
             <a:avLst/>
           </a:prstGeom>
           <a:solidFill>
-            <a:srgbClr val="FF5A1F"/>
+            <a:srgbClr val="97BC62"/>
           </a:solidFill>
           <a:ln w="12700">
             <a:solidFill>
-              <a:srgbClr val="FF5A1F"/>
+              <a:srgbClr val="97BC62"/>
             </a:solidFill>
             <a:prstDash val="solid"/>
           </a:ln>
@@ -5461,7 +5476,7 @@
             <a:r>
               <a:rPr lang="en-US" sz="3200" b="1" dirty="0">
                 <a:solidFill>
-                  <a:srgbClr val="FFFFFF"/>
+                  <a:srgbClr val="F0F5EA"/>
                 </a:solidFill>
                 <a:latin typeface="Arial Black" pitchFamily="34" charset="0"/>
                 <a:ea typeface="Arial Black" pitchFamily="34" charset="-122"/>
@@ -5500,7 +5515,7 @@
             <a:r>
               <a:rPr lang="en-US" sz="1000" dirty="0">
                 <a:solidFill>
-                  <a:srgbClr val="B0B0B0"/>
+                  <a:srgbClr val="8FAE8B"/>
                 </a:solidFill>
                 <a:latin typeface="Arial" pitchFamily="34" charset="0"/>
                 <a:ea typeface="Arial" pitchFamily="34" charset="-122"/>
@@ -5527,11 +5542,11 @@
             <a:avLst/>
           </a:prstGeom>
           <a:solidFill>
-            <a:srgbClr val="E0E0E0"/>
+            <a:srgbClr val="D8E8C8"/>
           </a:solidFill>
           <a:ln w="12700">
             <a:solidFill>
-              <a:srgbClr val="E0E0E0"/>
+              <a:srgbClr val="D8E8C8"/>
             </a:solidFill>
             <a:prstDash val="solid"/>
           </a:ln>
@@ -5552,11 +5567,11 @@
             <a:avLst/>
           </a:prstGeom>
           <a:solidFill>
-            <a:srgbClr val="555555"/>
+            <a:srgbClr val="3E5C42"/>
           </a:solidFill>
           <a:ln w="12700">
             <a:solidFill>
-              <a:srgbClr val="555555"/>
+              <a:srgbClr val="3E5C42"/>
             </a:solidFill>
             <a:prstDash val="solid"/>
           </a:ln>
@@ -5579,7 +5594,7 @@
             </a:avLst>
           </a:prstGeom>
           <a:solidFill>
-            <a:srgbClr val="0A0A0A"/>
+            <a:srgbClr val="1F3D26"/>
           </a:solidFill>
           <a:ln w="12700">
             <a:solidFill>
@@ -5604,11 +5619,11 @@
             <a:avLst/>
           </a:prstGeom>
           <a:solidFill>
-            <a:srgbClr val="FF5A1F"/>
+            <a:srgbClr val="97BC62"/>
           </a:solidFill>
           <a:ln w="12700">
             <a:solidFill>
-              <a:srgbClr val="FF5A1F"/>
+              <a:srgbClr val="97BC62"/>
             </a:solidFill>
             <a:prstDash val="solid"/>
           </a:ln>
@@ -5641,7 +5656,7 @@
             <a:r>
               <a:rPr lang="en-US" sz="3200" b="1" dirty="0">
                 <a:solidFill>
-                  <a:srgbClr val="FFFFFF"/>
+                  <a:srgbClr val="F0F5EA"/>
                 </a:solidFill>
                 <a:latin typeface="Arial Black" pitchFamily="34" charset="0"/>
                 <a:ea typeface="Arial Black" pitchFamily="34" charset="-122"/>
@@ -5680,7 +5695,7 @@
             <a:r>
               <a:rPr lang="en-US" sz="1000" dirty="0">
                 <a:solidFill>
-                  <a:srgbClr val="B0B0B0"/>
+                  <a:srgbClr val="8FAE8B"/>
                 </a:solidFill>
                 <a:latin typeface="Arial" pitchFamily="34" charset="0"/>
                 <a:ea typeface="Arial" pitchFamily="34" charset="-122"/>
@@ -5719,7 +5734,7 @@
             <a:r>
               <a:rPr lang="en-US" sz="1700" b="1" dirty="0">
                 <a:solidFill>
-                  <a:srgbClr val="E0E0E0"/>
+                  <a:srgbClr val="D8E8C8"/>
                 </a:solidFill>
                 <a:latin typeface="Arial Black" pitchFamily="34" charset="0"/>
                 <a:ea typeface="Arial Black" pitchFamily="34" charset="-122"/>
@@ -5765,7 +5780,7 @@
             <a:r>
               <a:rPr lang="en-US" sz="1700" b="1" dirty="0">
                 <a:solidFill>
-                  <a:srgbClr val="0A0A0A"/>
+                  <a:srgbClr val="2C5F2D"/>
                 </a:solidFill>
                 <a:latin typeface="Arial Black" pitchFamily="34" charset="0"/>
                 <a:ea typeface="Arial Black" pitchFamily="34" charset="-122"/>
@@ -5804,7 +5819,7 @@
             <a:r>
               <a:rPr lang="en-US" sz="850" dirty="0">
                 <a:solidFill>
-                  <a:srgbClr val="6E6E6E"/>
+                  <a:srgbClr val="5A6B5A"/>
                 </a:solidFill>
                 <a:latin typeface="Arial" pitchFamily="34" charset="0"/>
                 <a:ea typeface="Arial" pitchFamily="34" charset="-122"/>
@@ -5821,6 +5836,9 @@
   <p:clrMapOvr>
     <a:masterClrMapping/>
   </p:clrMapOvr>
+  <p:transition spd="med">
+    <p:fade/>
+  </p:transition>
 </p:sld>
 </file>
 
@@ -5830,7 +5848,7 @@
     <p:bg>
       <p:bgPr>
         <a:solidFill>
-          <a:srgbClr val="0A0A0A"/>
+          <a:srgbClr val="1F3D26"/>
         </a:solidFill>
       </p:bgPr>
     </p:bg>
@@ -5875,7 +5893,7 @@
             <a:r>
               <a:rPr lang="en-US" sz="3200" b="1" dirty="0">
                 <a:solidFill>
-                  <a:srgbClr val="2A2A2A"/>
+                  <a:srgbClr val="142B1A"/>
                 </a:solidFill>
                 <a:latin typeface="Arial Black" pitchFamily="34" charset="0"/>
                 <a:ea typeface="Arial Black" pitchFamily="34" charset="-122"/>
@@ -5914,7 +5932,7 @@
             <a:r>
               <a:rPr lang="en-US" sz="3200" b="1" dirty="0">
                 <a:solidFill>
-                  <a:srgbClr val="FFFFFF"/>
+                  <a:srgbClr val="F0F5EA"/>
                 </a:solidFill>
                 <a:latin typeface="Arial Black" pitchFamily="34" charset="0"/>
                 <a:ea typeface="Arial Black" pitchFamily="34" charset="-122"/>
@@ -5941,11 +5959,11 @@
             <a:avLst/>
           </a:prstGeom>
           <a:solidFill>
-            <a:srgbClr val="B0B0B0"/>
+            <a:srgbClr val="8FAE8B"/>
           </a:solidFill>
           <a:ln w="12700">
             <a:solidFill>
-              <a:srgbClr val="B0B0B0"/>
+              <a:srgbClr val="8FAE8B"/>
             </a:solidFill>
             <a:prstDash val="solid"/>
           </a:ln>
@@ -5966,11 +5984,11 @@
             <a:avLst/>
           </a:prstGeom>
           <a:solidFill>
-            <a:srgbClr val="2A2A2A"/>
+            <a:srgbClr val="142B1A"/>
           </a:solidFill>
           <a:ln w="12700">
             <a:solidFill>
-              <a:srgbClr val="2A2A2A"/>
+              <a:srgbClr val="142B1A"/>
             </a:solidFill>
             <a:prstDash val="solid"/>
           </a:ln>
@@ -5991,11 +6009,11 @@
             <a:avLst/>
           </a:prstGeom>
           <a:solidFill>
-            <a:srgbClr val="555555"/>
+            <a:srgbClr val="3E5C42"/>
           </a:solidFill>
           <a:ln w="12700">
             <a:solidFill>
-              <a:srgbClr val="555555"/>
+              <a:srgbClr val="3E5C42"/>
             </a:solidFill>
             <a:prstDash val="solid"/>
           </a:ln>
@@ -6018,11 +6036,11 @@
             </a:avLst>
           </a:prstGeom>
           <a:solidFill>
-            <a:srgbClr val="161616"/>
+            <a:srgbClr val="2A4A33"/>
           </a:solidFill>
           <a:ln w="12700">
             <a:solidFill>
-              <a:srgbClr val="2A2A2A"/>
+              <a:srgbClr val="142B1A"/>
             </a:solidFill>
             <a:prstDash val="solid"/>
           </a:ln>
@@ -6055,7 +6073,7 @@
             <a:r>
               <a:rPr lang="en-US" sz="4400" b="1" dirty="0">
                 <a:solidFill>
-                  <a:srgbClr val="FFFFFF"/>
+                  <a:srgbClr val="F0F5EA"/>
                 </a:solidFill>
                 <a:latin typeface="Arial Black" pitchFamily="34" charset="0"/>
                 <a:ea typeface="Arial Black" pitchFamily="34" charset="-122"/>
@@ -6094,7 +6112,7 @@
             <a:r>
               <a:rPr lang="en-US" sz="950" dirty="0">
                 <a:solidFill>
-                  <a:srgbClr val="B0B0B0"/>
+                  <a:srgbClr val="8FAE8B"/>
                 </a:solidFill>
                 <a:latin typeface="Arial" pitchFamily="34" charset="0"/>
                 <a:ea typeface="Arial" pitchFamily="34" charset="-122"/>
@@ -6133,7 +6151,7 @@
             <a:r>
               <a:rPr lang="en-US" sz="750" dirty="0">
                 <a:solidFill>
-                  <a:srgbClr val="8A8A8A"/>
+                  <a:srgbClr val="8FAE8B"/>
                 </a:solidFill>
                 <a:latin typeface="Arial" pitchFamily="34" charset="0"/>
                 <a:ea typeface="Arial" pitchFamily="34" charset="-122"/>
@@ -6160,11 +6178,11 @@
             <a:avLst/>
           </a:prstGeom>
           <a:solidFill>
-            <a:srgbClr val="2A2A2A"/>
+            <a:srgbClr val="142B1A"/>
           </a:solidFill>
           <a:ln w="12700">
             <a:solidFill>
-              <a:srgbClr val="2A2A2A"/>
+              <a:srgbClr val="142B1A"/>
             </a:solidFill>
             <a:prstDash val="solid"/>
           </a:ln>
@@ -6185,11 +6203,11 @@
             <a:avLst/>
           </a:prstGeom>
           <a:solidFill>
-            <a:srgbClr val="555555"/>
+            <a:srgbClr val="3E5C42"/>
           </a:solidFill>
           <a:ln w="12700">
             <a:solidFill>
-              <a:srgbClr val="555555"/>
+              <a:srgbClr val="3E5C42"/>
             </a:solidFill>
             <a:prstDash val="solid"/>
           </a:ln>
@@ -6212,11 +6230,11 @@
             </a:avLst>
           </a:prstGeom>
           <a:solidFill>
-            <a:srgbClr val="161616"/>
+            <a:srgbClr val="2A4A33"/>
           </a:solidFill>
           <a:ln w="12700">
             <a:solidFill>
-              <a:srgbClr val="2A2A2A"/>
+              <a:srgbClr val="142B1A"/>
             </a:solidFill>
             <a:prstDash val="solid"/>
           </a:ln>
@@ -6249,7 +6267,7 @@
             <a:r>
               <a:rPr lang="en-US" sz="4400" b="1" dirty="0">
                 <a:solidFill>
-                  <a:srgbClr val="FFFFFF"/>
+                  <a:srgbClr val="F0F5EA"/>
                 </a:solidFill>
                 <a:latin typeface="Arial Black" pitchFamily="34" charset="0"/>
                 <a:ea typeface="Arial Black" pitchFamily="34" charset="-122"/>
@@ -6288,7 +6306,7 @@
             <a:r>
               <a:rPr lang="en-US" sz="950" dirty="0">
                 <a:solidFill>
-                  <a:srgbClr val="B0B0B0"/>
+                  <a:srgbClr val="8FAE8B"/>
                 </a:solidFill>
                 <a:latin typeface="Arial" pitchFamily="34" charset="0"/>
                 <a:ea typeface="Arial" pitchFamily="34" charset="-122"/>
@@ -6327,7 +6345,7 @@
             <a:r>
               <a:rPr lang="en-US" sz="750" dirty="0">
                 <a:solidFill>
-                  <a:srgbClr val="8A8A8A"/>
+                  <a:srgbClr val="8FAE8B"/>
                 </a:solidFill>
                 <a:latin typeface="Arial" pitchFamily="34" charset="0"/>
                 <a:ea typeface="Arial" pitchFamily="34" charset="-122"/>
@@ -6354,11 +6372,11 @@
             <a:avLst/>
           </a:prstGeom>
           <a:solidFill>
-            <a:srgbClr val="2A2A2A"/>
+            <a:srgbClr val="142B1A"/>
           </a:solidFill>
           <a:ln w="12700">
             <a:solidFill>
-              <a:srgbClr val="2A2A2A"/>
+              <a:srgbClr val="142B1A"/>
             </a:solidFill>
             <a:prstDash val="solid"/>
           </a:ln>
@@ -6379,11 +6397,11 @@
             <a:avLst/>
           </a:prstGeom>
           <a:solidFill>
-            <a:srgbClr val="555555"/>
+            <a:srgbClr val="3E5C42"/>
           </a:solidFill>
           <a:ln w="12700">
             <a:solidFill>
-              <a:srgbClr val="555555"/>
+              <a:srgbClr val="3E5C42"/>
             </a:solidFill>
             <a:prstDash val="solid"/>
           </a:ln>
@@ -6406,11 +6424,11 @@
             </a:avLst>
           </a:prstGeom>
           <a:solidFill>
-            <a:srgbClr val="161616"/>
+            <a:srgbClr val="2A4A33"/>
           </a:solidFill>
           <a:ln w="12700">
             <a:solidFill>
-              <a:srgbClr val="2A2A2A"/>
+              <a:srgbClr val="142B1A"/>
             </a:solidFill>
             <a:prstDash val="solid"/>
           </a:ln>
@@ -6443,7 +6461,7 @@
             <a:r>
               <a:rPr lang="en-US" sz="4400" b="1" dirty="0">
                 <a:solidFill>
-                  <a:srgbClr val="FFFFFF"/>
+                  <a:srgbClr val="F0F5EA"/>
                 </a:solidFill>
                 <a:latin typeface="Arial Black" pitchFamily="34" charset="0"/>
                 <a:ea typeface="Arial Black" pitchFamily="34" charset="-122"/>
@@ -6482,7 +6500,7 @@
             <a:r>
               <a:rPr lang="en-US" sz="950" dirty="0">
                 <a:solidFill>
-                  <a:srgbClr val="B0B0B0"/>
+                  <a:srgbClr val="8FAE8B"/>
                 </a:solidFill>
                 <a:latin typeface="Arial" pitchFamily="34" charset="0"/>
                 <a:ea typeface="Arial" pitchFamily="34" charset="-122"/>
@@ -6521,7 +6539,7 @@
             <a:r>
               <a:rPr lang="en-US" sz="750" dirty="0">
                 <a:solidFill>
-                  <a:srgbClr val="8A8A8A"/>
+                  <a:srgbClr val="8FAE8B"/>
                 </a:solidFill>
                 <a:latin typeface="Arial" pitchFamily="34" charset="0"/>
                 <a:ea typeface="Arial" pitchFamily="34" charset="-122"/>
@@ -6548,11 +6566,11 @@
             <a:avLst/>
           </a:prstGeom>
           <a:solidFill>
-            <a:srgbClr val="2A2A2A"/>
+            <a:srgbClr val="142B1A"/>
           </a:solidFill>
           <a:ln w="12700">
             <a:solidFill>
-              <a:srgbClr val="2A2A2A"/>
+              <a:srgbClr val="142B1A"/>
             </a:solidFill>
             <a:prstDash val="solid"/>
           </a:ln>
@@ -6573,11 +6591,11 @@
             <a:avLst/>
           </a:prstGeom>
           <a:solidFill>
-            <a:srgbClr val="555555"/>
+            <a:srgbClr val="3E5C42"/>
           </a:solidFill>
           <a:ln w="12700">
             <a:solidFill>
-              <a:srgbClr val="555555"/>
+              <a:srgbClr val="3E5C42"/>
             </a:solidFill>
             <a:prstDash val="solid"/>
           </a:ln>
@@ -6600,11 +6618,11 @@
             </a:avLst>
           </a:prstGeom>
           <a:solidFill>
-            <a:srgbClr val="161616"/>
+            <a:srgbClr val="2A4A33"/>
           </a:solidFill>
           <a:ln w="12700">
             <a:solidFill>
-              <a:srgbClr val="2A2A2A"/>
+              <a:srgbClr val="142B1A"/>
             </a:solidFill>
             <a:prstDash val="solid"/>
           </a:ln>
@@ -6637,7 +6655,7 @@
             <a:r>
               <a:rPr lang="en-US" sz="4400" b="1" dirty="0">
                 <a:solidFill>
-                  <a:srgbClr val="FFFFFF"/>
+                  <a:srgbClr val="F0F5EA"/>
                 </a:solidFill>
                 <a:latin typeface="Arial Black" pitchFamily="34" charset="0"/>
                 <a:ea typeface="Arial Black" pitchFamily="34" charset="-122"/>
@@ -6676,7 +6694,7 @@
             <a:r>
               <a:rPr lang="en-US" sz="950" dirty="0">
                 <a:solidFill>
-                  <a:srgbClr val="B0B0B0"/>
+                  <a:srgbClr val="8FAE8B"/>
                 </a:solidFill>
                 <a:latin typeface="Arial" pitchFamily="34" charset="0"/>
                 <a:ea typeface="Arial" pitchFamily="34" charset="-122"/>
@@ -6715,7 +6733,7 @@
             <a:r>
               <a:rPr lang="en-US" sz="750" dirty="0">
                 <a:solidFill>
-                  <a:srgbClr val="8A8A8A"/>
+                  <a:srgbClr val="8FAE8B"/>
                 </a:solidFill>
                 <a:latin typeface="Arial" pitchFamily="34" charset="0"/>
                 <a:ea typeface="Arial" pitchFamily="34" charset="-122"/>
@@ -6754,7 +6772,7 @@
             <a:r>
               <a:rPr lang="en-US" sz="1300" b="1" dirty="0">
                 <a:solidFill>
-                  <a:srgbClr val="FFFFFF"/>
+                  <a:srgbClr val="F0F5EA"/>
                 </a:solidFill>
                 <a:latin typeface="Arial Black" pitchFamily="34" charset="0"/>
                 <a:ea typeface="Arial Black" pitchFamily="34" charset="-122"/>
@@ -6793,7 +6811,7 @@
             <a:r>
               <a:rPr lang="en-US" sz="850" dirty="0">
                 <a:solidFill>
-                  <a:srgbClr val="B0B0B0"/>
+                  <a:srgbClr val="8FAE8B"/>
                 </a:solidFill>
                 <a:latin typeface="Arial" pitchFamily="34" charset="0"/>
                 <a:ea typeface="Arial" pitchFamily="34" charset="-122"/>
@@ -6810,6 +6828,9 @@
   <p:clrMapOvr>
     <a:masterClrMapping/>
   </p:clrMapOvr>
+  <p:transition spd="med">
+    <p:fade/>
+  </p:transition>
 </p:sld>
 </file>
 
@@ -6819,7 +6840,7 @@
     <p:bg>
       <p:bgPr>
         <a:solidFill>
-          <a:srgbClr val="0A0A0A"/>
+          <a:srgbClr val="1F3D26"/>
         </a:solidFill>
       </p:bgPr>
     </p:bg>
@@ -6864,7 +6885,7 @@
             <a:r>
               <a:rPr lang="en-US" sz="3000" b="1" dirty="0">
                 <a:solidFill>
-                  <a:srgbClr val="2A2A2A"/>
+                  <a:srgbClr val="142B1A"/>
                 </a:solidFill>
                 <a:latin typeface="Arial Black" pitchFamily="34" charset="0"/>
                 <a:ea typeface="Arial Black" pitchFamily="34" charset="-122"/>
@@ -6903,7 +6924,7 @@
             <a:r>
               <a:rPr lang="en-US" sz="3000" b="1" dirty="0">
                 <a:solidFill>
-                  <a:srgbClr val="FFFFFF"/>
+                  <a:srgbClr val="F0F5EA"/>
                 </a:solidFill>
                 <a:latin typeface="Arial Black" pitchFamily="34" charset="0"/>
                 <a:ea typeface="Arial Black" pitchFamily="34" charset="-122"/>
@@ -6930,11 +6951,11 @@
             <a:avLst/>
           </a:prstGeom>
           <a:solidFill>
-            <a:srgbClr val="FF5A1F"/>
+            <a:srgbClr val="97BC62"/>
           </a:solidFill>
           <a:ln w="12700">
             <a:solidFill>
-              <a:srgbClr val="FF5A1F"/>
+              <a:srgbClr val="97BC62"/>
             </a:solidFill>
             <a:prstDash val="solid"/>
           </a:ln>
@@ -6967,7 +6988,7 @@
             <a:r>
               <a:rPr lang="en-US" sz="1350" b="1" dirty="0">
                 <a:solidFill>
-                  <a:srgbClr val="FFFFFF"/>
+                  <a:srgbClr val="F0F5EA"/>
                 </a:solidFill>
                 <a:latin typeface="Arial" pitchFamily="34" charset="0"/>
                 <a:ea typeface="Arial" pitchFamily="34" charset="-122"/>
@@ -6994,11 +7015,11 @@
             <a:avLst/>
           </a:prstGeom>
           <a:solidFill>
-            <a:srgbClr val="2A2A2A"/>
+            <a:srgbClr val="142B1A"/>
           </a:solidFill>
           <a:ln w="12700">
             <a:solidFill>
-              <a:srgbClr val="2A2A2A"/>
+              <a:srgbClr val="142B1A"/>
             </a:solidFill>
             <a:prstDash val="solid"/>
           </a:ln>
@@ -7019,11 +7040,11 @@
             <a:avLst/>
           </a:prstGeom>
           <a:solidFill>
-            <a:srgbClr val="555555"/>
+            <a:srgbClr val="3E5C42"/>
           </a:solidFill>
           <a:ln w="12700">
             <a:solidFill>
-              <a:srgbClr val="555555"/>
+              <a:srgbClr val="3E5C42"/>
             </a:solidFill>
             <a:prstDash val="solid"/>
           </a:ln>
@@ -7046,11 +7067,11 @@
             </a:avLst>
           </a:prstGeom>
           <a:solidFill>
-            <a:srgbClr val="161616"/>
+            <a:srgbClr val="2A4A33"/>
           </a:solidFill>
           <a:ln w="12700">
             <a:solidFill>
-              <a:srgbClr val="2A2A2A"/>
+              <a:srgbClr val="142B1A"/>
             </a:solidFill>
             <a:prstDash val="solid"/>
           </a:ln>
@@ -7083,7 +7104,7 @@
             <a:r>
               <a:rPr lang="en-US" sz="1400" b="1" dirty="0">
                 <a:solidFill>
-                  <a:srgbClr val="FFFFFF"/>
+                  <a:srgbClr val="F0F5EA"/>
                 </a:solidFill>
                 <a:latin typeface="Arial Black" pitchFamily="34" charset="0"/>
                 <a:ea typeface="Arial Black" pitchFamily="34" charset="-122"/>
@@ -7122,7 +7143,7 @@
             <a:r>
               <a:rPr lang="en-US" sz="850" dirty="0">
                 <a:solidFill>
-                  <a:srgbClr val="B0B0B0"/>
+                  <a:srgbClr val="8FAE8B"/>
                 </a:solidFill>
                 <a:latin typeface="Arial" pitchFamily="34" charset="0"/>
                 <a:ea typeface="Arial" pitchFamily="34" charset="-122"/>
@@ -7149,11 +7170,11 @@
             <a:avLst/>
           </a:prstGeom>
           <a:solidFill>
-            <a:srgbClr val="2A2A2A"/>
+            <a:srgbClr val="142B1A"/>
           </a:solidFill>
           <a:ln w="12700">
             <a:solidFill>
-              <a:srgbClr val="2A2A2A"/>
+              <a:srgbClr val="142B1A"/>
             </a:solidFill>
             <a:prstDash val="solid"/>
           </a:ln>
@@ -7174,11 +7195,11 @@
             <a:avLst/>
           </a:prstGeom>
           <a:solidFill>
-            <a:srgbClr val="555555"/>
+            <a:srgbClr val="3E5C42"/>
           </a:solidFill>
           <a:ln w="12700">
             <a:solidFill>
-              <a:srgbClr val="555555"/>
+              <a:srgbClr val="3E5C42"/>
             </a:solidFill>
             <a:prstDash val="solid"/>
           </a:ln>
@@ -7201,11 +7222,11 @@
             </a:avLst>
           </a:prstGeom>
           <a:solidFill>
-            <a:srgbClr val="161616"/>
+            <a:srgbClr val="2A4A33"/>
           </a:solidFill>
           <a:ln w="12700">
             <a:solidFill>
-              <a:srgbClr val="2A2A2A"/>
+              <a:srgbClr val="142B1A"/>
             </a:solidFill>
             <a:prstDash val="solid"/>
           </a:ln>
@@ -7238,7 +7259,7 @@
             <a:r>
               <a:rPr lang="en-US" sz="1400" b="1" dirty="0">
                 <a:solidFill>
-                  <a:srgbClr val="FFFFFF"/>
+                  <a:srgbClr val="F0F5EA"/>
                 </a:solidFill>
                 <a:latin typeface="Arial Black" pitchFamily="34" charset="0"/>
                 <a:ea typeface="Arial Black" pitchFamily="34" charset="-122"/>
@@ -7277,7 +7298,7 @@
             <a:r>
               <a:rPr lang="en-US" sz="850" dirty="0">
                 <a:solidFill>
-                  <a:srgbClr val="B0B0B0"/>
+                  <a:srgbClr val="8FAE8B"/>
                 </a:solidFill>
                 <a:latin typeface="Arial" pitchFamily="34" charset="0"/>
                 <a:ea typeface="Arial" pitchFamily="34" charset="-122"/>
@@ -7304,11 +7325,11 @@
             <a:avLst/>
           </a:prstGeom>
           <a:solidFill>
-            <a:srgbClr val="2A2A2A"/>
+            <a:srgbClr val="142B1A"/>
           </a:solidFill>
           <a:ln w="12700">
             <a:solidFill>
-              <a:srgbClr val="2A2A2A"/>
+              <a:srgbClr val="142B1A"/>
             </a:solidFill>
             <a:prstDash val="solid"/>
           </a:ln>
@@ -7329,11 +7350,11 @@
             <a:avLst/>
           </a:prstGeom>
           <a:solidFill>
-            <a:srgbClr val="555555"/>
+            <a:srgbClr val="3E5C42"/>
           </a:solidFill>
           <a:ln w="12700">
             <a:solidFill>
-              <a:srgbClr val="555555"/>
+              <a:srgbClr val="3E5C42"/>
             </a:solidFill>
             <a:prstDash val="solid"/>
           </a:ln>
@@ -7356,11 +7377,11 @@
             </a:avLst>
           </a:prstGeom>
           <a:solidFill>
-            <a:srgbClr val="161616"/>
+            <a:srgbClr val="2A4A33"/>
           </a:solidFill>
           <a:ln w="12700">
             <a:solidFill>
-              <a:srgbClr val="2A2A2A"/>
+              <a:srgbClr val="142B1A"/>
             </a:solidFill>
             <a:prstDash val="solid"/>
           </a:ln>
@@ -7393,7 +7414,7 @@
             <a:r>
               <a:rPr lang="en-US" sz="1400" b="1" dirty="0">
                 <a:solidFill>
-                  <a:srgbClr val="FFFFFF"/>
+                  <a:srgbClr val="F0F5EA"/>
                 </a:solidFill>
                 <a:latin typeface="Arial Black" pitchFamily="34" charset="0"/>
                 <a:ea typeface="Arial Black" pitchFamily="34" charset="-122"/>
@@ -7432,7 +7453,7 @@
             <a:r>
               <a:rPr lang="en-US" sz="850" dirty="0">
                 <a:solidFill>
-                  <a:srgbClr val="B0B0B0"/>
+                  <a:srgbClr val="8FAE8B"/>
                 </a:solidFill>
                 <a:latin typeface="Arial" pitchFamily="34" charset="0"/>
                 <a:ea typeface="Arial" pitchFamily="34" charset="-122"/>
@@ -7459,11 +7480,11 @@
             <a:avLst/>
           </a:prstGeom>
           <a:solidFill>
-            <a:srgbClr val="2A2A2A"/>
+            <a:srgbClr val="142B1A"/>
           </a:solidFill>
           <a:ln w="12700">
             <a:solidFill>
-              <a:srgbClr val="2A2A2A"/>
+              <a:srgbClr val="142B1A"/>
             </a:solidFill>
             <a:prstDash val="solid"/>
           </a:ln>
@@ -7484,11 +7505,11 @@
             <a:avLst/>
           </a:prstGeom>
           <a:solidFill>
-            <a:srgbClr val="555555"/>
+            <a:srgbClr val="3E5C42"/>
           </a:solidFill>
           <a:ln w="12700">
             <a:solidFill>
-              <a:srgbClr val="555555"/>
+              <a:srgbClr val="3E5C42"/>
             </a:solidFill>
             <a:prstDash val="solid"/>
           </a:ln>
@@ -7511,11 +7532,11 @@
             </a:avLst>
           </a:prstGeom>
           <a:solidFill>
-            <a:srgbClr val="161616"/>
+            <a:srgbClr val="2A4A33"/>
           </a:solidFill>
           <a:ln w="12700">
             <a:solidFill>
-              <a:srgbClr val="2A2A2A"/>
+              <a:srgbClr val="142B1A"/>
             </a:solidFill>
             <a:prstDash val="solid"/>
           </a:ln>
@@ -7548,7 +7569,7 @@
             <a:r>
               <a:rPr lang="en-US" sz="1400" b="1" dirty="0">
                 <a:solidFill>
-                  <a:srgbClr val="FFFFFF"/>
+                  <a:srgbClr val="F0F5EA"/>
                 </a:solidFill>
                 <a:latin typeface="Arial Black" pitchFamily="34" charset="0"/>
                 <a:ea typeface="Arial Black" pitchFamily="34" charset="-122"/>
@@ -7587,7 +7608,7 @@
             <a:r>
               <a:rPr lang="en-US" sz="850" dirty="0">
                 <a:solidFill>
-                  <a:srgbClr val="B0B0B0"/>
+                  <a:srgbClr val="8FAE8B"/>
                 </a:solidFill>
                 <a:latin typeface="Arial" pitchFamily="34" charset="0"/>
                 <a:ea typeface="Arial" pitchFamily="34" charset="-122"/>
@@ -7626,7 +7647,7 @@
             <a:r>
               <a:rPr lang="en-US" sz="850" dirty="0">
                 <a:solidFill>
-                  <a:srgbClr val="B0B0B0"/>
+                  <a:srgbClr val="8FAE8B"/>
                 </a:solidFill>
                 <a:latin typeface="Arial" pitchFamily="34" charset="0"/>
                 <a:ea typeface="Arial" pitchFamily="34" charset="-122"/>
@@ -7643,6 +7664,9 @@
   <p:clrMapOvr>
     <a:masterClrMapping/>
   </p:clrMapOvr>
+  <p:transition spd="med">
+    <p:fade/>
+  </p:transition>
 </p:sld>
 </file>
 
@@ -7652,7 +7676,7 @@
     <p:bg>
       <p:bgPr>
         <a:solidFill>
-          <a:srgbClr val="FFFFFF"/>
+          <a:srgbClr val="F0F5EA"/>
         </a:solidFill>
       </p:bgPr>
     </p:bg>
@@ -7697,7 +7721,7 @@
             <a:r>
               <a:rPr lang="en-US" sz="2800" b="1" dirty="0">
                 <a:solidFill>
-                  <a:srgbClr val="E0E0E0"/>
+                  <a:srgbClr val="D8E8C8"/>
                 </a:solidFill>
                 <a:latin typeface="Arial Black" pitchFamily="34" charset="0"/>
                 <a:ea typeface="Arial Black" pitchFamily="34" charset="-122"/>
@@ -7743,7 +7767,7 @@
             <a:r>
               <a:rPr lang="en-US" sz="2800" b="1" dirty="0">
                 <a:solidFill>
-                  <a:srgbClr val="0A0A0A"/>
+                  <a:srgbClr val="2C5F2D"/>
                 </a:solidFill>
                 <a:latin typeface="Arial Black" pitchFamily="34" charset="0"/>
                 <a:ea typeface="Arial Black" pitchFamily="34" charset="-122"/>
@@ -7770,11 +7794,11 @@
             <a:avLst/>
           </a:prstGeom>
           <a:solidFill>
-            <a:srgbClr val="0A0A0A"/>
+            <a:srgbClr val="2C5F2D"/>
           </a:solidFill>
           <a:ln w="12700">
             <a:solidFill>
-              <a:srgbClr val="0A0A0A"/>
+              <a:srgbClr val="2C5F2D"/>
             </a:solidFill>
             <a:prstDash val="solid"/>
           </a:ln>
@@ -7807,7 +7831,7 @@
             <a:r>
               <a:rPr lang="en-US" sz="1600" b="1" dirty="0">
                 <a:solidFill>
-                  <a:srgbClr val="0A0A0A"/>
+                  <a:srgbClr val="2C5F2D"/>
                 </a:solidFill>
                 <a:latin typeface="Arial" pitchFamily="34" charset="0"/>
                 <a:ea typeface="Arial" pitchFamily="34" charset="-122"/>
@@ -7834,11 +7858,11 @@
             <a:avLst/>
           </a:prstGeom>
           <a:solidFill>
-            <a:srgbClr val="E0E0E0"/>
+            <a:srgbClr val="D8E8C8"/>
           </a:solidFill>
           <a:ln w="12700">
             <a:solidFill>
-              <a:srgbClr val="E0E0E0"/>
+              <a:srgbClr val="D8E8C8"/>
             </a:solidFill>
             <a:prstDash val="solid"/>
           </a:ln>
@@ -7861,11 +7885,11 @@
             </a:avLst>
           </a:prstGeom>
           <a:solidFill>
-            <a:srgbClr val="FFFFFF"/>
+            <a:srgbClr val="F0F5EA"/>
           </a:solidFill>
           <a:ln w="19050">
             <a:solidFill>
-              <a:srgbClr val="0A0A0A"/>
+              <a:srgbClr val="2C5F2D"/>
             </a:solidFill>
             <a:prstDash val="solid"/>
           </a:ln>
@@ -7886,7 +7910,7 @@
             <a:avLst/>
           </a:prstGeom>
           <a:solidFill>
-            <a:srgbClr val="0A0A0A"/>
+            <a:srgbClr val="1F3D26"/>
           </a:solidFill>
           <a:ln/>
         </p:spPr>
@@ -7918,7 +7942,7 @@
             <a:r>
               <a:rPr lang="en-US" sz="1400" b="1" dirty="0">
                 <a:solidFill>
-                  <a:srgbClr val="FFFFFF"/>
+                  <a:srgbClr val="F0F5EA"/>
                 </a:solidFill>
                 <a:latin typeface="Arial" pitchFamily="34" charset="0"/>
                 <a:ea typeface="Arial" pitchFamily="34" charset="-122"/>
@@ -7957,7 +7981,7 @@
             <a:r>
               <a:rPr lang="en-US" sz="1500" b="1" dirty="0">
                 <a:solidFill>
-                  <a:srgbClr val="0A0A0A"/>
+                  <a:srgbClr val="2C5F2D"/>
                 </a:solidFill>
                 <a:latin typeface="Arial Black" pitchFamily="34" charset="0"/>
                 <a:ea typeface="Arial Black" pitchFamily="34" charset="-122"/>
@@ -7999,7 +8023,7 @@
             <a:r>
               <a:rPr lang="en-US" sz="1100" dirty="0">
                 <a:solidFill>
-                  <a:srgbClr val="0A0A0A"/>
+                  <a:srgbClr val="2C5F2D"/>
                 </a:solidFill>
                 <a:latin typeface="Arial" pitchFamily="34" charset="0"/>
                 <a:ea typeface="Arial" pitchFamily="34" charset="-122"/>
@@ -8019,7 +8043,7 @@
             <a:r>
               <a:rPr lang="en-US" sz="1100" dirty="0">
                 <a:solidFill>
-                  <a:srgbClr val="0A0A0A"/>
+                  <a:srgbClr val="2C5F2D"/>
                 </a:solidFill>
                 <a:latin typeface="Arial" pitchFamily="34" charset="0"/>
                 <a:ea typeface="Arial" pitchFamily="34" charset="-122"/>
@@ -8039,7 +8063,7 @@
             <a:r>
               <a:rPr lang="en-US" sz="1100" dirty="0">
                 <a:solidFill>
-                  <a:srgbClr val="0A0A0A"/>
+                  <a:srgbClr val="2C5F2D"/>
                 </a:solidFill>
                 <a:latin typeface="Arial" pitchFamily="34" charset="0"/>
                 <a:ea typeface="Arial" pitchFamily="34" charset="-122"/>
@@ -8059,7 +8083,7 @@
             <a:r>
               <a:rPr lang="en-US" sz="1100" dirty="0">
                 <a:solidFill>
-                  <a:srgbClr val="0A0A0A"/>
+                  <a:srgbClr val="2C5F2D"/>
                 </a:solidFill>
                 <a:latin typeface="Arial" pitchFamily="34" charset="0"/>
                 <a:ea typeface="Arial" pitchFamily="34" charset="-122"/>
@@ -8086,11 +8110,11 @@
             <a:avLst/>
           </a:prstGeom>
           <a:solidFill>
-            <a:srgbClr val="E0E0E0"/>
+            <a:srgbClr val="D8E8C8"/>
           </a:solidFill>
           <a:ln w="12700">
             <a:solidFill>
-              <a:srgbClr val="E0E0E0"/>
+              <a:srgbClr val="D8E8C8"/>
             </a:solidFill>
             <a:prstDash val="solid"/>
           </a:ln>
@@ -8113,11 +8137,11 @@
             </a:avLst>
           </a:prstGeom>
           <a:solidFill>
-            <a:srgbClr val="FFFFFF"/>
+            <a:srgbClr val="F0F5EA"/>
           </a:solidFill>
           <a:ln w="19050">
             <a:solidFill>
-              <a:srgbClr val="0A0A0A"/>
+              <a:srgbClr val="2C5F2D"/>
             </a:solidFill>
             <a:prstDash val="solid"/>
           </a:ln>
@@ -8138,7 +8162,7 @@
             <a:avLst/>
           </a:prstGeom>
           <a:solidFill>
-            <a:srgbClr val="0A0A0A"/>
+            <a:srgbClr val="1F3D26"/>
           </a:solidFill>
           <a:ln/>
         </p:spPr>
@@ -8170,7 +8194,7 @@
             <a:r>
               <a:rPr lang="en-US" sz="1400" b="1" dirty="0">
                 <a:solidFill>
-                  <a:srgbClr val="FFFFFF"/>
+                  <a:srgbClr val="F0F5EA"/>
                 </a:solidFill>
                 <a:latin typeface="Arial" pitchFamily="34" charset="0"/>
                 <a:ea typeface="Arial" pitchFamily="34" charset="-122"/>
@@ -8209,7 +8233,7 @@
             <a:r>
               <a:rPr lang="en-US" sz="1500" b="1" dirty="0">
                 <a:solidFill>
-                  <a:srgbClr val="0A0A0A"/>
+                  <a:srgbClr val="2C5F2D"/>
                 </a:solidFill>
                 <a:latin typeface="Arial Black" pitchFamily="34" charset="0"/>
                 <a:ea typeface="Arial Black" pitchFamily="34" charset="-122"/>
@@ -8251,7 +8275,7 @@
             <a:r>
               <a:rPr lang="en-US" sz="1100" dirty="0">
                 <a:solidFill>
-                  <a:srgbClr val="0A0A0A"/>
+                  <a:srgbClr val="2C5F2D"/>
                 </a:solidFill>
                 <a:latin typeface="Arial" pitchFamily="34" charset="0"/>
                 <a:ea typeface="Arial" pitchFamily="34" charset="-122"/>
@@ -8271,7 +8295,7 @@
             <a:r>
               <a:rPr lang="en-US" sz="1100" dirty="0">
                 <a:solidFill>
-                  <a:srgbClr val="0A0A0A"/>
+                  <a:srgbClr val="2C5F2D"/>
                 </a:solidFill>
                 <a:latin typeface="Arial" pitchFamily="34" charset="0"/>
                 <a:ea typeface="Arial" pitchFamily="34" charset="-122"/>
@@ -8291,7 +8315,7 @@
             <a:r>
               <a:rPr lang="en-US" sz="1100" dirty="0">
                 <a:solidFill>
-                  <a:srgbClr val="0A0A0A"/>
+                  <a:srgbClr val="2C5F2D"/>
                 </a:solidFill>
                 <a:latin typeface="Arial" pitchFamily="34" charset="0"/>
                 <a:ea typeface="Arial" pitchFamily="34" charset="-122"/>
@@ -8311,7 +8335,7 @@
             <a:r>
               <a:rPr lang="en-US" sz="1100" dirty="0">
                 <a:solidFill>
-                  <a:srgbClr val="0A0A0A"/>
+                  <a:srgbClr val="2C5F2D"/>
                 </a:solidFill>
                 <a:latin typeface="Arial" pitchFamily="34" charset="0"/>
                 <a:ea typeface="Arial" pitchFamily="34" charset="-122"/>
@@ -8338,11 +8362,11 @@
             <a:avLst/>
           </a:prstGeom>
           <a:solidFill>
-            <a:srgbClr val="E0E0E0"/>
+            <a:srgbClr val="D8E8C8"/>
           </a:solidFill>
           <a:ln w="12700">
             <a:solidFill>
-              <a:srgbClr val="E0E0E0"/>
+              <a:srgbClr val="D8E8C8"/>
             </a:solidFill>
             <a:prstDash val="solid"/>
           </a:ln>
@@ -8365,11 +8389,11 @@
             </a:avLst>
           </a:prstGeom>
           <a:solidFill>
-            <a:srgbClr val="FFFFFF"/>
+            <a:srgbClr val="F0F5EA"/>
           </a:solidFill>
           <a:ln w="19050">
             <a:solidFill>
-              <a:srgbClr val="0A0A0A"/>
+              <a:srgbClr val="2C5F2D"/>
             </a:solidFill>
             <a:prstDash val="solid"/>
           </a:ln>
@@ -8390,7 +8414,7 @@
             <a:avLst/>
           </a:prstGeom>
           <a:solidFill>
-            <a:srgbClr val="0A0A0A"/>
+            <a:srgbClr val="1F3D26"/>
           </a:solidFill>
           <a:ln/>
         </p:spPr>
@@ -8422,7 +8446,7 @@
             <a:r>
               <a:rPr lang="en-US" sz="1400" b="1" dirty="0">
                 <a:solidFill>
-                  <a:srgbClr val="FFFFFF"/>
+                  <a:srgbClr val="F0F5EA"/>
                 </a:solidFill>
                 <a:latin typeface="Arial" pitchFamily="34" charset="0"/>
                 <a:ea typeface="Arial" pitchFamily="34" charset="-122"/>
@@ -8461,7 +8485,7 @@
             <a:r>
               <a:rPr lang="en-US" sz="1500" b="1" dirty="0">
                 <a:solidFill>
-                  <a:srgbClr val="0A0A0A"/>
+                  <a:srgbClr val="2C5F2D"/>
                 </a:solidFill>
                 <a:latin typeface="Arial Black" pitchFamily="34" charset="0"/>
                 <a:ea typeface="Arial Black" pitchFamily="34" charset="-122"/>
@@ -8503,7 +8527,7 @@
             <a:r>
               <a:rPr lang="en-US" sz="1100" dirty="0">
                 <a:solidFill>
-                  <a:srgbClr val="0A0A0A"/>
+                  <a:srgbClr val="2C5F2D"/>
                 </a:solidFill>
                 <a:latin typeface="Arial" pitchFamily="34" charset="0"/>
                 <a:ea typeface="Arial" pitchFamily="34" charset="-122"/>
@@ -8523,7 +8547,7 @@
             <a:r>
               <a:rPr lang="en-US" sz="1100" dirty="0">
                 <a:solidFill>
-                  <a:srgbClr val="0A0A0A"/>
+                  <a:srgbClr val="2C5F2D"/>
                 </a:solidFill>
                 <a:latin typeface="Arial" pitchFamily="34" charset="0"/>
                 <a:ea typeface="Arial" pitchFamily="34" charset="-122"/>
@@ -8543,7 +8567,7 @@
             <a:r>
               <a:rPr lang="en-US" sz="1100" dirty="0">
                 <a:solidFill>
-                  <a:srgbClr val="0A0A0A"/>
+                  <a:srgbClr val="2C5F2D"/>
                 </a:solidFill>
                 <a:latin typeface="Arial" pitchFamily="34" charset="0"/>
                 <a:ea typeface="Arial" pitchFamily="34" charset="-122"/>
@@ -8563,7 +8587,7 @@
             <a:r>
               <a:rPr lang="en-US" sz="1100" dirty="0">
                 <a:solidFill>
-                  <a:srgbClr val="0A0A0A"/>
+                  <a:srgbClr val="2C5F2D"/>
                 </a:solidFill>
                 <a:latin typeface="Arial" pitchFamily="34" charset="0"/>
                 <a:ea typeface="Arial" pitchFamily="34" charset="-122"/>
@@ -8602,7 +8626,7 @@
             <a:r>
               <a:rPr lang="en-US" sz="1050" i="1" dirty="0">
                 <a:solidFill>
-                  <a:srgbClr val="6E6E6E"/>
+                  <a:srgbClr val="5A6B5A"/>
                 </a:solidFill>
                 <a:latin typeface="Arial" pitchFamily="34" charset="0"/>
                 <a:ea typeface="Arial" pitchFamily="34" charset="-122"/>
@@ -8641,7 +8665,7 @@
             <a:r>
               <a:rPr lang="en-US" sz="850" dirty="0">
                 <a:solidFill>
-                  <a:srgbClr val="6E6E6E"/>
+                  <a:srgbClr val="5A6B5A"/>
                 </a:solidFill>
                 <a:latin typeface="Arial" pitchFamily="34" charset="0"/>
                 <a:ea typeface="Arial" pitchFamily="34" charset="-122"/>
@@ -8658,6 +8682,9 @@
   <p:clrMapOvr>
     <a:masterClrMapping/>
   </p:clrMapOvr>
+  <p:transition spd="med">
+    <p:fade/>
+  </p:transition>
 </p:sld>
 </file>
 
@@ -8667,7 +8694,7 @@
     <p:bg>
       <p:bgPr>
         <a:solidFill>
-          <a:srgbClr val="FFFFFF"/>
+          <a:srgbClr val="F0F5EA"/>
         </a:solidFill>
       </p:bgPr>
     </p:bg>
@@ -8712,7 +8739,7 @@
             <a:r>
               <a:rPr lang="en-US" sz="2800" b="1" dirty="0">
                 <a:solidFill>
-                  <a:srgbClr val="E0E0E0"/>
+                  <a:srgbClr val="D8E8C8"/>
                 </a:solidFill>
                 <a:latin typeface="Arial Black" pitchFamily="34" charset="0"/>
                 <a:ea typeface="Arial Black" pitchFamily="34" charset="-122"/>
@@ -8758,7 +8785,7 @@
             <a:r>
               <a:rPr lang="en-US" sz="2800" b="1" dirty="0">
                 <a:solidFill>
-                  <a:srgbClr val="0A0A0A"/>
+                  <a:srgbClr val="2C5F2D"/>
                 </a:solidFill>
                 <a:latin typeface="Arial Black" pitchFamily="34" charset="0"/>
                 <a:ea typeface="Arial Black" pitchFamily="34" charset="-122"/>
@@ -8785,11 +8812,11 @@
             <a:avLst/>
           </a:prstGeom>
           <a:solidFill>
-            <a:srgbClr val="0A0A0A"/>
+            <a:srgbClr val="2C5F2D"/>
           </a:solidFill>
           <a:ln w="12700">
             <a:solidFill>
-              <a:srgbClr val="0A0A0A"/>
+              <a:srgbClr val="2C5F2D"/>
             </a:solidFill>
             <a:prstDash val="solid"/>
           </a:ln>
@@ -8810,11 +8837,11 @@
             <a:avLst/>
           </a:prstGeom>
           <a:solidFill>
-            <a:srgbClr val="E0E0E0"/>
+            <a:srgbClr val="D8E8C8"/>
           </a:solidFill>
           <a:ln w="12700">
             <a:solidFill>
-              <a:srgbClr val="E0E0E0"/>
+              <a:srgbClr val="D8E8C8"/>
             </a:solidFill>
             <a:prstDash val="solid"/>
           </a:ln>
@@ -8837,11 +8864,11 @@
             </a:avLst>
           </a:prstGeom>
           <a:solidFill>
-            <a:srgbClr val="FFFFFF"/>
+            <a:srgbClr val="F0F5EA"/>
           </a:solidFill>
           <a:ln w="19050">
             <a:solidFill>
-              <a:srgbClr val="0A0A0A"/>
+              <a:srgbClr val="2C5F2D"/>
             </a:solidFill>
             <a:prstDash val="solid"/>
           </a:ln>
@@ -8862,7 +8889,7 @@
             <a:avLst/>
           </a:prstGeom>
           <a:solidFill>
-            <a:srgbClr val="0A0A0A"/>
+            <a:srgbClr val="1F3D26"/>
           </a:solidFill>
           <a:ln/>
         </p:spPr>
@@ -8894,7 +8921,7 @@
             <a:r>
               <a:rPr lang="en-US" sz="1800" b="1" dirty="0">
                 <a:solidFill>
-                  <a:srgbClr val="FFFFFF"/>
+                  <a:srgbClr val="F0F5EA"/>
                 </a:solidFill>
                 <a:latin typeface="Arial" pitchFamily="34" charset="0"/>
                 <a:ea typeface="Arial" pitchFamily="34" charset="-122"/>
@@ -8933,7 +8960,7 @@
             <a:r>
               <a:rPr lang="en-US" sz="1400" b="1" dirty="0">
                 <a:solidFill>
-                  <a:srgbClr val="0A0A0A"/>
+                  <a:srgbClr val="2C5F2D"/>
                 </a:solidFill>
                 <a:latin typeface="Arial Black" pitchFamily="34" charset="0"/>
                 <a:ea typeface="Arial Black" pitchFamily="34" charset="-122"/>
@@ -8972,7 +8999,7 @@
             <a:r>
               <a:rPr lang="en-US" sz="1050" dirty="0">
                 <a:solidFill>
-                  <a:srgbClr val="0A0A0A"/>
+                  <a:srgbClr val="2C5F2D"/>
                 </a:solidFill>
                 <a:latin typeface="Arial" pitchFamily="34" charset="0"/>
                 <a:ea typeface="Arial" pitchFamily="34" charset="-122"/>
@@ -9011,7 +9038,7 @@
             <a:r>
               <a:rPr lang="en-US" sz="950" i="1" dirty="0">
                 <a:solidFill>
-                  <a:srgbClr val="6E6E6E"/>
+                  <a:srgbClr val="5A6B5A"/>
                 </a:solidFill>
                 <a:latin typeface="Arial" pitchFamily="34" charset="0"/>
                 <a:ea typeface="Arial" pitchFamily="34" charset="-122"/>
@@ -9050,7 +9077,7 @@
             <a:r>
               <a:rPr lang="en-US" sz="2000" b="1" dirty="0">
                 <a:solidFill>
-                  <a:srgbClr val="B0B0B0"/>
+                  <a:srgbClr val="8FAE8B"/>
                 </a:solidFill>
                 <a:latin typeface="Arial" pitchFamily="34" charset="0"/>
                 <a:ea typeface="Arial" pitchFamily="34" charset="-122"/>
@@ -9077,11 +9104,11 @@
             <a:avLst/>
           </a:prstGeom>
           <a:solidFill>
-            <a:srgbClr val="E0E0E0"/>
+            <a:srgbClr val="D8E8C8"/>
           </a:solidFill>
           <a:ln w="12700">
             <a:solidFill>
-              <a:srgbClr val="E0E0E0"/>
+              <a:srgbClr val="D8E8C8"/>
             </a:solidFill>
             <a:prstDash val="solid"/>
           </a:ln>
@@ -9104,11 +9131,11 @@
             </a:avLst>
           </a:prstGeom>
           <a:solidFill>
-            <a:srgbClr val="FFFFFF"/>
+            <a:srgbClr val="F0F5EA"/>
           </a:solidFill>
           <a:ln w="19050">
             <a:solidFill>
-              <a:srgbClr val="0A0A0A"/>
+              <a:srgbClr val="2C5F2D"/>
             </a:solidFill>
             <a:prstDash val="solid"/>
           </a:ln>
@@ -9129,7 +9156,7 @@
             <a:avLst/>
           </a:prstGeom>
           <a:solidFill>
-            <a:srgbClr val="0A0A0A"/>
+            <a:srgbClr val="1F3D26"/>
           </a:solidFill>
           <a:ln/>
         </p:spPr>
@@ -9161,7 +9188,7 @@
             <a:r>
               <a:rPr lang="en-US" sz="1800" b="1" dirty="0">
                 <a:solidFill>
-                  <a:srgbClr val="FFFFFF"/>
+                  <a:srgbClr val="F0F5EA"/>
                 </a:solidFill>
                 <a:latin typeface="Arial" pitchFamily="34" charset="0"/>
                 <a:ea typeface="Arial" pitchFamily="34" charset="-122"/>
@@ -9200,7 +9227,7 @@
             <a:r>
               <a:rPr lang="en-US" sz="1400" b="1" dirty="0">
                 <a:solidFill>
-                  <a:srgbClr val="0A0A0A"/>
+                  <a:srgbClr val="2C5F2D"/>
                 </a:solidFill>
                 <a:latin typeface="Arial Black" pitchFamily="34" charset="0"/>
                 <a:ea typeface="Arial Black" pitchFamily="34" charset="-122"/>
@@ -9239,7 +9266,7 @@
             <a:r>
               <a:rPr lang="en-US" sz="1050" dirty="0">
                 <a:solidFill>
-                  <a:srgbClr val="0A0A0A"/>
+                  <a:srgbClr val="2C5F2D"/>
                 </a:solidFill>
                 <a:latin typeface="Arial" pitchFamily="34" charset="0"/>
                 <a:ea typeface="Arial" pitchFamily="34" charset="-122"/>
@@ -9278,7 +9305,7 @@
             <a:r>
               <a:rPr lang="en-US" sz="950" i="1" dirty="0">
                 <a:solidFill>
-                  <a:srgbClr val="6E6E6E"/>
+                  <a:srgbClr val="5A6B5A"/>
                 </a:solidFill>
                 <a:latin typeface="Arial" pitchFamily="34" charset="0"/>
                 <a:ea typeface="Arial" pitchFamily="34" charset="-122"/>
@@ -9317,7 +9344,7 @@
             <a:r>
               <a:rPr lang="en-US" sz="2000" b="1" dirty="0">
                 <a:solidFill>
-                  <a:srgbClr val="B0B0B0"/>
+                  <a:srgbClr val="8FAE8B"/>
                 </a:solidFill>
                 <a:latin typeface="Arial" pitchFamily="34" charset="0"/>
                 <a:ea typeface="Arial" pitchFamily="34" charset="-122"/>
@@ -9344,11 +9371,11 @@
             <a:avLst/>
           </a:prstGeom>
           <a:solidFill>
-            <a:srgbClr val="E0E0E0"/>
+            <a:srgbClr val="D8E8C8"/>
           </a:solidFill>
           <a:ln w="12700">
             <a:solidFill>
-              <a:srgbClr val="E0E0E0"/>
+              <a:srgbClr val="D8E8C8"/>
             </a:solidFill>
             <a:prstDash val="solid"/>
           </a:ln>
@@ -9371,11 +9398,11 @@
             </a:avLst>
           </a:prstGeom>
           <a:solidFill>
-            <a:srgbClr val="FFFFFF"/>
+            <a:srgbClr val="F0F5EA"/>
           </a:solidFill>
           <a:ln w="19050">
             <a:solidFill>
-              <a:srgbClr val="0A0A0A"/>
+              <a:srgbClr val="2C5F2D"/>
             </a:solidFill>
             <a:prstDash val="solid"/>
           </a:ln>
@@ -9396,7 +9423,7 @@
             <a:avLst/>
           </a:prstGeom>
           <a:solidFill>
-            <a:srgbClr val="0A0A0A"/>
+            <a:srgbClr val="1F3D26"/>
           </a:solidFill>
           <a:ln/>
         </p:spPr>
@@ -9428,7 +9455,7 @@
             <a:r>
               <a:rPr lang="en-US" sz="1800" b="1" dirty="0">
                 <a:solidFill>
-                  <a:srgbClr val="FFFFFF"/>
+                  <a:srgbClr val="F0F5EA"/>
                 </a:solidFill>
                 <a:latin typeface="Arial" pitchFamily="34" charset="0"/>
                 <a:ea typeface="Arial" pitchFamily="34" charset="-122"/>
@@ -9467,7 +9494,7 @@
             <a:r>
               <a:rPr lang="en-US" sz="1400" b="1" dirty="0">
                 <a:solidFill>
-                  <a:srgbClr val="0A0A0A"/>
+                  <a:srgbClr val="2C5F2D"/>
                 </a:solidFill>
                 <a:latin typeface="Arial Black" pitchFamily="34" charset="0"/>
                 <a:ea typeface="Arial Black" pitchFamily="34" charset="-122"/>
@@ -9506,7 +9533,7 @@
             <a:r>
               <a:rPr lang="en-US" sz="1050" dirty="0">
                 <a:solidFill>
-                  <a:srgbClr val="0A0A0A"/>
+                  <a:srgbClr val="2C5F2D"/>
                 </a:solidFill>
                 <a:latin typeface="Arial" pitchFamily="34" charset="0"/>
                 <a:ea typeface="Arial" pitchFamily="34" charset="-122"/>
@@ -9545,7 +9572,7 @@
             <a:r>
               <a:rPr lang="en-US" sz="950" i="1" dirty="0">
                 <a:solidFill>
-                  <a:srgbClr val="6E6E6E"/>
+                  <a:srgbClr val="5A6B5A"/>
                 </a:solidFill>
                 <a:latin typeface="Arial" pitchFamily="34" charset="0"/>
                 <a:ea typeface="Arial" pitchFamily="34" charset="-122"/>
@@ -9584,7 +9611,7 @@
             <a:r>
               <a:rPr lang="en-US" sz="2000" b="1" dirty="0">
                 <a:solidFill>
-                  <a:srgbClr val="B0B0B0"/>
+                  <a:srgbClr val="8FAE8B"/>
                 </a:solidFill>
                 <a:latin typeface="Arial" pitchFamily="34" charset="0"/>
                 <a:ea typeface="Arial" pitchFamily="34" charset="-122"/>
@@ -9611,11 +9638,11 @@
             <a:avLst/>
           </a:prstGeom>
           <a:solidFill>
-            <a:srgbClr val="E0E0E0"/>
+            <a:srgbClr val="D8E8C8"/>
           </a:solidFill>
           <a:ln w="12700">
             <a:solidFill>
-              <a:srgbClr val="E0E0E0"/>
+              <a:srgbClr val="D8E8C8"/>
             </a:solidFill>
             <a:prstDash val="solid"/>
           </a:ln>
@@ -9638,11 +9665,11 @@
             </a:avLst>
           </a:prstGeom>
           <a:solidFill>
-            <a:srgbClr val="FFFFFF"/>
+            <a:srgbClr val="F0F5EA"/>
           </a:solidFill>
           <a:ln w="19050">
             <a:solidFill>
-              <a:srgbClr val="0A0A0A"/>
+              <a:srgbClr val="2C5F2D"/>
             </a:solidFill>
             <a:prstDash val="solid"/>
           </a:ln>
@@ -9663,7 +9690,7 @@
             <a:avLst/>
           </a:prstGeom>
           <a:solidFill>
-            <a:srgbClr val="0A0A0A"/>
+            <a:srgbClr val="1F3D26"/>
           </a:solidFill>
           <a:ln/>
         </p:spPr>
@@ -9695,7 +9722,7 @@
             <a:r>
               <a:rPr lang="en-US" sz="1800" b="1" dirty="0">
                 <a:solidFill>
-                  <a:srgbClr val="FFFFFF"/>
+                  <a:srgbClr val="F0F5EA"/>
                 </a:solidFill>
                 <a:latin typeface="Arial" pitchFamily="34" charset="0"/>
                 <a:ea typeface="Arial" pitchFamily="34" charset="-122"/>
@@ -9734,7 +9761,7 @@
             <a:r>
               <a:rPr lang="en-US" sz="1400" b="1" dirty="0">
                 <a:solidFill>
-                  <a:srgbClr val="0A0A0A"/>
+                  <a:srgbClr val="2C5F2D"/>
                 </a:solidFill>
                 <a:latin typeface="Arial Black" pitchFamily="34" charset="0"/>
                 <a:ea typeface="Arial Black" pitchFamily="34" charset="-122"/>
@@ -9773,7 +9800,7 @@
             <a:r>
               <a:rPr lang="en-US" sz="1050" dirty="0">
                 <a:solidFill>
-                  <a:srgbClr val="0A0A0A"/>
+                  <a:srgbClr val="2C5F2D"/>
                 </a:solidFill>
                 <a:latin typeface="Arial" pitchFamily="34" charset="0"/>
                 <a:ea typeface="Arial" pitchFamily="34" charset="-122"/>
@@ -9812,7 +9839,7 @@
             <a:r>
               <a:rPr lang="en-US" sz="950" i="1" dirty="0">
                 <a:solidFill>
-                  <a:srgbClr val="6E6E6E"/>
+                  <a:srgbClr val="5A6B5A"/>
                 </a:solidFill>
                 <a:latin typeface="Arial" pitchFamily="34" charset="0"/>
                 <a:ea typeface="Arial" pitchFamily="34" charset="-122"/>
@@ -9851,7 +9878,7 @@
             <a:r>
               <a:rPr lang="en-US" sz="1350" b="1" dirty="0">
                 <a:solidFill>
-                  <a:srgbClr val="0A0A0A"/>
+                  <a:srgbClr val="2C5F2D"/>
                 </a:solidFill>
                 <a:latin typeface="Arial Black" pitchFamily="34" charset="0"/>
                 <a:ea typeface="Arial Black" pitchFamily="34" charset="-122"/>
@@ -9890,7 +9917,7 @@
             <a:r>
               <a:rPr lang="en-US" sz="850" dirty="0">
                 <a:solidFill>
-                  <a:srgbClr val="6E6E6E"/>
+                  <a:srgbClr val="5A6B5A"/>
                 </a:solidFill>
                 <a:latin typeface="Arial" pitchFamily="34" charset="0"/>
                 <a:ea typeface="Arial" pitchFamily="34" charset="-122"/>
@@ -9907,6 +9934,9 @@
   <p:clrMapOvr>
     <a:masterClrMapping/>
   </p:clrMapOvr>
+  <p:transition spd="med">
+    <p:fade/>
+  </p:transition>
 </p:sld>
 </file>
 
@@ -9916,7 +9946,7 @@
     <p:bg>
       <p:bgPr>
         <a:solidFill>
-          <a:srgbClr val="FFFFFF"/>
+          <a:srgbClr val="F0F5EA"/>
         </a:solidFill>
       </p:bgPr>
     </p:bg>
@@ -9961,7 +9991,7 @@
             <a:r>
               <a:rPr lang="en-US" sz="2800" b="1" dirty="0">
                 <a:solidFill>
-                  <a:srgbClr val="E0E0E0"/>
+                  <a:srgbClr val="D8E8C8"/>
                 </a:solidFill>
                 <a:latin typeface="Arial Black" pitchFamily="34" charset="0"/>
                 <a:ea typeface="Arial Black" pitchFamily="34" charset="-122"/>
@@ -10007,7 +10037,7 @@
             <a:r>
               <a:rPr lang="en-US" sz="2800" b="1" dirty="0">
                 <a:solidFill>
-                  <a:srgbClr val="0A0A0A"/>
+                  <a:srgbClr val="2C5F2D"/>
                 </a:solidFill>
                 <a:latin typeface="Arial Black" pitchFamily="34" charset="0"/>
                 <a:ea typeface="Arial Black" pitchFamily="34" charset="-122"/>
@@ -10034,11 +10064,11 @@
             <a:avLst/>
           </a:prstGeom>
           <a:solidFill>
-            <a:srgbClr val="0A0A0A"/>
+            <a:srgbClr val="2C5F2D"/>
           </a:solidFill>
           <a:ln w="12700">
             <a:solidFill>
-              <a:srgbClr val="0A0A0A"/>
+              <a:srgbClr val="2C5F2D"/>
             </a:solidFill>
             <a:prstDash val="solid"/>
           </a:ln>
@@ -10059,11 +10089,11 @@
             <a:avLst/>
           </a:prstGeom>
           <a:solidFill>
-            <a:srgbClr val="E0E0E0"/>
+            <a:srgbClr val="D8E8C8"/>
           </a:solidFill>
           <a:ln w="12700">
             <a:solidFill>
-              <a:srgbClr val="E0E0E0"/>
+              <a:srgbClr val="D8E8C8"/>
             </a:solidFill>
             <a:prstDash val="solid"/>
           </a:ln>
@@ -10084,11 +10114,11 @@
             <a:avLst/>
           </a:prstGeom>
           <a:solidFill>
-            <a:srgbClr val="555555"/>
+            <a:srgbClr val="3E5C42"/>
           </a:solidFill>
           <a:ln w="12700">
             <a:solidFill>
-              <a:srgbClr val="555555"/>
+              <a:srgbClr val="3E5C42"/>
             </a:solidFill>
             <a:prstDash val="solid"/>
           </a:ln>
@@ -10111,7 +10141,7 @@
             </a:avLst>
           </a:prstGeom>
           <a:solidFill>
-            <a:srgbClr val="0A0A0A"/>
+            <a:srgbClr val="1F3D26"/>
           </a:solidFill>
           <a:ln w="12700">
             <a:solidFill>
@@ -10148,7 +10178,7 @@
             <a:r>
               <a:rPr lang="en-US" sz="1800" b="1" dirty="0">
                 <a:solidFill>
-                  <a:srgbClr val="FFFFFF"/>
+                  <a:srgbClr val="F0F5EA"/>
                 </a:solidFill>
                 <a:latin typeface="Arial Black" pitchFamily="34" charset="0"/>
                 <a:ea typeface="Arial Black" pitchFamily="34" charset="-122"/>
@@ -10187,7 +10217,7 @@
             <a:r>
               <a:rPr lang="en-US" sz="900" dirty="0">
                 <a:solidFill>
-                  <a:srgbClr val="B0B0B0"/>
+                  <a:srgbClr val="8FAE8B"/>
                 </a:solidFill>
                 <a:latin typeface="Arial" pitchFamily="34" charset="0"/>
                 <a:ea typeface="Arial" pitchFamily="34" charset="-122"/>
@@ -10214,11 +10244,11 @@
             <a:avLst/>
           </a:prstGeom>
           <a:solidFill>
-            <a:srgbClr val="E0E0E0"/>
+            <a:srgbClr val="D8E8C8"/>
           </a:solidFill>
           <a:ln w="12700">
             <a:solidFill>
-              <a:srgbClr val="E0E0E0"/>
+              <a:srgbClr val="D8E8C8"/>
             </a:solidFill>
             <a:prstDash val="solid"/>
           </a:ln>
@@ -10239,11 +10269,11 @@
             <a:avLst/>
           </a:prstGeom>
           <a:solidFill>
-            <a:srgbClr val="555555"/>
+            <a:srgbClr val="3E5C42"/>
           </a:solidFill>
           <a:ln w="12700">
             <a:solidFill>
-              <a:srgbClr val="555555"/>
+              <a:srgbClr val="3E5C42"/>
             </a:solidFill>
             <a:prstDash val="solid"/>
           </a:ln>
@@ -10266,7 +10296,7 @@
             </a:avLst>
           </a:prstGeom>
           <a:solidFill>
-            <a:srgbClr val="0A0A0A"/>
+            <a:srgbClr val="1F3D26"/>
           </a:solidFill>
           <a:ln w="12700">
             <a:solidFill>
@@ -10303,7 +10333,7 @@
             <a:r>
               <a:rPr lang="en-US" sz="1800" b="1" dirty="0">
                 <a:solidFill>
-                  <a:srgbClr val="FFFFFF"/>
+                  <a:srgbClr val="F0F5EA"/>
                 </a:solidFill>
                 <a:latin typeface="Arial Black" pitchFamily="34" charset="0"/>
                 <a:ea typeface="Arial Black" pitchFamily="34" charset="-122"/>
@@ -10342,7 +10372,7 @@
             <a:r>
               <a:rPr lang="en-US" sz="900" dirty="0">
                 <a:solidFill>
-                  <a:srgbClr val="B0B0B0"/>
+                  <a:srgbClr val="8FAE8B"/>
                 </a:solidFill>
                 <a:latin typeface="Arial" pitchFamily="34" charset="0"/>
                 <a:ea typeface="Arial" pitchFamily="34" charset="-122"/>
@@ -10369,11 +10399,11 @@
             <a:avLst/>
           </a:prstGeom>
           <a:solidFill>
-            <a:srgbClr val="E0E0E0"/>
+            <a:srgbClr val="D8E8C8"/>
           </a:solidFill>
           <a:ln w="12700">
             <a:solidFill>
-              <a:srgbClr val="E0E0E0"/>
+              <a:srgbClr val="D8E8C8"/>
             </a:solidFill>
             <a:prstDash val="solid"/>
           </a:ln>
@@ -10394,11 +10424,11 @@
             <a:avLst/>
           </a:prstGeom>
           <a:solidFill>
-            <a:srgbClr val="555555"/>
+            <a:srgbClr val="3E5C42"/>
           </a:solidFill>
           <a:ln w="12700">
             <a:solidFill>
-              <a:srgbClr val="555555"/>
+              <a:srgbClr val="3E5C42"/>
             </a:solidFill>
             <a:prstDash val="solid"/>
           </a:ln>
@@ -10421,7 +10451,7 @@
             </a:avLst>
           </a:prstGeom>
           <a:solidFill>
-            <a:srgbClr val="0A0A0A"/>
+            <a:srgbClr val="1F3D26"/>
           </a:solidFill>
           <a:ln w="12700">
             <a:solidFill>
@@ -10458,7 +10488,7 @@
             <a:r>
               <a:rPr lang="en-US" sz="1800" b="1" dirty="0">
                 <a:solidFill>
-                  <a:srgbClr val="FFFFFF"/>
+                  <a:srgbClr val="F0F5EA"/>
                 </a:solidFill>
                 <a:latin typeface="Arial Black" pitchFamily="34" charset="0"/>
                 <a:ea typeface="Arial Black" pitchFamily="34" charset="-122"/>
@@ -10497,7 +10527,7 @@
             <a:r>
               <a:rPr lang="en-US" sz="900" dirty="0">
                 <a:solidFill>
-                  <a:srgbClr val="B0B0B0"/>
+                  <a:srgbClr val="8FAE8B"/>
                 </a:solidFill>
                 <a:latin typeface="Arial" pitchFamily="34" charset="0"/>
                 <a:ea typeface="Arial" pitchFamily="34" charset="-122"/>
@@ -10524,11 +10554,11 @@
             <a:avLst/>
           </a:prstGeom>
           <a:solidFill>
-            <a:srgbClr val="E0E0E0"/>
+            <a:srgbClr val="D8E8C8"/>
           </a:solidFill>
           <a:ln w="12700">
             <a:solidFill>
-              <a:srgbClr val="E0E0E0"/>
+              <a:srgbClr val="D8E8C8"/>
             </a:solidFill>
             <a:prstDash val="solid"/>
           </a:ln>
@@ -10549,11 +10579,11 @@
             <a:avLst/>
           </a:prstGeom>
           <a:solidFill>
-            <a:srgbClr val="555555"/>
+            <a:srgbClr val="3E5C42"/>
           </a:solidFill>
           <a:ln w="12700">
             <a:solidFill>
-              <a:srgbClr val="555555"/>
+              <a:srgbClr val="3E5C42"/>
             </a:solidFill>
             <a:prstDash val="solid"/>
           </a:ln>
@@ -10576,7 +10606,7 @@
             </a:avLst>
           </a:prstGeom>
           <a:solidFill>
-            <a:srgbClr val="0A0A0A"/>
+            <a:srgbClr val="1F3D26"/>
           </a:solidFill>
           <a:ln w="12700">
             <a:solidFill>
@@ -10613,7 +10643,7 @@
             <a:r>
               <a:rPr lang="en-US" sz="1800" b="1" dirty="0">
                 <a:solidFill>
-                  <a:srgbClr val="FFFFFF"/>
+                  <a:srgbClr val="F0F5EA"/>
                 </a:solidFill>
                 <a:latin typeface="Arial Black" pitchFamily="34" charset="0"/>
                 <a:ea typeface="Arial Black" pitchFamily="34" charset="-122"/>
@@ -10652,7 +10682,7 @@
             <a:r>
               <a:rPr lang="en-US" sz="900" dirty="0">
                 <a:solidFill>
-                  <a:srgbClr val="B0B0B0"/>
+                  <a:srgbClr val="8FAE8B"/>
                 </a:solidFill>
                 <a:latin typeface="Arial" pitchFamily="34" charset="0"/>
                 <a:ea typeface="Arial" pitchFamily="34" charset="-122"/>
@@ -10679,11 +10709,11 @@
             <a:avLst/>
           </a:prstGeom>
           <a:solidFill>
-            <a:srgbClr val="E0E0E0"/>
+            <a:srgbClr val="D8E8C8"/>
           </a:solidFill>
           <a:ln w="12700">
             <a:solidFill>
-              <a:srgbClr val="E0E0E0"/>
+              <a:srgbClr val="D8E8C8"/>
             </a:solidFill>
             <a:prstDash val="solid"/>
           </a:ln>
@@ -10704,11 +10734,11 @@
             <a:avLst/>
           </a:prstGeom>
           <a:solidFill>
-            <a:srgbClr val="555555"/>
+            <a:srgbClr val="3E5C42"/>
           </a:solidFill>
           <a:ln w="12700">
             <a:solidFill>
-              <a:srgbClr val="555555"/>
+              <a:srgbClr val="3E5C42"/>
             </a:solidFill>
             <a:prstDash val="solid"/>
           </a:ln>
@@ -10731,7 +10761,7 @@
             </a:avLst>
           </a:prstGeom>
           <a:solidFill>
-            <a:srgbClr val="0A0A0A"/>
+            <a:srgbClr val="1F3D26"/>
           </a:solidFill>
           <a:ln w="12700">
             <a:solidFill>
@@ -10768,7 +10798,7 @@
             <a:r>
               <a:rPr lang="en-US" sz="1800" b="1" dirty="0">
                 <a:solidFill>
-                  <a:srgbClr val="FFFFFF"/>
+                  <a:srgbClr val="F0F5EA"/>
                 </a:solidFill>
                 <a:latin typeface="Arial Black" pitchFamily="34" charset="0"/>
                 <a:ea typeface="Arial Black" pitchFamily="34" charset="-122"/>
@@ -10807,7 +10837,7 @@
             <a:r>
               <a:rPr lang="en-US" sz="900" dirty="0">
                 <a:solidFill>
-                  <a:srgbClr val="B0B0B0"/>
+                  <a:srgbClr val="8FAE8B"/>
                 </a:solidFill>
                 <a:latin typeface="Arial" pitchFamily="34" charset="0"/>
                 <a:ea typeface="Arial" pitchFamily="34" charset="-122"/>
@@ -10834,11 +10864,11 @@
             <a:avLst/>
           </a:prstGeom>
           <a:solidFill>
-            <a:srgbClr val="E0E0E0"/>
+            <a:srgbClr val="D8E8C8"/>
           </a:solidFill>
           <a:ln w="12700">
             <a:solidFill>
-              <a:srgbClr val="E0E0E0"/>
+              <a:srgbClr val="D8E8C8"/>
             </a:solidFill>
             <a:prstDash val="solid"/>
           </a:ln>
@@ -10859,11 +10889,11 @@
             <a:avLst/>
           </a:prstGeom>
           <a:solidFill>
-            <a:srgbClr val="555555"/>
+            <a:srgbClr val="3E5C42"/>
           </a:solidFill>
           <a:ln w="12700">
             <a:solidFill>
-              <a:srgbClr val="555555"/>
+              <a:srgbClr val="3E5C42"/>
             </a:solidFill>
             <a:prstDash val="solid"/>
           </a:ln>
@@ -10886,7 +10916,7 @@
             </a:avLst>
           </a:prstGeom>
           <a:solidFill>
-            <a:srgbClr val="0A0A0A"/>
+            <a:srgbClr val="1F3D26"/>
           </a:solidFill>
           <a:ln w="12700">
             <a:solidFill>
@@ -10923,7 +10953,7 @@
             <a:r>
               <a:rPr lang="en-US" sz="1800" b="1" dirty="0">
                 <a:solidFill>
-                  <a:srgbClr val="FFFFFF"/>
+                  <a:srgbClr val="F0F5EA"/>
                 </a:solidFill>
                 <a:latin typeface="Arial Black" pitchFamily="34" charset="0"/>
                 <a:ea typeface="Arial Black" pitchFamily="34" charset="-122"/>
@@ -10962,7 +10992,7 @@
             <a:r>
               <a:rPr lang="en-US" sz="900" dirty="0">
                 <a:solidFill>
-                  <a:srgbClr val="B0B0B0"/>
+                  <a:srgbClr val="8FAE8B"/>
                 </a:solidFill>
                 <a:latin typeface="Arial" pitchFamily="34" charset="0"/>
                 <a:ea typeface="Arial" pitchFamily="34" charset="-122"/>
@@ -11001,7 +11031,7 @@
             <a:r>
               <a:rPr lang="en-US" sz="1150" dirty="0">
                 <a:solidFill>
-                  <a:srgbClr val="0A0A0A"/>
+                  <a:srgbClr val="2C5F2D"/>
                 </a:solidFill>
                 <a:latin typeface="Arial" pitchFamily="34" charset="0"/>
                 <a:ea typeface="Arial" pitchFamily="34" charset="-122"/>
@@ -11028,11 +11058,11 @@
             <a:avLst/>
           </a:prstGeom>
           <a:solidFill>
-            <a:srgbClr val="E0E0E0"/>
+            <a:srgbClr val="D8E8C8"/>
           </a:solidFill>
           <a:ln w="12700">
             <a:solidFill>
-              <a:srgbClr val="E0E0E0"/>
+              <a:srgbClr val="D8E8C8"/>
             </a:solidFill>
             <a:prstDash val="solid"/>
           </a:ln>
@@ -11055,7 +11085,7 @@
             </a:avLst>
           </a:prstGeom>
           <a:solidFill>
-            <a:srgbClr val="0A0A0A"/>
+            <a:srgbClr val="1F3D26"/>
           </a:solidFill>
           <a:ln w="12700">
             <a:solidFill>
@@ -11080,11 +11110,11 @@
             <a:avLst/>
           </a:prstGeom>
           <a:solidFill>
-            <a:srgbClr val="FF5A1F"/>
+            <a:srgbClr val="97BC62"/>
           </a:solidFill>
           <a:ln w="12700">
             <a:solidFill>
-              <a:srgbClr val="FF5A1F"/>
+              <a:srgbClr val="97BC62"/>
             </a:solidFill>
             <a:prstDash val="solid"/>
           </a:ln>
@@ -11117,7 +11147,7 @@
             <a:r>
               <a:rPr lang="en-US" sz="1050" dirty="0">
                 <a:solidFill>
-                  <a:srgbClr val="FFFFFF"/>
+                  <a:srgbClr val="F0F5EA"/>
                 </a:solidFill>
                 <a:latin typeface="Arial" pitchFamily="34" charset="0"/>
                 <a:ea typeface="Arial" pitchFamily="34" charset="-122"/>
@@ -11156,7 +11186,7 @@
             <a:r>
               <a:rPr lang="en-US" sz="850" dirty="0">
                 <a:solidFill>
-                  <a:srgbClr val="6E6E6E"/>
+                  <a:srgbClr val="5A6B5A"/>
                 </a:solidFill>
                 <a:latin typeface="Arial" pitchFamily="34" charset="0"/>
                 <a:ea typeface="Arial" pitchFamily="34" charset="-122"/>
@@ -11173,6 +11203,9 @@
   <p:clrMapOvr>
     <a:masterClrMapping/>
   </p:clrMapOvr>
+  <p:transition spd="med">
+    <p:fade/>
+  </p:transition>
 </p:sld>
 </file>
 
@@ -11182,7 +11215,7 @@
     <p:bg>
       <p:bgPr>
         <a:solidFill>
-          <a:srgbClr val="FFFFFF"/>
+          <a:srgbClr val="F0F5EA"/>
         </a:solidFill>
       </p:bgPr>
     </p:bg>
@@ -11227,7 +11260,7 @@
             <a:r>
               <a:rPr lang="en-US" sz="2800" b="1" dirty="0">
                 <a:solidFill>
-                  <a:srgbClr val="E0E0E0"/>
+                  <a:srgbClr val="D8E8C8"/>
                 </a:solidFill>
                 <a:latin typeface="Arial Black" pitchFamily="34" charset="0"/>
                 <a:ea typeface="Arial Black" pitchFamily="34" charset="-122"/>
@@ -11273,7 +11306,7 @@
             <a:r>
               <a:rPr lang="en-US" sz="2800" b="1" dirty="0">
                 <a:solidFill>
-                  <a:srgbClr val="0A0A0A"/>
+                  <a:srgbClr val="2C5F2D"/>
                 </a:solidFill>
                 <a:latin typeface="Arial Black" pitchFamily="34" charset="0"/>
                 <a:ea typeface="Arial Black" pitchFamily="34" charset="-122"/>
@@ -11300,11 +11333,11 @@
             <a:avLst/>
           </a:prstGeom>
           <a:solidFill>
-            <a:srgbClr val="0A0A0A"/>
+            <a:srgbClr val="2C5F2D"/>
           </a:solidFill>
           <a:ln w="12700">
             <a:solidFill>
-              <a:srgbClr val="0A0A0A"/>
+              <a:srgbClr val="2C5F2D"/>
             </a:solidFill>
             <a:prstDash val="solid"/>
           </a:ln>
@@ -11325,11 +11358,11 @@
             <a:avLst/>
           </a:prstGeom>
           <a:solidFill>
-            <a:srgbClr val="E0E0E0"/>
+            <a:srgbClr val="D8E8C8"/>
           </a:solidFill>
           <a:ln w="12700">
             <a:solidFill>
-              <a:srgbClr val="E0E0E0"/>
+              <a:srgbClr val="D8E8C8"/>
             </a:solidFill>
             <a:prstDash val="solid"/>
           </a:ln>
@@ -11352,7 +11385,7 @@
             </a:avLst>
           </a:prstGeom>
           <a:solidFill>
-            <a:srgbClr val="F2F2F2"/>
+            <a:srgbClr val="EAF2E4"/>
           </a:solidFill>
           <a:ln w="12700">
             <a:solidFill>
@@ -11389,7 +11422,7 @@
             <a:r>
               <a:rPr lang="en-US" sz="1200" b="1" dirty="0">
                 <a:solidFill>
-                  <a:srgbClr val="6E6E6E"/>
+                  <a:srgbClr val="5A6B5A"/>
                 </a:solidFill>
                 <a:latin typeface="Arial" pitchFamily="34" charset="0"/>
                 <a:ea typeface="Arial" pitchFamily="34" charset="-122"/>
@@ -11428,7 +11461,7 @@
             <a:r>
               <a:rPr lang="en-US" sz="1700" i="1" dirty="0">
                 <a:solidFill>
-                  <a:srgbClr val="FF5A1F"/>
+                  <a:srgbClr val="97BC62"/>
                 </a:solidFill>
                 <a:latin typeface="Arial Black" pitchFamily="34" charset="0"/>
                 <a:ea typeface="Arial Black" pitchFamily="34" charset="-122"/>
@@ -11467,7 +11500,7 @@
             <a:r>
               <a:rPr lang="en-US" sz="1100" dirty="0">
                 <a:solidFill>
-                  <a:srgbClr val="6E6E6E"/>
+                  <a:srgbClr val="5A6B5A"/>
                 </a:solidFill>
                 <a:latin typeface="Arial" pitchFamily="34" charset="0"/>
                 <a:ea typeface="Arial" pitchFamily="34" charset="-122"/>
@@ -11494,11 +11527,11 @@
             <a:avLst/>
           </a:prstGeom>
           <a:solidFill>
-            <a:srgbClr val="E0E0E0"/>
+            <a:srgbClr val="D8E8C8"/>
           </a:solidFill>
           <a:ln w="12700">
             <a:solidFill>
-              <a:srgbClr val="E0E0E0"/>
+              <a:srgbClr val="D8E8C8"/>
             </a:solidFill>
             <a:prstDash val="solid"/>
           </a:ln>
@@ -11521,7 +11554,7 @@
             </a:avLst>
           </a:prstGeom>
           <a:solidFill>
-            <a:srgbClr val="0A0A0A"/>
+            <a:srgbClr val="1F3D26"/>
           </a:solidFill>
           <a:ln w="12700">
             <a:solidFill>
@@ -11558,7 +11591,7 @@
             <a:r>
               <a:rPr lang="en-US" sz="1200" b="1" dirty="0">
                 <a:solidFill>
-                  <a:srgbClr val="FFFFFF"/>
+                  <a:srgbClr val="F0F5EA"/>
                 </a:solidFill>
                 <a:latin typeface="Arial Black" pitchFamily="34" charset="0"/>
                 <a:ea typeface="Arial Black" pitchFamily="34" charset="-122"/>
@@ -11597,7 +11630,7 @@
             <a:r>
               <a:rPr lang="en-US" sz="1350" dirty="0">
                 <a:solidFill>
-                  <a:srgbClr val="FFFFFF"/>
+                  <a:srgbClr val="F0F5EA"/>
                 </a:solidFill>
                 <a:latin typeface="Arial" pitchFamily="34" charset="0"/>
                 <a:ea typeface="Arial" pitchFamily="34" charset="-122"/>
@@ -11648,7 +11681,7 @@
                       <a:r>
                         <a:rPr lang="en-US" sz="1200" b="1" dirty="0">
                           <a:solidFill>
-                            <a:srgbClr val="FFFFFF"/>
+                            <a:srgbClr val="F0F5EA"/>
                           </a:solidFill>
                           <a:latin typeface="Arial Black" pitchFamily="34" charset="0"/>
                           <a:ea typeface="Arial Black" pitchFamily="34" charset="-122"/>
@@ -11666,7 +11699,7 @@
                   <a:tcPr marL="54864" marR="54864" marT="54864" marB="54864" anchor="mid">
                     <a:lnL w="6350" cap="flat" cmpd="sng" algn="ctr">
                       <a:solidFill>
-                        <a:srgbClr val="D9D9D9"/>
+                        <a:srgbClr val="C8D9C0"/>
                       </a:solidFill>
                       <a:prstDash val="solid"/>
                       <a:round/>
@@ -11675,7 +11708,7 @@
                     </a:lnL>
                     <a:lnR w="6350" cap="flat" cmpd="sng" algn="ctr">
                       <a:solidFill>
-                        <a:srgbClr val="D9D9D9"/>
+                        <a:srgbClr val="C8D9C0"/>
                       </a:solidFill>
                       <a:prstDash val="solid"/>
                       <a:round/>
@@ -11684,7 +11717,7 @@
                     </a:lnR>
                     <a:lnT w="6350" cap="flat" cmpd="sng" algn="ctr">
                       <a:solidFill>
-                        <a:srgbClr val="D9D9D9"/>
+                        <a:srgbClr val="C8D9C0"/>
                       </a:solidFill>
                       <a:prstDash val="solid"/>
                       <a:round/>
@@ -11693,7 +11726,7 @@
                     </a:lnT>
                     <a:lnB w="6350" cap="flat" cmpd="sng" algn="ctr">
                       <a:solidFill>
-                        <a:srgbClr val="D9D9D9"/>
+                        <a:srgbClr val="C8D9C0"/>
                       </a:solidFill>
                       <a:prstDash val="solid"/>
                       <a:round/>
@@ -11701,7 +11734,7 @@
                       <a:tailEnd type="none" w="med" len="med"/>
                     </a:lnB>
                     <a:solidFill>
-                      <a:srgbClr val="0A0A0A"/>
+                      <a:srgbClr val="1F3D26"/>
                     </a:solidFill>
                   </a:tcPr>
                 </a:tc>
@@ -11724,7 +11757,7 @@
                       <a:r>
                         <a:rPr lang="en-US" sz="1050" b="1" dirty="0">
                           <a:solidFill>
-                            <a:srgbClr val="0A0A0A"/>
+                            <a:srgbClr val="2C5F2D"/>
                           </a:solidFill>
                           <a:latin typeface="Arial" pitchFamily="34" charset="0"/>
                           <a:ea typeface="Arial" pitchFamily="34" charset="-122"/>
@@ -11742,7 +11775,7 @@
                   <a:tcPr marL="54864" marR="54864" marT="54864" marB="54864" anchor="mid">
                     <a:lnL w="6350" cap="flat" cmpd="sng" algn="ctr">
                       <a:solidFill>
-                        <a:srgbClr val="D9D9D9"/>
+                        <a:srgbClr val="C8D9C0"/>
                       </a:solidFill>
                       <a:prstDash val="solid"/>
                       <a:round/>
@@ -11751,7 +11784,7 @@
                     </a:lnL>
                     <a:lnR w="6350" cap="flat" cmpd="sng" algn="ctr">
                       <a:solidFill>
-                        <a:srgbClr val="D9D9D9"/>
+                        <a:srgbClr val="C8D9C0"/>
                       </a:solidFill>
                       <a:prstDash val="solid"/>
                       <a:round/>
@@ -11760,7 +11793,7 @@
                     </a:lnR>
                     <a:lnT w="6350" cap="flat" cmpd="sng" algn="ctr">
                       <a:solidFill>
-                        <a:srgbClr val="D9D9D9"/>
+                        <a:srgbClr val="C8D9C0"/>
                       </a:solidFill>
                       <a:prstDash val="solid"/>
                       <a:round/>
@@ -11769,7 +11802,7 @@
                     </a:lnT>
                     <a:lnB w="6350" cap="flat" cmpd="sng" algn="ctr">
                       <a:solidFill>
-                        <a:srgbClr val="D9D9D9"/>
+                        <a:srgbClr val="C8D9C0"/>
                       </a:solidFill>
                       <a:prstDash val="solid"/>
                       <a:round/>
@@ -11777,7 +11810,7 @@
                       <a:tailEnd type="none" w="med" len="med"/>
                     </a:lnB>
                     <a:solidFill>
-                      <a:srgbClr val="F7F7F7"/>
+                      <a:srgbClr val="F4F9EF"/>
                     </a:solidFill>
                   </a:tcPr>
                 </a:tc>
@@ -11792,7 +11825,7 @@
                       <a:r>
                         <a:rPr lang="en-US" sz="1050" dirty="0">
                           <a:solidFill>
-                            <a:srgbClr val="6E6E6E"/>
+                            <a:srgbClr val="5A6B5A"/>
                           </a:solidFill>
                           <a:latin typeface="Arial" pitchFamily="34" charset="0"/>
                           <a:ea typeface="Arial" pitchFamily="34" charset="-122"/>
@@ -11810,7 +11843,7 @@
                   <a:tcPr marL="54864" marR="54864" marT="54864" marB="54864" anchor="mid">
                     <a:lnL w="6350" cap="flat" cmpd="sng" algn="ctr">
                       <a:solidFill>
-                        <a:srgbClr val="D9D9D9"/>
+                        <a:srgbClr val="C8D9C0"/>
                       </a:solidFill>
                       <a:prstDash val="solid"/>
                       <a:round/>
@@ -11819,7 +11852,7 @@
                     </a:lnL>
                     <a:lnR w="6350" cap="flat" cmpd="sng" algn="ctr">
                       <a:solidFill>
-                        <a:srgbClr val="D9D9D9"/>
+                        <a:srgbClr val="C8D9C0"/>
                       </a:solidFill>
                       <a:prstDash val="solid"/>
                       <a:round/>
@@ -11828,7 +11861,7 @@
                     </a:lnR>
                     <a:lnT w="6350" cap="flat" cmpd="sng" algn="ctr">
                       <a:solidFill>
-                        <a:srgbClr val="D9D9D9"/>
+                        <a:srgbClr val="C8D9C0"/>
                       </a:solidFill>
                       <a:prstDash val="solid"/>
                       <a:round/>
@@ -11837,7 +11870,7 @@
                     </a:lnT>
                     <a:lnB w="6350" cap="flat" cmpd="sng" algn="ctr">
                       <a:solidFill>
-                        <a:srgbClr val="D9D9D9"/>
+                        <a:srgbClr val="C8D9C0"/>
                       </a:solidFill>
                       <a:prstDash val="solid"/>
                       <a:round/>
@@ -11845,7 +11878,7 @@
                       <a:tailEnd type="none" w="med" len="med"/>
                     </a:lnB>
                     <a:solidFill>
-                      <a:srgbClr val="F7F7F7"/>
+                      <a:srgbClr val="F4F9EF"/>
                     </a:solidFill>
                   </a:tcPr>
                 </a:tc>
@@ -11860,7 +11893,7 @@
                       <a:r>
                         <a:rPr lang="en-US" sz="1050" dirty="0">
                           <a:solidFill>
-                            <a:srgbClr val="B0B0B0"/>
+                            <a:srgbClr val="8FAE8B"/>
                           </a:solidFill>
                           <a:latin typeface="Arial" pitchFamily="34" charset="0"/>
                           <a:ea typeface="Arial" pitchFamily="34" charset="-122"/>
@@ -11878,7 +11911,7 @@
                   <a:tcPr marL="54864" marR="54864" marT="54864" marB="54864" anchor="mid">
                     <a:lnL w="6350" cap="flat" cmpd="sng" algn="ctr">
                       <a:solidFill>
-                        <a:srgbClr val="D9D9D9"/>
+                        <a:srgbClr val="C8D9C0"/>
                       </a:solidFill>
                       <a:prstDash val="solid"/>
                       <a:round/>
@@ -11887,7 +11920,7 @@
                     </a:lnL>
                     <a:lnR w="6350" cap="flat" cmpd="sng" algn="ctr">
                       <a:solidFill>
-                        <a:srgbClr val="D9D9D9"/>
+                        <a:srgbClr val="C8D9C0"/>
                       </a:solidFill>
                       <a:prstDash val="solid"/>
                       <a:round/>
@@ -11896,7 +11929,7 @@
                     </a:lnR>
                     <a:lnT w="6350" cap="flat" cmpd="sng" algn="ctr">
                       <a:solidFill>
-                        <a:srgbClr val="D9D9D9"/>
+                        <a:srgbClr val="C8D9C0"/>
                       </a:solidFill>
                       <a:prstDash val="solid"/>
                       <a:round/>
@@ -11905,7 +11938,7 @@
                     </a:lnT>
                     <a:lnB w="6350" cap="flat" cmpd="sng" algn="ctr">
                       <a:solidFill>
-                        <a:srgbClr val="D9D9D9"/>
+                        <a:srgbClr val="C8D9C0"/>
                       </a:solidFill>
                       <a:prstDash val="solid"/>
                       <a:round/>
@@ -11913,7 +11946,7 @@
                       <a:tailEnd type="none" w="med" len="med"/>
                     </a:lnB>
                     <a:solidFill>
-                      <a:srgbClr val="F7F7F7"/>
+                      <a:srgbClr val="F4F9EF"/>
                     </a:solidFill>
                   </a:tcPr>
                 </a:tc>
@@ -11930,7 +11963,7 @@
                       <a:r>
                         <a:rPr lang="en-US" sz="1050" b="1" dirty="0">
                           <a:solidFill>
-                            <a:srgbClr val="0A0A0A"/>
+                            <a:srgbClr val="2C5F2D"/>
                           </a:solidFill>
                           <a:latin typeface="Arial" pitchFamily="34" charset="0"/>
                           <a:ea typeface="Arial" pitchFamily="34" charset="-122"/>
@@ -11948,7 +11981,7 @@
                   <a:tcPr marL="54864" marR="54864" marT="54864" marB="54864" anchor="mid">
                     <a:lnL w="6350" cap="flat" cmpd="sng" algn="ctr">
                       <a:solidFill>
-                        <a:srgbClr val="D9D9D9"/>
+                        <a:srgbClr val="C8D9C0"/>
                       </a:solidFill>
                       <a:prstDash val="solid"/>
                       <a:round/>
@@ -11957,7 +11990,7 @@
                     </a:lnL>
                     <a:lnR w="6350" cap="flat" cmpd="sng" algn="ctr">
                       <a:solidFill>
-                        <a:srgbClr val="D9D9D9"/>
+                        <a:srgbClr val="C8D9C0"/>
                       </a:solidFill>
                       <a:prstDash val="solid"/>
                       <a:round/>
@@ -11966,7 +11999,7 @@
                     </a:lnR>
                     <a:lnT w="6350" cap="flat" cmpd="sng" algn="ctr">
                       <a:solidFill>
-                        <a:srgbClr val="D9D9D9"/>
+                        <a:srgbClr val="C8D9C0"/>
                       </a:solidFill>
                       <a:prstDash val="solid"/>
                       <a:round/>
@@ -11975,7 +12008,7 @@
                     </a:lnT>
                     <a:lnB w="6350" cap="flat" cmpd="sng" algn="ctr">
                       <a:solidFill>
-                        <a:srgbClr val="D9D9D9"/>
+                        <a:srgbClr val="C8D9C0"/>
                       </a:solidFill>
                       <a:prstDash val="solid"/>
                       <a:round/>
@@ -11983,7 +12016,7 @@
                       <a:tailEnd type="none" w="med" len="med"/>
                     </a:lnB>
                     <a:solidFill>
-                      <a:srgbClr val="FFFFFF"/>
+                      <a:srgbClr val="F0F5EA"/>
                     </a:solidFill>
                   </a:tcPr>
                 </a:tc>
@@ -11998,7 +12031,7 @@
                       <a:r>
                         <a:rPr lang="en-US" sz="1050" dirty="0">
                           <a:solidFill>
-                            <a:srgbClr val="6E6E6E"/>
+                            <a:srgbClr val="5A6B5A"/>
                           </a:solidFill>
                           <a:latin typeface="Arial" pitchFamily="34" charset="0"/>
                           <a:ea typeface="Arial" pitchFamily="34" charset="-122"/>
@@ -12016,7 +12049,7 @@
                   <a:tcPr marL="54864" marR="54864" marT="54864" marB="54864" anchor="mid">
                     <a:lnL w="6350" cap="flat" cmpd="sng" algn="ctr">
                       <a:solidFill>
-                        <a:srgbClr val="D9D9D9"/>
+                        <a:srgbClr val="C8D9C0"/>
                       </a:solidFill>
                       <a:prstDash val="solid"/>
                       <a:round/>
@@ -12025,7 +12058,7 @@
                     </a:lnL>
                     <a:lnR w="6350" cap="flat" cmpd="sng" algn="ctr">
                       <a:solidFill>
-                        <a:srgbClr val="D9D9D9"/>
+                        <a:srgbClr val="C8D9C0"/>
                       </a:solidFill>
                       <a:prstDash val="solid"/>
                       <a:round/>
@@ -12034,7 +12067,7 @@
                     </a:lnR>
                     <a:lnT w="6350" cap="flat" cmpd="sng" algn="ctr">
                       <a:solidFill>
-                        <a:srgbClr val="D9D9D9"/>
+                        <a:srgbClr val="C8D9C0"/>
                       </a:solidFill>
                       <a:prstDash val="solid"/>
                       <a:round/>
@@ -12043,7 +12076,7 @@
                     </a:lnT>
                     <a:lnB w="6350" cap="flat" cmpd="sng" algn="ctr">
                       <a:solidFill>
-                        <a:srgbClr val="D9D9D9"/>
+                        <a:srgbClr val="C8D9C0"/>
                       </a:solidFill>
                       <a:prstDash val="solid"/>
                       <a:round/>
@@ -12051,7 +12084,7 @@
                       <a:tailEnd type="none" w="med" len="med"/>
                     </a:lnB>
                     <a:solidFill>
-                      <a:srgbClr val="FFFFFF"/>
+                      <a:srgbClr val="F0F5EA"/>
                     </a:solidFill>
                   </a:tcPr>
                 </a:tc>
@@ -12066,7 +12099,7 @@
                       <a:r>
                         <a:rPr lang="en-US" sz="1050" dirty="0">
                           <a:solidFill>
-                            <a:srgbClr val="B0B0B0"/>
+                            <a:srgbClr val="8FAE8B"/>
                           </a:solidFill>
                           <a:latin typeface="Arial" pitchFamily="34" charset="0"/>
                           <a:ea typeface="Arial" pitchFamily="34" charset="-122"/>
@@ -12084,7 +12117,7 @@
                   <a:tcPr marL="54864" marR="54864" marT="54864" marB="54864" anchor="mid">
                     <a:lnL w="6350" cap="flat" cmpd="sng" algn="ctr">
                       <a:solidFill>
-                        <a:srgbClr val="D9D9D9"/>
+                        <a:srgbClr val="C8D9C0"/>
                       </a:solidFill>
                       <a:prstDash val="solid"/>
                       <a:round/>
@@ -12093,7 +12126,7 @@
                     </a:lnL>
                     <a:lnR w="6350" cap="flat" cmpd="sng" algn="ctr">
                       <a:solidFill>
-                        <a:srgbClr val="D9D9D9"/>
+                        <a:srgbClr val="C8D9C0"/>
                       </a:solidFill>
                       <a:prstDash val="solid"/>
                       <a:round/>
@@ -12102,7 +12135,7 @@
                     </a:lnR>
                     <a:lnT w="6350" cap="flat" cmpd="sng" algn="ctr">
                       <a:solidFill>
-                        <a:srgbClr val="D9D9D9"/>
+                        <a:srgbClr val="C8D9C0"/>
                       </a:solidFill>
                       <a:prstDash val="solid"/>
                       <a:round/>
@@ -12111,7 +12144,7 @@
                     </a:lnT>
                     <a:lnB w="6350" cap="flat" cmpd="sng" algn="ctr">
                       <a:solidFill>
-                        <a:srgbClr val="D9D9D9"/>
+                        <a:srgbClr val="C8D9C0"/>
                       </a:solidFill>
                       <a:prstDash val="solid"/>
                       <a:round/>
@@ -12119,7 +12152,7 @@
                       <a:tailEnd type="none" w="med" len="med"/>
                     </a:lnB>
                     <a:solidFill>
-                      <a:srgbClr val="FFFFFF"/>
+                      <a:srgbClr val="F0F5EA"/>
                     </a:solidFill>
                   </a:tcPr>
                 </a:tc>
@@ -12136,7 +12169,7 @@
                       <a:r>
                         <a:rPr lang="en-US" sz="1050" b="1" dirty="0">
                           <a:solidFill>
-                            <a:srgbClr val="0A0A0A"/>
+                            <a:srgbClr val="2C5F2D"/>
                           </a:solidFill>
                           <a:latin typeface="Arial" pitchFamily="34" charset="0"/>
                           <a:ea typeface="Arial" pitchFamily="34" charset="-122"/>
@@ -12154,7 +12187,7 @@
                   <a:tcPr marL="54864" marR="54864" marT="54864" marB="54864" anchor="mid">
                     <a:lnL w="6350" cap="flat" cmpd="sng" algn="ctr">
                       <a:solidFill>
-                        <a:srgbClr val="D9D9D9"/>
+                        <a:srgbClr val="C8D9C0"/>
                       </a:solidFill>
                       <a:prstDash val="solid"/>
                       <a:round/>
@@ -12163,7 +12196,7 @@
                     </a:lnL>
                     <a:lnR w="6350" cap="flat" cmpd="sng" algn="ctr">
                       <a:solidFill>
-                        <a:srgbClr val="D9D9D9"/>
+                        <a:srgbClr val="C8D9C0"/>
                       </a:solidFill>
                       <a:prstDash val="solid"/>
                       <a:round/>
@@ -12172,7 +12205,7 @@
                     </a:lnR>
                     <a:lnT w="6350" cap="flat" cmpd="sng" algn="ctr">
                       <a:solidFill>
-                        <a:srgbClr val="D9D9D9"/>
+                        <a:srgbClr val="C8D9C0"/>
                       </a:solidFill>
                       <a:prstDash val="solid"/>
                       <a:round/>
@@ -12181,7 +12214,7 @@
                     </a:lnT>
                     <a:lnB w="6350" cap="flat" cmpd="sng" algn="ctr">
                       <a:solidFill>
-                        <a:srgbClr val="D9D9D9"/>
+                        <a:srgbClr val="C8D9C0"/>
                       </a:solidFill>
                       <a:prstDash val="solid"/>
                       <a:round/>
@@ -12189,7 +12222,7 @@
                       <a:tailEnd type="none" w="med" len="med"/>
                     </a:lnB>
                     <a:solidFill>
-                      <a:srgbClr val="F7F7F7"/>
+                      <a:srgbClr val="F4F9EF"/>
                     </a:solidFill>
                   </a:tcPr>
                 </a:tc>
@@ -12204,7 +12237,7 @@
                       <a:r>
                         <a:rPr lang="en-US" sz="1050" dirty="0">
                           <a:solidFill>
-                            <a:srgbClr val="6E6E6E"/>
+                            <a:srgbClr val="5A6B5A"/>
                           </a:solidFill>
                           <a:latin typeface="Arial" pitchFamily="34" charset="0"/>
                           <a:ea typeface="Arial" pitchFamily="34" charset="-122"/>
@@ -12222,7 +12255,7 @@
                   <a:tcPr marL="54864" marR="54864" marT="54864" marB="54864" anchor="mid">
                     <a:lnL w="6350" cap="flat" cmpd="sng" algn="ctr">
                       <a:solidFill>
-                        <a:srgbClr val="D9D9D9"/>
+                        <a:srgbClr val="C8D9C0"/>
                       </a:solidFill>
                       <a:prstDash val="solid"/>
                       <a:round/>
@@ -12231,7 +12264,7 @@
                     </a:lnL>
                     <a:lnR w="6350" cap="flat" cmpd="sng" algn="ctr">
                       <a:solidFill>
-                        <a:srgbClr val="D9D9D9"/>
+                        <a:srgbClr val="C8D9C0"/>
                       </a:solidFill>
                       <a:prstDash val="solid"/>
                       <a:round/>
@@ -12240,7 +12273,7 @@
                     </a:lnR>
                     <a:lnT w="6350" cap="flat" cmpd="sng" algn="ctr">
                       <a:solidFill>
-                        <a:srgbClr val="D9D9D9"/>
+                        <a:srgbClr val="C8D9C0"/>
                       </a:solidFill>
                       <a:prstDash val="solid"/>
                       <a:round/>
@@ -12249,7 +12282,7 @@
                     </a:lnT>
                     <a:lnB w="6350" cap="flat" cmpd="sng" algn="ctr">
                       <a:solidFill>
-                        <a:srgbClr val="D9D9D9"/>
+                        <a:srgbClr val="C8D9C0"/>
                       </a:solidFill>
                       <a:prstDash val="solid"/>
                       <a:round/>
@@ -12257,7 +12290,7 @@
                       <a:tailEnd type="none" w="med" len="med"/>
                     </a:lnB>
                     <a:solidFill>
-                      <a:srgbClr val="F7F7F7"/>
+                      <a:srgbClr val="F4F9EF"/>
                     </a:solidFill>
                   </a:tcPr>
                 </a:tc>
@@ -12272,7 +12305,7 @@
                       <a:r>
                         <a:rPr lang="en-US" sz="1050" dirty="0">
                           <a:solidFill>
-                            <a:srgbClr val="B0B0B0"/>
+                            <a:srgbClr val="8FAE8B"/>
                           </a:solidFill>
                           <a:latin typeface="Arial" pitchFamily="34" charset="0"/>
                           <a:ea typeface="Arial" pitchFamily="34" charset="-122"/>
@@ -12290,7 +12323,7 @@
                   <a:tcPr marL="54864" marR="54864" marT="54864" marB="54864" anchor="mid">
                     <a:lnL w="6350" cap="flat" cmpd="sng" algn="ctr">
                       <a:solidFill>
-                        <a:srgbClr val="D9D9D9"/>
+                        <a:srgbClr val="C8D9C0"/>
                       </a:solidFill>
                       <a:prstDash val="solid"/>
                       <a:round/>
@@ -12299,7 +12332,7 @@
                     </a:lnL>
                     <a:lnR w="6350" cap="flat" cmpd="sng" algn="ctr">
                       <a:solidFill>
-                        <a:srgbClr val="D9D9D9"/>
+                        <a:srgbClr val="C8D9C0"/>
                       </a:solidFill>
                       <a:prstDash val="solid"/>
                       <a:round/>
@@ -12308,7 +12341,7 @@
                     </a:lnR>
                     <a:lnT w="6350" cap="flat" cmpd="sng" algn="ctr">
                       <a:solidFill>
-                        <a:srgbClr val="D9D9D9"/>
+                        <a:srgbClr val="C8D9C0"/>
                       </a:solidFill>
                       <a:prstDash val="solid"/>
                       <a:round/>
@@ -12317,7 +12350,7 @@
                     </a:lnT>
                     <a:lnB w="6350" cap="flat" cmpd="sng" algn="ctr">
                       <a:solidFill>
-                        <a:srgbClr val="D9D9D9"/>
+                        <a:srgbClr val="C8D9C0"/>
                       </a:solidFill>
                       <a:prstDash val="solid"/>
                       <a:round/>
@@ -12325,7 +12358,7 @@
                       <a:tailEnd type="none" w="med" len="med"/>
                     </a:lnB>
                     <a:solidFill>
-                      <a:srgbClr val="F7F7F7"/>
+                      <a:srgbClr val="F4F9EF"/>
                     </a:solidFill>
                   </a:tcPr>
                 </a:tc>
@@ -12342,7 +12375,7 @@
                       <a:r>
                         <a:rPr lang="en-US" sz="1050" b="1" dirty="0">
                           <a:solidFill>
-                            <a:srgbClr val="0A0A0A"/>
+                            <a:srgbClr val="2C5F2D"/>
                           </a:solidFill>
                           <a:latin typeface="Arial" pitchFamily="34" charset="0"/>
                           <a:ea typeface="Arial" pitchFamily="34" charset="-122"/>
@@ -12360,7 +12393,7 @@
                   <a:tcPr marL="54864" marR="54864" marT="54864" marB="54864" anchor="mid">
                     <a:lnL w="6350" cap="flat" cmpd="sng" algn="ctr">
                       <a:solidFill>
-                        <a:srgbClr val="D9D9D9"/>
+                        <a:srgbClr val="C8D9C0"/>
                       </a:solidFill>
                       <a:prstDash val="solid"/>
                       <a:round/>
@@ -12369,7 +12402,7 @@
                     </a:lnL>
                     <a:lnR w="6350" cap="flat" cmpd="sng" algn="ctr">
                       <a:solidFill>
-                        <a:srgbClr val="D9D9D9"/>
+                        <a:srgbClr val="C8D9C0"/>
                       </a:solidFill>
                       <a:prstDash val="solid"/>
                       <a:round/>
@@ -12378,7 +12411,7 @@
                     </a:lnR>
                     <a:lnT w="6350" cap="flat" cmpd="sng" algn="ctr">
                       <a:solidFill>
-                        <a:srgbClr val="D9D9D9"/>
+                        <a:srgbClr val="C8D9C0"/>
                       </a:solidFill>
                       <a:prstDash val="solid"/>
                       <a:round/>
@@ -12387,7 +12420,7 @@
                     </a:lnT>
                     <a:lnB w="6350" cap="flat" cmpd="sng" algn="ctr">
                       <a:solidFill>
-                        <a:srgbClr val="D9D9D9"/>
+                        <a:srgbClr val="C8D9C0"/>
                       </a:solidFill>
                       <a:prstDash val="solid"/>
                       <a:round/>
@@ -12395,7 +12428,7 @@
                       <a:tailEnd type="none" w="med" len="med"/>
                     </a:lnB>
                     <a:solidFill>
-                      <a:srgbClr val="FFFFFF"/>
+                      <a:srgbClr val="F0F5EA"/>
                     </a:solidFill>
                   </a:tcPr>
                 </a:tc>
@@ -12410,7 +12443,7 @@
                       <a:r>
                         <a:rPr lang="en-US" sz="1050" dirty="0">
                           <a:solidFill>
-                            <a:srgbClr val="6E6E6E"/>
+                            <a:srgbClr val="5A6B5A"/>
                           </a:solidFill>
                           <a:latin typeface="Arial" pitchFamily="34" charset="0"/>
                           <a:ea typeface="Arial" pitchFamily="34" charset="-122"/>
@@ -12428,7 +12461,7 @@
                   <a:tcPr marL="54864" marR="54864" marT="54864" marB="54864" anchor="mid">
                     <a:lnL w="6350" cap="flat" cmpd="sng" algn="ctr">
                       <a:solidFill>
-                        <a:srgbClr val="D9D9D9"/>
+                        <a:srgbClr val="C8D9C0"/>
                       </a:solidFill>
                       <a:prstDash val="solid"/>
                       <a:round/>
@@ -12437,7 +12470,7 @@
                     </a:lnL>
                     <a:lnR w="6350" cap="flat" cmpd="sng" algn="ctr">
                       <a:solidFill>
-                        <a:srgbClr val="D9D9D9"/>
+                        <a:srgbClr val="C8D9C0"/>
                       </a:solidFill>
                       <a:prstDash val="solid"/>
                       <a:round/>
@@ -12446,7 +12479,7 @@
                     </a:lnR>
                     <a:lnT w="6350" cap="flat" cmpd="sng" algn="ctr">
                       <a:solidFill>
-                        <a:srgbClr val="D9D9D9"/>
+                        <a:srgbClr val="C8D9C0"/>
                       </a:solidFill>
                       <a:prstDash val="solid"/>
                       <a:round/>
@@ -12455,7 +12488,7 @@
                     </a:lnT>
                     <a:lnB w="6350" cap="flat" cmpd="sng" algn="ctr">
                       <a:solidFill>
-                        <a:srgbClr val="D9D9D9"/>
+                        <a:srgbClr val="C8D9C0"/>
                       </a:solidFill>
                       <a:prstDash val="solid"/>
                       <a:round/>
@@ -12463,7 +12496,7 @@
                       <a:tailEnd type="none" w="med" len="med"/>
                     </a:lnB>
                     <a:solidFill>
-                      <a:srgbClr val="FFFFFF"/>
+                      <a:srgbClr val="F0F5EA"/>
                     </a:solidFill>
                   </a:tcPr>
                 </a:tc>
@@ -12478,7 +12511,7 @@
                       <a:r>
                         <a:rPr lang="en-US" sz="1050" dirty="0">
                           <a:solidFill>
-                            <a:srgbClr val="B0B0B0"/>
+                            <a:srgbClr val="8FAE8B"/>
                           </a:solidFill>
                           <a:latin typeface="Arial" pitchFamily="34" charset="0"/>
                           <a:ea typeface="Arial" pitchFamily="34" charset="-122"/>
@@ -12496,7 +12529,7 @@
                   <a:tcPr marL="54864" marR="54864" marT="54864" marB="54864" anchor="mid">
                     <a:lnL w="6350" cap="flat" cmpd="sng" algn="ctr">
                       <a:solidFill>
-                        <a:srgbClr val="D9D9D9"/>
+                        <a:srgbClr val="C8D9C0"/>
                       </a:solidFill>
                       <a:prstDash val="solid"/>
                       <a:round/>
@@ -12505,7 +12538,7 @@
                     </a:lnL>
                     <a:lnR w="6350" cap="flat" cmpd="sng" algn="ctr">
                       <a:solidFill>
-                        <a:srgbClr val="D9D9D9"/>
+                        <a:srgbClr val="C8D9C0"/>
                       </a:solidFill>
                       <a:prstDash val="solid"/>
                       <a:round/>
@@ -12514,7 +12547,7 @@
                     </a:lnR>
                     <a:lnT w="6350" cap="flat" cmpd="sng" algn="ctr">
                       <a:solidFill>
-                        <a:srgbClr val="D9D9D9"/>
+                        <a:srgbClr val="C8D9C0"/>
                       </a:solidFill>
                       <a:prstDash val="solid"/>
                       <a:round/>
@@ -12523,7 +12556,7 @@
                     </a:lnT>
                     <a:lnB w="6350" cap="flat" cmpd="sng" algn="ctr">
                       <a:solidFill>
-                        <a:srgbClr val="D9D9D9"/>
+                        <a:srgbClr val="C8D9C0"/>
                       </a:solidFill>
                       <a:prstDash val="solid"/>
                       <a:round/>
@@ -12531,7 +12564,7 @@
                       <a:tailEnd type="none" w="med" len="med"/>
                     </a:lnB>
                     <a:solidFill>
-                      <a:srgbClr val="FFFFFF"/>
+                      <a:srgbClr val="F0F5EA"/>
                     </a:solidFill>
                   </a:tcPr>
                 </a:tc>
@@ -12567,7 +12600,7 @@
             <a:r>
               <a:rPr lang="en-US" sz="1500" b="1" dirty="0">
                 <a:solidFill>
-                  <a:srgbClr val="E0E0E0"/>
+                  <a:srgbClr val="D8E8C8"/>
                 </a:solidFill>
                 <a:latin typeface="Arial Black" pitchFamily="34" charset="0"/>
                 <a:ea typeface="Arial Black" pitchFamily="34" charset="-122"/>
@@ -12613,7 +12646,7 @@
             <a:r>
               <a:rPr lang="en-US" sz="1500" b="1" dirty="0">
                 <a:solidFill>
-                  <a:srgbClr val="0A0A0A"/>
+                  <a:srgbClr val="2C5F2D"/>
                 </a:solidFill>
                 <a:latin typeface="Arial Black" pitchFamily="34" charset="0"/>
                 <a:ea typeface="Arial Black" pitchFamily="34" charset="-122"/>
@@ -12652,7 +12685,7 @@
             <a:r>
               <a:rPr lang="en-US" sz="850" dirty="0">
                 <a:solidFill>
-                  <a:srgbClr val="6E6E6E"/>
+                  <a:srgbClr val="5A6B5A"/>
                 </a:solidFill>
                 <a:latin typeface="Arial" pitchFamily="34" charset="0"/>
                 <a:ea typeface="Arial" pitchFamily="34" charset="-122"/>
@@ -12669,6 +12702,9 @@
   <p:clrMapOvr>
     <a:masterClrMapping/>
   </p:clrMapOvr>
+  <p:transition spd="med">
+    <p:fade/>
+  </p:transition>
 </p:sld>
 </file>
 
@@ -12678,7 +12714,7 @@
     <p:bg>
       <p:bgPr>
         <a:solidFill>
-          <a:srgbClr val="0A0A0A"/>
+          <a:srgbClr val="1F3D26"/>
         </a:solidFill>
       </p:bgPr>
     </p:bg>
@@ -12723,7 +12759,7 @@
             <a:r>
               <a:rPr lang="en-US" sz="2800" b="1" dirty="0">
                 <a:solidFill>
-                  <a:srgbClr val="2A2A2A"/>
+                  <a:srgbClr val="142B1A"/>
                 </a:solidFill>
                 <a:latin typeface="Arial Black" pitchFamily="34" charset="0"/>
                 <a:ea typeface="Arial Black" pitchFamily="34" charset="-122"/>
@@ -12762,7 +12798,7 @@
             <a:r>
               <a:rPr lang="en-US" sz="2800" b="1" dirty="0">
                 <a:solidFill>
-                  <a:srgbClr val="FFFFFF"/>
+                  <a:srgbClr val="F0F5EA"/>
                 </a:solidFill>
                 <a:latin typeface="Arial Black" pitchFamily="34" charset="0"/>
                 <a:ea typeface="Arial Black" pitchFamily="34" charset="-122"/>
@@ -12789,11 +12825,11 @@
             <a:avLst/>
           </a:prstGeom>
           <a:solidFill>
-            <a:srgbClr val="FF5A1F"/>
+            <a:srgbClr val="97BC62"/>
           </a:solidFill>
           <a:ln w="12700">
             <a:solidFill>
-              <a:srgbClr val="FF5A1F"/>
+              <a:srgbClr val="97BC62"/>
             </a:solidFill>
             <a:prstDash val="solid"/>
           </a:ln>
@@ -12826,7 +12862,7 @@
             <a:r>
               <a:rPr lang="en-US" sz="1150" dirty="0">
                 <a:solidFill>
-                  <a:srgbClr val="B0B0B0"/>
+                  <a:srgbClr val="8FAE8B"/>
                 </a:solidFill>
                 <a:latin typeface="Arial" pitchFamily="34" charset="0"/>
                 <a:ea typeface="Arial" pitchFamily="34" charset="-122"/>
@@ -12853,11 +12889,11 @@
             <a:avLst/>
           </a:prstGeom>
           <a:solidFill>
-            <a:srgbClr val="2A2A2A"/>
+            <a:srgbClr val="142B1A"/>
           </a:solidFill>
           <a:ln w="12700">
             <a:solidFill>
-              <a:srgbClr val="2A2A2A"/>
+              <a:srgbClr val="142B1A"/>
             </a:solidFill>
             <a:prstDash val="solid"/>
           </a:ln>
@@ -12878,11 +12914,11 @@
             <a:avLst/>
           </a:prstGeom>
           <a:solidFill>
-            <a:srgbClr val="555555"/>
+            <a:srgbClr val="3E5C42"/>
           </a:solidFill>
           <a:ln w="12700">
             <a:solidFill>
-              <a:srgbClr val="555555"/>
+              <a:srgbClr val="3E5C42"/>
             </a:solidFill>
             <a:prstDash val="solid"/>
           </a:ln>
@@ -12905,11 +12941,11 @@
             </a:avLst>
           </a:prstGeom>
           <a:solidFill>
-            <a:srgbClr val="161616"/>
+            <a:srgbClr val="2A4A33"/>
           </a:solidFill>
           <a:ln w="12700">
             <a:solidFill>
-              <a:srgbClr val="2A2A2A"/>
+              <a:srgbClr val="142B1A"/>
             </a:solidFill>
             <a:prstDash val="solid"/>
           </a:ln>
@@ -12942,7 +12978,7 @@
             <a:r>
               <a:rPr lang="en-US" sz="1500" b="1" dirty="0">
                 <a:solidFill>
-                  <a:srgbClr val="FFFFFF"/>
+                  <a:srgbClr val="F0F5EA"/>
                 </a:solidFill>
                 <a:latin typeface="Arial Black" pitchFamily="34" charset="0"/>
                 <a:ea typeface="Arial Black" pitchFamily="34" charset="-122"/>
@@ -12981,7 +13017,7 @@
             <a:r>
               <a:rPr lang="en-US" sz="800" dirty="0">
                 <a:solidFill>
-                  <a:srgbClr val="B0B0B0"/>
+                  <a:srgbClr val="8FAE8B"/>
                 </a:solidFill>
                 <a:latin typeface="Arial" pitchFamily="34" charset="0"/>
                 <a:ea typeface="Arial" pitchFamily="34" charset="-122"/>
@@ -13020,7 +13056,7 @@
             <a:r>
               <a:rPr lang="en-US" sz="650" dirty="0">
                 <a:solidFill>
-                  <a:srgbClr val="8A8A8A"/>
+                  <a:srgbClr val="8FAE8B"/>
                 </a:solidFill>
                 <a:latin typeface="Arial" pitchFamily="34" charset="0"/>
                 <a:ea typeface="Arial" pitchFamily="34" charset="-122"/>
@@ -13047,11 +13083,11 @@
             <a:avLst/>
           </a:prstGeom>
           <a:solidFill>
-            <a:srgbClr val="2A2A2A"/>
+            <a:srgbClr val="142B1A"/>
           </a:solidFill>
           <a:ln w="12700">
             <a:solidFill>
-              <a:srgbClr val="2A2A2A"/>
+              <a:srgbClr val="142B1A"/>
             </a:solidFill>
             <a:prstDash val="solid"/>
           </a:ln>
@@ -13072,11 +13108,11 @@
             <a:avLst/>
           </a:prstGeom>
           <a:solidFill>
-            <a:srgbClr val="555555"/>
+            <a:srgbClr val="3E5C42"/>
           </a:solidFill>
           <a:ln w="12700">
             <a:solidFill>
-              <a:srgbClr val="555555"/>
+              <a:srgbClr val="3E5C42"/>
             </a:solidFill>
             <a:prstDash val="solid"/>
           </a:ln>
@@ -13099,11 +13135,11 @@
             </a:avLst>
           </a:prstGeom>
           <a:solidFill>
-            <a:srgbClr val="161616"/>
+            <a:srgbClr val="2A4A33"/>
           </a:solidFill>
           <a:ln w="12700">
             <a:solidFill>
-              <a:srgbClr val="2A2A2A"/>
+              <a:srgbClr val="142B1A"/>
             </a:solidFill>
             <a:prstDash val="solid"/>
           </a:ln>
@@ -13136,7 +13172,7 @@
             <a:r>
               <a:rPr lang="en-US" sz="1500" b="1" dirty="0">
                 <a:solidFill>
-                  <a:srgbClr val="FFFFFF"/>
+                  <a:srgbClr val="F0F5EA"/>
                 </a:solidFill>
                 <a:latin typeface="Arial Black" pitchFamily="34" charset="0"/>
                 <a:ea typeface="Arial Black" pitchFamily="34" charset="-122"/>
@@ -13175,7 +13211,7 @@
             <a:r>
               <a:rPr lang="en-US" sz="800" dirty="0">
                 <a:solidFill>
-                  <a:srgbClr val="B0B0B0"/>
+                  <a:srgbClr val="8FAE8B"/>
                 </a:solidFill>
                 <a:latin typeface="Arial" pitchFamily="34" charset="0"/>
                 <a:ea typeface="Arial" pitchFamily="34" charset="-122"/>
@@ -13214,7 +13250,7 @@
             <a:r>
               <a:rPr lang="en-US" sz="650" dirty="0">
                 <a:solidFill>
-                  <a:srgbClr val="8A8A8A"/>
+                  <a:srgbClr val="8FAE8B"/>
                 </a:solidFill>
                 <a:latin typeface="Arial" pitchFamily="34" charset="0"/>
                 <a:ea typeface="Arial" pitchFamily="34" charset="-122"/>
@@ -13241,11 +13277,11 @@
             <a:avLst/>
           </a:prstGeom>
           <a:solidFill>
-            <a:srgbClr val="2A2A2A"/>
+            <a:srgbClr val="142B1A"/>
           </a:solidFill>
           <a:ln w="12700">
             <a:solidFill>
-              <a:srgbClr val="2A2A2A"/>
+              <a:srgbClr val="142B1A"/>
             </a:solidFill>
             <a:prstDash val="solid"/>
           </a:ln>
@@ -13266,11 +13302,11 @@
             <a:avLst/>
           </a:prstGeom>
           <a:solidFill>
-            <a:srgbClr val="555555"/>
+            <a:srgbClr val="3E5C42"/>
           </a:solidFill>
           <a:ln w="12700">
             <a:solidFill>
-              <a:srgbClr val="555555"/>
+              <a:srgbClr val="3E5C42"/>
             </a:solidFill>
             <a:prstDash val="solid"/>
           </a:ln>
@@ -13293,11 +13329,11 @@
             </a:avLst>
           </a:prstGeom>
           <a:solidFill>
-            <a:srgbClr val="161616"/>
+            <a:srgbClr val="2A4A33"/>
           </a:solidFill>
           <a:ln w="12700">
             <a:solidFill>
-              <a:srgbClr val="2A2A2A"/>
+              <a:srgbClr val="142B1A"/>
             </a:solidFill>
             <a:prstDash val="solid"/>
           </a:ln>
@@ -13330,7 +13366,7 @@
             <a:r>
               <a:rPr lang="en-US" sz="1500" b="1" dirty="0">
                 <a:solidFill>
-                  <a:srgbClr val="FFFFFF"/>
+                  <a:srgbClr val="F0F5EA"/>
                 </a:solidFill>
                 <a:latin typeface="Arial Black" pitchFamily="34" charset="0"/>
                 <a:ea typeface="Arial Black" pitchFamily="34" charset="-122"/>
@@ -13369,7 +13405,7 @@
             <a:r>
               <a:rPr lang="en-US" sz="800" dirty="0">
                 <a:solidFill>
-                  <a:srgbClr val="B0B0B0"/>
+                  <a:srgbClr val="8FAE8B"/>
                 </a:solidFill>
                 <a:latin typeface="Arial" pitchFamily="34" charset="0"/>
                 <a:ea typeface="Arial" pitchFamily="34" charset="-122"/>
@@ -13408,7 +13444,7 @@
             <a:r>
               <a:rPr lang="en-US" sz="650" dirty="0">
                 <a:solidFill>
-                  <a:srgbClr val="8A8A8A"/>
+                  <a:srgbClr val="8FAE8B"/>
                 </a:solidFill>
                 <a:latin typeface="Arial" pitchFamily="34" charset="0"/>
                 <a:ea typeface="Arial" pitchFamily="34" charset="-122"/>
@@ -13435,11 +13471,11 @@
             <a:avLst/>
           </a:prstGeom>
           <a:solidFill>
-            <a:srgbClr val="2A2A2A"/>
+            <a:srgbClr val="142B1A"/>
           </a:solidFill>
           <a:ln w="12700">
             <a:solidFill>
-              <a:srgbClr val="2A2A2A"/>
+              <a:srgbClr val="142B1A"/>
             </a:solidFill>
             <a:prstDash val="solid"/>
           </a:ln>
@@ -13460,11 +13496,11 @@
             <a:avLst/>
           </a:prstGeom>
           <a:solidFill>
-            <a:srgbClr val="555555"/>
+            <a:srgbClr val="3E5C42"/>
           </a:solidFill>
           <a:ln w="12700">
             <a:solidFill>
-              <a:srgbClr val="555555"/>
+              <a:srgbClr val="3E5C42"/>
             </a:solidFill>
             <a:prstDash val="solid"/>
           </a:ln>
@@ -13487,11 +13523,11 @@
             </a:avLst>
           </a:prstGeom>
           <a:solidFill>
-            <a:srgbClr val="161616"/>
+            <a:srgbClr val="2A4A33"/>
           </a:solidFill>
           <a:ln w="12700">
             <a:solidFill>
-              <a:srgbClr val="2A2A2A"/>
+              <a:srgbClr val="142B1A"/>
             </a:solidFill>
             <a:prstDash val="solid"/>
           </a:ln>
@@ -13524,7 +13560,7 @@
             <a:r>
               <a:rPr lang="en-US" sz="1500" b="1" dirty="0">
                 <a:solidFill>
-                  <a:srgbClr val="FFFFFF"/>
+                  <a:srgbClr val="F0F5EA"/>
                 </a:solidFill>
                 <a:latin typeface="Arial Black" pitchFamily="34" charset="0"/>
                 <a:ea typeface="Arial Black" pitchFamily="34" charset="-122"/>
@@ -13563,7 +13599,7 @@
             <a:r>
               <a:rPr lang="en-US" sz="800" dirty="0">
                 <a:solidFill>
-                  <a:srgbClr val="B0B0B0"/>
+                  <a:srgbClr val="8FAE8B"/>
                 </a:solidFill>
                 <a:latin typeface="Arial" pitchFamily="34" charset="0"/>
                 <a:ea typeface="Arial" pitchFamily="34" charset="-122"/>
@@ -13602,7 +13638,7 @@
             <a:r>
               <a:rPr lang="en-US" sz="650" dirty="0">
                 <a:solidFill>
-                  <a:srgbClr val="8A8A8A"/>
+                  <a:srgbClr val="8FAE8B"/>
                 </a:solidFill>
                 <a:latin typeface="Arial" pitchFamily="34" charset="0"/>
                 <a:ea typeface="Arial" pitchFamily="34" charset="-122"/>
@@ -13641,7 +13677,7 @@
             <a:r>
               <a:rPr lang="en-US" sz="850" dirty="0">
                 <a:solidFill>
-                  <a:srgbClr val="B0B0B0"/>
+                  <a:srgbClr val="8FAE8B"/>
                 </a:solidFill>
                 <a:latin typeface="Arial" pitchFamily="34" charset="0"/>
                 <a:ea typeface="Arial" pitchFamily="34" charset="-122"/>
@@ -13658,6 +13694,9 @@
   <p:clrMapOvr>
     <a:masterClrMapping/>
   </p:clrMapOvr>
+  <p:transition spd="med">
+    <p:fade/>
+  </p:transition>
 </p:sld>
 </file>
 

--- a/scaffold/deck/KrishiSetu-Round0-20260816.pptx
+++ b/scaffold/deck/KrishiSetu-Round0-20260816.pptx
@@ -2168,9 +2168,6 @@
   <p:clrMapOvr>
     <a:masterClrMapping/>
   </p:clrMapOvr>
-  <p:transition spd="med">
-    <p:fade/>
-  </p:transition>
 </p:sld>
 </file>
 
@@ -2973,9 +2970,6 @@
   <p:clrMapOvr>
     <a:masterClrMapping/>
   </p:clrMapOvr>
-  <p:transition spd="med">
-    <p:fade/>
-  </p:transition>
 </p:sld>
 </file>
 
@@ -3697,9 +3691,6 @@
   <p:clrMapOvr>
     <a:masterClrMapping/>
   </p:clrMapOvr>
-  <p:transition spd="med">
-    <p:fade/>
-  </p:transition>
 </p:sld>
 </file>
 
@@ -4604,9 +4595,6 @@
   <p:clrMapOvr>
     <a:masterClrMapping/>
   </p:clrMapOvr>
-  <p:transition spd="med">
-    <p:fade/>
-  </p:transition>
 </p:sld>
 </file>
 
@@ -4911,9 +4899,6 @@
   <p:clrMapOvr>
     <a:masterClrMapping/>
   </p:clrMapOvr>
-  <p:transition spd="med">
-    <p:fade/>
-  </p:transition>
 </p:sld>
 </file>
 
@@ -5836,9 +5821,6 @@
   <p:clrMapOvr>
     <a:masterClrMapping/>
   </p:clrMapOvr>
-  <p:transition spd="med">
-    <p:fade/>
-  </p:transition>
 </p:sld>
 </file>
 
@@ -6828,9 +6810,6 @@
   <p:clrMapOvr>
     <a:masterClrMapping/>
   </p:clrMapOvr>
-  <p:transition spd="med">
-    <p:fade/>
-  </p:transition>
 </p:sld>
 </file>
 
@@ -7664,9 +7643,6 @@
   <p:clrMapOvr>
     <a:masterClrMapping/>
   </p:clrMapOvr>
-  <p:transition spd="med">
-    <p:fade/>
-  </p:transition>
 </p:sld>
 </file>
 
@@ -8682,9 +8658,6 @@
   <p:clrMapOvr>
     <a:masterClrMapping/>
   </p:clrMapOvr>
-  <p:transition spd="med">
-    <p:fade/>
-  </p:transition>
 </p:sld>
 </file>
 
@@ -9934,9 +9907,6 @@
   <p:clrMapOvr>
     <a:masterClrMapping/>
   </p:clrMapOvr>
-  <p:transition spd="med">
-    <p:fade/>
-  </p:transition>
 </p:sld>
 </file>
 
@@ -11203,9 +11173,6 @@
   <p:clrMapOvr>
     <a:masterClrMapping/>
   </p:clrMapOvr>
-  <p:transition spd="med">
-    <p:fade/>
-  </p:transition>
 </p:sld>
 </file>
 
@@ -12702,9 +12669,6 @@
   <p:clrMapOvr>
     <a:masterClrMapping/>
   </p:clrMapOvr>
-  <p:transition spd="med">
-    <p:fade/>
-  </p:transition>
 </p:sld>
 </file>
 
@@ -13694,9 +13658,6 @@
   <p:clrMapOvr>
     <a:masterClrMapping/>
   </p:clrMapOvr>
-  <p:transition spd="med">
-    <p:fade/>
-  </p:transition>
 </p:sld>
 </file>
 
